--- a/reference/archie/presentations/NPQG Fundamentals - Paths.pptx
+++ b/reference/archie/presentations/NPQG Fundamentals - Paths.pptx
@@ -6,7 +6,7 @@
     <p:sldMasterId id="2147483664" r:id="rId2"/>
   </p:sldMasterIdLst>
   <p:notesMasterIdLst>
-    <p:notesMasterId r:id="rId23"/>
+    <p:notesMasterId r:id="rId21"/>
   </p:notesMasterIdLst>
   <p:sldIdLst>
     <p:sldId id="890" r:id="rId3"/>
@@ -27,8 +27,6 @@
     <p:sldId id="885" r:id="rId18"/>
     <p:sldId id="886" r:id="rId19"/>
     <p:sldId id="887" r:id="rId20"/>
-    <p:sldId id="888" r:id="rId21"/>
-    <p:sldId id="853" r:id="rId22"/>
   </p:sldIdLst>
   <p:sldSz cx="12192000" cy="6858000"/>
   <p:notesSz cx="6858000" cy="9144000"/>
@@ -228,7 +226,7 @@
           <a:p>
             <a:fld id="{BBBDA440-6FDE-5E41-BA40-A3C0E02BAB9F}" type="datetimeFigureOut">
               <a:rPr lang="en-US" smtClean="0"/>
-              <a:t>11/27/24</a:t>
+              <a:t>7/3/26</a:t>
             </a:fld>
             <a:endParaRPr lang="en-US"/>
           </a:p>
@@ -814,7 +812,7 @@
                 <a:ea typeface="Helvetica Neue" panose="02000503000000020004" pitchFamily="2" charset="0"/>
                 <a:cs typeface="Helvetica Neue" panose="02000503000000020004" pitchFamily="2" charset="0"/>
               </a:rPr>
-              <a:t>Essentially every point potential is continuously riding on the wake emitted by every other point potential in the past.  </a:t>
+              <a:t>Essentially every architrino is continuously riding on the wake emitted by every other architrino in the past.  </a:t>
             </a:r>
             <a:br>
               <a:rPr lang="en-US" sz="9600" b="1" dirty="0">
@@ -829,7 +827,7 @@
                 <a:ea typeface="Helvetica Neue" panose="02000503000000020004" pitchFamily="2" charset="0"/>
                 <a:cs typeface="Helvetica Neue" panose="02000503000000020004" pitchFamily="2" charset="0"/>
               </a:rPr>
-              <a:t>They may also be riding on their own wake if v &gt; @. </a:t>
+              <a:t>They may also be riding on their own wake if v &gt; c_f. </a:t>
             </a:r>
             <a:br>
               <a:rPr lang="en-US" sz="9600" b="1" dirty="0">
@@ -844,7 +842,7 @@
                 <a:ea typeface="Helvetica Neue" panose="02000503000000020004" pitchFamily="2" charset="0"/>
                 <a:cs typeface="Helvetica Neue" panose="02000503000000020004" pitchFamily="2" charset="0"/>
               </a:rPr>
-              <a:t>For each partner that has operated at v&gt;@ a point potential may encounter multiple of their wakes or a continuous stretch of wake?  </a:t>
+              <a:t>For each partner that has operated at v&gt;c_f a architrino may encounter multiple of their wakes or a continuous stretch of wake?  </a:t>
             </a:r>
             <a:br>
               <a:rPr lang="en-US" sz="9600" b="1" dirty="0">
@@ -1285,7 +1283,7 @@
                 <a:effectLst/>
                 <a:latin typeface="Helvetica Neue" panose="02000503000000020004" pitchFamily="2" charset="0"/>
               </a:rPr>
-              <a:t>Let's start by looking at the influence that point charge A has on point charge B at time t.</a:t>
+              <a:t>Let's start by looking at the influence that point architrino A has on point architrino B at time t.</a:t>
             </a:r>
           </a:p>
           <a:p>
@@ -1302,7 +1300,7 @@
                 <a:effectLst/>
                 <a:latin typeface="Helvetica Neue" panose="02000503000000020004" pitchFamily="2" charset="0"/>
               </a:rPr>
-              <a:t>What we see is that at time t', point charge A has emitted potential that expands spherically and intersects point charge B at time t.</a:t>
+              <a:t>What we see is that at time t', point architrino A has emitted potential that expands spherically and intersects point architrino B at time t.</a:t>
             </a:r>
           </a:p>
           <a:p>
@@ -1503,7 +1501,7 @@
                 <a:effectLst/>
                 <a:latin typeface="Helvetica Neue" panose="02000503000000020004" pitchFamily="2" charset="0"/>
               </a:rPr>
-              <a:t>In our example, point charge A emitted a potential wave at time t' that resulted in action on point charge B at time t. That action influences B's path. Yet B is also continuously emitting potential. So when B's path changes that will be reflected in the potential wave it emits. This wave then results in action on point charge A when they intersect. This dynamical feedback is continuous between both point charges in our example, and in the universe between all point charges.  </a:t>
+              <a:t>In our example, point architrino A emitted a potential wave at time t' that resulted in action on point architrino B at time t. That action influences B's path. Yet B is also continuously emitting potential. So when B's path changes that will be reflected in the potential wave it emits. This wave then results in action on point architrino A when they intersect. This dynamical feedback is continuous between both point charges in our example, and in the universe between all point charges.  </a:t>
             </a:r>
           </a:p>
           <a:p>
@@ -3205,7 +3203,7 @@
                 <a:effectLst/>
                 <a:latin typeface="Helvetica Neue" panose="02000503000000020004" pitchFamily="2" charset="0"/>
               </a:rPr>
-              <a:t>Let's start by looking at the influence that point charge A has on point charge B at time t.</a:t>
+              <a:t>Let's start by looking at the influence that point architrino A has on point architrino B at time t.</a:t>
             </a:r>
           </a:p>
           <a:p>
@@ -3222,7 +3220,7 @@
                 <a:effectLst/>
                 <a:latin typeface="Helvetica Neue" panose="02000503000000020004" pitchFamily="2" charset="0"/>
               </a:rPr>
-              <a:t>What we see is that at time t', point charge A has emitted potential that expands spherically and intersects point charge B at time t.</a:t>
+              <a:t>What we see is that at time t', point architrino A has emitted potential that expands spherically and intersects point architrino B at time t.</a:t>
             </a:r>
           </a:p>
           <a:p>
@@ -3423,7 +3421,7 @@
                 <a:effectLst/>
                 <a:latin typeface="Helvetica Neue" panose="02000503000000020004" pitchFamily="2" charset="0"/>
               </a:rPr>
-              <a:t>In our example, point charge A emitted a potential wave at time t' that resulted in action on point charge B at time t. That action influences B's path. Yet B is also continuously emitting potential. So when B's path changes that will be reflected in the potential wave it emits. This wave then results in action on point charge A when they intersect. This dynamical feedback is continuous between both point charges in our example, and in the universe between all point charges.  </a:t>
+              <a:t>In our example, point architrino A emitted a potential wave at time t' that resulted in action on point architrino B at time t. That action influences B's path. Yet B is also continuously emitting potential. So when B's path changes that will be reflected in the potential wave it emits. This wave then results in action on point architrino A when they intersect. This dynamical feedback is continuous between both point charges in our example, and in the universe between all point charges.  </a:t>
             </a:r>
           </a:p>
           <a:p>
@@ -3751,7 +3749,7 @@
                 <a:ea typeface="Helvetica Neue" panose="02000503000000020004" pitchFamily="2" charset="0"/>
                 <a:cs typeface="Helvetica Neue" panose="02000503000000020004" pitchFamily="2" charset="0"/>
               </a:rPr>
-              <a:t>Essentially every point potential is continuously riding on the wake emitted by every other point potential in the past.  </a:t>
+              <a:t>Essentially every architrino is continuously riding on the wake emitted by every other architrino in the past.  </a:t>
             </a:r>
             <a:br>
               <a:rPr lang="en-US" sz="9600" b="1" dirty="0">
@@ -3766,7 +3764,7 @@
                 <a:ea typeface="Helvetica Neue" panose="02000503000000020004" pitchFamily="2" charset="0"/>
                 <a:cs typeface="Helvetica Neue" panose="02000503000000020004" pitchFamily="2" charset="0"/>
               </a:rPr>
-              <a:t>They may also be riding on their own wake if v &gt; @. </a:t>
+              <a:t>They may also be riding on their own wake if v &gt; c_f. </a:t>
             </a:r>
             <a:br>
               <a:rPr lang="en-US" sz="9600" b="1" dirty="0">
@@ -3781,7 +3779,7 @@
                 <a:ea typeface="Helvetica Neue" panose="02000503000000020004" pitchFamily="2" charset="0"/>
                 <a:cs typeface="Helvetica Neue" panose="02000503000000020004" pitchFamily="2" charset="0"/>
               </a:rPr>
-              <a:t>For each partner that has operated at v&gt;@ a point potential may encounter multiple of their wakes or a continuous stretch of wake?  </a:t>
+              <a:t>For each partner that has operated at v&gt;c_f a architrino may encounter multiple of their wakes or a continuous stretch of wake?  </a:t>
             </a:r>
             <a:br>
               <a:rPr lang="en-US" sz="9600" b="1" dirty="0">
@@ -4095,7 +4093,7 @@
           <a:p>
             <a:fld id="{CB70D3E6-D921-5B44-AC8D-B7FDAFC8A532}" type="datetimeFigureOut">
               <a:rPr lang="en-US" smtClean="0"/>
-              <a:t>11/27/24</a:t>
+              <a:t>7/3/26</a:t>
             </a:fld>
             <a:endParaRPr lang="en-US"/>
           </a:p>
@@ -4293,7 +4291,7 @@
           <a:p>
             <a:fld id="{CB70D3E6-D921-5B44-AC8D-B7FDAFC8A532}" type="datetimeFigureOut">
               <a:rPr lang="en-US" smtClean="0"/>
-              <a:t>11/27/24</a:t>
+              <a:t>7/3/26</a:t>
             </a:fld>
             <a:endParaRPr lang="en-US"/>
           </a:p>
@@ -4501,7 +4499,7 @@
           <a:p>
             <a:fld id="{CB70D3E6-D921-5B44-AC8D-B7FDAFC8A532}" type="datetimeFigureOut">
               <a:rPr lang="en-US" smtClean="0"/>
-              <a:t>11/27/24</a:t>
+              <a:t>7/3/26</a:t>
             </a:fld>
             <a:endParaRPr lang="en-US"/>
           </a:p>
@@ -4721,7 +4719,7 @@
           <a:p>
             <a:fld id="{B1CFC895-F8E0-4049-8BEE-E5499394E46C}" type="datetime1">
               <a:rPr lang="en-US" smtClean="0"/>
-              <a:t>11/27/24</a:t>
+              <a:t>7/3/26</a:t>
             </a:fld>
             <a:endParaRPr lang="en-US"/>
           </a:p>
@@ -4936,7 +4934,7 @@
           <a:p>
             <a:fld id="{A91F55E2-A889-F24B-B1FE-1E878178F308}" type="datetime1">
               <a:rPr lang="en-US" smtClean="0"/>
-              <a:t>11/27/24</a:t>
+              <a:t>7/3/26</a:t>
             </a:fld>
             <a:endParaRPr lang="en-US"/>
           </a:p>
@@ -5085,7 +5083,7 @@
           <a:p>
             <a:fld id="{C6E8461C-3391-334C-9885-001B32D724C4}" type="datetime1">
               <a:rPr lang="en-US" smtClean="0"/>
-              <a:t>11/27/24</a:t>
+              <a:t>7/3/26</a:t>
             </a:fld>
             <a:endParaRPr lang="en-US"/>
           </a:p>
@@ -5290,7 +5288,7 @@
           <a:p>
             <a:fld id="{CB70D3E6-D921-5B44-AC8D-B7FDAFC8A532}" type="datetimeFigureOut">
               <a:rPr lang="en-US" smtClean="0"/>
-              <a:t>11/27/24</a:t>
+              <a:t>7/3/26</a:t>
             </a:fld>
             <a:endParaRPr lang="en-US"/>
           </a:p>
@@ -5565,7 +5563,7 @@
           <a:p>
             <a:fld id="{CB70D3E6-D921-5B44-AC8D-B7FDAFC8A532}" type="datetimeFigureOut">
               <a:rPr lang="en-US" smtClean="0"/>
-              <a:t>11/27/24</a:t>
+              <a:t>7/3/26</a:t>
             </a:fld>
             <a:endParaRPr lang="en-US"/>
           </a:p>
@@ -5830,7 +5828,7 @@
           <a:p>
             <a:fld id="{CB70D3E6-D921-5B44-AC8D-B7FDAFC8A532}" type="datetimeFigureOut">
               <a:rPr lang="en-US" smtClean="0"/>
-              <a:t>11/27/24</a:t>
+              <a:t>7/3/26</a:t>
             </a:fld>
             <a:endParaRPr lang="en-US"/>
           </a:p>
@@ -6242,7 +6240,7 @@
           <a:p>
             <a:fld id="{CB70D3E6-D921-5B44-AC8D-B7FDAFC8A532}" type="datetimeFigureOut">
               <a:rPr lang="en-US" smtClean="0"/>
-              <a:t>11/27/24</a:t>
+              <a:t>7/3/26</a:t>
             </a:fld>
             <a:endParaRPr lang="en-US"/>
           </a:p>
@@ -6383,7 +6381,7 @@
           <a:p>
             <a:fld id="{CB70D3E6-D921-5B44-AC8D-B7FDAFC8A532}" type="datetimeFigureOut">
               <a:rPr lang="en-US" smtClean="0"/>
-              <a:t>11/27/24</a:t>
+              <a:t>7/3/26</a:t>
             </a:fld>
             <a:endParaRPr lang="en-US"/>
           </a:p>
@@ -6496,7 +6494,7 @@
           <a:p>
             <a:fld id="{CB70D3E6-D921-5B44-AC8D-B7FDAFC8A532}" type="datetimeFigureOut">
               <a:rPr lang="en-US" smtClean="0"/>
-              <a:t>11/27/24</a:t>
+              <a:t>7/3/26</a:t>
             </a:fld>
             <a:endParaRPr lang="en-US"/>
           </a:p>
@@ -6807,7 +6805,7 @@
           <a:p>
             <a:fld id="{CB70D3E6-D921-5B44-AC8D-B7FDAFC8A532}" type="datetimeFigureOut">
               <a:rPr lang="en-US" smtClean="0"/>
-              <a:t>11/27/24</a:t>
+              <a:t>7/3/26</a:t>
             </a:fld>
             <a:endParaRPr lang="en-US"/>
           </a:p>
@@ -7095,7 +7093,7 @@
           <a:p>
             <a:fld id="{CB70D3E6-D921-5B44-AC8D-B7FDAFC8A532}" type="datetimeFigureOut">
               <a:rPr lang="en-US" smtClean="0"/>
-              <a:t>11/27/24</a:t>
+              <a:t>7/3/26</a:t>
             </a:fld>
             <a:endParaRPr lang="en-US"/>
           </a:p>
@@ -7336,7 +7334,7 @@
           <a:p>
             <a:fld id="{CB70D3E6-D921-5B44-AC8D-B7FDAFC8A532}" type="datetimeFigureOut">
               <a:rPr lang="en-US" smtClean="0"/>
-              <a:t>11/27/24</a:t>
+              <a:t>7/3/26</a:t>
             </a:fld>
             <a:endParaRPr lang="en-US"/>
           </a:p>
@@ -7907,7 +7905,7 @@
           <a:p>
             <a:fld id="{2005EE61-3907-C44D-8624-D47E09E871DB}" type="datetime1">
               <a:rPr lang="en-US" smtClean="0"/>
-              <a:t>11/27/24</a:t>
+              <a:t>7/3/26</a:t>
             </a:fld>
             <a:endParaRPr lang="en-US"/>
           </a:p>
@@ -8355,8 +8353,8 @@
         </p:nvSpPr>
         <p:spPr>
           <a:xfrm>
-            <a:off x="0" y="358254"/>
-            <a:ext cx="12191999" cy="4067780"/>
+            <a:off x="0" y="350233"/>
+            <a:ext cx="12191999" cy="5350183"/>
           </a:xfrm>
           <a:prstGeom prst="rect">
             <a:avLst/>
@@ -8386,23 +8384,7 @@
               <a:tabLst/>
               <a:defRPr/>
             </a:pPr>
-            <a:r>
-              <a:rPr kumimoji="0" lang="en-US" sz="11500" b="0" i="0" u="none" strike="noStrike" kern="1200" cap="none" spc="0" normalizeH="0" baseline="0" noProof="0" dirty="0">
-                <a:ln>
-                  <a:noFill/>
-                </a:ln>
-                <a:solidFill>
-                  <a:prstClr val="white"/>
-                </a:solidFill>
-                <a:effectLst/>
-                <a:uLnTx/>
-                <a:uFillTx/>
-                <a:latin typeface="Helvetica Neue UltraLight" panose="02000206000000020004" pitchFamily="2" charset="0"/>
-                <a:ea typeface="Helvetica Neue UltraLight" panose="02000206000000020004" pitchFamily="2" charset="0"/>
-                <a:cs typeface="Helvetica Neue" panose="02000503000000020004" pitchFamily="2" charset="0"/>
-              </a:rPr>
-              <a:t>neoclassical.ai</a:t>
-            </a:r>
+            <a:endParaRPr/>
           </a:p>
           <a:p>
             <a:pPr marL="0" marR="0" lvl="0" indent="0" algn="ctr" defTabSz="914400" rtl="0" eaLnBrk="1" fontAlgn="auto" latinLnBrk="0" hangingPunct="1">
@@ -8437,7 +8419,43 @@
                 <a:ea typeface="Helvetica Neue Condensed Black" panose="02000503000000020004" pitchFamily="2" charset="0"/>
                 <a:cs typeface="Helvetica Neue Condensed Black" panose="02000503000000020004" pitchFamily="2" charset="0"/>
               </a:rPr>
-              <a:t>The Paths of </a:t>
+              <a:t>Architrino Paths</a:t>
+            </a:r>
+          </a:p>
+          <a:p>
+            <a:pPr marL="0" marR="0" lvl="0" indent="0" algn="ctr" defTabSz="914400" rtl="0" eaLnBrk="1" fontAlgn="auto" latinLnBrk="0" hangingPunct="1">
+              <a:lnSpc>
+                <a:spcPts val="10000"/>
+              </a:lnSpc>
+              <a:spcBef>
+                <a:spcPts val="0"/>
+              </a:spcBef>
+              <a:spcAft>
+                <a:spcPts val="0"/>
+              </a:spcAft>
+              <a:buClrTx/>
+              <a:buSzTx/>
+              <a:buFontTx/>
+              <a:buNone/>
+              <a:tabLst/>
+              <a:defRPr/>
+            </a:pPr>
+            <a:r>
+              <a:rPr kumimoji="0" lang="en-US" sz="9600" b="1" i="0" u="none" strike="noStrike" kern="1200" cap="none" spc="0" normalizeH="0" baseline="0" noProof="0" dirty="0">
+                <a:ln>
+                  <a:noFill/>
+                </a:ln>
+                <a:solidFill>
+                  <a:srgbClr val="FFC000"/>
+                </a:solidFill>
+                <a:effectLst/>
+                <a:uLnTx/>
+                <a:uFillTx/>
+                <a:latin typeface="Helvetica Neue Condensed Black" panose="02000503000000020004" pitchFamily="2" charset="0"/>
+                <a:ea typeface="Helvetica Neue Condensed Black" panose="02000503000000020004" pitchFamily="2" charset="0"/>
+                <a:cs typeface="Helvetica Neue Condensed Black" panose="02000503000000020004" pitchFamily="2" charset="0"/>
+              </a:rPr>
+              <a:t>and Causal Wakes</a:t>
             </a:r>
             <a:br>
               <a:rPr kumimoji="0" lang="en-US" sz="9600" b="1" i="0" u="none" strike="noStrike" kern="1200" cap="none" spc="0" normalizeH="0" baseline="0" noProof="0" dirty="0">
@@ -8455,23 +8473,20 @@
                 <a:cs typeface="Helvetica Neue Condensed Black" panose="02000503000000020004" pitchFamily="2" charset="0"/>
               </a:rPr>
             </a:br>
-            <a:r>
-              <a:rPr kumimoji="0" lang="en-US" sz="9600" b="1" i="0" u="none" strike="noStrike" kern="1200" cap="none" spc="0" normalizeH="0" baseline="0" noProof="0" dirty="0">
-                <a:ln>
-                  <a:noFill/>
-                </a:ln>
-                <a:solidFill>
-                  <a:srgbClr val="FFC000"/>
-                </a:solidFill>
-                <a:effectLst/>
-                <a:uLnTx/>
-                <a:uFillTx/>
-                <a:latin typeface="Helvetica Neue Condensed Black" panose="02000503000000020004" pitchFamily="2" charset="0"/>
-                <a:ea typeface="Helvetica Neue Condensed Black" panose="02000503000000020004" pitchFamily="2" charset="0"/>
-                <a:cs typeface="Helvetica Neue Condensed Black" panose="02000503000000020004" pitchFamily="2" charset="0"/>
-              </a:rPr>
-              <a:t>Point Potentials</a:t>
-            </a:r>
+            <a:endParaRPr kumimoji="0" lang="en-US" sz="9600" b="1" i="0" u="none" strike="noStrike" kern="1200" cap="none" spc="0" normalizeH="0" baseline="0" noProof="0" dirty="0">
+              <a:ln>
+                <a:noFill/>
+              </a:ln>
+              <a:solidFill>
+                <a:srgbClr val="FFC000"/>
+              </a:solidFill>
+              <a:effectLst/>
+              <a:uLnTx/>
+              <a:uFillTx/>
+              <a:latin typeface="Helvetica Neue Condensed Black" panose="02000503000000020004" pitchFamily="2" charset="0"/>
+              <a:ea typeface="Helvetica Neue Condensed Black" panose="02000503000000020004" pitchFamily="2" charset="0"/>
+              <a:cs typeface="Helvetica Neue Condensed Black" panose="02000503000000020004" pitchFamily="2" charset="0"/>
+            </a:endParaRPr>
           </a:p>
         </p:txBody>
       </p:sp>
@@ -11112,7 +11127,7 @@
                 <a:ea typeface="Helvetica Neue" panose="02000503000000020004" pitchFamily="2" charset="0"/>
                 <a:cs typeface="Helvetica Neue" panose="02000503000000020004" pitchFamily="2" charset="0"/>
               </a:rPr>
-              <a:t>It is fascinating to conceptualize continuous feedback with a delay.</a:t>
+              <a:t>Causal-delay feedback is continuous.</a:t>
             </a:r>
           </a:p>
           <a:p>
@@ -11137,7 +11152,7 @@
                 <a:ea typeface="Helvetica Neue" panose="02000503000000020004" pitchFamily="2" charset="0"/>
                 <a:cs typeface="Helvetica Neue" panose="02000503000000020004" pitchFamily="2" charset="0"/>
               </a:rPr>
-              <a:t>Action upon A changes A’s path which changes the sphere stream A emits.  </a:t>
+              <a:t>A hit on A changes A's path, which changes the causal wakes A emits.</a:t>
             </a:r>
           </a:p>
           <a:p>
@@ -11162,7 +11177,7 @@
                 <a:ea typeface="Helvetica Neue" panose="02000503000000020004" pitchFamily="2" charset="0"/>
                 <a:cs typeface="Helvetica Neue" panose="02000503000000020004" pitchFamily="2" charset="0"/>
               </a:rPr>
-              <a:t>After a travel time, which is also path dependent, action will occur at B and change B’s path. </a:t>
+              <a:t>After a path-dependent travel time, those wakes can hit B and change B's path.</a:t>
             </a:r>
           </a:p>
           <a:p>
@@ -11187,7 +11202,7 @@
                 <a:ea typeface="Helvetica Neue" panose="02000503000000020004" pitchFamily="2" charset="0"/>
                 <a:cs typeface="Helvetica Neue" panose="02000503000000020004" pitchFamily="2" charset="0"/>
               </a:rPr>
-              <a:t>And so on. This is all continuous feedback.</a:t>
+              <a:t>The coupled result is path-history feedback.</a:t>
             </a:r>
           </a:p>
         </p:txBody>
@@ -11425,7 +11440,7 @@
                 <a:ea typeface="Helvetica Neue" panose="02000503000000020004" pitchFamily="2" charset="0"/>
                 <a:cs typeface="Helvetica Neue" panose="02000503000000020004" pitchFamily="2" charset="0"/>
               </a:rPr>
-              <a:t>Point Potential Path History and Action</a:t>
+              <a:t>Architrino Path History and Wake Hits</a:t>
             </a:r>
             <a:endParaRPr lang="en-US" sz="2800" b="1" baseline="30000" dirty="0">
               <a:solidFill>
@@ -11606,7 +11621,7 @@
                   <a:ea typeface="Helvetica Neue" panose="02000503000000020004" pitchFamily="2" charset="0"/>
                   <a:cs typeface="Helvetica Neue" panose="02000503000000020004" pitchFamily="2" charset="0"/>
                 </a:rPr>
-                <a:t>Absolute Euclidean Time</a:t>
+                <a:t>Absolute Time</a:t>
               </a:r>
             </a:p>
           </p:txBody>
@@ -11638,42 +11653,6 @@
               <a:spAutoFit/>
             </a:bodyPr>
             <a:lstStyle/>
-            <a:p>
-              <a:pPr marL="0" marR="0" lvl="0" indent="0" algn="ctr" defTabSz="914400" rtl="0" eaLnBrk="1" fontAlgn="auto" latinLnBrk="0" hangingPunct="1">
-                <a:lnSpc>
-                  <a:spcPct val="100000"/>
-                </a:lnSpc>
-                <a:spcBef>
-                  <a:spcPts val="0"/>
-                </a:spcBef>
-                <a:spcAft>
-                  <a:spcPts val="0"/>
-                </a:spcAft>
-                <a:buClrTx/>
-                <a:buSzTx/>
-                <a:buFontTx/>
-                <a:buNone/>
-                <a:tabLst/>
-                <a:defRPr/>
-              </a:pPr>
-              <a:r>
-                <a:rPr kumimoji="0" lang="en-US" sz="1800" b="0" i="0" u="none" strike="noStrike" kern="1200" cap="none" spc="0" normalizeH="0" baseline="0" noProof="0" dirty="0">
-                  <a:ln>
-                    <a:noFill/>
-                  </a:ln>
-                  <a:solidFill>
-                    <a:prstClr val="white"/>
-                  </a:solidFill>
-                  <a:effectLst/>
-                  <a:uLnTx/>
-                  <a:uFillTx/>
-                  <a:latin typeface="Helvetica Neue" panose="02000503000000020004" pitchFamily="2" charset="0"/>
-                  <a:ea typeface="Helvetica Neue" panose="02000503000000020004" pitchFamily="2" charset="0"/>
-                  <a:cs typeface="Helvetica Neue" panose="02000503000000020004" pitchFamily="2" charset="0"/>
-                </a:rPr>
-                <a:t>Absolute </a:t>
-              </a:r>
-            </a:p>
             <a:p>
               <a:pPr marL="0" marR="0" lvl="0" indent="0" algn="ctr" defTabSz="914400" rtl="0" eaLnBrk="1" fontAlgn="auto" latinLnBrk="0" hangingPunct="1">
                 <a:lnSpc>
@@ -11743,7 +11722,7 @@
                   <a:ea typeface="Helvetica Neue" panose="02000503000000020004" pitchFamily="2" charset="0"/>
                   <a:cs typeface="Helvetica Neue" panose="02000503000000020004" pitchFamily="2" charset="0"/>
                 </a:rPr>
-                <a:t>3D Space</a:t>
+                <a:t>Void</a:t>
               </a:r>
             </a:p>
           </p:txBody>
@@ -12009,7 +11988,7 @@
                 <a:ea typeface="Helvetica Neue" panose="02000503000000020004" pitchFamily="2" charset="0"/>
                 <a:cs typeface="Helvetica Neue" panose="02000503000000020004" pitchFamily="2" charset="0"/>
               </a:rPr>
-              <a:t>Absolute </a:t>
+              <a:t>Euclidean</a:t>
             </a:r>
           </a:p>
           <a:p>
@@ -12045,43 +12024,7 @@
                 <a:ea typeface="Helvetica Neue" panose="02000503000000020004" pitchFamily="2" charset="0"/>
                 <a:cs typeface="Helvetica Neue" panose="02000503000000020004" pitchFamily="2" charset="0"/>
               </a:rPr>
-              <a:t>Euclidean</a:t>
-            </a:r>
-          </a:p>
-          <a:p>
-            <a:pPr marL="0" marR="0" lvl="0" indent="0" algn="ctr" defTabSz="914400" rtl="0" eaLnBrk="1" fontAlgn="auto" latinLnBrk="0" hangingPunct="1">
-              <a:lnSpc>
-                <a:spcPct val="100000"/>
-              </a:lnSpc>
-              <a:spcBef>
-                <a:spcPts val="0"/>
-              </a:spcBef>
-              <a:spcAft>
-                <a:spcPts val="0"/>
-              </a:spcAft>
-              <a:buClrTx/>
-              <a:buSzTx/>
-              <a:buFontTx/>
-              <a:buNone/>
-              <a:tabLst/>
-              <a:defRPr/>
-            </a:pPr>
-            <a:r>
-              <a:rPr kumimoji="0" lang="en-US" sz="1800" b="0" i="0" u="none" strike="noStrike" kern="1200" cap="none" spc="0" normalizeH="0" baseline="0" noProof="0" dirty="0">
-                <a:ln>
-                  <a:noFill/>
-                </a:ln>
-                <a:solidFill>
-                  <a:prstClr val="white"/>
-                </a:solidFill>
-                <a:effectLst/>
-                <a:uLnTx/>
-                <a:uFillTx/>
-                <a:latin typeface="Helvetica Neue" panose="02000503000000020004" pitchFamily="2" charset="0"/>
-                <a:ea typeface="Helvetica Neue" panose="02000503000000020004" pitchFamily="2" charset="0"/>
-                <a:cs typeface="Helvetica Neue" panose="02000503000000020004" pitchFamily="2" charset="0"/>
-              </a:rPr>
-              <a:t>3D Space</a:t>
+              <a:t>Void</a:t>
             </a:r>
           </a:p>
         </p:txBody>
@@ -14042,7 +13985,7 @@
                 <a:ea typeface="Helvetica Neue" panose="02000503000000020004" pitchFamily="2" charset="0"/>
                 <a:cs typeface="Helvetica Neue" panose="02000503000000020004" pitchFamily="2" charset="0"/>
               </a:rPr>
-              <a:t>The potential  emitted by A at time t’ causes action upon intersecting B at time t.</a:t>
+              <a:t>The causal wake emitted by A at time t' hits B at time t.</a:t>
             </a:r>
             <a:endParaRPr kumimoji="0" lang="en-US" sz="1800" b="0" i="0" u="none" strike="noStrike" kern="1200" cap="none" spc="0" normalizeH="0" baseline="0" noProof="0" dirty="0">
               <a:ln>
@@ -14633,7 +14576,7 @@
                 <a:ea typeface="Helvetica Neue" panose="02000503000000020004" pitchFamily="2" charset="0"/>
                 <a:cs typeface="Helvetica Neue" panose="02000503000000020004" pitchFamily="2" charset="0"/>
               </a:rPr>
-              <a:t>Point Potential Path History and Action</a:t>
+              <a:t>Architrino Path History and Wake Hits</a:t>
             </a:r>
             <a:endParaRPr lang="en-US" sz="2800" b="1" baseline="30000" dirty="0">
               <a:solidFill>
@@ -14814,7 +14757,7 @@
                   <a:ea typeface="Helvetica Neue" panose="02000503000000020004" pitchFamily="2" charset="0"/>
                   <a:cs typeface="Helvetica Neue" panose="02000503000000020004" pitchFamily="2" charset="0"/>
                 </a:rPr>
-                <a:t>Absolute Euclidean Time</a:t>
+                <a:t>Absolute Time</a:t>
               </a:r>
             </a:p>
           </p:txBody>
@@ -14873,7 +14816,7 @@
         <p:spPr>
           <a:xfrm>
             <a:off x="2821353" y="1411102"/>
-            <a:ext cx="9253416" cy="5078313"/>
+            <a:ext cx="9253416" cy="3693319"/>
           </a:xfrm>
           <a:prstGeom prst="rect">
             <a:avLst/>
@@ -14918,33 +14861,24 @@
                 <a:ea typeface="Helvetica Neue" panose="02000503000000020004" pitchFamily="2" charset="0"/>
                 <a:cs typeface="Helvetica Neue" panose="02000503000000020004" pitchFamily="2" charset="0"/>
               </a:rPr>
-              <a:t>A 1D Euclidean line with exactly two (2) point potentials emitters and field speed @</a:t>
+              <a:t>A 1D Euclidean-void line with two architrino emitters and wake speed c_f.</a:t>
             </a:r>
           </a:p>
           <a:p>
-            <a:pPr marL="0" marR="0" lvl="0" indent="0" algn="l" defTabSz="914400" rtl="0" eaLnBrk="1" fontAlgn="auto" latinLnBrk="0" hangingPunct="1">
-              <a:lnSpc>
-                <a:spcPct val="100000"/>
-              </a:lnSpc>
-              <a:spcBef>
-                <a:spcPts val="0"/>
-              </a:spcBef>
-              <a:spcAft>
-                <a:spcPts val="0"/>
-              </a:spcAft>
-              <a:buClrTx/>
-              <a:buSzTx/>
-              <a:buFontTx/>
-              <a:buNone/>
-              <a:tabLst/>
-              <a:defRPr/>
-            </a:pPr>
+            <a:r>
+              <a:rPr>
+                <a:solidFill>
+                  <a:schemeClr val="bg1"/>
+                </a:solidFill>
+              </a:rPr>
+              <a:t>The binary symmetry point occurs when architrino speed |v| = c_f.</a:t>
+            </a:r>
             <a:endParaRPr kumimoji="0" lang="en-US" sz="1800" b="0" i="0" u="none" strike="noStrike" kern="1200" cap="none" spc="0" normalizeH="0" baseline="0" noProof="0" dirty="0">
               <a:ln>
                 <a:noFill/>
               </a:ln>
               <a:solidFill>
-                <a:prstClr val="white"/>
+                <a:schemeClr val="bg1"/>
               </a:solidFill>
               <a:effectLst/>
               <a:uLnTx/>
@@ -14987,24 +14921,7 @@
                 <a:ea typeface="Helvetica Neue" panose="02000503000000020004" pitchFamily="2" charset="0"/>
                 <a:cs typeface="Helvetica Neue" panose="02000503000000020004" pitchFamily="2" charset="0"/>
               </a:rPr>
-              <a:t>The symmetry point in a binary assembly is when point potential speed </a:t>
-            </a:r>
-            <a:r>
-              <a:rPr kumimoji="0" lang="en-US" sz="1800" b="1" i="0" u="none" strike="noStrike" kern="1200" cap="none" spc="0" normalizeH="0" baseline="0" noProof="0" dirty="0">
-                <a:ln>
-                  <a:noFill/>
-                </a:ln>
-                <a:solidFill>
-                  <a:prstClr val="white"/>
-                </a:solidFill>
-                <a:effectLst/>
-                <a:uLnTx/>
-                <a:uFillTx/>
-                <a:latin typeface="Helvetica Neue" panose="02000503000000020004" pitchFamily="2" charset="0"/>
-                <a:ea typeface="Helvetica Neue" panose="02000503000000020004" pitchFamily="2" charset="0"/>
-                <a:cs typeface="Helvetica Neue" panose="02000503000000020004" pitchFamily="2" charset="0"/>
-              </a:rPr>
-              <a:t>|v| = @. </a:t>
+              <a:t>Question: does the binary symmetry point align with the reciprocal 1/r hinge at r = 1?</a:t>
             </a:r>
             <a:endParaRPr kumimoji="0" lang="en-US" sz="1800" b="1" i="1" u="none" strike="noStrike" kern="1200" cap="none" spc="0" normalizeH="0" baseline="0" noProof="0" dirty="0">
               <a:ln>
@@ -15054,7 +14971,7 @@
                 <a:ea typeface="Helvetica Neue" panose="02000503000000020004" pitchFamily="2" charset="0"/>
                 <a:cs typeface="Helvetica Neue" panose="02000503000000020004" pitchFamily="2" charset="0"/>
               </a:rPr>
-              <a:t>Does the binary symmetry point correspond to the 1:1 symmetry point in the 1/r curve as well (x=1/y, y=1/x)? I suspect it may.</a:t>
+              <a:t>One-sided integrals above and below r = 1 appear symmetric in this toy picture.</a:t>
             </a:r>
           </a:p>
           <a:p>
@@ -15090,7 +15007,7 @@
                 <a:ea typeface="Helvetica Neue" panose="02000503000000020004" pitchFamily="2" charset="0"/>
                 <a:cs typeface="Helvetica Neue" panose="02000503000000020004" pitchFamily="2" charset="0"/>
               </a:rPr>
-              <a:t>The one-sided integrals above and below r=1 increase symmetrically. </a:t>
+              <a:t>This may explain why orbit equations scale jointly with |v| and r.</a:t>
             </a:r>
           </a:p>
           <a:p>
@@ -15126,7 +15043,7 @@
                 <a:ea typeface="Helvetica Neue" panose="02000503000000020004" pitchFamily="2" charset="0"/>
                 <a:cs typeface="Helvetica Neue" panose="02000503000000020004" pitchFamily="2" charset="0"/>
               </a:rPr>
-              <a:t>Is this why orbital equations scale with |v| and r?</a:t>
+              <a:t>Opposite-polarity architrinos launched from large r with small speed may approach |v| near c_f at r = 1.</a:t>
             </a:r>
           </a:p>
           <a:p>
@@ -15162,41 +15079,7 @@
                 <a:ea typeface="Helvetica Neue" panose="02000503000000020004" pitchFamily="2" charset="0"/>
                 <a:cs typeface="Helvetica Neue" panose="02000503000000020004" pitchFamily="2" charset="0"/>
               </a:rPr>
-              <a:t>If </a:t>
-            </a:r>
-            <a:r>
-              <a:rPr kumimoji="0" lang="en-US" sz="1800" b="1" i="0" u="none" strike="noStrike" kern="1200" cap="none" spc="0" normalizeH="0" baseline="0" noProof="0" dirty="0">
-                <a:ln>
-                  <a:noFill/>
-                </a:ln>
-                <a:solidFill>
-                  <a:prstClr val="white"/>
-                </a:solidFill>
-                <a:effectLst/>
-                <a:uLnTx/>
-                <a:uFillTx/>
-                <a:latin typeface="Helvetica Neue" panose="02000503000000020004" pitchFamily="2" charset="0"/>
-                <a:ea typeface="Helvetica Neue" panose="02000503000000020004" pitchFamily="2" charset="0"/>
-                <a:cs typeface="Helvetica Neue" panose="02000503000000020004" pitchFamily="2" charset="0"/>
-              </a:rPr>
-              <a:t>trans (opposite polarity)</a:t>
-            </a:r>
-            <a:r>
-              <a:rPr kumimoji="0" lang="en-US" sz="1800" b="0" i="0" u="none" strike="noStrike" kern="1200" cap="none" spc="0" normalizeH="0" baseline="0" noProof="0" dirty="0">
-                <a:ln>
-                  <a:noFill/>
-                </a:ln>
-                <a:solidFill>
-                  <a:prstClr val="white"/>
-                </a:solidFill>
-                <a:effectLst/>
-                <a:uLnTx/>
-                <a:uFillTx/>
-                <a:latin typeface="Helvetica Neue" panose="02000503000000020004" pitchFamily="2" charset="0"/>
-                <a:ea typeface="Helvetica Neue" panose="02000503000000020004" pitchFamily="2" charset="0"/>
-                <a:cs typeface="Helvetica Neue" panose="02000503000000020004" pitchFamily="2" charset="0"/>
-              </a:rPr>
-              <a:t> potentials launch at large r, and speed +delta, delta near 0 </a:t>
+              <a:t>Open calculation: determine the limiting speed after the pair passes through.</a:t>
             </a:r>
           </a:p>
           <a:p>
@@ -15232,7 +15115,7 @@
                 <a:ea typeface="Helvetica Neue" panose="02000503000000020004" pitchFamily="2" charset="0"/>
                 <a:cs typeface="Helvetica Neue" panose="02000503000000020004" pitchFamily="2" charset="0"/>
               </a:rPr>
-              <a:t>Will they reach |v| very near @ at r=1?</a:t>
+              <a:t>Same-polarity architrinos launched toward each other above c_f may reverse or cross depending on initial offset.</a:t>
             </a:r>
           </a:p>
           <a:p>
@@ -15268,7 +15151,7 @@
                 <a:ea typeface="Helvetica Neue" panose="02000503000000020004" pitchFamily="2" charset="0"/>
                 <a:cs typeface="Helvetica Neue" panose="02000503000000020004" pitchFamily="2" charset="0"/>
               </a:rPr>
-              <a:t>What is the ultimate velocity as they pass through each other?</a:t>
+              <a:t>Same-polarity versus opposite-polarity motion is a real asymmetry in the primitive dynamics.</a:t>
             </a:r>
           </a:p>
           <a:p>
@@ -15304,288 +15187,8 @@
                 <a:ea typeface="Helvetica Neue" panose="02000503000000020004" pitchFamily="2" charset="0"/>
                 <a:cs typeface="Helvetica Neue" panose="02000503000000020004" pitchFamily="2" charset="0"/>
               </a:rPr>
-              <a:t>Symmetry with binaries suggests v = @ pi / 2.</a:t>
+              <a:t>Radius and velocity remain coupled through the causal-root ledger.</a:t>
             </a:r>
-          </a:p>
-          <a:p>
-            <a:pPr marL="285750" marR="0" lvl="0" indent="-285750" algn="l" defTabSz="914400" rtl="0" eaLnBrk="1" fontAlgn="auto" latinLnBrk="0" hangingPunct="1">
-              <a:lnSpc>
-                <a:spcPct val="100000"/>
-              </a:lnSpc>
-              <a:spcBef>
-                <a:spcPts val="0"/>
-              </a:spcBef>
-              <a:spcAft>
-                <a:spcPts val="0"/>
-              </a:spcAft>
-              <a:buClrTx/>
-              <a:buSzTx/>
-              <a:buFont typeface="Arial" panose="020B0604020202020204" pitchFamily="34" charset="0"/>
-              <a:buChar char="•"/>
-              <a:tabLst/>
-              <a:defRPr/>
-            </a:pPr>
-            <a:r>
-              <a:rPr kumimoji="0" lang="en-US" sz="1800" b="0" i="0" u="none" strike="noStrike" kern="1200" cap="none" spc="0" normalizeH="0" baseline="0" noProof="0" dirty="0">
-                <a:ln>
-                  <a:noFill/>
-                </a:ln>
-                <a:solidFill>
-                  <a:prstClr val="white"/>
-                </a:solidFill>
-                <a:effectLst/>
-                <a:uLnTx/>
-                <a:uFillTx/>
-                <a:latin typeface="Helvetica Neue" panose="02000503000000020004" pitchFamily="2" charset="0"/>
-                <a:ea typeface="Helvetica Neue" panose="02000503000000020004" pitchFamily="2" charset="0"/>
-                <a:cs typeface="Helvetica Neue" panose="02000503000000020004" pitchFamily="2" charset="0"/>
-              </a:rPr>
-              <a:t>If </a:t>
-            </a:r>
-            <a:r>
-              <a:rPr kumimoji="0" lang="en-US" sz="1800" b="1" i="0" u="none" strike="noStrike" kern="1200" cap="none" spc="0" normalizeH="0" baseline="0" noProof="0" dirty="0">
-                <a:ln>
-                  <a:noFill/>
-                </a:ln>
-                <a:solidFill>
-                  <a:prstClr val="white"/>
-                </a:solidFill>
-                <a:effectLst/>
-                <a:uLnTx/>
-                <a:uFillTx/>
-                <a:latin typeface="Helvetica Neue" panose="02000503000000020004" pitchFamily="2" charset="0"/>
-                <a:ea typeface="Helvetica Neue" panose="02000503000000020004" pitchFamily="2" charset="0"/>
-                <a:cs typeface="Helvetica Neue" panose="02000503000000020004" pitchFamily="2" charset="0"/>
-              </a:rPr>
-              <a:t>cis (same polarity)</a:t>
-            </a:r>
-            <a:r>
-              <a:rPr kumimoji="0" lang="en-US" sz="1800" b="0" i="0" u="none" strike="noStrike" kern="1200" cap="none" spc="0" normalizeH="0" baseline="0" noProof="0" dirty="0">
-                <a:ln>
-                  <a:noFill/>
-                </a:ln>
-                <a:solidFill>
-                  <a:prstClr val="white"/>
-                </a:solidFill>
-                <a:effectLst/>
-                <a:uLnTx/>
-                <a:uFillTx/>
-                <a:latin typeface="Helvetica Neue" panose="02000503000000020004" pitchFamily="2" charset="0"/>
-                <a:ea typeface="Helvetica Neue" panose="02000503000000020004" pitchFamily="2" charset="0"/>
-                <a:cs typeface="Helvetica Neue" panose="02000503000000020004" pitchFamily="2" charset="0"/>
-              </a:rPr>
-              <a:t> potentials launch to each other with a speed &gt;&gt; @ + delta</a:t>
-            </a:r>
-          </a:p>
-          <a:p>
-            <a:pPr marL="742950" marR="0" lvl="1" indent="-285750" algn="l" defTabSz="914400" rtl="0" eaLnBrk="1" fontAlgn="auto" latinLnBrk="0" hangingPunct="1">
-              <a:lnSpc>
-                <a:spcPct val="100000"/>
-              </a:lnSpc>
-              <a:spcBef>
-                <a:spcPts val="0"/>
-              </a:spcBef>
-              <a:spcAft>
-                <a:spcPts val="0"/>
-              </a:spcAft>
-              <a:buClrTx/>
-              <a:buSzTx/>
-              <a:buFont typeface="Arial" panose="020B0604020202020204" pitchFamily="34" charset="0"/>
-              <a:buChar char="•"/>
-              <a:tabLst/>
-              <a:defRPr/>
-            </a:pPr>
-            <a:r>
-              <a:rPr kumimoji="0" lang="en-US" sz="1800" b="0" i="0" u="none" strike="noStrike" kern="1200" cap="none" spc="0" normalizeH="0" baseline="0" noProof="0" dirty="0">
-                <a:ln>
-                  <a:noFill/>
-                </a:ln>
-                <a:solidFill>
-                  <a:prstClr val="white"/>
-                </a:solidFill>
-                <a:effectLst/>
-                <a:uLnTx/>
-                <a:uFillTx/>
-                <a:latin typeface="Helvetica Neue" panose="02000503000000020004" pitchFamily="2" charset="0"/>
-                <a:ea typeface="Helvetica Neue" panose="02000503000000020004" pitchFamily="2" charset="0"/>
-                <a:cs typeface="Helvetica Neue" panose="02000503000000020004" pitchFamily="2" charset="0"/>
-              </a:rPr>
-              <a:t>Is the r = 1 case where they would reverse course or cross depending on delta?</a:t>
-            </a:r>
-          </a:p>
-          <a:p>
-            <a:pPr marL="742950" marR="0" lvl="1" indent="-285750" algn="l" defTabSz="914400" rtl="0" eaLnBrk="1" fontAlgn="auto" latinLnBrk="0" hangingPunct="1">
-              <a:lnSpc>
-                <a:spcPct val="100000"/>
-              </a:lnSpc>
-              <a:spcBef>
-                <a:spcPts val="0"/>
-              </a:spcBef>
-              <a:spcAft>
-                <a:spcPts val="0"/>
-              </a:spcAft>
-              <a:buClrTx/>
-              <a:buSzTx/>
-              <a:buFont typeface="Arial" panose="020B0604020202020204" pitchFamily="34" charset="0"/>
-              <a:buChar char="•"/>
-              <a:tabLst/>
-              <a:defRPr/>
-            </a:pPr>
-            <a:r>
-              <a:rPr kumimoji="0" lang="en-US" sz="1800" b="0" i="0" u="none" strike="noStrike" kern="1200" cap="none" spc="0" normalizeH="0" baseline="0" noProof="0" dirty="0">
-                <a:ln>
-                  <a:noFill/>
-                </a:ln>
-                <a:solidFill>
-                  <a:prstClr val="white"/>
-                </a:solidFill>
-                <a:effectLst/>
-                <a:uLnTx/>
-                <a:uFillTx/>
-                <a:latin typeface="Helvetica Neue" panose="02000503000000020004" pitchFamily="2" charset="0"/>
-                <a:ea typeface="Helvetica Neue" panose="02000503000000020004" pitchFamily="2" charset="0"/>
-                <a:cs typeface="Helvetica Neue" panose="02000503000000020004" pitchFamily="2" charset="0"/>
-              </a:rPr>
-              <a:t>Cis vs. Trans point potentials are a profound asymmetry in nature.</a:t>
-            </a:r>
-          </a:p>
-          <a:p>
-            <a:pPr marL="742950" marR="0" lvl="1" indent="-285750" algn="l" defTabSz="914400" rtl="0" eaLnBrk="1" fontAlgn="auto" latinLnBrk="0" hangingPunct="1">
-              <a:lnSpc>
-                <a:spcPct val="100000"/>
-              </a:lnSpc>
-              <a:spcBef>
-                <a:spcPts val="0"/>
-              </a:spcBef>
-              <a:spcAft>
-                <a:spcPts val="0"/>
-              </a:spcAft>
-              <a:buClrTx/>
-              <a:buSzTx/>
-              <a:buFont typeface="Arial" panose="020B0604020202020204" pitchFamily="34" charset="0"/>
-              <a:buChar char="•"/>
-              <a:tabLst/>
-              <a:defRPr/>
-            </a:pPr>
-            <a:r>
-              <a:rPr kumimoji="0" lang="en-US" sz="1800" b="0" i="0" u="none" strike="noStrike" kern="1200" cap="none" spc="0" normalizeH="0" baseline="0" noProof="0" dirty="0">
-                <a:ln>
-                  <a:noFill/>
-                </a:ln>
-                <a:solidFill>
-                  <a:prstClr val="white"/>
-                </a:solidFill>
-                <a:effectLst/>
-                <a:uLnTx/>
-                <a:uFillTx/>
-                <a:latin typeface="Helvetica Neue" panose="02000503000000020004" pitchFamily="2" charset="0"/>
-                <a:ea typeface="Helvetica Neue" panose="02000503000000020004" pitchFamily="2" charset="0"/>
-                <a:cs typeface="Helvetica Neue" panose="02000503000000020004" pitchFamily="2" charset="0"/>
-              </a:rPr>
-              <a:t>Kinda profound, but if the point potential is boosted it can cross the 1/1 location.</a:t>
-            </a:r>
-          </a:p>
-          <a:p>
-            <a:pPr marL="0" marR="0" lvl="0" indent="0" algn="l" defTabSz="914400" rtl="0" eaLnBrk="1" fontAlgn="auto" latinLnBrk="0" hangingPunct="1">
-              <a:lnSpc>
-                <a:spcPct val="100000"/>
-              </a:lnSpc>
-              <a:spcBef>
-                <a:spcPts val="0"/>
-              </a:spcBef>
-              <a:spcAft>
-                <a:spcPts val="0"/>
-              </a:spcAft>
-              <a:buClrTx/>
-              <a:buSzTx/>
-              <a:buFontTx/>
-              <a:buNone/>
-              <a:tabLst/>
-              <a:defRPr/>
-            </a:pPr>
-            <a:endParaRPr kumimoji="0" lang="en-US" sz="1800" b="0" i="0" u="none" strike="noStrike" kern="1200" cap="none" spc="0" normalizeH="0" baseline="0" noProof="0" dirty="0">
-              <a:ln>
-                <a:noFill/>
-              </a:ln>
-              <a:solidFill>
-                <a:prstClr val="white"/>
-              </a:solidFill>
-              <a:effectLst/>
-              <a:uLnTx/>
-              <a:uFillTx/>
-              <a:latin typeface="Helvetica Neue" panose="02000503000000020004" pitchFamily="2" charset="0"/>
-              <a:ea typeface="Helvetica Neue" panose="02000503000000020004" pitchFamily="2" charset="0"/>
-              <a:cs typeface="Helvetica Neue" panose="02000503000000020004" pitchFamily="2" charset="0"/>
-            </a:endParaRPr>
-          </a:p>
-          <a:p>
-            <a:pPr marL="285750" marR="0" lvl="0" indent="-285750" algn="l" defTabSz="914400" rtl="0" eaLnBrk="1" fontAlgn="auto" latinLnBrk="0" hangingPunct="1">
-              <a:lnSpc>
-                <a:spcPct val="100000"/>
-              </a:lnSpc>
-              <a:spcBef>
-                <a:spcPts val="0"/>
-              </a:spcBef>
-              <a:spcAft>
-                <a:spcPts val="0"/>
-              </a:spcAft>
-              <a:buClrTx/>
-              <a:buSzTx/>
-              <a:buFont typeface="Arial" panose="020B0604020202020204" pitchFamily="34" charset="0"/>
-              <a:buChar char="•"/>
-              <a:tabLst/>
-              <a:defRPr/>
-            </a:pPr>
-            <a:r>
-              <a:rPr kumimoji="0" lang="en-US" sz="1800" b="0" i="0" u="none" strike="noStrike" kern="1200" cap="none" spc="0" normalizeH="0" baseline="0" noProof="0" dirty="0">
-                <a:ln>
-                  <a:noFill/>
-                </a:ln>
-                <a:solidFill>
-                  <a:prstClr val="white"/>
-                </a:solidFill>
-                <a:effectLst/>
-                <a:uLnTx/>
-                <a:uFillTx/>
-                <a:latin typeface="Helvetica Neue" panose="02000503000000020004" pitchFamily="2" charset="0"/>
-                <a:ea typeface="Helvetica Neue" panose="02000503000000020004" pitchFamily="2" charset="0"/>
-                <a:cs typeface="Helvetica Neue" panose="02000503000000020004" pitchFamily="2" charset="0"/>
-              </a:rPr>
-              <a:t>Note: radius and velocity are intertwined.</a:t>
-            </a:r>
-          </a:p>
-          <a:p>
-            <a:pPr marL="285750" marR="0" lvl="0" indent="-285750" algn="l" defTabSz="914400" rtl="0" eaLnBrk="1" fontAlgn="auto" latinLnBrk="0" hangingPunct="1">
-              <a:lnSpc>
-                <a:spcPct val="100000"/>
-              </a:lnSpc>
-              <a:spcBef>
-                <a:spcPts val="0"/>
-              </a:spcBef>
-              <a:spcAft>
-                <a:spcPts val="0"/>
-              </a:spcAft>
-              <a:buClrTx/>
-              <a:buSzTx/>
-              <a:buFont typeface="Arial" panose="020B0604020202020204" pitchFamily="34" charset="0"/>
-              <a:buChar char="•"/>
-              <a:tabLst/>
-              <a:defRPr/>
-            </a:pPr>
-            <a:endParaRPr kumimoji="0" lang="en-US" sz="1800" b="0" i="0" u="none" strike="noStrike" kern="1200" cap="none" spc="0" normalizeH="0" baseline="0" noProof="0" dirty="0">
-              <a:ln>
-                <a:noFill/>
-              </a:ln>
-              <a:solidFill>
-                <a:prstClr val="white"/>
-              </a:solidFill>
-              <a:effectLst/>
-              <a:uLnTx/>
-              <a:uFillTx/>
-              <a:latin typeface="Helvetica Neue" panose="02000503000000020004" pitchFamily="2" charset="0"/>
-              <a:ea typeface="Helvetica Neue" panose="02000503000000020004" pitchFamily="2" charset="0"/>
-              <a:cs typeface="Helvetica Neue" panose="02000503000000020004" pitchFamily="2" charset="0"/>
-            </a:endParaRPr>
           </a:p>
         </p:txBody>
       </p:sp>
@@ -15767,7 +15370,7 @@
                 <a:ea typeface="Helvetica Neue" panose="02000503000000020004" pitchFamily="2" charset="0"/>
                 <a:cs typeface="Helvetica Neue" panose="02000503000000020004" pitchFamily="2" charset="0"/>
               </a:rPr>
-              <a:t>Brainstorming the Radius of Potential</a:t>
+              <a:t>Wake Radius and Binary Symmetry</a:t>
             </a:r>
           </a:p>
         </p:txBody>
@@ -18640,7 +18243,7 @@
                 <a:ea typeface="Helvetica Neue" panose="02000503000000020004" pitchFamily="2" charset="0"/>
                 <a:cs typeface="Helvetica Neue" panose="02000503000000020004" pitchFamily="2" charset="0"/>
               </a:rPr>
-              <a:t>A Model of Nature</a:t>
+              <a:t>Architrino Assembly Architecture</a:t>
             </a:r>
             <a:endParaRPr lang="en-US" sz="2800" b="1" baseline="30000" dirty="0">
               <a:solidFill>
@@ -18803,7 +18406,7 @@
                 <a:ea typeface="Helvetica Neue" panose="02000503000000020004" pitchFamily="2" charset="0"/>
                 <a:cs typeface="Helvetica Neue" panose="02000503000000020004" pitchFamily="2" charset="0"/>
               </a:rPr>
-              <a:t>Absolute Linear Forward Moving Time</a:t>
+              <a:t>Absolute Time</a:t>
             </a:r>
           </a:p>
         </p:txBody>
@@ -18868,7 +18471,7 @@
                 <a:ea typeface="Helvetica Neue" panose="02000503000000020004" pitchFamily="2" charset="0"/>
                 <a:cs typeface="Helvetica Neue" panose="02000503000000020004" pitchFamily="2" charset="0"/>
               </a:rPr>
-              <a:t>Absolute </a:t>
+              <a:t>Euclidean</a:t>
             </a:r>
           </a:p>
           <a:p>
@@ -18904,43 +18507,7 @@
                 <a:ea typeface="Helvetica Neue" panose="02000503000000020004" pitchFamily="2" charset="0"/>
                 <a:cs typeface="Helvetica Neue" panose="02000503000000020004" pitchFamily="2" charset="0"/>
               </a:rPr>
-              <a:t>Euclidean</a:t>
-            </a:r>
-          </a:p>
-          <a:p>
-            <a:pPr marL="0" marR="0" lvl="0" indent="0" algn="ctr" defTabSz="914400" rtl="0" eaLnBrk="1" fontAlgn="auto" latinLnBrk="0" hangingPunct="1">
-              <a:lnSpc>
-                <a:spcPct val="100000"/>
-              </a:lnSpc>
-              <a:spcBef>
-                <a:spcPts val="0"/>
-              </a:spcBef>
-              <a:spcAft>
-                <a:spcPts val="0"/>
-              </a:spcAft>
-              <a:buClrTx/>
-              <a:buSzTx/>
-              <a:buFontTx/>
-              <a:buNone/>
-              <a:tabLst/>
-              <a:defRPr/>
-            </a:pPr>
-            <a:r>
-              <a:rPr kumimoji="0" lang="en-US" sz="1800" b="0" i="0" u="none" strike="noStrike" kern="1200" cap="none" spc="0" normalizeH="0" baseline="0" noProof="0" dirty="0">
-                <a:ln>
-                  <a:noFill/>
-                </a:ln>
-                <a:solidFill>
-                  <a:prstClr val="white"/>
-                </a:solidFill>
-                <a:effectLst/>
-                <a:uLnTx/>
-                <a:uFillTx/>
-                <a:latin typeface="Helvetica Neue" panose="02000503000000020004" pitchFamily="2" charset="0"/>
-                <a:ea typeface="Helvetica Neue" panose="02000503000000020004" pitchFamily="2" charset="0"/>
-                <a:cs typeface="Helvetica Neue" panose="02000503000000020004" pitchFamily="2" charset="0"/>
-              </a:rPr>
-              <a:t>3D Space</a:t>
+              <a:t>Void</a:t>
             </a:r>
           </a:p>
         </p:txBody>
@@ -18999,29 +18566,7 @@
                 <a:ea typeface="Helvetica Neue" panose="02000503000000020004" pitchFamily="2" charset="0"/>
                 <a:cs typeface="Helvetica Neue" panose="02000503000000020004" pitchFamily="2" charset="0"/>
               </a:rPr>
-              <a:t>t = </a:t>
-            </a:r>
-            <a:r>
-              <a:rPr lang="en-US" dirty="0" err="1">
-                <a:solidFill>
-                  <a:prstClr val="white"/>
-                </a:solidFill>
-                <a:latin typeface="Helvetica Neue" panose="02000503000000020004" pitchFamily="2" charset="0"/>
-                <a:ea typeface="Helvetica Neue" panose="02000503000000020004" pitchFamily="2" charset="0"/>
-                <a:cs typeface="Helvetica Neue" panose="02000503000000020004" pitchFamily="2" charset="0"/>
-              </a:rPr>
-              <a:t>t</a:t>
-            </a:r>
-            <a:r>
-              <a:rPr lang="en-US" baseline="-25000" dirty="0" err="1">
-                <a:solidFill>
-                  <a:prstClr val="white"/>
-                </a:solidFill>
-                <a:latin typeface="Helvetica Neue" panose="02000503000000020004" pitchFamily="2" charset="0"/>
-                <a:ea typeface="Helvetica Neue" panose="02000503000000020004" pitchFamily="2" charset="0"/>
-                <a:cs typeface="Helvetica Neue" panose="02000503000000020004" pitchFamily="2" charset="0"/>
-              </a:rPr>
-              <a:t>now</a:t>
+              <a:t>t = t_now</a:t>
             </a:r>
             <a:endParaRPr kumimoji="0" lang="en-US" sz="1800" b="0" i="0" u="none" strike="noStrike" kern="1200" cap="none" spc="0" normalizeH="0" baseline="-25000" noProof="0" dirty="0">
               <a:ln>
@@ -20082,7 +19627,7 @@
                 <a:ea typeface="Helvetica Neue" panose="02000503000000020004" pitchFamily="2" charset="0"/>
                 <a:cs typeface="Helvetica Neue" panose="02000503000000020004" pitchFamily="2" charset="0"/>
               </a:rPr>
-              <a:t>linear (1D)</a:t>
+              <a:t>linear universal parameter</a:t>
             </a:r>
           </a:p>
           <a:p>
@@ -20098,41 +19643,7 @@
                 <a:ea typeface="Helvetica Neue" panose="02000503000000020004" pitchFamily="2" charset="0"/>
                 <a:cs typeface="Helvetica Neue" panose="02000503000000020004" pitchFamily="2" charset="0"/>
               </a:rPr>
-              <a:t>f</a:t>
-            </a:r>
-            <a:r>
-              <a:rPr kumimoji="0" lang="en-US" sz="1200" u="none" strike="noStrike" kern="1200" cap="none" spc="0" normalizeH="0" baseline="0" noProof="0" dirty="0" err="1">
-                <a:ln>
-                  <a:noFill/>
-                </a:ln>
-                <a:solidFill>
-                  <a:prstClr val="white"/>
-                </a:solidFill>
-                <a:effectLst/>
-                <a:uLnTx/>
-                <a:uFillTx/>
-                <a:latin typeface="Helvetica Neue" panose="02000503000000020004" pitchFamily="2" charset="0"/>
-                <a:ea typeface="Helvetica Neue" panose="02000503000000020004" pitchFamily="2" charset="0"/>
-                <a:cs typeface="Helvetica Neue" panose="02000503000000020004" pitchFamily="2" charset="0"/>
-              </a:rPr>
-              <a:t>orward</a:t>
-            </a:r>
-            <a:r>
-              <a:rPr kumimoji="0" lang="en-US" sz="1200" u="none" strike="noStrike" kern="1200" cap="none" spc="0" normalizeH="0" baseline="0" noProof="0" dirty="0">
-                <a:ln>
-                  <a:noFill/>
-                </a:ln>
-                <a:solidFill>
-                  <a:prstClr val="white"/>
-                </a:solidFill>
-                <a:effectLst/>
-                <a:uLnTx/>
-                <a:uFillTx/>
-                <a:latin typeface="Helvetica Neue" panose="02000503000000020004" pitchFamily="2" charset="0"/>
-                <a:ea typeface="Helvetica Neue" panose="02000503000000020004" pitchFamily="2" charset="0"/>
-                <a:cs typeface="Helvetica Neue" panose="02000503000000020004" pitchFamily="2" charset="0"/>
-              </a:rPr>
-              <a:t> moving</a:t>
+              <a:t>Euclidean Void</a:t>
             </a:r>
           </a:p>
           <a:p>
@@ -20160,7 +19671,7 @@
                 <a:ea typeface="Helvetica Neue" panose="02000503000000020004" pitchFamily="2" charset="0"/>
                 <a:cs typeface="Helvetica Neue" panose="02000503000000020004" pitchFamily="2" charset="0"/>
               </a:rPr>
-              <a:t>Absolute Space</a:t>
+              <a:t>fixed 3D container</a:t>
             </a:r>
           </a:p>
           <a:p>
@@ -20176,7 +19687,7 @@
                 <a:ea typeface="Helvetica Neue" panose="02000503000000020004" pitchFamily="2" charset="0"/>
                 <a:cs typeface="Helvetica Neue" panose="02000503000000020004" pitchFamily="2" charset="0"/>
               </a:rPr>
-              <a:t>3D Euclidean</a:t>
+              <a:t>no preferred origin, orientation, or translation</a:t>
             </a:r>
           </a:p>
           <a:p>
@@ -20192,7 +19703,7 @@
                 <a:ea typeface="Helvetica Neue" panose="02000503000000020004" pitchFamily="2" charset="0"/>
                 <a:cs typeface="Helvetica Neue" panose="02000503000000020004" pitchFamily="2" charset="0"/>
               </a:rPr>
-              <a:t>no origin, orientation, translation. </a:t>
+              <a:t>Architrinos</a:t>
             </a:r>
           </a:p>
           <a:p>
@@ -20220,7 +19731,7 @@
                 <a:ea typeface="Helvetica Neue" panose="02000503000000020004" pitchFamily="2" charset="0"/>
                 <a:cs typeface="Helvetica Neue" panose="02000503000000020004" pitchFamily="2" charset="0"/>
               </a:rPr>
-              <a:t>Point Potential Emitter/Receivers</a:t>
+              <a:t>positrino/electrino polarity</a:t>
             </a:r>
           </a:p>
           <a:p>
@@ -20236,7 +19747,7 @@
                 <a:ea typeface="Helvetica Neue" panose="02000503000000020004" pitchFamily="2" charset="0"/>
                 <a:cs typeface="Helvetica Neue" panose="02000503000000020004" pitchFamily="2" charset="0"/>
               </a:rPr>
-              <a:t>equal and opposite</a:t>
+              <a:t>emitters and receivers</a:t>
             </a:r>
           </a:p>
           <a:p>
@@ -20252,7 +19763,7 @@
                 <a:ea typeface="Helvetica Neue" panose="02000503000000020004" pitchFamily="2" charset="0"/>
                 <a:cs typeface="Helvetica Neue" panose="02000503000000020004" pitchFamily="2" charset="0"/>
               </a:rPr>
-              <a:t>constant rate emitters</a:t>
+              <a:t>path history in absolute timespace</a:t>
             </a:r>
           </a:p>
           <a:p>
@@ -20268,7 +19779,7 @@
                 <a:ea typeface="Helvetica Neue" panose="02000503000000020004" pitchFamily="2" charset="0"/>
                 <a:cs typeface="Helvetica Neue" panose="02000503000000020004" pitchFamily="2" charset="0"/>
               </a:rPr>
-              <a:t>potential receivers</a:t>
+              <a:t>can move faster than wake speed</a:t>
             </a:r>
           </a:p>
           <a:p>
@@ -20284,7 +19795,7 @@
                 <a:ea typeface="Helvetica Neue" panose="02000503000000020004" pitchFamily="2" charset="0"/>
                 <a:cs typeface="Helvetica Neue" panose="02000503000000020004" pitchFamily="2" charset="0"/>
               </a:rPr>
-              <a:t>travels establish a path in R4</a:t>
+              <a:t>Architrino Paths</a:t>
             </a:r>
           </a:p>
           <a:p>
@@ -20300,7 +19811,7 @@
                 <a:ea typeface="Helvetica Neue" panose="02000503000000020004" pitchFamily="2" charset="0"/>
                 <a:cs typeface="Helvetica Neue" panose="02000503000000020004" pitchFamily="2" charset="0"/>
               </a:rPr>
-              <a:t>may travel faster than emission</a:t>
+              <a:t>continuous history in time and space</a:t>
             </a:r>
           </a:p>
           <a:p>
@@ -20328,7 +19839,7 @@
                 <a:ea typeface="Helvetica Neue" panose="02000503000000020004" pitchFamily="2" charset="0"/>
                 <a:cs typeface="Helvetica Neue" panose="02000503000000020004" pitchFamily="2" charset="0"/>
               </a:rPr>
-              <a:t>Paths of a Point Potential</a:t>
+              <a:t>path = all [q,t,x,y,z,x',y',z'] for all t &lt; t_now</a:t>
             </a:r>
           </a:p>
           <a:p>
@@ -20344,7 +19855,7 @@
                 <a:ea typeface="Helvetica Neue" panose="02000503000000020004" pitchFamily="2" charset="0"/>
                 <a:cs typeface="Helvetica Neue" panose="02000503000000020004" pitchFamily="2" charset="0"/>
               </a:rPr>
-              <a:t>continuous history in time and space</a:t>
+              <a:t>Causal Wakes</a:t>
             </a:r>
           </a:p>
           <a:p>
@@ -20360,60 +19871,8 @@
                 <a:ea typeface="Helvetica Neue" panose="02000503000000020004" pitchFamily="2" charset="0"/>
                 <a:cs typeface="Helvetica Neue" panose="02000503000000020004" pitchFamily="2" charset="0"/>
               </a:rPr>
-              <a:t>path = all [</a:t>
+              <a:t>emitted from path history</a:t>
             </a:r>
-            <a:r>
-              <a:rPr lang="en-US" sz="1200" dirty="0" err="1">
-                <a:solidFill>
-                  <a:prstClr val="white"/>
-                </a:solidFill>
-                <a:latin typeface="Helvetica Neue" panose="02000503000000020004" pitchFamily="2" charset="0"/>
-                <a:ea typeface="Helvetica Neue" panose="02000503000000020004" pitchFamily="2" charset="0"/>
-                <a:cs typeface="Helvetica Neue" panose="02000503000000020004" pitchFamily="2" charset="0"/>
-              </a:rPr>
-              <a:t>q,t,x,y,z,x’,y’,z</a:t>
-            </a:r>
-            <a:r>
-              <a:rPr lang="en-US" sz="1200" dirty="0">
-                <a:solidFill>
-                  <a:prstClr val="white"/>
-                </a:solidFill>
-                <a:latin typeface="Helvetica Neue" panose="02000503000000020004" pitchFamily="2" charset="0"/>
-                <a:ea typeface="Helvetica Neue" panose="02000503000000020004" pitchFamily="2" charset="0"/>
-                <a:cs typeface="Helvetica Neue" panose="02000503000000020004" pitchFamily="2" charset="0"/>
-              </a:rPr>
-              <a:t>’] for all t &lt; </a:t>
-            </a:r>
-            <a:r>
-              <a:rPr lang="en-US" sz="1200" dirty="0" err="1">
-                <a:solidFill>
-                  <a:prstClr val="white"/>
-                </a:solidFill>
-                <a:latin typeface="Helvetica Neue" panose="02000503000000020004" pitchFamily="2" charset="0"/>
-                <a:ea typeface="Helvetica Neue" panose="02000503000000020004" pitchFamily="2" charset="0"/>
-                <a:cs typeface="Helvetica Neue" panose="02000503000000020004" pitchFamily="2" charset="0"/>
-              </a:rPr>
-              <a:t>t</a:t>
-            </a:r>
-            <a:r>
-              <a:rPr lang="en-US" sz="1200" baseline="-25000" dirty="0" err="1">
-                <a:solidFill>
-                  <a:prstClr val="white"/>
-                </a:solidFill>
-                <a:latin typeface="Helvetica Neue" panose="02000503000000020004" pitchFamily="2" charset="0"/>
-                <a:ea typeface="Helvetica Neue" panose="02000503000000020004" pitchFamily="2" charset="0"/>
-                <a:cs typeface="Helvetica Neue" panose="02000503000000020004" pitchFamily="2" charset="0"/>
-              </a:rPr>
-              <a:t>now</a:t>
-            </a:r>
-            <a:endParaRPr lang="en-US" sz="1200" dirty="0">
-              <a:solidFill>
-                <a:prstClr val="white"/>
-              </a:solidFill>
-              <a:latin typeface="Helvetica Neue" panose="02000503000000020004" pitchFamily="2" charset="0"/>
-              <a:ea typeface="Helvetica Neue" panose="02000503000000020004" pitchFamily="2" charset="0"/>
-              <a:cs typeface="Helvetica Neue" panose="02000503000000020004" pitchFamily="2" charset="0"/>
-            </a:endParaRPr>
           </a:p>
           <a:p>
             <a:pPr>
@@ -20428,7 +19887,7 @@
                 <a:ea typeface="Helvetica Neue" panose="02000503000000020004" pitchFamily="2" charset="0"/>
                 <a:cs typeface="Helvetica Neue" panose="02000503000000020004" pitchFamily="2" charset="0"/>
               </a:rPr>
-              <a:t>Emission</a:t>
+              <a:t>constant polarity-source rate</a:t>
             </a:r>
           </a:p>
           <a:p>
@@ -20444,7 +19903,7 @@
                 <a:ea typeface="Helvetica Neue" panose="02000503000000020004" pitchFamily="2" charset="0"/>
                 <a:cs typeface="Helvetica Neue" panose="02000503000000020004" pitchFamily="2" charset="0"/>
               </a:rPr>
-              <a:t>origin is on path</a:t>
+              <a:t>causal isochron / wake surface</a:t>
             </a:r>
           </a:p>
           <a:p>
@@ -20460,7 +19919,7 @@
                 <a:ea typeface="Helvetica Neue" panose="02000503000000020004" pitchFamily="2" charset="0"/>
                 <a:cs typeface="Helvetica Neue" panose="02000503000000020004" pitchFamily="2" charset="0"/>
               </a:rPr>
-              <a:t>constant rate potential emission</a:t>
+              <a:t>expands at wake speed c_f; r = c_f t</a:t>
             </a:r>
           </a:p>
           <a:p>
@@ -20476,7 +19935,7 @@
                 <a:ea typeface="Helvetica Neue" panose="02000503000000020004" pitchFamily="2" charset="0"/>
                 <a:cs typeface="Helvetica Neue" panose="02000503000000020004" pitchFamily="2" charset="0"/>
               </a:rPr>
-              <a:t>	Dirac delta q/v</a:t>
+              <a:t>Wake Hits</a:t>
             </a:r>
           </a:p>
           <a:p>
@@ -20492,7 +19951,7 @@
                 <a:ea typeface="Helvetica Neue" panose="02000503000000020004" pitchFamily="2" charset="0"/>
                 <a:cs typeface="Helvetica Neue" panose="02000503000000020004" pitchFamily="2" charset="0"/>
               </a:rPr>
-              <a:t>	Dirac sphere stream (1/r curve)</a:t>
+              <a:t>received at t = t_now</a:t>
             </a:r>
           </a:p>
           <a:p>
@@ -20508,7 +19967,7 @@
                 <a:ea typeface="Helvetica Neue" panose="02000503000000020004" pitchFamily="2" charset="0"/>
                 <a:cs typeface="Helvetica Neue" panose="02000503000000020004" pitchFamily="2" charset="0"/>
               </a:rPr>
-              <a:t>expands at field speed @.  r = @t</a:t>
+              <a:t>intersection with wake surface</a:t>
             </a:r>
           </a:p>
           <a:p>
@@ -20524,7 +19983,7 @@
                 <a:ea typeface="Helvetica Neue" panose="02000503000000020004" pitchFamily="2" charset="0"/>
                 <a:cs typeface="Helvetica Neue" panose="02000503000000020004" pitchFamily="2" charset="0"/>
               </a:rPr>
-              <a:t>Action</a:t>
+              <a:t>superposition of received hits</a:t>
             </a:r>
           </a:p>
           <a:p>
@@ -20540,29 +19999,7 @@
                 <a:ea typeface="Helvetica Neue" panose="02000503000000020004" pitchFamily="2" charset="0"/>
                 <a:cs typeface="Helvetica Neue" panose="02000503000000020004" pitchFamily="2" charset="0"/>
               </a:rPr>
-              <a:t>action occurs at t = </a:t>
-            </a:r>
-            <a:r>
-              <a:rPr lang="en-US" sz="1200" dirty="0" err="1">
-                <a:solidFill>
-                  <a:prstClr val="white"/>
-                </a:solidFill>
-                <a:latin typeface="Helvetica Neue" panose="02000503000000020004" pitchFamily="2" charset="0"/>
-                <a:ea typeface="Helvetica Neue" panose="02000503000000020004" pitchFamily="2" charset="0"/>
-                <a:cs typeface="Helvetica Neue" panose="02000503000000020004" pitchFamily="2" charset="0"/>
-              </a:rPr>
-              <a:t>t</a:t>
-            </a:r>
-            <a:r>
-              <a:rPr lang="en-US" sz="1200" baseline="-25000" dirty="0" err="1">
-                <a:solidFill>
-                  <a:prstClr val="white"/>
-                </a:solidFill>
-                <a:latin typeface="Helvetica Neue" panose="02000503000000020004" pitchFamily="2" charset="0"/>
-                <a:ea typeface="Helvetica Neue" panose="02000503000000020004" pitchFamily="2" charset="0"/>
-                <a:cs typeface="Helvetica Neue" panose="02000503000000020004" pitchFamily="2" charset="0"/>
-              </a:rPr>
-              <a:t>now</a:t>
+              <a:t>net response changes path</a:t>
             </a:r>
             <a:endParaRPr kumimoji="0" lang="en-US" sz="1200" u="none" strike="noStrike" kern="1200" cap="none" spc="0" normalizeH="0" baseline="-25000" noProof="0" dirty="0">
               <a:ln>
@@ -20598,41 +20035,7 @@
                 <a:ea typeface="Helvetica Neue" panose="02000503000000020004" pitchFamily="2" charset="0"/>
                 <a:cs typeface="Helvetica Neue" panose="02000503000000020004" pitchFamily="2" charset="0"/>
               </a:rPr>
-              <a:t>[</a:t>
-            </a:r>
-            <a:r>
-              <a:rPr kumimoji="0" lang="en-US" sz="1200" u="none" strike="noStrike" kern="1200" cap="none" spc="0" normalizeH="0" baseline="0" noProof="0" dirty="0" err="1">
-                <a:ln>
-                  <a:noFill/>
-                </a:ln>
-                <a:solidFill>
-                  <a:prstClr val="white"/>
-                </a:solidFill>
-                <a:effectLst/>
-                <a:uLnTx/>
-                <a:uFillTx/>
-                <a:latin typeface="Helvetica Neue" panose="02000503000000020004" pitchFamily="2" charset="0"/>
-                <a:ea typeface="Helvetica Neue" panose="02000503000000020004" pitchFamily="2" charset="0"/>
-                <a:cs typeface="Helvetica Neue" panose="02000503000000020004" pitchFamily="2" charset="0"/>
-              </a:rPr>
-              <a:t>q,t,s,s</a:t>
-            </a:r>
-            <a:r>
-              <a:rPr kumimoji="0" lang="en-US" sz="1200" u="none" strike="noStrike" kern="1200" cap="none" spc="0" normalizeH="0" baseline="0" noProof="0" dirty="0">
-                <a:ln>
-                  <a:noFill/>
-                </a:ln>
-                <a:solidFill>
-                  <a:prstClr val="white"/>
-                </a:solidFill>
-                <a:effectLst/>
-                <a:uLnTx/>
-                <a:uFillTx/>
-                <a:latin typeface="Helvetica Neue" panose="02000503000000020004" pitchFamily="2" charset="0"/>
-                <a:ea typeface="Helvetica Neue" panose="02000503000000020004" pitchFamily="2" charset="0"/>
-                <a:cs typeface="Helvetica Neue" panose="02000503000000020004" pitchFamily="2" charset="0"/>
-              </a:rPr>
-              <a:t>’] intersection with sphere stream</a:t>
+              <a:t>Noether Sea (Large Scale)</a:t>
             </a:r>
           </a:p>
           <a:p>
@@ -20648,7 +20051,7 @@
                 <a:ea typeface="Helvetica Neue" panose="02000503000000020004" pitchFamily="2" charset="0"/>
                 <a:cs typeface="Helvetica Neue" panose="02000503000000020004" pitchFamily="2" charset="0"/>
               </a:rPr>
-              <a:t>superposition</a:t>
+              <a:t>population per volume</a:t>
             </a:r>
           </a:p>
           <a:p>
@@ -20670,35 +20073,7 @@
                 <a:ea typeface="Helvetica Neue" panose="02000503000000020004" pitchFamily="2" charset="0"/>
                 <a:cs typeface="Helvetica Neue" panose="02000503000000020004" pitchFamily="2" charset="0"/>
               </a:rPr>
-              <a:t>net action </a:t>
-            </a:r>
-            <a:r>
-              <a:rPr lang="en-US" sz="1200" dirty="0">
-                <a:solidFill>
-                  <a:prstClr val="white"/>
-                </a:solidFill>
-                <a:latin typeface="Helvetica Neue" panose="02000503000000020004" pitchFamily="2" charset="0"/>
-                <a:ea typeface="Helvetica Neue" panose="02000503000000020004" pitchFamily="2" charset="0"/>
-                <a:cs typeface="Helvetica Neue" panose="02000503000000020004" pitchFamily="2" charset="0"/>
-              </a:rPr>
-              <a:t>determines </a:t>
-            </a:r>
-            <a:r>
-              <a:rPr kumimoji="0" lang="en-US" sz="1200" u="none" strike="noStrike" kern="1200" cap="none" spc="0" normalizeH="0" baseline="0" noProof="0" dirty="0">
-                <a:ln>
-                  <a:noFill/>
-                </a:ln>
-                <a:solidFill>
-                  <a:prstClr val="white"/>
-                </a:solidFill>
-                <a:effectLst/>
-                <a:uLnTx/>
-                <a:uFillTx/>
-                <a:latin typeface="Helvetica Neue" panose="02000503000000020004" pitchFamily="2" charset="0"/>
-                <a:ea typeface="Helvetica Neue" panose="02000503000000020004" pitchFamily="2" charset="0"/>
-                <a:cs typeface="Helvetica Neue" panose="02000503000000020004" pitchFamily="2" charset="0"/>
-              </a:rPr>
-              <a:t>path change</a:t>
+              <a:t>energy carried by architrino assemblies</a:t>
             </a:r>
           </a:p>
           <a:p>
@@ -20732,67 +20107,7 @@
                 <a:ea typeface="Helvetica Neue" panose="02000503000000020004" pitchFamily="2" charset="0"/>
                 <a:cs typeface="Helvetica Neue" panose="02000503000000020004" pitchFamily="2" charset="0"/>
               </a:rPr>
-              <a:t>Point Potential Densities (Large Scale)</a:t>
-            </a:r>
-          </a:p>
-          <a:p>
-            <a:pPr lvl="1">
-              <a:defRPr/>
-            </a:pPr>
-            <a:r>
-              <a:rPr kumimoji="0" lang="en-US" sz="1200" u="none" strike="noStrike" kern="1200" cap="none" spc="0" normalizeH="0" baseline="0" noProof="0" dirty="0">
-                <a:ln>
-                  <a:noFill/>
-                </a:ln>
-                <a:solidFill>
-                  <a:prstClr val="white"/>
-                </a:solidFill>
-                <a:effectLst/>
-                <a:uLnTx/>
-                <a:uFillTx/>
-                <a:latin typeface="Helvetica Neue" panose="02000503000000020004" pitchFamily="2" charset="0"/>
-                <a:ea typeface="Helvetica Neue" panose="02000503000000020004" pitchFamily="2" charset="0"/>
-                <a:cs typeface="Helvetica Neue" panose="02000503000000020004" pitchFamily="2" charset="0"/>
-              </a:rPr>
-              <a:t>population per volume</a:t>
-            </a:r>
-          </a:p>
-          <a:p>
-            <a:pPr lvl="1">
-              <a:defRPr/>
-            </a:pPr>
-            <a:r>
-              <a:rPr lang="en-US" sz="1200" dirty="0">
-                <a:solidFill>
-                  <a:prstClr val="white"/>
-                </a:solidFill>
-                <a:latin typeface="Helvetica Neue" panose="02000503000000020004" pitchFamily="2" charset="0"/>
-                <a:ea typeface="Helvetica Neue" panose="02000503000000020004" pitchFamily="2" charset="0"/>
-                <a:cs typeface="Helvetica Neue" panose="02000503000000020004" pitchFamily="2" charset="0"/>
-              </a:rPr>
-              <a:t>energy carried by point potentials</a:t>
-            </a:r>
-          </a:p>
-          <a:p>
-            <a:pPr lvl="1">
-              <a:defRPr/>
-            </a:pPr>
-            <a:r>
-              <a:rPr kumimoji="0" lang="en-US" sz="1200" u="none" strike="noStrike" kern="1200" cap="none" spc="0" normalizeH="0" baseline="0" noProof="0" dirty="0">
-                <a:ln>
-                  <a:noFill/>
-                </a:ln>
-                <a:solidFill>
-                  <a:prstClr val="white"/>
-                </a:solidFill>
-                <a:effectLst/>
-                <a:uLnTx/>
-                <a:uFillTx/>
-                <a:latin typeface="Helvetica Neue" panose="02000503000000020004" pitchFamily="2" charset="0"/>
-                <a:ea typeface="Helvetica Neue" panose="02000503000000020004" pitchFamily="2" charset="0"/>
-                <a:cs typeface="Helvetica Neue" panose="02000503000000020004" pitchFamily="2" charset="0"/>
-              </a:rPr>
-              <a:t>population distribution (50/50)</a:t>
+              <a:t>locally neutral polarity distribution</a:t>
             </a:r>
           </a:p>
         </p:txBody>
@@ -21213,7 +20528,7 @@
                 <a:ea typeface="Helvetica Neue" panose="02000503000000020004" pitchFamily="2" charset="0"/>
                 <a:cs typeface="Helvetica Neue" panose="02000503000000020004" pitchFamily="2" charset="0"/>
               </a:rPr>
-              <a:t>J Mark Morris - Model of Nature</a:t>
+              <a:t>J Mark Morris - Architrino Assembly Architecture</a:t>
             </a:r>
           </a:p>
         </p:txBody>
@@ -21307,23 +20622,7 @@
               <a:tabLst/>
               <a:defRPr/>
             </a:pPr>
-            <a:r>
-              <a:rPr kumimoji="0" lang="en-US" sz="11500" b="0" i="0" u="none" strike="noStrike" kern="1200" cap="none" spc="0" normalizeH="0" baseline="0" noProof="0" dirty="0">
-                <a:ln>
-                  <a:noFill/>
-                </a:ln>
-                <a:solidFill>
-                  <a:prstClr val="white"/>
-                </a:solidFill>
-                <a:effectLst/>
-                <a:uLnTx/>
-                <a:uFillTx/>
-                <a:latin typeface="Helvetica Neue UltraLight" panose="02000206000000020004" pitchFamily="2" charset="0"/>
-                <a:ea typeface="Helvetica Neue UltraLight" panose="02000206000000020004" pitchFamily="2" charset="0"/>
-                <a:cs typeface="Helvetica Neue" panose="02000503000000020004" pitchFamily="2" charset="0"/>
-              </a:rPr>
-              <a:t>neoclassical.ai</a:t>
-            </a:r>
+            <a:endParaRPr/>
           </a:p>
           <a:p>
             <a:pPr marL="0" marR="0" lvl="0" indent="0" algn="ctr" defTabSz="914400" rtl="0" eaLnBrk="1" fontAlgn="auto" latinLnBrk="0" hangingPunct="1">
@@ -21358,7 +20657,7 @@
                 <a:ea typeface="Helvetica Neue Condensed Black" panose="02000503000000020004" pitchFamily="2" charset="0"/>
                 <a:cs typeface="Helvetica Neue Condensed Black" panose="02000503000000020004" pitchFamily="2" charset="0"/>
               </a:rPr>
-              <a:t>Solving Zeno’s Paradox</a:t>
+              <a:t>Causal Wakes and Zeno's Paradox</a:t>
             </a:r>
             <a:endParaRPr kumimoji="0" lang="en-US" sz="8000" b="1" i="0" u="none" strike="noStrike" kern="1200" cap="none" spc="0" normalizeH="0" baseline="0" noProof="0" dirty="0">
               <a:ln>
@@ -21643,7 +20942,7 @@
                 <a:ea typeface="Helvetica Neue" panose="02000503000000020004" pitchFamily="2" charset="0"/>
                 <a:cs typeface="Helvetica Neue" panose="02000503000000020004" pitchFamily="2" charset="0"/>
               </a:rPr>
-              <a:t>Nature’s Solution to Zeno’s Paradox and the 1/r Potential Curve</a:t>
+              <a:t>Causal Wakes and the 1/r Curve</a:t>
             </a:r>
           </a:p>
         </p:txBody>
@@ -21708,7 +21007,7 @@
                 <a:ea typeface="Helvetica Neue" panose="02000503000000020004" pitchFamily="2" charset="0"/>
                 <a:cs typeface="Helvetica Neue" panose="02000503000000020004" pitchFamily="2" charset="0"/>
               </a:rPr>
-              <a:t>Nature is a pure geometry defined by continuous paths of equal and opposite point potentials. It’s a path theory! </a:t>
+              <a:t>Nature is modeled as geometry in absolute time and the Euclidean void, populated by equal-and-opposite architrinos.</a:t>
             </a:r>
           </a:p>
           <a:p>
@@ -21732,41 +21031,7 @@
                 <a:ea typeface="Helvetica Neue" panose="02000503000000020004" pitchFamily="2" charset="0"/>
                 <a:cs typeface="Helvetica Neue" panose="02000503000000020004" pitchFamily="2" charset="0"/>
               </a:rPr>
-              <a:t>Each path is an open ended string headed by a point potential emitter/receiver. (Nature </a:t>
-            </a:r>
-            <a:r>
-              <a:rPr kumimoji="0" lang="en-US" sz="1600" b="0" i="0" u="none" strike="noStrike" kern="1200" cap="none" spc="0" normalizeH="0" baseline="0" noProof="0" dirty="0" err="1">
-                <a:ln>
-                  <a:noFill/>
-                </a:ln>
-                <a:solidFill>
-                  <a:prstClr val="white"/>
-                </a:solidFill>
-                <a:effectLst/>
-                <a:uLnTx/>
-                <a:uFillTx/>
-                <a:latin typeface="Helvetica Neue" panose="02000503000000020004" pitchFamily="2" charset="0"/>
-                <a:ea typeface="Helvetica Neue" panose="02000503000000020004" pitchFamily="2" charset="0"/>
-                <a:cs typeface="Helvetica Neue" panose="02000503000000020004" pitchFamily="2" charset="0"/>
-              </a:rPr>
-              <a:t>echos</a:t>
-            </a:r>
-            <a:r>
-              <a:rPr kumimoji="0" lang="en-US" sz="1600" b="0" i="0" u="none" strike="noStrike" kern="1200" cap="none" spc="0" normalizeH="0" baseline="0" noProof="0" dirty="0">
-                <a:ln>
-                  <a:noFill/>
-                </a:ln>
-                <a:solidFill>
-                  <a:prstClr val="white"/>
-                </a:solidFill>
-                <a:effectLst/>
-                <a:uLnTx/>
-                <a:uFillTx/>
-                <a:latin typeface="Helvetica Neue" panose="02000503000000020004" pitchFamily="2" charset="0"/>
-                <a:ea typeface="Helvetica Neue" panose="02000503000000020004" pitchFamily="2" charset="0"/>
-                <a:cs typeface="Helvetica Neue" panose="02000503000000020004" pitchFamily="2" charset="0"/>
-              </a:rPr>
-              <a:t> at many scales)</a:t>
+              <a:t>Each architrino is a polarity-bearing emitter/receiver; its continuous path emits causal wake surfaces.</a:t>
             </a:r>
           </a:p>
           <a:p>
@@ -21790,7 +21055,7 @@
                 <a:ea typeface="Helvetica Neue" panose="02000503000000020004" pitchFamily="2" charset="0"/>
                 <a:cs typeface="Helvetica Neue" panose="02000503000000020004" pitchFamily="2" charset="0"/>
               </a:rPr>
-              <a:t>Emission is constant q/t</a:t>
+              <a:t>A received hit occurs when a receiver intersects a causal wake surface; superposition determines the net response.</a:t>
             </a:r>
           </a:p>
           <a:p>
@@ -21814,7 +21079,7 @@
                 <a:ea typeface="Helvetica Neue" panose="02000503000000020004" pitchFamily="2" charset="0"/>
                 <a:cs typeface="Helvetica Neue" panose="02000503000000020004" pitchFamily="2" charset="0"/>
               </a:rPr>
-              <a:t>Action occurs when a receiver intersects a sphere stream. (superposition applies)</a:t>
+              <a:t>Because an architrino can move faster than wake speed, v = c_f marks a self-hit onset boundary rather than an observer-level speed limit.</a:t>
             </a:r>
           </a:p>
           <a:p>
@@ -21838,252 +21103,8 @@
                 <a:ea typeface="Helvetica Neue" panose="02000503000000020004" pitchFamily="2" charset="0"/>
                 <a:cs typeface="Helvetica Neue" panose="02000503000000020004" pitchFamily="2" charset="0"/>
               </a:rPr>
-              <a:t>t=now of curvy paths in s (graph).</a:t>
+              <a:t>Ideal binaries must be tested through causal-root ledgers, path-history feedback, and branch stability, not through an instantaneous 1/r curve alone.</a:t>
             </a:r>
-          </a:p>
-          <a:p>
-            <a:pPr marL="914400" lvl="1" indent="-457200">
-              <a:buFont typeface="Arial" panose="020B0604020202020204" pitchFamily="34" charset="0"/>
-              <a:buChar char="•"/>
-              <a:defRPr/>
-            </a:pPr>
-            <a:r>
-              <a:rPr kumimoji="0" lang="en-US" sz="1600" b="0" i="0" u="none" strike="noStrike" kern="1200" cap="none" spc="0" normalizeH="0" baseline="0" noProof="0" dirty="0">
-                <a:ln>
-                  <a:noFill/>
-                </a:ln>
-                <a:solidFill>
-                  <a:prstClr val="white"/>
-                </a:solidFill>
-                <a:effectLst/>
-                <a:uLnTx/>
-                <a:uFillTx/>
-                <a:latin typeface="Helvetica Neue" panose="02000503000000020004" pitchFamily="2" charset="0"/>
-                <a:ea typeface="Helvetica Neue" panose="02000503000000020004" pitchFamily="2" charset="0"/>
-                <a:cs typeface="Helvetica Neue" panose="02000503000000020004" pitchFamily="2" charset="0"/>
-              </a:rPr>
-              <a:t>because point potentials can exceed their own field speed, we have a symmetry breaking point between two regions, as a bonus we get a maximum curvature in a binary (or orbiting/translating binary)</a:t>
-            </a:r>
-          </a:p>
-          <a:p>
-            <a:pPr marL="914400" lvl="1" indent="-457200">
-              <a:buFont typeface="Arial" panose="020B0604020202020204" pitchFamily="34" charset="0"/>
-              <a:buChar char="•"/>
-              <a:defRPr/>
-            </a:pPr>
-            <a:r>
-              <a:rPr kumimoji="0" lang="en-US" sz="1600" b="0" i="0" u="none" strike="noStrike" kern="1200" cap="none" spc="0" normalizeH="0" baseline="0" noProof="0" dirty="0">
-                <a:ln>
-                  <a:noFill/>
-                </a:ln>
-                <a:solidFill>
-                  <a:prstClr val="white"/>
-                </a:solidFill>
-                <a:effectLst/>
-                <a:uLnTx/>
-                <a:uFillTx/>
-                <a:latin typeface="Helvetica Neue" panose="02000503000000020004" pitchFamily="2" charset="0"/>
-                <a:ea typeface="Helvetica Neue" panose="02000503000000020004" pitchFamily="2" charset="0"/>
-                <a:cs typeface="Helvetica Neue" panose="02000503000000020004" pitchFamily="2" charset="0"/>
-              </a:rPr>
-              <a:t>An ideal binary (and ideal elliptical?) has symmetry such that the point potentials must experience the equivalent action. When v=0 and no axial rotation (holy cow now we also have to compute the effects of a rotation of the binary around one other dimension.</a:t>
-            </a:r>
-          </a:p>
-          <a:p>
-            <a:pPr marL="914400" lvl="1" indent="-457200">
-              <a:buFont typeface="Arial" panose="020B0604020202020204" pitchFamily="34" charset="0"/>
-              <a:buChar char="•"/>
-              <a:defRPr/>
-            </a:pPr>
-            <a:r>
-              <a:rPr kumimoji="0" lang="en-US" sz="1600" b="0" i="0" u="none" strike="noStrike" kern="1200" cap="none" spc="0" normalizeH="0" baseline="0" noProof="0" dirty="0">
-                <a:ln>
-                  <a:noFill/>
-                </a:ln>
-                <a:solidFill>
-                  <a:prstClr val="white"/>
-                </a:solidFill>
-                <a:effectLst/>
-                <a:uLnTx/>
-                <a:uFillTx/>
-                <a:latin typeface="Helvetica Neue" panose="02000503000000020004" pitchFamily="2" charset="0"/>
-                <a:ea typeface="Helvetica Neue" panose="02000503000000020004" pitchFamily="2" charset="0"/>
-                <a:cs typeface="Helvetica Neue" panose="02000503000000020004" pitchFamily="2" charset="0"/>
-              </a:rPr>
-              <a:t>There may be equivalent geometrical models. Or models that express these concepts in more abstract mathematical terms. That itself is kind of </a:t>
-            </a:r>
-            <a:r>
-              <a:rPr kumimoji="0" lang="en-US" sz="1600" b="0" i="0" u="none" strike="noStrike" kern="1200" cap="none" spc="0" normalizeH="0" baseline="0" noProof="0" dirty="0" err="1">
-                <a:ln>
-                  <a:noFill/>
-                </a:ln>
-                <a:solidFill>
-                  <a:prstClr val="white"/>
-                </a:solidFill>
-                <a:effectLst/>
-                <a:uLnTx/>
-                <a:uFillTx/>
-                <a:latin typeface="Helvetica Neue" panose="02000503000000020004" pitchFamily="2" charset="0"/>
-                <a:ea typeface="Helvetica Neue" panose="02000503000000020004" pitchFamily="2" charset="0"/>
-                <a:cs typeface="Helvetica Neue" panose="02000503000000020004" pitchFamily="2" charset="0"/>
-              </a:rPr>
-              <a:t>mindblowing</a:t>
-            </a:r>
-            <a:r>
-              <a:rPr kumimoji="0" lang="en-US" sz="1600" b="0" i="0" u="none" strike="noStrike" kern="1200" cap="none" spc="0" normalizeH="0" baseline="0" noProof="0" dirty="0">
-                <a:ln>
-                  <a:noFill/>
-                </a:ln>
-                <a:solidFill>
-                  <a:prstClr val="white"/>
-                </a:solidFill>
-                <a:effectLst/>
-                <a:uLnTx/>
-                <a:uFillTx/>
-                <a:latin typeface="Helvetica Neue" panose="02000503000000020004" pitchFamily="2" charset="0"/>
-                <a:ea typeface="Helvetica Neue" panose="02000503000000020004" pitchFamily="2" charset="0"/>
-                <a:cs typeface="Helvetica Neue" panose="02000503000000020004" pitchFamily="2" charset="0"/>
-              </a:rPr>
-              <a:t>. We think we are reality. In a sense we are a simulation of reality.</a:t>
-            </a:r>
-          </a:p>
-          <a:p>
-            <a:pPr marL="914400" lvl="1" indent="-457200">
-              <a:buFont typeface="Arial" panose="020B0604020202020204" pitchFamily="34" charset="0"/>
-              <a:buChar char="•"/>
-              <a:defRPr/>
-            </a:pPr>
-            <a:endParaRPr lang="en-US" sz="1600" dirty="0">
-              <a:solidFill>
-                <a:prstClr val="white"/>
-              </a:solidFill>
-              <a:latin typeface="Helvetica Neue" panose="02000503000000020004" pitchFamily="2" charset="0"/>
-              <a:ea typeface="Helvetica Neue" panose="02000503000000020004" pitchFamily="2" charset="0"/>
-              <a:cs typeface="Helvetica Neue" panose="02000503000000020004" pitchFamily="2" charset="0"/>
-            </a:endParaRPr>
-          </a:p>
-          <a:p>
-            <a:pPr marL="914400" lvl="1" indent="-457200">
-              <a:buFont typeface="Arial" panose="020B0604020202020204" pitchFamily="34" charset="0"/>
-              <a:buChar char="•"/>
-              <a:defRPr/>
-            </a:pPr>
-            <a:r>
-              <a:rPr kumimoji="0" lang="en-US" sz="1600" b="0" i="0" u="none" strike="noStrike" kern="1200" cap="none" spc="0" normalizeH="0" baseline="0" noProof="0" dirty="0">
-                <a:ln>
-                  <a:noFill/>
-                </a:ln>
-                <a:solidFill>
-                  <a:prstClr val="white"/>
-                </a:solidFill>
-                <a:effectLst/>
-                <a:uLnTx/>
-                <a:uFillTx/>
-                <a:latin typeface="Helvetica Neue" panose="02000503000000020004" pitchFamily="2" charset="0"/>
-                <a:ea typeface="Helvetica Neue" panose="02000503000000020004" pitchFamily="2" charset="0"/>
-                <a:cs typeface="Helvetica Neue" panose="02000503000000020004" pitchFamily="2" charset="0"/>
-              </a:rPr>
-              <a:t>Put these points on copies of my new this is nature slide in this deck.</a:t>
-            </a:r>
-          </a:p>
-          <a:p>
-            <a:pPr marL="457200" marR="0" lvl="0" indent="-457200" algn="l" defTabSz="914400" rtl="0" eaLnBrk="1" fontAlgn="auto" latinLnBrk="0" hangingPunct="1">
-              <a:lnSpc>
-                <a:spcPct val="100000"/>
-              </a:lnSpc>
-              <a:spcBef>
-                <a:spcPts val="0"/>
-              </a:spcBef>
-              <a:spcAft>
-                <a:spcPts val="0"/>
-              </a:spcAft>
-              <a:buClrTx/>
-              <a:buSzTx/>
-              <a:buFont typeface="Arial" panose="020B0604020202020204" pitchFamily="34" charset="0"/>
-              <a:buChar char="•"/>
-              <a:tabLst/>
-              <a:defRPr/>
-            </a:pPr>
-            <a:endParaRPr kumimoji="0" lang="en-US" sz="1400" b="0" i="0" u="none" strike="noStrike" kern="1200" cap="none" spc="0" normalizeH="0" baseline="0" noProof="0" dirty="0">
-              <a:ln>
-                <a:noFill/>
-              </a:ln>
-              <a:solidFill>
-                <a:srgbClr val="FF0000"/>
-              </a:solidFill>
-              <a:effectLst/>
-              <a:uLnTx/>
-              <a:uFillTx/>
-              <a:latin typeface="Helvetica Neue" panose="02000503000000020004" pitchFamily="2" charset="0"/>
-              <a:ea typeface="Helvetica Neue" panose="02000503000000020004" pitchFamily="2" charset="0"/>
-              <a:cs typeface="Helvetica Neue" panose="02000503000000020004" pitchFamily="2" charset="0"/>
-            </a:endParaRPr>
-          </a:p>
-          <a:p>
-            <a:pPr marL="457200" marR="0" lvl="0" indent="-457200" algn="l" defTabSz="914400" rtl="0" eaLnBrk="1" fontAlgn="auto" latinLnBrk="0" hangingPunct="1">
-              <a:lnSpc>
-                <a:spcPct val="100000"/>
-              </a:lnSpc>
-              <a:spcBef>
-                <a:spcPts val="0"/>
-              </a:spcBef>
-              <a:spcAft>
-                <a:spcPts val="0"/>
-              </a:spcAft>
-              <a:buClrTx/>
-              <a:buSzTx/>
-              <a:buFont typeface="Arial" panose="020B0604020202020204" pitchFamily="34" charset="0"/>
-              <a:buChar char="•"/>
-              <a:tabLst/>
-              <a:defRPr/>
-            </a:pPr>
-            <a:endParaRPr kumimoji="0" lang="en-US" sz="1200" b="0" i="0" u="none" strike="noStrike" kern="1200" cap="none" spc="0" normalizeH="0" baseline="0" noProof="0" dirty="0">
-              <a:ln>
-                <a:noFill/>
-              </a:ln>
-              <a:solidFill>
-                <a:srgbClr val="FF0000"/>
-              </a:solidFill>
-              <a:effectLst/>
-              <a:uLnTx/>
-              <a:uFillTx/>
-              <a:latin typeface="Calibri" panose="020F0502020204030204"/>
-              <a:ea typeface="+mn-ea"/>
-              <a:cs typeface="+mn-cs"/>
-            </a:endParaRPr>
-          </a:p>
-          <a:p>
-            <a:pPr marL="457200" marR="0" lvl="0" indent="-457200" algn="l" defTabSz="914400" rtl="0" eaLnBrk="1" fontAlgn="auto" latinLnBrk="0" hangingPunct="1">
-              <a:lnSpc>
-                <a:spcPct val="100000"/>
-              </a:lnSpc>
-              <a:spcBef>
-                <a:spcPts val="0"/>
-              </a:spcBef>
-              <a:spcAft>
-                <a:spcPts val="0"/>
-              </a:spcAft>
-              <a:buClrTx/>
-              <a:buSzTx/>
-              <a:buFont typeface="Arial" panose="020B0604020202020204" pitchFamily="34" charset="0"/>
-              <a:buChar char="•"/>
-              <a:tabLst/>
-              <a:defRPr/>
-            </a:pPr>
-            <a:endParaRPr kumimoji="0" lang="en-US" sz="1200" b="0" i="0" u="none" strike="noStrike" kern="1200" cap="none" spc="0" normalizeH="0" baseline="0" noProof="0" dirty="0">
-              <a:ln>
-                <a:noFill/>
-              </a:ln>
-              <a:solidFill>
-                <a:prstClr val="black"/>
-              </a:solidFill>
-              <a:effectLst/>
-              <a:uLnTx/>
-              <a:uFillTx/>
-              <a:latin typeface="Calibri" panose="020F0502020204030204"/>
-              <a:ea typeface="+mn-ea"/>
-              <a:cs typeface="+mn-cs"/>
-            </a:endParaRPr>
           </a:p>
         </p:txBody>
       </p:sp>
@@ -22353,7 +21374,7 @@
                 <a:ea typeface="Helvetica Neue" panose="02000503000000020004" pitchFamily="2" charset="0"/>
                 <a:cs typeface="Helvetica Neue" panose="02000503000000020004" pitchFamily="2" charset="0"/>
               </a:rPr>
-              <a:t>Nature’s Solution to Zeno’s Paradox and the 1/r Potential Curve</a:t>
+              <a:t>Causal Wakes and the 1/r Curve</a:t>
             </a:r>
           </a:p>
         </p:txBody>
@@ -22418,7 +21439,7 @@
                 <a:ea typeface="Helvetica Neue" panose="02000503000000020004" pitchFamily="2" charset="0"/>
                 <a:cs typeface="Helvetica Neue" panose="02000503000000020004" pitchFamily="2" charset="0"/>
               </a:rPr>
-              <a:t>The 1/r curve is how the geometry of potential works in nature.</a:t>
+              <a:t>The 1/r curve is an effective trace of wake geometry, not a constraint that every architrino pair must remain on one static curve.</a:t>
             </a:r>
           </a:p>
           <a:p>
@@ -22454,7 +21475,7 @@
                 <a:ea typeface="Helvetica Neue" panose="02000503000000020004" pitchFamily="2" charset="0"/>
                 <a:cs typeface="Helvetica Neue" panose="02000503000000020004" pitchFamily="2" charset="0"/>
               </a:rPr>
-              <a:t>The reason Zeno’s Paradox is solved is that nature is not constrained so that every point potential relationship be on a 1/r potential curve.</a:t>
+              <a:t>A receiver can pass through many wake surfaces while its path is determined by the superposed causal-root ledger.</a:t>
             </a:r>
           </a:p>
           <a:p>
@@ -22490,7 +21511,7 @@
                 <a:ea typeface="Helvetica Neue" panose="02000503000000020004" pitchFamily="2" charset="0"/>
                 <a:cs typeface="Helvetica Neue" panose="02000503000000020004" pitchFamily="2" charset="0"/>
               </a:rPr>
-              <a:t>Point potentials routinely pass through 1/r potential curves on a per relationship basis.</a:t>
+              <a:t>In the super-field-speed regime, same-source roots can appear: an architrino may intercept its own earlier wake.</a:t>
             </a:r>
           </a:p>
           <a:p>
@@ -22526,395 +21547,8 @@
                 <a:ea typeface="Helvetica Neue" panose="02000503000000020004" pitchFamily="2" charset="0"/>
                 <a:cs typeface="Helvetica Neue" panose="02000503000000020004" pitchFamily="2" charset="0"/>
               </a:rPr>
-              <a:t>Argument via superposition: the receiver point potential has infinite (check) solutions on the vector line defined by E&gt;A.</a:t>
+              <a:t>The open calculation is to integrate that self-hit feedback and determine whether it approaches a finite branch, a divergence, or a rejected chart.</a:t>
             </a:r>
-          </a:p>
-          <a:p>
-            <a:pPr marL="914400" marR="0" lvl="1" indent="-457200" algn="l" defTabSz="914400" rtl="0" eaLnBrk="1" fontAlgn="auto" latinLnBrk="0" hangingPunct="1">
-              <a:lnSpc>
-                <a:spcPct val="100000"/>
-              </a:lnSpc>
-              <a:spcBef>
-                <a:spcPts val="0"/>
-              </a:spcBef>
-              <a:spcAft>
-                <a:spcPts val="0"/>
-              </a:spcAft>
-              <a:buClrTx/>
-              <a:buSzTx/>
-              <a:buFont typeface="Arial" panose="020B0604020202020204" pitchFamily="34" charset="0"/>
-              <a:buChar char="•"/>
-              <a:tabLst/>
-              <a:defRPr/>
-            </a:pPr>
-            <a:r>
-              <a:rPr kumimoji="0" lang="en-US" sz="1600" b="0" i="0" u="none" strike="noStrike" kern="1200" cap="none" spc="0" normalizeH="0" baseline="0" noProof="0" dirty="0">
-                <a:ln>
-                  <a:noFill/>
-                </a:ln>
-                <a:solidFill>
-                  <a:prstClr val="white"/>
-                </a:solidFill>
-                <a:effectLst/>
-                <a:uLnTx/>
-                <a:uFillTx/>
-                <a:latin typeface="Helvetica Neue" panose="02000503000000020004" pitchFamily="2" charset="0"/>
-                <a:ea typeface="Helvetica Neue" panose="02000503000000020004" pitchFamily="2" charset="0"/>
-                <a:cs typeface="Helvetica Neue" panose="02000503000000020004" pitchFamily="2" charset="0"/>
-              </a:rPr>
-              <a:t>And that is only one relationship. There are a countable infinity of relationships.</a:t>
-            </a:r>
-          </a:p>
-          <a:p>
-            <a:pPr marL="457200" marR="0" lvl="0" indent="-457200" algn="l" defTabSz="914400" rtl="0" eaLnBrk="1" fontAlgn="auto" latinLnBrk="0" hangingPunct="1">
-              <a:lnSpc>
-                <a:spcPct val="100000"/>
-              </a:lnSpc>
-              <a:spcBef>
-                <a:spcPts val="0"/>
-              </a:spcBef>
-              <a:spcAft>
-                <a:spcPts val="0"/>
-              </a:spcAft>
-              <a:buClrTx/>
-              <a:buSzTx/>
-              <a:buFont typeface="Arial" panose="020B0604020202020204" pitchFamily="34" charset="0"/>
-              <a:buChar char="•"/>
-              <a:tabLst/>
-              <a:defRPr/>
-            </a:pPr>
-            <a:r>
-              <a:rPr kumimoji="0" lang="en-US" sz="1600" b="0" i="0" u="none" strike="noStrike" kern="1200" cap="none" spc="0" normalizeH="0" baseline="0" noProof="0" dirty="0">
-                <a:ln>
-                  <a:noFill/>
-                </a:ln>
-                <a:solidFill>
-                  <a:prstClr val="white"/>
-                </a:solidFill>
-                <a:effectLst/>
-                <a:uLnTx/>
-                <a:uFillTx/>
-                <a:latin typeface="Helvetica Neue" panose="02000503000000020004" pitchFamily="2" charset="0"/>
-                <a:ea typeface="Helvetica Neue" panose="02000503000000020004" pitchFamily="2" charset="0"/>
-                <a:cs typeface="Helvetica Neue" panose="02000503000000020004" pitchFamily="2" charset="0"/>
-              </a:rPr>
-              <a:t>what about v&gt;@.  If it became isolated and all potential was it’s own repelling potential, well then what?  It would accelerate to some limit or infinite? Have to calculate the force from the 1/r curve given the energy just somehow edged v &gt; @.</a:t>
-            </a:r>
-          </a:p>
-          <a:p>
-            <a:pPr marL="457200" marR="0" lvl="0" indent="-457200" algn="l" defTabSz="914400" rtl="0" eaLnBrk="1" fontAlgn="auto" latinLnBrk="0" hangingPunct="1">
-              <a:lnSpc>
-                <a:spcPct val="100000"/>
-              </a:lnSpc>
-              <a:spcBef>
-                <a:spcPts val="0"/>
-              </a:spcBef>
-              <a:spcAft>
-                <a:spcPts val="0"/>
-              </a:spcAft>
-              <a:buClrTx/>
-              <a:buSzTx/>
-              <a:buFont typeface="Arial" panose="020B0604020202020204" pitchFamily="34" charset="0"/>
-              <a:buChar char="•"/>
-              <a:tabLst/>
-              <a:defRPr/>
-            </a:pPr>
-            <a:r>
-              <a:rPr kumimoji="0" lang="en-US" sz="1600" b="0" i="0" u="none" strike="noStrike" kern="1200" cap="none" spc="0" normalizeH="0" baseline="0" noProof="0" dirty="0">
-                <a:ln>
-                  <a:noFill/>
-                </a:ln>
-                <a:solidFill>
-                  <a:prstClr val="white"/>
-                </a:solidFill>
-                <a:effectLst/>
-                <a:uLnTx/>
-                <a:uFillTx/>
-                <a:latin typeface="Helvetica Neue" panose="02000503000000020004" pitchFamily="2" charset="0"/>
-                <a:ea typeface="Helvetica Neue" panose="02000503000000020004" pitchFamily="2" charset="0"/>
-                <a:cs typeface="Helvetica Neue" panose="02000503000000020004" pitchFamily="2" charset="0"/>
-              </a:rPr>
-              <a:t>It’s sort of like it would ride it’s own surf, continuously accelerating but by smaller amounts. what is the integral of 1/r?  ln(r)?</a:t>
-            </a:r>
-          </a:p>
-          <a:p>
-            <a:pPr marL="457200" marR="0" lvl="0" indent="-457200" algn="l" defTabSz="914400" rtl="0" eaLnBrk="1" fontAlgn="auto" latinLnBrk="0" hangingPunct="1">
-              <a:lnSpc>
-                <a:spcPct val="100000"/>
-              </a:lnSpc>
-              <a:spcBef>
-                <a:spcPts val="0"/>
-              </a:spcBef>
-              <a:spcAft>
-                <a:spcPts val="0"/>
-              </a:spcAft>
-              <a:buClrTx/>
-              <a:buSzTx/>
-              <a:buFont typeface="Arial" panose="020B0604020202020204" pitchFamily="34" charset="0"/>
-              <a:buChar char="•"/>
-              <a:tabLst/>
-              <a:defRPr/>
-            </a:pPr>
-            <a:r>
-              <a:rPr kumimoji="0" lang="en-US" sz="1600" b="0" i="0" u="none" strike="noStrike" kern="1200" cap="none" spc="0" normalizeH="0" baseline="0" noProof="0" dirty="0">
-                <a:ln>
-                  <a:noFill/>
-                </a:ln>
-                <a:solidFill>
-                  <a:prstClr val="white"/>
-                </a:solidFill>
-                <a:effectLst/>
-                <a:uLnTx/>
-                <a:uFillTx/>
-                <a:latin typeface="Helvetica Neue" panose="02000503000000020004" pitchFamily="2" charset="0"/>
-                <a:ea typeface="Helvetica Neue" panose="02000503000000020004" pitchFamily="2" charset="0"/>
-                <a:cs typeface="Helvetica Neue" panose="02000503000000020004" pitchFamily="2" charset="0"/>
-              </a:rPr>
-              <a:t>Point potentials can move through Dirac sphere streams and vice versa</a:t>
-            </a:r>
-          </a:p>
-          <a:p>
-            <a:pPr marL="457200" marR="0" lvl="0" indent="-457200" algn="l" defTabSz="914400" rtl="0" eaLnBrk="1" fontAlgn="auto" latinLnBrk="0" hangingPunct="1">
-              <a:lnSpc>
-                <a:spcPct val="100000"/>
-              </a:lnSpc>
-              <a:spcBef>
-                <a:spcPts val="0"/>
-              </a:spcBef>
-              <a:spcAft>
-                <a:spcPts val="0"/>
-              </a:spcAft>
-              <a:buClrTx/>
-              <a:buSzTx/>
-              <a:buFont typeface="Arial" panose="020B0604020202020204" pitchFamily="34" charset="0"/>
-              <a:buChar char="•"/>
-              <a:tabLst/>
-              <a:defRPr/>
-            </a:pPr>
-            <a:r>
-              <a:rPr kumimoji="0" lang="en-US" sz="1600" b="0" i="0" u="none" strike="noStrike" kern="1200" cap="none" spc="0" normalizeH="0" baseline="0" noProof="0" dirty="0">
-                <a:ln>
-                  <a:noFill/>
-                </a:ln>
-                <a:solidFill>
-                  <a:prstClr val="white"/>
-                </a:solidFill>
-                <a:effectLst/>
-                <a:uLnTx/>
-                <a:uFillTx/>
-                <a:latin typeface="Helvetica Neue" panose="02000503000000020004" pitchFamily="2" charset="0"/>
-                <a:ea typeface="Helvetica Neue" panose="02000503000000020004" pitchFamily="2" charset="0"/>
-                <a:cs typeface="Helvetica Neue" panose="02000503000000020004" pitchFamily="2" charset="0"/>
-              </a:rPr>
-              <a:t>A point potential is always intersecting at least one Dirac sphere from all other point potentials</a:t>
-            </a:r>
-          </a:p>
-          <a:p>
-            <a:pPr marL="457200" marR="0" lvl="0" indent="-457200" algn="l" defTabSz="914400" rtl="0" eaLnBrk="1" fontAlgn="auto" latinLnBrk="0" hangingPunct="1">
-              <a:lnSpc>
-                <a:spcPct val="100000"/>
-              </a:lnSpc>
-              <a:spcBef>
-                <a:spcPts val="0"/>
-              </a:spcBef>
-              <a:spcAft>
-                <a:spcPts val="0"/>
-              </a:spcAft>
-              <a:buClrTx/>
-              <a:buSzTx/>
-              <a:buFont typeface="Arial" panose="020B0604020202020204" pitchFamily="34" charset="0"/>
-              <a:buChar char="•"/>
-              <a:tabLst/>
-              <a:defRPr/>
-            </a:pPr>
-            <a:r>
-              <a:rPr kumimoji="0" lang="en-US" sz="1600" b="0" i="0" u="none" strike="noStrike" kern="1200" cap="none" spc="0" normalizeH="0" baseline="0" noProof="0" dirty="0">
-                <a:ln>
-                  <a:noFill/>
-                </a:ln>
-                <a:solidFill>
-                  <a:prstClr val="white"/>
-                </a:solidFill>
-                <a:effectLst/>
-                <a:uLnTx/>
-                <a:uFillTx/>
-                <a:latin typeface="Helvetica Neue" panose="02000503000000020004" pitchFamily="2" charset="0"/>
-                <a:ea typeface="Helvetica Neue" panose="02000503000000020004" pitchFamily="2" charset="0"/>
-                <a:cs typeface="Helvetica Neue" panose="02000503000000020004" pitchFamily="2" charset="0"/>
-              </a:rPr>
-              <a:t>Each point potential has vector velocities a) on the geodesic and b) on the line to the point of emission of each intersecting sphere stream.</a:t>
-            </a:r>
-          </a:p>
-          <a:p>
-            <a:pPr marL="457200" marR="0" lvl="0" indent="-457200" algn="l" defTabSz="914400" rtl="0" eaLnBrk="1" fontAlgn="auto" latinLnBrk="0" hangingPunct="1">
-              <a:lnSpc>
-                <a:spcPct val="100000"/>
-              </a:lnSpc>
-              <a:spcBef>
-                <a:spcPts val="0"/>
-              </a:spcBef>
-              <a:spcAft>
-                <a:spcPts val="0"/>
-              </a:spcAft>
-              <a:buClrTx/>
-              <a:buSzTx/>
-              <a:buFont typeface="Arial" panose="020B0604020202020204" pitchFamily="34" charset="0"/>
-              <a:buChar char="•"/>
-              <a:tabLst/>
-              <a:defRPr/>
-            </a:pPr>
-            <a:r>
-              <a:rPr kumimoji="0" lang="en-US" sz="1600" b="0" i="0" u="none" strike="noStrike" kern="1200" cap="none" spc="0" normalizeH="0" baseline="0" noProof="0" dirty="0">
-                <a:ln>
-                  <a:noFill/>
-                </a:ln>
-                <a:solidFill>
-                  <a:prstClr val="white"/>
-                </a:solidFill>
-                <a:effectLst/>
-                <a:uLnTx/>
-                <a:uFillTx/>
-                <a:latin typeface="Helvetica Neue" panose="02000503000000020004" pitchFamily="2" charset="0"/>
-                <a:ea typeface="Helvetica Neue" panose="02000503000000020004" pitchFamily="2" charset="0"/>
-                <a:cs typeface="Helvetica Neue" panose="02000503000000020004" pitchFamily="2" charset="0"/>
-              </a:rPr>
-              <a:t>And as your velocity adjusts, you are either surfing farther away in time, steady time, or closer in time to the point of emission.</a:t>
-            </a:r>
-          </a:p>
-          <a:p>
-            <a:pPr marL="457200" marR="0" lvl="0" indent="-457200" algn="l" defTabSz="914400" rtl="0" eaLnBrk="1" fontAlgn="auto" latinLnBrk="0" hangingPunct="1">
-              <a:lnSpc>
-                <a:spcPct val="100000"/>
-              </a:lnSpc>
-              <a:spcBef>
-                <a:spcPts val="0"/>
-              </a:spcBef>
-              <a:spcAft>
-                <a:spcPts val="0"/>
-              </a:spcAft>
-              <a:buClrTx/>
-              <a:buSzTx/>
-              <a:buFont typeface="Arial" panose="020B0604020202020204" pitchFamily="34" charset="0"/>
-              <a:buChar char="•"/>
-              <a:tabLst/>
-              <a:defRPr/>
-            </a:pPr>
-            <a:r>
-              <a:rPr kumimoji="0" lang="en-US" sz="1600" b="0" i="0" u="none" strike="noStrike" kern="1200" cap="none" spc="0" normalizeH="0" baseline="0" noProof="0" dirty="0">
-                <a:ln>
-                  <a:noFill/>
-                </a:ln>
-                <a:solidFill>
-                  <a:prstClr val="white"/>
-                </a:solidFill>
-                <a:effectLst/>
-                <a:uLnTx/>
-                <a:uFillTx/>
-                <a:latin typeface="Helvetica Neue" panose="02000503000000020004" pitchFamily="2" charset="0"/>
-                <a:ea typeface="Helvetica Neue" panose="02000503000000020004" pitchFamily="2" charset="0"/>
-                <a:cs typeface="Helvetica Neue" panose="02000503000000020004" pitchFamily="2" charset="0"/>
-              </a:rPr>
-              <a:t>hmm, that’s interesting. the surfer doesn’t really see a 1/r curve.</a:t>
-            </a:r>
-          </a:p>
-          <a:p>
-            <a:pPr marL="457200" marR="0" lvl="0" indent="-457200" algn="l" defTabSz="914400" rtl="0" eaLnBrk="1" fontAlgn="auto" latinLnBrk="0" hangingPunct="1">
-              <a:lnSpc>
-                <a:spcPct val="100000"/>
-              </a:lnSpc>
-              <a:spcBef>
-                <a:spcPts val="0"/>
-              </a:spcBef>
-              <a:spcAft>
-                <a:spcPts val="0"/>
-              </a:spcAft>
-              <a:buClrTx/>
-              <a:buSzTx/>
-              <a:buFont typeface="Arial" panose="020B0604020202020204" pitchFamily="34" charset="0"/>
-              <a:buChar char="•"/>
-              <a:tabLst/>
-              <a:defRPr/>
-            </a:pPr>
-            <a:endParaRPr kumimoji="0" lang="en-US" sz="1400" b="0" i="0" u="none" strike="noStrike" kern="1200" cap="none" spc="0" normalizeH="0" baseline="0" noProof="0" dirty="0">
-              <a:ln>
-                <a:noFill/>
-              </a:ln>
-              <a:solidFill>
-                <a:srgbClr val="FF0000"/>
-              </a:solidFill>
-              <a:effectLst/>
-              <a:uLnTx/>
-              <a:uFillTx/>
-              <a:latin typeface="Helvetica Neue" panose="02000503000000020004" pitchFamily="2" charset="0"/>
-              <a:ea typeface="Helvetica Neue" panose="02000503000000020004" pitchFamily="2" charset="0"/>
-              <a:cs typeface="Helvetica Neue" panose="02000503000000020004" pitchFamily="2" charset="0"/>
-            </a:endParaRPr>
-          </a:p>
-          <a:p>
-            <a:pPr marL="457200" marR="0" lvl="0" indent="-457200" algn="l" defTabSz="914400" rtl="0" eaLnBrk="1" fontAlgn="auto" latinLnBrk="0" hangingPunct="1">
-              <a:lnSpc>
-                <a:spcPct val="100000"/>
-              </a:lnSpc>
-              <a:spcBef>
-                <a:spcPts val="0"/>
-              </a:spcBef>
-              <a:spcAft>
-                <a:spcPts val="0"/>
-              </a:spcAft>
-              <a:buClrTx/>
-              <a:buSzTx/>
-              <a:buFont typeface="Arial" panose="020B0604020202020204" pitchFamily="34" charset="0"/>
-              <a:buChar char="•"/>
-              <a:tabLst/>
-              <a:defRPr/>
-            </a:pPr>
-            <a:endParaRPr kumimoji="0" lang="en-US" sz="1200" b="0" i="0" u="none" strike="noStrike" kern="1200" cap="none" spc="0" normalizeH="0" baseline="0" noProof="0" dirty="0">
-              <a:ln>
-                <a:noFill/>
-              </a:ln>
-              <a:solidFill>
-                <a:srgbClr val="FF0000"/>
-              </a:solidFill>
-              <a:effectLst/>
-              <a:uLnTx/>
-              <a:uFillTx/>
-              <a:latin typeface="Calibri" panose="020F0502020204030204"/>
-              <a:ea typeface="+mn-ea"/>
-              <a:cs typeface="+mn-cs"/>
-            </a:endParaRPr>
-          </a:p>
-          <a:p>
-            <a:pPr marL="457200" marR="0" lvl="0" indent="-457200" algn="l" defTabSz="914400" rtl="0" eaLnBrk="1" fontAlgn="auto" latinLnBrk="0" hangingPunct="1">
-              <a:lnSpc>
-                <a:spcPct val="100000"/>
-              </a:lnSpc>
-              <a:spcBef>
-                <a:spcPts val="0"/>
-              </a:spcBef>
-              <a:spcAft>
-                <a:spcPts val="0"/>
-              </a:spcAft>
-              <a:buClrTx/>
-              <a:buSzTx/>
-              <a:buFont typeface="Arial" panose="020B0604020202020204" pitchFamily="34" charset="0"/>
-              <a:buChar char="•"/>
-              <a:tabLst/>
-              <a:defRPr/>
-            </a:pPr>
-            <a:endParaRPr kumimoji="0" lang="en-US" sz="1200" b="0" i="0" u="none" strike="noStrike" kern="1200" cap="none" spc="0" normalizeH="0" baseline="0" noProof="0" dirty="0">
-              <a:ln>
-                <a:noFill/>
-              </a:ln>
-              <a:solidFill>
-                <a:prstClr val="black"/>
-              </a:solidFill>
-              <a:effectLst/>
-              <a:uLnTx/>
-              <a:uFillTx/>
-              <a:latin typeface="Calibri" panose="020F0502020204030204"/>
-              <a:ea typeface="+mn-ea"/>
-              <a:cs typeface="+mn-cs"/>
-            </a:endParaRPr>
           </a:p>
         </p:txBody>
       </p:sp>
@@ -23184,7 +21818,7 @@
                 <a:ea typeface="Helvetica Neue" panose="02000503000000020004" pitchFamily="2" charset="0"/>
                 <a:cs typeface="Helvetica Neue" panose="02000503000000020004" pitchFamily="2" charset="0"/>
               </a:rPr>
-              <a:t>Nature’s Solution to Zeno’s Paradox and the 1/r Potential Curve</a:t>
+              <a:t>Causal Wakes and the 1/r Curve</a:t>
             </a:r>
           </a:p>
         </p:txBody>
@@ -23249,107 +21883,8 @@
                 <a:ea typeface="Helvetica Neue" panose="02000503000000020004" pitchFamily="2" charset="0"/>
                 <a:cs typeface="Helvetica Neue" panose="02000503000000020004" pitchFamily="2" charset="0"/>
               </a:rPr>
-              <a:t>Zeno’s paradox</a:t>
+              <a:t>Zeno's paradox becomes a causal-root ledger problem: finite wake speed, continuous paths, and received hits replace infinite subdivision as the controlling geometry.</a:t>
             </a:r>
-          </a:p>
-          <a:p>
-            <a:pPr marL="457200" marR="0" lvl="0" indent="-457200" algn="l" defTabSz="914400" rtl="0" eaLnBrk="1" fontAlgn="auto" latinLnBrk="0" hangingPunct="1">
-              <a:lnSpc>
-                <a:spcPct val="100000"/>
-              </a:lnSpc>
-              <a:spcBef>
-                <a:spcPts val="0"/>
-              </a:spcBef>
-              <a:spcAft>
-                <a:spcPts val="0"/>
-              </a:spcAft>
-              <a:buClrTx/>
-              <a:buSzTx/>
-              <a:buFont typeface="Arial" panose="020B0604020202020204" pitchFamily="34" charset="0"/>
-              <a:buChar char="•"/>
-              <a:tabLst/>
-              <a:defRPr/>
-            </a:pPr>
-            <a:endParaRPr kumimoji="0" lang="en-US" sz="1400" b="0" i="0" u="none" strike="noStrike" kern="1200" cap="none" spc="0" normalizeH="0" baseline="0" noProof="0" dirty="0">
-              <a:ln>
-                <a:noFill/>
-              </a:ln>
-              <a:solidFill>
-                <a:srgbClr val="FF0000"/>
-              </a:solidFill>
-              <a:effectLst/>
-              <a:uLnTx/>
-              <a:uFillTx/>
-              <a:latin typeface="Helvetica Neue" panose="02000503000000020004" pitchFamily="2" charset="0"/>
-              <a:ea typeface="Helvetica Neue" panose="02000503000000020004" pitchFamily="2" charset="0"/>
-              <a:cs typeface="Helvetica Neue" panose="02000503000000020004" pitchFamily="2" charset="0"/>
-            </a:endParaRPr>
-          </a:p>
-          <a:p>
-            <a:pPr marL="457200" marR="0" lvl="0" indent="-457200" algn="l" defTabSz="914400" rtl="0" eaLnBrk="1" fontAlgn="auto" latinLnBrk="0" hangingPunct="1">
-              <a:lnSpc>
-                <a:spcPct val="100000"/>
-              </a:lnSpc>
-              <a:spcBef>
-                <a:spcPts val="0"/>
-              </a:spcBef>
-              <a:spcAft>
-                <a:spcPts val="0"/>
-              </a:spcAft>
-              <a:buClrTx/>
-              <a:buSzTx/>
-              <a:buFont typeface="Arial" panose="020B0604020202020204" pitchFamily="34" charset="0"/>
-              <a:buChar char="•"/>
-              <a:tabLst/>
-              <a:defRPr/>
-            </a:pPr>
-            <a:endParaRPr kumimoji="0" lang="en-US" sz="1200" b="0" i="0" u="none" strike="noStrike" kern="1200" cap="none" spc="0" normalizeH="0" baseline="0" noProof="0" dirty="0">
-              <a:ln>
-                <a:noFill/>
-              </a:ln>
-              <a:solidFill>
-                <a:srgbClr val="FF0000"/>
-              </a:solidFill>
-              <a:effectLst/>
-              <a:uLnTx/>
-              <a:uFillTx/>
-              <a:latin typeface="Calibri" panose="020F0502020204030204"/>
-              <a:ea typeface="+mn-ea"/>
-              <a:cs typeface="+mn-cs"/>
-            </a:endParaRPr>
-          </a:p>
-          <a:p>
-            <a:pPr marL="457200" marR="0" lvl="0" indent="-457200" algn="l" defTabSz="914400" rtl="0" eaLnBrk="1" fontAlgn="auto" latinLnBrk="0" hangingPunct="1">
-              <a:lnSpc>
-                <a:spcPct val="100000"/>
-              </a:lnSpc>
-              <a:spcBef>
-                <a:spcPts val="0"/>
-              </a:spcBef>
-              <a:spcAft>
-                <a:spcPts val="0"/>
-              </a:spcAft>
-              <a:buClrTx/>
-              <a:buSzTx/>
-              <a:buFont typeface="Arial" panose="020B0604020202020204" pitchFamily="34" charset="0"/>
-              <a:buChar char="•"/>
-              <a:tabLst/>
-              <a:defRPr/>
-            </a:pPr>
-            <a:endParaRPr kumimoji="0" lang="en-US" sz="1200" b="0" i="0" u="none" strike="noStrike" kern="1200" cap="none" spc="0" normalizeH="0" baseline="0" noProof="0" dirty="0">
-              <a:ln>
-                <a:noFill/>
-              </a:ln>
-              <a:solidFill>
-                <a:prstClr val="black"/>
-              </a:solidFill>
-              <a:effectLst/>
-              <a:uLnTx/>
-              <a:uFillTx/>
-              <a:latin typeface="Calibri" panose="020F0502020204030204"/>
-              <a:ea typeface="+mn-ea"/>
-              <a:cs typeface="+mn-cs"/>
-            </a:endParaRPr>
           </a:p>
         </p:txBody>
       </p:sp>
@@ -23375,7 +21910,7 @@
         </p:blipFill>
         <p:spPr>
           <a:xfrm>
-            <a:off x="5353693" y="1155560"/>
+            <a:off x="3120632" y="1544892"/>
             <a:ext cx="6572599" cy="5004080"/>
           </a:xfrm>
           <a:prstGeom prst="rect">
@@ -23387,619 +21922,6 @@
     <p:extLst>
       <p:ext uri="{BB962C8B-B14F-4D97-AF65-F5344CB8AC3E}">
         <p14:creationId xmlns:p14="http://schemas.microsoft.com/office/powerpoint/2010/main" val="1428032534"/>
-      </p:ext>
-    </p:extLst>
-  </p:cSld>
-  <p:clrMapOvr>
-    <a:masterClrMapping/>
-  </p:clrMapOvr>
-</p:sld>
-</file>
-
-<file path=ppt/slides/slide19.xml><?xml version="1.0" encoding="utf-8"?>
-<p:sld xmlns:a="http://schemas.openxmlformats.org/drawingml/2006/main" xmlns:r="http://schemas.openxmlformats.org/officeDocument/2006/relationships" xmlns:p="http://schemas.openxmlformats.org/presentationml/2006/main">
-  <p:cSld>
-    <p:bg>
-      <p:bgPr>
-        <a:solidFill>
-          <a:srgbClr val="7030A0"/>
-        </a:solidFill>
-        <a:effectLst/>
-      </p:bgPr>
-    </p:bg>
-    <p:spTree>
-      <p:nvGrpSpPr>
-        <p:cNvPr id="1" name="">
-          <a:extLst>
-            <a:ext uri="{FF2B5EF4-FFF2-40B4-BE49-F238E27FC236}">
-              <a16:creationId xmlns:a16="http://schemas.microsoft.com/office/drawing/2014/main" id="{94461D54-C3D4-6173-7074-88B839FAD340}"/>
-            </a:ext>
-          </a:extLst>
-        </p:cNvPr>
-        <p:cNvGrpSpPr/>
-        <p:nvPr/>
-      </p:nvGrpSpPr>
-      <p:grpSpPr>
-        <a:xfrm>
-          <a:off x="0" y="0"/>
-          <a:ext cx="0" cy="0"/>
-          <a:chOff x="0" y="0"/>
-          <a:chExt cx="0" cy="0"/>
-        </a:xfrm>
-      </p:grpSpPr>
-      <p:sp>
-        <p:nvSpPr>
-          <p:cNvPr id="5" name="Footer Placeholder 3">
-            <a:extLst>
-              <a:ext uri="{FF2B5EF4-FFF2-40B4-BE49-F238E27FC236}">
-                <a16:creationId xmlns:a16="http://schemas.microsoft.com/office/drawing/2014/main" id="{9BBE5192-E5D5-0FFC-28EA-A41B850A703E}"/>
-              </a:ext>
-            </a:extLst>
-          </p:cNvPr>
-          <p:cNvSpPr txBox="1">
-            <a:spLocks/>
-          </p:cNvSpPr>
-          <p:nvPr/>
-        </p:nvSpPr>
-        <p:spPr>
-          <a:xfrm>
-            <a:off x="10924248" y="6388602"/>
-            <a:ext cx="1142262" cy="365125"/>
-          </a:xfrm>
-          <a:prstGeom prst="rect">
-            <a:avLst/>
-          </a:prstGeom>
-        </p:spPr>
-        <p:txBody>
-          <a:bodyPr vert="horz" lIns="91440" tIns="45720" rIns="91440" bIns="45720" rtlCol="0" anchor="ctr"/>
-          <a:lstStyle>
-            <a:defPPr>
-              <a:defRPr lang="en-US"/>
-            </a:defPPr>
-            <a:lvl1pPr marL="0" algn="ctr" defTabSz="914400" rtl="0" eaLnBrk="1" latinLnBrk="0" hangingPunct="1">
-              <a:defRPr sz="1200" kern="1200">
-                <a:solidFill>
-                  <a:schemeClr val="tx1">
-                    <a:tint val="75000"/>
-                  </a:schemeClr>
-                </a:solidFill>
-                <a:latin typeface="+mn-lt"/>
-                <a:ea typeface="+mn-ea"/>
-                <a:cs typeface="+mn-cs"/>
-              </a:defRPr>
-            </a:lvl1pPr>
-            <a:lvl2pPr marL="457200" algn="l" defTabSz="914400" rtl="0" eaLnBrk="1" latinLnBrk="0" hangingPunct="1">
-              <a:defRPr sz="1800" kern="1200">
-                <a:solidFill>
-                  <a:schemeClr val="tx1"/>
-                </a:solidFill>
-                <a:latin typeface="+mn-lt"/>
-                <a:ea typeface="+mn-ea"/>
-                <a:cs typeface="+mn-cs"/>
-              </a:defRPr>
-            </a:lvl2pPr>
-            <a:lvl3pPr marL="914400" algn="l" defTabSz="914400" rtl="0" eaLnBrk="1" latinLnBrk="0" hangingPunct="1">
-              <a:defRPr sz="1800" kern="1200">
-                <a:solidFill>
-                  <a:schemeClr val="tx1"/>
-                </a:solidFill>
-                <a:latin typeface="+mn-lt"/>
-                <a:ea typeface="+mn-ea"/>
-                <a:cs typeface="+mn-cs"/>
-              </a:defRPr>
-            </a:lvl3pPr>
-            <a:lvl4pPr marL="1371600" algn="l" defTabSz="914400" rtl="0" eaLnBrk="1" latinLnBrk="0" hangingPunct="1">
-              <a:defRPr sz="1800" kern="1200">
-                <a:solidFill>
-                  <a:schemeClr val="tx1"/>
-                </a:solidFill>
-                <a:latin typeface="+mn-lt"/>
-                <a:ea typeface="+mn-ea"/>
-                <a:cs typeface="+mn-cs"/>
-              </a:defRPr>
-            </a:lvl4pPr>
-            <a:lvl5pPr marL="1828800" algn="l" defTabSz="914400" rtl="0" eaLnBrk="1" latinLnBrk="0" hangingPunct="1">
-              <a:defRPr sz="1800" kern="1200">
-                <a:solidFill>
-                  <a:schemeClr val="tx1"/>
-                </a:solidFill>
-                <a:latin typeface="+mn-lt"/>
-                <a:ea typeface="+mn-ea"/>
-                <a:cs typeface="+mn-cs"/>
-              </a:defRPr>
-            </a:lvl5pPr>
-            <a:lvl6pPr marL="2286000" algn="l" defTabSz="914400" rtl="0" eaLnBrk="1" latinLnBrk="0" hangingPunct="1">
-              <a:defRPr sz="1800" kern="1200">
-                <a:solidFill>
-                  <a:schemeClr val="tx1"/>
-                </a:solidFill>
-                <a:latin typeface="+mn-lt"/>
-                <a:ea typeface="+mn-ea"/>
-                <a:cs typeface="+mn-cs"/>
-              </a:defRPr>
-            </a:lvl6pPr>
-            <a:lvl7pPr marL="2743200" algn="l" defTabSz="914400" rtl="0" eaLnBrk="1" latinLnBrk="0" hangingPunct="1">
-              <a:defRPr sz="1800" kern="1200">
-                <a:solidFill>
-                  <a:schemeClr val="tx1"/>
-                </a:solidFill>
-                <a:latin typeface="+mn-lt"/>
-                <a:ea typeface="+mn-ea"/>
-                <a:cs typeface="+mn-cs"/>
-              </a:defRPr>
-            </a:lvl7pPr>
-            <a:lvl8pPr marL="3200400" algn="l" defTabSz="914400" rtl="0" eaLnBrk="1" latinLnBrk="0" hangingPunct="1">
-              <a:defRPr sz="1800" kern="1200">
-                <a:solidFill>
-                  <a:schemeClr val="tx1"/>
-                </a:solidFill>
-                <a:latin typeface="+mn-lt"/>
-                <a:ea typeface="+mn-ea"/>
-                <a:cs typeface="+mn-cs"/>
-              </a:defRPr>
-            </a:lvl8pPr>
-            <a:lvl9pPr marL="3657600" algn="l" defTabSz="914400" rtl="0" eaLnBrk="1" latinLnBrk="0" hangingPunct="1">
-              <a:defRPr sz="1800" kern="1200">
-                <a:solidFill>
-                  <a:schemeClr val="tx1"/>
-                </a:solidFill>
-                <a:latin typeface="+mn-lt"/>
-                <a:ea typeface="+mn-ea"/>
-                <a:cs typeface="+mn-cs"/>
-              </a:defRPr>
-            </a:lvl9pPr>
-          </a:lstStyle>
-          <a:p>
-            <a:pPr marL="0" marR="0" lvl="0" indent="0" algn="ctr" defTabSz="914400" rtl="0" eaLnBrk="1" fontAlgn="auto" latinLnBrk="0" hangingPunct="1">
-              <a:lnSpc>
-                <a:spcPct val="100000"/>
-              </a:lnSpc>
-              <a:spcBef>
-                <a:spcPts val="0"/>
-              </a:spcBef>
-              <a:spcAft>
-                <a:spcPts val="0"/>
-              </a:spcAft>
-              <a:buClrTx/>
-              <a:buSzTx/>
-              <a:buFontTx/>
-              <a:buNone/>
-              <a:tabLst/>
-              <a:defRPr/>
-            </a:pPr>
-            <a:r>
-              <a:rPr kumimoji="0" lang="en-US" sz="1200" b="0" i="0" u="none" strike="noStrike" kern="1200" cap="none" spc="0" normalizeH="0" baseline="0" noProof="0" dirty="0">
-                <a:ln>
-                  <a:noFill/>
-                </a:ln>
-                <a:solidFill>
-                  <a:prstClr val="black">
-                    <a:tint val="75000"/>
-                  </a:prstClr>
-                </a:solidFill>
-                <a:effectLst/>
-                <a:uLnTx/>
-                <a:uFillTx/>
-                <a:latin typeface="Helvetica Neue" panose="02000503000000020004" pitchFamily="2" charset="0"/>
-                <a:ea typeface="Helvetica Neue" panose="02000503000000020004" pitchFamily="2" charset="0"/>
-                <a:cs typeface="Helvetica Neue" panose="02000503000000020004" pitchFamily="2" charset="0"/>
-              </a:rPr>
-              <a:t>J Mark Morris</a:t>
-            </a:r>
-          </a:p>
-        </p:txBody>
-      </p:sp>
-      <p:sp>
-        <p:nvSpPr>
-          <p:cNvPr id="19" name="Rectangle 18">
-            <a:extLst>
-              <a:ext uri="{FF2B5EF4-FFF2-40B4-BE49-F238E27FC236}">
-                <a16:creationId xmlns:a16="http://schemas.microsoft.com/office/drawing/2014/main" id="{93EAC0C0-7BBE-0357-9019-856A0FC9E286}"/>
-              </a:ext>
-            </a:extLst>
-          </p:cNvPr>
-          <p:cNvSpPr/>
-          <p:nvPr/>
-        </p:nvSpPr>
-        <p:spPr>
-          <a:xfrm>
-            <a:off x="680197" y="309028"/>
-            <a:ext cx="11009488" cy="523220"/>
-          </a:xfrm>
-          <a:prstGeom prst="rect">
-            <a:avLst/>
-          </a:prstGeom>
-          <a:noFill/>
-        </p:spPr>
-        <p:txBody>
-          <a:bodyPr wrap="none">
-            <a:spAutoFit/>
-          </a:bodyPr>
-          <a:lstStyle/>
-          <a:p>
-            <a:pPr marL="0" marR="0" lvl="0" indent="0" algn="ctr" defTabSz="914400" rtl="0" eaLnBrk="1" fontAlgn="auto" latinLnBrk="0" hangingPunct="1">
-              <a:lnSpc>
-                <a:spcPct val="100000"/>
-              </a:lnSpc>
-              <a:spcBef>
-                <a:spcPts val="0"/>
-              </a:spcBef>
-              <a:spcAft>
-                <a:spcPts val="0"/>
-              </a:spcAft>
-              <a:buClrTx/>
-              <a:buSzTx/>
-              <a:buFontTx/>
-              <a:buNone/>
-              <a:tabLst/>
-              <a:defRPr/>
-            </a:pPr>
-            <a:r>
-              <a:rPr kumimoji="0" lang="en-US" sz="2800" b="1" i="0" u="none" strike="noStrike" kern="1200" cap="none" spc="0" normalizeH="0" baseline="0" noProof="0" dirty="0">
-                <a:ln>
-                  <a:noFill/>
-                </a:ln>
-                <a:solidFill>
-                  <a:prstClr val="white"/>
-                </a:solidFill>
-                <a:effectLst/>
-                <a:uLnTx/>
-                <a:uFillTx/>
-                <a:latin typeface="Helvetica Neue" panose="02000503000000020004" pitchFamily="2" charset="0"/>
-                <a:ea typeface="Helvetica Neue" panose="02000503000000020004" pitchFamily="2" charset="0"/>
-                <a:cs typeface="Helvetica Neue" panose="02000503000000020004" pitchFamily="2" charset="0"/>
-              </a:rPr>
-              <a:t>Nature’s Solution to Zeno’s Paradox and the 1/r Potential Curve</a:t>
-            </a:r>
-          </a:p>
-        </p:txBody>
-      </p:sp>
-      <p:sp>
-        <p:nvSpPr>
-          <p:cNvPr id="2" name="TextBox 1">
-            <a:extLst>
-              <a:ext uri="{FF2B5EF4-FFF2-40B4-BE49-F238E27FC236}">
-                <a16:creationId xmlns:a16="http://schemas.microsoft.com/office/drawing/2014/main" id="{F8E0EEDC-0BCA-3889-91A4-77BD378C2B04}"/>
-              </a:ext>
-            </a:extLst>
-          </p:cNvPr>
-          <p:cNvSpPr txBox="1"/>
-          <p:nvPr/>
-        </p:nvSpPr>
-        <p:spPr>
-          <a:xfrm>
-            <a:off x="337206" y="907318"/>
-            <a:ext cx="11695463" cy="1754326"/>
-          </a:xfrm>
-          <a:prstGeom prst="rect">
-            <a:avLst/>
-          </a:prstGeom>
-          <a:noFill/>
-        </p:spPr>
-        <p:txBody>
-          <a:bodyPr wrap="square" rtlCol="0">
-            <a:spAutoFit/>
-          </a:bodyPr>
-          <a:lstStyle/>
-          <a:p>
-            <a:pPr marL="457200" marR="0" lvl="0" indent="-457200" algn="l" defTabSz="914400" rtl="0" eaLnBrk="1" fontAlgn="auto" latinLnBrk="0" hangingPunct="1">
-              <a:lnSpc>
-                <a:spcPct val="100000"/>
-              </a:lnSpc>
-              <a:spcBef>
-                <a:spcPts val="0"/>
-              </a:spcBef>
-              <a:spcAft>
-                <a:spcPts val="0"/>
-              </a:spcAft>
-              <a:buClrTx/>
-              <a:buSzTx/>
-              <a:buFont typeface="Arial" panose="020B0604020202020204" pitchFamily="34" charset="0"/>
-              <a:buChar char="•"/>
-              <a:tabLst/>
-              <a:defRPr/>
-            </a:pPr>
-            <a:endParaRPr kumimoji="0" lang="en-US" sz="1400" b="0" i="0" u="none" strike="noStrike" kern="1200" cap="none" spc="0" normalizeH="0" baseline="0" noProof="0" dirty="0">
-              <a:ln>
-                <a:noFill/>
-              </a:ln>
-              <a:solidFill>
-                <a:srgbClr val="FF0000"/>
-              </a:solidFill>
-              <a:effectLst/>
-              <a:uLnTx/>
-              <a:uFillTx/>
-              <a:latin typeface="Helvetica Neue" panose="02000503000000020004" pitchFamily="2" charset="0"/>
-              <a:ea typeface="Helvetica Neue" panose="02000503000000020004" pitchFamily="2" charset="0"/>
-              <a:cs typeface="Helvetica Neue" panose="02000503000000020004" pitchFamily="2" charset="0"/>
-            </a:endParaRPr>
-          </a:p>
-          <a:p>
-            <a:pPr marL="457200" marR="0" lvl="0" indent="-457200" algn="l" defTabSz="914400" rtl="0" eaLnBrk="1" fontAlgn="auto" latinLnBrk="0" hangingPunct="1">
-              <a:lnSpc>
-                <a:spcPct val="100000"/>
-              </a:lnSpc>
-              <a:spcBef>
-                <a:spcPts val="0"/>
-              </a:spcBef>
-              <a:spcAft>
-                <a:spcPts val="0"/>
-              </a:spcAft>
-              <a:buClrTx/>
-              <a:buSzTx/>
-              <a:buFont typeface="Arial" panose="020B0604020202020204" pitchFamily="34" charset="0"/>
-              <a:buChar char="•"/>
-              <a:tabLst/>
-              <a:defRPr/>
-            </a:pPr>
-            <a:r>
-              <a:rPr kumimoji="0" lang="en-US" sz="1400" b="0" i="0" u="none" strike="noStrike" kern="1200" cap="none" spc="0" normalizeH="0" baseline="0" noProof="0" dirty="0">
-                <a:ln>
-                  <a:noFill/>
-                </a:ln>
-                <a:solidFill>
-                  <a:srgbClr val="FF0000"/>
-                </a:solidFill>
-                <a:effectLst/>
-                <a:uLnTx/>
-                <a:uFillTx/>
-                <a:latin typeface="Helvetica Neue" panose="02000503000000020004" pitchFamily="2" charset="0"/>
-                <a:ea typeface="Helvetica Neue" panose="02000503000000020004" pitchFamily="2" charset="0"/>
-                <a:cs typeface="Helvetica Neue" panose="02000503000000020004" pitchFamily="2" charset="0"/>
-              </a:rPr>
-              <a:t>add a 1/r curve – positive and negative</a:t>
-            </a:r>
-          </a:p>
-          <a:p>
-            <a:pPr marL="457200" marR="0" lvl="0" indent="-457200" algn="l" defTabSz="914400" rtl="0" eaLnBrk="1" fontAlgn="auto" latinLnBrk="0" hangingPunct="1">
-              <a:lnSpc>
-                <a:spcPct val="100000"/>
-              </a:lnSpc>
-              <a:spcBef>
-                <a:spcPts val="0"/>
-              </a:spcBef>
-              <a:spcAft>
-                <a:spcPts val="0"/>
-              </a:spcAft>
-              <a:buClrTx/>
-              <a:buSzTx/>
-              <a:buFont typeface="Arial" panose="020B0604020202020204" pitchFamily="34" charset="0"/>
-              <a:buChar char="•"/>
-              <a:tabLst/>
-              <a:defRPr/>
-            </a:pPr>
-            <a:r>
-              <a:rPr kumimoji="0" lang="en-US" sz="1400" b="0" i="0" u="none" strike="noStrike" kern="1200" cap="none" spc="0" normalizeH="0" baseline="0" noProof="0" dirty="0">
-                <a:ln>
-                  <a:noFill/>
-                </a:ln>
-                <a:solidFill>
-                  <a:srgbClr val="FF0000"/>
-                </a:solidFill>
-                <a:effectLst/>
-                <a:uLnTx/>
-                <a:uFillTx/>
-                <a:latin typeface="Helvetica Neue" panose="02000503000000020004" pitchFamily="2" charset="0"/>
-                <a:ea typeface="Helvetica Neue" panose="02000503000000020004" pitchFamily="2" charset="0"/>
-                <a:cs typeface="Helvetica Neue" panose="02000503000000020004" pitchFamily="2" charset="0"/>
-              </a:rPr>
-              <a:t>expand this into a set of slides</a:t>
-            </a:r>
-          </a:p>
-          <a:p>
-            <a:pPr marL="457200" marR="0" lvl="0" indent="-457200" algn="l" defTabSz="914400" rtl="0" eaLnBrk="1" fontAlgn="auto" latinLnBrk="0" hangingPunct="1">
-              <a:lnSpc>
-                <a:spcPct val="100000"/>
-              </a:lnSpc>
-              <a:spcBef>
-                <a:spcPts val="0"/>
-              </a:spcBef>
-              <a:spcAft>
-                <a:spcPts val="0"/>
-              </a:spcAft>
-              <a:buClrTx/>
-              <a:buSzTx/>
-              <a:buFont typeface="Arial" panose="020B0604020202020204" pitchFamily="34" charset="0"/>
-              <a:buChar char="•"/>
-              <a:tabLst/>
-              <a:defRPr/>
-            </a:pPr>
-            <a:r>
-              <a:rPr kumimoji="0" lang="en-US" sz="1400" b="0" i="0" u="none" strike="noStrike" kern="1200" cap="none" spc="0" normalizeH="0" baseline="0" noProof="0" dirty="0">
-                <a:ln>
-                  <a:noFill/>
-                </a:ln>
-                <a:solidFill>
-                  <a:srgbClr val="FF0000"/>
-                </a:solidFill>
-                <a:effectLst/>
-                <a:uLnTx/>
-                <a:uFillTx/>
-                <a:latin typeface="Helvetica Neue" panose="02000503000000020004" pitchFamily="2" charset="0"/>
-                <a:ea typeface="Helvetica Neue" panose="02000503000000020004" pitchFamily="2" charset="0"/>
-                <a:cs typeface="Helvetica Neue" panose="02000503000000020004" pitchFamily="2" charset="0"/>
-              </a:rPr>
-              <a:t>search for meme’s.</a:t>
-            </a:r>
-          </a:p>
-          <a:p>
-            <a:pPr marL="457200" marR="0" lvl="0" indent="-457200" algn="l" defTabSz="914400" rtl="0" eaLnBrk="1" fontAlgn="auto" latinLnBrk="0" hangingPunct="1">
-              <a:lnSpc>
-                <a:spcPct val="100000"/>
-              </a:lnSpc>
-              <a:spcBef>
-                <a:spcPts val="0"/>
-              </a:spcBef>
-              <a:spcAft>
-                <a:spcPts val="0"/>
-              </a:spcAft>
-              <a:buClrTx/>
-              <a:buSzTx/>
-              <a:buFont typeface="Arial" panose="020B0604020202020204" pitchFamily="34" charset="0"/>
-              <a:buChar char="•"/>
-              <a:tabLst/>
-              <a:defRPr/>
-            </a:pPr>
-            <a:r>
-              <a:rPr kumimoji="0" lang="en-US" sz="1400" b="0" i="0" u="none" strike="noStrike" kern="1200" cap="none" spc="0" normalizeH="0" baseline="0" noProof="0" dirty="0">
-                <a:ln>
-                  <a:noFill/>
-                </a:ln>
-                <a:solidFill>
-                  <a:srgbClr val="FF0000"/>
-                </a:solidFill>
-                <a:effectLst/>
-                <a:uLnTx/>
-                <a:uFillTx/>
-                <a:latin typeface="Helvetica Neue" panose="02000503000000020004" pitchFamily="2" charset="0"/>
-                <a:ea typeface="Helvetica Neue" panose="02000503000000020004" pitchFamily="2" charset="0"/>
-                <a:cs typeface="Helvetica Neue" panose="02000503000000020004" pitchFamily="2" charset="0"/>
-              </a:rPr>
-              <a:t>check references</a:t>
-            </a:r>
-          </a:p>
-          <a:p>
-            <a:pPr marL="457200" marR="0" lvl="0" indent="-457200" algn="l" defTabSz="914400" rtl="0" eaLnBrk="1" fontAlgn="auto" latinLnBrk="0" hangingPunct="1">
-              <a:lnSpc>
-                <a:spcPct val="100000"/>
-              </a:lnSpc>
-              <a:spcBef>
-                <a:spcPts val="0"/>
-              </a:spcBef>
-              <a:spcAft>
-                <a:spcPts val="0"/>
-              </a:spcAft>
-              <a:buClrTx/>
-              <a:buSzTx/>
-              <a:buFont typeface="Arial" panose="020B0604020202020204" pitchFamily="34" charset="0"/>
-              <a:buChar char="•"/>
-              <a:tabLst/>
-              <a:defRPr/>
-            </a:pPr>
-            <a:r>
-              <a:rPr kumimoji="0" lang="en-US" sz="1400" b="0" i="0" u="none" strike="noStrike" kern="1200" cap="none" spc="0" normalizeH="0" baseline="0" noProof="0" dirty="0">
-                <a:ln>
-                  <a:noFill/>
-                </a:ln>
-                <a:solidFill>
-                  <a:srgbClr val="FF0000"/>
-                </a:solidFill>
-                <a:effectLst/>
-                <a:uLnTx/>
-                <a:uFillTx/>
-                <a:latin typeface="Helvetica Neue" panose="02000503000000020004" pitchFamily="2" charset="0"/>
-                <a:ea typeface="Helvetica Neue" panose="02000503000000020004" pitchFamily="2" charset="0"/>
-                <a:cs typeface="Helvetica Neue" panose="02000503000000020004" pitchFamily="2" charset="0"/>
-              </a:rPr>
-              <a:t>aha – I had this idea in my geometry of nature </a:t>
-            </a:r>
-            <a:r>
-              <a:rPr kumimoji="0" lang="en-US" sz="1400" b="0" i="0" u="none" strike="noStrike" kern="1200" cap="none" spc="0" normalizeH="0" baseline="0" noProof="0" dirty="0" err="1">
-                <a:ln>
-                  <a:noFill/>
-                </a:ln>
-                <a:solidFill>
-                  <a:srgbClr val="FF0000"/>
-                </a:solidFill>
-                <a:effectLst/>
-                <a:uLnTx/>
-                <a:uFillTx/>
-                <a:latin typeface="Helvetica Neue" panose="02000503000000020004" pitchFamily="2" charset="0"/>
-                <a:ea typeface="Helvetica Neue" panose="02000503000000020004" pitchFamily="2" charset="0"/>
-                <a:cs typeface="Helvetica Neue" panose="02000503000000020004" pitchFamily="2" charset="0"/>
-              </a:rPr>
-              <a:t>mindmap</a:t>
-            </a:r>
-            <a:r>
-              <a:rPr kumimoji="0" lang="en-US" sz="1400" b="0" i="0" u="none" strike="noStrike" kern="1200" cap="none" spc="0" normalizeH="0" baseline="0" noProof="0" dirty="0">
-                <a:ln>
-                  <a:noFill/>
-                </a:ln>
-                <a:solidFill>
-                  <a:srgbClr val="FF0000"/>
-                </a:solidFill>
-                <a:effectLst/>
-                <a:uLnTx/>
-                <a:uFillTx/>
-                <a:latin typeface="Helvetica Neue" panose="02000503000000020004" pitchFamily="2" charset="0"/>
-                <a:ea typeface="Helvetica Neue" panose="02000503000000020004" pitchFamily="2" charset="0"/>
-                <a:cs typeface="Helvetica Neue" panose="02000503000000020004" pitchFamily="2" charset="0"/>
-              </a:rPr>
-              <a:t>!</a:t>
-            </a:r>
-          </a:p>
-          <a:p>
-            <a:pPr marL="457200" marR="0" lvl="0" indent="-457200" algn="l" defTabSz="914400" rtl="0" eaLnBrk="1" fontAlgn="auto" latinLnBrk="0" hangingPunct="1">
-              <a:lnSpc>
-                <a:spcPct val="100000"/>
-              </a:lnSpc>
-              <a:spcBef>
-                <a:spcPts val="0"/>
-              </a:spcBef>
-              <a:spcAft>
-                <a:spcPts val="0"/>
-              </a:spcAft>
-              <a:buClrTx/>
-              <a:buSzTx/>
-              <a:buFont typeface="Arial" panose="020B0604020202020204" pitchFamily="34" charset="0"/>
-              <a:buChar char="•"/>
-              <a:tabLst/>
-              <a:defRPr/>
-            </a:pPr>
-            <a:endParaRPr kumimoji="0" lang="en-US" sz="1200" b="0" i="0" u="none" strike="noStrike" kern="1200" cap="none" spc="0" normalizeH="0" baseline="0" noProof="0" dirty="0">
-              <a:ln>
-                <a:noFill/>
-              </a:ln>
-              <a:solidFill>
-                <a:srgbClr val="FF0000"/>
-              </a:solidFill>
-              <a:effectLst/>
-              <a:uLnTx/>
-              <a:uFillTx/>
-              <a:latin typeface="Calibri" panose="020F0502020204030204"/>
-              <a:ea typeface="+mn-ea"/>
-              <a:cs typeface="+mn-cs"/>
-            </a:endParaRPr>
-          </a:p>
-          <a:p>
-            <a:pPr marL="457200" marR="0" lvl="0" indent="-457200" algn="l" defTabSz="914400" rtl="0" eaLnBrk="1" fontAlgn="auto" latinLnBrk="0" hangingPunct="1">
-              <a:lnSpc>
-                <a:spcPct val="100000"/>
-              </a:lnSpc>
-              <a:spcBef>
-                <a:spcPts val="0"/>
-              </a:spcBef>
-              <a:spcAft>
-                <a:spcPts val="0"/>
-              </a:spcAft>
-              <a:buClrTx/>
-              <a:buSzTx/>
-              <a:buFont typeface="Arial" panose="020B0604020202020204" pitchFamily="34" charset="0"/>
-              <a:buChar char="•"/>
-              <a:tabLst/>
-              <a:defRPr/>
-            </a:pPr>
-            <a:endParaRPr kumimoji="0" lang="en-US" sz="1200" b="0" i="0" u="none" strike="noStrike" kern="1200" cap="none" spc="0" normalizeH="0" baseline="0" noProof="0" dirty="0">
-              <a:ln>
-                <a:noFill/>
-              </a:ln>
-              <a:solidFill>
-                <a:prstClr val="black"/>
-              </a:solidFill>
-              <a:effectLst/>
-              <a:uLnTx/>
-              <a:uFillTx/>
-              <a:latin typeface="Calibri" panose="020F0502020204030204"/>
-              <a:ea typeface="+mn-ea"/>
-              <a:cs typeface="+mn-cs"/>
-            </a:endParaRPr>
-          </a:p>
-        </p:txBody>
-      </p:sp>
-    </p:spTree>
-    <p:extLst>
-      <p:ext uri="{BB962C8B-B14F-4D97-AF65-F5344CB8AC3E}">
-        <p14:creationId xmlns:p14="http://schemas.microsoft.com/office/powerpoint/2010/main" val="3173366973"/>
       </p:ext>
     </p:extLst>
   </p:cSld>
@@ -24364,7 +22286,7 @@
                   <a:ea typeface="Helvetica Neue" panose="02000503000000020004" pitchFamily="2" charset="0"/>
                   <a:cs typeface="Helvetica Neue" panose="02000503000000020004" pitchFamily="2" charset="0"/>
                 </a:rPr>
-                <a:t>Absolute Euclidean Time</a:t>
+                <a:t>Absolute Time</a:t>
               </a:r>
             </a:p>
           </p:txBody>
@@ -24396,42 +22318,6 @@
               <a:spAutoFit/>
             </a:bodyPr>
             <a:lstStyle/>
-            <a:p>
-              <a:pPr marL="0" marR="0" lvl="0" indent="0" algn="ctr" defTabSz="914400" rtl="0" eaLnBrk="1" fontAlgn="auto" latinLnBrk="0" hangingPunct="1">
-                <a:lnSpc>
-                  <a:spcPct val="100000"/>
-                </a:lnSpc>
-                <a:spcBef>
-                  <a:spcPts val="0"/>
-                </a:spcBef>
-                <a:spcAft>
-                  <a:spcPts val="0"/>
-                </a:spcAft>
-                <a:buClrTx/>
-                <a:buSzTx/>
-                <a:buFontTx/>
-                <a:buNone/>
-                <a:tabLst/>
-                <a:defRPr/>
-              </a:pPr>
-              <a:r>
-                <a:rPr kumimoji="0" lang="en-US" sz="1800" b="0" i="0" u="none" strike="noStrike" kern="1200" cap="none" spc="0" normalizeH="0" baseline="0" noProof="0" dirty="0">
-                  <a:ln>
-                    <a:noFill/>
-                  </a:ln>
-                  <a:solidFill>
-                    <a:prstClr val="white"/>
-                  </a:solidFill>
-                  <a:effectLst/>
-                  <a:uLnTx/>
-                  <a:uFillTx/>
-                  <a:latin typeface="Helvetica Neue" panose="02000503000000020004" pitchFamily="2" charset="0"/>
-                  <a:ea typeface="Helvetica Neue" panose="02000503000000020004" pitchFamily="2" charset="0"/>
-                  <a:cs typeface="Helvetica Neue" panose="02000503000000020004" pitchFamily="2" charset="0"/>
-                </a:rPr>
-                <a:t>Absolute </a:t>
-              </a:r>
-            </a:p>
             <a:p>
               <a:pPr marL="0" marR="0" lvl="0" indent="0" algn="ctr" defTabSz="914400" rtl="0" eaLnBrk="1" fontAlgn="auto" latinLnBrk="0" hangingPunct="1">
                 <a:lnSpc>
@@ -24501,7 +22387,7 @@
                   <a:ea typeface="Helvetica Neue" panose="02000503000000020004" pitchFamily="2" charset="0"/>
                   <a:cs typeface="Helvetica Neue" panose="02000503000000020004" pitchFamily="2" charset="0"/>
                 </a:rPr>
-                <a:t>3D Space</a:t>
+                <a:t>Void</a:t>
               </a:r>
             </a:p>
           </p:txBody>
@@ -25073,7 +22959,7 @@
                 <a:ea typeface="Helvetica Neue" panose="02000503000000020004" pitchFamily="2" charset="0"/>
                 <a:cs typeface="Helvetica Neue" panose="02000503000000020004" pitchFamily="2" charset="0"/>
               </a:rPr>
-              <a:t>r = @t</a:t>
+              <a:t>r = c_f t</a:t>
             </a:r>
           </a:p>
         </p:txBody>
@@ -25141,7 +23027,7 @@
                 <a:ea typeface="Helvetica Neue" panose="02000503000000020004" pitchFamily="2" charset="0"/>
                 <a:cs typeface="Helvetica Neue" panose="02000503000000020004" pitchFamily="2" charset="0"/>
               </a:rPr>
-              <a:t>Electric Potential Field Tracers</a:t>
+              <a:t>Causal Wake Tracers</a:t>
             </a:r>
             <a:endParaRPr kumimoji="0" lang="en-US" sz="1100" b="0" i="1" u="none" strike="noStrike" kern="1200" cap="none" spc="0" normalizeH="0" baseline="0" noProof="0" dirty="0">
               <a:ln>
@@ -25264,7 +23150,7 @@
         <p:spPr>
           <a:xfrm>
             <a:off x="8965473" y="1654209"/>
-            <a:ext cx="2558673" cy="707886"/>
+            <a:ext cx="2726994" cy="707886"/>
           </a:xfrm>
           <a:prstGeom prst="rect">
             <a:avLst/>
@@ -25313,7 +23199,7 @@
                 <a:ea typeface="Helvetica Neue" panose="02000503000000020004" pitchFamily="2" charset="0"/>
                 <a:cs typeface="Helvetica Neue" panose="02000503000000020004" pitchFamily="2" charset="0"/>
               </a:rPr>
-              <a:t>Field Speed @ is a Universal Constant</a:t>
+              <a:t>Wake Speed c_f is a Primitive Constant</a:t>
             </a:r>
           </a:p>
         </p:txBody>
@@ -25378,7 +23264,7 @@
                 <a:ea typeface="Helvetica Neue" panose="02000503000000020004" pitchFamily="2" charset="0"/>
                 <a:cs typeface="Helvetica Neue" panose="02000503000000020004" pitchFamily="2" charset="0"/>
               </a:rPr>
-              <a:t>A point potential with velocity = 0 emits potential spheres, all with the same origin.</a:t>
+              <a:t>An architrino at rest emits causal wake surfaces from a common position.</a:t>
             </a:r>
           </a:p>
         </p:txBody>
@@ -25443,33 +23329,8 @@
                 <a:ea typeface="Helvetica Neue" panose="02000503000000020004" pitchFamily="2" charset="0"/>
                 <a:cs typeface="Helvetica Neue" panose="02000503000000020004" pitchFamily="2" charset="0"/>
               </a:rPr>
-              <a:t>Point Potential on Linear Path with Velocity v = </a:t>
+              <a:t>Architrino on Linear Path with Velocity v = 0</a:t>
             </a:r>
-            <a:r>
-              <a:rPr lang="en-US" sz="3200" b="1" dirty="0">
-                <a:solidFill>
-                  <a:prstClr val="white"/>
-                </a:solidFill>
-                <a:latin typeface="Helvetica Neue" panose="02000503000000020004" pitchFamily="2" charset="0"/>
-                <a:ea typeface="Helvetica Neue" panose="02000503000000020004" pitchFamily="2" charset="0"/>
-                <a:cs typeface="Helvetica Neue" panose="02000503000000020004" pitchFamily="2" charset="0"/>
-              </a:rPr>
-              <a:t>0</a:t>
-            </a:r>
-            <a:endParaRPr kumimoji="0" lang="en-US" sz="3200" b="1" i="0" u="none" strike="noStrike" kern="1200" cap="none" spc="0" normalizeH="0" baseline="0" noProof="0" dirty="0">
-              <a:ln>
-                <a:noFill/>
-              </a:ln>
-              <a:solidFill>
-                <a:prstClr val="white"/>
-              </a:solidFill>
-              <a:effectLst/>
-              <a:uLnTx/>
-              <a:uFillTx/>
-              <a:latin typeface="Helvetica Neue" panose="02000503000000020004" pitchFamily="2" charset="0"/>
-              <a:ea typeface="Helvetica Neue" panose="02000503000000020004" pitchFamily="2" charset="0"/>
-              <a:cs typeface="Helvetica Neue" panose="02000503000000020004" pitchFamily="2" charset="0"/>
-            </a:endParaRPr>
           </a:p>
         </p:txBody>
       </p:sp>
@@ -25482,447 +23343,6 @@
   </p:cSld>
   <p:clrMapOvr>
     <a:masterClrMapping/>
-  </p:clrMapOvr>
-</p:sld>
-</file>
-
-<file path=ppt/slides/slide20.xml><?xml version="1.0" encoding="utf-8"?>
-<p:sld xmlns:a="http://schemas.openxmlformats.org/drawingml/2006/main" xmlns:r="http://schemas.openxmlformats.org/officeDocument/2006/relationships" xmlns:p="http://schemas.openxmlformats.org/presentationml/2006/main">
-  <p:cSld>
-    <p:bg>
-      <p:bgPr>
-        <a:solidFill>
-          <a:schemeClr val="tx1"/>
-        </a:solidFill>
-        <a:effectLst/>
-      </p:bgPr>
-    </p:bg>
-    <p:spTree>
-      <p:nvGrpSpPr>
-        <p:cNvPr id="1" name="">
-          <a:extLst>
-            <a:ext uri="{FF2B5EF4-FFF2-40B4-BE49-F238E27FC236}">
-              <a16:creationId xmlns:a16="http://schemas.microsoft.com/office/drawing/2014/main" id="{C39B5145-C7CC-4CCE-487E-4254D67A4F72}"/>
-            </a:ext>
-          </a:extLst>
-        </p:cNvPr>
-        <p:cNvGrpSpPr/>
-        <p:nvPr/>
-      </p:nvGrpSpPr>
-      <p:grpSpPr>
-        <a:xfrm>
-          <a:off x="0" y="0"/>
-          <a:ext cx="0" cy="0"/>
-          <a:chOff x="0" y="0"/>
-          <a:chExt cx="0" cy="0"/>
-        </a:xfrm>
-      </p:grpSpPr>
-      <p:sp>
-        <p:nvSpPr>
-          <p:cNvPr id="9" name="Rectangle 8">
-            <a:extLst>
-              <a:ext uri="{FF2B5EF4-FFF2-40B4-BE49-F238E27FC236}">
-                <a16:creationId xmlns:a16="http://schemas.microsoft.com/office/drawing/2014/main" id="{6CFBDE84-924A-E8FB-3BA9-FBAA104E768F}"/>
-              </a:ext>
-              <a:ext uri="{C183D7F6-B498-43B3-948B-1728B52AA6E4}">
-                <adec:decorative xmlns:adec="http://schemas.microsoft.com/office/drawing/2017/decorative" val="1"/>
-              </a:ext>
-            </a:extLst>
-          </p:cNvPr>
-          <p:cNvSpPr>
-            <a:spLocks noGrp="1" noRot="1" noChangeAspect="1" noMove="1" noResize="1" noEditPoints="1" noAdjustHandles="1" noChangeArrowheads="1" noChangeShapeType="1" noTextEdit="1"/>
-          </p:cNvSpPr>
-          <p:nvPr>
-            <p:extLst>
-              <p:ext uri="{386F3935-93C4-4BCD-93E2-E3B085C9AB24}">
-                <p16:designElem xmlns:p16="http://schemas.microsoft.com/office/powerpoint/2015/main" val="1"/>
-              </p:ext>
-            </p:extLst>
-          </p:nvPr>
-        </p:nvSpPr>
-        <p:spPr>
-          <a:xfrm>
-            <a:off x="0" y="-3324"/>
-            <a:ext cx="12192000" cy="6861324"/>
-          </a:xfrm>
-          <a:prstGeom prst="rect">
-            <a:avLst/>
-          </a:prstGeom>
-          <a:solidFill>
-            <a:schemeClr val="tx1"/>
-          </a:solidFill>
-          <a:ln>
-            <a:noFill/>
-          </a:ln>
-        </p:spPr>
-        <p:style>
-          <a:lnRef idx="2">
-            <a:schemeClr val="accent1">
-              <a:shade val="50000"/>
-            </a:schemeClr>
-          </a:lnRef>
-          <a:fillRef idx="1">
-            <a:schemeClr val="accent1"/>
-          </a:fillRef>
-          <a:effectRef idx="0">
-            <a:schemeClr val="accent1"/>
-          </a:effectRef>
-          <a:fontRef idx="minor">
-            <a:schemeClr val="lt1"/>
-          </a:fontRef>
-        </p:style>
-        <p:txBody>
-          <a:bodyPr rtlCol="0" anchor="ctr"/>
-          <a:lstStyle/>
-          <a:p>
-            <a:pPr marL="0" marR="0" lvl="0" indent="0" algn="ctr" defTabSz="914400" rtl="0" eaLnBrk="1" fontAlgn="auto" latinLnBrk="0" hangingPunct="1">
-              <a:lnSpc>
-                <a:spcPct val="100000"/>
-              </a:lnSpc>
-              <a:spcBef>
-                <a:spcPts val="0"/>
-              </a:spcBef>
-              <a:spcAft>
-                <a:spcPts val="0"/>
-              </a:spcAft>
-              <a:buClrTx/>
-              <a:buSzTx/>
-              <a:buFontTx/>
-              <a:buNone/>
-              <a:tabLst/>
-              <a:defRPr/>
-            </a:pPr>
-            <a:endParaRPr kumimoji="0" lang="en-US" sz="1800" b="0" i="0" u="none" strike="noStrike" kern="1200" cap="none" spc="0" normalizeH="0" baseline="0" noProof="0">
-              <a:ln>
-                <a:noFill/>
-              </a:ln>
-              <a:solidFill>
-                <a:prstClr val="white"/>
-              </a:solidFill>
-              <a:effectLst/>
-              <a:uLnTx/>
-              <a:uFillTx/>
-              <a:latin typeface="Calibri" panose="020F0502020204030204"/>
-              <a:ea typeface="+mn-ea"/>
-              <a:cs typeface="+mn-cs"/>
-            </a:endParaRPr>
-          </a:p>
-        </p:txBody>
-      </p:sp>
-      <p:sp>
-        <p:nvSpPr>
-          <p:cNvPr id="11" name="Rectangle 10">
-            <a:extLst>
-              <a:ext uri="{FF2B5EF4-FFF2-40B4-BE49-F238E27FC236}">
-                <a16:creationId xmlns:a16="http://schemas.microsoft.com/office/drawing/2014/main" id="{256E144F-032B-6022-3543-526B3E6F1E8D}"/>
-              </a:ext>
-              <a:ext uri="{C183D7F6-B498-43B3-948B-1728B52AA6E4}">
-                <adec:decorative xmlns:adec="http://schemas.microsoft.com/office/drawing/2017/decorative" val="1"/>
-              </a:ext>
-            </a:extLst>
-          </p:cNvPr>
-          <p:cNvSpPr>
-            <a:spLocks noGrp="1" noRot="1" noChangeAspect="1" noMove="1" noResize="1" noEditPoints="1" noAdjustHandles="1" noChangeArrowheads="1" noChangeShapeType="1" noTextEdit="1"/>
-          </p:cNvSpPr>
-          <p:nvPr>
-            <p:extLst>
-              <p:ext uri="{386F3935-93C4-4BCD-93E2-E3B085C9AB24}">
-                <p16:designElem xmlns:p16="http://schemas.microsoft.com/office/powerpoint/2015/main" val="1"/>
-              </p:ext>
-            </p:extLst>
-          </p:nvPr>
-        </p:nvSpPr>
-        <p:spPr bwMode="ltGray">
-          <a:xfrm>
-            <a:off x="321734" y="321733"/>
-            <a:ext cx="11573488" cy="6214534"/>
-          </a:xfrm>
-          <a:prstGeom prst="rect">
-            <a:avLst/>
-          </a:prstGeom>
-          <a:solidFill>
-            <a:schemeClr val="bg1">
-              <a:lumMod val="75000"/>
-              <a:lumOff val="25000"/>
-            </a:schemeClr>
-          </a:solidFill>
-          <a:ln w="127000" cap="sq" cmpd="thinThick">
-            <a:solidFill>
-              <a:schemeClr val="bg1">
-                <a:lumMod val="75000"/>
-                <a:lumOff val="25000"/>
-              </a:schemeClr>
-            </a:solidFill>
-          </a:ln>
-        </p:spPr>
-        <p:style>
-          <a:lnRef idx="2">
-            <a:schemeClr val="accent1">
-              <a:shade val="50000"/>
-            </a:schemeClr>
-          </a:lnRef>
-          <a:fillRef idx="1">
-            <a:schemeClr val="accent1"/>
-          </a:fillRef>
-          <a:effectRef idx="0">
-            <a:schemeClr val="accent1"/>
-          </a:effectRef>
-          <a:fontRef idx="minor">
-            <a:schemeClr val="lt1"/>
-          </a:fontRef>
-        </p:style>
-        <p:txBody>
-          <a:bodyPr rtlCol="0" anchor="ctr"/>
-          <a:lstStyle/>
-          <a:p>
-            <a:pPr marL="0" marR="0" lvl="0" indent="0" algn="ctr" defTabSz="914400" rtl="0" eaLnBrk="1" fontAlgn="auto" latinLnBrk="0" hangingPunct="1">
-              <a:lnSpc>
-                <a:spcPct val="100000"/>
-              </a:lnSpc>
-              <a:spcBef>
-                <a:spcPts val="0"/>
-              </a:spcBef>
-              <a:spcAft>
-                <a:spcPts val="0"/>
-              </a:spcAft>
-              <a:buClrTx/>
-              <a:buSzTx/>
-              <a:buFontTx/>
-              <a:buNone/>
-              <a:tabLst/>
-              <a:defRPr/>
-            </a:pPr>
-            <a:endParaRPr kumimoji="0" lang="en-US" sz="1800" b="0" i="0" u="none" strike="noStrike" kern="1200" cap="none" spc="0" normalizeH="0" baseline="0" noProof="0">
-              <a:ln>
-                <a:noFill/>
-              </a:ln>
-              <a:solidFill>
-                <a:prstClr val="white"/>
-              </a:solidFill>
-              <a:effectLst/>
-              <a:uLnTx/>
-              <a:uFillTx/>
-              <a:latin typeface="Calibri" panose="020F0502020204030204"/>
-              <a:ea typeface="+mn-ea"/>
-              <a:cs typeface="+mn-cs"/>
-            </a:endParaRPr>
-          </a:p>
-        </p:txBody>
-      </p:sp>
-      <p:sp>
-        <p:nvSpPr>
-          <p:cNvPr id="2" name="Title 1">
-            <a:extLst>
-              <a:ext uri="{FF2B5EF4-FFF2-40B4-BE49-F238E27FC236}">
-                <a16:creationId xmlns:a16="http://schemas.microsoft.com/office/drawing/2014/main" id="{B444DE0F-0C17-6919-233B-D98BD654A0DB}"/>
-              </a:ext>
-            </a:extLst>
-          </p:cNvPr>
-          <p:cNvSpPr>
-            <a:spLocks noGrp="1"/>
-          </p:cNvSpPr>
-          <p:nvPr>
-            <p:ph type="ctrTitle"/>
-          </p:nvPr>
-        </p:nvSpPr>
-        <p:spPr>
-          <a:xfrm>
-            <a:off x="1524000" y="1122362"/>
-            <a:ext cx="9144000" cy="2840037"/>
-          </a:xfrm>
-        </p:spPr>
-        <p:txBody>
-          <a:bodyPr>
-            <a:normAutofit/>
-          </a:bodyPr>
-          <a:lstStyle/>
-          <a:p>
-            <a:r>
-              <a:rPr lang="en-US" sz="5800" dirty="0"/>
-              <a:t>Imagine. </a:t>
-            </a:r>
-            <a:br>
-              <a:rPr lang="en-US" sz="5800" dirty="0"/>
-            </a:br>
-            <a:r>
-              <a:rPr lang="en-US" sz="5800" dirty="0"/>
-              <a:t>Visualize. </a:t>
-            </a:r>
-            <a:br>
-              <a:rPr lang="en-US" sz="5800" dirty="0"/>
-            </a:br>
-            <a:r>
-              <a:rPr lang="en-US" sz="5800" dirty="0"/>
-              <a:t>Represent.</a:t>
-            </a:r>
-          </a:p>
-        </p:txBody>
-      </p:sp>
-      <p:cxnSp>
-        <p:nvCxnSpPr>
-          <p:cNvPr id="13" name="Straight Connector 12">
-            <a:extLst>
-              <a:ext uri="{FF2B5EF4-FFF2-40B4-BE49-F238E27FC236}">
-                <a16:creationId xmlns:a16="http://schemas.microsoft.com/office/drawing/2014/main" id="{99EC64F2-D776-BF3D-FBD9-93D13C26D996}"/>
-              </a:ext>
-              <a:ext uri="{C183D7F6-B498-43B3-948B-1728B52AA6E4}">
-                <adec:decorative xmlns:adec="http://schemas.microsoft.com/office/drawing/2017/decorative" val="1"/>
-              </a:ext>
-            </a:extLst>
-          </p:cNvPr>
-          <p:cNvCxnSpPr>
-            <a:cxnSpLocks noGrp="1" noRot="1" noChangeAspect="1" noMove="1" noResize="1" noEditPoints="1" noAdjustHandles="1" noChangeArrowheads="1" noChangeShapeType="1"/>
-          </p:cNvCxnSpPr>
-          <p:nvPr>
-            <p:extLst>
-              <p:ext uri="{386F3935-93C4-4BCD-93E2-E3B085C9AB24}">
-                <p16:designElem xmlns:p16="http://schemas.microsoft.com/office/powerpoint/2015/main" val="1"/>
-              </p:ext>
-            </p:extLst>
-          </p:nvPr>
-        </p:nvCxnSpPr>
-        <p:spPr>
-          <a:xfrm>
-            <a:off x="4724400" y="4109417"/>
-            <a:ext cx="2743200" cy="0"/>
-          </a:xfrm>
-          <a:prstGeom prst="line">
-            <a:avLst/>
-          </a:prstGeom>
-          <a:ln w="12700">
-            <a:solidFill>
-              <a:schemeClr val="tx1">
-                <a:lumMod val="85000"/>
-              </a:schemeClr>
-            </a:solidFill>
-          </a:ln>
-        </p:spPr>
-        <p:style>
-          <a:lnRef idx="1">
-            <a:schemeClr val="accent1"/>
-          </a:lnRef>
-          <a:fillRef idx="0">
-            <a:schemeClr val="accent1"/>
-          </a:fillRef>
-          <a:effectRef idx="0">
-            <a:schemeClr val="accent1"/>
-          </a:effectRef>
-          <a:fontRef idx="minor">
-            <a:schemeClr val="tx1"/>
-          </a:fontRef>
-        </p:style>
-      </p:cxnSp>
-      <p:sp>
-        <p:nvSpPr>
-          <p:cNvPr id="4" name="Footer Placeholder 3">
-            <a:extLst>
-              <a:ext uri="{FF2B5EF4-FFF2-40B4-BE49-F238E27FC236}">
-                <a16:creationId xmlns:a16="http://schemas.microsoft.com/office/drawing/2014/main" id="{8927F93D-7588-EB6D-94E1-96EFF9F59E48}"/>
-              </a:ext>
-            </a:extLst>
-          </p:cNvPr>
-          <p:cNvSpPr>
-            <a:spLocks noGrp="1"/>
-          </p:cNvSpPr>
-          <p:nvPr>
-            <p:ph type="ftr" sz="quarter" idx="11"/>
-          </p:nvPr>
-        </p:nvSpPr>
-        <p:spPr>
-          <a:xfrm>
-            <a:off x="4038600" y="6159710"/>
-            <a:ext cx="4114800" cy="365125"/>
-          </a:xfrm>
-        </p:spPr>
-        <p:txBody>
-          <a:bodyPr>
-            <a:normAutofit/>
-          </a:bodyPr>
-          <a:lstStyle/>
-          <a:p>
-            <a:pPr marL="0" marR="0" lvl="0" indent="0" algn="ctr" defTabSz="914400" rtl="0" eaLnBrk="1" fontAlgn="auto" latinLnBrk="0" hangingPunct="1">
-              <a:lnSpc>
-                <a:spcPct val="100000"/>
-              </a:lnSpc>
-              <a:spcBef>
-                <a:spcPts val="0"/>
-              </a:spcBef>
-              <a:spcAft>
-                <a:spcPts val="600"/>
-              </a:spcAft>
-              <a:buClrTx/>
-              <a:buSzTx/>
-              <a:buFontTx/>
-              <a:buNone/>
-              <a:tabLst/>
-              <a:defRPr/>
-            </a:pPr>
-            <a:r>
-              <a:rPr kumimoji="0" lang="en-US" sz="1200" b="0" i="0" u="none" strike="noStrike" kern="1200" cap="none" spc="0" normalizeH="0" baseline="0" noProof="0" dirty="0">
-                <a:ln>
-                  <a:noFill/>
-                </a:ln>
-                <a:solidFill>
-                  <a:prstClr val="white">
-                    <a:tint val="75000"/>
-                  </a:prstClr>
-                </a:solidFill>
-                <a:effectLst/>
-                <a:uLnTx/>
-                <a:uFillTx/>
-                <a:latin typeface="Helvetica Neue" panose="02000503000000020004" pitchFamily="2" charset="0"/>
-                <a:ea typeface="Helvetica Neue" panose="02000503000000020004" pitchFamily="2" charset="0"/>
-                <a:cs typeface="Helvetica Neue" panose="02000503000000020004" pitchFamily="2" charset="0"/>
-              </a:rPr>
-              <a:t>J Mark Morris – n</a:t>
-            </a:r>
-            <a:r>
-              <a:rPr kumimoji="0" lang="en-US" sz="1200" b="0" i="0" u="none" strike="noStrike" kern="1200" cap="none" spc="0" normalizeH="0" baseline="0" noProof="0" dirty="0" err="1">
-                <a:ln>
-                  <a:noFill/>
-                </a:ln>
-                <a:solidFill>
-                  <a:prstClr val="white">
-                    <a:tint val="75000"/>
-                  </a:prstClr>
-                </a:solidFill>
-                <a:effectLst/>
-                <a:uLnTx/>
-                <a:uFillTx/>
-                <a:latin typeface="Helvetica Neue" panose="02000503000000020004" pitchFamily="2" charset="0"/>
-                <a:ea typeface="Helvetica Neue" panose="02000503000000020004" pitchFamily="2" charset="0"/>
-                <a:cs typeface="Helvetica Neue" panose="02000503000000020004" pitchFamily="2" charset="0"/>
-              </a:rPr>
-              <a:t>eoclassical.ai</a:t>
-            </a:r>
-            <a:endParaRPr kumimoji="0" lang="en-US" sz="1200" b="0" i="0" u="none" strike="noStrike" kern="1200" cap="none" spc="0" normalizeH="0" baseline="0" noProof="0" dirty="0">
-              <a:ln>
-                <a:noFill/>
-              </a:ln>
-              <a:solidFill>
-                <a:prstClr val="white">
-                  <a:tint val="75000"/>
-                </a:prstClr>
-              </a:solidFill>
-              <a:effectLst/>
-              <a:uLnTx/>
-              <a:uFillTx/>
-              <a:latin typeface="Helvetica Neue" panose="02000503000000020004" pitchFamily="2" charset="0"/>
-              <a:ea typeface="Helvetica Neue" panose="02000503000000020004" pitchFamily="2" charset="0"/>
-              <a:cs typeface="Helvetica Neue" panose="02000503000000020004" pitchFamily="2" charset="0"/>
-            </a:endParaRPr>
-          </a:p>
-        </p:txBody>
-      </p:sp>
-    </p:spTree>
-    <p:extLst>
-      <p:ext uri="{BB962C8B-B14F-4D97-AF65-F5344CB8AC3E}">
-        <p14:creationId xmlns:p14="http://schemas.microsoft.com/office/powerpoint/2010/main" val="2530850193"/>
-      </p:ext>
-    </p:extLst>
-  </p:cSld>
-  <p:clrMapOvr>
-    <a:overrideClrMapping bg1="dk1" tx1="lt1" bg2="dk2" tx2="lt2" accent1="accent1" accent2="accent2" accent3="accent3" accent4="accent4" accent5="accent5" accent6="accent6" hlink="hlink" folHlink="folHlink"/>
   </p:clrMapOvr>
 </p:sld>
 </file>
@@ -26288,7 +23708,7 @@
                   <a:ea typeface="Helvetica Neue" panose="02000503000000020004" pitchFamily="2" charset="0"/>
                   <a:cs typeface="Helvetica Neue" panose="02000503000000020004" pitchFamily="2" charset="0"/>
                 </a:rPr>
-                <a:t>Absolute Euclidean Time</a:t>
+                <a:t>Absolute Time</a:t>
               </a:r>
             </a:p>
           </p:txBody>
@@ -26320,42 +23740,6 @@
               <a:spAutoFit/>
             </a:bodyPr>
             <a:lstStyle/>
-            <a:p>
-              <a:pPr marL="0" marR="0" lvl="0" indent="0" algn="ctr" defTabSz="914400" rtl="0" eaLnBrk="1" fontAlgn="auto" latinLnBrk="0" hangingPunct="1">
-                <a:lnSpc>
-                  <a:spcPct val="100000"/>
-                </a:lnSpc>
-                <a:spcBef>
-                  <a:spcPts val="0"/>
-                </a:spcBef>
-                <a:spcAft>
-                  <a:spcPts val="0"/>
-                </a:spcAft>
-                <a:buClrTx/>
-                <a:buSzTx/>
-                <a:buFontTx/>
-                <a:buNone/>
-                <a:tabLst/>
-                <a:defRPr/>
-              </a:pPr>
-              <a:r>
-                <a:rPr kumimoji="0" lang="en-US" sz="1800" b="0" i="0" u="none" strike="noStrike" kern="1200" cap="none" spc="0" normalizeH="0" baseline="0" noProof="0" dirty="0">
-                  <a:ln>
-                    <a:noFill/>
-                  </a:ln>
-                  <a:solidFill>
-                    <a:prstClr val="white"/>
-                  </a:solidFill>
-                  <a:effectLst/>
-                  <a:uLnTx/>
-                  <a:uFillTx/>
-                  <a:latin typeface="Helvetica Neue" panose="02000503000000020004" pitchFamily="2" charset="0"/>
-                  <a:ea typeface="Helvetica Neue" panose="02000503000000020004" pitchFamily="2" charset="0"/>
-                  <a:cs typeface="Helvetica Neue" panose="02000503000000020004" pitchFamily="2" charset="0"/>
-                </a:rPr>
-                <a:t>Absolute </a:t>
-              </a:r>
-            </a:p>
             <a:p>
               <a:pPr marL="0" marR="0" lvl="0" indent="0" algn="ctr" defTabSz="914400" rtl="0" eaLnBrk="1" fontAlgn="auto" latinLnBrk="0" hangingPunct="1">
                 <a:lnSpc>
@@ -26425,7 +23809,7 @@
                   <a:ea typeface="Helvetica Neue" panose="02000503000000020004" pitchFamily="2" charset="0"/>
                   <a:cs typeface="Helvetica Neue" panose="02000503000000020004" pitchFamily="2" charset="0"/>
                 </a:rPr>
-                <a:t>3D Space</a:t>
+                <a:t>Void</a:t>
               </a:r>
             </a:p>
           </p:txBody>
@@ -27102,7 +24486,7 @@
                   <a:ea typeface="Helvetica Neue" panose="02000503000000020004" pitchFamily="2" charset="0"/>
                   <a:cs typeface="Helvetica Neue" panose="02000503000000020004" pitchFamily="2" charset="0"/>
                 </a:rPr>
-                <a:t>v &lt; @</a:t>
+                <a:t>v &lt; c_f</a:t>
               </a:r>
             </a:p>
           </p:txBody>
@@ -27171,7 +24555,7 @@
                 <a:ea typeface="Helvetica Neue" panose="02000503000000020004" pitchFamily="2" charset="0"/>
                 <a:cs typeface="Helvetica Neue" panose="02000503000000020004" pitchFamily="2" charset="0"/>
               </a:rPr>
-              <a:t>r = @t</a:t>
+              <a:t>r = c_f t</a:t>
             </a:r>
           </a:p>
         </p:txBody>
@@ -27239,7 +24623,7 @@
                 <a:ea typeface="Helvetica Neue" panose="02000503000000020004" pitchFamily="2" charset="0"/>
                 <a:cs typeface="Helvetica Neue" panose="02000503000000020004" pitchFamily="2" charset="0"/>
               </a:rPr>
-              <a:t>Electric Potential Field Tracers</a:t>
+              <a:t>Causal Wake Tracers</a:t>
             </a:r>
             <a:endParaRPr kumimoji="0" lang="en-US" sz="1100" b="0" i="1" u="none" strike="noStrike" kern="1200" cap="none" spc="0" normalizeH="0" baseline="0" noProof="0" dirty="0">
               <a:ln>
@@ -27594,7 +24978,7 @@
                 <a:ea typeface="Helvetica Neue" panose="02000503000000020004" pitchFamily="2" charset="0"/>
                 <a:cs typeface="Helvetica Neue" panose="02000503000000020004" pitchFamily="2" charset="0"/>
               </a:rPr>
-              <a:t>Point Potential Path</a:t>
+              <a:t>Architrino Path</a:t>
             </a:r>
             <a:endParaRPr kumimoji="0" lang="en-US" sz="1100" b="0" i="1" u="none" strike="noStrike" kern="1200" cap="none" spc="0" normalizeH="0" baseline="0" noProof="0" dirty="0">
               <a:ln>
@@ -27628,7 +25012,7 @@
         <p:spPr>
           <a:xfrm>
             <a:off x="8965473" y="1654209"/>
-            <a:ext cx="2558673" cy="707886"/>
+            <a:ext cx="2726994" cy="707886"/>
           </a:xfrm>
           <a:prstGeom prst="rect">
             <a:avLst/>
@@ -27677,7 +25061,7 @@
                 <a:ea typeface="Helvetica Neue" panose="02000503000000020004" pitchFamily="2" charset="0"/>
                 <a:cs typeface="Helvetica Neue" panose="02000503000000020004" pitchFamily="2" charset="0"/>
               </a:rPr>
-              <a:t>Field Speed @ is a Universal Constant</a:t>
+              <a:t>Wake Speed c_f is a Primitive Constant</a:t>
             </a:r>
           </a:p>
         </p:txBody>
@@ -27742,7 +25126,7 @@
                 <a:ea typeface="Helvetica Neue" panose="02000503000000020004" pitchFamily="2" charset="0"/>
                 <a:cs typeface="Helvetica Neue" panose="02000503000000020004" pitchFamily="2" charset="0"/>
               </a:rPr>
-              <a:t>Point Potential on Linear Path with Velocity v &lt; @</a:t>
+              <a:t>Architrino on Linear Path with Velocity v &lt; c_f</a:t>
             </a:r>
           </a:p>
         </p:txBody>
@@ -27807,7 +25191,7 @@
                 <a:ea typeface="Helvetica Neue" panose="02000503000000020004" pitchFamily="2" charset="0"/>
                 <a:cs typeface="Helvetica Neue" panose="02000503000000020004" pitchFamily="2" charset="0"/>
               </a:rPr>
-              <a:t>Each point potential continuously emits an electric potential field.</a:t>
+              <a:t>Each architrino continuously emits a causal wake.</a:t>
             </a:r>
           </a:p>
           <a:p>
@@ -27843,41 +25227,7 @@
                 <a:ea typeface="Helvetica Neue" panose="02000503000000020004" pitchFamily="2" charset="0"/>
                 <a:cs typeface="Helvetica Neue" panose="02000503000000020004" pitchFamily="2" charset="0"/>
               </a:rPr>
-              <a:t>The electric potential is q/v at r=0 and a spherical Dirac delta q/</a:t>
-            </a:r>
-            <a:r>
-              <a:rPr kumimoji="0" lang="en-US" sz="1600" b="0" i="0" u="none" strike="noStrike" kern="1200" cap="none" spc="0" normalizeH="0" baseline="0" noProof="0" dirty="0" err="1">
-                <a:ln>
-                  <a:noFill/>
-                </a:ln>
-                <a:solidFill>
-                  <a:prstClr val="white"/>
-                </a:solidFill>
-                <a:effectLst/>
-                <a:uLnTx/>
-                <a:uFillTx/>
-                <a:latin typeface="Helvetica Neue" panose="02000503000000020004" pitchFamily="2" charset="0"/>
-                <a:ea typeface="Helvetica Neue" panose="02000503000000020004" pitchFamily="2" charset="0"/>
-                <a:cs typeface="Helvetica Neue" panose="02000503000000020004" pitchFamily="2" charset="0"/>
-              </a:rPr>
-              <a:t>vr</a:t>
-            </a:r>
-            <a:r>
-              <a:rPr kumimoji="0" lang="en-US" sz="1600" b="0" i="0" u="none" strike="noStrike" kern="1200" cap="none" spc="0" normalizeH="0" baseline="0" noProof="0" dirty="0">
-                <a:ln>
-                  <a:noFill/>
-                </a:ln>
-                <a:solidFill>
-                  <a:prstClr val="white"/>
-                </a:solidFill>
-                <a:effectLst/>
-                <a:uLnTx/>
-                <a:uFillTx/>
-                <a:latin typeface="Helvetica Neue" panose="02000503000000020004" pitchFamily="2" charset="0"/>
-                <a:ea typeface="Helvetica Neue" panose="02000503000000020004" pitchFamily="2" charset="0"/>
-                <a:cs typeface="Helvetica Neue" panose="02000503000000020004" pitchFamily="2" charset="0"/>
-              </a:rPr>
-              <a:t> as a linear function of time.</a:t>
+              <a:t>The wake is sourced by polarity and spreads over causal isochrons with 1/r^2 surface density.</a:t>
             </a:r>
           </a:p>
           <a:p>
@@ -27913,7 +25263,7 @@
                 <a:ea typeface="Helvetica Neue" panose="02000503000000020004" pitchFamily="2" charset="0"/>
                 <a:cs typeface="Helvetica Neue" panose="02000503000000020004" pitchFamily="2" charset="0"/>
               </a:rPr>
-              <a:t>When v &lt; @ the point potential does not experience its own field and there is no self action.</a:t>
+              <a:t>When v &lt; c_f the architrino does not intercept its own wake, so this is the partner-only regime.</a:t>
             </a:r>
           </a:p>
         </p:txBody>
@@ -28292,7 +25642,7 @@
                   <a:ea typeface="Helvetica Neue" panose="02000503000000020004" pitchFamily="2" charset="0"/>
                   <a:cs typeface="Helvetica Neue" panose="02000503000000020004" pitchFamily="2" charset="0"/>
                 </a:rPr>
-                <a:t>Absolute Euclidean Time</a:t>
+                <a:t>Absolute Time</a:t>
               </a:r>
             </a:p>
           </p:txBody>
@@ -28324,42 +25674,6 @@
               <a:spAutoFit/>
             </a:bodyPr>
             <a:lstStyle/>
-            <a:p>
-              <a:pPr marL="0" marR="0" lvl="0" indent="0" algn="ctr" defTabSz="914400" rtl="0" eaLnBrk="1" fontAlgn="auto" latinLnBrk="0" hangingPunct="1">
-                <a:lnSpc>
-                  <a:spcPct val="100000"/>
-                </a:lnSpc>
-                <a:spcBef>
-                  <a:spcPts val="0"/>
-                </a:spcBef>
-                <a:spcAft>
-                  <a:spcPts val="0"/>
-                </a:spcAft>
-                <a:buClrTx/>
-                <a:buSzTx/>
-                <a:buFontTx/>
-                <a:buNone/>
-                <a:tabLst/>
-                <a:defRPr/>
-              </a:pPr>
-              <a:r>
-                <a:rPr kumimoji="0" lang="en-US" sz="1800" b="0" i="0" u="none" strike="noStrike" kern="1200" cap="none" spc="0" normalizeH="0" baseline="0" noProof="0" dirty="0">
-                  <a:ln>
-                    <a:noFill/>
-                  </a:ln>
-                  <a:solidFill>
-                    <a:prstClr val="white"/>
-                  </a:solidFill>
-                  <a:effectLst/>
-                  <a:uLnTx/>
-                  <a:uFillTx/>
-                  <a:latin typeface="Helvetica Neue" panose="02000503000000020004" pitchFamily="2" charset="0"/>
-                  <a:ea typeface="Helvetica Neue" panose="02000503000000020004" pitchFamily="2" charset="0"/>
-                  <a:cs typeface="Helvetica Neue" panose="02000503000000020004" pitchFamily="2" charset="0"/>
-                </a:rPr>
-                <a:t>Absolute </a:t>
-              </a:r>
-            </a:p>
             <a:p>
               <a:pPr marL="0" marR="0" lvl="0" indent="0" algn="ctr" defTabSz="914400" rtl="0" eaLnBrk="1" fontAlgn="auto" latinLnBrk="0" hangingPunct="1">
                 <a:lnSpc>
@@ -28429,7 +25743,7 @@
                   <a:ea typeface="Helvetica Neue" panose="02000503000000020004" pitchFamily="2" charset="0"/>
                   <a:cs typeface="Helvetica Neue" panose="02000503000000020004" pitchFamily="2" charset="0"/>
                 </a:rPr>
-                <a:t>3D Space</a:t>
+                <a:t>Void</a:t>
               </a:r>
             </a:p>
           </p:txBody>
@@ -29106,7 +26420,7 @@
                   <a:ea typeface="Helvetica Neue" panose="02000503000000020004" pitchFamily="2" charset="0"/>
                   <a:cs typeface="Helvetica Neue" panose="02000503000000020004" pitchFamily="2" charset="0"/>
                 </a:rPr>
-                <a:t>v &lt; @</a:t>
+                <a:t>v &lt; c_f</a:t>
               </a:r>
             </a:p>
           </p:txBody>
@@ -29175,7 +26489,7 @@
                 <a:ea typeface="Helvetica Neue" panose="02000503000000020004" pitchFamily="2" charset="0"/>
                 <a:cs typeface="Helvetica Neue" panose="02000503000000020004" pitchFamily="2" charset="0"/>
               </a:rPr>
-              <a:t>r = @t</a:t>
+              <a:t>r = c_f t</a:t>
             </a:r>
           </a:p>
         </p:txBody>
@@ -29243,7 +26557,7 @@
                 <a:ea typeface="Helvetica Neue" panose="02000503000000020004" pitchFamily="2" charset="0"/>
                 <a:cs typeface="Helvetica Neue" panose="02000503000000020004" pitchFamily="2" charset="0"/>
               </a:rPr>
-              <a:t>Electric Potential Field Tracers</a:t>
+              <a:t>Causal Wake Tracers</a:t>
             </a:r>
             <a:endParaRPr kumimoji="0" lang="en-US" sz="1100" b="0" i="1" u="none" strike="noStrike" kern="1200" cap="none" spc="0" normalizeH="0" baseline="0" noProof="0" dirty="0">
               <a:ln>
@@ -29384,7 +26698,7 @@
                 <a:ea typeface="Helvetica Neue" panose="02000503000000020004" pitchFamily="2" charset="0"/>
                 <a:cs typeface="Helvetica Neue" panose="02000503000000020004" pitchFamily="2" charset="0"/>
               </a:rPr>
-              <a:t>Spherical Emissions Expand at v = @</a:t>
+              <a:t>Causal Wake Surfaces Expand at v = c_f</a:t>
             </a:r>
           </a:p>
         </p:txBody>
@@ -29448,7 +26762,7 @@
                 <a:ea typeface="Helvetica Neue" panose="02000503000000020004" pitchFamily="2" charset="0"/>
                 <a:cs typeface="Helvetica Neue" panose="02000503000000020004" pitchFamily="2" charset="0"/>
               </a:rPr>
-              <a:t>Each Dirac Sphere Expands from the Point of Emission</a:t>
+              <a:t>Each Causal Isochron Expands from the Emission Point</a:t>
             </a:r>
           </a:p>
         </p:txBody>
@@ -29746,7 +27060,7 @@
                 <a:ea typeface="Helvetica Neue" panose="02000503000000020004" pitchFamily="2" charset="0"/>
                 <a:cs typeface="Helvetica Neue" panose="02000503000000020004" pitchFamily="2" charset="0"/>
               </a:rPr>
-              <a:t>Point Potential Path</a:t>
+              <a:t>Architrino Path</a:t>
             </a:r>
             <a:endParaRPr kumimoji="0" lang="en-US" sz="1100" b="0" i="1" u="none" strike="noStrike" kern="1200" cap="none" spc="0" normalizeH="0" baseline="0" noProof="0" dirty="0">
               <a:ln>
@@ -29779,8 +27093,8 @@
         </p:nvSpPr>
         <p:spPr>
           <a:xfrm>
-            <a:off x="8965473" y="2254500"/>
-            <a:ext cx="2558673" cy="707886"/>
+            <a:off x="8881235" y="2344577"/>
+            <a:ext cx="2811232" cy="707886"/>
           </a:xfrm>
           <a:prstGeom prst="rect">
             <a:avLst/>
@@ -29829,7 +27143,41 @@
                 <a:ea typeface="Helvetica Neue" panose="02000503000000020004" pitchFamily="2" charset="0"/>
                 <a:cs typeface="Helvetica Neue" panose="02000503000000020004" pitchFamily="2" charset="0"/>
               </a:rPr>
-              <a:t>Field Speed @ is a Universal Constant</a:t>
+              <a:t>Wake Speed c</a:t>
+            </a:r>
+            <a:r>
+              <a:rPr kumimoji="0" lang="en-US" sz="2000" b="1" i="0" u="none" strike="noStrike" kern="1200" cap="none" spc="0" normalizeH="0" baseline="-25000" noProof="0" dirty="0">
+                <a:ln>
+                  <a:noFill/>
+                </a:ln>
+                <a:solidFill>
+                  <a:srgbClr val="FF85FF"/>
+                </a:solidFill>
+                <a:effectLst/>
+                <a:uLnTx/>
+                <a:uFillTx/>
+                <a:latin typeface="Helvetica Neue" panose="02000503000000020004" pitchFamily="2" charset="0"/>
+                <a:ea typeface="Helvetica Neue" panose="02000503000000020004" pitchFamily="2" charset="0"/>
+                <a:cs typeface="Helvetica Neue" panose="02000503000000020004" pitchFamily="2" charset="0"/>
+              </a:rPr>
+              <a:t>f</a:t>
+            </a:r>
+            <a:r>
+              <a:rPr kumimoji="0" lang="en-US" sz="2000" b="1" i="0" u="none" strike="noStrike" kern="1200" cap="none" spc="0" normalizeH="0" baseline="0" noProof="0" dirty="0">
+                <a:ln>
+                  <a:noFill/>
+                </a:ln>
+                <a:solidFill>
+                  <a:srgbClr val="FF85FF"/>
+                </a:solidFill>
+                <a:effectLst/>
+                <a:uLnTx/>
+                <a:uFillTx/>
+                <a:latin typeface="Helvetica Neue" panose="02000503000000020004" pitchFamily="2" charset="0"/>
+                <a:ea typeface="Helvetica Neue" panose="02000503000000020004" pitchFamily="2" charset="0"/>
+                <a:cs typeface="Helvetica Neue" panose="02000503000000020004" pitchFamily="2" charset="0"/>
+              </a:rPr>
+              <a:t> is a Primitive Constant</a:t>
             </a:r>
           </a:p>
         </p:txBody>
@@ -30182,7 +27530,7 @@
                 <a:ea typeface="Helvetica Neue" panose="02000503000000020004" pitchFamily="2" charset="0"/>
                 <a:cs typeface="Helvetica Neue" panose="02000503000000020004" pitchFamily="2" charset="0"/>
               </a:rPr>
-              <a:t>Absolute Euclidean Time</a:t>
+              <a:t>Absolute Time</a:t>
             </a:r>
           </a:p>
         </p:txBody>
@@ -30247,7 +27595,7 @@
                 <a:ea typeface="Helvetica Neue" panose="02000503000000020004" pitchFamily="2" charset="0"/>
                 <a:cs typeface="Helvetica Neue" panose="02000503000000020004" pitchFamily="2" charset="0"/>
               </a:rPr>
-              <a:t>Absolute </a:t>
+              <a:t>Euclidean</a:t>
             </a:r>
           </a:p>
           <a:p>
@@ -30283,43 +27631,7 @@
                 <a:ea typeface="Helvetica Neue" panose="02000503000000020004" pitchFamily="2" charset="0"/>
                 <a:cs typeface="Helvetica Neue" panose="02000503000000020004" pitchFamily="2" charset="0"/>
               </a:rPr>
-              <a:t>Euclidean</a:t>
-            </a:r>
-          </a:p>
-          <a:p>
-            <a:pPr marL="0" marR="0" lvl="0" indent="0" algn="ctr" defTabSz="914400" rtl="0" eaLnBrk="1" fontAlgn="auto" latinLnBrk="0" hangingPunct="1">
-              <a:lnSpc>
-                <a:spcPct val="100000"/>
-              </a:lnSpc>
-              <a:spcBef>
-                <a:spcPts val="0"/>
-              </a:spcBef>
-              <a:spcAft>
-                <a:spcPts val="0"/>
-              </a:spcAft>
-              <a:buClrTx/>
-              <a:buSzTx/>
-              <a:buFontTx/>
-              <a:buNone/>
-              <a:tabLst/>
-              <a:defRPr/>
-            </a:pPr>
-            <a:r>
-              <a:rPr kumimoji="0" lang="en-US" sz="1800" b="0" i="0" u="none" strike="noStrike" kern="1200" cap="none" spc="0" normalizeH="0" baseline="0" noProof="0" dirty="0">
-                <a:ln>
-                  <a:noFill/>
-                </a:ln>
-                <a:solidFill>
-                  <a:prstClr val="white"/>
-                </a:solidFill>
-                <a:effectLst/>
-                <a:uLnTx/>
-                <a:uFillTx/>
-                <a:latin typeface="Helvetica Neue" panose="02000503000000020004" pitchFamily="2" charset="0"/>
-                <a:ea typeface="Helvetica Neue" panose="02000503000000020004" pitchFamily="2" charset="0"/>
-                <a:cs typeface="Helvetica Neue" panose="02000503000000020004" pitchFamily="2" charset="0"/>
-              </a:rPr>
-              <a:t>3D Space</a:t>
+              <a:t>Void</a:t>
             </a:r>
           </a:p>
         </p:txBody>
@@ -30995,7 +28307,7 @@
                   <a:ea typeface="Helvetica Neue" panose="02000503000000020004" pitchFamily="2" charset="0"/>
                   <a:cs typeface="Helvetica Neue" panose="02000503000000020004" pitchFamily="2" charset="0"/>
                 </a:rPr>
-                <a:t>v &lt; @</a:t>
+                <a:t>v &lt; c_f</a:t>
               </a:r>
             </a:p>
           </p:txBody>
@@ -31064,7 +28376,7 @@
                 <a:ea typeface="Helvetica Neue" panose="02000503000000020004" pitchFamily="2" charset="0"/>
                 <a:cs typeface="Helvetica Neue" panose="02000503000000020004" pitchFamily="2" charset="0"/>
               </a:rPr>
-              <a:t>r = @t</a:t>
+              <a:t>r = c_f t</a:t>
             </a:r>
           </a:p>
         </p:txBody>
@@ -31132,7 +28444,7 @@
                 <a:ea typeface="Helvetica Neue" panose="02000503000000020004" pitchFamily="2" charset="0"/>
                 <a:cs typeface="Helvetica Neue" panose="02000503000000020004" pitchFamily="2" charset="0"/>
               </a:rPr>
-              <a:t>Action = Force along Radius to Emission Point</a:t>
+              <a:t>Hit = radial intersection of wake from emission point</a:t>
             </a:r>
             <a:endParaRPr kumimoji="0" lang="en-US" sz="2400" b="1" i="1" u="none" strike="noStrike" kern="1200" cap="none" spc="0" normalizeH="0" baseline="0" noProof="0" dirty="0">
               <a:ln>
@@ -31210,7 +28522,7 @@
                 <a:ea typeface="Helvetica Neue" panose="02000503000000020004" pitchFamily="2" charset="0"/>
                 <a:cs typeface="Helvetica Neue" panose="02000503000000020004" pitchFamily="2" charset="0"/>
               </a:rPr>
-              <a:t>Action Occurs when a Potential Sphere Intersects a Point Potential</a:t>
+              <a:t>A Wake Hit Occurs when a Wake Surface Intersects an Architrino</a:t>
             </a:r>
           </a:p>
         </p:txBody>
@@ -31508,7 +28820,7 @@
                 <a:ea typeface="Helvetica Neue" panose="02000503000000020004" pitchFamily="2" charset="0"/>
                 <a:cs typeface="Helvetica Neue" panose="02000503000000020004" pitchFamily="2" charset="0"/>
               </a:rPr>
-              <a:t>Point Potential Path</a:t>
+              <a:t>Architrino Path</a:t>
             </a:r>
             <a:endParaRPr kumimoji="0" lang="en-US" sz="1100" b="0" i="1" u="none" strike="noStrike" kern="1200" cap="none" spc="0" normalizeH="0" baseline="0" noProof="0" dirty="0">
               <a:ln>
@@ -31636,7 +28948,8 @@
             <a:solidFill>
               <a:srgbClr val="00B0F0"/>
             </a:solidFill>
-            <a:tailEnd type="triangle"/>
+            <a:headEnd type="triangle"/>
+            <a:tailEnd type="none"/>
           </a:ln>
         </p:spPr>
         <p:style>
@@ -31763,7 +29076,8 @@
             <a:solidFill>
               <a:srgbClr val="00B0F0"/>
             </a:solidFill>
-            <a:tailEnd type="triangle"/>
+            <a:headEnd type="triangle"/>
+            <a:tailEnd type="none"/>
           </a:ln>
         </p:spPr>
         <p:style>
@@ -32041,7 +29355,7 @@
                 <a:ea typeface="Helvetica Neue" panose="02000503000000020004" pitchFamily="2" charset="0"/>
                 <a:cs typeface="Helvetica Neue" panose="02000503000000020004" pitchFamily="2" charset="0"/>
               </a:rPr>
-              <a:t>Imagine a point potential with linear velocity v = @, the electric potential field speed.</a:t>
+              <a:t>At v = c_f, an architrino is at the wake-speed threshold.</a:t>
             </a:r>
           </a:p>
           <a:p>
@@ -32077,7 +29391,7 @@
                 <a:ea typeface="Helvetica Neue" panose="02000503000000020004" pitchFamily="2" charset="0"/>
                 <a:cs typeface="Helvetica Neue" panose="02000503000000020004" pitchFamily="2" charset="0"/>
               </a:rPr>
-              <a:t>The point potential does not experience self action.</a:t>
+              <a:t>It does not yet retain a self-hit.</a:t>
             </a:r>
           </a:p>
           <a:p>
@@ -32113,7 +29427,7 @@
                 <a:ea typeface="Helvetica Neue" panose="02000503000000020004" pitchFamily="2" charset="0"/>
                 <a:cs typeface="Helvetica Neue" panose="02000503000000020004" pitchFamily="2" charset="0"/>
               </a:rPr>
-              <a:t>This symmetry breaking point is related to quantum mechanics symmetry breaking.</a:t>
+              <a:t>This threshold is the symmetry-breaking point.</a:t>
             </a:r>
           </a:p>
           <a:p>
@@ -32149,7 +29463,7 @@
                 <a:ea typeface="Helvetica Neue" panose="02000503000000020004" pitchFamily="2" charset="0"/>
                 <a:cs typeface="Helvetica Neue" panose="02000503000000020004" pitchFamily="2" charset="0"/>
               </a:rPr>
-              <a:t>Symmetry breaking at Wien’s peak occurs when the binary potential velocities are v = @.</a:t>
+              <a:t>It separates partner-only from self-hit-capable regimes in binary reductions.</a:t>
             </a:r>
           </a:p>
           <a:p>
@@ -32185,7 +29499,7 @@
                 <a:ea typeface="Helvetica Neue" panose="02000503000000020004" pitchFamily="2" charset="0"/>
                 <a:cs typeface="Helvetica Neue" panose="02000503000000020004" pitchFamily="2" charset="0"/>
               </a:rPr>
-              <a:t>There may be a relation or duality with a black hole event horizon.</a:t>
+              <a:t>Horizon language remains a comparison, not a closed derivation.</a:t>
             </a:r>
           </a:p>
         </p:txBody>
@@ -33064,7 +30378,7 @@
                 <a:ea typeface="Helvetica Neue" panose="02000503000000020004" pitchFamily="2" charset="0"/>
                 <a:cs typeface="Helvetica Neue" panose="02000503000000020004" pitchFamily="2" charset="0"/>
               </a:rPr>
-              <a:t>v = @</a:t>
+              <a:t>v = c_f</a:t>
             </a:r>
           </a:p>
         </p:txBody>
@@ -33129,7 +30443,7 @@
                 <a:ea typeface="Helvetica Neue" panose="02000503000000020004" pitchFamily="2" charset="0"/>
                 <a:cs typeface="Helvetica Neue" panose="02000503000000020004" pitchFamily="2" charset="0"/>
               </a:rPr>
-              <a:t>@</a:t>
+              <a:t>c_f</a:t>
             </a:r>
           </a:p>
         </p:txBody>
@@ -33194,7 +30508,7 @@
                 <a:ea typeface="Helvetica Neue" panose="02000503000000020004" pitchFamily="2" charset="0"/>
                 <a:cs typeface="Helvetica Neue" panose="02000503000000020004" pitchFamily="2" charset="0"/>
               </a:rPr>
-              <a:t>Electric Potential Field Tracers</a:t>
+              <a:t>Causal Wake Tracers</a:t>
             </a:r>
             <a:endParaRPr kumimoji="0" lang="en-US" sz="1100" b="0" i="1" u="none" strike="noStrike" kern="1200" cap="none" spc="0" normalizeH="0" baseline="0" noProof="0" dirty="0">
               <a:ln>
@@ -33316,7 +30630,7 @@
                 <a:ea typeface="Helvetica Neue" panose="02000503000000020004" pitchFamily="2" charset="0"/>
                 <a:cs typeface="Helvetica Neue" panose="02000503000000020004" pitchFamily="2" charset="0"/>
               </a:rPr>
-              <a:t>Point Potential on Linear Path with Velocity v = @</a:t>
+              <a:t>Architrino on Linear Path with Velocity v = c_f</a:t>
             </a:r>
           </a:p>
         </p:txBody>
@@ -33489,7 +30803,7 @@
                   <a:ea typeface="Helvetica Neue" panose="02000503000000020004" pitchFamily="2" charset="0"/>
                   <a:cs typeface="Helvetica Neue" panose="02000503000000020004" pitchFamily="2" charset="0"/>
                 </a:rPr>
-                <a:t>Absolute Euclidean Time</a:t>
+                <a:t>Absolute Time</a:t>
               </a:r>
             </a:p>
           </p:txBody>
@@ -33521,42 +30835,6 @@
               <a:spAutoFit/>
             </a:bodyPr>
             <a:lstStyle/>
-            <a:p>
-              <a:pPr marL="0" marR="0" lvl="0" indent="0" algn="ctr" defTabSz="914400" rtl="0" eaLnBrk="1" fontAlgn="auto" latinLnBrk="0" hangingPunct="1">
-                <a:lnSpc>
-                  <a:spcPct val="100000"/>
-                </a:lnSpc>
-                <a:spcBef>
-                  <a:spcPts val="0"/>
-                </a:spcBef>
-                <a:spcAft>
-                  <a:spcPts val="0"/>
-                </a:spcAft>
-                <a:buClrTx/>
-                <a:buSzTx/>
-                <a:buFontTx/>
-                <a:buNone/>
-                <a:tabLst/>
-                <a:defRPr/>
-              </a:pPr>
-              <a:r>
-                <a:rPr kumimoji="0" lang="en-US" sz="1800" b="0" i="0" u="none" strike="noStrike" kern="1200" cap="none" spc="0" normalizeH="0" baseline="0" noProof="0" dirty="0">
-                  <a:ln>
-                    <a:noFill/>
-                  </a:ln>
-                  <a:solidFill>
-                    <a:prstClr val="white"/>
-                  </a:solidFill>
-                  <a:effectLst/>
-                  <a:uLnTx/>
-                  <a:uFillTx/>
-                  <a:latin typeface="Helvetica Neue" panose="02000503000000020004" pitchFamily="2" charset="0"/>
-                  <a:ea typeface="Helvetica Neue" panose="02000503000000020004" pitchFamily="2" charset="0"/>
-                  <a:cs typeface="Helvetica Neue" panose="02000503000000020004" pitchFamily="2" charset="0"/>
-                </a:rPr>
-                <a:t>Absolute </a:t>
-              </a:r>
-            </a:p>
             <a:p>
               <a:pPr marL="0" marR="0" lvl="0" indent="0" algn="ctr" defTabSz="914400" rtl="0" eaLnBrk="1" fontAlgn="auto" latinLnBrk="0" hangingPunct="1">
                 <a:lnSpc>
@@ -33626,7 +30904,7 @@
                   <a:ea typeface="Helvetica Neue" panose="02000503000000020004" pitchFamily="2" charset="0"/>
                   <a:cs typeface="Helvetica Neue" panose="02000503000000020004" pitchFamily="2" charset="0"/>
                 </a:rPr>
-                <a:t>3D Space</a:t>
+                <a:t>Void</a:t>
               </a:r>
             </a:p>
           </p:txBody>
@@ -33892,7 +31170,7 @@
                 <a:ea typeface="Helvetica Neue" panose="02000503000000020004" pitchFamily="2" charset="0"/>
                 <a:cs typeface="Helvetica Neue" panose="02000503000000020004" pitchFamily="2" charset="0"/>
               </a:rPr>
-              <a:t>Imagine a point potential with linear velocity v &gt; @, the electric potential field speed.</a:t>
+              <a:t>Imagine an architrino with linear velocity v &gt; c_f, above wake speed.</a:t>
             </a:r>
           </a:p>
           <a:p>
@@ -33928,7 +31206,7 @@
                 <a:ea typeface="Helvetica Neue" panose="02000503000000020004" pitchFamily="2" charset="0"/>
                 <a:cs typeface="Helvetica Neue" panose="02000503000000020004" pitchFamily="2" charset="0"/>
               </a:rPr>
-              <a:t>The point potential outpaces its own potential field.</a:t>
+              <a:t>The source can outrun earlier wake surfaces.</a:t>
             </a:r>
           </a:p>
           <a:p>
@@ -33964,41 +31242,8 @@
                 <a:ea typeface="Helvetica Neue" panose="02000503000000020004" pitchFamily="2" charset="0"/>
                 <a:cs typeface="Helvetica Neue" panose="02000503000000020004" pitchFamily="2" charset="0"/>
               </a:rPr>
-              <a:t>When v &gt; @ the point potential experiences its own field and there is self action.</a:t>
+              <a:t>When a same-source causal root exists, the architrino can receive self-hit feedback.</a:t>
             </a:r>
-          </a:p>
-          <a:p>
-            <a:pPr marL="285750" marR="0" lvl="0" indent="-285750" algn="l" defTabSz="914400" rtl="0" eaLnBrk="1" fontAlgn="auto" latinLnBrk="0" hangingPunct="1">
-              <a:lnSpc>
-                <a:spcPct val="100000"/>
-              </a:lnSpc>
-              <a:spcBef>
-                <a:spcPts val="0"/>
-              </a:spcBef>
-              <a:spcAft>
-                <a:spcPts val="0"/>
-              </a:spcAft>
-              <a:buClrTx/>
-              <a:buSzTx/>
-              <a:buFont typeface="Arial" panose="020B0604020202020204" pitchFamily="34" charset="0"/>
-              <a:buChar char="•"/>
-              <a:tabLst/>
-              <a:defRPr/>
-            </a:pPr>
-            <a:endParaRPr kumimoji="0" lang="en-US" sz="1600" b="0" i="0" u="none" strike="noStrike" kern="1200" cap="none" spc="0" normalizeH="0" baseline="0" noProof="0" dirty="0">
-              <a:ln>
-                <a:noFill/>
-              </a:ln>
-              <a:solidFill>
-                <a:prstClr val="black"/>
-              </a:solidFill>
-              <a:effectLst/>
-              <a:uLnTx/>
-              <a:uFillTx/>
-              <a:latin typeface="Calibri" panose="020F0502020204030204"/>
-              <a:ea typeface="+mn-ea"/>
-              <a:cs typeface="+mn-cs"/>
-            </a:endParaRPr>
           </a:p>
         </p:txBody>
       </p:sp>
@@ -34881,7 +32126,7 @@
                 <a:ea typeface="Helvetica Neue" panose="02000503000000020004" pitchFamily="2" charset="0"/>
                 <a:cs typeface="Helvetica Neue" panose="02000503000000020004" pitchFamily="2" charset="0"/>
               </a:rPr>
-              <a:t>v &gt; @</a:t>
+              <a:t>v &gt; c_f</a:t>
             </a:r>
           </a:p>
         </p:txBody>
@@ -34949,7 +32194,7 @@
                 <a:ea typeface="Helvetica Neue" panose="02000503000000020004" pitchFamily="2" charset="0"/>
                 <a:cs typeface="Helvetica Neue" panose="02000503000000020004" pitchFamily="2" charset="0"/>
               </a:rPr>
-              <a:t>@</a:t>
+              <a:t>c_f</a:t>
             </a:r>
           </a:p>
         </p:txBody>
@@ -35017,7 +32262,7 @@
                 <a:ea typeface="Helvetica Neue" panose="02000503000000020004" pitchFamily="2" charset="0"/>
                 <a:cs typeface="Helvetica Neue" panose="02000503000000020004" pitchFamily="2" charset="0"/>
               </a:rPr>
-              <a:t>Electric Potential Field Tracers</a:t>
+              <a:t>Causal Wake Tracers</a:t>
             </a:r>
             <a:endParaRPr kumimoji="0" lang="en-US" sz="1100" b="0" i="1" u="none" strike="noStrike" kern="1200" cap="none" spc="0" normalizeH="0" baseline="0" noProof="0" dirty="0">
               <a:ln>
@@ -35139,7 +32384,7 @@
                 <a:ea typeface="Helvetica Neue" panose="02000503000000020004" pitchFamily="2" charset="0"/>
                 <a:cs typeface="Helvetica Neue" panose="02000503000000020004" pitchFamily="2" charset="0"/>
               </a:rPr>
-              <a:t>Point Potential on Linear Path with Velocity v &gt; @</a:t>
+              <a:t>Architrino on Linear Path with Velocity v &gt; c_f</a:t>
             </a:r>
           </a:p>
         </p:txBody>
@@ -35292,7 +32537,7 @@
                 <a:ea typeface="Helvetica Neue" panose="02000503000000020004" pitchFamily="2" charset="0"/>
                 <a:cs typeface="Helvetica Neue" panose="02000503000000020004" pitchFamily="2" charset="0"/>
               </a:rPr>
-              <a:t>Absolute Euclidean Time</a:t>
+              <a:t>Absolute Time</a:t>
             </a:r>
           </a:p>
         </p:txBody>
@@ -35357,7 +32602,7 @@
                 <a:ea typeface="Helvetica Neue" panose="02000503000000020004" pitchFamily="2" charset="0"/>
                 <a:cs typeface="Helvetica Neue" panose="02000503000000020004" pitchFamily="2" charset="0"/>
               </a:rPr>
-              <a:t>Absolute </a:t>
+              <a:t>Euclidean</a:t>
             </a:r>
           </a:p>
           <a:p>
@@ -35393,43 +32638,7 @@
                 <a:ea typeface="Helvetica Neue" panose="02000503000000020004" pitchFamily="2" charset="0"/>
                 <a:cs typeface="Helvetica Neue" panose="02000503000000020004" pitchFamily="2" charset="0"/>
               </a:rPr>
-              <a:t>Euclidean</a:t>
-            </a:r>
-          </a:p>
-          <a:p>
-            <a:pPr marL="0" marR="0" lvl="0" indent="0" algn="ctr" defTabSz="914400" rtl="0" eaLnBrk="1" fontAlgn="auto" latinLnBrk="0" hangingPunct="1">
-              <a:lnSpc>
-                <a:spcPct val="100000"/>
-              </a:lnSpc>
-              <a:spcBef>
-                <a:spcPts val="0"/>
-              </a:spcBef>
-              <a:spcAft>
-                <a:spcPts val="0"/>
-              </a:spcAft>
-              <a:buClrTx/>
-              <a:buSzTx/>
-              <a:buFontTx/>
-              <a:buNone/>
-              <a:tabLst/>
-              <a:defRPr/>
-            </a:pPr>
-            <a:r>
-              <a:rPr kumimoji="0" lang="en-US" sz="1800" b="0" i="0" u="none" strike="noStrike" kern="1200" cap="none" spc="0" normalizeH="0" baseline="0" noProof="0" dirty="0">
-                <a:ln>
-                  <a:noFill/>
-                </a:ln>
-                <a:solidFill>
-                  <a:prstClr val="white"/>
-                </a:solidFill>
-                <a:effectLst/>
-                <a:uLnTx/>
-                <a:uFillTx/>
-                <a:latin typeface="Helvetica Neue" panose="02000503000000020004" pitchFamily="2" charset="0"/>
-                <a:ea typeface="Helvetica Neue" panose="02000503000000020004" pitchFamily="2" charset="0"/>
-                <a:cs typeface="Helvetica Neue" panose="02000503000000020004" pitchFamily="2" charset="0"/>
-              </a:rPr>
-              <a:t>3D Space</a:t>
+              <a:t>Void</a:t>
             </a:r>
           </a:p>
         </p:txBody>
@@ -36107,7 +33316,7 @@
                 <a:ea typeface="Helvetica Neue" panose="02000503000000020004" pitchFamily="2" charset="0"/>
                 <a:cs typeface="Helvetica Neue" panose="02000503000000020004" pitchFamily="2" charset="0"/>
               </a:rPr>
-              <a:t>Emission Magnitude Depends on Path</a:t>
+              <a:t>Wake Strength Depends on Path</a:t>
             </a:r>
           </a:p>
         </p:txBody>
@@ -36172,7 +33381,7 @@
                 <a:ea typeface="Helvetica Neue" panose="02000503000000020004" pitchFamily="2" charset="0"/>
                 <a:cs typeface="Helvetica Neue" panose="02000503000000020004" pitchFamily="2" charset="0"/>
               </a:rPr>
-              <a:t>Paths are continuous through time and space.</a:t>
+              <a:t>Paths are continuous in absolute time and the Euclidean void.</a:t>
             </a:r>
           </a:p>
           <a:p>
@@ -36208,41 +33417,7 @@
                 <a:ea typeface="Helvetica Neue" panose="02000503000000020004" pitchFamily="2" charset="0"/>
                 <a:cs typeface="Helvetica Neue" panose="02000503000000020004" pitchFamily="2" charset="0"/>
               </a:rPr>
-              <a:t>Emission rate is a constant </a:t>
-            </a:r>
-            <a:r>
-              <a:rPr kumimoji="0" lang="en-US" sz="1800" b="1" i="0" u="none" strike="noStrike" kern="1200" cap="none" spc="0" normalizeH="0" baseline="0" noProof="0" dirty="0" err="1">
-                <a:ln>
-                  <a:noFill/>
-                </a:ln>
-                <a:solidFill>
-                  <a:prstClr val="white"/>
-                </a:solidFill>
-                <a:effectLst/>
-                <a:uLnTx/>
-                <a:uFillTx/>
-                <a:latin typeface="Helvetica Neue" panose="02000503000000020004" pitchFamily="2" charset="0"/>
-                <a:ea typeface="Helvetica Neue" panose="02000503000000020004" pitchFamily="2" charset="0"/>
-                <a:cs typeface="Helvetica Neue" panose="02000503000000020004" pitchFamily="2" charset="0"/>
-              </a:rPr>
-              <a:t>dq</a:t>
-            </a:r>
-            <a:r>
-              <a:rPr kumimoji="0" lang="en-US" sz="1800" b="1" i="0" u="none" strike="noStrike" kern="1200" cap="none" spc="0" normalizeH="0" baseline="0" noProof="0" dirty="0">
-                <a:ln>
-                  <a:noFill/>
-                </a:ln>
-                <a:solidFill>
-                  <a:prstClr val="white"/>
-                </a:solidFill>
-                <a:effectLst/>
-                <a:uLnTx/>
-                <a:uFillTx/>
-                <a:latin typeface="Helvetica Neue" panose="02000503000000020004" pitchFamily="2" charset="0"/>
-                <a:ea typeface="Helvetica Neue" panose="02000503000000020004" pitchFamily="2" charset="0"/>
-                <a:cs typeface="Helvetica Neue" panose="02000503000000020004" pitchFamily="2" charset="0"/>
-              </a:rPr>
-              <a:t>/dt</a:t>
+              <a:t>Emission rate is modeled as a constant polarity-source rate.</a:t>
             </a:r>
           </a:p>
           <a:p>
@@ -36278,7 +33453,7 @@
                 <a:ea typeface="Helvetica Neue" panose="02000503000000020004" pitchFamily="2" charset="0"/>
                 <a:cs typeface="Helvetica Neue" panose="02000503000000020004" pitchFamily="2" charset="0"/>
               </a:rPr>
-              <a:t>At v = 0, emission magnitude is q</a:t>
+              <a:t>At v = 0, wake strength is q.</a:t>
             </a:r>
           </a:p>
           <a:p>
@@ -36314,7 +33489,7 @@
                 <a:ea typeface="Helvetica Neue" panose="02000503000000020004" pitchFamily="2" charset="0"/>
                 <a:cs typeface="Helvetica Neue" panose="02000503000000020004" pitchFamily="2" charset="0"/>
               </a:rPr>
-              <a:t>At v &gt; 0, emission magnitude is q/v</a:t>
+              <a:t>For v &gt; 0, received strength depends on source motion and causal-root geometry.</a:t>
             </a:r>
           </a:p>
           <a:p>
@@ -36350,76 +33525,9 @@
                 <a:ea typeface="Helvetica Neue" panose="02000503000000020004" pitchFamily="2" charset="0"/>
                 <a:cs typeface="Helvetica Neue" panose="02000503000000020004" pitchFamily="2" charset="0"/>
               </a:rPr>
-              <a:t>The potential magnitude at the surface of each Dirac sphere decreases as 1/r</a:t>
-            </a:r>
-            <a:r>
-              <a:rPr kumimoji="0" lang="en-US" sz="1800" b="1" i="0" u="none" strike="noStrike" kern="1200" cap="none" spc="0" normalizeH="0" baseline="30000" noProof="0" dirty="0">
-                <a:ln>
-                  <a:noFill/>
-                </a:ln>
-                <a:solidFill>
-                  <a:prstClr val="white"/>
-                </a:solidFill>
-                <a:effectLst/>
-                <a:uLnTx/>
-                <a:uFillTx/>
-                <a:latin typeface="Helvetica Neue" panose="02000503000000020004" pitchFamily="2" charset="0"/>
-                <a:ea typeface="Helvetica Neue" panose="02000503000000020004" pitchFamily="2" charset="0"/>
-                <a:cs typeface="Helvetica Neue" panose="02000503000000020004" pitchFamily="2" charset="0"/>
-              </a:rPr>
-              <a:t>2</a:t>
-            </a:r>
-            <a:r>
-              <a:rPr kumimoji="0" lang="en-US" sz="1800" b="1" i="0" u="none" strike="noStrike" kern="1200" cap="none" spc="0" normalizeH="0" baseline="0" noProof="0" dirty="0">
-                <a:ln>
-                  <a:noFill/>
-                </a:ln>
-                <a:solidFill>
-                  <a:prstClr val="white"/>
-                </a:solidFill>
-                <a:effectLst/>
-                <a:uLnTx/>
-                <a:uFillTx/>
-                <a:latin typeface="Helvetica Neue" panose="02000503000000020004" pitchFamily="2" charset="0"/>
-                <a:ea typeface="Helvetica Neue" panose="02000503000000020004" pitchFamily="2" charset="0"/>
-                <a:cs typeface="Helvetica Neue" panose="02000503000000020004" pitchFamily="2" charset="0"/>
-              </a:rPr>
-              <a:t>, where r is the radius to the emission point, the sphere center</a:t>
+              <a:t>Wake-surface density decreases as 1/r^2 with radius from the emission point.</a:t>
             </a:r>
             <a:endParaRPr kumimoji="0" lang="en-US" sz="1800" b="1" i="0" u="none" strike="noStrike" kern="1200" cap="none" spc="0" normalizeH="0" baseline="30000" noProof="0" dirty="0">
-              <a:ln>
-                <a:noFill/>
-              </a:ln>
-              <a:solidFill>
-                <a:prstClr val="white"/>
-              </a:solidFill>
-              <a:effectLst/>
-              <a:uLnTx/>
-              <a:uFillTx/>
-              <a:latin typeface="Helvetica Neue" panose="02000503000000020004" pitchFamily="2" charset="0"/>
-              <a:ea typeface="Helvetica Neue" panose="02000503000000020004" pitchFamily="2" charset="0"/>
-              <a:cs typeface="Helvetica Neue" panose="02000503000000020004" pitchFamily="2" charset="0"/>
-            </a:endParaRPr>
-          </a:p>
-          <a:p>
-            <a:pPr marL="285750" marR="0" lvl="0" indent="-285750" algn="l" defTabSz="914400" rtl="0" eaLnBrk="1" fontAlgn="auto" latinLnBrk="0" hangingPunct="1">
-              <a:lnSpc>
-                <a:spcPct val="150000"/>
-              </a:lnSpc>
-              <a:spcBef>
-                <a:spcPts val="0"/>
-              </a:spcBef>
-              <a:spcAft>
-                <a:spcPts val="0"/>
-              </a:spcAft>
-              <a:buClrTx/>
-              <a:buSzTx/>
-              <a:buFont typeface="Arial" panose="020B0604020202020204" pitchFamily="34" charset="0"/>
-              <a:buChar char="•"/>
-              <a:tabLst/>
-              <a:defRPr/>
-            </a:pPr>
-            <a:endParaRPr kumimoji="0" lang="en-US" sz="1800" b="1" i="0" u="none" strike="noStrike" kern="1200" cap="none" spc="0" normalizeH="0" baseline="0" noProof="0" dirty="0">
               <a:ln>
                 <a:noFill/>
               </a:ln>
@@ -38360,7 +35468,7 @@
                 <a:ea typeface="Helvetica Neue" panose="02000503000000020004" pitchFamily="2" charset="0"/>
                 <a:cs typeface="Helvetica Neue" panose="02000503000000020004" pitchFamily="2" charset="0"/>
               </a:rPr>
-              <a:t>The potential emitted by charge A at time t’ expands spherically at field speed @. </a:t>
+              <a:t>The causal wake emitted by architrino A at time t' expands at wake speed c_f.</a:t>
             </a:r>
           </a:p>
           <a:p>
@@ -38373,7 +35481,7 @@
                 <a:ea typeface="Helvetica Neue" panose="02000503000000020004" pitchFamily="2" charset="0"/>
                 <a:cs typeface="Helvetica Neue" panose="02000503000000020004" pitchFamily="2" charset="0"/>
               </a:rPr>
-              <a:t>Action occurs when the potential sphere intersects charge B at time t.</a:t>
+              <a:t>A hit occurs when that wake surface intersects architrino B at time t.</a:t>
             </a:r>
             <a:endParaRPr lang="en-US" dirty="0">
               <a:solidFill>
@@ -38658,7 +35766,7 @@
                 <a:ea typeface="Helvetica Neue" panose="02000503000000020004" pitchFamily="2" charset="0"/>
                 <a:cs typeface="Helvetica Neue" panose="02000503000000020004" pitchFamily="2" charset="0"/>
               </a:rPr>
-              <a:t>Point Potential Path History and Action</a:t>
+              <a:t>Architrino Path History and Wake Hits</a:t>
             </a:r>
             <a:endParaRPr lang="en-US" sz="2800" b="1" baseline="30000" dirty="0">
               <a:solidFill>
@@ -38839,7 +35947,7 @@
                   <a:ea typeface="Helvetica Neue" panose="02000503000000020004" pitchFamily="2" charset="0"/>
                   <a:cs typeface="Helvetica Neue" panose="02000503000000020004" pitchFamily="2" charset="0"/>
                 </a:rPr>
-                <a:t>Absolute Euclidean Time</a:t>
+                <a:t>Absolute Time</a:t>
               </a:r>
             </a:p>
           </p:txBody>
@@ -38871,42 +35979,6 @@
               <a:spAutoFit/>
             </a:bodyPr>
             <a:lstStyle/>
-            <a:p>
-              <a:pPr marL="0" marR="0" lvl="0" indent="0" algn="ctr" defTabSz="914400" rtl="0" eaLnBrk="1" fontAlgn="auto" latinLnBrk="0" hangingPunct="1">
-                <a:lnSpc>
-                  <a:spcPct val="100000"/>
-                </a:lnSpc>
-                <a:spcBef>
-                  <a:spcPts val="0"/>
-                </a:spcBef>
-                <a:spcAft>
-                  <a:spcPts val="0"/>
-                </a:spcAft>
-                <a:buClrTx/>
-                <a:buSzTx/>
-                <a:buFontTx/>
-                <a:buNone/>
-                <a:tabLst/>
-                <a:defRPr/>
-              </a:pPr>
-              <a:r>
-                <a:rPr kumimoji="0" lang="en-US" sz="1800" b="0" i="0" u="none" strike="noStrike" kern="1200" cap="none" spc="0" normalizeH="0" baseline="0" noProof="0" dirty="0">
-                  <a:ln>
-                    <a:noFill/>
-                  </a:ln>
-                  <a:solidFill>
-                    <a:prstClr val="white"/>
-                  </a:solidFill>
-                  <a:effectLst/>
-                  <a:uLnTx/>
-                  <a:uFillTx/>
-                  <a:latin typeface="Helvetica Neue" panose="02000503000000020004" pitchFamily="2" charset="0"/>
-                  <a:ea typeface="Helvetica Neue" panose="02000503000000020004" pitchFamily="2" charset="0"/>
-                  <a:cs typeface="Helvetica Neue" panose="02000503000000020004" pitchFamily="2" charset="0"/>
-                </a:rPr>
-                <a:t>Absolute </a:t>
-              </a:r>
-            </a:p>
             <a:p>
               <a:pPr marL="0" marR="0" lvl="0" indent="0" algn="ctr" defTabSz="914400" rtl="0" eaLnBrk="1" fontAlgn="auto" latinLnBrk="0" hangingPunct="1">
                 <a:lnSpc>
@@ -38976,7 +36048,7 @@
                   <a:ea typeface="Helvetica Neue" panose="02000503000000020004" pitchFamily="2" charset="0"/>
                   <a:cs typeface="Helvetica Neue" panose="02000503000000020004" pitchFamily="2" charset="0"/>
                 </a:rPr>
-                <a:t>3D Space</a:t>
+                <a:t>Void</a:t>
               </a:r>
             </a:p>
           </p:txBody>

--- a/reference/archie/presentations/NPQG Fundamentals - Paths.pptx
+++ b/reference/archie/presentations/NPQG Fundamentals - Paths.pptx
@@ -494,14 +494,14 @@
 </file>
 
 <file path=ppt/notesSlides/notesSlide1.xml><?xml version="1.0" encoding="utf-8"?>
-<p:notes xmlns:a="http://schemas.openxmlformats.org/drawingml/2006/main" xmlns:r="http://schemas.openxmlformats.org/officeDocument/2006/relationships" xmlns:p="http://schemas.openxmlformats.org/presentationml/2006/main">
+<p:notes xmlns:a="http://schemas.openxmlformats.org/drawingml/2006/main" xmlns:ns2="http://schemas.microsoft.com/office/drawing/2014/main" xmlns:ns3="http://schemas.microsoft.com/office/powerpoint/2010/main" xmlns:p="http://schemas.openxmlformats.org/presentationml/2006/main">
   <p:cSld>
     <p:spTree>
       <p:nvGrpSpPr>
         <p:cNvPr id="1" name="">
           <a:extLst>
             <a:ext uri="{FF2B5EF4-FFF2-40B4-BE49-F238E27FC236}">
-              <a16:creationId xmlns:a16="http://schemas.microsoft.com/office/drawing/2014/main" id="{72B4FD5E-E4A1-869A-87AC-4D8560C3AA3A}"/>
+              <ns2:creationId id="{72B4FD5E-E4A1-869A-87AC-4D8560C3AA3A}"/>
             </a:ext>
           </a:extLst>
         </p:cNvPr>
@@ -521,7 +521,7 @@
           <p:cNvPr id="2" name="Slide Image Placeholder 1">
             <a:extLst>
               <a:ext uri="{FF2B5EF4-FFF2-40B4-BE49-F238E27FC236}">
-                <a16:creationId xmlns:a16="http://schemas.microsoft.com/office/drawing/2014/main" id="{5BE4D260-7D14-DF6F-8DA8-28937DE9D0A3}"/>
+                <ns2:creationId id="{5BE4D260-7D14-DF6F-8DA8-28937DE9D0A3}"/>
               </a:ext>
             </a:extLst>
           </p:cNvPr>
@@ -539,7 +539,7 @@
           <p:cNvPr id="3" name="Notes Placeholder 2">
             <a:extLst>
               <a:ext uri="{FF2B5EF4-FFF2-40B4-BE49-F238E27FC236}">
-                <a16:creationId xmlns:a16="http://schemas.microsoft.com/office/drawing/2014/main" id="{4A5A7B81-68A0-4528-3EA2-B6C48D555A49}"/>
+                <ns2:creationId id="{4A5A7B81-68A0-4528-3EA2-B6C48D555A49}"/>
               </a:ext>
             </a:extLst>
           </p:cNvPr>
@@ -618,7 +618,7 @@
           <p:cNvPr id="4" name="Slide Number Placeholder 3">
             <a:extLst>
               <a:ext uri="{FF2B5EF4-FFF2-40B4-BE49-F238E27FC236}">
-                <a16:creationId xmlns:a16="http://schemas.microsoft.com/office/drawing/2014/main" id="{273AC267-9E54-7CAF-A5D8-FE3E621ED2C2}"/>
+                <ns2:creationId id="{273AC267-9E54-7CAF-A5D8-FE3E621ED2C2}"/>
               </a:ext>
             </a:extLst>
           </p:cNvPr>
@@ -705,7 +705,7 @@
     </p:spTree>
     <p:extLst>
       <p:ext uri="{BB962C8B-B14F-4D97-AF65-F5344CB8AC3E}">
-        <p14:creationId xmlns:p14="http://schemas.microsoft.com/office/powerpoint/2010/main" val="1162151565"/>
+        <ns3:creationId val="1162151565"/>
       </p:ext>
     </p:extLst>
   </p:cSld>
@@ -716,7 +716,7 @@
 </file>
 
 <file path=ppt/notesSlides/notesSlide10.xml><?xml version="1.0" encoding="utf-8"?>
-<p:notes xmlns:a="http://schemas.openxmlformats.org/drawingml/2006/main" xmlns:r="http://schemas.openxmlformats.org/officeDocument/2006/relationships" xmlns:p="http://schemas.openxmlformats.org/presentationml/2006/main">
+<p:notes xmlns:a="http://schemas.openxmlformats.org/drawingml/2006/main" xmlns:ns2="http://schemas.microsoft.com/office/powerpoint/2010/main" xmlns:p="http://schemas.openxmlformats.org/presentationml/2006/main">
   <p:cSld>
     <p:spTree>
       <p:nvGrpSpPr>
@@ -822,12 +822,36 @@
               </a:rPr>
             </a:br>
             <a:r>
-              <a:rPr lang="en-US" sz="9600" b="1" dirty="0">
+              <a:rPr lang="en-US" sz="9600" b="1" dirty="0" baseline="0">
                 <a:latin typeface="Helvetica Neue" panose="02000503000000020004" pitchFamily="2" charset="0"/>
                 <a:ea typeface="Helvetica Neue" panose="02000503000000020004" pitchFamily="2" charset="0"/>
                 <a:cs typeface="Helvetica Neue" panose="02000503000000020004" pitchFamily="2" charset="0"/>
               </a:rPr>
-              <a:t>They may also be riding on their own wake if v &gt; c_f. </a:t>
+              <a:t xml:space="preserve">They may also be riding on their own wake if v &gt; </a:t>
+            </a:r>
+            <a:r>
+              <a:rPr lang="en-US" sz="9600" b="1" dirty="0" baseline="0">
+                <a:latin typeface="Helvetica Neue" panose="02000503000000020004" pitchFamily="2" charset="0"/>
+                <a:ea typeface="Helvetica Neue" panose="02000503000000020004" pitchFamily="2" charset="0"/>
+                <a:cs typeface="Helvetica Neue" panose="02000503000000020004" pitchFamily="2" charset="0"/>
+              </a:rPr>
+              <a:t>c</a:t>
+            </a:r>
+            <a:r>
+              <a:rPr lang="en-US" sz="6720" b="1" dirty="0" baseline="-25000">
+                <a:latin typeface="Helvetica Neue" panose="02000503000000020004" pitchFamily="2" charset="0"/>
+                <a:ea typeface="Helvetica Neue" panose="02000503000000020004" pitchFamily="2" charset="0"/>
+                <a:cs typeface="Helvetica Neue" panose="02000503000000020004" pitchFamily="2" charset="0"/>
+              </a:rPr>
+              <a:t>f</a:t>
+            </a:r>
+            <a:r>
+              <a:rPr lang="en-US" sz="9600" b="1" dirty="0" baseline="0">
+                <a:latin typeface="Helvetica Neue" panose="02000503000000020004" pitchFamily="2" charset="0"/>
+                <a:ea typeface="Helvetica Neue" panose="02000503000000020004" pitchFamily="2" charset="0"/>
+                <a:cs typeface="Helvetica Neue" panose="02000503000000020004" pitchFamily="2" charset="0"/>
+              </a:rPr>
+              <a:t xml:space="preserve">. </a:t>
             </a:r>
             <a:br>
               <a:rPr lang="en-US" sz="9600" b="1" dirty="0">
@@ -837,12 +861,36 @@
               </a:rPr>
             </a:br>
             <a:r>
-              <a:rPr lang="en-US" sz="9600" b="1" dirty="0">
+              <a:rPr lang="en-US" sz="9600" b="1" dirty="0" baseline="0">
                 <a:latin typeface="Helvetica Neue" panose="02000503000000020004" pitchFamily="2" charset="0"/>
                 <a:ea typeface="Helvetica Neue" panose="02000503000000020004" pitchFamily="2" charset="0"/>
                 <a:cs typeface="Helvetica Neue" panose="02000503000000020004" pitchFamily="2" charset="0"/>
               </a:rPr>
-              <a:t>For each partner that has operated at v&gt;c_f a architrino may encounter multiple of their wakes or a continuous stretch of wake?  </a:t>
+              <a:t>For each partner that has operated at v&gt;</a:t>
+            </a:r>
+            <a:r>
+              <a:rPr lang="en-US" sz="9600" b="1" dirty="0" baseline="0">
+                <a:latin typeface="Helvetica Neue" panose="02000503000000020004" pitchFamily="2" charset="0"/>
+                <a:ea typeface="Helvetica Neue" panose="02000503000000020004" pitchFamily="2" charset="0"/>
+                <a:cs typeface="Helvetica Neue" panose="02000503000000020004" pitchFamily="2" charset="0"/>
+              </a:rPr>
+              <a:t>c</a:t>
+            </a:r>
+            <a:r>
+              <a:rPr lang="en-US" sz="6720" b="1" dirty="0" baseline="-25000">
+                <a:latin typeface="Helvetica Neue" panose="02000503000000020004" pitchFamily="2" charset="0"/>
+                <a:ea typeface="Helvetica Neue" panose="02000503000000020004" pitchFamily="2" charset="0"/>
+                <a:cs typeface="Helvetica Neue" panose="02000503000000020004" pitchFamily="2" charset="0"/>
+              </a:rPr>
+              <a:t>f</a:t>
+            </a:r>
+            <a:r>
+              <a:rPr lang="en-US" sz="9600" b="1" dirty="0" baseline="0">
+                <a:latin typeface="Helvetica Neue" panose="02000503000000020004" pitchFamily="2" charset="0"/>
+                <a:ea typeface="Helvetica Neue" panose="02000503000000020004" pitchFamily="2" charset="0"/>
+                <a:cs typeface="Helvetica Neue" panose="02000503000000020004" pitchFamily="2" charset="0"/>
+              </a:rPr>
+              <a:t xml:space="preserve"> a architrino may encounter multiple of their wakes or a continuous stretch of wake?  </a:t>
             </a:r>
             <a:br>
               <a:rPr lang="en-US" sz="9600" b="1" dirty="0">
@@ -948,7 +996,7 @@
     </p:spTree>
     <p:extLst>
       <p:ext uri="{BB962C8B-B14F-4D97-AF65-F5344CB8AC3E}">
-        <p14:creationId xmlns:p14="http://schemas.microsoft.com/office/powerpoint/2010/main" val="3496708072"/>
+        <ns2:creationId val="3496708072"/>
       </p:ext>
     </p:extLst>
   </p:cSld>
@@ -959,7 +1007,7 @@
 </file>
 
 <file path=ppt/notesSlides/notesSlide11.xml><?xml version="1.0" encoding="utf-8"?>
-<p:notes xmlns:a="http://schemas.openxmlformats.org/drawingml/2006/main" xmlns:r="http://schemas.openxmlformats.org/officeDocument/2006/relationships" xmlns:p="http://schemas.openxmlformats.org/presentationml/2006/main">
+<p:notes xmlns:a="http://schemas.openxmlformats.org/drawingml/2006/main" xmlns:ns2="http://schemas.microsoft.com/office/powerpoint/2010/main" xmlns:p="http://schemas.openxmlformats.org/presentationml/2006/main">
   <p:cSld>
     <p:spTree>
       <p:nvGrpSpPr>
@@ -1092,7 +1140,7 @@
     </p:spTree>
     <p:extLst>
       <p:ext uri="{BB962C8B-B14F-4D97-AF65-F5344CB8AC3E}">
-        <p14:creationId xmlns:p14="http://schemas.microsoft.com/office/powerpoint/2010/main" val="2550177487"/>
+        <ns2:creationId val="2550177487"/>
       </p:ext>
     </p:extLst>
   </p:cSld>
@@ -1103,14 +1151,14 @@
 </file>
 
 <file path=ppt/notesSlides/notesSlide12.xml><?xml version="1.0" encoding="utf-8"?>
-<p:notes xmlns:a="http://schemas.openxmlformats.org/drawingml/2006/main" xmlns:r="http://schemas.openxmlformats.org/officeDocument/2006/relationships" xmlns:p="http://schemas.openxmlformats.org/presentationml/2006/main">
+<p:notes xmlns:a="http://schemas.openxmlformats.org/drawingml/2006/main" xmlns:ns2="http://schemas.microsoft.com/office/drawing/2014/main" xmlns:ns3="http://schemas.microsoft.com/office/powerpoint/2010/main" xmlns:p="http://schemas.openxmlformats.org/presentationml/2006/main">
   <p:cSld>
     <p:spTree>
       <p:nvGrpSpPr>
         <p:cNvPr id="1" name="">
           <a:extLst>
             <a:ext uri="{FF2B5EF4-FFF2-40B4-BE49-F238E27FC236}">
-              <a16:creationId xmlns:a16="http://schemas.microsoft.com/office/drawing/2014/main" id="{5ED7CF9D-0276-52CE-9E2D-3C0D97E2BE37}"/>
+              <ns2:creationId id="{5ED7CF9D-0276-52CE-9E2D-3C0D97E2BE37}"/>
             </a:ext>
           </a:extLst>
         </p:cNvPr>
@@ -1130,7 +1178,7 @@
           <p:cNvPr id="2" name="Slide Image Placeholder 1">
             <a:extLst>
               <a:ext uri="{FF2B5EF4-FFF2-40B4-BE49-F238E27FC236}">
-                <a16:creationId xmlns:a16="http://schemas.microsoft.com/office/drawing/2014/main" id="{3C0A8E7F-6A6D-EE24-EAAB-15ABD0132A48}"/>
+                <ns2:creationId id="{3C0A8E7F-6A6D-EE24-EAAB-15ABD0132A48}"/>
               </a:ext>
             </a:extLst>
           </p:cNvPr>
@@ -1148,7 +1196,7 @@
           <p:cNvPr id="3" name="Notes Placeholder 2">
             <a:extLst>
               <a:ext uri="{FF2B5EF4-FFF2-40B4-BE49-F238E27FC236}">
-                <a16:creationId xmlns:a16="http://schemas.microsoft.com/office/drawing/2014/main" id="{AC4CCC5C-360D-F97E-6352-C9212CC36C75}"/>
+                <ns2:creationId id="{AC4CCC5C-360D-F97E-6352-C9212CC36C75}"/>
               </a:ext>
             </a:extLst>
           </p:cNvPr>
@@ -1701,7 +1749,7 @@
           <p:cNvPr id="4" name="Slide Number Placeholder 3">
             <a:extLst>
               <a:ext uri="{FF2B5EF4-FFF2-40B4-BE49-F238E27FC236}">
-                <a16:creationId xmlns:a16="http://schemas.microsoft.com/office/drawing/2014/main" id="{9BE5A30E-C814-C737-0E87-764F58719305}"/>
+                <ns2:creationId id="{9BE5A30E-C814-C737-0E87-764F58719305}"/>
               </a:ext>
             </a:extLst>
           </p:cNvPr>
@@ -1728,7 +1776,7 @@
     </p:spTree>
     <p:extLst>
       <p:ext uri="{BB962C8B-B14F-4D97-AF65-F5344CB8AC3E}">
-        <p14:creationId xmlns:p14="http://schemas.microsoft.com/office/powerpoint/2010/main" val="1879055837"/>
+        <ns3:creationId val="1879055837"/>
       </p:ext>
     </p:extLst>
   </p:cSld>
@@ -1739,14 +1787,14 @@
 </file>
 
 <file path=ppt/notesSlides/notesSlide13.xml><?xml version="1.0" encoding="utf-8"?>
-<p:notes xmlns:a="http://schemas.openxmlformats.org/drawingml/2006/main" xmlns:r="http://schemas.openxmlformats.org/officeDocument/2006/relationships" xmlns:p="http://schemas.openxmlformats.org/presentationml/2006/main">
+<p:notes xmlns:a="http://schemas.openxmlformats.org/drawingml/2006/main" xmlns:ns2="http://schemas.microsoft.com/office/drawing/2014/main" xmlns:ns3="http://schemas.microsoft.com/office/powerpoint/2010/main" xmlns:p="http://schemas.openxmlformats.org/presentationml/2006/main">
   <p:cSld>
     <p:spTree>
       <p:nvGrpSpPr>
         <p:cNvPr id="1" name="">
           <a:extLst>
             <a:ext uri="{FF2B5EF4-FFF2-40B4-BE49-F238E27FC236}">
-              <a16:creationId xmlns:a16="http://schemas.microsoft.com/office/drawing/2014/main" id="{F4B2594E-083A-33B0-1887-4D75961D8DFC}"/>
+              <ns2:creationId id="{F4B2594E-083A-33B0-1887-4D75961D8DFC}"/>
             </a:ext>
           </a:extLst>
         </p:cNvPr>
@@ -1766,7 +1814,7 @@
           <p:cNvPr id="2" name="Slide Image Placeholder 1">
             <a:extLst>
               <a:ext uri="{FF2B5EF4-FFF2-40B4-BE49-F238E27FC236}">
-                <a16:creationId xmlns:a16="http://schemas.microsoft.com/office/drawing/2014/main" id="{649C972F-8115-0086-8D46-F43BA6CB6AFD}"/>
+                <ns2:creationId id="{649C972F-8115-0086-8D46-F43BA6CB6AFD}"/>
               </a:ext>
             </a:extLst>
           </p:cNvPr>
@@ -1784,7 +1832,7 @@
           <p:cNvPr id="3" name="Notes Placeholder 2">
             <a:extLst>
               <a:ext uri="{FF2B5EF4-FFF2-40B4-BE49-F238E27FC236}">
-                <a16:creationId xmlns:a16="http://schemas.microsoft.com/office/drawing/2014/main" id="{7ECA05C0-C97B-9722-138D-940A0126F522}"/>
+                <ns2:creationId id="{7ECA05C0-C97B-9722-138D-940A0126F522}"/>
               </a:ext>
             </a:extLst>
           </p:cNvPr>
@@ -1863,7 +1911,7 @@
           <p:cNvPr id="4" name="Slide Number Placeholder 3">
             <a:extLst>
               <a:ext uri="{FF2B5EF4-FFF2-40B4-BE49-F238E27FC236}">
-                <a16:creationId xmlns:a16="http://schemas.microsoft.com/office/drawing/2014/main" id="{49D93F59-9C10-56A8-29DB-C5BD61D5AF10}"/>
+                <ns2:creationId id="{49D93F59-9C10-56A8-29DB-C5BD61D5AF10}"/>
               </a:ext>
             </a:extLst>
           </p:cNvPr>
@@ -1950,7 +1998,7 @@
     </p:spTree>
     <p:extLst>
       <p:ext uri="{BB962C8B-B14F-4D97-AF65-F5344CB8AC3E}">
-        <p14:creationId xmlns:p14="http://schemas.microsoft.com/office/powerpoint/2010/main" val="1734577285"/>
+        <ns3:creationId val="1734577285"/>
       </p:ext>
     </p:extLst>
   </p:cSld>
@@ -1961,7 +2009,7 @@
 </file>
 
 <file path=ppt/notesSlides/notesSlide2.xml><?xml version="1.0" encoding="utf-8"?>
-<p:notes xmlns:a="http://schemas.openxmlformats.org/drawingml/2006/main" xmlns:r="http://schemas.openxmlformats.org/officeDocument/2006/relationships" xmlns:p="http://schemas.openxmlformats.org/presentationml/2006/main">
+<p:notes xmlns:a="http://schemas.openxmlformats.org/drawingml/2006/main" xmlns:ns2="http://schemas.microsoft.com/office/powerpoint/2010/main" xmlns:p="http://schemas.openxmlformats.org/presentationml/2006/main">
   <p:cSld>
     <p:spTree>
       <p:nvGrpSpPr>
@@ -2122,7 +2170,7 @@
     </p:spTree>
     <p:extLst>
       <p:ext uri="{BB962C8B-B14F-4D97-AF65-F5344CB8AC3E}">
-        <p14:creationId xmlns:p14="http://schemas.microsoft.com/office/powerpoint/2010/main" val="860550296"/>
+        <ns2:creationId val="860550296"/>
       </p:ext>
     </p:extLst>
   </p:cSld>
@@ -2133,14 +2181,14 @@
 </file>
 
 <file path=ppt/notesSlides/notesSlide3.xml><?xml version="1.0" encoding="utf-8"?>
-<p:notes xmlns:a="http://schemas.openxmlformats.org/drawingml/2006/main" xmlns:r="http://schemas.openxmlformats.org/officeDocument/2006/relationships" xmlns:p="http://schemas.openxmlformats.org/presentationml/2006/main">
+<p:notes xmlns:a="http://schemas.openxmlformats.org/drawingml/2006/main" xmlns:ns2="http://schemas.microsoft.com/office/drawing/2014/main" xmlns:ns3="http://schemas.microsoft.com/office/powerpoint/2010/main" xmlns:p="http://schemas.openxmlformats.org/presentationml/2006/main">
   <p:cSld>
     <p:spTree>
       <p:nvGrpSpPr>
         <p:cNvPr id="1" name="">
           <a:extLst>
             <a:ext uri="{FF2B5EF4-FFF2-40B4-BE49-F238E27FC236}">
-              <a16:creationId xmlns:a16="http://schemas.microsoft.com/office/drawing/2014/main" id="{93C7B214-35E5-40E6-ED8E-2D7C6DAB00FD}"/>
+              <ns2:creationId id="{93C7B214-35E5-40E6-ED8E-2D7C6DAB00FD}"/>
             </a:ext>
           </a:extLst>
         </p:cNvPr>
@@ -2160,7 +2208,7 @@
           <p:cNvPr id="2" name="Slide Image Placeholder 1">
             <a:extLst>
               <a:ext uri="{FF2B5EF4-FFF2-40B4-BE49-F238E27FC236}">
-                <a16:creationId xmlns:a16="http://schemas.microsoft.com/office/drawing/2014/main" id="{B69B170F-C727-57B1-1343-0F8509F3ABE8}"/>
+                <ns2:creationId id="{B69B170F-C727-57B1-1343-0F8509F3ABE8}"/>
               </a:ext>
             </a:extLst>
           </p:cNvPr>
@@ -2178,7 +2226,7 @@
           <p:cNvPr id="3" name="Notes Placeholder 2">
             <a:extLst>
               <a:ext uri="{FF2B5EF4-FFF2-40B4-BE49-F238E27FC236}">
-                <a16:creationId xmlns:a16="http://schemas.microsoft.com/office/drawing/2014/main" id="{7981E51D-982C-C58E-5C9D-E60D1957190A}"/>
+                <ns2:creationId id="{7981E51D-982C-C58E-5C9D-E60D1957190A}"/>
               </a:ext>
             </a:extLst>
           </p:cNvPr>
@@ -2231,7 +2279,7 @@
           <p:cNvPr id="4" name="Slide Number Placeholder 3">
             <a:extLst>
               <a:ext uri="{FF2B5EF4-FFF2-40B4-BE49-F238E27FC236}">
-                <a16:creationId xmlns:a16="http://schemas.microsoft.com/office/drawing/2014/main" id="{3694923C-44A0-8AF2-498D-3125889DDCB4}"/>
+                <ns2:creationId id="{3694923C-44A0-8AF2-498D-3125889DDCB4}"/>
               </a:ext>
             </a:extLst>
           </p:cNvPr>
@@ -2318,7 +2366,7 @@
     </p:spTree>
     <p:extLst>
       <p:ext uri="{BB962C8B-B14F-4D97-AF65-F5344CB8AC3E}">
-        <p14:creationId xmlns:p14="http://schemas.microsoft.com/office/powerpoint/2010/main" val="131822489"/>
+        <ns3:creationId val="131822489"/>
       </p:ext>
     </p:extLst>
   </p:cSld>
@@ -2329,14 +2377,14 @@
 </file>
 
 <file path=ppt/notesSlides/notesSlide4.xml><?xml version="1.0" encoding="utf-8"?>
-<p:notes xmlns:a="http://schemas.openxmlformats.org/drawingml/2006/main" xmlns:r="http://schemas.openxmlformats.org/officeDocument/2006/relationships" xmlns:p="http://schemas.openxmlformats.org/presentationml/2006/main">
+<p:notes xmlns:a="http://schemas.openxmlformats.org/drawingml/2006/main" xmlns:ns2="http://schemas.microsoft.com/office/drawing/2014/main" xmlns:ns3="http://schemas.microsoft.com/office/powerpoint/2010/main" xmlns:p="http://schemas.openxmlformats.org/presentationml/2006/main">
   <p:cSld>
     <p:spTree>
       <p:nvGrpSpPr>
         <p:cNvPr id="1" name="">
           <a:extLst>
             <a:ext uri="{FF2B5EF4-FFF2-40B4-BE49-F238E27FC236}">
-              <a16:creationId xmlns:a16="http://schemas.microsoft.com/office/drawing/2014/main" id="{95E231E5-42FD-4E85-EE2F-519914DCAD49}"/>
+              <ns2:creationId id="{95E231E5-42FD-4E85-EE2F-519914DCAD49}"/>
             </a:ext>
           </a:extLst>
         </p:cNvPr>
@@ -2356,7 +2404,7 @@
           <p:cNvPr id="2" name="Slide Image Placeholder 1">
             <a:extLst>
               <a:ext uri="{FF2B5EF4-FFF2-40B4-BE49-F238E27FC236}">
-                <a16:creationId xmlns:a16="http://schemas.microsoft.com/office/drawing/2014/main" id="{C4F49BD2-3448-0850-3F07-5ABBD141E54F}"/>
+                <ns2:creationId id="{C4F49BD2-3448-0850-3F07-5ABBD141E54F}"/>
               </a:ext>
             </a:extLst>
           </p:cNvPr>
@@ -2374,7 +2422,7 @@
           <p:cNvPr id="3" name="Notes Placeholder 2">
             <a:extLst>
               <a:ext uri="{FF2B5EF4-FFF2-40B4-BE49-F238E27FC236}">
-                <a16:creationId xmlns:a16="http://schemas.microsoft.com/office/drawing/2014/main" id="{4164BDE8-5673-C9F6-F2F2-B5547A5D45FE}"/>
+                <ns2:creationId id="{4164BDE8-5673-C9F6-F2F2-B5547A5D45FE}"/>
               </a:ext>
             </a:extLst>
           </p:cNvPr>
@@ -2427,7 +2475,7 @@
           <p:cNvPr id="4" name="Slide Number Placeholder 3">
             <a:extLst>
               <a:ext uri="{FF2B5EF4-FFF2-40B4-BE49-F238E27FC236}">
-                <a16:creationId xmlns:a16="http://schemas.microsoft.com/office/drawing/2014/main" id="{C189F22E-58E9-2143-1D57-A988438B2164}"/>
+                <ns2:creationId id="{C189F22E-58E9-2143-1D57-A988438B2164}"/>
               </a:ext>
             </a:extLst>
           </p:cNvPr>
@@ -2514,7 +2562,7 @@
     </p:spTree>
     <p:extLst>
       <p:ext uri="{BB962C8B-B14F-4D97-AF65-F5344CB8AC3E}">
-        <p14:creationId xmlns:p14="http://schemas.microsoft.com/office/powerpoint/2010/main" val="185871443"/>
+        <ns3:creationId val="185871443"/>
       </p:ext>
     </p:extLst>
   </p:cSld>
@@ -2525,7 +2573,7 @@
 </file>
 
 <file path=ppt/notesSlides/notesSlide5.xml><?xml version="1.0" encoding="utf-8"?>
-<p:notes xmlns:a="http://schemas.openxmlformats.org/drawingml/2006/main" xmlns:r="http://schemas.openxmlformats.org/officeDocument/2006/relationships" xmlns:p="http://schemas.openxmlformats.org/presentationml/2006/main">
+<p:notes xmlns:a="http://schemas.openxmlformats.org/drawingml/2006/main" xmlns:ns2="http://schemas.microsoft.com/office/powerpoint/2010/main" xmlns:p="http://schemas.openxmlformats.org/presentationml/2006/main">
   <p:cSld>
     <p:spTree>
       <p:nvGrpSpPr>
@@ -2686,7 +2734,7 @@
     </p:spTree>
     <p:extLst>
       <p:ext uri="{BB962C8B-B14F-4D97-AF65-F5344CB8AC3E}">
-        <p14:creationId xmlns:p14="http://schemas.microsoft.com/office/powerpoint/2010/main" val="3756986641"/>
+        <ns2:creationId val="3756986641"/>
       </p:ext>
     </p:extLst>
   </p:cSld>
@@ -2697,7 +2745,7 @@
 </file>
 
 <file path=ppt/notesSlides/notesSlide6.xml><?xml version="1.0" encoding="utf-8"?>
-<p:notes xmlns:a="http://schemas.openxmlformats.org/drawingml/2006/main" xmlns:r="http://schemas.openxmlformats.org/officeDocument/2006/relationships" xmlns:p="http://schemas.openxmlformats.org/presentationml/2006/main">
+<p:notes xmlns:a="http://schemas.openxmlformats.org/drawingml/2006/main" xmlns:ns2="http://schemas.microsoft.com/office/powerpoint/2010/main" xmlns:p="http://schemas.openxmlformats.org/presentationml/2006/main">
   <p:cSld>
     <p:spTree>
       <p:nvGrpSpPr>
@@ -2858,7 +2906,7 @@
     </p:spTree>
     <p:extLst>
       <p:ext uri="{BB962C8B-B14F-4D97-AF65-F5344CB8AC3E}">
-        <p14:creationId xmlns:p14="http://schemas.microsoft.com/office/powerpoint/2010/main" val="4143754227"/>
+        <ns2:creationId val="4143754227"/>
       </p:ext>
     </p:extLst>
   </p:cSld>
@@ -2869,7 +2917,7 @@
 </file>
 
 <file path=ppt/notesSlides/notesSlide7.xml><?xml version="1.0" encoding="utf-8"?>
-<p:notes xmlns:a="http://schemas.openxmlformats.org/drawingml/2006/main" xmlns:r="http://schemas.openxmlformats.org/officeDocument/2006/relationships" xmlns:p="http://schemas.openxmlformats.org/presentationml/2006/main">
+<p:notes xmlns:a="http://schemas.openxmlformats.org/drawingml/2006/main" xmlns:ns2="http://schemas.microsoft.com/office/powerpoint/2010/main" xmlns:p="http://schemas.openxmlformats.org/presentationml/2006/main">
   <p:cSld>
     <p:spTree>
       <p:nvGrpSpPr>
@@ -3030,7 +3078,7 @@
     </p:spTree>
     <p:extLst>
       <p:ext uri="{BB962C8B-B14F-4D97-AF65-F5344CB8AC3E}">
-        <p14:creationId xmlns:p14="http://schemas.microsoft.com/office/powerpoint/2010/main" val="1972911739"/>
+        <ns2:creationId val="1972911739"/>
       </p:ext>
     </p:extLst>
   </p:cSld>
@@ -3041,7 +3089,7 @@
 </file>
 
 <file path=ppt/notesSlides/notesSlide8.xml><?xml version="1.0" encoding="utf-8"?>
-<p:notes xmlns:a="http://schemas.openxmlformats.org/drawingml/2006/main" xmlns:r="http://schemas.openxmlformats.org/officeDocument/2006/relationships" xmlns:p="http://schemas.openxmlformats.org/presentationml/2006/main">
+<p:notes xmlns:a="http://schemas.openxmlformats.org/drawingml/2006/main" xmlns:ns2="http://schemas.microsoft.com/office/powerpoint/2010/main" xmlns:p="http://schemas.openxmlformats.org/presentationml/2006/main">
   <p:cSld>
     <p:spTree>
       <p:nvGrpSpPr>
@@ -3642,7 +3690,7 @@
     </p:spTree>
     <p:extLst>
       <p:ext uri="{BB962C8B-B14F-4D97-AF65-F5344CB8AC3E}">
-        <p14:creationId xmlns:p14="http://schemas.microsoft.com/office/powerpoint/2010/main" val="1191104622"/>
+        <ns2:creationId val="1191104622"/>
       </p:ext>
     </p:extLst>
   </p:cSld>
@@ -3653,7 +3701,7 @@
 </file>
 
 <file path=ppt/notesSlides/notesSlide9.xml><?xml version="1.0" encoding="utf-8"?>
-<p:notes xmlns:a="http://schemas.openxmlformats.org/drawingml/2006/main" xmlns:r="http://schemas.openxmlformats.org/officeDocument/2006/relationships" xmlns:p="http://schemas.openxmlformats.org/presentationml/2006/main">
+<p:notes xmlns:a="http://schemas.openxmlformats.org/drawingml/2006/main" xmlns:ns2="http://schemas.microsoft.com/office/powerpoint/2010/main" xmlns:p="http://schemas.openxmlformats.org/presentationml/2006/main">
   <p:cSld>
     <p:spTree>
       <p:nvGrpSpPr>
@@ -3759,12 +3807,36 @@
               </a:rPr>
             </a:br>
             <a:r>
-              <a:rPr lang="en-US" sz="9600" b="1" dirty="0">
+              <a:rPr lang="en-US" sz="9600" b="1" dirty="0" baseline="0">
                 <a:latin typeface="Helvetica Neue" panose="02000503000000020004" pitchFamily="2" charset="0"/>
                 <a:ea typeface="Helvetica Neue" panose="02000503000000020004" pitchFamily="2" charset="0"/>
                 <a:cs typeface="Helvetica Neue" panose="02000503000000020004" pitchFamily="2" charset="0"/>
               </a:rPr>
-              <a:t>They may also be riding on their own wake if v &gt; c_f. </a:t>
+              <a:t xml:space="preserve">They may also be riding on their own wake if v &gt; </a:t>
+            </a:r>
+            <a:r>
+              <a:rPr lang="en-US" sz="9600" b="1" dirty="0" baseline="0">
+                <a:latin typeface="Helvetica Neue" panose="02000503000000020004" pitchFamily="2" charset="0"/>
+                <a:ea typeface="Helvetica Neue" panose="02000503000000020004" pitchFamily="2" charset="0"/>
+                <a:cs typeface="Helvetica Neue" panose="02000503000000020004" pitchFamily="2" charset="0"/>
+              </a:rPr>
+              <a:t>c</a:t>
+            </a:r>
+            <a:r>
+              <a:rPr lang="en-US" sz="6720" b="1" dirty="0" baseline="-25000">
+                <a:latin typeface="Helvetica Neue" panose="02000503000000020004" pitchFamily="2" charset="0"/>
+                <a:ea typeface="Helvetica Neue" panose="02000503000000020004" pitchFamily="2" charset="0"/>
+                <a:cs typeface="Helvetica Neue" panose="02000503000000020004" pitchFamily="2" charset="0"/>
+              </a:rPr>
+              <a:t>f</a:t>
+            </a:r>
+            <a:r>
+              <a:rPr lang="en-US" sz="9600" b="1" dirty="0" baseline="0">
+                <a:latin typeface="Helvetica Neue" panose="02000503000000020004" pitchFamily="2" charset="0"/>
+                <a:ea typeface="Helvetica Neue" panose="02000503000000020004" pitchFamily="2" charset="0"/>
+                <a:cs typeface="Helvetica Neue" panose="02000503000000020004" pitchFamily="2" charset="0"/>
+              </a:rPr>
+              <a:t xml:space="preserve">. </a:t>
             </a:r>
             <a:br>
               <a:rPr lang="en-US" sz="9600" b="1" dirty="0">
@@ -3774,12 +3846,36 @@
               </a:rPr>
             </a:br>
             <a:r>
-              <a:rPr lang="en-US" sz="9600" b="1" dirty="0">
+              <a:rPr lang="en-US" sz="9600" b="1" dirty="0" baseline="0">
                 <a:latin typeface="Helvetica Neue" panose="02000503000000020004" pitchFamily="2" charset="0"/>
                 <a:ea typeface="Helvetica Neue" panose="02000503000000020004" pitchFamily="2" charset="0"/>
                 <a:cs typeface="Helvetica Neue" panose="02000503000000020004" pitchFamily="2" charset="0"/>
               </a:rPr>
-              <a:t>For each partner that has operated at v&gt;c_f a architrino may encounter multiple of their wakes or a continuous stretch of wake?  </a:t>
+              <a:t>For each partner that has operated at v&gt;</a:t>
+            </a:r>
+            <a:r>
+              <a:rPr lang="en-US" sz="9600" b="1" dirty="0" baseline="0">
+                <a:latin typeface="Helvetica Neue" panose="02000503000000020004" pitchFamily="2" charset="0"/>
+                <a:ea typeface="Helvetica Neue" panose="02000503000000020004" pitchFamily="2" charset="0"/>
+                <a:cs typeface="Helvetica Neue" panose="02000503000000020004" pitchFamily="2" charset="0"/>
+              </a:rPr>
+              <a:t>c</a:t>
+            </a:r>
+            <a:r>
+              <a:rPr lang="en-US" sz="6720" b="1" dirty="0" baseline="-25000">
+                <a:latin typeface="Helvetica Neue" panose="02000503000000020004" pitchFamily="2" charset="0"/>
+                <a:ea typeface="Helvetica Neue" panose="02000503000000020004" pitchFamily="2" charset="0"/>
+                <a:cs typeface="Helvetica Neue" panose="02000503000000020004" pitchFamily="2" charset="0"/>
+              </a:rPr>
+              <a:t>f</a:t>
+            </a:r>
+            <a:r>
+              <a:rPr lang="en-US" sz="9600" b="1" dirty="0" baseline="0">
+                <a:latin typeface="Helvetica Neue" panose="02000503000000020004" pitchFamily="2" charset="0"/>
+                <a:ea typeface="Helvetica Neue" panose="02000503000000020004" pitchFamily="2" charset="0"/>
+                <a:cs typeface="Helvetica Neue" panose="02000503000000020004" pitchFamily="2" charset="0"/>
+              </a:rPr>
+              <a:t xml:space="preserve"> a architrino may encounter multiple of their wakes or a continuous stretch of wake?  </a:t>
             </a:r>
             <a:br>
               <a:rPr lang="en-US" sz="9600" b="1" dirty="0">
@@ -3936,7 +4032,7 @@
     </p:spTree>
     <p:extLst>
       <p:ext uri="{BB962C8B-B14F-4D97-AF65-F5344CB8AC3E}">
-        <p14:creationId xmlns:p14="http://schemas.microsoft.com/office/powerpoint/2010/main" val="596825902"/>
+        <ns2:creationId val="596825902"/>
       </p:ext>
     </p:extLst>
   </p:cSld>
@@ -8309,7 +8405,7 @@
 </file>
 
 <file path=ppt/slides/slide1.xml><?xml version="1.0" encoding="utf-8"?>
-<p:sld xmlns:a="http://schemas.openxmlformats.org/drawingml/2006/main" xmlns:r="http://schemas.openxmlformats.org/officeDocument/2006/relationships" xmlns:p="http://schemas.openxmlformats.org/presentationml/2006/main">
+<p:sld xmlns:a="http://schemas.openxmlformats.org/drawingml/2006/main" xmlns:ns2="http://schemas.microsoft.com/office/drawing/2014/main" xmlns:ns3="http://schemas.microsoft.com/office/powerpoint/2010/main" xmlns:p="http://schemas.openxmlformats.org/presentationml/2006/main">
   <p:cSld>
     <p:bg>
       <p:bgPr>
@@ -8324,7 +8420,7 @@
         <p:cNvPr id="1" name="">
           <a:extLst>
             <a:ext uri="{FF2B5EF4-FFF2-40B4-BE49-F238E27FC236}">
-              <a16:creationId xmlns:a16="http://schemas.microsoft.com/office/drawing/2014/main" id="{F12CB3D1-0CE0-632F-6109-64380C884133}"/>
+              <ns2:creationId id="{F12CB3D1-0CE0-632F-6109-64380C884133}"/>
             </a:ext>
           </a:extLst>
         </p:cNvPr>
@@ -8344,7 +8440,7 @@
           <p:cNvPr id="2" name="TextBox 1">
             <a:extLst>
               <a:ext uri="{FF2B5EF4-FFF2-40B4-BE49-F238E27FC236}">
-                <a16:creationId xmlns:a16="http://schemas.microsoft.com/office/drawing/2014/main" id="{4BD4ABB3-A2D3-D440-CAE2-3FE090A98AD7}"/>
+                <ns2:creationId id="{4BD4ABB3-A2D3-D440-CAE2-3FE090A98AD7}"/>
               </a:ext>
             </a:extLst>
           </p:cNvPr>
@@ -8493,7 +8589,7 @@
     </p:spTree>
     <p:extLst>
       <p:ext uri="{BB962C8B-B14F-4D97-AF65-F5344CB8AC3E}">
-        <p14:creationId xmlns:p14="http://schemas.microsoft.com/office/powerpoint/2010/main" val="3704261708"/>
+        <ns3:creationId val="3704261708"/>
       </p:ext>
     </p:extLst>
   </p:cSld>
@@ -8504,7 +8600,7 @@
 </file>
 
 <file path=ppt/slides/slide10.xml><?xml version="1.0" encoding="utf-8"?>
-<p:sld xmlns:a="http://schemas.openxmlformats.org/drawingml/2006/main" xmlns:r="http://schemas.openxmlformats.org/officeDocument/2006/relationships" xmlns:p="http://schemas.openxmlformats.org/presentationml/2006/main">
+<p:sld xmlns:a="http://schemas.openxmlformats.org/drawingml/2006/main" xmlns:ns2="http://schemas.microsoft.com/office/drawing/2014/main" xmlns:ns3="http://schemas.microsoft.com/office/powerpoint/2010/main" xmlns:p="http://schemas.openxmlformats.org/presentationml/2006/main">
   <p:cSld>
     <p:bg>
       <p:bgPr>
@@ -8533,7 +8629,7 @@
           <p:cNvPr id="4" name="Freeform 3">
             <a:extLst>
               <a:ext uri="{FF2B5EF4-FFF2-40B4-BE49-F238E27FC236}">
-                <a16:creationId xmlns:a16="http://schemas.microsoft.com/office/drawing/2014/main" id="{557E8D0E-7530-B118-1DC6-82906B4F6D15}"/>
+                <ns2:creationId id="{557E8D0E-7530-B118-1DC6-82906B4F6D15}"/>
               </a:ext>
             </a:extLst>
           </p:cNvPr>
@@ -9497,7 +9593,7 @@
           <p:cNvPr id="5" name="Footer Placeholder 3">
             <a:extLst>
               <a:ext uri="{FF2B5EF4-FFF2-40B4-BE49-F238E27FC236}">
-                <a16:creationId xmlns:a16="http://schemas.microsoft.com/office/drawing/2014/main" id="{668F77D6-DFDA-5A46-8DF1-47F6A167C2B1}"/>
+                <ns2:creationId id="{668F77D6-DFDA-5A46-8DF1-47F6A167C2B1}"/>
               </a:ext>
             </a:extLst>
           </p:cNvPr>
@@ -9659,7 +9755,7 @@
           <p:cNvPr id="16" name="Freeform 15">
             <a:extLst>
               <a:ext uri="{FF2B5EF4-FFF2-40B4-BE49-F238E27FC236}">
-                <a16:creationId xmlns:a16="http://schemas.microsoft.com/office/drawing/2014/main" id="{226B2D26-F692-894E-9B09-F57FBB5CB2A3}"/>
+                <ns2:creationId id="{226B2D26-F692-894E-9B09-F57FBB5CB2A3}"/>
               </a:ext>
             </a:extLst>
           </p:cNvPr>
@@ -10542,7 +10638,7 @@
           <p:cNvPr id="19" name="Oval 18">
             <a:extLst>
               <a:ext uri="{FF2B5EF4-FFF2-40B4-BE49-F238E27FC236}">
-                <a16:creationId xmlns:a16="http://schemas.microsoft.com/office/drawing/2014/main" id="{0592434B-85D0-0A41-95DD-A29D1D3E92A7}"/>
+                <ns2:creationId id="{0592434B-85D0-0A41-95DD-A29D1D3E92A7}"/>
               </a:ext>
             </a:extLst>
           </p:cNvPr>
@@ -10623,7 +10719,7 @@
           <p:cNvPr id="22" name="TextBox 21">
             <a:extLst>
               <a:ext uri="{FF2B5EF4-FFF2-40B4-BE49-F238E27FC236}">
-                <a16:creationId xmlns:a16="http://schemas.microsoft.com/office/drawing/2014/main" id="{32F7BF73-EB2C-9D42-97FB-D39FDCC924EB}"/>
+                <ns2:creationId id="{32F7BF73-EB2C-9D42-97FB-D39FDCC924EB}"/>
               </a:ext>
             </a:extLst>
           </p:cNvPr>
@@ -10702,7 +10798,7 @@
           <p:cNvPr id="32" name="Group 31">
             <a:extLst>
               <a:ext uri="{FF2B5EF4-FFF2-40B4-BE49-F238E27FC236}">
-                <a16:creationId xmlns:a16="http://schemas.microsoft.com/office/drawing/2014/main" id="{A120AE69-6043-195E-40C7-43C019B9D3A9}"/>
+                <ns2:creationId id="{A120AE69-6043-195E-40C7-43C019B9D3A9}"/>
               </a:ext>
             </a:extLst>
           </p:cNvPr>
@@ -10722,7 +10818,7 @@
             <p:cNvPr id="24" name="Straight Connector 23">
               <a:extLst>
                 <a:ext uri="{FF2B5EF4-FFF2-40B4-BE49-F238E27FC236}">
-                  <a16:creationId xmlns:a16="http://schemas.microsoft.com/office/drawing/2014/main" id="{3A19E039-1667-254C-809A-972BBA46D65C}"/>
+                  <ns2:creationId id="{3A19E039-1667-254C-809A-972BBA46D65C}"/>
                 </a:ext>
               </a:extLst>
             </p:cNvPr>
@@ -10768,7 +10864,7 @@
             <p:cNvPr id="2" name="Oval 1">
               <a:extLst>
                 <a:ext uri="{FF2B5EF4-FFF2-40B4-BE49-F238E27FC236}">
-                  <a16:creationId xmlns:a16="http://schemas.microsoft.com/office/drawing/2014/main" id="{38418338-F1E6-81D9-6A8C-D7EB7AA9DDA2}"/>
+                  <ns2:creationId id="{38418338-F1E6-81D9-6A8C-D7EB7AA9DDA2}"/>
                 </a:ext>
               </a:extLst>
             </p:cNvPr>
@@ -10853,7 +10949,7 @@
           <p:cNvPr id="29" name="TextBox 28">
             <a:extLst>
               <a:ext uri="{FF2B5EF4-FFF2-40B4-BE49-F238E27FC236}">
-                <a16:creationId xmlns:a16="http://schemas.microsoft.com/office/drawing/2014/main" id="{2C329E1C-5E54-9E3C-A6FA-AE50E16EEB85}"/>
+                <ns2:creationId id="{2C329E1C-5E54-9E3C-A6FA-AE50E16EEB85}"/>
               </a:ext>
             </a:extLst>
           </p:cNvPr>
@@ -10932,7 +11028,7 @@
           <p:cNvPr id="40" name="Group 39">
             <a:extLst>
               <a:ext uri="{FF2B5EF4-FFF2-40B4-BE49-F238E27FC236}">
-                <a16:creationId xmlns:a16="http://schemas.microsoft.com/office/drawing/2014/main" id="{C105AAA1-FA00-79D8-70E9-DB832351B5E2}"/>
+                <ns2:creationId id="{C105AAA1-FA00-79D8-70E9-DB832351B5E2}"/>
               </a:ext>
             </a:extLst>
           </p:cNvPr>
@@ -10952,7 +11048,7 @@
             <p:cNvPr id="41" name="Straight Connector 40">
               <a:extLst>
                 <a:ext uri="{FF2B5EF4-FFF2-40B4-BE49-F238E27FC236}">
-                  <a16:creationId xmlns:a16="http://schemas.microsoft.com/office/drawing/2014/main" id="{48D05E5C-4059-6EC7-1299-E52A65F46E3D}"/>
+                  <ns2:creationId id="{48D05E5C-4059-6EC7-1299-E52A65F46E3D}"/>
                 </a:ext>
               </a:extLst>
             </p:cNvPr>
@@ -10998,7 +11094,7 @@
             <p:cNvPr id="42" name="Oval 41">
               <a:extLst>
                 <a:ext uri="{FF2B5EF4-FFF2-40B4-BE49-F238E27FC236}">
-                  <a16:creationId xmlns:a16="http://schemas.microsoft.com/office/drawing/2014/main" id="{8174E055-9EC2-40B6-B317-43A23011EC49}"/>
+                  <ns2:creationId id="{8174E055-9EC2-40B6-B317-43A23011EC49}"/>
                 </a:ext>
               </a:extLst>
             </p:cNvPr>
@@ -11083,7 +11179,7 @@
           <p:cNvPr id="28" name="TextBox 27">
             <a:extLst>
               <a:ext uri="{FF2B5EF4-FFF2-40B4-BE49-F238E27FC236}">
-                <a16:creationId xmlns:a16="http://schemas.microsoft.com/office/drawing/2014/main" id="{B86BBAD0-86F6-0D58-180C-6EA1BDCC33FE}"/>
+                <ns2:creationId id="{B86BBAD0-86F6-0D58-180C-6EA1BDCC33FE}"/>
               </a:ext>
             </a:extLst>
           </p:cNvPr>
@@ -11212,7 +11308,7 @@
           <p:cNvPr id="6" name="Oval 5">
             <a:extLst>
               <a:ext uri="{FF2B5EF4-FFF2-40B4-BE49-F238E27FC236}">
-                <a16:creationId xmlns:a16="http://schemas.microsoft.com/office/drawing/2014/main" id="{AC0CFD16-199C-C379-61A7-C2D95EDE2034}"/>
+                <ns2:creationId id="{AC0CFD16-199C-C379-61A7-C2D95EDE2034}"/>
               </a:ext>
             </a:extLst>
           </p:cNvPr>
@@ -11264,7 +11360,7 @@
           <p:cNvPr id="7" name="TextBox 6">
             <a:extLst>
               <a:ext uri="{FF2B5EF4-FFF2-40B4-BE49-F238E27FC236}">
-                <a16:creationId xmlns:a16="http://schemas.microsoft.com/office/drawing/2014/main" id="{74832E6C-887E-D39B-AAC8-6B87F8F0377B}"/>
+                <ns2:creationId id="{74832E6C-887E-D39B-AAC8-6B87F8F0377B}"/>
               </a:ext>
             </a:extLst>
           </p:cNvPr>
@@ -11311,7 +11407,7 @@
           <p:cNvPr id="9" name="TextBox 8">
             <a:extLst>
               <a:ext uri="{FF2B5EF4-FFF2-40B4-BE49-F238E27FC236}">
-                <a16:creationId xmlns:a16="http://schemas.microsoft.com/office/drawing/2014/main" id="{3FBBB3C0-9EF9-2269-F804-566738A12135}"/>
+                <ns2:creationId id="{3FBBB3C0-9EF9-2269-F804-566738A12135}"/>
               </a:ext>
             </a:extLst>
           </p:cNvPr>
@@ -11358,7 +11454,7 @@
           <p:cNvPr id="10" name="TextBox 9">
             <a:extLst>
               <a:ext uri="{FF2B5EF4-FFF2-40B4-BE49-F238E27FC236}">
-                <a16:creationId xmlns:a16="http://schemas.microsoft.com/office/drawing/2014/main" id="{5AD88C91-2B9D-6C66-4521-C91A0EBE16F1}"/>
+                <ns2:creationId id="{5AD88C91-2B9D-6C66-4521-C91A0EBE16F1}"/>
               </a:ext>
             </a:extLst>
           </p:cNvPr>
@@ -11405,7 +11501,7 @@
           <p:cNvPr id="11" name="Rectangle 10">
             <a:extLst>
               <a:ext uri="{FF2B5EF4-FFF2-40B4-BE49-F238E27FC236}">
-                <a16:creationId xmlns:a16="http://schemas.microsoft.com/office/drawing/2014/main" id="{408E88E8-1AC1-3859-ED6E-998C354C18AF}"/>
+                <ns2:creationId id="{408E88E8-1AC1-3859-ED6E-998C354C18AF}"/>
               </a:ext>
             </a:extLst>
           </p:cNvPr>
@@ -11458,7 +11554,7 @@
           <p:cNvPr id="14" name="Group 13">
             <a:extLst>
               <a:ext uri="{FF2B5EF4-FFF2-40B4-BE49-F238E27FC236}">
-                <a16:creationId xmlns:a16="http://schemas.microsoft.com/office/drawing/2014/main" id="{7A05C4D2-699B-5F84-92AE-09238BDBF4E8}"/>
+                <ns2:creationId id="{7A05C4D2-699B-5F84-92AE-09238BDBF4E8}"/>
               </a:ext>
             </a:extLst>
           </p:cNvPr>
@@ -11478,7 +11574,7 @@
             <p:cNvPr id="15" name="Straight Arrow Connector 14">
               <a:extLst>
                 <a:ext uri="{FF2B5EF4-FFF2-40B4-BE49-F238E27FC236}">
-                  <a16:creationId xmlns:a16="http://schemas.microsoft.com/office/drawing/2014/main" id="{6F7FA685-0220-0300-5C81-7977AB43778D}"/>
+                  <ns2:creationId id="{6F7FA685-0220-0300-5C81-7977AB43778D}"/>
                 </a:ext>
               </a:extLst>
             </p:cNvPr>
@@ -11522,7 +11618,7 @@
             <p:cNvPr id="17" name="Straight Arrow Connector 16">
               <a:extLst>
                 <a:ext uri="{FF2B5EF4-FFF2-40B4-BE49-F238E27FC236}">
-                  <a16:creationId xmlns:a16="http://schemas.microsoft.com/office/drawing/2014/main" id="{8DAAADDE-3685-65B3-881A-0143943C0267}"/>
+                  <ns2:creationId id="{8DAAADDE-3685-65B3-881A-0143943C0267}"/>
                 </a:ext>
               </a:extLst>
             </p:cNvPr>
@@ -11566,7 +11662,7 @@
             <p:cNvPr id="18" name="TextBox 17">
               <a:extLst>
                 <a:ext uri="{FF2B5EF4-FFF2-40B4-BE49-F238E27FC236}">
-                  <a16:creationId xmlns:a16="http://schemas.microsoft.com/office/drawing/2014/main" id="{BAA0C0F5-147D-A6B2-DBB6-6DCB0FFF6BAE}"/>
+                  <ns2:creationId id="{BAA0C0F5-147D-A6B2-DBB6-6DCB0FFF6BAE}"/>
                 </a:ext>
               </a:extLst>
             </p:cNvPr>
@@ -11631,7 +11727,7 @@
             <p:cNvPr id="20" name="TextBox 19">
               <a:extLst>
                 <a:ext uri="{FF2B5EF4-FFF2-40B4-BE49-F238E27FC236}">
-                  <a16:creationId xmlns:a16="http://schemas.microsoft.com/office/drawing/2014/main" id="{84C36D57-9425-3680-6F8D-295F2518BF54}"/>
+                  <ns2:creationId id="{84C36D57-9425-3680-6F8D-295F2518BF54}"/>
                 </a:ext>
               </a:extLst>
             </p:cNvPr>
@@ -11731,7 +11827,7 @@
     </p:spTree>
     <p:extLst>
       <p:ext uri="{BB962C8B-B14F-4D97-AF65-F5344CB8AC3E}">
-        <p14:creationId xmlns:p14="http://schemas.microsoft.com/office/powerpoint/2010/main" val="1541260098"/>
+        <ns3:creationId val="1541260098"/>
       </p:ext>
     </p:extLst>
   </p:cSld>
@@ -11742,7 +11838,7 @@
 </file>
 
 <file path=ppt/slides/slide11.xml><?xml version="1.0" encoding="utf-8"?>
-<p:sld xmlns:a="http://schemas.openxmlformats.org/drawingml/2006/main" xmlns:r="http://schemas.openxmlformats.org/officeDocument/2006/relationships" xmlns:p="http://schemas.openxmlformats.org/presentationml/2006/main">
+<p:sld xmlns:a="http://schemas.openxmlformats.org/drawingml/2006/main" xmlns:ns2="http://schemas.microsoft.com/office/drawing/2014/main" xmlns:ns3="http://schemas.microsoft.com/office/powerpoint/2010/main" xmlns:p="http://schemas.openxmlformats.org/presentationml/2006/main">
   <p:cSld>
     <p:bg>
       <p:bgPr>
@@ -11771,7 +11867,7 @@
           <p:cNvPr id="5" name="Footer Placeholder 3">
             <a:extLst>
               <a:ext uri="{FF2B5EF4-FFF2-40B4-BE49-F238E27FC236}">
-                <a16:creationId xmlns:a16="http://schemas.microsoft.com/office/drawing/2014/main" id="{668F77D6-DFDA-5A46-8DF1-47F6A167C2B1}"/>
+                <ns2:creationId id="{668F77D6-DFDA-5A46-8DF1-47F6A167C2B1}"/>
               </a:ext>
             </a:extLst>
           </p:cNvPr>
@@ -11933,7 +12029,7 @@
           <p:cNvPr id="13" name="TextBox 12">
             <a:extLst>
               <a:ext uri="{FF2B5EF4-FFF2-40B4-BE49-F238E27FC236}">
-                <a16:creationId xmlns:a16="http://schemas.microsoft.com/office/drawing/2014/main" id="{2C3F4604-6C2F-0E4E-9DD3-4F5C89FF51AB}"/>
+                <ns2:creationId id="{2C3F4604-6C2F-0E4E-9DD3-4F5C89FF51AB}"/>
               </a:ext>
             </a:extLst>
           </p:cNvPr>
@@ -12034,7 +12130,7 @@
           <p:cNvPr id="14" name="Freeform 13">
             <a:extLst>
               <a:ext uri="{FF2B5EF4-FFF2-40B4-BE49-F238E27FC236}">
-                <a16:creationId xmlns:a16="http://schemas.microsoft.com/office/drawing/2014/main" id="{6D478F86-6608-8240-A60F-2B5B4B14CE42}"/>
+                <ns2:creationId id="{6D478F86-6608-8240-A60F-2B5B4B14CE42}"/>
               </a:ext>
             </a:extLst>
           </p:cNvPr>
@@ -12575,7 +12671,7 @@
           <p:cNvPr id="16" name="Freeform 15">
             <a:extLst>
               <a:ext uri="{FF2B5EF4-FFF2-40B4-BE49-F238E27FC236}">
-                <a16:creationId xmlns:a16="http://schemas.microsoft.com/office/drawing/2014/main" id="{226B2D26-F692-894E-9B09-F57FBB5CB2A3}"/>
+                <ns2:creationId id="{226B2D26-F692-894E-9B09-F57FBB5CB2A3}"/>
               </a:ext>
             </a:extLst>
           </p:cNvPr>
@@ -13458,7 +13554,7 @@
           <p:cNvPr id="18" name="Oval 17">
             <a:extLst>
               <a:ext uri="{FF2B5EF4-FFF2-40B4-BE49-F238E27FC236}">
-                <a16:creationId xmlns:a16="http://schemas.microsoft.com/office/drawing/2014/main" id="{BE4CDC90-4B2E-BE41-BB9D-A84675F3A2FE}"/>
+                <ns2:creationId id="{BE4CDC90-4B2E-BE41-BB9D-A84675F3A2FE}"/>
               </a:ext>
             </a:extLst>
           </p:cNvPr>
@@ -13539,7 +13635,7 @@
           <p:cNvPr id="19" name="Oval 18">
             <a:extLst>
               <a:ext uri="{FF2B5EF4-FFF2-40B4-BE49-F238E27FC236}">
-                <a16:creationId xmlns:a16="http://schemas.microsoft.com/office/drawing/2014/main" id="{0592434B-85D0-0A41-95DD-A29D1D3E92A7}"/>
+                <ns2:creationId id="{0592434B-85D0-0A41-95DD-A29D1D3E92A7}"/>
               </a:ext>
             </a:extLst>
           </p:cNvPr>
@@ -13620,7 +13716,7 @@
           <p:cNvPr id="21" name="TextBox 20">
             <a:extLst>
               <a:ext uri="{FF2B5EF4-FFF2-40B4-BE49-F238E27FC236}">
-                <a16:creationId xmlns:a16="http://schemas.microsoft.com/office/drawing/2014/main" id="{7B549753-C2CD-8744-8435-2E08FD32BDEB}"/>
+                <ns2:creationId id="{7B549753-C2CD-8744-8435-2E08FD32BDEB}"/>
               </a:ext>
             </a:extLst>
           </p:cNvPr>
@@ -13699,7 +13795,7 @@
           <p:cNvPr id="22" name="TextBox 21">
             <a:extLst>
               <a:ext uri="{FF2B5EF4-FFF2-40B4-BE49-F238E27FC236}">
-                <a16:creationId xmlns:a16="http://schemas.microsoft.com/office/drawing/2014/main" id="{32F7BF73-EB2C-9D42-97FB-D39FDCC924EB}"/>
+                <ns2:creationId id="{32F7BF73-EB2C-9D42-97FB-D39FDCC924EB}"/>
               </a:ext>
             </a:extLst>
           </p:cNvPr>
@@ -13778,7 +13874,7 @@
           <p:cNvPr id="32" name="Group 31">
             <a:extLst>
               <a:ext uri="{FF2B5EF4-FFF2-40B4-BE49-F238E27FC236}">
-                <a16:creationId xmlns:a16="http://schemas.microsoft.com/office/drawing/2014/main" id="{A120AE69-6043-195E-40C7-43C019B9D3A9}"/>
+                <ns2:creationId id="{A120AE69-6043-195E-40C7-43C019B9D3A9}"/>
               </a:ext>
             </a:extLst>
           </p:cNvPr>
@@ -13798,7 +13894,7 @@
             <p:cNvPr id="24" name="Straight Connector 23">
               <a:extLst>
                 <a:ext uri="{FF2B5EF4-FFF2-40B4-BE49-F238E27FC236}">
-                  <a16:creationId xmlns:a16="http://schemas.microsoft.com/office/drawing/2014/main" id="{3A19E039-1667-254C-809A-972BBA46D65C}"/>
+                  <ns2:creationId id="{3A19E039-1667-254C-809A-972BBA46D65C}"/>
                 </a:ext>
               </a:extLst>
             </p:cNvPr>
@@ -13845,7 +13941,7 @@
             <p:cNvPr id="2" name="Oval 1">
               <a:extLst>
                 <a:ext uri="{FF2B5EF4-FFF2-40B4-BE49-F238E27FC236}">
-                  <a16:creationId xmlns:a16="http://schemas.microsoft.com/office/drawing/2014/main" id="{38418338-F1E6-81D9-6A8C-D7EB7AA9DDA2}"/>
+                  <ns2:creationId id="{38418338-F1E6-81D9-6A8C-D7EB7AA9DDA2}"/>
                 </a:ext>
               </a:extLst>
             </p:cNvPr>
@@ -13930,7 +14026,7 @@
           <p:cNvPr id="28" name="TextBox 27">
             <a:extLst>
               <a:ext uri="{FF2B5EF4-FFF2-40B4-BE49-F238E27FC236}">
-                <a16:creationId xmlns:a16="http://schemas.microsoft.com/office/drawing/2014/main" id="{B86BBAD0-86F6-0D58-180C-6EA1BDCC33FE}"/>
+                <ns2:creationId id="{B86BBAD0-86F6-0D58-180C-6EA1BDCC33FE}"/>
               </a:ext>
             </a:extLst>
           </p:cNvPr>
@@ -14009,7 +14105,7 @@
           <p:cNvPr id="29" name="TextBox 28">
             <a:extLst>
               <a:ext uri="{FF2B5EF4-FFF2-40B4-BE49-F238E27FC236}">
-                <a16:creationId xmlns:a16="http://schemas.microsoft.com/office/drawing/2014/main" id="{2C329E1C-5E54-9E3C-A6FA-AE50E16EEB85}"/>
+                <ns2:creationId id="{2C329E1C-5E54-9E3C-A6FA-AE50E16EEB85}"/>
               </a:ext>
             </a:extLst>
           </p:cNvPr>
@@ -14088,7 +14184,7 @@
           <p:cNvPr id="33" name="Group 32">
             <a:extLst>
               <a:ext uri="{FF2B5EF4-FFF2-40B4-BE49-F238E27FC236}">
-                <a16:creationId xmlns:a16="http://schemas.microsoft.com/office/drawing/2014/main" id="{1D286D70-C171-9F97-4EF6-3BE92F6BF451}"/>
+                <ns2:creationId id="{1D286D70-C171-9F97-4EF6-3BE92F6BF451}"/>
               </a:ext>
             </a:extLst>
           </p:cNvPr>
@@ -14108,7 +14204,7 @@
             <p:cNvPr id="34" name="Straight Connector 33">
               <a:extLst>
                 <a:ext uri="{FF2B5EF4-FFF2-40B4-BE49-F238E27FC236}">
-                  <a16:creationId xmlns:a16="http://schemas.microsoft.com/office/drawing/2014/main" id="{8592FA4B-D9A7-6E33-AB7A-56BCD3E75DEC}"/>
+                  <ns2:creationId id="{8592FA4B-D9A7-6E33-AB7A-56BCD3E75DEC}"/>
                 </a:ext>
               </a:extLst>
             </p:cNvPr>
@@ -14154,7 +14250,7 @@
             <p:cNvPr id="35" name="Oval 34">
               <a:extLst>
                 <a:ext uri="{FF2B5EF4-FFF2-40B4-BE49-F238E27FC236}">
-                  <a16:creationId xmlns:a16="http://schemas.microsoft.com/office/drawing/2014/main" id="{D1C61822-C414-6D43-5771-23FAB0629304}"/>
+                  <ns2:creationId id="{D1C61822-C414-6D43-5771-23FAB0629304}"/>
                 </a:ext>
               </a:extLst>
             </p:cNvPr>
@@ -14239,7 +14335,7 @@
           <p:cNvPr id="36" name="Group 35">
             <a:extLst>
               <a:ext uri="{FF2B5EF4-FFF2-40B4-BE49-F238E27FC236}">
-                <a16:creationId xmlns:a16="http://schemas.microsoft.com/office/drawing/2014/main" id="{C03937C6-921F-C709-6C11-E769E0AA1568}"/>
+                <ns2:creationId id="{C03937C6-921F-C709-6C11-E769E0AA1568}"/>
               </a:ext>
             </a:extLst>
           </p:cNvPr>
@@ -14259,7 +14355,7 @@
             <p:cNvPr id="37" name="Straight Connector 36">
               <a:extLst>
                 <a:ext uri="{FF2B5EF4-FFF2-40B4-BE49-F238E27FC236}">
-                  <a16:creationId xmlns:a16="http://schemas.microsoft.com/office/drawing/2014/main" id="{BA8BF2BD-3FCE-A586-601D-1E4026152CB6}"/>
+                  <ns2:creationId id="{BA8BF2BD-3FCE-A586-601D-1E4026152CB6}"/>
                 </a:ext>
               </a:extLst>
             </p:cNvPr>
@@ -14305,7 +14401,7 @@
             <p:cNvPr id="38" name="Oval 37">
               <a:extLst>
                 <a:ext uri="{FF2B5EF4-FFF2-40B4-BE49-F238E27FC236}">
-                  <a16:creationId xmlns:a16="http://schemas.microsoft.com/office/drawing/2014/main" id="{9DC53165-740B-C795-C0DF-F1A1A73F6F36}"/>
+                  <ns2:creationId id="{9DC53165-740B-C795-C0DF-F1A1A73F6F36}"/>
                 </a:ext>
               </a:extLst>
             </p:cNvPr>
@@ -14390,7 +14486,7 @@
           <p:cNvPr id="40" name="Group 39">
             <a:extLst>
               <a:ext uri="{FF2B5EF4-FFF2-40B4-BE49-F238E27FC236}">
-                <a16:creationId xmlns:a16="http://schemas.microsoft.com/office/drawing/2014/main" id="{C105AAA1-FA00-79D8-70E9-DB832351B5E2}"/>
+                <ns2:creationId id="{C105AAA1-FA00-79D8-70E9-DB832351B5E2}"/>
               </a:ext>
             </a:extLst>
           </p:cNvPr>
@@ -14410,7 +14506,7 @@
             <p:cNvPr id="41" name="Straight Connector 40">
               <a:extLst>
                 <a:ext uri="{FF2B5EF4-FFF2-40B4-BE49-F238E27FC236}">
-                  <a16:creationId xmlns:a16="http://schemas.microsoft.com/office/drawing/2014/main" id="{48D05E5C-4059-6EC7-1299-E52A65F46E3D}"/>
+                  <ns2:creationId id="{48D05E5C-4059-6EC7-1299-E52A65F46E3D}"/>
                 </a:ext>
               </a:extLst>
             </p:cNvPr>
@@ -14456,7 +14552,7 @@
             <p:cNvPr id="42" name="Oval 41">
               <a:extLst>
                 <a:ext uri="{FF2B5EF4-FFF2-40B4-BE49-F238E27FC236}">
-                  <a16:creationId xmlns:a16="http://schemas.microsoft.com/office/drawing/2014/main" id="{8174E055-9EC2-40B6-B317-43A23011EC49}"/>
+                  <ns2:creationId id="{8174E055-9EC2-40B6-B317-43A23011EC49}"/>
                 </a:ext>
               </a:extLst>
             </p:cNvPr>
@@ -14541,7 +14637,7 @@
           <p:cNvPr id="4" name="Rectangle 3">
             <a:extLst>
               <a:ext uri="{FF2B5EF4-FFF2-40B4-BE49-F238E27FC236}">
-                <a16:creationId xmlns:a16="http://schemas.microsoft.com/office/drawing/2014/main" id="{ADBBA491-EC7F-B7A8-024F-1F1EB3434C26}"/>
+                <ns2:creationId id="{ADBBA491-EC7F-B7A8-024F-1F1EB3434C26}"/>
               </a:ext>
             </a:extLst>
           </p:cNvPr>
@@ -14594,7 +14690,7 @@
           <p:cNvPr id="6" name="Group 5">
             <a:extLst>
               <a:ext uri="{FF2B5EF4-FFF2-40B4-BE49-F238E27FC236}">
-                <a16:creationId xmlns:a16="http://schemas.microsoft.com/office/drawing/2014/main" id="{99AA8219-E43E-724C-056B-B18383E44D07}"/>
+                <ns2:creationId id="{99AA8219-E43E-724C-056B-B18383E44D07}"/>
               </a:ext>
             </a:extLst>
           </p:cNvPr>
@@ -14614,7 +14710,7 @@
             <p:cNvPr id="7" name="Straight Arrow Connector 6">
               <a:extLst>
                 <a:ext uri="{FF2B5EF4-FFF2-40B4-BE49-F238E27FC236}">
-                  <a16:creationId xmlns:a16="http://schemas.microsoft.com/office/drawing/2014/main" id="{D656FE40-D181-9F96-4B12-1D4A1600D94D}"/>
+                  <ns2:creationId id="{D656FE40-D181-9F96-4B12-1D4A1600D94D}"/>
                 </a:ext>
               </a:extLst>
             </p:cNvPr>
@@ -14658,7 +14754,7 @@
             <p:cNvPr id="9" name="Straight Arrow Connector 8">
               <a:extLst>
                 <a:ext uri="{FF2B5EF4-FFF2-40B4-BE49-F238E27FC236}">
-                  <a16:creationId xmlns:a16="http://schemas.microsoft.com/office/drawing/2014/main" id="{A8B296C3-B87D-78ED-4E26-EC9E5A291FD0}"/>
+                  <ns2:creationId id="{A8B296C3-B87D-78ED-4E26-EC9E5A291FD0}"/>
                 </a:ext>
               </a:extLst>
             </p:cNvPr>
@@ -14702,7 +14798,7 @@
             <p:cNvPr id="10" name="TextBox 9">
               <a:extLst>
                 <a:ext uri="{FF2B5EF4-FFF2-40B4-BE49-F238E27FC236}">
-                  <a16:creationId xmlns:a16="http://schemas.microsoft.com/office/drawing/2014/main" id="{F49CBD38-2A34-BF6B-7AF0-E9DF4ADD0FDF}"/>
+                  <ns2:creationId id="{F49CBD38-2A34-BF6B-7AF0-E9DF4ADD0FDF}"/>
                 </a:ext>
               </a:extLst>
             </p:cNvPr>
@@ -14766,7 +14862,7 @@
     </p:spTree>
     <p:extLst>
       <p:ext uri="{BB962C8B-B14F-4D97-AF65-F5344CB8AC3E}">
-        <p14:creationId xmlns:p14="http://schemas.microsoft.com/office/powerpoint/2010/main" val="3036832815"/>
+        <ns3:creationId val="3036832815"/>
       </p:ext>
     </p:extLst>
   </p:cSld>
@@ -14777,7 +14873,7 @@
 </file>
 
 <file path=ppt/slides/slide12.xml><?xml version="1.0" encoding="utf-8"?>
-<p:sld xmlns:a="http://schemas.openxmlformats.org/drawingml/2006/main" xmlns:r="http://schemas.openxmlformats.org/officeDocument/2006/relationships" xmlns:p="http://schemas.openxmlformats.org/presentationml/2006/main">
+<p:sld xmlns:a="http://schemas.openxmlformats.org/drawingml/2006/main" xmlns:ns2="http://schemas.microsoft.com/office/drawing/2014/main" xmlns:ns4="http://schemas.microsoft.com/office/powerpoint/2010/main" xmlns:p="http://schemas.openxmlformats.org/presentationml/2006/main" xmlns:r="http://schemas.openxmlformats.org/officeDocument/2006/relationships">
   <p:cSld>
     <p:bg>
       <p:bgPr>
@@ -14806,7 +14902,7 @@
           <p:cNvPr id="4" name="TextBox 3">
             <a:extLst>
               <a:ext uri="{FF2B5EF4-FFF2-40B4-BE49-F238E27FC236}">
-                <a16:creationId xmlns:a16="http://schemas.microsoft.com/office/drawing/2014/main" id="{04089B0C-3E0D-1D7D-7623-E8C4B9A7F9B0}"/>
+                <ns2:creationId id="{04089B0C-3E0D-1D7D-7623-E8C4B9A7F9B0}"/>
               </a:ext>
             </a:extLst>
           </p:cNvPr>
@@ -14861,17 +14957,92 @@
                 <a:ea typeface="Helvetica Neue" panose="02000503000000020004" pitchFamily="2" charset="0"/>
                 <a:cs typeface="Helvetica Neue" panose="02000503000000020004" pitchFamily="2" charset="0"/>
               </a:rPr>
-              <a:t>A 1D Euclidean-void line with two architrino emitters and wake speed c_f.</a:t>
-            </a:r>
-          </a:p>
-          <a:p>
-            <a:r>
-              <a:rPr>
+              <a:t xml:space="preserve">A 1D Euclidean-void line with two architrino emitters and wake speed </a:t>
+            </a:r>
+            <a:r>
+              <a:rPr kumimoji="0" lang="en-US" sz="1800" b="0" i="0" u="none" strike="noStrike" kern="1200" cap="none" spc="0" normalizeH="0" baseline="0" noProof="0" dirty="0">
+                <a:ln>
+                  <a:noFill/>
+                </a:ln>
+                <a:solidFill>
+                  <a:prstClr val="white"/>
+                </a:solidFill>
+                <a:effectLst/>
+                <a:uLnTx/>
+                <a:uFillTx/>
+                <a:latin typeface="Helvetica Neue" panose="02000503000000020004" pitchFamily="2" charset="0"/>
+                <a:ea typeface="Helvetica Neue" panose="02000503000000020004" pitchFamily="2" charset="0"/>
+                <a:cs typeface="Helvetica Neue" panose="02000503000000020004" pitchFamily="2" charset="0"/>
+              </a:rPr>
+              <a:t>c</a:t>
+            </a:r>
+            <a:r>
+              <a:rPr kumimoji="0" lang="en-US" sz="1260" b="0" i="0" u="none" strike="noStrike" kern="1200" cap="none" spc="0" normalizeH="0" baseline="-25000" noProof="0" dirty="0">
+                <a:ln>
+                  <a:noFill/>
+                </a:ln>
+                <a:solidFill>
+                  <a:prstClr val="white"/>
+                </a:solidFill>
+                <a:effectLst/>
+                <a:uLnTx/>
+                <a:uFillTx/>
+                <a:latin typeface="Helvetica Neue" panose="02000503000000020004" pitchFamily="2" charset="0"/>
+                <a:ea typeface="Helvetica Neue" panose="02000503000000020004" pitchFamily="2" charset="0"/>
+                <a:cs typeface="Helvetica Neue" panose="02000503000000020004" pitchFamily="2" charset="0"/>
+              </a:rPr>
+              <a:t>f</a:t>
+            </a:r>
+            <a:r>
+              <a:rPr kumimoji="0" lang="en-US" sz="1800" b="0" i="0" u="none" strike="noStrike" kern="1200" cap="none" spc="0" normalizeH="0" baseline="0" noProof="0" dirty="0">
+                <a:ln>
+                  <a:noFill/>
+                </a:ln>
+                <a:solidFill>
+                  <a:prstClr val="white"/>
+                </a:solidFill>
+                <a:effectLst/>
+                <a:uLnTx/>
+                <a:uFillTx/>
+                <a:latin typeface="Helvetica Neue" panose="02000503000000020004" pitchFamily="2" charset="0"/>
+                <a:ea typeface="Helvetica Neue" panose="02000503000000020004" pitchFamily="2" charset="0"/>
+                <a:cs typeface="Helvetica Neue" panose="02000503000000020004" pitchFamily="2" charset="0"/>
+              </a:rPr>
+              <a:t>.</a:t>
+            </a:r>
+          </a:p>
+          <a:p>
+            <a:r>
+              <a:rPr baseline="0">
                 <a:solidFill>
                   <a:schemeClr val="bg1"/>
                 </a:solidFill>
               </a:rPr>
-              <a:t>The binary symmetry point occurs when architrino speed |v| = c_f.</a:t>
+              <a:t xml:space="preserve">The binary symmetry point occurs when architrino speed |v| = </a:t>
+            </a:r>
+            <a:r>
+              <a:rPr baseline="0">
+                <a:solidFill>
+                  <a:schemeClr val="bg1"/>
+                </a:solidFill>
+              </a:rPr>
+              <a:t>c</a:t>
+            </a:r>
+            <a:r>
+              <a:rPr baseline="-25000" sz="1260">
+                <a:solidFill>
+                  <a:schemeClr val="bg1"/>
+                </a:solidFill>
+              </a:rPr>
+              <a:t>f</a:t>
+            </a:r>
+            <a:r>
+              <a:rPr baseline="0">
+                <a:solidFill>
+                  <a:schemeClr val="bg1"/>
+                </a:solidFill>
+              </a:rPr>
+              <a:t>.</a:t>
             </a:r>
             <a:endParaRPr kumimoji="0" lang="en-US" sz="1800" b="0" i="0" u="none" strike="noStrike" kern="1200" cap="none" spc="0" normalizeH="0" baseline="0" noProof="0" dirty="0">
               <a:ln>
@@ -15043,7 +15214,58 @@
                 <a:ea typeface="Helvetica Neue" panose="02000503000000020004" pitchFamily="2" charset="0"/>
                 <a:cs typeface="Helvetica Neue" panose="02000503000000020004" pitchFamily="2" charset="0"/>
               </a:rPr>
-              <a:t>Opposite-polarity architrinos launched from large r with small speed may approach |v| near c_f at r = 1.</a:t>
+              <a:t xml:space="preserve">Opposite-polarity architrinos launched from large r with small speed may approach |v| near </a:t>
+            </a:r>
+            <a:r>
+              <a:rPr kumimoji="0" lang="en-US" sz="1800" b="0" i="1" u="none" strike="noStrike" kern="1200" cap="none" spc="0" normalizeH="0" baseline="0" noProof="0" dirty="0">
+                <a:ln>
+                  <a:noFill/>
+                </a:ln>
+                <a:solidFill>
+                  <a:prstClr val="white"/>
+                </a:solidFill>
+                <a:effectLst/>
+                <a:uLnTx/>
+                <a:uFillTx/>
+                <a:latin typeface="Helvetica Neue" panose="02000503000000020004" pitchFamily="2" charset="0"/>
+                <a:ea typeface="Helvetica Neue" panose="02000503000000020004" pitchFamily="2" charset="0"/>
+                <a:cs typeface="Helvetica Neue" panose="02000503000000020004" pitchFamily="2" charset="0"/>
+              </a:rPr>
+              <a:t>c</a:t>
+            </a:r>
+            <a:r>
+              <a:rPr kumimoji="0" lang="en-US" sz="1260" b="0" i="1" u="none" strike="noStrike" kern="1200" cap="none" spc="0" normalizeH="0" baseline="-25000" noProof="0" dirty="0">
+                <a:ln>
+                  <a:noFill/>
+                </a:ln>
+                <a:solidFill>
+                  <a:prstClr val="white"/>
+                </a:solidFill>
+                <a:effectLst/>
+                <a:uLnTx/>
+                <a:uFillTx/>
+                <a:latin typeface="Helvetica Neue" panose="02000503000000020004" pitchFamily="2" charset="0"/>
+                <a:ea typeface="Helvetica Neue" panose="02000503000000020004" pitchFamily="2" charset="0"/>
+                <a:cs typeface="Helvetica Neue" panose="02000503000000020004" pitchFamily="2" charset="0"/>
+              </a:rPr>
+              <a:t>f</a:t>
+            </a:r>
+            <a:r>
+              <a:rPr kumimoji="0" lang="en-US" sz="1800" b="0" i="1" u="none" strike="noStrike" kern="1200" cap="none" spc="0" normalizeH="0" baseline="0" noProof="0" dirty="0">
+                <a:ln>
+                  <a:noFill/>
+                </a:ln>
+                <a:solidFill>
+                  <a:prstClr val="white"/>
+                </a:solidFill>
+                <a:effectLst/>
+                <a:uLnTx/>
+                <a:uFillTx/>
+                <a:latin typeface="Helvetica Neue" panose="02000503000000020004" pitchFamily="2" charset="0"/>
+                <a:ea typeface="Helvetica Neue" panose="02000503000000020004" pitchFamily="2" charset="0"/>
+                <a:cs typeface="Helvetica Neue" panose="02000503000000020004" pitchFamily="2" charset="0"/>
+              </a:rPr>
+              <a:t xml:space="preserve"> at r = 1.</a:t>
             </a:r>
           </a:p>
           <a:p>
@@ -15115,7 +15337,58 @@
                 <a:ea typeface="Helvetica Neue" panose="02000503000000020004" pitchFamily="2" charset="0"/>
                 <a:cs typeface="Helvetica Neue" panose="02000503000000020004" pitchFamily="2" charset="0"/>
               </a:rPr>
-              <a:t>Same-polarity architrinos launched toward each other above c_f may reverse or cross depending on initial offset.</a:t>
+              <a:t xml:space="preserve">Same-polarity architrinos launched toward each other above </a:t>
+            </a:r>
+            <a:r>
+              <a:rPr kumimoji="0" lang="en-US" sz="1800" b="0" i="0" u="none" strike="noStrike" kern="1200" cap="none" spc="0" normalizeH="0" baseline="0" noProof="0" dirty="0">
+                <a:ln>
+                  <a:noFill/>
+                </a:ln>
+                <a:solidFill>
+                  <a:prstClr val="white"/>
+                </a:solidFill>
+                <a:effectLst/>
+                <a:uLnTx/>
+                <a:uFillTx/>
+                <a:latin typeface="Helvetica Neue" panose="02000503000000020004" pitchFamily="2" charset="0"/>
+                <a:ea typeface="Helvetica Neue" panose="02000503000000020004" pitchFamily="2" charset="0"/>
+                <a:cs typeface="Helvetica Neue" panose="02000503000000020004" pitchFamily="2" charset="0"/>
+              </a:rPr>
+              <a:t>c</a:t>
+            </a:r>
+            <a:r>
+              <a:rPr kumimoji="0" lang="en-US" sz="1260" b="0" i="0" u="none" strike="noStrike" kern="1200" cap="none" spc="0" normalizeH="0" baseline="-25000" noProof="0" dirty="0">
+                <a:ln>
+                  <a:noFill/>
+                </a:ln>
+                <a:solidFill>
+                  <a:prstClr val="white"/>
+                </a:solidFill>
+                <a:effectLst/>
+                <a:uLnTx/>
+                <a:uFillTx/>
+                <a:latin typeface="Helvetica Neue" panose="02000503000000020004" pitchFamily="2" charset="0"/>
+                <a:ea typeface="Helvetica Neue" panose="02000503000000020004" pitchFamily="2" charset="0"/>
+                <a:cs typeface="Helvetica Neue" panose="02000503000000020004" pitchFamily="2" charset="0"/>
+              </a:rPr>
+              <a:t>f</a:t>
+            </a:r>
+            <a:r>
+              <a:rPr kumimoji="0" lang="en-US" sz="1800" b="0" i="0" u="none" strike="noStrike" kern="1200" cap="none" spc="0" normalizeH="0" baseline="0" noProof="0" dirty="0">
+                <a:ln>
+                  <a:noFill/>
+                </a:ln>
+                <a:solidFill>
+                  <a:prstClr val="white"/>
+                </a:solidFill>
+                <a:effectLst/>
+                <a:uLnTx/>
+                <a:uFillTx/>
+                <a:latin typeface="Helvetica Neue" panose="02000503000000020004" pitchFamily="2" charset="0"/>
+                <a:ea typeface="Helvetica Neue" panose="02000503000000020004" pitchFamily="2" charset="0"/>
+                <a:cs typeface="Helvetica Neue" panose="02000503000000020004" pitchFamily="2" charset="0"/>
+              </a:rPr>
+              <a:t xml:space="preserve"> may reverse or cross depending on initial offset.</a:t>
             </a:r>
           </a:p>
           <a:p>
@@ -15197,7 +15470,7 @@
           <p:cNvPr id="5" name="Group 4">
             <a:extLst>
               <a:ext uri="{FF2B5EF4-FFF2-40B4-BE49-F238E27FC236}">
-                <a16:creationId xmlns:a16="http://schemas.microsoft.com/office/drawing/2014/main" id="{28EB18A8-8B6A-033D-A4AD-86FBADCB4D4A}"/>
+                <ns2:creationId id="{28EB18A8-8B6A-033D-A4AD-86FBADCB4D4A}"/>
               </a:ext>
             </a:extLst>
           </p:cNvPr>
@@ -15217,7 +15490,7 @@
             <p:cNvPr id="3" name="Picture 2">
               <a:extLst>
                 <a:ext uri="{FF2B5EF4-FFF2-40B4-BE49-F238E27FC236}">
-                  <a16:creationId xmlns:a16="http://schemas.microsoft.com/office/drawing/2014/main" id="{13746C96-5BF1-B22B-CA42-106D1B63333F}"/>
+                  <ns2:creationId id="{13746C96-5BF1-B22B-CA42-106D1B63333F}"/>
                 </a:ext>
               </a:extLst>
             </p:cNvPr>
@@ -15247,7 +15520,7 @@
             <p:cNvPr id="6" name="Straight Connector 5">
               <a:extLst>
                 <a:ext uri="{FF2B5EF4-FFF2-40B4-BE49-F238E27FC236}">
-                  <a16:creationId xmlns:a16="http://schemas.microsoft.com/office/drawing/2014/main" id="{EE364915-3AF3-C9A5-4E25-440B57D56073}"/>
+                  <ns2:creationId id="{EE364915-3AF3-C9A5-4E25-440B57D56073}"/>
                 </a:ext>
               </a:extLst>
             </p:cNvPr>
@@ -15290,7 +15563,7 @@
           <p:cNvPr id="7" name="Title 4">
             <a:extLst>
               <a:ext uri="{FF2B5EF4-FFF2-40B4-BE49-F238E27FC236}">
-                <a16:creationId xmlns:a16="http://schemas.microsoft.com/office/drawing/2014/main" id="{82AADF08-A238-0E6D-347B-D5A2BAE919D0}"/>
+                <ns2:creationId id="{82AADF08-A238-0E6D-347B-D5A2BAE919D0}"/>
               </a:ext>
             </a:extLst>
           </p:cNvPr>
@@ -15378,7 +15651,7 @@
     </p:spTree>
     <p:extLst>
       <p:ext uri="{BB962C8B-B14F-4D97-AF65-F5344CB8AC3E}">
-        <p14:creationId xmlns:p14="http://schemas.microsoft.com/office/powerpoint/2010/main" val="3190063365"/>
+        <ns4:creationId val="3190063365"/>
       </p:ext>
     </p:extLst>
   </p:cSld>
@@ -15389,7 +15662,7 @@
 </file>
 
 <file path=ppt/slides/slide13.xml><?xml version="1.0" encoding="utf-8"?>
-<p:sld xmlns:a="http://schemas.openxmlformats.org/drawingml/2006/main" xmlns:r="http://schemas.openxmlformats.org/officeDocument/2006/relationships" xmlns:p="http://schemas.openxmlformats.org/presentationml/2006/main">
+<p:sld xmlns:a="http://schemas.openxmlformats.org/drawingml/2006/main" xmlns:ns2="http://schemas.microsoft.com/office/drawing/2014/main" xmlns:ns3="http://schemas.microsoft.com/office/powerpoint/2010/main" xmlns:p="http://schemas.openxmlformats.org/presentationml/2006/main">
   <p:cSld>
     <p:bg>
       <p:bgPr>
@@ -15404,7 +15677,7 @@
         <p:cNvPr id="1" name="">
           <a:extLst>
             <a:ext uri="{FF2B5EF4-FFF2-40B4-BE49-F238E27FC236}">
-              <a16:creationId xmlns:a16="http://schemas.microsoft.com/office/drawing/2014/main" id="{96E919E2-812D-C716-7A6E-78657A604D1E}"/>
+              <ns2:creationId id="{96E919E2-812D-C716-7A6E-78657A604D1E}"/>
             </a:ext>
           </a:extLst>
         </p:cNvPr>
@@ -15424,7 +15697,7 @@
           <p:cNvPr id="34" name="Freeform 33">
             <a:extLst>
               <a:ext uri="{FF2B5EF4-FFF2-40B4-BE49-F238E27FC236}">
-                <a16:creationId xmlns:a16="http://schemas.microsoft.com/office/drawing/2014/main" id="{9FEB1C17-EE9E-6374-14E0-DF4B04BB34CC}"/>
+                <ns2:creationId id="{9FEB1C17-EE9E-6374-14E0-DF4B04BB34CC}"/>
               </a:ext>
             </a:extLst>
           </p:cNvPr>
@@ -16462,7 +16735,7 @@
           <p:cNvPr id="23" name="Straight Connector 22">
             <a:extLst>
               <a:ext uri="{FF2B5EF4-FFF2-40B4-BE49-F238E27FC236}">
-                <a16:creationId xmlns:a16="http://schemas.microsoft.com/office/drawing/2014/main" id="{33DF3D55-999F-17C8-E647-A925ABFD4B29}"/>
+                <ns2:creationId id="{33DF3D55-999F-17C8-E647-A925ABFD4B29}"/>
               </a:ext>
             </a:extLst>
           </p:cNvPr>
@@ -16508,7 +16781,7 @@
           <p:cNvPr id="11" name="Footer Placeholder 3">
             <a:extLst>
               <a:ext uri="{FF2B5EF4-FFF2-40B4-BE49-F238E27FC236}">
-                <a16:creationId xmlns:a16="http://schemas.microsoft.com/office/drawing/2014/main" id="{27AA374C-C403-AE7C-8C5A-C9260FD31350}"/>
+                <ns2:creationId id="{27AA374C-C403-AE7C-8C5A-C9260FD31350}"/>
               </a:ext>
             </a:extLst>
           </p:cNvPr>
@@ -16642,7 +16915,7 @@
           <p:cNvPr id="6" name="Freeform 5">
             <a:extLst>
               <a:ext uri="{FF2B5EF4-FFF2-40B4-BE49-F238E27FC236}">
-                <a16:creationId xmlns:a16="http://schemas.microsoft.com/office/drawing/2014/main" id="{58C91A8E-32A3-E6C9-3B21-6258314CE1E0}"/>
+                <ns2:creationId id="{58C91A8E-32A3-E6C9-3B21-6258314CE1E0}"/>
               </a:ext>
             </a:extLst>
           </p:cNvPr>
@@ -17238,7 +17511,7 @@
           <p:cNvPr id="7" name="Freeform 6">
             <a:extLst>
               <a:ext uri="{FF2B5EF4-FFF2-40B4-BE49-F238E27FC236}">
-                <a16:creationId xmlns:a16="http://schemas.microsoft.com/office/drawing/2014/main" id="{510BA2CB-DE8D-42AC-CE1A-16118C17D521}"/>
+                <ns2:creationId id="{510BA2CB-DE8D-42AC-CE1A-16118C17D521}"/>
               </a:ext>
             </a:extLst>
           </p:cNvPr>
@@ -18100,7 +18373,7 @@
           <p:cNvPr id="9" name="Oval 8">
             <a:extLst>
               <a:ext uri="{FF2B5EF4-FFF2-40B4-BE49-F238E27FC236}">
-                <a16:creationId xmlns:a16="http://schemas.microsoft.com/office/drawing/2014/main" id="{568F11F0-CD68-B68F-145C-42747F6BA3CB}"/>
+                <ns2:creationId id="{568F11F0-CD68-B68F-145C-42747F6BA3CB}"/>
               </a:ext>
             </a:extLst>
           </p:cNvPr>
@@ -18154,7 +18427,7 @@
           <p:cNvPr id="10" name="Oval 9">
             <a:extLst>
               <a:ext uri="{FF2B5EF4-FFF2-40B4-BE49-F238E27FC236}">
-                <a16:creationId xmlns:a16="http://schemas.microsoft.com/office/drawing/2014/main" id="{6BC2B4CC-1274-7B5E-9B1C-D914D507A56F}"/>
+                <ns2:creationId id="{6BC2B4CC-1274-7B5E-9B1C-D914D507A56F}"/>
               </a:ext>
             </a:extLst>
           </p:cNvPr>
@@ -18208,7 +18481,7 @@
           <p:cNvPr id="25" name="Rectangle 24">
             <a:extLst>
               <a:ext uri="{FF2B5EF4-FFF2-40B4-BE49-F238E27FC236}">
-                <a16:creationId xmlns:a16="http://schemas.microsoft.com/office/drawing/2014/main" id="{79427490-B6E9-7801-97EB-47C4A21F9FE6}"/>
+                <ns2:creationId id="{79427490-B6E9-7801-97EB-47C4A21F9FE6}"/>
               </a:ext>
             </a:extLst>
           </p:cNvPr>
@@ -18261,7 +18534,7 @@
           <p:cNvPr id="3" name="Straight Arrow Connector 2">
             <a:extLst>
               <a:ext uri="{FF2B5EF4-FFF2-40B4-BE49-F238E27FC236}">
-                <a16:creationId xmlns:a16="http://schemas.microsoft.com/office/drawing/2014/main" id="{EB763B1F-F575-913F-DB72-76ED511A0D0B}"/>
+                <ns2:creationId id="{EB763B1F-F575-913F-DB72-76ED511A0D0B}"/>
               </a:ext>
             </a:extLst>
           </p:cNvPr>
@@ -18306,7 +18579,7 @@
           <p:cNvPr id="4" name="Straight Arrow Connector 3">
             <a:extLst>
               <a:ext uri="{FF2B5EF4-FFF2-40B4-BE49-F238E27FC236}">
-                <a16:creationId xmlns:a16="http://schemas.microsoft.com/office/drawing/2014/main" id="{A90A4078-7CAB-D43F-FE11-DE676579B333}"/>
+                <ns2:creationId id="{A90A4078-7CAB-D43F-FE11-DE676579B333}"/>
               </a:ext>
             </a:extLst>
           </p:cNvPr>
@@ -18351,7 +18624,7 @@
           <p:cNvPr id="5" name="TextBox 4">
             <a:extLst>
               <a:ext uri="{FF2B5EF4-FFF2-40B4-BE49-F238E27FC236}">
-                <a16:creationId xmlns:a16="http://schemas.microsoft.com/office/drawing/2014/main" id="{93EE6640-E2D5-2697-152F-1AC92ACF6299}"/>
+                <ns2:creationId id="{93EE6640-E2D5-2697-152F-1AC92ACF6299}"/>
               </a:ext>
             </a:extLst>
           </p:cNvPr>
@@ -18416,7 +18689,7 @@
           <p:cNvPr id="8" name="TextBox 7">
             <a:extLst>
               <a:ext uri="{FF2B5EF4-FFF2-40B4-BE49-F238E27FC236}">
-                <a16:creationId xmlns:a16="http://schemas.microsoft.com/office/drawing/2014/main" id="{C7F4CB60-409A-DA93-8D6D-DBB74A32F30C}"/>
+                <ns2:creationId id="{C7F4CB60-409A-DA93-8D6D-DBB74A32F30C}"/>
               </a:ext>
             </a:extLst>
           </p:cNvPr>
@@ -18517,7 +18790,7 @@
           <p:cNvPr id="17" name="TextBox 16">
             <a:extLst>
               <a:ext uri="{FF2B5EF4-FFF2-40B4-BE49-F238E27FC236}">
-                <a16:creationId xmlns:a16="http://schemas.microsoft.com/office/drawing/2014/main" id="{F4E68F9E-0E13-E904-E4B5-DEC42C339288}"/>
+                <ns2:creationId id="{F4E68F9E-0E13-E904-E4B5-DEC42C339288}"/>
               </a:ext>
             </a:extLst>
           </p:cNvPr>
@@ -18590,7 +18863,7 @@
           <p:cNvPr id="31" name="Freeform 30">
             <a:extLst>
               <a:ext uri="{FF2B5EF4-FFF2-40B4-BE49-F238E27FC236}">
-                <a16:creationId xmlns:a16="http://schemas.microsoft.com/office/drawing/2014/main" id="{EBDD718E-B038-498A-81E1-4720CA22C4E4}"/>
+                <ns2:creationId id="{EBDD718E-B038-498A-81E1-4720CA22C4E4}"/>
               </a:ext>
             </a:extLst>
           </p:cNvPr>
@@ -19450,7 +19723,7 @@
           <p:cNvPr id="32" name="Oval 31">
             <a:extLst>
               <a:ext uri="{FF2B5EF4-FFF2-40B4-BE49-F238E27FC236}">
-                <a16:creationId xmlns:a16="http://schemas.microsoft.com/office/drawing/2014/main" id="{852BC428-A99B-91EE-DF01-3864DEC4D4BF}"/>
+                <ns2:creationId id="{852BC428-A99B-91EE-DF01-3864DEC4D4BF}"/>
               </a:ext>
             </a:extLst>
           </p:cNvPr>
@@ -19504,7 +19777,7 @@
           <p:cNvPr id="33" name="Oval 32">
             <a:extLst>
               <a:ext uri="{FF2B5EF4-FFF2-40B4-BE49-F238E27FC236}">
-                <a16:creationId xmlns:a16="http://schemas.microsoft.com/office/drawing/2014/main" id="{EFBFF3EA-59F3-C535-EFC4-37E6E9B87AAA}"/>
+                <ns2:creationId id="{EFBFF3EA-59F3-C535-EFC4-37E6E9B87AAA}"/>
               </a:ext>
             </a:extLst>
           </p:cNvPr>
@@ -19558,7 +19831,7 @@
           <p:cNvPr id="35" name="TextBox 34">
             <a:extLst>
               <a:ext uri="{FF2B5EF4-FFF2-40B4-BE49-F238E27FC236}">
-                <a16:creationId xmlns:a16="http://schemas.microsoft.com/office/drawing/2014/main" id="{2A61F73B-4578-41C1-C8EB-DAA0E81D6643}"/>
+                <ns2:creationId id="{2A61F73B-4578-41C1-C8EB-DAA0E81D6643}"/>
               </a:ext>
             </a:extLst>
           </p:cNvPr>
@@ -19911,7 +20184,7 @@
               <a:defRPr/>
             </a:pPr>
             <a:r>
-              <a:rPr lang="en-US" sz="1200" dirty="0">
+              <a:rPr lang="en-US" sz="1200" dirty="0" baseline="0">
                 <a:solidFill>
                   <a:prstClr val="white"/>
                 </a:solidFill>
@@ -19919,7 +20192,73 @@
                 <a:ea typeface="Helvetica Neue" panose="02000503000000020004" pitchFamily="2" charset="0"/>
                 <a:cs typeface="Helvetica Neue" panose="02000503000000020004" pitchFamily="2" charset="0"/>
               </a:rPr>
-              <a:t>expands at wake speed c_f; r = c_f t</a:t>
+              <a:t xml:space="preserve">expands at wake speed </a:t>
+            </a:r>
+            <a:r>
+              <a:rPr lang="en-US" sz="1200" dirty="0" baseline="0">
+                <a:solidFill>
+                  <a:prstClr val="white"/>
+                </a:solidFill>
+                <a:latin typeface="Helvetica Neue" panose="02000503000000020004" pitchFamily="2" charset="0"/>
+                <a:ea typeface="Helvetica Neue" panose="02000503000000020004" pitchFamily="2" charset="0"/>
+                <a:cs typeface="Helvetica Neue" panose="02000503000000020004" pitchFamily="2" charset="0"/>
+              </a:rPr>
+              <a:t>c</a:t>
+            </a:r>
+            <a:r>
+              <a:rPr lang="en-US" sz="840" dirty="0" baseline="-25000">
+                <a:solidFill>
+                  <a:prstClr val="white"/>
+                </a:solidFill>
+                <a:latin typeface="Helvetica Neue" panose="02000503000000020004" pitchFamily="2" charset="0"/>
+                <a:ea typeface="Helvetica Neue" panose="02000503000000020004" pitchFamily="2" charset="0"/>
+                <a:cs typeface="Helvetica Neue" panose="02000503000000020004" pitchFamily="2" charset="0"/>
+              </a:rPr>
+              <a:t>f</a:t>
+            </a:r>
+            <a:r>
+              <a:rPr lang="en-US" sz="1200" dirty="0" baseline="0">
+                <a:solidFill>
+                  <a:prstClr val="white"/>
+                </a:solidFill>
+                <a:latin typeface="Helvetica Neue" panose="02000503000000020004" pitchFamily="2" charset="0"/>
+                <a:ea typeface="Helvetica Neue" panose="02000503000000020004" pitchFamily="2" charset="0"/>
+                <a:cs typeface="Helvetica Neue" panose="02000503000000020004" pitchFamily="2" charset="0"/>
+              </a:rPr>
+              <a:t xml:space="preserve">; r = </a:t>
+            </a:r>
+            <a:r>
+              <a:rPr lang="en-US" sz="1200" dirty="0" baseline="0">
+                <a:solidFill>
+                  <a:prstClr val="white"/>
+                </a:solidFill>
+                <a:latin typeface="Helvetica Neue" panose="02000503000000020004" pitchFamily="2" charset="0"/>
+                <a:ea typeface="Helvetica Neue" panose="02000503000000020004" pitchFamily="2" charset="0"/>
+                <a:cs typeface="Helvetica Neue" panose="02000503000000020004" pitchFamily="2" charset="0"/>
+              </a:rPr>
+              <a:t>c</a:t>
+            </a:r>
+            <a:r>
+              <a:rPr lang="en-US" sz="840" dirty="0" baseline="-25000">
+                <a:solidFill>
+                  <a:prstClr val="white"/>
+                </a:solidFill>
+                <a:latin typeface="Helvetica Neue" panose="02000503000000020004" pitchFamily="2" charset="0"/>
+                <a:ea typeface="Helvetica Neue" panose="02000503000000020004" pitchFamily="2" charset="0"/>
+                <a:cs typeface="Helvetica Neue" panose="02000503000000020004" pitchFamily="2" charset="0"/>
+              </a:rPr>
+              <a:t>f</a:t>
+            </a:r>
+            <a:r>
+              <a:rPr lang="en-US" sz="1200" dirty="0" baseline="0">
+                <a:solidFill>
+                  <a:prstClr val="white"/>
+                </a:solidFill>
+                <a:latin typeface="Helvetica Neue" panose="02000503000000020004" pitchFamily="2" charset="0"/>
+                <a:ea typeface="Helvetica Neue" panose="02000503000000020004" pitchFamily="2" charset="0"/>
+                <a:cs typeface="Helvetica Neue" panose="02000503000000020004" pitchFamily="2" charset="0"/>
+              </a:rPr>
+              <a:t xml:space="preserve"> t</a:t>
             </a:r>
           </a:p>
           <a:p>
@@ -20115,7 +20454,7 @@
     </p:spTree>
     <p:extLst>
       <p:ext uri="{BB962C8B-B14F-4D97-AF65-F5344CB8AC3E}">
-        <p14:creationId xmlns:p14="http://schemas.microsoft.com/office/powerpoint/2010/main" val="3144987668"/>
+        <ns3:creationId val="3144987668"/>
       </p:ext>
     </p:extLst>
   </p:cSld>
@@ -20126,7 +20465,7 @@
 </file>
 
 <file path=ppt/slides/slide14.xml><?xml version="1.0" encoding="utf-8"?>
-<p:sld xmlns:a="http://schemas.openxmlformats.org/drawingml/2006/main" xmlns:r="http://schemas.openxmlformats.org/officeDocument/2006/relationships" xmlns:p="http://schemas.openxmlformats.org/presentationml/2006/main">
+<p:sld xmlns:a="http://schemas.openxmlformats.org/drawingml/2006/main" xmlns:ns2="http://schemas.microsoft.com/office/drawing/2014/main" xmlns:ns3="http://schemas.microsoft.com/office/drawing/2017/decorative" xmlns:ns4="http://schemas.microsoft.com/office/powerpoint/2015/main" xmlns:ns5="http://schemas.microsoft.com/office/powerpoint/2010/main" xmlns:p="http://schemas.openxmlformats.org/presentationml/2006/main">
   <p:cSld>
     <p:bg>
       <p:bgPr>
@@ -20155,10 +20494,10 @@
           <p:cNvPr id="9" name="Rectangle 8">
             <a:extLst>
               <a:ext uri="{FF2B5EF4-FFF2-40B4-BE49-F238E27FC236}">
-                <a16:creationId xmlns:a16="http://schemas.microsoft.com/office/drawing/2014/main" id="{2A8AA5BC-4F7A-4226-8F99-6D824B226A97}"/>
+                <ns2:creationId id="{2A8AA5BC-4F7A-4226-8F99-6D824B226A97}"/>
               </a:ext>
               <a:ext uri="{C183D7F6-B498-43B3-948B-1728B52AA6E4}">
-                <adec:decorative xmlns:adec="http://schemas.microsoft.com/office/drawing/2017/decorative" val="1"/>
+                <ns3:decorative val="1"/>
               </a:ext>
             </a:extLst>
           </p:cNvPr>
@@ -20168,7 +20507,7 @@
           <p:nvPr>
             <p:extLst>
               <p:ext uri="{386F3935-93C4-4BCD-93E2-E3B085C9AB24}">
-                <p16:designElem xmlns:p16="http://schemas.microsoft.com/office/powerpoint/2015/main" val="1"/>
+                <ns4:designElem val="1"/>
               </p:ext>
             </p:extLst>
           </p:nvPr>
@@ -20247,10 +20586,10 @@
           <p:cNvPr id="11" name="Rectangle 10">
             <a:extLst>
               <a:ext uri="{FF2B5EF4-FFF2-40B4-BE49-F238E27FC236}">
-                <a16:creationId xmlns:a16="http://schemas.microsoft.com/office/drawing/2014/main" id="{3E5445C6-DD42-4979-86FF-03730E8C6DB0}"/>
+                <ns2:creationId id="{3E5445C6-DD42-4979-86FF-03730E8C6DB0}"/>
               </a:ext>
               <a:ext uri="{C183D7F6-B498-43B3-948B-1728B52AA6E4}">
-                <adec:decorative xmlns:adec="http://schemas.microsoft.com/office/drawing/2017/decorative" val="1"/>
+                <ns3:decorative val="1"/>
               </a:ext>
             </a:extLst>
           </p:cNvPr>
@@ -20260,7 +20599,7 @@
           <p:nvPr>
             <p:extLst>
               <p:ext uri="{386F3935-93C4-4BCD-93E2-E3B085C9AB24}">
-                <p16:designElem xmlns:p16="http://schemas.microsoft.com/office/powerpoint/2015/main" val="1"/>
+                <ns4:designElem val="1"/>
               </p:ext>
             </p:extLst>
           </p:nvPr>
@@ -20347,7 +20686,7 @@
           <p:cNvPr id="2" name="Title 1">
             <a:extLst>
               <a:ext uri="{FF2B5EF4-FFF2-40B4-BE49-F238E27FC236}">
-                <a16:creationId xmlns:a16="http://schemas.microsoft.com/office/drawing/2014/main" id="{7710B119-EC53-BA46-BAA3-CB758CDEDAF5}"/>
+                <ns2:creationId id="{7710B119-EC53-BA46-BAA3-CB758CDEDAF5}"/>
               </a:ext>
             </a:extLst>
           </p:cNvPr>
@@ -20382,7 +20721,7 @@
           <p:cNvPr id="3" name="Subtitle 2">
             <a:extLst>
               <a:ext uri="{FF2B5EF4-FFF2-40B4-BE49-F238E27FC236}">
-                <a16:creationId xmlns:a16="http://schemas.microsoft.com/office/drawing/2014/main" id="{44E6BC0E-0DB7-C346-A0CC-E3CB36C29A54}"/>
+                <ns2:creationId id="{44E6BC0E-0DB7-C346-A0CC-E3CB36C29A54}"/>
               </a:ext>
             </a:extLst>
           </p:cNvPr>
@@ -20417,10 +20756,10 @@
           <p:cNvPr id="13" name="Straight Connector 12">
             <a:extLst>
               <a:ext uri="{FF2B5EF4-FFF2-40B4-BE49-F238E27FC236}">
-                <a16:creationId xmlns:a16="http://schemas.microsoft.com/office/drawing/2014/main" id="{45000665-DFC7-417E-8FD7-516A0F15C975}"/>
+                <ns2:creationId id="{45000665-DFC7-417E-8FD7-516A0F15C975}"/>
               </a:ext>
               <a:ext uri="{C183D7F6-B498-43B3-948B-1728B52AA6E4}">
-                <adec:decorative xmlns:adec="http://schemas.microsoft.com/office/drawing/2017/decorative" val="1"/>
+                <ns3:decorative val="1"/>
               </a:ext>
             </a:extLst>
           </p:cNvPr>
@@ -20430,7 +20769,7 @@
           <p:nvPr>
             <p:extLst>
               <p:ext uri="{386F3935-93C4-4BCD-93E2-E3B085C9AB24}">
-                <p16:designElem xmlns:p16="http://schemas.microsoft.com/office/powerpoint/2015/main" val="1"/>
+                <ns4:designElem val="1"/>
               </p:ext>
             </p:extLst>
           </p:nvPr>
@@ -20471,7 +20810,7 @@
           <p:cNvPr id="4" name="Footer Placeholder 3">
             <a:extLst>
               <a:ext uri="{FF2B5EF4-FFF2-40B4-BE49-F238E27FC236}">
-                <a16:creationId xmlns:a16="http://schemas.microsoft.com/office/drawing/2014/main" id="{9E726E67-7B90-B642-8D26-6DDF890C4785}"/>
+                <ns2:creationId id="{9E726E67-7B90-B642-8D26-6DDF890C4785}"/>
               </a:ext>
             </a:extLst>
           </p:cNvPr>
@@ -20536,7 +20875,7 @@
     </p:spTree>
     <p:extLst>
       <p:ext uri="{BB962C8B-B14F-4D97-AF65-F5344CB8AC3E}">
-        <p14:creationId xmlns:p14="http://schemas.microsoft.com/office/powerpoint/2010/main" val="3747833275"/>
+        <ns5:creationId val="3747833275"/>
       </p:ext>
     </p:extLst>
   </p:cSld>
@@ -20547,7 +20886,7 @@
 </file>
 
 <file path=ppt/slides/slide15.xml><?xml version="1.0" encoding="utf-8"?>
-<p:sld xmlns:a="http://schemas.openxmlformats.org/drawingml/2006/main" xmlns:r="http://schemas.openxmlformats.org/officeDocument/2006/relationships" xmlns:p="http://schemas.openxmlformats.org/presentationml/2006/main">
+<p:sld xmlns:a="http://schemas.openxmlformats.org/drawingml/2006/main" xmlns:ns2="http://schemas.microsoft.com/office/drawing/2014/main" xmlns:ns3="http://schemas.microsoft.com/office/powerpoint/2010/main" xmlns:p="http://schemas.openxmlformats.org/presentationml/2006/main">
   <p:cSld>
     <p:bg>
       <p:bgPr>
@@ -20562,7 +20901,7 @@
         <p:cNvPr id="1" name="">
           <a:extLst>
             <a:ext uri="{FF2B5EF4-FFF2-40B4-BE49-F238E27FC236}">
-              <a16:creationId xmlns:a16="http://schemas.microsoft.com/office/drawing/2014/main" id="{804AC981-79ED-95B2-006C-1F07F7D1021C}"/>
+              <ns2:creationId id="{804AC981-79ED-95B2-006C-1F07F7D1021C}"/>
             </a:ext>
           </a:extLst>
         </p:cNvPr>
@@ -20582,7 +20921,7 @@
           <p:cNvPr id="2" name="TextBox 1">
             <a:extLst>
               <a:ext uri="{FF2B5EF4-FFF2-40B4-BE49-F238E27FC236}">
-                <a16:creationId xmlns:a16="http://schemas.microsoft.com/office/drawing/2014/main" id="{25D5C38C-76F4-C791-A566-84A8B395A016}"/>
+                <ns2:creationId id="{25D5C38C-76F4-C791-A566-84A8B395A016}"/>
               </a:ext>
             </a:extLst>
           </p:cNvPr>
@@ -20679,7 +21018,7 @@
     </p:spTree>
     <p:extLst>
       <p:ext uri="{BB962C8B-B14F-4D97-AF65-F5344CB8AC3E}">
-        <p14:creationId xmlns:p14="http://schemas.microsoft.com/office/powerpoint/2010/main" val="3464736619"/>
+        <ns3:creationId val="3464736619"/>
       </p:ext>
     </p:extLst>
   </p:cSld>
@@ -20690,7 +21029,7 @@
 </file>
 
 <file path=ppt/slides/slide16.xml><?xml version="1.0" encoding="utf-8"?>
-<p:sld xmlns:a="http://schemas.openxmlformats.org/drawingml/2006/main" xmlns:r="http://schemas.openxmlformats.org/officeDocument/2006/relationships" xmlns:p="http://schemas.openxmlformats.org/presentationml/2006/main">
+<p:sld xmlns:a="http://schemas.openxmlformats.org/drawingml/2006/main" xmlns:ns2="http://schemas.microsoft.com/office/drawing/2014/main" xmlns:ns3="http://schemas.microsoft.com/office/powerpoint/2010/main" xmlns:p="http://schemas.openxmlformats.org/presentationml/2006/main">
   <p:cSld>
     <p:bg>
       <p:bgPr>
@@ -20705,7 +21044,7 @@
         <p:cNvPr id="1" name="">
           <a:extLst>
             <a:ext uri="{FF2B5EF4-FFF2-40B4-BE49-F238E27FC236}">
-              <a16:creationId xmlns:a16="http://schemas.microsoft.com/office/drawing/2014/main" id="{2CB0C588-8647-6C8C-8DC7-F162DDF8BF26}"/>
+              <ns2:creationId id="{2CB0C588-8647-6C8C-8DC7-F162DDF8BF26}"/>
             </a:ext>
           </a:extLst>
         </p:cNvPr>
@@ -20725,7 +21064,7 @@
           <p:cNvPr id="5" name="Footer Placeholder 3">
             <a:extLst>
               <a:ext uri="{FF2B5EF4-FFF2-40B4-BE49-F238E27FC236}">
-                <a16:creationId xmlns:a16="http://schemas.microsoft.com/office/drawing/2014/main" id="{D8055493-6465-E03D-4E0E-CA86B923D2DB}"/>
+                <ns2:creationId id="{D8055493-6465-E03D-4E0E-CA86B923D2DB}"/>
               </a:ext>
             </a:extLst>
           </p:cNvPr>
@@ -20887,7 +21226,7 @@
           <p:cNvPr id="19" name="Rectangle 18">
             <a:extLst>
               <a:ext uri="{FF2B5EF4-FFF2-40B4-BE49-F238E27FC236}">
-                <a16:creationId xmlns:a16="http://schemas.microsoft.com/office/drawing/2014/main" id="{232D04D3-E71C-CAE2-097F-314B5E11C0F3}"/>
+                <ns2:creationId id="{232D04D3-E71C-CAE2-097F-314B5E11C0F3}"/>
               </a:ext>
             </a:extLst>
           </p:cNvPr>
@@ -20952,7 +21291,7 @@
           <p:cNvPr id="2" name="TextBox 1">
             <a:extLst>
               <a:ext uri="{FF2B5EF4-FFF2-40B4-BE49-F238E27FC236}">
-                <a16:creationId xmlns:a16="http://schemas.microsoft.com/office/drawing/2014/main" id="{5B66C1A2-52BD-EA60-BE8F-C5D3C8F732D2}"/>
+                <ns2:creationId id="{5B66C1A2-52BD-EA60-BE8F-C5D3C8F732D2}"/>
               </a:ext>
             </a:extLst>
           </p:cNvPr>
@@ -21079,7 +21418,58 @@
                 <a:ea typeface="Helvetica Neue" panose="02000503000000020004" pitchFamily="2" charset="0"/>
                 <a:cs typeface="Helvetica Neue" panose="02000503000000020004" pitchFamily="2" charset="0"/>
               </a:rPr>
-              <a:t>Because an architrino can move faster than wake speed, v = c_f marks a self-hit onset boundary rather than an observer-level speed limit.</a:t>
+              <a:t xml:space="preserve">Because an architrino can move faster than wake speed, v = </a:t>
+            </a:r>
+            <a:r>
+              <a:rPr kumimoji="0" lang="en-US" sz="1600" b="0" i="0" u="none" strike="noStrike" kern="1200" cap="none" spc="0" normalizeH="0" baseline="0" noProof="0" dirty="0">
+                <a:ln>
+                  <a:noFill/>
+                </a:ln>
+                <a:solidFill>
+                  <a:prstClr val="white"/>
+                </a:solidFill>
+                <a:effectLst/>
+                <a:uLnTx/>
+                <a:uFillTx/>
+                <a:latin typeface="Helvetica Neue" panose="02000503000000020004" pitchFamily="2" charset="0"/>
+                <a:ea typeface="Helvetica Neue" panose="02000503000000020004" pitchFamily="2" charset="0"/>
+                <a:cs typeface="Helvetica Neue" panose="02000503000000020004" pitchFamily="2" charset="0"/>
+              </a:rPr>
+              <a:t>c</a:t>
+            </a:r>
+            <a:r>
+              <a:rPr kumimoji="0" lang="en-US" sz="1120" b="0" i="0" u="none" strike="noStrike" kern="1200" cap="none" spc="0" normalizeH="0" baseline="-25000" noProof="0" dirty="0">
+                <a:ln>
+                  <a:noFill/>
+                </a:ln>
+                <a:solidFill>
+                  <a:prstClr val="white"/>
+                </a:solidFill>
+                <a:effectLst/>
+                <a:uLnTx/>
+                <a:uFillTx/>
+                <a:latin typeface="Helvetica Neue" panose="02000503000000020004" pitchFamily="2" charset="0"/>
+                <a:ea typeface="Helvetica Neue" panose="02000503000000020004" pitchFamily="2" charset="0"/>
+                <a:cs typeface="Helvetica Neue" panose="02000503000000020004" pitchFamily="2" charset="0"/>
+              </a:rPr>
+              <a:t>f</a:t>
+            </a:r>
+            <a:r>
+              <a:rPr kumimoji="0" lang="en-US" sz="1600" b="0" i="0" u="none" strike="noStrike" kern="1200" cap="none" spc="0" normalizeH="0" baseline="0" noProof="0" dirty="0">
+                <a:ln>
+                  <a:noFill/>
+                </a:ln>
+                <a:solidFill>
+                  <a:prstClr val="white"/>
+                </a:solidFill>
+                <a:effectLst/>
+                <a:uLnTx/>
+                <a:uFillTx/>
+                <a:latin typeface="Helvetica Neue" panose="02000503000000020004" pitchFamily="2" charset="0"/>
+                <a:ea typeface="Helvetica Neue" panose="02000503000000020004" pitchFamily="2" charset="0"/>
+                <a:cs typeface="Helvetica Neue" panose="02000503000000020004" pitchFamily="2" charset="0"/>
+              </a:rPr>
+              <a:t xml:space="preserve"> marks a self-hit onset boundary rather than an observer-level speed limit.</a:t>
             </a:r>
           </a:p>
           <a:p>
@@ -21111,7 +21501,7 @@
     </p:spTree>
     <p:extLst>
       <p:ext uri="{BB962C8B-B14F-4D97-AF65-F5344CB8AC3E}">
-        <p14:creationId xmlns:p14="http://schemas.microsoft.com/office/powerpoint/2010/main" val="3670680207"/>
+        <ns3:creationId val="3670680207"/>
       </p:ext>
     </p:extLst>
   </p:cSld>
@@ -21122,7 +21512,7 @@
 </file>
 
 <file path=ppt/slides/slide17.xml><?xml version="1.0" encoding="utf-8"?>
-<p:sld xmlns:a="http://schemas.openxmlformats.org/drawingml/2006/main" xmlns:r="http://schemas.openxmlformats.org/officeDocument/2006/relationships" xmlns:p="http://schemas.openxmlformats.org/presentationml/2006/main">
+<p:sld xmlns:a="http://schemas.openxmlformats.org/drawingml/2006/main" xmlns:ns2="http://schemas.microsoft.com/office/drawing/2014/main" xmlns:ns3="http://schemas.microsoft.com/office/powerpoint/2010/main" xmlns:p="http://schemas.openxmlformats.org/presentationml/2006/main">
   <p:cSld>
     <p:bg>
       <p:bgPr>
@@ -21137,7 +21527,7 @@
         <p:cNvPr id="1" name="">
           <a:extLst>
             <a:ext uri="{FF2B5EF4-FFF2-40B4-BE49-F238E27FC236}">
-              <a16:creationId xmlns:a16="http://schemas.microsoft.com/office/drawing/2014/main" id="{8B3A6F17-EFE6-B51A-A63A-3B70333495A1}"/>
+              <ns2:creationId id="{8B3A6F17-EFE6-B51A-A63A-3B70333495A1}"/>
             </a:ext>
           </a:extLst>
         </p:cNvPr>
@@ -21157,7 +21547,7 @@
           <p:cNvPr id="5" name="Footer Placeholder 3">
             <a:extLst>
               <a:ext uri="{FF2B5EF4-FFF2-40B4-BE49-F238E27FC236}">
-                <a16:creationId xmlns:a16="http://schemas.microsoft.com/office/drawing/2014/main" id="{68EB2D01-BE54-DC86-BCD1-1E32DA2C4000}"/>
+                <ns2:creationId id="{68EB2D01-BE54-DC86-BCD1-1E32DA2C4000}"/>
               </a:ext>
             </a:extLst>
           </p:cNvPr>
@@ -21319,7 +21709,7 @@
           <p:cNvPr id="19" name="Rectangle 18">
             <a:extLst>
               <a:ext uri="{FF2B5EF4-FFF2-40B4-BE49-F238E27FC236}">
-                <a16:creationId xmlns:a16="http://schemas.microsoft.com/office/drawing/2014/main" id="{F2D335EE-90BE-310F-3F30-68D612074B92}"/>
+                <ns2:creationId id="{F2D335EE-90BE-310F-3F30-68D612074B92}"/>
               </a:ext>
             </a:extLst>
           </p:cNvPr>
@@ -21384,7 +21774,7 @@
           <p:cNvPr id="2" name="TextBox 1">
             <a:extLst>
               <a:ext uri="{FF2B5EF4-FFF2-40B4-BE49-F238E27FC236}">
-                <a16:creationId xmlns:a16="http://schemas.microsoft.com/office/drawing/2014/main" id="{CBF92790-EC27-682A-21D0-5C88069D4333}"/>
+                <ns2:creationId id="{CBF92790-EC27-682A-21D0-5C88069D4333}"/>
               </a:ext>
             </a:extLst>
           </p:cNvPr>
@@ -21555,7 +21945,7 @@
     </p:spTree>
     <p:extLst>
       <p:ext uri="{BB962C8B-B14F-4D97-AF65-F5344CB8AC3E}">
-        <p14:creationId xmlns:p14="http://schemas.microsoft.com/office/powerpoint/2010/main" val="653966555"/>
+        <ns3:creationId val="653966555"/>
       </p:ext>
     </p:extLst>
   </p:cSld>
@@ -21566,7 +21956,7 @@
 </file>
 
 <file path=ppt/slides/slide18.xml><?xml version="1.0" encoding="utf-8"?>
-<p:sld xmlns:a="http://schemas.openxmlformats.org/drawingml/2006/main" xmlns:r="http://schemas.openxmlformats.org/officeDocument/2006/relationships" xmlns:p="http://schemas.openxmlformats.org/presentationml/2006/main">
+<p:sld xmlns:a="http://schemas.openxmlformats.org/drawingml/2006/main" xmlns:ns2="http://schemas.microsoft.com/office/drawing/2014/main" xmlns:ns4="http://schemas.microsoft.com/office/powerpoint/2010/main" xmlns:p="http://schemas.openxmlformats.org/presentationml/2006/main" xmlns:r="http://schemas.openxmlformats.org/officeDocument/2006/relationships">
   <p:cSld>
     <p:bg>
       <p:bgPr>
@@ -21581,7 +21971,7 @@
         <p:cNvPr id="1" name="">
           <a:extLst>
             <a:ext uri="{FF2B5EF4-FFF2-40B4-BE49-F238E27FC236}">
-              <a16:creationId xmlns:a16="http://schemas.microsoft.com/office/drawing/2014/main" id="{764AD85F-4248-DE78-FCB4-518C065121A3}"/>
+              <ns2:creationId id="{764AD85F-4248-DE78-FCB4-518C065121A3}"/>
             </a:ext>
           </a:extLst>
         </p:cNvPr>
@@ -21601,7 +21991,7 @@
           <p:cNvPr id="5" name="Footer Placeholder 3">
             <a:extLst>
               <a:ext uri="{FF2B5EF4-FFF2-40B4-BE49-F238E27FC236}">
-                <a16:creationId xmlns:a16="http://schemas.microsoft.com/office/drawing/2014/main" id="{0464A0FC-8CE3-207B-0E49-C582E93BE77D}"/>
+                <ns2:creationId id="{0464A0FC-8CE3-207B-0E49-C582E93BE77D}"/>
               </a:ext>
             </a:extLst>
           </p:cNvPr>
@@ -21763,7 +22153,7 @@
           <p:cNvPr id="19" name="Rectangle 18">
             <a:extLst>
               <a:ext uri="{FF2B5EF4-FFF2-40B4-BE49-F238E27FC236}">
-                <a16:creationId xmlns:a16="http://schemas.microsoft.com/office/drawing/2014/main" id="{59C47AE8-E40E-D333-CCEE-591287A99ACE}"/>
+                <ns2:creationId id="{59C47AE8-E40E-D333-CCEE-591287A99ACE}"/>
               </a:ext>
             </a:extLst>
           </p:cNvPr>
@@ -21828,7 +22218,7 @@
           <p:cNvPr id="2" name="TextBox 1">
             <a:extLst>
               <a:ext uri="{FF2B5EF4-FFF2-40B4-BE49-F238E27FC236}">
-                <a16:creationId xmlns:a16="http://schemas.microsoft.com/office/drawing/2014/main" id="{C4927378-5D67-46E3-234B-AEB36EE62C4E}"/>
+                <ns2:creationId id="{C4927378-5D67-46E3-234B-AEB36EE62C4E}"/>
               </a:ext>
             </a:extLst>
           </p:cNvPr>
@@ -21893,7 +22283,7 @@
           <p:cNvPr id="3" name="Picture 2">
             <a:extLst>
               <a:ext uri="{FF2B5EF4-FFF2-40B4-BE49-F238E27FC236}">
-                <a16:creationId xmlns:a16="http://schemas.microsoft.com/office/drawing/2014/main" id="{77DA6E5F-7441-6233-DACB-330BCC7593FF}"/>
+                <ns2:creationId id="{77DA6E5F-7441-6233-DACB-330BCC7593FF}"/>
               </a:ext>
             </a:extLst>
           </p:cNvPr>
@@ -21921,7 +22311,7 @@
     </p:spTree>
     <p:extLst>
       <p:ext uri="{BB962C8B-B14F-4D97-AF65-F5344CB8AC3E}">
-        <p14:creationId xmlns:p14="http://schemas.microsoft.com/office/powerpoint/2010/main" val="1428032534"/>
+        <ns4:creationId val="1428032534"/>
       </p:ext>
     </p:extLst>
   </p:cSld>
@@ -21932,7 +22322,7 @@
 </file>
 
 <file path=ppt/slides/slide2.xml><?xml version="1.0" encoding="utf-8"?>
-<p:sld xmlns:a="http://schemas.openxmlformats.org/drawingml/2006/main" xmlns:r="http://schemas.openxmlformats.org/officeDocument/2006/relationships" xmlns:p="http://schemas.openxmlformats.org/presentationml/2006/main">
+<p:sld xmlns:a="http://schemas.openxmlformats.org/drawingml/2006/main" xmlns:ns2="http://schemas.microsoft.com/office/drawing/2014/main" xmlns:ns3="http://schemas.microsoft.com/office/powerpoint/2010/main" xmlns:p="http://schemas.openxmlformats.org/presentationml/2006/main">
   <p:cSld>
     <p:bg>
       <p:bgPr>
@@ -21961,7 +22351,7 @@
           <p:cNvPr id="5" name="Footer Placeholder 3">
             <a:extLst>
               <a:ext uri="{FF2B5EF4-FFF2-40B4-BE49-F238E27FC236}">
-                <a16:creationId xmlns:a16="http://schemas.microsoft.com/office/drawing/2014/main" id="{668F77D6-DFDA-5A46-8DF1-47F6A167C2B1}"/>
+                <ns2:creationId id="{668F77D6-DFDA-5A46-8DF1-47F6A167C2B1}"/>
               </a:ext>
             </a:extLst>
           </p:cNvPr>
@@ -22123,7 +22513,7 @@
           <p:cNvPr id="6" name="Group 5">
             <a:extLst>
               <a:ext uri="{FF2B5EF4-FFF2-40B4-BE49-F238E27FC236}">
-                <a16:creationId xmlns:a16="http://schemas.microsoft.com/office/drawing/2014/main" id="{CB214E5A-63A5-5C6B-3D5B-75FF74FA3E5A}"/>
+                <ns2:creationId id="{CB214E5A-63A5-5C6B-3D5B-75FF74FA3E5A}"/>
               </a:ext>
             </a:extLst>
           </p:cNvPr>
@@ -22143,7 +22533,7 @@
             <p:cNvPr id="3" name="Straight Arrow Connector 2">
               <a:extLst>
                 <a:ext uri="{FF2B5EF4-FFF2-40B4-BE49-F238E27FC236}">
-                  <a16:creationId xmlns:a16="http://schemas.microsoft.com/office/drawing/2014/main" id="{2EF0199F-22F4-BA42-9B75-8A8183BCDA9B}"/>
+                  <ns2:creationId id="{2EF0199F-22F4-BA42-9B75-8A8183BCDA9B}"/>
                 </a:ext>
               </a:extLst>
             </p:cNvPr>
@@ -22187,7 +22577,7 @@
             <p:cNvPr id="8" name="Straight Arrow Connector 7">
               <a:extLst>
                 <a:ext uri="{FF2B5EF4-FFF2-40B4-BE49-F238E27FC236}">
-                  <a16:creationId xmlns:a16="http://schemas.microsoft.com/office/drawing/2014/main" id="{49AB5343-55D0-6041-8627-E08A73F83930}"/>
+                  <ns2:creationId id="{49AB5343-55D0-6041-8627-E08A73F83930}"/>
                 </a:ext>
               </a:extLst>
             </p:cNvPr>
@@ -22231,7 +22621,7 @@
             <p:cNvPr id="12" name="TextBox 11">
               <a:extLst>
                 <a:ext uri="{FF2B5EF4-FFF2-40B4-BE49-F238E27FC236}">
-                  <a16:creationId xmlns:a16="http://schemas.microsoft.com/office/drawing/2014/main" id="{BF8D86A2-D083-024A-BC90-6BD938C23243}"/>
+                  <ns2:creationId id="{BF8D86A2-D083-024A-BC90-6BD938C23243}"/>
                 </a:ext>
               </a:extLst>
             </p:cNvPr>
@@ -22296,7 +22686,7 @@
             <p:cNvPr id="13" name="TextBox 12">
               <a:extLst>
                 <a:ext uri="{FF2B5EF4-FFF2-40B4-BE49-F238E27FC236}">
-                  <a16:creationId xmlns:a16="http://schemas.microsoft.com/office/drawing/2014/main" id="{2C3F4604-6C2F-0E4E-9DD3-4F5C89FF51AB}"/>
+                  <ns2:creationId id="{2C3F4604-6C2F-0E4E-9DD3-4F5C89FF51AB}"/>
                 </a:ext>
               </a:extLst>
             </p:cNvPr>
@@ -22398,7 +22788,7 @@
           <p:cNvPr id="23" name="Oval 22">
             <a:extLst>
               <a:ext uri="{FF2B5EF4-FFF2-40B4-BE49-F238E27FC236}">
-                <a16:creationId xmlns:a16="http://schemas.microsoft.com/office/drawing/2014/main" id="{0112617B-A1D5-1E41-BF92-E67D4E046E39}"/>
+                <ns2:creationId id="{0112617B-A1D5-1E41-BF92-E67D4E046E39}"/>
               </a:ext>
             </a:extLst>
           </p:cNvPr>
@@ -22482,7 +22872,7 @@
           <p:cNvPr id="27" name="Oval 26">
             <a:extLst>
               <a:ext uri="{FF2B5EF4-FFF2-40B4-BE49-F238E27FC236}">
-                <a16:creationId xmlns:a16="http://schemas.microsoft.com/office/drawing/2014/main" id="{6EF0F7DA-5E70-8348-A200-F59A10FF7C55}"/>
+                <ns2:creationId id="{6EF0F7DA-5E70-8348-A200-F59A10FF7C55}"/>
               </a:ext>
             </a:extLst>
           </p:cNvPr>
@@ -22566,7 +22956,7 @@
           <p:cNvPr id="28" name="Oval 27">
             <a:extLst>
               <a:ext uri="{FF2B5EF4-FFF2-40B4-BE49-F238E27FC236}">
-                <a16:creationId xmlns:a16="http://schemas.microsoft.com/office/drawing/2014/main" id="{552F58D0-F613-674A-B294-C894E5FB1683}"/>
+                <ns2:creationId id="{552F58D0-F613-674A-B294-C894E5FB1683}"/>
               </a:ext>
             </a:extLst>
           </p:cNvPr>
@@ -22650,7 +23040,7 @@
           <p:cNvPr id="29" name="Oval 28">
             <a:extLst>
               <a:ext uri="{FF2B5EF4-FFF2-40B4-BE49-F238E27FC236}">
-                <a16:creationId xmlns:a16="http://schemas.microsoft.com/office/drawing/2014/main" id="{9CA7A721-D3BD-744E-9306-85BBED5F74BC}"/>
+                <ns2:creationId id="{9CA7A721-D3BD-744E-9306-85BBED5F74BC}"/>
               </a:ext>
             </a:extLst>
           </p:cNvPr>
@@ -22734,7 +23124,7 @@
           <p:cNvPr id="30" name="Oval 29">
             <a:extLst>
               <a:ext uri="{FF2B5EF4-FFF2-40B4-BE49-F238E27FC236}">
-                <a16:creationId xmlns:a16="http://schemas.microsoft.com/office/drawing/2014/main" id="{F97F1A02-C0C7-3C45-9790-847C152D159A}"/>
+                <ns2:creationId id="{F97F1A02-C0C7-3C45-9790-847C152D159A}"/>
               </a:ext>
             </a:extLst>
           </p:cNvPr>
@@ -22818,7 +23208,7 @@
           <p:cNvPr id="18" name="Oval 17">
             <a:extLst>
               <a:ext uri="{FF2B5EF4-FFF2-40B4-BE49-F238E27FC236}">
-                <a16:creationId xmlns:a16="http://schemas.microsoft.com/office/drawing/2014/main" id="{BE4CDC90-4B2E-BE41-BB9D-A84675F3A2FE}"/>
+                <ns2:creationId id="{BE4CDC90-4B2E-BE41-BB9D-A84675F3A2FE}"/>
               </a:ext>
             </a:extLst>
           </p:cNvPr>
@@ -22901,7 +23291,7 @@
           <p:cNvPr id="31" name="TextBox 30">
             <a:extLst>
               <a:ext uri="{FF2B5EF4-FFF2-40B4-BE49-F238E27FC236}">
-                <a16:creationId xmlns:a16="http://schemas.microsoft.com/office/drawing/2014/main" id="{713B9ACE-B673-2D48-BEF2-2A133C31B527}"/>
+                <ns2:creationId id="{713B9ACE-B673-2D48-BEF2-2A133C31B527}"/>
               </a:ext>
             </a:extLst>
           </p:cNvPr>
@@ -22959,7 +23349,58 @@
                 <a:ea typeface="Helvetica Neue" panose="02000503000000020004" pitchFamily="2" charset="0"/>
                 <a:cs typeface="Helvetica Neue" panose="02000503000000020004" pitchFamily="2" charset="0"/>
               </a:rPr>
-              <a:t>r = c_f t</a:t>
+              <a:t xml:space="preserve">r = </a:t>
+            </a:r>
+            <a:r>
+              <a:rPr kumimoji="0" lang="en-US" sz="1400" b="0" i="1" u="none" strike="noStrike" kern="1200" cap="none" spc="0" normalizeH="0" baseline="0" noProof="0" dirty="0">
+                <a:ln>
+                  <a:noFill/>
+                </a:ln>
+                <a:solidFill>
+                  <a:srgbClr val="FFC000"/>
+                </a:solidFill>
+                <a:effectLst/>
+                <a:uLnTx/>
+                <a:uFillTx/>
+                <a:latin typeface="Helvetica Neue" panose="02000503000000020004" pitchFamily="2" charset="0"/>
+                <a:ea typeface="Helvetica Neue" panose="02000503000000020004" pitchFamily="2" charset="0"/>
+                <a:cs typeface="Helvetica Neue" panose="02000503000000020004" pitchFamily="2" charset="0"/>
+              </a:rPr>
+              <a:t>c</a:t>
+            </a:r>
+            <a:r>
+              <a:rPr kumimoji="0" lang="en-US" sz="980" b="0" i="1" u="none" strike="noStrike" kern="1200" cap="none" spc="0" normalizeH="0" baseline="-25000" noProof="0" dirty="0">
+                <a:ln>
+                  <a:noFill/>
+                </a:ln>
+                <a:solidFill>
+                  <a:srgbClr val="FFC000"/>
+                </a:solidFill>
+                <a:effectLst/>
+                <a:uLnTx/>
+                <a:uFillTx/>
+                <a:latin typeface="Helvetica Neue" panose="02000503000000020004" pitchFamily="2" charset="0"/>
+                <a:ea typeface="Helvetica Neue" panose="02000503000000020004" pitchFamily="2" charset="0"/>
+                <a:cs typeface="Helvetica Neue" panose="02000503000000020004" pitchFamily="2" charset="0"/>
+              </a:rPr>
+              <a:t>f</a:t>
+            </a:r>
+            <a:r>
+              <a:rPr kumimoji="0" lang="en-US" sz="1400" b="0" i="1" u="none" strike="noStrike" kern="1200" cap="none" spc="0" normalizeH="0" baseline="0" noProof="0" dirty="0">
+                <a:ln>
+                  <a:noFill/>
+                </a:ln>
+                <a:solidFill>
+                  <a:srgbClr val="FFC000"/>
+                </a:solidFill>
+                <a:effectLst/>
+                <a:uLnTx/>
+                <a:uFillTx/>
+                <a:latin typeface="Helvetica Neue" panose="02000503000000020004" pitchFamily="2" charset="0"/>
+                <a:ea typeface="Helvetica Neue" panose="02000503000000020004" pitchFamily="2" charset="0"/>
+                <a:cs typeface="Helvetica Neue" panose="02000503000000020004" pitchFamily="2" charset="0"/>
+              </a:rPr>
+              <a:t xml:space="preserve"> t</a:t>
             </a:r>
           </a:p>
         </p:txBody>
@@ -22969,7 +23410,7 @@
           <p:cNvPr id="36" name="TextBox 35">
             <a:extLst>
               <a:ext uri="{FF2B5EF4-FFF2-40B4-BE49-F238E27FC236}">
-                <a16:creationId xmlns:a16="http://schemas.microsoft.com/office/drawing/2014/main" id="{3A81A480-EF64-094E-825A-8592DAA4C672}"/>
+                <ns2:creationId id="{3A81A480-EF64-094E-825A-8592DAA4C672}"/>
               </a:ext>
             </a:extLst>
           </p:cNvPr>
@@ -23051,7 +23492,7 @@
           <p:cNvPr id="22" name="Straight Connector 21">
             <a:extLst>
               <a:ext uri="{FF2B5EF4-FFF2-40B4-BE49-F238E27FC236}">
-                <a16:creationId xmlns:a16="http://schemas.microsoft.com/office/drawing/2014/main" id="{0C67DA45-6876-7942-9996-48CA0A1696FE}"/>
+                <ns2:creationId id="{0C67DA45-6876-7942-9996-48CA0A1696FE}"/>
               </a:ext>
             </a:extLst>
           </p:cNvPr>
@@ -23094,7 +23535,7 @@
           <p:cNvPr id="15" name="Straight Arrow Connector 14">
             <a:extLst>
               <a:ext uri="{FF2B5EF4-FFF2-40B4-BE49-F238E27FC236}">
-                <a16:creationId xmlns:a16="http://schemas.microsoft.com/office/drawing/2014/main" id="{05289ED1-4679-6543-A669-B23443FD0CD8}"/>
+                <ns2:creationId id="{05289ED1-4679-6543-A669-B23443FD0CD8}"/>
               </a:ext>
             </a:extLst>
           </p:cNvPr>
@@ -23140,7 +23581,7 @@
           <p:cNvPr id="14" name="Rectangle 13">
             <a:extLst>
               <a:ext uri="{FF2B5EF4-FFF2-40B4-BE49-F238E27FC236}">
-                <a16:creationId xmlns:a16="http://schemas.microsoft.com/office/drawing/2014/main" id="{24DFEA8B-B2CC-4557-5832-83CBF458C62D}"/>
+                <ns2:creationId id="{24DFEA8B-B2CC-4557-5832-83CBF458C62D}"/>
               </a:ext>
             </a:extLst>
           </p:cNvPr>
@@ -23199,7 +23640,58 @@
                 <a:ea typeface="Helvetica Neue" panose="02000503000000020004" pitchFamily="2" charset="0"/>
                 <a:cs typeface="Helvetica Neue" panose="02000503000000020004" pitchFamily="2" charset="0"/>
               </a:rPr>
-              <a:t>Wake Speed c_f is a Primitive Constant</a:t>
+              <a:t xml:space="preserve">Wake Speed </a:t>
+            </a:r>
+            <a:r>
+              <a:rPr kumimoji="0" lang="en-US" sz="2000" b="1" i="0" u="none" strike="noStrike" kern="1200" cap="none" spc="0" normalizeH="0" baseline="0" noProof="0" dirty="0">
+                <a:ln>
+                  <a:noFill/>
+                </a:ln>
+                <a:solidFill>
+                  <a:srgbClr val="FF85FF"/>
+                </a:solidFill>
+                <a:effectLst/>
+                <a:uLnTx/>
+                <a:uFillTx/>
+                <a:latin typeface="Helvetica Neue" panose="02000503000000020004" pitchFamily="2" charset="0"/>
+                <a:ea typeface="Helvetica Neue" panose="02000503000000020004" pitchFamily="2" charset="0"/>
+                <a:cs typeface="Helvetica Neue" panose="02000503000000020004" pitchFamily="2" charset="0"/>
+              </a:rPr>
+              <a:t>c</a:t>
+            </a:r>
+            <a:r>
+              <a:rPr kumimoji="0" lang="en-US" sz="1400" b="1" i="0" u="none" strike="noStrike" kern="1200" cap="none" spc="0" normalizeH="0" baseline="-25000" noProof="0" dirty="0">
+                <a:ln>
+                  <a:noFill/>
+                </a:ln>
+                <a:solidFill>
+                  <a:srgbClr val="FF85FF"/>
+                </a:solidFill>
+                <a:effectLst/>
+                <a:uLnTx/>
+                <a:uFillTx/>
+                <a:latin typeface="Helvetica Neue" panose="02000503000000020004" pitchFamily="2" charset="0"/>
+                <a:ea typeface="Helvetica Neue" panose="02000503000000020004" pitchFamily="2" charset="0"/>
+                <a:cs typeface="Helvetica Neue" panose="02000503000000020004" pitchFamily="2" charset="0"/>
+              </a:rPr>
+              <a:t>f</a:t>
+            </a:r>
+            <a:r>
+              <a:rPr kumimoji="0" lang="en-US" sz="2000" b="1" i="0" u="none" strike="noStrike" kern="1200" cap="none" spc="0" normalizeH="0" baseline="0" noProof="0" dirty="0">
+                <a:ln>
+                  <a:noFill/>
+                </a:ln>
+                <a:solidFill>
+                  <a:srgbClr val="FF85FF"/>
+                </a:solidFill>
+                <a:effectLst/>
+                <a:uLnTx/>
+                <a:uFillTx/>
+                <a:latin typeface="Helvetica Neue" panose="02000503000000020004" pitchFamily="2" charset="0"/>
+                <a:ea typeface="Helvetica Neue" panose="02000503000000020004" pitchFamily="2" charset="0"/>
+                <a:cs typeface="Helvetica Neue" panose="02000503000000020004" pitchFamily="2" charset="0"/>
+              </a:rPr>
+              <a:t xml:space="preserve"> is a Primitive Constant</a:t>
             </a:r>
           </a:p>
         </p:txBody>
@@ -23209,7 +23701,7 @@
           <p:cNvPr id="17" name="TextBox 16">
             <a:extLst>
               <a:ext uri="{FF2B5EF4-FFF2-40B4-BE49-F238E27FC236}">
-                <a16:creationId xmlns:a16="http://schemas.microsoft.com/office/drawing/2014/main" id="{F6A93B37-78E4-125D-E0BF-C1EC32C24D2E}"/>
+                <ns2:creationId id="{F6A93B37-78E4-125D-E0BF-C1EC32C24D2E}"/>
               </a:ext>
             </a:extLst>
           </p:cNvPr>
@@ -23274,7 +23766,7 @@
           <p:cNvPr id="19" name="TextBox 18">
             <a:extLst>
               <a:ext uri="{FF2B5EF4-FFF2-40B4-BE49-F238E27FC236}">
-                <a16:creationId xmlns:a16="http://schemas.microsoft.com/office/drawing/2014/main" id="{D1F40738-506F-EAAF-7EBE-CFC9B4FE4D03}"/>
+                <ns2:creationId id="{D1F40738-506F-EAAF-7EBE-CFC9B4FE4D03}"/>
               </a:ext>
             </a:extLst>
           </p:cNvPr>
@@ -23337,7 +23829,7 @@
     </p:spTree>
     <p:extLst>
       <p:ext uri="{BB962C8B-B14F-4D97-AF65-F5344CB8AC3E}">
-        <p14:creationId xmlns:p14="http://schemas.microsoft.com/office/powerpoint/2010/main" val="4241975687"/>
+        <ns3:creationId val="4241975687"/>
       </p:ext>
     </p:extLst>
   </p:cSld>
@@ -23348,7 +23840,7 @@
 </file>
 
 <file path=ppt/slides/slide3.xml><?xml version="1.0" encoding="utf-8"?>
-<p:sld xmlns:a="http://schemas.openxmlformats.org/drawingml/2006/main" xmlns:r="http://schemas.openxmlformats.org/officeDocument/2006/relationships" xmlns:p="http://schemas.openxmlformats.org/presentationml/2006/main">
+<p:sld xmlns:a="http://schemas.openxmlformats.org/drawingml/2006/main" xmlns:ns2="http://schemas.microsoft.com/office/drawing/2014/main" xmlns:ns3="http://schemas.microsoft.com/office/powerpoint/2010/main" xmlns:p="http://schemas.openxmlformats.org/presentationml/2006/main">
   <p:cSld>
     <p:bg>
       <p:bgPr>
@@ -23363,7 +23855,7 @@
         <p:cNvPr id="1" name="">
           <a:extLst>
             <a:ext uri="{FF2B5EF4-FFF2-40B4-BE49-F238E27FC236}">
-              <a16:creationId xmlns:a16="http://schemas.microsoft.com/office/drawing/2014/main" id="{618D555D-7286-B241-E144-DDEC77AD45E3}"/>
+              <ns2:creationId id="{618D555D-7286-B241-E144-DDEC77AD45E3}"/>
             </a:ext>
           </a:extLst>
         </p:cNvPr>
@@ -23383,7 +23875,7 @@
           <p:cNvPr id="5" name="Footer Placeholder 3">
             <a:extLst>
               <a:ext uri="{FF2B5EF4-FFF2-40B4-BE49-F238E27FC236}">
-                <a16:creationId xmlns:a16="http://schemas.microsoft.com/office/drawing/2014/main" id="{614DBC08-8858-F579-1B95-86C501AB042B}"/>
+                <ns2:creationId id="{614DBC08-8858-F579-1B95-86C501AB042B}"/>
               </a:ext>
             </a:extLst>
           </p:cNvPr>
@@ -23545,7 +24037,7 @@
           <p:cNvPr id="6" name="Group 5">
             <a:extLst>
               <a:ext uri="{FF2B5EF4-FFF2-40B4-BE49-F238E27FC236}">
-                <a16:creationId xmlns:a16="http://schemas.microsoft.com/office/drawing/2014/main" id="{17811428-EDBA-0366-BE63-E3E25023C8EC}"/>
+                <ns2:creationId id="{17811428-EDBA-0366-BE63-E3E25023C8EC}"/>
               </a:ext>
             </a:extLst>
           </p:cNvPr>
@@ -23565,7 +24057,7 @@
             <p:cNvPr id="3" name="Straight Arrow Connector 2">
               <a:extLst>
                 <a:ext uri="{FF2B5EF4-FFF2-40B4-BE49-F238E27FC236}">
-                  <a16:creationId xmlns:a16="http://schemas.microsoft.com/office/drawing/2014/main" id="{D482C6FD-3801-AF2C-0D9C-BDC9F781A9F9}"/>
+                  <ns2:creationId id="{D482C6FD-3801-AF2C-0D9C-BDC9F781A9F9}"/>
                 </a:ext>
               </a:extLst>
             </p:cNvPr>
@@ -23609,7 +24101,7 @@
             <p:cNvPr id="8" name="Straight Arrow Connector 7">
               <a:extLst>
                 <a:ext uri="{FF2B5EF4-FFF2-40B4-BE49-F238E27FC236}">
-                  <a16:creationId xmlns:a16="http://schemas.microsoft.com/office/drawing/2014/main" id="{F8DD0551-F57F-FC8B-CDFA-54E4DF3D076B}"/>
+                  <ns2:creationId id="{F8DD0551-F57F-FC8B-CDFA-54E4DF3D076B}"/>
                 </a:ext>
               </a:extLst>
             </p:cNvPr>
@@ -23653,7 +24145,7 @@
             <p:cNvPr id="12" name="TextBox 11">
               <a:extLst>
                 <a:ext uri="{FF2B5EF4-FFF2-40B4-BE49-F238E27FC236}">
-                  <a16:creationId xmlns:a16="http://schemas.microsoft.com/office/drawing/2014/main" id="{2419E9DF-2DD3-3506-BE3B-E485BF80EDAC}"/>
+                  <ns2:creationId id="{2419E9DF-2DD3-3506-BE3B-E485BF80EDAC}"/>
                 </a:ext>
               </a:extLst>
             </p:cNvPr>
@@ -23718,7 +24210,7 @@
             <p:cNvPr id="13" name="TextBox 12">
               <a:extLst>
                 <a:ext uri="{FF2B5EF4-FFF2-40B4-BE49-F238E27FC236}">
-                  <a16:creationId xmlns:a16="http://schemas.microsoft.com/office/drawing/2014/main" id="{93B24559-A789-4B90-E180-1E0D72CE317E}"/>
+                  <ns2:creationId id="{93B24559-A789-4B90-E180-1E0D72CE317E}"/>
                 </a:ext>
               </a:extLst>
             </p:cNvPr>
@@ -23820,7 +24312,7 @@
           <p:cNvPr id="23" name="Oval 22">
             <a:extLst>
               <a:ext uri="{FF2B5EF4-FFF2-40B4-BE49-F238E27FC236}">
-                <a16:creationId xmlns:a16="http://schemas.microsoft.com/office/drawing/2014/main" id="{61A13369-24B9-E21B-05B9-329B5FF74DB7}"/>
+                <ns2:creationId id="{61A13369-24B9-E21B-05B9-329B5FF74DB7}"/>
               </a:ext>
             </a:extLst>
           </p:cNvPr>
@@ -23904,7 +24396,7 @@
           <p:cNvPr id="27" name="Oval 26">
             <a:extLst>
               <a:ext uri="{FF2B5EF4-FFF2-40B4-BE49-F238E27FC236}">
-                <a16:creationId xmlns:a16="http://schemas.microsoft.com/office/drawing/2014/main" id="{F2B3E963-4F4B-8173-AE7C-E7942A9E266B}"/>
+                <ns2:creationId id="{F2B3E963-4F4B-8173-AE7C-E7942A9E266B}"/>
               </a:ext>
             </a:extLst>
           </p:cNvPr>
@@ -23988,7 +24480,7 @@
           <p:cNvPr id="28" name="Oval 27">
             <a:extLst>
               <a:ext uri="{FF2B5EF4-FFF2-40B4-BE49-F238E27FC236}">
-                <a16:creationId xmlns:a16="http://schemas.microsoft.com/office/drawing/2014/main" id="{9ADB633C-4072-1C73-DADA-398777D0A7CD}"/>
+                <ns2:creationId id="{9ADB633C-4072-1C73-DADA-398777D0A7CD}"/>
               </a:ext>
             </a:extLst>
           </p:cNvPr>
@@ -24072,7 +24564,7 @@
           <p:cNvPr id="29" name="Oval 28">
             <a:extLst>
               <a:ext uri="{FF2B5EF4-FFF2-40B4-BE49-F238E27FC236}">
-                <a16:creationId xmlns:a16="http://schemas.microsoft.com/office/drawing/2014/main" id="{F82B7B38-EA39-2CF9-201C-54B73DBBD4EA}"/>
+                <ns2:creationId id="{F82B7B38-EA39-2CF9-201C-54B73DBBD4EA}"/>
               </a:ext>
             </a:extLst>
           </p:cNvPr>
@@ -24156,7 +24648,7 @@
           <p:cNvPr id="30" name="Oval 29">
             <a:extLst>
               <a:ext uri="{FF2B5EF4-FFF2-40B4-BE49-F238E27FC236}">
-                <a16:creationId xmlns:a16="http://schemas.microsoft.com/office/drawing/2014/main" id="{686BDBE9-0138-6C28-BFAF-00EA8DCD973D}"/>
+                <ns2:creationId id="{686BDBE9-0138-6C28-BFAF-00EA8DCD973D}"/>
               </a:ext>
             </a:extLst>
           </p:cNvPr>
@@ -24240,7 +24732,7 @@
           <p:cNvPr id="4" name="Straight Connector 3">
             <a:extLst>
               <a:ext uri="{FF2B5EF4-FFF2-40B4-BE49-F238E27FC236}">
-                <a16:creationId xmlns:a16="http://schemas.microsoft.com/office/drawing/2014/main" id="{D0AC705D-BF37-4542-CD33-8265C0D398AC}"/>
+                <ns2:creationId id="{D0AC705D-BF37-4542-CD33-8265C0D398AC}"/>
               </a:ext>
             </a:extLst>
           </p:cNvPr>
@@ -24283,7 +24775,7 @@
           <p:cNvPr id="18" name="Oval 17">
             <a:extLst>
               <a:ext uri="{FF2B5EF4-FFF2-40B4-BE49-F238E27FC236}">
-                <a16:creationId xmlns:a16="http://schemas.microsoft.com/office/drawing/2014/main" id="{5CEE4D57-2D48-3E46-8211-494134A5C094}"/>
+                <ns2:creationId id="{5CEE4D57-2D48-3E46-8211-494134A5C094}"/>
               </a:ext>
             </a:extLst>
           </p:cNvPr>
@@ -24366,7 +24858,7 @@
           <p:cNvPr id="11" name="Group 10">
             <a:extLst>
               <a:ext uri="{FF2B5EF4-FFF2-40B4-BE49-F238E27FC236}">
-                <a16:creationId xmlns:a16="http://schemas.microsoft.com/office/drawing/2014/main" id="{D24EBF2A-B7A3-E7EB-6313-BB50CF2D3A83}"/>
+                <ns2:creationId id="{D24EBF2A-B7A3-E7EB-6313-BB50CF2D3A83}"/>
               </a:ext>
             </a:extLst>
           </p:cNvPr>
@@ -24386,7 +24878,7 @@
             <p:cNvPr id="24" name="Straight Arrow Connector 23">
               <a:extLst>
                 <a:ext uri="{FF2B5EF4-FFF2-40B4-BE49-F238E27FC236}">
-                  <a16:creationId xmlns:a16="http://schemas.microsoft.com/office/drawing/2014/main" id="{9C627068-AD0C-E2DC-60AF-7257BB046983}"/>
+                  <ns2:creationId id="{9C627068-AD0C-E2DC-60AF-7257BB046983}"/>
                 </a:ext>
               </a:extLst>
             </p:cNvPr>
@@ -24431,7 +24923,7 @@
             <p:cNvPr id="10" name="TextBox 9">
               <a:extLst>
                 <a:ext uri="{FF2B5EF4-FFF2-40B4-BE49-F238E27FC236}">
-                  <a16:creationId xmlns:a16="http://schemas.microsoft.com/office/drawing/2014/main" id="{D692B828-D19F-3AA3-05F9-AF2DE3D5C9FC}"/>
+                  <ns2:creationId id="{D692B828-D19F-3AA3-05F9-AF2DE3D5C9FC}"/>
                 </a:ext>
               </a:extLst>
             </p:cNvPr>
@@ -24486,7 +24978,41 @@
                   <a:ea typeface="Helvetica Neue" panose="02000503000000020004" pitchFamily="2" charset="0"/>
                   <a:cs typeface="Helvetica Neue" panose="02000503000000020004" pitchFamily="2" charset="0"/>
                 </a:rPr>
-                <a:t>v &lt; c_f</a:t>
+                <a:t xml:space="preserve">v &lt; </a:t>
+              </a:r>
+              <a:r>
+                <a:rPr kumimoji="0" lang="en-US" sz="1400" b="0" i="1" u="none" strike="noStrike" kern="1200" cap="none" spc="0" normalizeH="0" baseline="0" noProof="0" dirty="0">
+                  <a:ln>
+                    <a:noFill/>
+                  </a:ln>
+                  <a:solidFill>
+                    <a:prstClr val="white"/>
+                  </a:solidFill>
+                  <a:effectLst/>
+                  <a:uLnTx/>
+                  <a:uFillTx/>
+                  <a:latin typeface="Helvetica Neue" panose="02000503000000020004" pitchFamily="2" charset="0"/>
+                  <a:ea typeface="Helvetica Neue" panose="02000503000000020004" pitchFamily="2" charset="0"/>
+                  <a:cs typeface="Helvetica Neue" panose="02000503000000020004" pitchFamily="2" charset="0"/>
+                </a:rPr>
+                <a:t>c</a:t>
+              </a:r>
+              <a:r>
+                <a:rPr kumimoji="0" lang="en-US" sz="980" b="0" i="1" u="none" strike="noStrike" kern="1200" cap="none" spc="0" normalizeH="0" baseline="-25000" noProof="0" dirty="0">
+                  <a:ln>
+                    <a:noFill/>
+                  </a:ln>
+                  <a:solidFill>
+                    <a:prstClr val="white"/>
+                  </a:solidFill>
+                  <a:effectLst/>
+                  <a:uLnTx/>
+                  <a:uFillTx/>
+                  <a:latin typeface="Helvetica Neue" panose="02000503000000020004" pitchFamily="2" charset="0"/>
+                  <a:ea typeface="Helvetica Neue" panose="02000503000000020004" pitchFamily="2" charset="0"/>
+                  <a:cs typeface="Helvetica Neue" panose="02000503000000020004" pitchFamily="2" charset="0"/>
+                </a:rPr>
+                <a:t>f</a:t>
               </a:r>
             </a:p>
           </p:txBody>
@@ -24497,7 +25023,7 @@
           <p:cNvPr id="31" name="TextBox 30">
             <a:extLst>
               <a:ext uri="{FF2B5EF4-FFF2-40B4-BE49-F238E27FC236}">
-                <a16:creationId xmlns:a16="http://schemas.microsoft.com/office/drawing/2014/main" id="{12D2397C-9CE3-3A8A-1558-56A5A0738C36}"/>
+                <ns2:creationId id="{12D2397C-9CE3-3A8A-1558-56A5A0738C36}"/>
               </a:ext>
             </a:extLst>
           </p:cNvPr>
@@ -24555,7 +25081,58 @@
                 <a:ea typeface="Helvetica Neue" panose="02000503000000020004" pitchFamily="2" charset="0"/>
                 <a:cs typeface="Helvetica Neue" panose="02000503000000020004" pitchFamily="2" charset="0"/>
               </a:rPr>
-              <a:t>r = c_f t</a:t>
+              <a:t xml:space="preserve">r = </a:t>
+            </a:r>
+            <a:r>
+              <a:rPr kumimoji="0" lang="en-US" sz="1400" b="0" i="1" u="none" strike="noStrike" kern="1200" cap="none" spc="0" normalizeH="0" baseline="0" noProof="0" dirty="0">
+                <a:ln>
+                  <a:noFill/>
+                </a:ln>
+                <a:solidFill>
+                  <a:srgbClr val="FFC000"/>
+                </a:solidFill>
+                <a:effectLst/>
+                <a:uLnTx/>
+                <a:uFillTx/>
+                <a:latin typeface="Helvetica Neue" panose="02000503000000020004" pitchFamily="2" charset="0"/>
+                <a:ea typeface="Helvetica Neue" panose="02000503000000020004" pitchFamily="2" charset="0"/>
+                <a:cs typeface="Helvetica Neue" panose="02000503000000020004" pitchFamily="2" charset="0"/>
+              </a:rPr>
+              <a:t>c</a:t>
+            </a:r>
+            <a:r>
+              <a:rPr kumimoji="0" lang="en-US" sz="980" b="0" i="1" u="none" strike="noStrike" kern="1200" cap="none" spc="0" normalizeH="0" baseline="-25000" noProof="0" dirty="0">
+                <a:ln>
+                  <a:noFill/>
+                </a:ln>
+                <a:solidFill>
+                  <a:srgbClr val="FFC000"/>
+                </a:solidFill>
+                <a:effectLst/>
+                <a:uLnTx/>
+                <a:uFillTx/>
+                <a:latin typeface="Helvetica Neue" panose="02000503000000020004" pitchFamily="2" charset="0"/>
+                <a:ea typeface="Helvetica Neue" panose="02000503000000020004" pitchFamily="2" charset="0"/>
+                <a:cs typeface="Helvetica Neue" panose="02000503000000020004" pitchFamily="2" charset="0"/>
+              </a:rPr>
+              <a:t>f</a:t>
+            </a:r>
+            <a:r>
+              <a:rPr kumimoji="0" lang="en-US" sz="1400" b="0" i="1" u="none" strike="noStrike" kern="1200" cap="none" spc="0" normalizeH="0" baseline="0" noProof="0" dirty="0">
+                <a:ln>
+                  <a:noFill/>
+                </a:ln>
+                <a:solidFill>
+                  <a:srgbClr val="FFC000"/>
+                </a:solidFill>
+                <a:effectLst/>
+                <a:uLnTx/>
+                <a:uFillTx/>
+                <a:latin typeface="Helvetica Neue" panose="02000503000000020004" pitchFamily="2" charset="0"/>
+                <a:ea typeface="Helvetica Neue" panose="02000503000000020004" pitchFamily="2" charset="0"/>
+                <a:cs typeface="Helvetica Neue" panose="02000503000000020004" pitchFamily="2" charset="0"/>
+              </a:rPr>
+              <a:t xml:space="preserve"> t</a:t>
             </a:r>
           </a:p>
         </p:txBody>
@@ -24565,7 +25142,7 @@
           <p:cNvPr id="36" name="TextBox 35">
             <a:extLst>
               <a:ext uri="{FF2B5EF4-FFF2-40B4-BE49-F238E27FC236}">
-                <a16:creationId xmlns:a16="http://schemas.microsoft.com/office/drawing/2014/main" id="{2FFE4CF6-AAAC-06EA-8AB8-998E05647728}"/>
+                <ns2:creationId id="{2FFE4CF6-AAAC-06EA-8AB8-998E05647728}"/>
               </a:ext>
             </a:extLst>
           </p:cNvPr>
@@ -24647,7 +25224,7 @@
           <p:cNvPr id="22" name="Straight Connector 21">
             <a:extLst>
               <a:ext uri="{FF2B5EF4-FFF2-40B4-BE49-F238E27FC236}">
-                <a16:creationId xmlns:a16="http://schemas.microsoft.com/office/drawing/2014/main" id="{2F9013F0-6C27-F3C3-FDE3-FF0AA12CA620}"/>
+                <ns2:creationId id="{2F9013F0-6C27-F3C3-FDE3-FF0AA12CA620}"/>
               </a:ext>
             </a:extLst>
           </p:cNvPr>
@@ -24690,7 +25267,7 @@
           <p:cNvPr id="15" name="Straight Arrow Connector 14">
             <a:extLst>
               <a:ext uri="{FF2B5EF4-FFF2-40B4-BE49-F238E27FC236}">
-                <a16:creationId xmlns:a16="http://schemas.microsoft.com/office/drawing/2014/main" id="{59CD0CED-2A06-8AB7-8A69-21FAC5EC4A4F}"/>
+                <ns2:creationId id="{59CD0CED-2A06-8AB7-8A69-21FAC5EC4A4F}"/>
               </a:ext>
             </a:extLst>
           </p:cNvPr>
@@ -24736,7 +25313,7 @@
           <p:cNvPr id="32" name="Straight Arrow Connector 31">
             <a:extLst>
               <a:ext uri="{FF2B5EF4-FFF2-40B4-BE49-F238E27FC236}">
-                <a16:creationId xmlns:a16="http://schemas.microsoft.com/office/drawing/2014/main" id="{BCC5A9F1-9339-0CF6-A18E-4B7BE46AB529}"/>
+                <ns2:creationId id="{BCC5A9F1-9339-0CF6-A18E-4B7BE46AB529}"/>
               </a:ext>
             </a:extLst>
           </p:cNvPr>
@@ -24782,7 +25359,7 @@
           <p:cNvPr id="35" name="Straight Arrow Connector 34">
             <a:extLst>
               <a:ext uri="{FF2B5EF4-FFF2-40B4-BE49-F238E27FC236}">
-                <a16:creationId xmlns:a16="http://schemas.microsoft.com/office/drawing/2014/main" id="{8E4A4C4F-C09E-5B89-67FD-259D584337FE}"/>
+                <ns2:creationId id="{8E4A4C4F-C09E-5B89-67FD-259D584337FE}"/>
               </a:ext>
             </a:extLst>
           </p:cNvPr>
@@ -24828,7 +25405,7 @@
           <p:cNvPr id="39" name="Straight Arrow Connector 38">
             <a:extLst>
               <a:ext uri="{FF2B5EF4-FFF2-40B4-BE49-F238E27FC236}">
-                <a16:creationId xmlns:a16="http://schemas.microsoft.com/office/drawing/2014/main" id="{D4742DE8-0901-2B65-C6B7-3A1BE131F28D}"/>
+                <ns2:creationId id="{D4742DE8-0901-2B65-C6B7-3A1BE131F28D}"/>
               </a:ext>
             </a:extLst>
           </p:cNvPr>
@@ -24874,7 +25451,7 @@
           <p:cNvPr id="47" name="Straight Arrow Connector 46">
             <a:extLst>
               <a:ext uri="{FF2B5EF4-FFF2-40B4-BE49-F238E27FC236}">
-                <a16:creationId xmlns:a16="http://schemas.microsoft.com/office/drawing/2014/main" id="{1D9F791F-D5A7-688F-041A-11963370907B}"/>
+                <ns2:creationId id="{1D9F791F-D5A7-688F-041A-11963370907B}"/>
               </a:ext>
             </a:extLst>
           </p:cNvPr>
@@ -24920,7 +25497,7 @@
           <p:cNvPr id="9" name="TextBox 8">
             <a:extLst>
               <a:ext uri="{FF2B5EF4-FFF2-40B4-BE49-F238E27FC236}">
-                <a16:creationId xmlns:a16="http://schemas.microsoft.com/office/drawing/2014/main" id="{349C01A4-7FD7-1FD3-430A-5950B62E2AB0}"/>
+                <ns2:creationId id="{349C01A4-7FD7-1FD3-430A-5950B62E2AB0}"/>
               </a:ext>
             </a:extLst>
           </p:cNvPr>
@@ -25002,7 +25579,7 @@
           <p:cNvPr id="14" name="Rectangle 13">
             <a:extLst>
               <a:ext uri="{FF2B5EF4-FFF2-40B4-BE49-F238E27FC236}">
-                <a16:creationId xmlns:a16="http://schemas.microsoft.com/office/drawing/2014/main" id="{55CC6FCD-E4CC-D5E1-7E8F-917869655222}"/>
+                <ns2:creationId id="{55CC6FCD-E4CC-D5E1-7E8F-917869655222}"/>
               </a:ext>
             </a:extLst>
           </p:cNvPr>
@@ -25061,7 +25638,58 @@
                 <a:ea typeface="Helvetica Neue" panose="02000503000000020004" pitchFamily="2" charset="0"/>
                 <a:cs typeface="Helvetica Neue" panose="02000503000000020004" pitchFamily="2" charset="0"/>
               </a:rPr>
-              <a:t>Wake Speed c_f is a Primitive Constant</a:t>
+              <a:t xml:space="preserve">Wake Speed </a:t>
+            </a:r>
+            <a:r>
+              <a:rPr kumimoji="0" lang="en-US" sz="2000" b="1" i="0" u="none" strike="noStrike" kern="1200" cap="none" spc="0" normalizeH="0" baseline="0" noProof="0" dirty="0">
+                <a:ln>
+                  <a:noFill/>
+                </a:ln>
+                <a:solidFill>
+                  <a:srgbClr val="FF85FF"/>
+                </a:solidFill>
+                <a:effectLst/>
+                <a:uLnTx/>
+                <a:uFillTx/>
+                <a:latin typeface="Helvetica Neue" panose="02000503000000020004" pitchFamily="2" charset="0"/>
+                <a:ea typeface="Helvetica Neue" panose="02000503000000020004" pitchFamily="2" charset="0"/>
+                <a:cs typeface="Helvetica Neue" panose="02000503000000020004" pitchFamily="2" charset="0"/>
+              </a:rPr>
+              <a:t>c</a:t>
+            </a:r>
+            <a:r>
+              <a:rPr kumimoji="0" lang="en-US" sz="1400" b="1" i="0" u="none" strike="noStrike" kern="1200" cap="none" spc="0" normalizeH="0" baseline="-25000" noProof="0" dirty="0">
+                <a:ln>
+                  <a:noFill/>
+                </a:ln>
+                <a:solidFill>
+                  <a:srgbClr val="FF85FF"/>
+                </a:solidFill>
+                <a:effectLst/>
+                <a:uLnTx/>
+                <a:uFillTx/>
+                <a:latin typeface="Helvetica Neue" panose="02000503000000020004" pitchFamily="2" charset="0"/>
+                <a:ea typeface="Helvetica Neue" panose="02000503000000020004" pitchFamily="2" charset="0"/>
+                <a:cs typeface="Helvetica Neue" panose="02000503000000020004" pitchFamily="2" charset="0"/>
+              </a:rPr>
+              <a:t>f</a:t>
+            </a:r>
+            <a:r>
+              <a:rPr kumimoji="0" lang="en-US" sz="2000" b="1" i="0" u="none" strike="noStrike" kern="1200" cap="none" spc="0" normalizeH="0" baseline="0" noProof="0" dirty="0">
+                <a:ln>
+                  <a:noFill/>
+                </a:ln>
+                <a:solidFill>
+                  <a:srgbClr val="FF85FF"/>
+                </a:solidFill>
+                <a:effectLst/>
+                <a:uLnTx/>
+                <a:uFillTx/>
+                <a:latin typeface="Helvetica Neue" panose="02000503000000020004" pitchFamily="2" charset="0"/>
+                <a:ea typeface="Helvetica Neue" panose="02000503000000020004" pitchFamily="2" charset="0"/>
+                <a:cs typeface="Helvetica Neue" panose="02000503000000020004" pitchFamily="2" charset="0"/>
+              </a:rPr>
+              <a:t xml:space="preserve"> is a Primitive Constant</a:t>
             </a:r>
           </a:p>
         </p:txBody>
@@ -25071,7 +25699,7 @@
           <p:cNvPr id="16" name="TextBox 15">
             <a:extLst>
               <a:ext uri="{FF2B5EF4-FFF2-40B4-BE49-F238E27FC236}">
-                <a16:creationId xmlns:a16="http://schemas.microsoft.com/office/drawing/2014/main" id="{165EF7AF-4C2A-3413-7653-A4678D7A12B0}"/>
+                <ns2:creationId id="{165EF7AF-4C2A-3413-7653-A4678D7A12B0}"/>
               </a:ext>
             </a:extLst>
           </p:cNvPr>
@@ -25126,7 +25754,41 @@
                 <a:ea typeface="Helvetica Neue" panose="02000503000000020004" pitchFamily="2" charset="0"/>
                 <a:cs typeface="Helvetica Neue" panose="02000503000000020004" pitchFamily="2" charset="0"/>
               </a:rPr>
-              <a:t>Architrino on Linear Path with Velocity v &lt; c_f</a:t>
+              <a:t xml:space="preserve">Architrino on Linear Path with Velocity v &lt; </a:t>
+            </a:r>
+            <a:r>
+              <a:rPr kumimoji="0" lang="en-US" sz="3200" b="1" i="0" u="none" strike="noStrike" kern="1200" cap="none" spc="0" normalizeH="0" baseline="0" noProof="0" dirty="0">
+                <a:ln>
+                  <a:noFill/>
+                </a:ln>
+                <a:solidFill>
+                  <a:prstClr val="white"/>
+                </a:solidFill>
+                <a:effectLst/>
+                <a:uLnTx/>
+                <a:uFillTx/>
+                <a:latin typeface="Helvetica Neue" panose="02000503000000020004" pitchFamily="2" charset="0"/>
+                <a:ea typeface="Helvetica Neue" panose="02000503000000020004" pitchFamily="2" charset="0"/>
+                <a:cs typeface="Helvetica Neue" panose="02000503000000020004" pitchFamily="2" charset="0"/>
+              </a:rPr>
+              <a:t>c</a:t>
+            </a:r>
+            <a:r>
+              <a:rPr kumimoji="0" lang="en-US" sz="2240" b="1" i="0" u="none" strike="noStrike" kern="1200" cap="none" spc="0" normalizeH="0" baseline="-25000" noProof="0" dirty="0">
+                <a:ln>
+                  <a:noFill/>
+                </a:ln>
+                <a:solidFill>
+                  <a:prstClr val="white"/>
+                </a:solidFill>
+                <a:effectLst/>
+                <a:uLnTx/>
+                <a:uFillTx/>
+                <a:latin typeface="Helvetica Neue" panose="02000503000000020004" pitchFamily="2" charset="0"/>
+                <a:ea typeface="Helvetica Neue" panose="02000503000000020004" pitchFamily="2" charset="0"/>
+                <a:cs typeface="Helvetica Neue" panose="02000503000000020004" pitchFamily="2" charset="0"/>
+              </a:rPr>
+              <a:t>f</a:t>
             </a:r>
           </a:p>
         </p:txBody>
@@ -25136,7 +25798,7 @@
           <p:cNvPr id="17" name="TextBox 16">
             <a:extLst>
               <a:ext uri="{FF2B5EF4-FFF2-40B4-BE49-F238E27FC236}">
-                <a16:creationId xmlns:a16="http://schemas.microsoft.com/office/drawing/2014/main" id="{8221C174-AABC-987E-E052-795F476EAF22}"/>
+                <ns2:creationId id="{8221C174-AABC-987E-E052-795F476EAF22}"/>
               </a:ext>
             </a:extLst>
           </p:cNvPr>
@@ -25263,7 +25925,58 @@
                 <a:ea typeface="Helvetica Neue" panose="02000503000000020004" pitchFamily="2" charset="0"/>
                 <a:cs typeface="Helvetica Neue" panose="02000503000000020004" pitchFamily="2" charset="0"/>
               </a:rPr>
-              <a:t>When v &lt; c_f the architrino does not intercept its own wake, so this is the partner-only regime.</a:t>
+              <a:t xml:space="preserve">When v &lt; </a:t>
+            </a:r>
+            <a:r>
+              <a:rPr kumimoji="0" lang="en-US" sz="1600" b="0" i="0" u="none" strike="noStrike" kern="1200" cap="none" spc="0" normalizeH="0" baseline="0" noProof="0" dirty="0">
+                <a:ln>
+                  <a:noFill/>
+                </a:ln>
+                <a:solidFill>
+                  <a:prstClr val="white"/>
+                </a:solidFill>
+                <a:effectLst/>
+                <a:uLnTx/>
+                <a:uFillTx/>
+                <a:latin typeface="Helvetica Neue" panose="02000503000000020004" pitchFamily="2" charset="0"/>
+                <a:ea typeface="Helvetica Neue" panose="02000503000000020004" pitchFamily="2" charset="0"/>
+                <a:cs typeface="Helvetica Neue" panose="02000503000000020004" pitchFamily="2" charset="0"/>
+              </a:rPr>
+              <a:t>c</a:t>
+            </a:r>
+            <a:r>
+              <a:rPr kumimoji="0" lang="en-US" sz="1120" b="0" i="0" u="none" strike="noStrike" kern="1200" cap="none" spc="0" normalizeH="0" baseline="-25000" noProof="0" dirty="0">
+                <a:ln>
+                  <a:noFill/>
+                </a:ln>
+                <a:solidFill>
+                  <a:prstClr val="white"/>
+                </a:solidFill>
+                <a:effectLst/>
+                <a:uLnTx/>
+                <a:uFillTx/>
+                <a:latin typeface="Helvetica Neue" panose="02000503000000020004" pitchFamily="2" charset="0"/>
+                <a:ea typeface="Helvetica Neue" panose="02000503000000020004" pitchFamily="2" charset="0"/>
+                <a:cs typeface="Helvetica Neue" panose="02000503000000020004" pitchFamily="2" charset="0"/>
+              </a:rPr>
+              <a:t>f</a:t>
+            </a:r>
+            <a:r>
+              <a:rPr kumimoji="0" lang="en-US" sz="1600" b="0" i="0" u="none" strike="noStrike" kern="1200" cap="none" spc="0" normalizeH="0" baseline="0" noProof="0" dirty="0">
+                <a:ln>
+                  <a:noFill/>
+                </a:ln>
+                <a:solidFill>
+                  <a:prstClr val="white"/>
+                </a:solidFill>
+                <a:effectLst/>
+                <a:uLnTx/>
+                <a:uFillTx/>
+                <a:latin typeface="Helvetica Neue" panose="02000503000000020004" pitchFamily="2" charset="0"/>
+                <a:ea typeface="Helvetica Neue" panose="02000503000000020004" pitchFamily="2" charset="0"/>
+                <a:cs typeface="Helvetica Neue" panose="02000503000000020004" pitchFamily="2" charset="0"/>
+              </a:rPr>
+              <a:t xml:space="preserve"> the architrino does not intercept its own wake, so this is the partner-only regime.</a:t>
             </a:r>
           </a:p>
         </p:txBody>
@@ -25271,7 +25984,7 @@
     </p:spTree>
     <p:extLst>
       <p:ext uri="{BB962C8B-B14F-4D97-AF65-F5344CB8AC3E}">
-        <p14:creationId xmlns:p14="http://schemas.microsoft.com/office/powerpoint/2010/main" val="1156335298"/>
+        <ns3:creationId val="1156335298"/>
       </p:ext>
     </p:extLst>
   </p:cSld>
@@ -25282,7 +25995,7 @@
 </file>
 
 <file path=ppt/slides/slide4.xml><?xml version="1.0" encoding="utf-8"?>
-<p:sld xmlns:a="http://schemas.openxmlformats.org/drawingml/2006/main" xmlns:r="http://schemas.openxmlformats.org/officeDocument/2006/relationships" xmlns:p="http://schemas.openxmlformats.org/presentationml/2006/main">
+<p:sld xmlns:a="http://schemas.openxmlformats.org/drawingml/2006/main" xmlns:ns2="http://schemas.microsoft.com/office/drawing/2014/main" xmlns:ns3="http://schemas.microsoft.com/office/powerpoint/2010/main" xmlns:p="http://schemas.openxmlformats.org/presentationml/2006/main">
   <p:cSld>
     <p:bg>
       <p:bgPr>
@@ -25297,7 +26010,7 @@
         <p:cNvPr id="1" name="">
           <a:extLst>
             <a:ext uri="{FF2B5EF4-FFF2-40B4-BE49-F238E27FC236}">
-              <a16:creationId xmlns:a16="http://schemas.microsoft.com/office/drawing/2014/main" id="{14568406-B066-AEBE-C74B-068160974652}"/>
+              <ns2:creationId id="{14568406-B066-AEBE-C74B-068160974652}"/>
             </a:ext>
           </a:extLst>
         </p:cNvPr>
@@ -25317,7 +26030,7 @@
           <p:cNvPr id="5" name="Footer Placeholder 3">
             <a:extLst>
               <a:ext uri="{FF2B5EF4-FFF2-40B4-BE49-F238E27FC236}">
-                <a16:creationId xmlns:a16="http://schemas.microsoft.com/office/drawing/2014/main" id="{27CEA6F2-4AF1-97D8-38AC-41B557BE51CF}"/>
+                <ns2:creationId id="{27CEA6F2-4AF1-97D8-38AC-41B557BE51CF}"/>
               </a:ext>
             </a:extLst>
           </p:cNvPr>
@@ -25479,7 +26192,7 @@
           <p:cNvPr id="6" name="Group 5">
             <a:extLst>
               <a:ext uri="{FF2B5EF4-FFF2-40B4-BE49-F238E27FC236}">
-                <a16:creationId xmlns:a16="http://schemas.microsoft.com/office/drawing/2014/main" id="{C81263DC-661D-BD50-5933-E8227696F8DE}"/>
+                <ns2:creationId id="{C81263DC-661D-BD50-5933-E8227696F8DE}"/>
               </a:ext>
             </a:extLst>
           </p:cNvPr>
@@ -25499,7 +26212,7 @@
             <p:cNvPr id="3" name="Straight Arrow Connector 2">
               <a:extLst>
                 <a:ext uri="{FF2B5EF4-FFF2-40B4-BE49-F238E27FC236}">
-                  <a16:creationId xmlns:a16="http://schemas.microsoft.com/office/drawing/2014/main" id="{8B149F79-E249-261E-9112-BF1D70D76419}"/>
+                  <ns2:creationId id="{8B149F79-E249-261E-9112-BF1D70D76419}"/>
                 </a:ext>
               </a:extLst>
             </p:cNvPr>
@@ -25543,7 +26256,7 @@
             <p:cNvPr id="8" name="Straight Arrow Connector 7">
               <a:extLst>
                 <a:ext uri="{FF2B5EF4-FFF2-40B4-BE49-F238E27FC236}">
-                  <a16:creationId xmlns:a16="http://schemas.microsoft.com/office/drawing/2014/main" id="{259C9B9C-0329-E856-17CB-C966D0778D39}"/>
+                  <ns2:creationId id="{259C9B9C-0329-E856-17CB-C966D0778D39}"/>
                 </a:ext>
               </a:extLst>
             </p:cNvPr>
@@ -25587,7 +26300,7 @@
             <p:cNvPr id="12" name="TextBox 11">
               <a:extLst>
                 <a:ext uri="{FF2B5EF4-FFF2-40B4-BE49-F238E27FC236}">
-                  <a16:creationId xmlns:a16="http://schemas.microsoft.com/office/drawing/2014/main" id="{7C27133D-1A03-8C4F-53C4-564B9AE5C189}"/>
+                  <ns2:creationId id="{7C27133D-1A03-8C4F-53C4-564B9AE5C189}"/>
                 </a:ext>
               </a:extLst>
             </p:cNvPr>
@@ -25652,7 +26365,7 @@
             <p:cNvPr id="13" name="TextBox 12">
               <a:extLst>
                 <a:ext uri="{FF2B5EF4-FFF2-40B4-BE49-F238E27FC236}">
-                  <a16:creationId xmlns:a16="http://schemas.microsoft.com/office/drawing/2014/main" id="{0F3C3A2E-72E6-5B26-7E8C-2A2E59D8C3F6}"/>
+                  <ns2:creationId id="{0F3C3A2E-72E6-5B26-7E8C-2A2E59D8C3F6}"/>
                 </a:ext>
               </a:extLst>
             </p:cNvPr>
@@ -25754,7 +26467,7 @@
           <p:cNvPr id="23" name="Oval 22">
             <a:extLst>
               <a:ext uri="{FF2B5EF4-FFF2-40B4-BE49-F238E27FC236}">
-                <a16:creationId xmlns:a16="http://schemas.microsoft.com/office/drawing/2014/main" id="{F069ACCF-49B1-2004-B9BA-C32EA1E82492}"/>
+                <ns2:creationId id="{F069ACCF-49B1-2004-B9BA-C32EA1E82492}"/>
               </a:ext>
             </a:extLst>
           </p:cNvPr>
@@ -25838,7 +26551,7 @@
           <p:cNvPr id="27" name="Oval 26">
             <a:extLst>
               <a:ext uri="{FF2B5EF4-FFF2-40B4-BE49-F238E27FC236}">
-                <a16:creationId xmlns:a16="http://schemas.microsoft.com/office/drawing/2014/main" id="{A2120CF2-66F6-E863-1722-E1EBC99EB320}"/>
+                <ns2:creationId id="{A2120CF2-66F6-E863-1722-E1EBC99EB320}"/>
               </a:ext>
             </a:extLst>
           </p:cNvPr>
@@ -25922,7 +26635,7 @@
           <p:cNvPr id="28" name="Oval 27">
             <a:extLst>
               <a:ext uri="{FF2B5EF4-FFF2-40B4-BE49-F238E27FC236}">
-                <a16:creationId xmlns:a16="http://schemas.microsoft.com/office/drawing/2014/main" id="{2CF23E24-ED96-772A-8248-1491441DB146}"/>
+                <ns2:creationId id="{2CF23E24-ED96-772A-8248-1491441DB146}"/>
               </a:ext>
             </a:extLst>
           </p:cNvPr>
@@ -26006,7 +26719,7 @@
           <p:cNvPr id="29" name="Oval 28">
             <a:extLst>
               <a:ext uri="{FF2B5EF4-FFF2-40B4-BE49-F238E27FC236}">
-                <a16:creationId xmlns:a16="http://schemas.microsoft.com/office/drawing/2014/main" id="{25A0A0B3-E20A-4CC2-79D9-E97020D601A7}"/>
+                <ns2:creationId id="{25A0A0B3-E20A-4CC2-79D9-E97020D601A7}"/>
               </a:ext>
             </a:extLst>
           </p:cNvPr>
@@ -26090,7 +26803,7 @@
           <p:cNvPr id="30" name="Oval 29">
             <a:extLst>
               <a:ext uri="{FF2B5EF4-FFF2-40B4-BE49-F238E27FC236}">
-                <a16:creationId xmlns:a16="http://schemas.microsoft.com/office/drawing/2014/main" id="{7969DEBF-EEB6-634C-020A-385E24FBF8E1}"/>
+                <ns2:creationId id="{7969DEBF-EEB6-634C-020A-385E24FBF8E1}"/>
               </a:ext>
             </a:extLst>
           </p:cNvPr>
@@ -26174,7 +26887,7 @@
           <p:cNvPr id="4" name="Straight Connector 3">
             <a:extLst>
               <a:ext uri="{FF2B5EF4-FFF2-40B4-BE49-F238E27FC236}">
-                <a16:creationId xmlns:a16="http://schemas.microsoft.com/office/drawing/2014/main" id="{2C66513A-9085-17C4-C9C2-3742BE2C33D7}"/>
+                <ns2:creationId id="{2C66513A-9085-17C4-C9C2-3742BE2C33D7}"/>
               </a:ext>
             </a:extLst>
           </p:cNvPr>
@@ -26217,7 +26930,7 @@
           <p:cNvPr id="18" name="Oval 17">
             <a:extLst>
               <a:ext uri="{FF2B5EF4-FFF2-40B4-BE49-F238E27FC236}">
-                <a16:creationId xmlns:a16="http://schemas.microsoft.com/office/drawing/2014/main" id="{9E30E225-012D-EE67-96E9-8843E769C6E1}"/>
+                <ns2:creationId id="{9E30E225-012D-EE67-96E9-8843E769C6E1}"/>
               </a:ext>
             </a:extLst>
           </p:cNvPr>
@@ -26300,7 +27013,7 @@
           <p:cNvPr id="11" name="Group 10">
             <a:extLst>
               <a:ext uri="{FF2B5EF4-FFF2-40B4-BE49-F238E27FC236}">
-                <a16:creationId xmlns:a16="http://schemas.microsoft.com/office/drawing/2014/main" id="{CE7A3B85-FDA3-45E2-9BB3-D32BED764091}"/>
+                <ns2:creationId id="{CE7A3B85-FDA3-45E2-9BB3-D32BED764091}"/>
               </a:ext>
             </a:extLst>
           </p:cNvPr>
@@ -26320,7 +27033,7 @@
             <p:cNvPr id="24" name="Straight Arrow Connector 23">
               <a:extLst>
                 <a:ext uri="{FF2B5EF4-FFF2-40B4-BE49-F238E27FC236}">
-                  <a16:creationId xmlns:a16="http://schemas.microsoft.com/office/drawing/2014/main" id="{5AAF8464-4AF0-1ED4-EC84-883D9DCBAE2E}"/>
+                  <ns2:creationId id="{5AAF8464-4AF0-1ED4-EC84-883D9DCBAE2E}"/>
                 </a:ext>
               </a:extLst>
             </p:cNvPr>
@@ -26365,7 +27078,7 @@
             <p:cNvPr id="10" name="TextBox 9">
               <a:extLst>
                 <a:ext uri="{FF2B5EF4-FFF2-40B4-BE49-F238E27FC236}">
-                  <a16:creationId xmlns:a16="http://schemas.microsoft.com/office/drawing/2014/main" id="{D4526506-8D04-242E-625D-A7D78BFFEE82}"/>
+                  <ns2:creationId id="{D4526506-8D04-242E-625D-A7D78BFFEE82}"/>
                 </a:ext>
               </a:extLst>
             </p:cNvPr>
@@ -26420,7 +27133,41 @@
                   <a:ea typeface="Helvetica Neue" panose="02000503000000020004" pitchFamily="2" charset="0"/>
                   <a:cs typeface="Helvetica Neue" panose="02000503000000020004" pitchFamily="2" charset="0"/>
                 </a:rPr>
-                <a:t>v &lt; c_f</a:t>
+                <a:t xml:space="preserve">v &lt; </a:t>
+              </a:r>
+              <a:r>
+                <a:rPr kumimoji="0" lang="en-US" sz="1400" b="0" i="1" u="none" strike="noStrike" kern="1200" cap="none" spc="0" normalizeH="0" baseline="0" noProof="0" dirty="0">
+                  <a:ln>
+                    <a:noFill/>
+                  </a:ln>
+                  <a:solidFill>
+                    <a:prstClr val="white"/>
+                  </a:solidFill>
+                  <a:effectLst/>
+                  <a:uLnTx/>
+                  <a:uFillTx/>
+                  <a:latin typeface="Helvetica Neue" panose="02000503000000020004" pitchFamily="2" charset="0"/>
+                  <a:ea typeface="Helvetica Neue" panose="02000503000000020004" pitchFamily="2" charset="0"/>
+                  <a:cs typeface="Helvetica Neue" panose="02000503000000020004" pitchFamily="2" charset="0"/>
+                </a:rPr>
+                <a:t>c</a:t>
+              </a:r>
+              <a:r>
+                <a:rPr kumimoji="0" lang="en-US" sz="980" b="0" i="1" u="none" strike="noStrike" kern="1200" cap="none" spc="0" normalizeH="0" baseline="-25000" noProof="0" dirty="0">
+                  <a:ln>
+                    <a:noFill/>
+                  </a:ln>
+                  <a:solidFill>
+                    <a:prstClr val="white"/>
+                  </a:solidFill>
+                  <a:effectLst/>
+                  <a:uLnTx/>
+                  <a:uFillTx/>
+                  <a:latin typeface="Helvetica Neue" panose="02000503000000020004" pitchFamily="2" charset="0"/>
+                  <a:ea typeface="Helvetica Neue" panose="02000503000000020004" pitchFamily="2" charset="0"/>
+                  <a:cs typeface="Helvetica Neue" panose="02000503000000020004" pitchFamily="2" charset="0"/>
+                </a:rPr>
+                <a:t>f</a:t>
               </a:r>
             </a:p>
           </p:txBody>
@@ -26431,7 +27178,7 @@
           <p:cNvPr id="31" name="TextBox 30">
             <a:extLst>
               <a:ext uri="{FF2B5EF4-FFF2-40B4-BE49-F238E27FC236}">
-                <a16:creationId xmlns:a16="http://schemas.microsoft.com/office/drawing/2014/main" id="{0715B65B-EE48-6433-EFA6-8AFF4BF52B13}"/>
+                <ns2:creationId id="{0715B65B-EE48-6433-EFA6-8AFF4BF52B13}"/>
               </a:ext>
             </a:extLst>
           </p:cNvPr>
@@ -26489,7 +27236,58 @@
                 <a:ea typeface="Helvetica Neue" panose="02000503000000020004" pitchFamily="2" charset="0"/>
                 <a:cs typeface="Helvetica Neue" panose="02000503000000020004" pitchFamily="2" charset="0"/>
               </a:rPr>
-              <a:t>r = c_f t</a:t>
+              <a:t xml:space="preserve">r = </a:t>
+            </a:r>
+            <a:r>
+              <a:rPr kumimoji="0" lang="en-US" sz="1400" b="0" i="1" u="none" strike="noStrike" kern="1200" cap="none" spc="0" normalizeH="0" baseline="0" noProof="0" dirty="0">
+                <a:ln>
+                  <a:noFill/>
+                </a:ln>
+                <a:solidFill>
+                  <a:srgbClr val="FFC000"/>
+                </a:solidFill>
+                <a:effectLst/>
+                <a:uLnTx/>
+                <a:uFillTx/>
+                <a:latin typeface="Helvetica Neue" panose="02000503000000020004" pitchFamily="2" charset="0"/>
+                <a:ea typeface="Helvetica Neue" panose="02000503000000020004" pitchFamily="2" charset="0"/>
+                <a:cs typeface="Helvetica Neue" panose="02000503000000020004" pitchFamily="2" charset="0"/>
+              </a:rPr>
+              <a:t>c</a:t>
+            </a:r>
+            <a:r>
+              <a:rPr kumimoji="0" lang="en-US" sz="980" b="0" i="1" u="none" strike="noStrike" kern="1200" cap="none" spc="0" normalizeH="0" baseline="-25000" noProof="0" dirty="0">
+                <a:ln>
+                  <a:noFill/>
+                </a:ln>
+                <a:solidFill>
+                  <a:srgbClr val="FFC000"/>
+                </a:solidFill>
+                <a:effectLst/>
+                <a:uLnTx/>
+                <a:uFillTx/>
+                <a:latin typeface="Helvetica Neue" panose="02000503000000020004" pitchFamily="2" charset="0"/>
+                <a:ea typeface="Helvetica Neue" panose="02000503000000020004" pitchFamily="2" charset="0"/>
+                <a:cs typeface="Helvetica Neue" panose="02000503000000020004" pitchFamily="2" charset="0"/>
+              </a:rPr>
+              <a:t>f</a:t>
+            </a:r>
+            <a:r>
+              <a:rPr kumimoji="0" lang="en-US" sz="1400" b="0" i="1" u="none" strike="noStrike" kern="1200" cap="none" spc="0" normalizeH="0" baseline="0" noProof="0" dirty="0">
+                <a:ln>
+                  <a:noFill/>
+                </a:ln>
+                <a:solidFill>
+                  <a:srgbClr val="FFC000"/>
+                </a:solidFill>
+                <a:effectLst/>
+                <a:uLnTx/>
+                <a:uFillTx/>
+                <a:latin typeface="Helvetica Neue" panose="02000503000000020004" pitchFamily="2" charset="0"/>
+                <a:ea typeface="Helvetica Neue" panose="02000503000000020004" pitchFamily="2" charset="0"/>
+                <a:cs typeface="Helvetica Neue" panose="02000503000000020004" pitchFamily="2" charset="0"/>
+              </a:rPr>
+              <a:t xml:space="preserve"> t</a:t>
             </a:r>
           </a:p>
         </p:txBody>
@@ -26499,7 +27297,7 @@
           <p:cNvPr id="36" name="TextBox 35">
             <a:extLst>
               <a:ext uri="{FF2B5EF4-FFF2-40B4-BE49-F238E27FC236}">
-                <a16:creationId xmlns:a16="http://schemas.microsoft.com/office/drawing/2014/main" id="{2639C71E-8510-A47A-CB6E-BD88DBD2D9D2}"/>
+                <ns2:creationId id="{2639C71E-8510-A47A-CB6E-BD88DBD2D9D2}"/>
               </a:ext>
             </a:extLst>
           </p:cNvPr>
@@ -26581,7 +27379,7 @@
           <p:cNvPr id="22" name="Straight Connector 21">
             <a:extLst>
               <a:ext uri="{FF2B5EF4-FFF2-40B4-BE49-F238E27FC236}">
-                <a16:creationId xmlns:a16="http://schemas.microsoft.com/office/drawing/2014/main" id="{48D6CF27-A191-E604-D02B-B71D144C595B}"/>
+                <ns2:creationId id="{48D6CF27-A191-E604-D02B-B71D144C595B}"/>
               </a:ext>
             </a:extLst>
           </p:cNvPr>
@@ -26624,7 +27422,7 @@
           <p:cNvPr id="2" name="Title 1">
             <a:extLst>
               <a:ext uri="{FF2B5EF4-FFF2-40B4-BE49-F238E27FC236}">
-                <a16:creationId xmlns:a16="http://schemas.microsoft.com/office/drawing/2014/main" id="{62407ED0-1A7F-69F0-224E-34E3BAB4AEB7}"/>
+                <ns2:creationId id="{62407ED0-1A7F-69F0-224E-34E3BAB4AEB7}"/>
               </a:ext>
             </a:extLst>
           </p:cNvPr>
@@ -26698,7 +27496,41 @@
                 <a:ea typeface="Helvetica Neue" panose="02000503000000020004" pitchFamily="2" charset="0"/>
                 <a:cs typeface="Helvetica Neue" panose="02000503000000020004" pitchFamily="2" charset="0"/>
               </a:rPr>
-              <a:t>Causal Wake Surfaces Expand at v = c_f</a:t>
+              <a:t xml:space="preserve">Causal Wake Surfaces Expand at v = </a:t>
+            </a:r>
+            <a:r>
+              <a:rPr kumimoji="0" lang="en-US" sz="3600" b="1" i="0" u="none" strike="noStrike" kern="1200" cap="none" spc="0" normalizeH="0" baseline="0" noProof="0" dirty="0">
+                <a:ln>
+                  <a:noFill/>
+                </a:ln>
+                <a:solidFill>
+                  <a:prstClr val="white"/>
+                </a:solidFill>
+                <a:effectLst/>
+                <a:uLnTx/>
+                <a:uFillTx/>
+                <a:latin typeface="Helvetica Neue" panose="02000503000000020004" pitchFamily="2" charset="0"/>
+                <a:ea typeface="Helvetica Neue" panose="02000503000000020004" pitchFamily="2" charset="0"/>
+                <a:cs typeface="Helvetica Neue" panose="02000503000000020004" pitchFamily="2" charset="0"/>
+              </a:rPr>
+              <a:t>c</a:t>
+            </a:r>
+            <a:r>
+              <a:rPr kumimoji="0" lang="en-US" sz="2520" b="1" i="0" u="none" strike="noStrike" kern="1200" cap="none" spc="0" normalizeH="0" baseline="-25000" noProof="0" dirty="0">
+                <a:ln>
+                  <a:noFill/>
+                </a:ln>
+                <a:solidFill>
+                  <a:prstClr val="white"/>
+                </a:solidFill>
+                <a:effectLst/>
+                <a:uLnTx/>
+                <a:uFillTx/>
+                <a:latin typeface="Helvetica Neue" panose="02000503000000020004" pitchFamily="2" charset="0"/>
+                <a:ea typeface="Helvetica Neue" panose="02000503000000020004" pitchFamily="2" charset="0"/>
+                <a:cs typeface="Helvetica Neue" panose="02000503000000020004" pitchFamily="2" charset="0"/>
+              </a:rPr>
+              <a:t>f</a:t>
             </a:r>
           </a:p>
         </p:txBody>
@@ -26708,7 +27540,7 @@
           <p:cNvPr id="7" name="Rectangle 6">
             <a:extLst>
               <a:ext uri="{FF2B5EF4-FFF2-40B4-BE49-F238E27FC236}">
-                <a16:creationId xmlns:a16="http://schemas.microsoft.com/office/drawing/2014/main" id="{E63833BB-E257-5DD8-D2DC-4EDC10C1D9B0}"/>
+                <ns2:creationId id="{E63833BB-E257-5DD8-D2DC-4EDC10C1D9B0}"/>
               </a:ext>
             </a:extLst>
           </p:cNvPr>
@@ -26772,7 +27604,7 @@
           <p:cNvPr id="15" name="Straight Arrow Connector 14">
             <a:extLst>
               <a:ext uri="{FF2B5EF4-FFF2-40B4-BE49-F238E27FC236}">
-                <a16:creationId xmlns:a16="http://schemas.microsoft.com/office/drawing/2014/main" id="{F4A7F80E-6EB4-D3A1-C496-DA676D8B14B8}"/>
+                <ns2:creationId id="{F4A7F80E-6EB4-D3A1-C496-DA676D8B14B8}"/>
               </a:ext>
             </a:extLst>
           </p:cNvPr>
@@ -26818,7 +27650,7 @@
           <p:cNvPr id="32" name="Straight Arrow Connector 31">
             <a:extLst>
               <a:ext uri="{FF2B5EF4-FFF2-40B4-BE49-F238E27FC236}">
-                <a16:creationId xmlns:a16="http://schemas.microsoft.com/office/drawing/2014/main" id="{E4BBFD59-613F-87DB-D8CE-C4CD0658E65A}"/>
+                <ns2:creationId id="{E4BBFD59-613F-87DB-D8CE-C4CD0658E65A}"/>
               </a:ext>
             </a:extLst>
           </p:cNvPr>
@@ -26864,7 +27696,7 @@
           <p:cNvPr id="35" name="Straight Arrow Connector 34">
             <a:extLst>
               <a:ext uri="{FF2B5EF4-FFF2-40B4-BE49-F238E27FC236}">
-                <a16:creationId xmlns:a16="http://schemas.microsoft.com/office/drawing/2014/main" id="{6170C482-A85C-519C-1C68-E52F3D321552}"/>
+                <ns2:creationId id="{6170C482-A85C-519C-1C68-E52F3D321552}"/>
               </a:ext>
             </a:extLst>
           </p:cNvPr>
@@ -26910,7 +27742,7 @@
           <p:cNvPr id="39" name="Straight Arrow Connector 38">
             <a:extLst>
               <a:ext uri="{FF2B5EF4-FFF2-40B4-BE49-F238E27FC236}">
-                <a16:creationId xmlns:a16="http://schemas.microsoft.com/office/drawing/2014/main" id="{4230761A-8EDF-2FA3-7DBE-AF384628B09E}"/>
+                <ns2:creationId id="{4230761A-8EDF-2FA3-7DBE-AF384628B09E}"/>
               </a:ext>
             </a:extLst>
           </p:cNvPr>
@@ -26956,7 +27788,7 @@
           <p:cNvPr id="47" name="Straight Arrow Connector 46">
             <a:extLst>
               <a:ext uri="{FF2B5EF4-FFF2-40B4-BE49-F238E27FC236}">
-                <a16:creationId xmlns:a16="http://schemas.microsoft.com/office/drawing/2014/main" id="{D3EF506B-E81E-4405-B45C-DFB8F9DA0D65}"/>
+                <ns2:creationId id="{D3EF506B-E81E-4405-B45C-DFB8F9DA0D65}"/>
               </a:ext>
             </a:extLst>
           </p:cNvPr>
@@ -27002,7 +27834,7 @@
           <p:cNvPr id="9" name="TextBox 8">
             <a:extLst>
               <a:ext uri="{FF2B5EF4-FFF2-40B4-BE49-F238E27FC236}">
-                <a16:creationId xmlns:a16="http://schemas.microsoft.com/office/drawing/2014/main" id="{9B5DCDDF-276B-4F6E-7066-014AE9A59CCC}"/>
+                <ns2:creationId id="{9B5DCDDF-276B-4F6E-7066-014AE9A59CCC}"/>
               </a:ext>
             </a:extLst>
           </p:cNvPr>
@@ -27084,7 +27916,7 @@
           <p:cNvPr id="14" name="Rectangle 13">
             <a:extLst>
               <a:ext uri="{FF2B5EF4-FFF2-40B4-BE49-F238E27FC236}">
-                <a16:creationId xmlns:a16="http://schemas.microsoft.com/office/drawing/2014/main" id="{99560D5F-868F-8968-4ED0-12355714D7FF}"/>
+                <ns2:creationId id="{99560D5F-868F-8968-4ED0-12355714D7FF}"/>
               </a:ext>
             </a:extLst>
           </p:cNvPr>
@@ -27185,7 +28017,7 @@
     </p:spTree>
     <p:extLst>
       <p:ext uri="{BB962C8B-B14F-4D97-AF65-F5344CB8AC3E}">
-        <p14:creationId xmlns:p14="http://schemas.microsoft.com/office/powerpoint/2010/main" val="3801198229"/>
+        <ns3:creationId val="3801198229"/>
       </p:ext>
     </p:extLst>
   </p:cSld>
@@ -27196,7 +28028,7 @@
 </file>
 
 <file path=ppt/slides/slide5.xml><?xml version="1.0" encoding="utf-8"?>
-<p:sld xmlns:a="http://schemas.openxmlformats.org/drawingml/2006/main" xmlns:r="http://schemas.openxmlformats.org/officeDocument/2006/relationships" xmlns:p="http://schemas.openxmlformats.org/presentationml/2006/main">
+<p:sld xmlns:a="http://schemas.openxmlformats.org/drawingml/2006/main" xmlns:ns2="http://schemas.microsoft.com/office/drawing/2014/main" xmlns:ns3="http://schemas.microsoft.com/office/powerpoint/2010/main" xmlns:p="http://schemas.openxmlformats.org/presentationml/2006/main">
   <p:cSld>
     <p:bg>
       <p:bgPr>
@@ -27225,7 +28057,7 @@
           <p:cNvPr id="5" name="Footer Placeholder 3">
             <a:extLst>
               <a:ext uri="{FF2B5EF4-FFF2-40B4-BE49-F238E27FC236}">
-                <a16:creationId xmlns:a16="http://schemas.microsoft.com/office/drawing/2014/main" id="{668F77D6-DFDA-5A46-8DF1-47F6A167C2B1}"/>
+                <ns2:creationId id="{668F77D6-DFDA-5A46-8DF1-47F6A167C2B1}"/>
               </a:ext>
             </a:extLst>
           </p:cNvPr>
@@ -27387,7 +28219,7 @@
           <p:cNvPr id="3" name="Straight Arrow Connector 2">
             <a:extLst>
               <a:ext uri="{FF2B5EF4-FFF2-40B4-BE49-F238E27FC236}">
-                <a16:creationId xmlns:a16="http://schemas.microsoft.com/office/drawing/2014/main" id="{2EF0199F-22F4-BA42-9B75-8A8183BCDA9B}"/>
+                <ns2:creationId id="{2EF0199F-22F4-BA42-9B75-8A8183BCDA9B}"/>
               </a:ext>
             </a:extLst>
           </p:cNvPr>
@@ -27431,7 +28263,7 @@
           <p:cNvPr id="8" name="Straight Arrow Connector 7">
             <a:extLst>
               <a:ext uri="{FF2B5EF4-FFF2-40B4-BE49-F238E27FC236}">
-                <a16:creationId xmlns:a16="http://schemas.microsoft.com/office/drawing/2014/main" id="{49AB5343-55D0-6041-8627-E08A73F83930}"/>
+                <ns2:creationId id="{49AB5343-55D0-6041-8627-E08A73F83930}"/>
               </a:ext>
             </a:extLst>
           </p:cNvPr>
@@ -27475,7 +28307,7 @@
           <p:cNvPr id="12" name="TextBox 11">
             <a:extLst>
               <a:ext uri="{FF2B5EF4-FFF2-40B4-BE49-F238E27FC236}">
-                <a16:creationId xmlns:a16="http://schemas.microsoft.com/office/drawing/2014/main" id="{BF8D86A2-D083-024A-BC90-6BD938C23243}"/>
+                <ns2:creationId id="{BF8D86A2-D083-024A-BC90-6BD938C23243}"/>
               </a:ext>
             </a:extLst>
           </p:cNvPr>
@@ -27540,7 +28372,7 @@
           <p:cNvPr id="13" name="TextBox 12">
             <a:extLst>
               <a:ext uri="{FF2B5EF4-FFF2-40B4-BE49-F238E27FC236}">
-                <a16:creationId xmlns:a16="http://schemas.microsoft.com/office/drawing/2014/main" id="{2C3F4604-6C2F-0E4E-9DD3-4F5C89FF51AB}"/>
+                <ns2:creationId id="{2C3F4604-6C2F-0E4E-9DD3-4F5C89FF51AB}"/>
               </a:ext>
             </a:extLst>
           </p:cNvPr>
@@ -27641,7 +28473,7 @@
           <p:cNvPr id="23" name="Oval 22">
             <a:extLst>
               <a:ext uri="{FF2B5EF4-FFF2-40B4-BE49-F238E27FC236}">
-                <a16:creationId xmlns:a16="http://schemas.microsoft.com/office/drawing/2014/main" id="{0112617B-A1D5-1E41-BF92-E67D4E046E39}"/>
+                <ns2:creationId id="{0112617B-A1D5-1E41-BF92-E67D4E046E39}"/>
               </a:ext>
             </a:extLst>
           </p:cNvPr>
@@ -27725,7 +28557,7 @@
           <p:cNvPr id="27" name="Oval 26">
             <a:extLst>
               <a:ext uri="{FF2B5EF4-FFF2-40B4-BE49-F238E27FC236}">
-                <a16:creationId xmlns:a16="http://schemas.microsoft.com/office/drawing/2014/main" id="{6EF0F7DA-5E70-8348-A200-F59A10FF7C55}"/>
+                <ns2:creationId id="{6EF0F7DA-5E70-8348-A200-F59A10FF7C55}"/>
               </a:ext>
             </a:extLst>
           </p:cNvPr>
@@ -27809,7 +28641,7 @@
           <p:cNvPr id="28" name="Oval 27">
             <a:extLst>
               <a:ext uri="{FF2B5EF4-FFF2-40B4-BE49-F238E27FC236}">
-                <a16:creationId xmlns:a16="http://schemas.microsoft.com/office/drawing/2014/main" id="{552F58D0-F613-674A-B294-C894E5FB1683}"/>
+                <ns2:creationId id="{552F58D0-F613-674A-B294-C894E5FB1683}"/>
               </a:ext>
             </a:extLst>
           </p:cNvPr>
@@ -27893,7 +28725,7 @@
           <p:cNvPr id="29" name="Oval 28">
             <a:extLst>
               <a:ext uri="{FF2B5EF4-FFF2-40B4-BE49-F238E27FC236}">
-                <a16:creationId xmlns:a16="http://schemas.microsoft.com/office/drawing/2014/main" id="{9CA7A721-D3BD-744E-9306-85BBED5F74BC}"/>
+                <ns2:creationId id="{9CA7A721-D3BD-744E-9306-85BBED5F74BC}"/>
               </a:ext>
             </a:extLst>
           </p:cNvPr>
@@ -27977,7 +28809,7 @@
           <p:cNvPr id="30" name="Oval 29">
             <a:extLst>
               <a:ext uri="{FF2B5EF4-FFF2-40B4-BE49-F238E27FC236}">
-                <a16:creationId xmlns:a16="http://schemas.microsoft.com/office/drawing/2014/main" id="{F97F1A02-C0C7-3C45-9790-847C152D159A}"/>
+                <ns2:creationId id="{F97F1A02-C0C7-3C45-9790-847C152D159A}"/>
               </a:ext>
             </a:extLst>
           </p:cNvPr>
@@ -28061,7 +28893,7 @@
           <p:cNvPr id="4" name="Straight Connector 3">
             <a:extLst>
               <a:ext uri="{FF2B5EF4-FFF2-40B4-BE49-F238E27FC236}">
-                <a16:creationId xmlns:a16="http://schemas.microsoft.com/office/drawing/2014/main" id="{9890CC23-4ADC-D744-AF2D-1C8A936F07FC}"/>
+                <ns2:creationId id="{9890CC23-4ADC-D744-AF2D-1C8A936F07FC}"/>
               </a:ext>
             </a:extLst>
           </p:cNvPr>
@@ -28104,7 +28936,7 @@
           <p:cNvPr id="18" name="Oval 17">
             <a:extLst>
               <a:ext uri="{FF2B5EF4-FFF2-40B4-BE49-F238E27FC236}">
-                <a16:creationId xmlns:a16="http://schemas.microsoft.com/office/drawing/2014/main" id="{BE4CDC90-4B2E-BE41-BB9D-A84675F3A2FE}"/>
+                <ns2:creationId id="{BE4CDC90-4B2E-BE41-BB9D-A84675F3A2FE}"/>
               </a:ext>
             </a:extLst>
           </p:cNvPr>
@@ -28187,7 +29019,7 @@
           <p:cNvPr id="11" name="Group 10">
             <a:extLst>
               <a:ext uri="{FF2B5EF4-FFF2-40B4-BE49-F238E27FC236}">
-                <a16:creationId xmlns:a16="http://schemas.microsoft.com/office/drawing/2014/main" id="{33483591-0E05-544C-B822-43CF81B12E63}"/>
+                <ns2:creationId id="{33483591-0E05-544C-B822-43CF81B12E63}"/>
               </a:ext>
             </a:extLst>
           </p:cNvPr>
@@ -28207,7 +29039,7 @@
             <p:cNvPr id="24" name="Straight Arrow Connector 23">
               <a:extLst>
                 <a:ext uri="{FF2B5EF4-FFF2-40B4-BE49-F238E27FC236}">
-                  <a16:creationId xmlns:a16="http://schemas.microsoft.com/office/drawing/2014/main" id="{7BCF22C9-C9AE-324D-B157-A9536FCAF3B6}"/>
+                  <ns2:creationId id="{7BCF22C9-C9AE-324D-B157-A9536FCAF3B6}"/>
                 </a:ext>
               </a:extLst>
             </p:cNvPr>
@@ -28252,7 +29084,7 @@
             <p:cNvPr id="10" name="TextBox 9">
               <a:extLst>
                 <a:ext uri="{FF2B5EF4-FFF2-40B4-BE49-F238E27FC236}">
-                  <a16:creationId xmlns:a16="http://schemas.microsoft.com/office/drawing/2014/main" id="{01A59953-657F-C641-8F36-E48E8EDB0DF1}"/>
+                  <ns2:creationId id="{01A59953-657F-C641-8F36-E48E8EDB0DF1}"/>
                 </a:ext>
               </a:extLst>
             </p:cNvPr>
@@ -28307,7 +29139,41 @@
                   <a:ea typeface="Helvetica Neue" panose="02000503000000020004" pitchFamily="2" charset="0"/>
                   <a:cs typeface="Helvetica Neue" panose="02000503000000020004" pitchFamily="2" charset="0"/>
                 </a:rPr>
-                <a:t>v &lt; c_f</a:t>
+                <a:t xml:space="preserve">v &lt; </a:t>
+              </a:r>
+              <a:r>
+                <a:rPr kumimoji="0" lang="en-US" sz="1400" b="0" i="1" u="none" strike="noStrike" kern="1200" cap="none" spc="0" normalizeH="0" baseline="0" noProof="0" dirty="0">
+                  <a:ln>
+                    <a:noFill/>
+                  </a:ln>
+                  <a:solidFill>
+                    <a:prstClr val="white"/>
+                  </a:solidFill>
+                  <a:effectLst/>
+                  <a:uLnTx/>
+                  <a:uFillTx/>
+                  <a:latin typeface="Helvetica Neue" panose="02000503000000020004" pitchFamily="2" charset="0"/>
+                  <a:ea typeface="Helvetica Neue" panose="02000503000000020004" pitchFamily="2" charset="0"/>
+                  <a:cs typeface="Helvetica Neue" panose="02000503000000020004" pitchFamily="2" charset="0"/>
+                </a:rPr>
+                <a:t>c</a:t>
+              </a:r>
+              <a:r>
+                <a:rPr kumimoji="0" lang="en-US" sz="980" b="0" i="1" u="none" strike="noStrike" kern="1200" cap="none" spc="0" normalizeH="0" baseline="-25000" noProof="0" dirty="0">
+                  <a:ln>
+                    <a:noFill/>
+                  </a:ln>
+                  <a:solidFill>
+                    <a:prstClr val="white"/>
+                  </a:solidFill>
+                  <a:effectLst/>
+                  <a:uLnTx/>
+                  <a:uFillTx/>
+                  <a:latin typeface="Helvetica Neue" panose="02000503000000020004" pitchFamily="2" charset="0"/>
+                  <a:ea typeface="Helvetica Neue" panose="02000503000000020004" pitchFamily="2" charset="0"/>
+                  <a:cs typeface="Helvetica Neue" panose="02000503000000020004" pitchFamily="2" charset="0"/>
+                </a:rPr>
+                <a:t>f</a:t>
               </a:r>
             </a:p>
           </p:txBody>
@@ -28318,7 +29184,7 @@
           <p:cNvPr id="31" name="TextBox 30">
             <a:extLst>
               <a:ext uri="{FF2B5EF4-FFF2-40B4-BE49-F238E27FC236}">
-                <a16:creationId xmlns:a16="http://schemas.microsoft.com/office/drawing/2014/main" id="{713B9ACE-B673-2D48-BEF2-2A133C31B527}"/>
+                <ns2:creationId id="{713B9ACE-B673-2D48-BEF2-2A133C31B527}"/>
               </a:ext>
             </a:extLst>
           </p:cNvPr>
@@ -28376,7 +29242,58 @@
                 <a:ea typeface="Helvetica Neue" panose="02000503000000020004" pitchFamily="2" charset="0"/>
                 <a:cs typeface="Helvetica Neue" panose="02000503000000020004" pitchFamily="2" charset="0"/>
               </a:rPr>
-              <a:t>r = c_f t</a:t>
+              <a:t xml:space="preserve">r = </a:t>
+            </a:r>
+            <a:r>
+              <a:rPr kumimoji="0" lang="en-US" sz="1400" b="0" i="1" u="none" strike="noStrike" kern="1200" cap="none" spc="0" normalizeH="0" baseline="0" noProof="0" dirty="0">
+                <a:ln>
+                  <a:noFill/>
+                </a:ln>
+                <a:solidFill>
+                  <a:srgbClr val="FFC000"/>
+                </a:solidFill>
+                <a:effectLst/>
+                <a:uLnTx/>
+                <a:uFillTx/>
+                <a:latin typeface="Helvetica Neue" panose="02000503000000020004" pitchFamily="2" charset="0"/>
+                <a:ea typeface="Helvetica Neue" panose="02000503000000020004" pitchFamily="2" charset="0"/>
+                <a:cs typeface="Helvetica Neue" panose="02000503000000020004" pitchFamily="2" charset="0"/>
+              </a:rPr>
+              <a:t>c</a:t>
+            </a:r>
+            <a:r>
+              <a:rPr kumimoji="0" lang="en-US" sz="980" b="0" i="1" u="none" strike="noStrike" kern="1200" cap="none" spc="0" normalizeH="0" baseline="-25000" noProof="0" dirty="0">
+                <a:ln>
+                  <a:noFill/>
+                </a:ln>
+                <a:solidFill>
+                  <a:srgbClr val="FFC000"/>
+                </a:solidFill>
+                <a:effectLst/>
+                <a:uLnTx/>
+                <a:uFillTx/>
+                <a:latin typeface="Helvetica Neue" panose="02000503000000020004" pitchFamily="2" charset="0"/>
+                <a:ea typeface="Helvetica Neue" panose="02000503000000020004" pitchFamily="2" charset="0"/>
+                <a:cs typeface="Helvetica Neue" panose="02000503000000020004" pitchFamily="2" charset="0"/>
+              </a:rPr>
+              <a:t>f</a:t>
+            </a:r>
+            <a:r>
+              <a:rPr kumimoji="0" lang="en-US" sz="1400" b="0" i="1" u="none" strike="noStrike" kern="1200" cap="none" spc="0" normalizeH="0" baseline="0" noProof="0" dirty="0">
+                <a:ln>
+                  <a:noFill/>
+                </a:ln>
+                <a:solidFill>
+                  <a:srgbClr val="FFC000"/>
+                </a:solidFill>
+                <a:effectLst/>
+                <a:uLnTx/>
+                <a:uFillTx/>
+                <a:latin typeface="Helvetica Neue" panose="02000503000000020004" pitchFamily="2" charset="0"/>
+                <a:ea typeface="Helvetica Neue" panose="02000503000000020004" pitchFamily="2" charset="0"/>
+                <a:cs typeface="Helvetica Neue" panose="02000503000000020004" pitchFamily="2" charset="0"/>
+              </a:rPr>
+              <a:t xml:space="preserve"> t</a:t>
             </a:r>
           </a:p>
         </p:txBody>
@@ -28386,7 +29303,7 @@
           <p:cNvPr id="36" name="TextBox 35">
             <a:extLst>
               <a:ext uri="{FF2B5EF4-FFF2-40B4-BE49-F238E27FC236}">
-                <a16:creationId xmlns:a16="http://schemas.microsoft.com/office/drawing/2014/main" id="{3A81A480-EF64-094E-825A-8592DAA4C672}"/>
+                <ns2:creationId id="{3A81A480-EF64-094E-825A-8592DAA4C672}"/>
               </a:ext>
             </a:extLst>
           </p:cNvPr>
@@ -28468,7 +29385,7 @@
           <p:cNvPr id="7" name="Rectangle 6">
             <a:extLst>
               <a:ext uri="{FF2B5EF4-FFF2-40B4-BE49-F238E27FC236}">
-                <a16:creationId xmlns:a16="http://schemas.microsoft.com/office/drawing/2014/main" id="{BED67AD4-F230-35A0-28FB-DE984573A446}"/>
+                <ns2:creationId id="{BED67AD4-F230-35A0-28FB-DE984573A446}"/>
               </a:ext>
             </a:extLst>
           </p:cNvPr>
@@ -28532,7 +29449,7 @@
           <p:cNvPr id="15" name="Straight Arrow Connector 14">
             <a:extLst>
               <a:ext uri="{FF2B5EF4-FFF2-40B4-BE49-F238E27FC236}">
-                <a16:creationId xmlns:a16="http://schemas.microsoft.com/office/drawing/2014/main" id="{05289ED1-4679-6543-A669-B23443FD0CD8}"/>
+                <ns2:creationId id="{05289ED1-4679-6543-A669-B23443FD0CD8}"/>
               </a:ext>
             </a:extLst>
           </p:cNvPr>
@@ -28578,7 +29495,7 @@
           <p:cNvPr id="32" name="Straight Arrow Connector 31">
             <a:extLst>
               <a:ext uri="{FF2B5EF4-FFF2-40B4-BE49-F238E27FC236}">
-                <a16:creationId xmlns:a16="http://schemas.microsoft.com/office/drawing/2014/main" id="{A9F8BF55-7F79-854D-84AD-A730BF43B39C}"/>
+                <ns2:creationId id="{A9F8BF55-7F79-854D-84AD-A730BF43B39C}"/>
               </a:ext>
             </a:extLst>
           </p:cNvPr>
@@ -28624,7 +29541,7 @@
           <p:cNvPr id="35" name="Straight Arrow Connector 34">
             <a:extLst>
               <a:ext uri="{FF2B5EF4-FFF2-40B4-BE49-F238E27FC236}">
-                <a16:creationId xmlns:a16="http://schemas.microsoft.com/office/drawing/2014/main" id="{0415B495-590C-0049-92E6-8AE7464CC78A}"/>
+                <ns2:creationId id="{0415B495-590C-0049-92E6-8AE7464CC78A}"/>
               </a:ext>
             </a:extLst>
           </p:cNvPr>
@@ -28670,7 +29587,7 @@
           <p:cNvPr id="39" name="Straight Arrow Connector 38">
             <a:extLst>
               <a:ext uri="{FF2B5EF4-FFF2-40B4-BE49-F238E27FC236}">
-                <a16:creationId xmlns:a16="http://schemas.microsoft.com/office/drawing/2014/main" id="{E4879E96-726B-4F42-BD7C-09F8D0B14E9A}"/>
+                <ns2:creationId id="{E4879E96-726B-4F42-BD7C-09F8D0B14E9A}"/>
               </a:ext>
             </a:extLst>
           </p:cNvPr>
@@ -28716,7 +29633,7 @@
           <p:cNvPr id="47" name="Straight Arrow Connector 46">
             <a:extLst>
               <a:ext uri="{FF2B5EF4-FFF2-40B4-BE49-F238E27FC236}">
-                <a16:creationId xmlns:a16="http://schemas.microsoft.com/office/drawing/2014/main" id="{0F119609-4333-414A-B8E4-E2447D7E1C10}"/>
+                <ns2:creationId id="{0F119609-4333-414A-B8E4-E2447D7E1C10}"/>
               </a:ext>
             </a:extLst>
           </p:cNvPr>
@@ -28762,7 +29679,7 @@
           <p:cNvPr id="9" name="TextBox 8">
             <a:extLst>
               <a:ext uri="{FF2B5EF4-FFF2-40B4-BE49-F238E27FC236}">
-                <a16:creationId xmlns:a16="http://schemas.microsoft.com/office/drawing/2014/main" id="{F869BF73-0970-4AD4-4DCD-712A77055671}"/>
+                <ns2:creationId id="{F869BF73-0970-4AD4-4DCD-712A77055671}"/>
               </a:ext>
             </a:extLst>
           </p:cNvPr>
@@ -28844,7 +29761,7 @@
           <p:cNvPr id="16" name="Oval 15">
             <a:extLst>
               <a:ext uri="{FF2B5EF4-FFF2-40B4-BE49-F238E27FC236}">
-                <a16:creationId xmlns:a16="http://schemas.microsoft.com/office/drawing/2014/main" id="{47B844F6-2777-F09D-48E3-752AD4A1C08E}"/>
+                <ns2:creationId id="{47B844F6-2777-F09D-48E3-752AD4A1C08E}"/>
               </a:ext>
             </a:extLst>
           </p:cNvPr>
@@ -28927,7 +29844,7 @@
           <p:cNvPr id="17" name="Straight Connector 16">
             <a:extLst>
               <a:ext uri="{FF2B5EF4-FFF2-40B4-BE49-F238E27FC236}">
-                <a16:creationId xmlns:a16="http://schemas.microsoft.com/office/drawing/2014/main" id="{7AC80066-19A2-40E6-CB32-8D867099AEC0}"/>
+                <ns2:creationId id="{7AC80066-19A2-40E6-CB32-8D867099AEC0}"/>
               </a:ext>
             </a:extLst>
           </p:cNvPr>
@@ -28972,7 +29889,7 @@
           <p:cNvPr id="33" name="Oval 32">
             <a:extLst>
               <a:ext uri="{FF2B5EF4-FFF2-40B4-BE49-F238E27FC236}">
-                <a16:creationId xmlns:a16="http://schemas.microsoft.com/office/drawing/2014/main" id="{E44B2491-CAC8-31F5-74F1-2F5E82758D29}"/>
+                <ns2:creationId id="{E44B2491-CAC8-31F5-74F1-2F5E82758D29}"/>
               </a:ext>
             </a:extLst>
           </p:cNvPr>
@@ -29055,7 +29972,7 @@
           <p:cNvPr id="34" name="Straight Connector 33">
             <a:extLst>
               <a:ext uri="{FF2B5EF4-FFF2-40B4-BE49-F238E27FC236}">
-                <a16:creationId xmlns:a16="http://schemas.microsoft.com/office/drawing/2014/main" id="{39925079-57E3-C749-66BE-49320C7E84EA}"/>
+                <ns2:creationId id="{39925079-57E3-C749-66BE-49320C7E84EA}"/>
               </a:ext>
             </a:extLst>
           </p:cNvPr>
@@ -29098,7 +30015,7 @@
     </p:spTree>
     <p:extLst>
       <p:ext uri="{BB962C8B-B14F-4D97-AF65-F5344CB8AC3E}">
-        <p14:creationId xmlns:p14="http://schemas.microsoft.com/office/powerpoint/2010/main" val="155428920"/>
+        <ns3:creationId val="155428920"/>
       </p:ext>
     </p:extLst>
   </p:cSld>
@@ -29109,7 +30026,7 @@
 </file>
 
 <file path=ppt/slides/slide6.xml><?xml version="1.0" encoding="utf-8"?>
-<p:sld xmlns:a="http://schemas.openxmlformats.org/drawingml/2006/main" xmlns:r="http://schemas.openxmlformats.org/officeDocument/2006/relationships" xmlns:p="http://schemas.openxmlformats.org/presentationml/2006/main">
+<p:sld xmlns:a="http://schemas.openxmlformats.org/drawingml/2006/main" xmlns:ns2="http://schemas.microsoft.com/office/drawing/2014/main" xmlns:ns3="http://schemas.microsoft.com/office/powerpoint/2010/main" xmlns:p="http://schemas.openxmlformats.org/presentationml/2006/main">
   <p:cSld>
     <p:bg>
       <p:bgPr>
@@ -29138,7 +30055,7 @@
           <p:cNvPr id="5" name="Footer Placeholder 3">
             <a:extLst>
               <a:ext uri="{FF2B5EF4-FFF2-40B4-BE49-F238E27FC236}">
-                <a16:creationId xmlns:a16="http://schemas.microsoft.com/office/drawing/2014/main" id="{668F77D6-DFDA-5A46-8DF1-47F6A167C2B1}"/>
+                <ns2:creationId id="{668F77D6-DFDA-5A46-8DF1-47F6A167C2B1}"/>
               </a:ext>
             </a:extLst>
           </p:cNvPr>
@@ -29300,7 +30217,7 @@
           <p:cNvPr id="26" name="TextBox 25">
             <a:extLst>
               <a:ext uri="{FF2B5EF4-FFF2-40B4-BE49-F238E27FC236}">
-                <a16:creationId xmlns:a16="http://schemas.microsoft.com/office/drawing/2014/main" id="{FA5E13D2-A15E-F54D-9507-CAD768919361}"/>
+                <ns2:creationId id="{FA5E13D2-A15E-F54D-9507-CAD768919361}"/>
               </a:ext>
             </a:extLst>
           </p:cNvPr>
@@ -29355,7 +30272,58 @@
                 <a:ea typeface="Helvetica Neue" panose="02000503000000020004" pitchFamily="2" charset="0"/>
                 <a:cs typeface="Helvetica Neue" panose="02000503000000020004" pitchFamily="2" charset="0"/>
               </a:rPr>
-              <a:t>At v = c_f, an architrino is at the wake-speed threshold.</a:t>
+              <a:t xml:space="preserve">At v = </a:t>
+            </a:r>
+            <a:r>
+              <a:rPr kumimoji="0" lang="en-US" b="0" i="0" u="none" strike="noStrike" kern="1200" cap="none" spc="0" normalizeH="0" baseline="0" noProof="0" dirty="0">
+                <a:ln>
+                  <a:noFill/>
+                </a:ln>
+                <a:solidFill>
+                  <a:prstClr val="white"/>
+                </a:solidFill>
+                <a:effectLst/>
+                <a:uLnTx/>
+                <a:uFillTx/>
+                <a:latin typeface="Helvetica Neue" panose="02000503000000020004" pitchFamily="2" charset="0"/>
+                <a:ea typeface="Helvetica Neue" panose="02000503000000020004" pitchFamily="2" charset="0"/>
+                <a:cs typeface="Helvetica Neue" panose="02000503000000020004" pitchFamily="2" charset="0"/>
+              </a:rPr>
+              <a:t>c</a:t>
+            </a:r>
+            <a:r>
+              <a:rPr kumimoji="0" lang="en-US" b="0" i="0" u="none" strike="noStrike" kern="1200" cap="none" spc="0" normalizeH="0" baseline="-25000" noProof="0" dirty="0" sz="1960">
+                <a:ln>
+                  <a:noFill/>
+                </a:ln>
+                <a:solidFill>
+                  <a:prstClr val="white"/>
+                </a:solidFill>
+                <a:effectLst/>
+                <a:uLnTx/>
+                <a:uFillTx/>
+                <a:latin typeface="Helvetica Neue" panose="02000503000000020004" pitchFamily="2" charset="0"/>
+                <a:ea typeface="Helvetica Neue" panose="02000503000000020004" pitchFamily="2" charset="0"/>
+                <a:cs typeface="Helvetica Neue" panose="02000503000000020004" pitchFamily="2" charset="0"/>
+              </a:rPr>
+              <a:t>f</a:t>
+            </a:r>
+            <a:r>
+              <a:rPr kumimoji="0" lang="en-US" b="0" i="0" u="none" strike="noStrike" kern="1200" cap="none" spc="0" normalizeH="0" baseline="0" noProof="0" dirty="0">
+                <a:ln>
+                  <a:noFill/>
+                </a:ln>
+                <a:solidFill>
+                  <a:prstClr val="white"/>
+                </a:solidFill>
+                <a:effectLst/>
+                <a:uLnTx/>
+                <a:uFillTx/>
+                <a:latin typeface="Helvetica Neue" panose="02000503000000020004" pitchFamily="2" charset="0"/>
+                <a:ea typeface="Helvetica Neue" panose="02000503000000020004" pitchFamily="2" charset="0"/>
+                <a:cs typeface="Helvetica Neue" panose="02000503000000020004" pitchFamily="2" charset="0"/>
+              </a:rPr>
+              <a:t>, an architrino is at the wake-speed threshold.</a:t>
             </a:r>
           </a:p>
           <a:p>
@@ -29509,7 +30477,7 @@
           <p:cNvPr id="23" name="Oval 22">
             <a:extLst>
               <a:ext uri="{FF2B5EF4-FFF2-40B4-BE49-F238E27FC236}">
-                <a16:creationId xmlns:a16="http://schemas.microsoft.com/office/drawing/2014/main" id="{0112617B-A1D5-1E41-BF92-E67D4E046E39}"/>
+                <ns2:creationId id="{0112617B-A1D5-1E41-BF92-E67D4E046E39}"/>
               </a:ext>
             </a:extLst>
           </p:cNvPr>
@@ -29593,7 +30561,7 @@
           <p:cNvPr id="27" name="Oval 26">
             <a:extLst>
               <a:ext uri="{FF2B5EF4-FFF2-40B4-BE49-F238E27FC236}">
-                <a16:creationId xmlns:a16="http://schemas.microsoft.com/office/drawing/2014/main" id="{6EF0F7DA-5E70-8348-A200-F59A10FF7C55}"/>
+                <ns2:creationId id="{6EF0F7DA-5E70-8348-A200-F59A10FF7C55}"/>
               </a:ext>
             </a:extLst>
           </p:cNvPr>
@@ -29677,7 +30645,7 @@
           <p:cNvPr id="28" name="Oval 27">
             <a:extLst>
               <a:ext uri="{FF2B5EF4-FFF2-40B4-BE49-F238E27FC236}">
-                <a16:creationId xmlns:a16="http://schemas.microsoft.com/office/drawing/2014/main" id="{552F58D0-F613-674A-B294-C894E5FB1683}"/>
+                <ns2:creationId id="{552F58D0-F613-674A-B294-C894E5FB1683}"/>
               </a:ext>
             </a:extLst>
           </p:cNvPr>
@@ -29761,7 +30729,7 @@
           <p:cNvPr id="29" name="Oval 28">
             <a:extLst>
               <a:ext uri="{FF2B5EF4-FFF2-40B4-BE49-F238E27FC236}">
-                <a16:creationId xmlns:a16="http://schemas.microsoft.com/office/drawing/2014/main" id="{9CA7A721-D3BD-744E-9306-85BBED5F74BC}"/>
+                <ns2:creationId id="{9CA7A721-D3BD-744E-9306-85BBED5F74BC}"/>
               </a:ext>
             </a:extLst>
           </p:cNvPr>
@@ -29845,7 +30813,7 @@
           <p:cNvPr id="30" name="Oval 29">
             <a:extLst>
               <a:ext uri="{FF2B5EF4-FFF2-40B4-BE49-F238E27FC236}">
-                <a16:creationId xmlns:a16="http://schemas.microsoft.com/office/drawing/2014/main" id="{F97F1A02-C0C7-3C45-9790-847C152D159A}"/>
+                <ns2:creationId id="{F97F1A02-C0C7-3C45-9790-847C152D159A}"/>
               </a:ext>
             </a:extLst>
           </p:cNvPr>
@@ -29929,7 +30897,7 @@
           <p:cNvPr id="15" name="Straight Arrow Connector 14">
             <a:extLst>
               <a:ext uri="{FF2B5EF4-FFF2-40B4-BE49-F238E27FC236}">
-                <a16:creationId xmlns:a16="http://schemas.microsoft.com/office/drawing/2014/main" id="{05289ED1-4679-6543-A669-B23443FD0CD8}"/>
+                <ns2:creationId id="{05289ED1-4679-6543-A669-B23443FD0CD8}"/>
               </a:ext>
             </a:extLst>
           </p:cNvPr>
@@ -29974,7 +30942,7 @@
           <p:cNvPr id="32" name="Straight Arrow Connector 31">
             <a:extLst>
               <a:ext uri="{FF2B5EF4-FFF2-40B4-BE49-F238E27FC236}">
-                <a16:creationId xmlns:a16="http://schemas.microsoft.com/office/drawing/2014/main" id="{A9F8BF55-7F79-854D-84AD-A730BF43B39C}"/>
+                <ns2:creationId id="{A9F8BF55-7F79-854D-84AD-A730BF43B39C}"/>
               </a:ext>
             </a:extLst>
           </p:cNvPr>
@@ -30019,7 +30987,7 @@
           <p:cNvPr id="35" name="Straight Arrow Connector 34">
             <a:extLst>
               <a:ext uri="{FF2B5EF4-FFF2-40B4-BE49-F238E27FC236}">
-                <a16:creationId xmlns:a16="http://schemas.microsoft.com/office/drawing/2014/main" id="{0415B495-590C-0049-92E6-8AE7464CC78A}"/>
+                <ns2:creationId id="{0415B495-590C-0049-92E6-8AE7464CC78A}"/>
               </a:ext>
             </a:extLst>
           </p:cNvPr>
@@ -30064,7 +31032,7 @@
           <p:cNvPr id="39" name="Straight Arrow Connector 38">
             <a:extLst>
               <a:ext uri="{FF2B5EF4-FFF2-40B4-BE49-F238E27FC236}">
-                <a16:creationId xmlns:a16="http://schemas.microsoft.com/office/drawing/2014/main" id="{E4879E96-726B-4F42-BD7C-09F8D0B14E9A}"/>
+                <ns2:creationId id="{E4879E96-726B-4F42-BD7C-09F8D0B14E9A}"/>
               </a:ext>
             </a:extLst>
           </p:cNvPr>
@@ -30109,7 +31077,7 @@
           <p:cNvPr id="47" name="Straight Arrow Connector 46">
             <a:extLst>
               <a:ext uri="{FF2B5EF4-FFF2-40B4-BE49-F238E27FC236}">
-                <a16:creationId xmlns:a16="http://schemas.microsoft.com/office/drawing/2014/main" id="{0F119609-4333-414A-B8E4-E2447D7E1C10}"/>
+                <ns2:creationId id="{0F119609-4333-414A-B8E4-E2447D7E1C10}"/>
               </a:ext>
             </a:extLst>
           </p:cNvPr>
@@ -30154,7 +31122,7 @@
           <p:cNvPr id="4" name="Straight Connector 3">
             <a:extLst>
               <a:ext uri="{FF2B5EF4-FFF2-40B4-BE49-F238E27FC236}">
-                <a16:creationId xmlns:a16="http://schemas.microsoft.com/office/drawing/2014/main" id="{9890CC23-4ADC-D744-AF2D-1C8A936F07FC}"/>
+                <ns2:creationId id="{9890CC23-4ADC-D744-AF2D-1C8A936F07FC}"/>
               </a:ext>
             </a:extLst>
           </p:cNvPr>
@@ -30197,7 +31165,7 @@
           <p:cNvPr id="18" name="Oval 17">
             <a:extLst>
               <a:ext uri="{FF2B5EF4-FFF2-40B4-BE49-F238E27FC236}">
-                <a16:creationId xmlns:a16="http://schemas.microsoft.com/office/drawing/2014/main" id="{BE4CDC90-4B2E-BE41-BB9D-A84675F3A2FE}"/>
+                <ns2:creationId id="{BE4CDC90-4B2E-BE41-BB9D-A84675F3A2FE}"/>
               </a:ext>
             </a:extLst>
           </p:cNvPr>
@@ -30278,7 +31246,7 @@
           <p:cNvPr id="24" name="Straight Arrow Connector 23">
             <a:extLst>
               <a:ext uri="{FF2B5EF4-FFF2-40B4-BE49-F238E27FC236}">
-                <a16:creationId xmlns:a16="http://schemas.microsoft.com/office/drawing/2014/main" id="{7BCF22C9-C9AE-324D-B157-A9536FCAF3B6}"/>
+                <ns2:creationId id="{7BCF22C9-C9AE-324D-B157-A9536FCAF3B6}"/>
               </a:ext>
             </a:extLst>
           </p:cNvPr>
@@ -30323,7 +31291,7 @@
           <p:cNvPr id="10" name="TextBox 9">
             <a:extLst>
               <a:ext uri="{FF2B5EF4-FFF2-40B4-BE49-F238E27FC236}">
-                <a16:creationId xmlns:a16="http://schemas.microsoft.com/office/drawing/2014/main" id="{01A59953-657F-C641-8F36-E48E8EDB0DF1}"/>
+                <ns2:creationId id="{01A59953-657F-C641-8F36-E48E8EDB0DF1}"/>
               </a:ext>
             </a:extLst>
           </p:cNvPr>
@@ -30378,7 +31346,41 @@
                 <a:ea typeface="Helvetica Neue" panose="02000503000000020004" pitchFamily="2" charset="0"/>
                 <a:cs typeface="Helvetica Neue" panose="02000503000000020004" pitchFamily="2" charset="0"/>
               </a:rPr>
-              <a:t>v = c_f</a:t>
+              <a:t xml:space="preserve">v = </a:t>
+            </a:r>
+            <a:r>
+              <a:rPr kumimoji="0" lang="en-US" sz="1400" b="0" i="1" u="none" strike="noStrike" kern="1200" cap="none" spc="0" normalizeH="0" baseline="0" noProof="0" dirty="0">
+                <a:ln>
+                  <a:noFill/>
+                </a:ln>
+                <a:solidFill>
+                  <a:prstClr val="white"/>
+                </a:solidFill>
+                <a:effectLst/>
+                <a:uLnTx/>
+                <a:uFillTx/>
+                <a:latin typeface="Helvetica Neue" panose="02000503000000020004" pitchFamily="2" charset="0"/>
+                <a:ea typeface="Helvetica Neue" panose="02000503000000020004" pitchFamily="2" charset="0"/>
+                <a:cs typeface="Helvetica Neue" panose="02000503000000020004" pitchFamily="2" charset="0"/>
+              </a:rPr>
+              <a:t>c</a:t>
+            </a:r>
+            <a:r>
+              <a:rPr kumimoji="0" lang="en-US" sz="980" b="0" i="1" u="none" strike="noStrike" kern="1200" cap="none" spc="0" normalizeH="0" baseline="-25000" noProof="0" dirty="0">
+                <a:ln>
+                  <a:noFill/>
+                </a:ln>
+                <a:solidFill>
+                  <a:prstClr val="white"/>
+                </a:solidFill>
+                <a:effectLst/>
+                <a:uLnTx/>
+                <a:uFillTx/>
+                <a:latin typeface="Helvetica Neue" panose="02000503000000020004" pitchFamily="2" charset="0"/>
+                <a:ea typeface="Helvetica Neue" panose="02000503000000020004" pitchFamily="2" charset="0"/>
+                <a:cs typeface="Helvetica Neue" panose="02000503000000020004" pitchFamily="2" charset="0"/>
+              </a:rPr>
+              <a:t>f</a:t>
             </a:r>
           </a:p>
         </p:txBody>
@@ -30388,7 +31390,7 @@
           <p:cNvPr id="31" name="TextBox 30">
             <a:extLst>
               <a:ext uri="{FF2B5EF4-FFF2-40B4-BE49-F238E27FC236}">
-                <a16:creationId xmlns:a16="http://schemas.microsoft.com/office/drawing/2014/main" id="{713B9ACE-B673-2D48-BEF2-2A133C31B527}"/>
+                <ns2:creationId id="{713B9ACE-B673-2D48-BEF2-2A133C31B527}"/>
               </a:ext>
             </a:extLst>
           </p:cNvPr>
@@ -30443,7 +31445,24 @@
                 <a:ea typeface="Helvetica Neue" panose="02000503000000020004" pitchFamily="2" charset="0"/>
                 <a:cs typeface="Helvetica Neue" panose="02000503000000020004" pitchFamily="2" charset="0"/>
               </a:rPr>
-              <a:t>c_f</a:t>
+              <a:t>c</a:t>
+            </a:r>
+            <a:r>
+              <a:rPr kumimoji="0" lang="en-US" sz="980" b="0" i="1" u="none" strike="noStrike" kern="1200" cap="none" spc="0" normalizeH="0" baseline="-25000" noProof="0" dirty="0">
+                <a:ln>
+                  <a:noFill/>
+                </a:ln>
+                <a:solidFill>
+                  <a:prstClr val="white"/>
+                </a:solidFill>
+                <a:effectLst/>
+                <a:uLnTx/>
+                <a:uFillTx/>
+                <a:latin typeface="Helvetica Neue" panose="02000503000000020004" pitchFamily="2" charset="0"/>
+                <a:ea typeface="Helvetica Neue" panose="02000503000000020004" pitchFamily="2" charset="0"/>
+                <a:cs typeface="Helvetica Neue" panose="02000503000000020004" pitchFamily="2" charset="0"/>
+              </a:rPr>
+              <a:t>f</a:t>
             </a:r>
           </a:p>
         </p:txBody>
@@ -30453,7 +31472,7 @@
           <p:cNvPr id="36" name="TextBox 35">
             <a:extLst>
               <a:ext uri="{FF2B5EF4-FFF2-40B4-BE49-F238E27FC236}">
-                <a16:creationId xmlns:a16="http://schemas.microsoft.com/office/drawing/2014/main" id="{3A81A480-EF64-094E-825A-8592DAA4C672}"/>
+                <ns2:creationId id="{3A81A480-EF64-094E-825A-8592DAA4C672}"/>
               </a:ext>
             </a:extLst>
           </p:cNvPr>
@@ -30532,7 +31551,7 @@
           <p:cNvPr id="22" name="Straight Connector 21">
             <a:extLst>
               <a:ext uri="{FF2B5EF4-FFF2-40B4-BE49-F238E27FC236}">
-                <a16:creationId xmlns:a16="http://schemas.microsoft.com/office/drawing/2014/main" id="{0C67DA45-6876-7942-9996-48CA0A1696FE}"/>
+                <ns2:creationId id="{0C67DA45-6876-7942-9996-48CA0A1696FE}"/>
               </a:ext>
             </a:extLst>
           </p:cNvPr>
@@ -30575,7 +31594,7 @@
           <p:cNvPr id="7" name="TextBox 6">
             <a:extLst>
               <a:ext uri="{FF2B5EF4-FFF2-40B4-BE49-F238E27FC236}">
-                <a16:creationId xmlns:a16="http://schemas.microsoft.com/office/drawing/2014/main" id="{FE7A6F30-9D38-0B1B-2076-531827EE9F50}"/>
+                <ns2:creationId id="{FE7A6F30-9D38-0B1B-2076-531827EE9F50}"/>
               </a:ext>
             </a:extLst>
           </p:cNvPr>
@@ -30630,7 +31649,41 @@
                 <a:ea typeface="Helvetica Neue" panose="02000503000000020004" pitchFamily="2" charset="0"/>
                 <a:cs typeface="Helvetica Neue" panose="02000503000000020004" pitchFamily="2" charset="0"/>
               </a:rPr>
-              <a:t>Architrino on Linear Path with Velocity v = c_f</a:t>
+              <a:t xml:space="preserve">Architrino on Linear Path with Velocity v = </a:t>
+            </a:r>
+            <a:r>
+              <a:rPr kumimoji="0" lang="en-US" sz="3200" b="1" i="0" u="none" strike="noStrike" kern="1200" cap="none" spc="0" normalizeH="0" baseline="0" noProof="0" dirty="0">
+                <a:ln>
+                  <a:noFill/>
+                </a:ln>
+                <a:solidFill>
+                  <a:prstClr val="white"/>
+                </a:solidFill>
+                <a:effectLst/>
+                <a:uLnTx/>
+                <a:uFillTx/>
+                <a:latin typeface="Helvetica Neue" panose="02000503000000020004" pitchFamily="2" charset="0"/>
+                <a:ea typeface="Helvetica Neue" panose="02000503000000020004" pitchFamily="2" charset="0"/>
+                <a:cs typeface="Helvetica Neue" panose="02000503000000020004" pitchFamily="2" charset="0"/>
+              </a:rPr>
+              <a:t>c</a:t>
+            </a:r>
+            <a:r>
+              <a:rPr kumimoji="0" lang="en-US" sz="2240" b="1" i="0" u="none" strike="noStrike" kern="1200" cap="none" spc="0" normalizeH="0" baseline="-25000" noProof="0" dirty="0">
+                <a:ln>
+                  <a:noFill/>
+                </a:ln>
+                <a:solidFill>
+                  <a:prstClr val="white"/>
+                </a:solidFill>
+                <a:effectLst/>
+                <a:uLnTx/>
+                <a:uFillTx/>
+                <a:latin typeface="Helvetica Neue" panose="02000503000000020004" pitchFamily="2" charset="0"/>
+                <a:ea typeface="Helvetica Neue" panose="02000503000000020004" pitchFamily="2" charset="0"/>
+                <a:cs typeface="Helvetica Neue" panose="02000503000000020004" pitchFamily="2" charset="0"/>
+              </a:rPr>
+              <a:t>f</a:t>
             </a:r>
           </a:p>
         </p:txBody>
@@ -30640,7 +31693,7 @@
           <p:cNvPr id="2" name="Group 1">
             <a:extLst>
               <a:ext uri="{FF2B5EF4-FFF2-40B4-BE49-F238E27FC236}">
-                <a16:creationId xmlns:a16="http://schemas.microsoft.com/office/drawing/2014/main" id="{B98AD1F2-987D-71EB-A470-E4A41A905EDF}"/>
+                <ns2:creationId id="{B98AD1F2-987D-71EB-A470-E4A41A905EDF}"/>
               </a:ext>
             </a:extLst>
           </p:cNvPr>
@@ -30660,7 +31713,7 @@
             <p:cNvPr id="6" name="Straight Arrow Connector 5">
               <a:extLst>
                 <a:ext uri="{FF2B5EF4-FFF2-40B4-BE49-F238E27FC236}">
-                  <a16:creationId xmlns:a16="http://schemas.microsoft.com/office/drawing/2014/main" id="{836C1A95-A13A-0EE6-733B-6B2D96A15332}"/>
+                  <ns2:creationId id="{836C1A95-A13A-0EE6-733B-6B2D96A15332}"/>
                 </a:ext>
               </a:extLst>
             </p:cNvPr>
@@ -30704,7 +31757,7 @@
             <p:cNvPr id="9" name="Straight Arrow Connector 8">
               <a:extLst>
                 <a:ext uri="{FF2B5EF4-FFF2-40B4-BE49-F238E27FC236}">
-                  <a16:creationId xmlns:a16="http://schemas.microsoft.com/office/drawing/2014/main" id="{8AA9E325-051B-BE4A-55F2-7CFF0AFD3797}"/>
+                  <ns2:creationId id="{8AA9E325-051B-BE4A-55F2-7CFF0AFD3797}"/>
                 </a:ext>
               </a:extLst>
             </p:cNvPr>
@@ -30748,7 +31801,7 @@
             <p:cNvPr id="11" name="TextBox 10">
               <a:extLst>
                 <a:ext uri="{FF2B5EF4-FFF2-40B4-BE49-F238E27FC236}">
-                  <a16:creationId xmlns:a16="http://schemas.microsoft.com/office/drawing/2014/main" id="{DF6E9CDB-4ADF-E626-B2A4-DEA60E4A02F0}"/>
+                  <ns2:creationId id="{DF6E9CDB-4ADF-E626-B2A4-DEA60E4A02F0}"/>
                 </a:ext>
               </a:extLst>
             </p:cNvPr>
@@ -30813,7 +31866,7 @@
             <p:cNvPr id="14" name="TextBox 13">
               <a:extLst>
                 <a:ext uri="{FF2B5EF4-FFF2-40B4-BE49-F238E27FC236}">
-                  <a16:creationId xmlns:a16="http://schemas.microsoft.com/office/drawing/2014/main" id="{01E78D1F-323F-0A4F-4B30-4CE146D0EB63}"/>
+                  <ns2:creationId id="{01E78D1F-323F-0A4F-4B30-4CE146D0EB63}"/>
                 </a:ext>
               </a:extLst>
             </p:cNvPr>
@@ -30913,7 +31966,7 @@
     </p:spTree>
     <p:extLst>
       <p:ext uri="{BB962C8B-B14F-4D97-AF65-F5344CB8AC3E}">
-        <p14:creationId xmlns:p14="http://schemas.microsoft.com/office/powerpoint/2010/main" val="4081239535"/>
+        <ns3:creationId val="4081239535"/>
       </p:ext>
     </p:extLst>
   </p:cSld>
@@ -30924,7 +31977,7 @@
 </file>
 
 <file path=ppt/slides/slide7.xml><?xml version="1.0" encoding="utf-8"?>
-<p:sld xmlns:a="http://schemas.openxmlformats.org/drawingml/2006/main" xmlns:r="http://schemas.openxmlformats.org/officeDocument/2006/relationships" xmlns:p="http://schemas.openxmlformats.org/presentationml/2006/main">
+<p:sld xmlns:a="http://schemas.openxmlformats.org/drawingml/2006/main" xmlns:ns2="http://schemas.microsoft.com/office/drawing/2014/main" xmlns:ns3="http://schemas.microsoft.com/office/powerpoint/2010/main" xmlns:p="http://schemas.openxmlformats.org/presentationml/2006/main">
   <p:cSld>
     <p:bg>
       <p:bgPr>
@@ -30953,7 +32006,7 @@
           <p:cNvPr id="5" name="Footer Placeholder 3">
             <a:extLst>
               <a:ext uri="{FF2B5EF4-FFF2-40B4-BE49-F238E27FC236}">
-                <a16:creationId xmlns:a16="http://schemas.microsoft.com/office/drawing/2014/main" id="{668F77D6-DFDA-5A46-8DF1-47F6A167C2B1}"/>
+                <ns2:creationId id="{668F77D6-DFDA-5A46-8DF1-47F6A167C2B1}"/>
               </a:ext>
             </a:extLst>
           </p:cNvPr>
@@ -31115,7 +32168,7 @@
           <p:cNvPr id="26" name="TextBox 25">
             <a:extLst>
               <a:ext uri="{FF2B5EF4-FFF2-40B4-BE49-F238E27FC236}">
-                <a16:creationId xmlns:a16="http://schemas.microsoft.com/office/drawing/2014/main" id="{FA5E13D2-A15E-F54D-9507-CAD768919361}"/>
+                <ns2:creationId id="{FA5E13D2-A15E-F54D-9507-CAD768919361}"/>
               </a:ext>
             </a:extLst>
           </p:cNvPr>
@@ -31170,7 +32223,58 @@
                 <a:ea typeface="Helvetica Neue" panose="02000503000000020004" pitchFamily="2" charset="0"/>
                 <a:cs typeface="Helvetica Neue" panose="02000503000000020004" pitchFamily="2" charset="0"/>
               </a:rPr>
-              <a:t>Imagine an architrino with linear velocity v &gt; c_f, above wake speed.</a:t>
+              <a:t xml:space="preserve">Imagine an architrino with linear velocity v &gt; </a:t>
+            </a:r>
+            <a:r>
+              <a:rPr kumimoji="0" lang="en-US" sz="1600" b="0" i="0" u="none" strike="noStrike" kern="1200" cap="none" spc="0" normalizeH="0" baseline="0" noProof="0" dirty="0">
+                <a:ln>
+                  <a:noFill/>
+                </a:ln>
+                <a:solidFill>
+                  <a:prstClr val="white"/>
+                </a:solidFill>
+                <a:effectLst/>
+                <a:uLnTx/>
+                <a:uFillTx/>
+                <a:latin typeface="Helvetica Neue" panose="02000503000000020004" pitchFamily="2" charset="0"/>
+                <a:ea typeface="Helvetica Neue" panose="02000503000000020004" pitchFamily="2" charset="0"/>
+                <a:cs typeface="Helvetica Neue" panose="02000503000000020004" pitchFamily="2" charset="0"/>
+              </a:rPr>
+              <a:t>c</a:t>
+            </a:r>
+            <a:r>
+              <a:rPr kumimoji="0" lang="en-US" sz="1120" b="0" i="0" u="none" strike="noStrike" kern="1200" cap="none" spc="0" normalizeH="0" baseline="-25000" noProof="0" dirty="0">
+                <a:ln>
+                  <a:noFill/>
+                </a:ln>
+                <a:solidFill>
+                  <a:prstClr val="white"/>
+                </a:solidFill>
+                <a:effectLst/>
+                <a:uLnTx/>
+                <a:uFillTx/>
+                <a:latin typeface="Helvetica Neue" panose="02000503000000020004" pitchFamily="2" charset="0"/>
+                <a:ea typeface="Helvetica Neue" panose="02000503000000020004" pitchFamily="2" charset="0"/>
+                <a:cs typeface="Helvetica Neue" panose="02000503000000020004" pitchFamily="2" charset="0"/>
+              </a:rPr>
+              <a:t>f</a:t>
+            </a:r>
+            <a:r>
+              <a:rPr kumimoji="0" lang="en-US" sz="1600" b="0" i="0" u="none" strike="noStrike" kern="1200" cap="none" spc="0" normalizeH="0" baseline="0" noProof="0" dirty="0">
+                <a:ln>
+                  <a:noFill/>
+                </a:ln>
+                <a:solidFill>
+                  <a:prstClr val="white"/>
+                </a:solidFill>
+                <a:effectLst/>
+                <a:uLnTx/>
+                <a:uFillTx/>
+                <a:latin typeface="Helvetica Neue" panose="02000503000000020004" pitchFamily="2" charset="0"/>
+                <a:ea typeface="Helvetica Neue" panose="02000503000000020004" pitchFamily="2" charset="0"/>
+                <a:cs typeface="Helvetica Neue" panose="02000503000000020004" pitchFamily="2" charset="0"/>
+              </a:rPr>
+              <a:t>, above wake speed.</a:t>
             </a:r>
           </a:p>
           <a:p>
@@ -31252,7 +32356,7 @@
           <p:cNvPr id="23" name="Oval 22">
             <a:extLst>
               <a:ext uri="{FF2B5EF4-FFF2-40B4-BE49-F238E27FC236}">
-                <a16:creationId xmlns:a16="http://schemas.microsoft.com/office/drawing/2014/main" id="{0112617B-A1D5-1E41-BF92-E67D4E046E39}"/>
+                <ns2:creationId id="{0112617B-A1D5-1E41-BF92-E67D4E046E39}"/>
               </a:ext>
             </a:extLst>
           </p:cNvPr>
@@ -31336,7 +32440,7 @@
           <p:cNvPr id="27" name="Oval 26">
             <a:extLst>
               <a:ext uri="{FF2B5EF4-FFF2-40B4-BE49-F238E27FC236}">
-                <a16:creationId xmlns:a16="http://schemas.microsoft.com/office/drawing/2014/main" id="{6EF0F7DA-5E70-8348-A200-F59A10FF7C55}"/>
+                <ns2:creationId id="{6EF0F7DA-5E70-8348-A200-F59A10FF7C55}"/>
               </a:ext>
             </a:extLst>
           </p:cNvPr>
@@ -31420,7 +32524,7 @@
           <p:cNvPr id="28" name="Oval 27">
             <a:extLst>
               <a:ext uri="{FF2B5EF4-FFF2-40B4-BE49-F238E27FC236}">
-                <a16:creationId xmlns:a16="http://schemas.microsoft.com/office/drawing/2014/main" id="{552F58D0-F613-674A-B294-C894E5FB1683}"/>
+                <ns2:creationId id="{552F58D0-F613-674A-B294-C894E5FB1683}"/>
               </a:ext>
             </a:extLst>
           </p:cNvPr>
@@ -31504,7 +32608,7 @@
           <p:cNvPr id="29" name="Oval 28">
             <a:extLst>
               <a:ext uri="{FF2B5EF4-FFF2-40B4-BE49-F238E27FC236}">
-                <a16:creationId xmlns:a16="http://schemas.microsoft.com/office/drawing/2014/main" id="{9CA7A721-D3BD-744E-9306-85BBED5F74BC}"/>
+                <ns2:creationId id="{9CA7A721-D3BD-744E-9306-85BBED5F74BC}"/>
               </a:ext>
             </a:extLst>
           </p:cNvPr>
@@ -31588,7 +32692,7 @@
           <p:cNvPr id="30" name="Oval 29">
             <a:extLst>
               <a:ext uri="{FF2B5EF4-FFF2-40B4-BE49-F238E27FC236}">
-                <a16:creationId xmlns:a16="http://schemas.microsoft.com/office/drawing/2014/main" id="{F97F1A02-C0C7-3C45-9790-847C152D159A}"/>
+                <ns2:creationId id="{F97F1A02-C0C7-3C45-9790-847C152D159A}"/>
               </a:ext>
             </a:extLst>
           </p:cNvPr>
@@ -31672,7 +32776,7 @@
           <p:cNvPr id="15" name="Straight Arrow Connector 14">
             <a:extLst>
               <a:ext uri="{FF2B5EF4-FFF2-40B4-BE49-F238E27FC236}">
-                <a16:creationId xmlns:a16="http://schemas.microsoft.com/office/drawing/2014/main" id="{05289ED1-4679-6543-A669-B23443FD0CD8}"/>
+                <ns2:creationId id="{05289ED1-4679-6543-A669-B23443FD0CD8}"/>
               </a:ext>
             </a:extLst>
           </p:cNvPr>
@@ -31717,7 +32821,7 @@
           <p:cNvPr id="32" name="Straight Arrow Connector 31">
             <a:extLst>
               <a:ext uri="{FF2B5EF4-FFF2-40B4-BE49-F238E27FC236}">
-                <a16:creationId xmlns:a16="http://schemas.microsoft.com/office/drawing/2014/main" id="{A9F8BF55-7F79-854D-84AD-A730BF43B39C}"/>
+                <ns2:creationId id="{A9F8BF55-7F79-854D-84AD-A730BF43B39C}"/>
               </a:ext>
             </a:extLst>
           </p:cNvPr>
@@ -31762,7 +32866,7 @@
           <p:cNvPr id="35" name="Straight Arrow Connector 34">
             <a:extLst>
               <a:ext uri="{FF2B5EF4-FFF2-40B4-BE49-F238E27FC236}">
-                <a16:creationId xmlns:a16="http://schemas.microsoft.com/office/drawing/2014/main" id="{0415B495-590C-0049-92E6-8AE7464CC78A}"/>
+                <ns2:creationId id="{0415B495-590C-0049-92E6-8AE7464CC78A}"/>
               </a:ext>
             </a:extLst>
           </p:cNvPr>
@@ -31807,7 +32911,7 @@
           <p:cNvPr id="39" name="Straight Arrow Connector 38">
             <a:extLst>
               <a:ext uri="{FF2B5EF4-FFF2-40B4-BE49-F238E27FC236}">
-                <a16:creationId xmlns:a16="http://schemas.microsoft.com/office/drawing/2014/main" id="{E4879E96-726B-4F42-BD7C-09F8D0B14E9A}"/>
+                <ns2:creationId id="{E4879E96-726B-4F42-BD7C-09F8D0B14E9A}"/>
               </a:ext>
             </a:extLst>
           </p:cNvPr>
@@ -31852,7 +32956,7 @@
           <p:cNvPr id="47" name="Straight Arrow Connector 46">
             <a:extLst>
               <a:ext uri="{FF2B5EF4-FFF2-40B4-BE49-F238E27FC236}">
-                <a16:creationId xmlns:a16="http://schemas.microsoft.com/office/drawing/2014/main" id="{0F119609-4333-414A-B8E4-E2447D7E1C10}"/>
+                <ns2:creationId id="{0F119609-4333-414A-B8E4-E2447D7E1C10}"/>
               </a:ext>
             </a:extLst>
           </p:cNvPr>
@@ -31897,7 +33001,7 @@
           <p:cNvPr id="4" name="Straight Connector 3">
             <a:extLst>
               <a:ext uri="{FF2B5EF4-FFF2-40B4-BE49-F238E27FC236}">
-                <a16:creationId xmlns:a16="http://schemas.microsoft.com/office/drawing/2014/main" id="{9890CC23-4ADC-D744-AF2D-1C8A936F07FC}"/>
+                <ns2:creationId id="{9890CC23-4ADC-D744-AF2D-1C8A936F07FC}"/>
               </a:ext>
             </a:extLst>
           </p:cNvPr>
@@ -31940,7 +33044,7 @@
           <p:cNvPr id="18" name="Oval 17">
             <a:extLst>
               <a:ext uri="{FF2B5EF4-FFF2-40B4-BE49-F238E27FC236}">
-                <a16:creationId xmlns:a16="http://schemas.microsoft.com/office/drawing/2014/main" id="{BE4CDC90-4B2E-BE41-BB9D-A84675F3A2FE}"/>
+                <ns2:creationId id="{BE4CDC90-4B2E-BE41-BB9D-A84675F3A2FE}"/>
               </a:ext>
             </a:extLst>
           </p:cNvPr>
@@ -32023,7 +33127,7 @@
           <p:cNvPr id="24" name="Straight Arrow Connector 23">
             <a:extLst>
               <a:ext uri="{FF2B5EF4-FFF2-40B4-BE49-F238E27FC236}">
-                <a16:creationId xmlns:a16="http://schemas.microsoft.com/office/drawing/2014/main" id="{7BCF22C9-C9AE-324D-B157-A9536FCAF3B6}"/>
+                <ns2:creationId id="{7BCF22C9-C9AE-324D-B157-A9536FCAF3B6}"/>
               </a:ext>
             </a:extLst>
           </p:cNvPr>
@@ -32068,7 +33172,7 @@
           <p:cNvPr id="10" name="TextBox 9">
             <a:extLst>
               <a:ext uri="{FF2B5EF4-FFF2-40B4-BE49-F238E27FC236}">
-                <a16:creationId xmlns:a16="http://schemas.microsoft.com/office/drawing/2014/main" id="{01A59953-657F-C641-8F36-E48E8EDB0DF1}"/>
+                <ns2:creationId id="{01A59953-657F-C641-8F36-E48E8EDB0DF1}"/>
               </a:ext>
             </a:extLst>
           </p:cNvPr>
@@ -32126,7 +33230,41 @@
                 <a:ea typeface="Helvetica Neue" panose="02000503000000020004" pitchFamily="2" charset="0"/>
                 <a:cs typeface="Helvetica Neue" panose="02000503000000020004" pitchFamily="2" charset="0"/>
               </a:rPr>
-              <a:t>v &gt; c_f</a:t>
+              <a:t xml:space="preserve">v &gt; </a:t>
+            </a:r>
+            <a:r>
+              <a:rPr kumimoji="0" lang="en-US" sz="1400" b="0" i="1" u="none" strike="noStrike" kern="1200" cap="none" spc="0" normalizeH="0" baseline="0" noProof="0" dirty="0">
+                <a:ln>
+                  <a:noFill/>
+                </a:ln>
+                <a:solidFill>
+                  <a:prstClr val="white"/>
+                </a:solidFill>
+                <a:effectLst/>
+                <a:uLnTx/>
+                <a:uFillTx/>
+                <a:latin typeface="Helvetica Neue" panose="02000503000000020004" pitchFamily="2" charset="0"/>
+                <a:ea typeface="Helvetica Neue" panose="02000503000000020004" pitchFamily="2" charset="0"/>
+                <a:cs typeface="Helvetica Neue" panose="02000503000000020004" pitchFamily="2" charset="0"/>
+              </a:rPr>
+              <a:t>c</a:t>
+            </a:r>
+            <a:r>
+              <a:rPr kumimoji="0" lang="en-US" sz="980" b="0" i="1" u="none" strike="noStrike" kern="1200" cap="none" spc="0" normalizeH="0" baseline="-25000" noProof="0" dirty="0">
+                <a:ln>
+                  <a:noFill/>
+                </a:ln>
+                <a:solidFill>
+                  <a:prstClr val="white"/>
+                </a:solidFill>
+                <a:effectLst/>
+                <a:uLnTx/>
+                <a:uFillTx/>
+                <a:latin typeface="Helvetica Neue" panose="02000503000000020004" pitchFamily="2" charset="0"/>
+                <a:ea typeface="Helvetica Neue" panose="02000503000000020004" pitchFamily="2" charset="0"/>
+                <a:cs typeface="Helvetica Neue" panose="02000503000000020004" pitchFamily="2" charset="0"/>
+              </a:rPr>
+              <a:t>f</a:t>
             </a:r>
           </a:p>
         </p:txBody>
@@ -32136,7 +33274,7 @@
           <p:cNvPr id="31" name="TextBox 30">
             <a:extLst>
               <a:ext uri="{FF2B5EF4-FFF2-40B4-BE49-F238E27FC236}">
-                <a16:creationId xmlns:a16="http://schemas.microsoft.com/office/drawing/2014/main" id="{713B9ACE-B673-2D48-BEF2-2A133C31B527}"/>
+                <ns2:creationId id="{713B9ACE-B673-2D48-BEF2-2A133C31B527}"/>
               </a:ext>
             </a:extLst>
           </p:cNvPr>
@@ -32194,7 +33332,24 @@
                 <a:ea typeface="Helvetica Neue" panose="02000503000000020004" pitchFamily="2" charset="0"/>
                 <a:cs typeface="Helvetica Neue" panose="02000503000000020004" pitchFamily="2" charset="0"/>
               </a:rPr>
-              <a:t>c_f</a:t>
+              <a:t>c</a:t>
+            </a:r>
+            <a:r>
+              <a:rPr kumimoji="0" lang="en-US" sz="980" b="0" i="1" u="none" strike="noStrike" kern="1200" cap="none" spc="0" normalizeH="0" baseline="-25000" noProof="0" dirty="0">
+                <a:ln>
+                  <a:noFill/>
+                </a:ln>
+                <a:solidFill>
+                  <a:prstClr val="white"/>
+                </a:solidFill>
+                <a:effectLst/>
+                <a:uLnTx/>
+                <a:uFillTx/>
+                <a:latin typeface="Helvetica Neue" panose="02000503000000020004" pitchFamily="2" charset="0"/>
+                <a:ea typeface="Helvetica Neue" panose="02000503000000020004" pitchFamily="2" charset="0"/>
+                <a:cs typeface="Helvetica Neue" panose="02000503000000020004" pitchFamily="2" charset="0"/>
+              </a:rPr>
+              <a:t>f</a:t>
             </a:r>
           </a:p>
         </p:txBody>
@@ -32204,7 +33359,7 @@
           <p:cNvPr id="36" name="TextBox 35">
             <a:extLst>
               <a:ext uri="{FF2B5EF4-FFF2-40B4-BE49-F238E27FC236}">
-                <a16:creationId xmlns:a16="http://schemas.microsoft.com/office/drawing/2014/main" id="{3A81A480-EF64-094E-825A-8592DAA4C672}"/>
+                <ns2:creationId id="{3A81A480-EF64-094E-825A-8592DAA4C672}"/>
               </a:ext>
             </a:extLst>
           </p:cNvPr>
@@ -32286,7 +33441,7 @@
           <p:cNvPr id="22" name="Straight Connector 21">
             <a:extLst>
               <a:ext uri="{FF2B5EF4-FFF2-40B4-BE49-F238E27FC236}">
-                <a16:creationId xmlns:a16="http://schemas.microsoft.com/office/drawing/2014/main" id="{0C67DA45-6876-7942-9996-48CA0A1696FE}"/>
+                <ns2:creationId id="{0C67DA45-6876-7942-9996-48CA0A1696FE}"/>
               </a:ext>
             </a:extLst>
           </p:cNvPr>
@@ -32329,7 +33484,7 @@
           <p:cNvPr id="2" name="TextBox 1">
             <a:extLst>
               <a:ext uri="{FF2B5EF4-FFF2-40B4-BE49-F238E27FC236}">
-                <a16:creationId xmlns:a16="http://schemas.microsoft.com/office/drawing/2014/main" id="{25B497FC-A4FB-6E22-82A5-ECE9FFBF1D45}"/>
+                <ns2:creationId id="{25B497FC-A4FB-6E22-82A5-ECE9FFBF1D45}"/>
               </a:ext>
             </a:extLst>
           </p:cNvPr>
@@ -32384,7 +33539,41 @@
                 <a:ea typeface="Helvetica Neue" panose="02000503000000020004" pitchFamily="2" charset="0"/>
                 <a:cs typeface="Helvetica Neue" panose="02000503000000020004" pitchFamily="2" charset="0"/>
               </a:rPr>
-              <a:t>Architrino on Linear Path with Velocity v &gt; c_f</a:t>
+              <a:t xml:space="preserve">Architrino on Linear Path with Velocity v &gt; </a:t>
+            </a:r>
+            <a:r>
+              <a:rPr kumimoji="0" lang="en-US" sz="3200" b="1" i="0" u="none" strike="noStrike" kern="1200" cap="none" spc="0" normalizeH="0" baseline="0" noProof="0" dirty="0">
+                <a:ln>
+                  <a:noFill/>
+                </a:ln>
+                <a:solidFill>
+                  <a:prstClr val="white"/>
+                </a:solidFill>
+                <a:effectLst/>
+                <a:uLnTx/>
+                <a:uFillTx/>
+                <a:latin typeface="Helvetica Neue" panose="02000503000000020004" pitchFamily="2" charset="0"/>
+                <a:ea typeface="Helvetica Neue" panose="02000503000000020004" pitchFamily="2" charset="0"/>
+                <a:cs typeface="Helvetica Neue" panose="02000503000000020004" pitchFamily="2" charset="0"/>
+              </a:rPr>
+              <a:t>c</a:t>
+            </a:r>
+            <a:r>
+              <a:rPr kumimoji="0" lang="en-US" sz="2240" b="1" i="0" u="none" strike="noStrike" kern="1200" cap="none" spc="0" normalizeH="0" baseline="-25000" noProof="0" dirty="0">
+                <a:ln>
+                  <a:noFill/>
+                </a:ln>
+                <a:solidFill>
+                  <a:prstClr val="white"/>
+                </a:solidFill>
+                <a:effectLst/>
+                <a:uLnTx/>
+                <a:uFillTx/>
+                <a:latin typeface="Helvetica Neue" panose="02000503000000020004" pitchFamily="2" charset="0"/>
+                <a:ea typeface="Helvetica Neue" panose="02000503000000020004" pitchFamily="2" charset="0"/>
+                <a:cs typeface="Helvetica Neue" panose="02000503000000020004" pitchFamily="2" charset="0"/>
+              </a:rPr>
+              <a:t>f</a:t>
             </a:r>
           </a:p>
         </p:txBody>
@@ -32394,7 +33583,7 @@
           <p:cNvPr id="6" name="Straight Arrow Connector 5">
             <a:extLst>
               <a:ext uri="{FF2B5EF4-FFF2-40B4-BE49-F238E27FC236}">
-                <a16:creationId xmlns:a16="http://schemas.microsoft.com/office/drawing/2014/main" id="{3B9C4884-FD04-1DA8-E9C2-C28549C7A16E}"/>
+                <ns2:creationId id="{3B9C4884-FD04-1DA8-E9C2-C28549C7A16E}"/>
               </a:ext>
             </a:extLst>
           </p:cNvPr>
@@ -32438,7 +33627,7 @@
           <p:cNvPr id="7" name="Straight Arrow Connector 6">
             <a:extLst>
               <a:ext uri="{FF2B5EF4-FFF2-40B4-BE49-F238E27FC236}">
-                <a16:creationId xmlns:a16="http://schemas.microsoft.com/office/drawing/2014/main" id="{A6FFF53F-C9D7-1557-FC42-A159BAC6A3AE}"/>
+                <ns2:creationId id="{A6FFF53F-C9D7-1557-FC42-A159BAC6A3AE}"/>
               </a:ext>
             </a:extLst>
           </p:cNvPr>
@@ -32482,7 +33671,7 @@
           <p:cNvPr id="9" name="TextBox 8">
             <a:extLst>
               <a:ext uri="{FF2B5EF4-FFF2-40B4-BE49-F238E27FC236}">
-                <a16:creationId xmlns:a16="http://schemas.microsoft.com/office/drawing/2014/main" id="{37A94EE7-D3B6-AC25-503E-E6C0EE1F179B}"/>
+                <ns2:creationId id="{37A94EE7-D3B6-AC25-503E-E6C0EE1F179B}"/>
               </a:ext>
             </a:extLst>
           </p:cNvPr>
@@ -32547,7 +33736,7 @@
           <p:cNvPr id="11" name="TextBox 10">
             <a:extLst>
               <a:ext uri="{FF2B5EF4-FFF2-40B4-BE49-F238E27FC236}">
-                <a16:creationId xmlns:a16="http://schemas.microsoft.com/office/drawing/2014/main" id="{C80380D5-790B-3854-4D6A-3811EF0E2829}"/>
+                <ns2:creationId id="{C80380D5-790B-3854-4D6A-3811EF0E2829}"/>
               </a:ext>
             </a:extLst>
           </p:cNvPr>
@@ -32646,7 +33835,7 @@
     </p:spTree>
     <p:extLst>
       <p:ext uri="{BB962C8B-B14F-4D97-AF65-F5344CB8AC3E}">
-        <p14:creationId xmlns:p14="http://schemas.microsoft.com/office/powerpoint/2010/main" val="2347082703"/>
+        <ns3:creationId val="2347082703"/>
       </p:ext>
     </p:extLst>
   </p:cSld>
@@ -32657,7 +33846,7 @@
 </file>
 
 <file path=ppt/slides/slide8.xml><?xml version="1.0" encoding="utf-8"?>
-<p:sld xmlns:a="http://schemas.openxmlformats.org/drawingml/2006/main" xmlns:r="http://schemas.openxmlformats.org/officeDocument/2006/relationships" xmlns:p="http://schemas.openxmlformats.org/presentationml/2006/main">
+<p:sld xmlns:a="http://schemas.openxmlformats.org/drawingml/2006/main" xmlns:ns2="http://schemas.microsoft.com/office/drawing/2014/main" xmlns:ns4="http://schemas.microsoft.com/office/powerpoint/2010/main" xmlns:p="http://schemas.openxmlformats.org/presentationml/2006/main" xmlns:r="http://schemas.openxmlformats.org/officeDocument/2006/relationships">
   <p:cSld>
     <p:bg>
       <p:bgPr>
@@ -32672,7 +33861,7 @@
         <p:cNvPr id="1" name="">
           <a:extLst>
             <a:ext uri="{FF2B5EF4-FFF2-40B4-BE49-F238E27FC236}">
-              <a16:creationId xmlns:a16="http://schemas.microsoft.com/office/drawing/2014/main" id="{0AB73162-F4FB-AD38-1F35-FA4B5AB487CE}"/>
+              <ns2:creationId id="{0AB73162-F4FB-AD38-1F35-FA4B5AB487CE}"/>
             </a:ext>
           </a:extLst>
         </p:cNvPr>
@@ -32692,7 +33881,7 @@
           <p:cNvPr id="5" name="Footer Placeholder 3">
             <a:extLst>
               <a:ext uri="{FF2B5EF4-FFF2-40B4-BE49-F238E27FC236}">
-                <a16:creationId xmlns:a16="http://schemas.microsoft.com/office/drawing/2014/main" id="{8949F10E-6D23-F0EA-2E56-92DD2DE28C2A}"/>
+                <ns2:creationId id="{8949F10E-6D23-F0EA-2E56-92DD2DE28C2A}"/>
               </a:ext>
             </a:extLst>
           </p:cNvPr>
@@ -32854,7 +34043,7 @@
           <p:cNvPr id="9" name="Group 8">
             <a:extLst>
               <a:ext uri="{FF2B5EF4-FFF2-40B4-BE49-F238E27FC236}">
-                <a16:creationId xmlns:a16="http://schemas.microsoft.com/office/drawing/2014/main" id="{E9850113-AB4C-1F87-EB30-16E25C586B5C}"/>
+                <ns2:creationId id="{E9850113-AB4C-1F87-EB30-16E25C586B5C}"/>
               </a:ext>
             </a:extLst>
           </p:cNvPr>
@@ -32874,7 +34063,7 @@
             <p:cNvPr id="3" name="Picture 2">
               <a:extLst>
                 <a:ext uri="{FF2B5EF4-FFF2-40B4-BE49-F238E27FC236}">
-                  <a16:creationId xmlns:a16="http://schemas.microsoft.com/office/drawing/2014/main" id="{9851A9B8-C2CC-C4AE-6C06-EB4B33725392}"/>
+                  <ns2:creationId id="{9851A9B8-C2CC-C4AE-6C06-EB4B33725392}"/>
                 </a:ext>
               </a:extLst>
             </p:cNvPr>
@@ -32911,7 +34100,7 @@
             <p:cNvPr id="4" name="Freeform 3">
               <a:extLst>
                 <a:ext uri="{FF2B5EF4-FFF2-40B4-BE49-F238E27FC236}">
-                  <a16:creationId xmlns:a16="http://schemas.microsoft.com/office/drawing/2014/main" id="{A6E4734A-F61C-B1B6-E09B-251407A8B0F9}"/>
+                  <ns2:creationId id="{A6E4734A-F61C-B1B6-E09B-251407A8B0F9}"/>
                 </a:ext>
               </a:extLst>
             </p:cNvPr>
@@ -33056,7 +34245,7 @@
             <p:cNvPr id="6" name="Freeform 5">
               <a:extLst>
                 <a:ext uri="{FF2B5EF4-FFF2-40B4-BE49-F238E27FC236}">
-                  <a16:creationId xmlns:a16="http://schemas.microsoft.com/office/drawing/2014/main" id="{AE9693B7-399D-4648-5934-BAF780F94BB8}"/>
+                  <ns2:creationId id="{AE9693B7-399D-4648-5934-BAF780F94BB8}"/>
                 </a:ext>
               </a:extLst>
             </p:cNvPr>
@@ -33242,7 +34431,7 @@
           <p:cNvPr id="7" name="Title 1">
             <a:extLst>
               <a:ext uri="{FF2B5EF4-FFF2-40B4-BE49-F238E27FC236}">
-                <a16:creationId xmlns:a16="http://schemas.microsoft.com/office/drawing/2014/main" id="{B4E061E7-B3BA-067C-8AC0-2AEC475558B3}"/>
+                <ns2:creationId id="{B4E061E7-B3BA-067C-8AC0-2AEC475558B3}"/>
               </a:ext>
             </a:extLst>
           </p:cNvPr>
@@ -33326,7 +34515,7 @@
           <p:cNvPr id="10" name="TextBox 9">
             <a:extLst>
               <a:ext uri="{FF2B5EF4-FFF2-40B4-BE49-F238E27FC236}">
-                <a16:creationId xmlns:a16="http://schemas.microsoft.com/office/drawing/2014/main" id="{FFF14DD8-B78C-E1D8-EB01-782F6700411F}"/>
+                <ns2:creationId id="{FFF14DD8-B78C-E1D8-EB01-782F6700411F}"/>
               </a:ext>
             </a:extLst>
           </p:cNvPr>
@@ -33547,7 +34736,7 @@
     </p:spTree>
     <p:extLst>
       <p:ext uri="{BB962C8B-B14F-4D97-AF65-F5344CB8AC3E}">
-        <p14:creationId xmlns:p14="http://schemas.microsoft.com/office/powerpoint/2010/main" val="3392406910"/>
+        <ns4:creationId val="3392406910"/>
       </p:ext>
     </p:extLst>
   </p:cSld>
@@ -33558,7 +34747,7 @@
 </file>
 
 <file path=ppt/slides/slide9.xml><?xml version="1.0" encoding="utf-8"?>
-<p:sld xmlns:a="http://schemas.openxmlformats.org/drawingml/2006/main" xmlns:r="http://schemas.openxmlformats.org/officeDocument/2006/relationships" xmlns:p="http://schemas.openxmlformats.org/presentationml/2006/main">
+<p:sld xmlns:a="http://schemas.openxmlformats.org/drawingml/2006/main" xmlns:ns2="http://schemas.microsoft.com/office/drawing/2014/main" xmlns:ns3="http://schemas.microsoft.com/office/powerpoint/2010/main" xmlns:p="http://schemas.openxmlformats.org/presentationml/2006/main">
   <p:cSld>
     <p:bg>
       <p:bgPr>
@@ -33587,7 +34776,7 @@
           <p:cNvPr id="11" name="Footer Placeholder 3">
             <a:extLst>
               <a:ext uri="{FF2B5EF4-FFF2-40B4-BE49-F238E27FC236}">
-                <a16:creationId xmlns:a16="http://schemas.microsoft.com/office/drawing/2014/main" id="{7C94C084-4476-0C4E-B896-CB3AC89A47F6}"/>
+                <ns2:creationId id="{7C94C084-4476-0C4E-B896-CB3AC89A47F6}"/>
               </a:ext>
             </a:extLst>
           </p:cNvPr>
@@ -33721,7 +34910,7 @@
           <p:cNvPr id="6" name="Freeform 5">
             <a:extLst>
               <a:ext uri="{FF2B5EF4-FFF2-40B4-BE49-F238E27FC236}">
-                <a16:creationId xmlns:a16="http://schemas.microsoft.com/office/drawing/2014/main" id="{A25DAE9F-BED8-3A57-CD97-EDBD9F0EDD69}"/>
+                <ns2:creationId id="{A25DAE9F-BED8-3A57-CD97-EDBD9F0EDD69}"/>
               </a:ext>
             </a:extLst>
           </p:cNvPr>
@@ -34317,7 +35506,7 @@
           <p:cNvPr id="7" name="Freeform 6">
             <a:extLst>
               <a:ext uri="{FF2B5EF4-FFF2-40B4-BE49-F238E27FC236}">
-                <a16:creationId xmlns:a16="http://schemas.microsoft.com/office/drawing/2014/main" id="{3F833B4A-7F30-F940-BD46-AAD4F1EC84C2}"/>
+                <ns2:creationId id="{3F833B4A-7F30-F940-BD46-AAD4F1EC84C2}"/>
               </a:ext>
             </a:extLst>
           </p:cNvPr>
@@ -35179,7 +36368,7 @@
           <p:cNvPr id="9" name="Oval 8">
             <a:extLst>
               <a:ext uri="{FF2B5EF4-FFF2-40B4-BE49-F238E27FC236}">
-                <a16:creationId xmlns:a16="http://schemas.microsoft.com/office/drawing/2014/main" id="{C1204F89-67E6-2520-9CB7-C11AD96E6395}"/>
+                <ns2:creationId id="{C1204F89-67E6-2520-9CB7-C11AD96E6395}"/>
               </a:ext>
             </a:extLst>
           </p:cNvPr>
@@ -35231,7 +36420,7 @@
           <p:cNvPr id="10" name="Oval 9">
             <a:extLst>
               <a:ext uri="{FF2B5EF4-FFF2-40B4-BE49-F238E27FC236}">
-                <a16:creationId xmlns:a16="http://schemas.microsoft.com/office/drawing/2014/main" id="{C20E3F99-5E93-DCB1-5438-4A8D42DA25E5}"/>
+                <ns2:creationId id="{C20E3F99-5E93-DCB1-5438-4A8D42DA25E5}"/>
               </a:ext>
             </a:extLst>
           </p:cNvPr>
@@ -35283,7 +36472,7 @@
           <p:cNvPr id="12" name="Straight Connector 11">
             <a:extLst>
               <a:ext uri="{FF2B5EF4-FFF2-40B4-BE49-F238E27FC236}">
-                <a16:creationId xmlns:a16="http://schemas.microsoft.com/office/drawing/2014/main" id="{981DDF22-4015-B62D-15E4-53D55BFB533D}"/>
+                <ns2:creationId id="{981DDF22-4015-B62D-15E4-53D55BFB533D}"/>
               </a:ext>
             </a:extLst>
           </p:cNvPr>
@@ -35329,7 +36518,7 @@
           <p:cNvPr id="13" name="Oval 12">
             <a:extLst>
               <a:ext uri="{FF2B5EF4-FFF2-40B4-BE49-F238E27FC236}">
-                <a16:creationId xmlns:a16="http://schemas.microsoft.com/office/drawing/2014/main" id="{54ADE077-5C44-29DF-0132-D3CEA80605F9}"/>
+                <ns2:creationId id="{54ADE077-5C44-29DF-0132-D3CEA80605F9}"/>
               </a:ext>
             </a:extLst>
           </p:cNvPr>
@@ -35384,7 +36573,7 @@
           <p:cNvPr id="14" name="Oval 13">
             <a:extLst>
               <a:ext uri="{FF2B5EF4-FFF2-40B4-BE49-F238E27FC236}">
-                <a16:creationId xmlns:a16="http://schemas.microsoft.com/office/drawing/2014/main" id="{00672CFA-7F0E-A719-10B0-29AE35096E30}"/>
+                <ns2:creationId id="{00672CFA-7F0E-A719-10B0-29AE35096E30}"/>
               </a:ext>
             </a:extLst>
           </p:cNvPr>
@@ -35436,7 +36625,7 @@
           <p:cNvPr id="15" name="TextBox 14">
             <a:extLst>
               <a:ext uri="{FF2B5EF4-FFF2-40B4-BE49-F238E27FC236}">
-                <a16:creationId xmlns:a16="http://schemas.microsoft.com/office/drawing/2014/main" id="{D484D63C-CCDB-0923-AC0F-BC6DCC85B056}"/>
+                <ns2:creationId id="{D484D63C-CCDB-0923-AC0F-BC6DCC85B056}"/>
               </a:ext>
             </a:extLst>
           </p:cNvPr>
@@ -35460,7 +36649,7 @@
           <a:lstStyle/>
           <a:p>
             <a:r>
-              <a:rPr lang="en-US" dirty="0">
+              <a:rPr lang="en-US" dirty="0" baseline="0">
                 <a:solidFill>
                   <a:srgbClr val="00B050"/>
                 </a:solidFill>
@@ -35468,7 +36657,40 @@
                 <a:ea typeface="Helvetica Neue" panose="02000503000000020004" pitchFamily="2" charset="0"/>
                 <a:cs typeface="Helvetica Neue" panose="02000503000000020004" pitchFamily="2" charset="0"/>
               </a:rPr>
-              <a:t>The causal wake emitted by architrino A at time t' expands at wake speed c_f.</a:t>
+              <a:t xml:space="preserve">The causal wake emitted by architrino A at time t' expands at wake speed </a:t>
+            </a:r>
+            <a:r>
+              <a:rPr lang="en-US" dirty="0" baseline="0">
+                <a:solidFill>
+                  <a:srgbClr val="00B050"/>
+                </a:solidFill>
+                <a:latin typeface="Helvetica Neue" panose="02000503000000020004" pitchFamily="2" charset="0"/>
+                <a:ea typeface="Helvetica Neue" panose="02000503000000020004" pitchFamily="2" charset="0"/>
+                <a:cs typeface="Helvetica Neue" panose="02000503000000020004" pitchFamily="2" charset="0"/>
+              </a:rPr>
+              <a:t>c</a:t>
+            </a:r>
+            <a:r>
+              <a:rPr lang="en-US" dirty="0" baseline="-25000" sz="1260">
+                <a:solidFill>
+                  <a:srgbClr val="00B050"/>
+                </a:solidFill>
+                <a:latin typeface="Helvetica Neue" panose="02000503000000020004" pitchFamily="2" charset="0"/>
+                <a:ea typeface="Helvetica Neue" panose="02000503000000020004" pitchFamily="2" charset="0"/>
+                <a:cs typeface="Helvetica Neue" panose="02000503000000020004" pitchFamily="2" charset="0"/>
+              </a:rPr>
+              <a:t>f</a:t>
+            </a:r>
+            <a:r>
+              <a:rPr lang="en-US" dirty="0" baseline="0">
+                <a:solidFill>
+                  <a:srgbClr val="00B050"/>
+                </a:solidFill>
+                <a:latin typeface="Helvetica Neue" panose="02000503000000020004" pitchFamily="2" charset="0"/>
+                <a:ea typeface="Helvetica Neue" panose="02000503000000020004" pitchFamily="2" charset="0"/>
+                <a:cs typeface="Helvetica Neue" panose="02000503000000020004" pitchFamily="2" charset="0"/>
+              </a:rPr>
+              <a:t>.</a:t>
             </a:r>
           </a:p>
           <a:p>
@@ -35496,7 +36718,7 @@
           <p:cNvPr id="16" name="TextBox 15">
             <a:extLst>
               <a:ext uri="{FF2B5EF4-FFF2-40B4-BE49-F238E27FC236}">
-                <a16:creationId xmlns:a16="http://schemas.microsoft.com/office/drawing/2014/main" id="{2FB06A3B-C8A7-7640-2EE9-203EA6BD717B}"/>
+                <ns2:creationId id="{2FB06A3B-C8A7-7640-2EE9-203EA6BD717B}"/>
               </a:ext>
             </a:extLst>
           </p:cNvPr>
@@ -35543,7 +36765,7 @@
           <p:cNvPr id="19" name="TextBox 18">
             <a:extLst>
               <a:ext uri="{FF2B5EF4-FFF2-40B4-BE49-F238E27FC236}">
-                <a16:creationId xmlns:a16="http://schemas.microsoft.com/office/drawing/2014/main" id="{499A2693-D878-2253-1439-ED993C1F2AD5}"/>
+                <ns2:creationId id="{499A2693-D878-2253-1439-ED993C1F2AD5}"/>
               </a:ext>
             </a:extLst>
           </p:cNvPr>
@@ -35590,7 +36812,7 @@
           <p:cNvPr id="20" name="TextBox 19">
             <a:extLst>
               <a:ext uri="{FF2B5EF4-FFF2-40B4-BE49-F238E27FC236}">
-                <a16:creationId xmlns:a16="http://schemas.microsoft.com/office/drawing/2014/main" id="{328F02D2-95BB-4767-7DBC-B06A0A6115E7}"/>
+                <ns2:creationId id="{328F02D2-95BB-4767-7DBC-B06A0A6115E7}"/>
               </a:ext>
             </a:extLst>
           </p:cNvPr>
@@ -35637,7 +36859,7 @@
           <p:cNvPr id="21" name="TextBox 20">
             <a:extLst>
               <a:ext uri="{FF2B5EF4-FFF2-40B4-BE49-F238E27FC236}">
-                <a16:creationId xmlns:a16="http://schemas.microsoft.com/office/drawing/2014/main" id="{5C915F9D-42F7-1C6D-E114-D633D6E4C109}"/>
+                <ns2:creationId id="{5C915F9D-42F7-1C6D-E114-D633D6E4C109}"/>
               </a:ext>
             </a:extLst>
           </p:cNvPr>
@@ -35684,7 +36906,7 @@
           <p:cNvPr id="22" name="TextBox 21">
             <a:extLst>
               <a:ext uri="{FF2B5EF4-FFF2-40B4-BE49-F238E27FC236}">
-                <a16:creationId xmlns:a16="http://schemas.microsoft.com/office/drawing/2014/main" id="{82FA558D-A9BC-01CE-74CD-F383AA8AFB6C}"/>
+                <ns2:creationId id="{82FA558D-A9BC-01CE-74CD-F383AA8AFB6C}"/>
               </a:ext>
             </a:extLst>
           </p:cNvPr>
@@ -35731,7 +36953,7 @@
           <p:cNvPr id="25" name="Rectangle 24">
             <a:extLst>
               <a:ext uri="{FF2B5EF4-FFF2-40B4-BE49-F238E27FC236}">
-                <a16:creationId xmlns:a16="http://schemas.microsoft.com/office/drawing/2014/main" id="{B4DF9014-6E71-4887-15FC-288C0BE2E472}"/>
+                <ns2:creationId id="{B4DF9014-6E71-4887-15FC-288C0BE2E472}"/>
               </a:ext>
             </a:extLst>
           </p:cNvPr>
@@ -35784,7 +37006,7 @@
           <p:cNvPr id="2" name="Group 1">
             <a:extLst>
               <a:ext uri="{FF2B5EF4-FFF2-40B4-BE49-F238E27FC236}">
-                <a16:creationId xmlns:a16="http://schemas.microsoft.com/office/drawing/2014/main" id="{8513F8A2-0C1C-FA83-EB1D-12942054ECC6}"/>
+                <ns2:creationId id="{8513F8A2-0C1C-FA83-EB1D-12942054ECC6}"/>
               </a:ext>
             </a:extLst>
           </p:cNvPr>
@@ -35804,7 +37026,7 @@
             <p:cNvPr id="3" name="Straight Arrow Connector 2">
               <a:extLst>
                 <a:ext uri="{FF2B5EF4-FFF2-40B4-BE49-F238E27FC236}">
-                  <a16:creationId xmlns:a16="http://schemas.microsoft.com/office/drawing/2014/main" id="{F0E8E829-2926-9AC8-8FBE-CD87D209F5BD}"/>
+                  <ns2:creationId id="{F0E8E829-2926-9AC8-8FBE-CD87D209F5BD}"/>
                 </a:ext>
               </a:extLst>
             </p:cNvPr>
@@ -35848,7 +37070,7 @@
             <p:cNvPr id="4" name="Straight Arrow Connector 3">
               <a:extLst>
                 <a:ext uri="{FF2B5EF4-FFF2-40B4-BE49-F238E27FC236}">
-                  <a16:creationId xmlns:a16="http://schemas.microsoft.com/office/drawing/2014/main" id="{D50F6F6C-E0DD-959D-833A-36F07808AC1D}"/>
+                  <ns2:creationId id="{D50F6F6C-E0DD-959D-833A-36F07808AC1D}"/>
                 </a:ext>
               </a:extLst>
             </p:cNvPr>
@@ -35892,7 +37114,7 @@
             <p:cNvPr id="5" name="TextBox 4">
               <a:extLst>
                 <a:ext uri="{FF2B5EF4-FFF2-40B4-BE49-F238E27FC236}">
-                  <a16:creationId xmlns:a16="http://schemas.microsoft.com/office/drawing/2014/main" id="{EDB020C7-9F2F-9DAE-DC6F-0F4AB0106806}"/>
+                  <ns2:creationId id="{EDB020C7-9F2F-9DAE-DC6F-0F4AB0106806}"/>
                 </a:ext>
               </a:extLst>
             </p:cNvPr>
@@ -35957,7 +37179,7 @@
             <p:cNvPr id="8" name="TextBox 7">
               <a:extLst>
                 <a:ext uri="{FF2B5EF4-FFF2-40B4-BE49-F238E27FC236}">
-                  <a16:creationId xmlns:a16="http://schemas.microsoft.com/office/drawing/2014/main" id="{9833DACC-1D55-AD72-1025-41BEFCBBEFC1}"/>
+                  <ns2:creationId id="{9833DACC-1D55-AD72-1025-41BEFCBBEFC1}"/>
                 </a:ext>
               </a:extLst>
             </p:cNvPr>
@@ -36057,7 +37279,7 @@
     </p:spTree>
     <p:extLst>
       <p:ext uri="{BB962C8B-B14F-4D97-AF65-F5344CB8AC3E}">
-        <p14:creationId xmlns:p14="http://schemas.microsoft.com/office/powerpoint/2010/main" val="2649229030"/>
+        <ns3:creationId val="2649229030"/>
       </p:ext>
     </p:extLst>
   </p:cSld>

--- a/reference/archie/presentations/NPQG Fundamentals - Paths.pptx
+++ b/reference/archie/presentations/NPQG Fundamentals - Paths.pptx
@@ -3,30 +3,28 @@
 <p:presentation xmlns:a="http://schemas.openxmlformats.org/drawingml/2006/main" xmlns:r="http://schemas.openxmlformats.org/officeDocument/2006/relationships" xmlns:p="http://schemas.openxmlformats.org/presentationml/2006/main" saveSubsetFonts="1" autoCompressPictures="0">
   <p:sldMasterIdLst>
     <p:sldMasterId id="2147483648" r:id="rId1"/>
-    <p:sldMasterId id="2147483664" r:id="rId2"/>
   </p:sldMasterIdLst>
   <p:notesMasterIdLst>
-    <p:notesMasterId r:id="rId21"/>
+    <p:notesMasterId r:id="rId19"/>
   </p:notesMasterIdLst>
   <p:sldIdLst>
-    <p:sldId id="890" r:id="rId3"/>
-    <p:sldId id="844" r:id="rId4"/>
-    <p:sldId id="846" r:id="rId5"/>
-    <p:sldId id="845" r:id="rId6"/>
-    <p:sldId id="818" r:id="rId7"/>
-    <p:sldId id="768" r:id="rId8"/>
-    <p:sldId id="769" r:id="rId9"/>
-    <p:sldId id="820" r:id="rId10"/>
-    <p:sldId id="811" r:id="rId11"/>
-    <p:sldId id="843" r:id="rId12"/>
-    <p:sldId id="767" r:id="rId13"/>
-    <p:sldId id="812" r:id="rId14"/>
-    <p:sldId id="889" r:id="rId15"/>
-    <p:sldId id="382" r:id="rId16"/>
-    <p:sldId id="884" r:id="rId17"/>
-    <p:sldId id="885" r:id="rId18"/>
-    <p:sldId id="886" r:id="rId19"/>
-    <p:sldId id="887" r:id="rId20"/>
+    <p:sldId id="890" r:id="rId2"/>
+    <p:sldId id="844" r:id="rId3"/>
+    <p:sldId id="846" r:id="rId4"/>
+    <p:sldId id="845" r:id="rId5"/>
+    <p:sldId id="818" r:id="rId6"/>
+    <p:sldId id="768" r:id="rId7"/>
+    <p:sldId id="769" r:id="rId8"/>
+    <p:sldId id="820" r:id="rId9"/>
+    <p:sldId id="811" r:id="rId10"/>
+    <p:sldId id="843" r:id="rId11"/>
+    <p:sldId id="767" r:id="rId12"/>
+    <p:sldId id="812" r:id="rId13"/>
+    <p:sldId id="889" r:id="rId14"/>
+    <p:sldId id="884" r:id="rId15"/>
+    <p:sldId id="885" r:id="rId16"/>
+    <p:sldId id="886" r:id="rId17"/>
+    <p:sldId id="887" r:id="rId18"/>
   </p:sldIdLst>
   <p:sldSz cx="12192000" cy="6858000"/>
   <p:notesSz cx="6858000" cy="9144000"/>
@@ -494,14 +492,14 @@
 </file>
 
 <file path=ppt/notesSlides/notesSlide1.xml><?xml version="1.0" encoding="utf-8"?>
-<p:notes xmlns:a="http://schemas.openxmlformats.org/drawingml/2006/main" xmlns:ns2="http://schemas.microsoft.com/office/drawing/2014/main" xmlns:ns3="http://schemas.microsoft.com/office/powerpoint/2010/main" xmlns:p="http://schemas.openxmlformats.org/presentationml/2006/main">
+<p:notes xmlns:a="http://schemas.openxmlformats.org/drawingml/2006/main" xmlns:r="http://schemas.openxmlformats.org/officeDocument/2006/relationships" xmlns:p="http://schemas.openxmlformats.org/presentationml/2006/main">
   <p:cSld>
     <p:spTree>
       <p:nvGrpSpPr>
         <p:cNvPr id="1" name="">
           <a:extLst>
             <a:ext uri="{FF2B5EF4-FFF2-40B4-BE49-F238E27FC236}">
-              <ns2:creationId id="{72B4FD5E-E4A1-869A-87AC-4D8560C3AA3A}"/>
+              <a16:creationId xmlns:a16="http://schemas.microsoft.com/office/drawing/2014/main" id="{72B4FD5E-E4A1-869A-87AC-4D8560C3AA3A}"/>
             </a:ext>
           </a:extLst>
         </p:cNvPr>
@@ -521,7 +519,7 @@
           <p:cNvPr id="2" name="Slide Image Placeholder 1">
             <a:extLst>
               <a:ext uri="{FF2B5EF4-FFF2-40B4-BE49-F238E27FC236}">
-                <ns2:creationId id="{5BE4D260-7D14-DF6F-8DA8-28937DE9D0A3}"/>
+                <a16:creationId xmlns:a16="http://schemas.microsoft.com/office/drawing/2014/main" id="{5BE4D260-7D14-DF6F-8DA8-28937DE9D0A3}"/>
               </a:ext>
             </a:extLst>
           </p:cNvPr>
@@ -539,7 +537,7 @@
           <p:cNvPr id="3" name="Notes Placeholder 2">
             <a:extLst>
               <a:ext uri="{FF2B5EF4-FFF2-40B4-BE49-F238E27FC236}">
-                <ns2:creationId id="{4A5A7B81-68A0-4528-3EA2-B6C48D555A49}"/>
+                <a16:creationId xmlns:a16="http://schemas.microsoft.com/office/drawing/2014/main" id="{4A5A7B81-68A0-4528-3EA2-B6C48D555A49}"/>
               </a:ext>
             </a:extLst>
           </p:cNvPr>
@@ -618,7 +616,7 @@
           <p:cNvPr id="4" name="Slide Number Placeholder 3">
             <a:extLst>
               <a:ext uri="{FF2B5EF4-FFF2-40B4-BE49-F238E27FC236}">
-                <ns2:creationId id="{273AC267-9E54-7CAF-A5D8-FE3E621ED2C2}"/>
+                <a16:creationId xmlns:a16="http://schemas.microsoft.com/office/drawing/2014/main" id="{273AC267-9E54-7CAF-A5D8-FE3E621ED2C2}"/>
               </a:ext>
             </a:extLst>
           </p:cNvPr>
@@ -705,7 +703,7 @@
     </p:spTree>
     <p:extLst>
       <p:ext uri="{BB962C8B-B14F-4D97-AF65-F5344CB8AC3E}">
-        <ns3:creationId val="1162151565"/>
+        <p14:creationId xmlns:p14="http://schemas.microsoft.com/office/powerpoint/2010/main" val="1162151565"/>
       </p:ext>
     </p:extLst>
   </p:cSld>
@@ -716,7 +714,7 @@
 </file>
 
 <file path=ppt/notesSlides/notesSlide10.xml><?xml version="1.0" encoding="utf-8"?>
-<p:notes xmlns:a="http://schemas.openxmlformats.org/drawingml/2006/main" xmlns:ns2="http://schemas.microsoft.com/office/powerpoint/2010/main" xmlns:p="http://schemas.openxmlformats.org/presentationml/2006/main">
+<p:notes xmlns:a="http://schemas.openxmlformats.org/drawingml/2006/main" xmlns:r="http://schemas.openxmlformats.org/officeDocument/2006/relationships" xmlns:p="http://schemas.openxmlformats.org/presentationml/2006/main">
   <p:cSld>
     <p:spTree>
       <p:nvGrpSpPr>
@@ -822,23 +820,15 @@
               </a:rPr>
             </a:br>
             <a:r>
-              <a:rPr lang="en-US" sz="9600" b="1" dirty="0" baseline="0">
+              <a:rPr lang="en-US" sz="9600" b="1" baseline="0" dirty="0">
                 <a:latin typeface="Helvetica Neue" panose="02000503000000020004" pitchFamily="2" charset="0"/>
                 <a:ea typeface="Helvetica Neue" panose="02000503000000020004" pitchFamily="2" charset="0"/>
                 <a:cs typeface="Helvetica Neue" panose="02000503000000020004" pitchFamily="2" charset="0"/>
               </a:rPr>
-              <a:t xml:space="preserve">They may also be riding on their own wake if v &gt; </a:t>
-            </a:r>
-            <a:r>
-              <a:rPr lang="en-US" sz="9600" b="1" dirty="0" baseline="0">
-                <a:latin typeface="Helvetica Neue" panose="02000503000000020004" pitchFamily="2" charset="0"/>
-                <a:ea typeface="Helvetica Neue" panose="02000503000000020004" pitchFamily="2" charset="0"/>
-                <a:cs typeface="Helvetica Neue" panose="02000503000000020004" pitchFamily="2" charset="0"/>
-              </a:rPr>
-              <a:t>c</a:t>
-            </a:r>
-            <a:r>
-              <a:rPr lang="en-US" sz="6720" b="1" dirty="0" baseline="-25000">
+              <a:t>They may also be riding on their own wake if v &gt; c</a:t>
+            </a:r>
+            <a:r>
+              <a:rPr lang="en-US" sz="6720" b="1" baseline="-25000" dirty="0">
                 <a:latin typeface="Helvetica Neue" panose="02000503000000020004" pitchFamily="2" charset="0"/>
                 <a:ea typeface="Helvetica Neue" panose="02000503000000020004" pitchFamily="2" charset="0"/>
                 <a:cs typeface="Helvetica Neue" panose="02000503000000020004" pitchFamily="2" charset="0"/>
@@ -846,12 +836,12 @@
               <a:t>f</a:t>
             </a:r>
             <a:r>
-              <a:rPr lang="en-US" sz="9600" b="1" dirty="0" baseline="0">
+              <a:rPr lang="en-US" sz="9600" b="1" baseline="0" dirty="0">
                 <a:latin typeface="Helvetica Neue" panose="02000503000000020004" pitchFamily="2" charset="0"/>
                 <a:ea typeface="Helvetica Neue" panose="02000503000000020004" pitchFamily="2" charset="0"/>
                 <a:cs typeface="Helvetica Neue" panose="02000503000000020004" pitchFamily="2" charset="0"/>
               </a:rPr>
-              <a:t xml:space="preserve">. </a:t>
+              <a:t>. </a:t>
             </a:r>
             <a:br>
               <a:rPr lang="en-US" sz="9600" b="1" dirty="0">
@@ -861,23 +851,15 @@
               </a:rPr>
             </a:br>
             <a:r>
-              <a:rPr lang="en-US" sz="9600" b="1" dirty="0" baseline="0">
+              <a:rPr lang="en-US" sz="9600" b="1" baseline="0" dirty="0">
                 <a:latin typeface="Helvetica Neue" panose="02000503000000020004" pitchFamily="2" charset="0"/>
                 <a:ea typeface="Helvetica Neue" panose="02000503000000020004" pitchFamily="2" charset="0"/>
                 <a:cs typeface="Helvetica Neue" panose="02000503000000020004" pitchFamily="2" charset="0"/>
               </a:rPr>
-              <a:t>For each partner that has operated at v&gt;</a:t>
-            </a:r>
-            <a:r>
-              <a:rPr lang="en-US" sz="9600" b="1" dirty="0" baseline="0">
-                <a:latin typeface="Helvetica Neue" panose="02000503000000020004" pitchFamily="2" charset="0"/>
-                <a:ea typeface="Helvetica Neue" panose="02000503000000020004" pitchFamily="2" charset="0"/>
-                <a:cs typeface="Helvetica Neue" panose="02000503000000020004" pitchFamily="2" charset="0"/>
-              </a:rPr>
-              <a:t>c</a:t>
-            </a:r>
-            <a:r>
-              <a:rPr lang="en-US" sz="6720" b="1" dirty="0" baseline="-25000">
+              <a:t>For each partner that has operated at v&gt;c</a:t>
+            </a:r>
+            <a:r>
+              <a:rPr lang="en-US" sz="6720" b="1" baseline="-25000" dirty="0">
                 <a:latin typeface="Helvetica Neue" panose="02000503000000020004" pitchFamily="2" charset="0"/>
                 <a:ea typeface="Helvetica Neue" panose="02000503000000020004" pitchFamily="2" charset="0"/>
                 <a:cs typeface="Helvetica Neue" panose="02000503000000020004" pitchFamily="2" charset="0"/>
@@ -885,12 +867,12 @@
               <a:t>f</a:t>
             </a:r>
             <a:r>
-              <a:rPr lang="en-US" sz="9600" b="1" dirty="0" baseline="0">
+              <a:rPr lang="en-US" sz="9600" b="1" baseline="0" dirty="0">
                 <a:latin typeface="Helvetica Neue" panose="02000503000000020004" pitchFamily="2" charset="0"/>
                 <a:ea typeface="Helvetica Neue" panose="02000503000000020004" pitchFamily="2" charset="0"/>
                 <a:cs typeface="Helvetica Neue" panose="02000503000000020004" pitchFamily="2" charset="0"/>
               </a:rPr>
-              <a:t xml:space="preserve"> a architrino may encounter multiple of their wakes or a continuous stretch of wake?  </a:t>
+              <a:t> a architrino may encounter multiple of their wakes or a continuous stretch of wake?  </a:t>
             </a:r>
             <a:br>
               <a:rPr lang="en-US" sz="9600" b="1" dirty="0">
@@ -996,7 +978,7 @@
     </p:spTree>
     <p:extLst>
       <p:ext uri="{BB962C8B-B14F-4D97-AF65-F5344CB8AC3E}">
-        <ns2:creationId val="3496708072"/>
+        <p14:creationId xmlns:p14="http://schemas.microsoft.com/office/powerpoint/2010/main" val="3496708072"/>
       </p:ext>
     </p:extLst>
   </p:cSld>
@@ -1007,7 +989,7 @@
 </file>
 
 <file path=ppt/notesSlides/notesSlide11.xml><?xml version="1.0" encoding="utf-8"?>
-<p:notes xmlns:a="http://schemas.openxmlformats.org/drawingml/2006/main" xmlns:ns2="http://schemas.microsoft.com/office/powerpoint/2010/main" xmlns:p="http://schemas.openxmlformats.org/presentationml/2006/main">
+<p:notes xmlns:a="http://schemas.openxmlformats.org/drawingml/2006/main" xmlns:r="http://schemas.openxmlformats.org/officeDocument/2006/relationships" xmlns:p="http://schemas.openxmlformats.org/presentationml/2006/main">
   <p:cSld>
     <p:spTree>
       <p:nvGrpSpPr>
@@ -1140,7 +1122,7 @@
     </p:spTree>
     <p:extLst>
       <p:ext uri="{BB962C8B-B14F-4D97-AF65-F5344CB8AC3E}">
-        <ns2:creationId val="2550177487"/>
+        <p14:creationId xmlns:p14="http://schemas.microsoft.com/office/powerpoint/2010/main" val="2550177487"/>
       </p:ext>
     </p:extLst>
   </p:cSld>
@@ -1151,14 +1133,14 @@
 </file>
 
 <file path=ppt/notesSlides/notesSlide12.xml><?xml version="1.0" encoding="utf-8"?>
-<p:notes xmlns:a="http://schemas.openxmlformats.org/drawingml/2006/main" xmlns:ns2="http://schemas.microsoft.com/office/drawing/2014/main" xmlns:ns3="http://schemas.microsoft.com/office/powerpoint/2010/main" xmlns:p="http://schemas.openxmlformats.org/presentationml/2006/main">
+<p:notes xmlns:a="http://schemas.openxmlformats.org/drawingml/2006/main" xmlns:r="http://schemas.openxmlformats.org/officeDocument/2006/relationships" xmlns:p="http://schemas.openxmlformats.org/presentationml/2006/main">
   <p:cSld>
     <p:spTree>
       <p:nvGrpSpPr>
         <p:cNvPr id="1" name="">
           <a:extLst>
             <a:ext uri="{FF2B5EF4-FFF2-40B4-BE49-F238E27FC236}">
-              <ns2:creationId id="{5ED7CF9D-0276-52CE-9E2D-3C0D97E2BE37}"/>
+              <a16:creationId xmlns:a16="http://schemas.microsoft.com/office/drawing/2014/main" id="{5ED7CF9D-0276-52CE-9E2D-3C0D97E2BE37}"/>
             </a:ext>
           </a:extLst>
         </p:cNvPr>
@@ -1178,7 +1160,7 @@
           <p:cNvPr id="2" name="Slide Image Placeholder 1">
             <a:extLst>
               <a:ext uri="{FF2B5EF4-FFF2-40B4-BE49-F238E27FC236}">
-                <ns2:creationId id="{3C0A8E7F-6A6D-EE24-EAAB-15ABD0132A48}"/>
+                <a16:creationId xmlns:a16="http://schemas.microsoft.com/office/drawing/2014/main" id="{3C0A8E7F-6A6D-EE24-EAAB-15ABD0132A48}"/>
               </a:ext>
             </a:extLst>
           </p:cNvPr>
@@ -1196,7 +1178,7 @@
           <p:cNvPr id="3" name="Notes Placeholder 2">
             <a:extLst>
               <a:ext uri="{FF2B5EF4-FFF2-40B4-BE49-F238E27FC236}">
-                <ns2:creationId id="{AC4CCC5C-360D-F97E-6352-C9212CC36C75}"/>
+                <a16:creationId xmlns:a16="http://schemas.microsoft.com/office/drawing/2014/main" id="{AC4CCC5C-360D-F97E-6352-C9212CC36C75}"/>
               </a:ext>
             </a:extLst>
           </p:cNvPr>
@@ -1749,7 +1731,7 @@
           <p:cNvPr id="4" name="Slide Number Placeholder 3">
             <a:extLst>
               <a:ext uri="{FF2B5EF4-FFF2-40B4-BE49-F238E27FC236}">
-                <ns2:creationId id="{9BE5A30E-C814-C737-0E87-764F58719305}"/>
+                <a16:creationId xmlns:a16="http://schemas.microsoft.com/office/drawing/2014/main" id="{9BE5A30E-C814-C737-0E87-764F58719305}"/>
               </a:ext>
             </a:extLst>
           </p:cNvPr>
@@ -1776,7 +1758,7 @@
     </p:spTree>
     <p:extLst>
       <p:ext uri="{BB962C8B-B14F-4D97-AF65-F5344CB8AC3E}">
-        <ns3:creationId val="1879055837"/>
+        <p14:creationId xmlns:p14="http://schemas.microsoft.com/office/powerpoint/2010/main" val="1879055837"/>
       </p:ext>
     </p:extLst>
   </p:cSld>
@@ -1787,14 +1769,14 @@
 </file>
 
 <file path=ppt/notesSlides/notesSlide13.xml><?xml version="1.0" encoding="utf-8"?>
-<p:notes xmlns:a="http://schemas.openxmlformats.org/drawingml/2006/main" xmlns:ns2="http://schemas.microsoft.com/office/drawing/2014/main" xmlns:ns3="http://schemas.microsoft.com/office/powerpoint/2010/main" xmlns:p="http://schemas.openxmlformats.org/presentationml/2006/main">
+<p:notes xmlns:a="http://schemas.openxmlformats.org/drawingml/2006/main" xmlns:r="http://schemas.openxmlformats.org/officeDocument/2006/relationships" xmlns:p="http://schemas.openxmlformats.org/presentationml/2006/main">
   <p:cSld>
     <p:spTree>
       <p:nvGrpSpPr>
         <p:cNvPr id="1" name="">
           <a:extLst>
             <a:ext uri="{FF2B5EF4-FFF2-40B4-BE49-F238E27FC236}">
-              <ns2:creationId id="{F4B2594E-083A-33B0-1887-4D75961D8DFC}"/>
+              <a16:creationId xmlns:a16="http://schemas.microsoft.com/office/drawing/2014/main" id="{F4B2594E-083A-33B0-1887-4D75961D8DFC}"/>
             </a:ext>
           </a:extLst>
         </p:cNvPr>
@@ -1814,7 +1796,7 @@
           <p:cNvPr id="2" name="Slide Image Placeholder 1">
             <a:extLst>
               <a:ext uri="{FF2B5EF4-FFF2-40B4-BE49-F238E27FC236}">
-                <ns2:creationId id="{649C972F-8115-0086-8D46-F43BA6CB6AFD}"/>
+                <a16:creationId xmlns:a16="http://schemas.microsoft.com/office/drawing/2014/main" id="{649C972F-8115-0086-8D46-F43BA6CB6AFD}"/>
               </a:ext>
             </a:extLst>
           </p:cNvPr>
@@ -1832,7 +1814,7 @@
           <p:cNvPr id="3" name="Notes Placeholder 2">
             <a:extLst>
               <a:ext uri="{FF2B5EF4-FFF2-40B4-BE49-F238E27FC236}">
-                <ns2:creationId id="{7ECA05C0-C97B-9722-138D-940A0126F522}"/>
+                <a16:creationId xmlns:a16="http://schemas.microsoft.com/office/drawing/2014/main" id="{7ECA05C0-C97B-9722-138D-940A0126F522}"/>
               </a:ext>
             </a:extLst>
           </p:cNvPr>
@@ -1911,7 +1893,7 @@
           <p:cNvPr id="4" name="Slide Number Placeholder 3">
             <a:extLst>
               <a:ext uri="{FF2B5EF4-FFF2-40B4-BE49-F238E27FC236}">
-                <ns2:creationId id="{49D93F59-9C10-56A8-29DB-C5BD61D5AF10}"/>
+                <a16:creationId xmlns:a16="http://schemas.microsoft.com/office/drawing/2014/main" id="{49D93F59-9C10-56A8-29DB-C5BD61D5AF10}"/>
               </a:ext>
             </a:extLst>
           </p:cNvPr>
@@ -1976,7 +1958,7 @@
                 <a:tabLst/>
                 <a:defRPr/>
               </a:pPr>
-              <a:t>15</a:t>
+              <a:t>14</a:t>
             </a:fld>
             <a:endParaRPr kumimoji="0" lang="en-US" sz="1200" b="0" i="0" u="none" strike="noStrike" kern="1200" cap="none" spc="0" normalizeH="0" baseline="0" noProof="0">
               <a:ln>
@@ -1998,7 +1980,7 @@
     </p:spTree>
     <p:extLst>
       <p:ext uri="{BB962C8B-B14F-4D97-AF65-F5344CB8AC3E}">
-        <ns3:creationId val="1734577285"/>
+        <p14:creationId xmlns:p14="http://schemas.microsoft.com/office/powerpoint/2010/main" val="1734577285"/>
       </p:ext>
     </p:extLst>
   </p:cSld>
@@ -2009,7 +1991,7 @@
 </file>
 
 <file path=ppt/notesSlides/notesSlide2.xml><?xml version="1.0" encoding="utf-8"?>
-<p:notes xmlns:a="http://schemas.openxmlformats.org/drawingml/2006/main" xmlns:ns2="http://schemas.microsoft.com/office/powerpoint/2010/main" xmlns:p="http://schemas.openxmlformats.org/presentationml/2006/main">
+<p:notes xmlns:a="http://schemas.openxmlformats.org/drawingml/2006/main" xmlns:r="http://schemas.openxmlformats.org/officeDocument/2006/relationships" xmlns:p="http://schemas.openxmlformats.org/presentationml/2006/main">
   <p:cSld>
     <p:spTree>
       <p:nvGrpSpPr>
@@ -2170,7 +2152,7 @@
     </p:spTree>
     <p:extLst>
       <p:ext uri="{BB962C8B-B14F-4D97-AF65-F5344CB8AC3E}">
-        <ns2:creationId val="860550296"/>
+        <p14:creationId xmlns:p14="http://schemas.microsoft.com/office/powerpoint/2010/main" val="860550296"/>
       </p:ext>
     </p:extLst>
   </p:cSld>
@@ -2181,14 +2163,14 @@
 </file>
 
 <file path=ppt/notesSlides/notesSlide3.xml><?xml version="1.0" encoding="utf-8"?>
-<p:notes xmlns:a="http://schemas.openxmlformats.org/drawingml/2006/main" xmlns:ns2="http://schemas.microsoft.com/office/drawing/2014/main" xmlns:ns3="http://schemas.microsoft.com/office/powerpoint/2010/main" xmlns:p="http://schemas.openxmlformats.org/presentationml/2006/main">
+<p:notes xmlns:a="http://schemas.openxmlformats.org/drawingml/2006/main" xmlns:r="http://schemas.openxmlformats.org/officeDocument/2006/relationships" xmlns:p="http://schemas.openxmlformats.org/presentationml/2006/main">
   <p:cSld>
     <p:spTree>
       <p:nvGrpSpPr>
         <p:cNvPr id="1" name="">
           <a:extLst>
             <a:ext uri="{FF2B5EF4-FFF2-40B4-BE49-F238E27FC236}">
-              <ns2:creationId id="{93C7B214-35E5-40E6-ED8E-2D7C6DAB00FD}"/>
+              <a16:creationId xmlns:a16="http://schemas.microsoft.com/office/drawing/2014/main" id="{93C7B214-35E5-40E6-ED8E-2D7C6DAB00FD}"/>
             </a:ext>
           </a:extLst>
         </p:cNvPr>
@@ -2208,7 +2190,7 @@
           <p:cNvPr id="2" name="Slide Image Placeholder 1">
             <a:extLst>
               <a:ext uri="{FF2B5EF4-FFF2-40B4-BE49-F238E27FC236}">
-                <ns2:creationId id="{B69B170F-C727-57B1-1343-0F8509F3ABE8}"/>
+                <a16:creationId xmlns:a16="http://schemas.microsoft.com/office/drawing/2014/main" id="{B69B170F-C727-57B1-1343-0F8509F3ABE8}"/>
               </a:ext>
             </a:extLst>
           </p:cNvPr>
@@ -2226,7 +2208,7 @@
           <p:cNvPr id="3" name="Notes Placeholder 2">
             <a:extLst>
               <a:ext uri="{FF2B5EF4-FFF2-40B4-BE49-F238E27FC236}">
-                <ns2:creationId id="{7981E51D-982C-C58E-5C9D-E60D1957190A}"/>
+                <a16:creationId xmlns:a16="http://schemas.microsoft.com/office/drawing/2014/main" id="{7981E51D-982C-C58E-5C9D-E60D1957190A}"/>
               </a:ext>
             </a:extLst>
           </p:cNvPr>
@@ -2279,7 +2261,7 @@
           <p:cNvPr id="4" name="Slide Number Placeholder 3">
             <a:extLst>
               <a:ext uri="{FF2B5EF4-FFF2-40B4-BE49-F238E27FC236}">
-                <ns2:creationId id="{3694923C-44A0-8AF2-498D-3125889DDCB4}"/>
+                <a16:creationId xmlns:a16="http://schemas.microsoft.com/office/drawing/2014/main" id="{3694923C-44A0-8AF2-498D-3125889DDCB4}"/>
               </a:ext>
             </a:extLst>
           </p:cNvPr>
@@ -2366,7 +2348,7 @@
     </p:spTree>
     <p:extLst>
       <p:ext uri="{BB962C8B-B14F-4D97-AF65-F5344CB8AC3E}">
-        <ns3:creationId val="131822489"/>
+        <p14:creationId xmlns:p14="http://schemas.microsoft.com/office/powerpoint/2010/main" val="131822489"/>
       </p:ext>
     </p:extLst>
   </p:cSld>
@@ -2377,14 +2359,14 @@
 </file>
 
 <file path=ppt/notesSlides/notesSlide4.xml><?xml version="1.0" encoding="utf-8"?>
-<p:notes xmlns:a="http://schemas.openxmlformats.org/drawingml/2006/main" xmlns:ns2="http://schemas.microsoft.com/office/drawing/2014/main" xmlns:ns3="http://schemas.microsoft.com/office/powerpoint/2010/main" xmlns:p="http://schemas.openxmlformats.org/presentationml/2006/main">
+<p:notes xmlns:a="http://schemas.openxmlformats.org/drawingml/2006/main" xmlns:r="http://schemas.openxmlformats.org/officeDocument/2006/relationships" xmlns:p="http://schemas.openxmlformats.org/presentationml/2006/main">
   <p:cSld>
     <p:spTree>
       <p:nvGrpSpPr>
         <p:cNvPr id="1" name="">
           <a:extLst>
             <a:ext uri="{FF2B5EF4-FFF2-40B4-BE49-F238E27FC236}">
-              <ns2:creationId id="{95E231E5-42FD-4E85-EE2F-519914DCAD49}"/>
+              <a16:creationId xmlns:a16="http://schemas.microsoft.com/office/drawing/2014/main" id="{95E231E5-42FD-4E85-EE2F-519914DCAD49}"/>
             </a:ext>
           </a:extLst>
         </p:cNvPr>
@@ -2404,7 +2386,7 @@
           <p:cNvPr id="2" name="Slide Image Placeholder 1">
             <a:extLst>
               <a:ext uri="{FF2B5EF4-FFF2-40B4-BE49-F238E27FC236}">
-                <ns2:creationId id="{C4F49BD2-3448-0850-3F07-5ABBD141E54F}"/>
+                <a16:creationId xmlns:a16="http://schemas.microsoft.com/office/drawing/2014/main" id="{C4F49BD2-3448-0850-3F07-5ABBD141E54F}"/>
               </a:ext>
             </a:extLst>
           </p:cNvPr>
@@ -2422,7 +2404,7 @@
           <p:cNvPr id="3" name="Notes Placeholder 2">
             <a:extLst>
               <a:ext uri="{FF2B5EF4-FFF2-40B4-BE49-F238E27FC236}">
-                <ns2:creationId id="{4164BDE8-5673-C9F6-F2F2-B5547A5D45FE}"/>
+                <a16:creationId xmlns:a16="http://schemas.microsoft.com/office/drawing/2014/main" id="{4164BDE8-5673-C9F6-F2F2-B5547A5D45FE}"/>
               </a:ext>
             </a:extLst>
           </p:cNvPr>
@@ -2475,7 +2457,7 @@
           <p:cNvPr id="4" name="Slide Number Placeholder 3">
             <a:extLst>
               <a:ext uri="{FF2B5EF4-FFF2-40B4-BE49-F238E27FC236}">
-                <ns2:creationId id="{C189F22E-58E9-2143-1D57-A988438B2164}"/>
+                <a16:creationId xmlns:a16="http://schemas.microsoft.com/office/drawing/2014/main" id="{C189F22E-58E9-2143-1D57-A988438B2164}"/>
               </a:ext>
             </a:extLst>
           </p:cNvPr>
@@ -2562,7 +2544,7 @@
     </p:spTree>
     <p:extLst>
       <p:ext uri="{BB962C8B-B14F-4D97-AF65-F5344CB8AC3E}">
-        <ns3:creationId val="185871443"/>
+        <p14:creationId xmlns:p14="http://schemas.microsoft.com/office/powerpoint/2010/main" val="185871443"/>
       </p:ext>
     </p:extLst>
   </p:cSld>
@@ -2573,7 +2555,7 @@
 </file>
 
 <file path=ppt/notesSlides/notesSlide5.xml><?xml version="1.0" encoding="utf-8"?>
-<p:notes xmlns:a="http://schemas.openxmlformats.org/drawingml/2006/main" xmlns:ns2="http://schemas.microsoft.com/office/powerpoint/2010/main" xmlns:p="http://schemas.openxmlformats.org/presentationml/2006/main">
+<p:notes xmlns:a="http://schemas.openxmlformats.org/drawingml/2006/main" xmlns:r="http://schemas.openxmlformats.org/officeDocument/2006/relationships" xmlns:p="http://schemas.openxmlformats.org/presentationml/2006/main">
   <p:cSld>
     <p:spTree>
       <p:nvGrpSpPr>
@@ -2734,7 +2716,7 @@
     </p:spTree>
     <p:extLst>
       <p:ext uri="{BB962C8B-B14F-4D97-AF65-F5344CB8AC3E}">
-        <ns2:creationId val="3756986641"/>
+        <p14:creationId xmlns:p14="http://schemas.microsoft.com/office/powerpoint/2010/main" val="3756986641"/>
       </p:ext>
     </p:extLst>
   </p:cSld>
@@ -2745,7 +2727,7 @@
 </file>
 
 <file path=ppt/notesSlides/notesSlide6.xml><?xml version="1.0" encoding="utf-8"?>
-<p:notes xmlns:a="http://schemas.openxmlformats.org/drawingml/2006/main" xmlns:ns2="http://schemas.microsoft.com/office/powerpoint/2010/main" xmlns:p="http://schemas.openxmlformats.org/presentationml/2006/main">
+<p:notes xmlns:a="http://schemas.openxmlformats.org/drawingml/2006/main" xmlns:r="http://schemas.openxmlformats.org/officeDocument/2006/relationships" xmlns:p="http://schemas.openxmlformats.org/presentationml/2006/main">
   <p:cSld>
     <p:spTree>
       <p:nvGrpSpPr>
@@ -2906,7 +2888,7 @@
     </p:spTree>
     <p:extLst>
       <p:ext uri="{BB962C8B-B14F-4D97-AF65-F5344CB8AC3E}">
-        <ns2:creationId val="4143754227"/>
+        <p14:creationId xmlns:p14="http://schemas.microsoft.com/office/powerpoint/2010/main" val="4143754227"/>
       </p:ext>
     </p:extLst>
   </p:cSld>
@@ -2917,7 +2899,7 @@
 </file>
 
 <file path=ppt/notesSlides/notesSlide7.xml><?xml version="1.0" encoding="utf-8"?>
-<p:notes xmlns:a="http://schemas.openxmlformats.org/drawingml/2006/main" xmlns:ns2="http://schemas.microsoft.com/office/powerpoint/2010/main" xmlns:p="http://schemas.openxmlformats.org/presentationml/2006/main">
+<p:notes xmlns:a="http://schemas.openxmlformats.org/drawingml/2006/main" xmlns:r="http://schemas.openxmlformats.org/officeDocument/2006/relationships" xmlns:p="http://schemas.openxmlformats.org/presentationml/2006/main">
   <p:cSld>
     <p:spTree>
       <p:nvGrpSpPr>
@@ -3078,7 +3060,7 @@
     </p:spTree>
     <p:extLst>
       <p:ext uri="{BB962C8B-B14F-4D97-AF65-F5344CB8AC3E}">
-        <ns2:creationId val="1972911739"/>
+        <p14:creationId xmlns:p14="http://schemas.microsoft.com/office/powerpoint/2010/main" val="1972911739"/>
       </p:ext>
     </p:extLst>
   </p:cSld>
@@ -3089,7 +3071,7 @@
 </file>
 
 <file path=ppt/notesSlides/notesSlide8.xml><?xml version="1.0" encoding="utf-8"?>
-<p:notes xmlns:a="http://schemas.openxmlformats.org/drawingml/2006/main" xmlns:ns2="http://schemas.microsoft.com/office/powerpoint/2010/main" xmlns:p="http://schemas.openxmlformats.org/presentationml/2006/main">
+<p:notes xmlns:a="http://schemas.openxmlformats.org/drawingml/2006/main" xmlns:r="http://schemas.openxmlformats.org/officeDocument/2006/relationships" xmlns:p="http://schemas.openxmlformats.org/presentationml/2006/main">
   <p:cSld>
     <p:spTree>
       <p:nvGrpSpPr>
@@ -3690,7 +3672,7 @@
     </p:spTree>
     <p:extLst>
       <p:ext uri="{BB962C8B-B14F-4D97-AF65-F5344CB8AC3E}">
-        <ns2:creationId val="1191104622"/>
+        <p14:creationId xmlns:p14="http://schemas.microsoft.com/office/powerpoint/2010/main" val="1191104622"/>
       </p:ext>
     </p:extLst>
   </p:cSld>
@@ -3701,7 +3683,7 @@
 </file>
 
 <file path=ppt/notesSlides/notesSlide9.xml><?xml version="1.0" encoding="utf-8"?>
-<p:notes xmlns:a="http://schemas.openxmlformats.org/drawingml/2006/main" xmlns:ns2="http://schemas.microsoft.com/office/powerpoint/2010/main" xmlns:p="http://schemas.openxmlformats.org/presentationml/2006/main">
+<p:notes xmlns:a="http://schemas.openxmlformats.org/drawingml/2006/main" xmlns:r="http://schemas.openxmlformats.org/officeDocument/2006/relationships" xmlns:p="http://schemas.openxmlformats.org/presentationml/2006/main">
   <p:cSld>
     <p:spTree>
       <p:nvGrpSpPr>
@@ -3807,23 +3789,15 @@
               </a:rPr>
             </a:br>
             <a:r>
-              <a:rPr lang="en-US" sz="9600" b="1" dirty="0" baseline="0">
+              <a:rPr lang="en-US" sz="9600" b="1" baseline="0" dirty="0">
                 <a:latin typeface="Helvetica Neue" panose="02000503000000020004" pitchFamily="2" charset="0"/>
                 <a:ea typeface="Helvetica Neue" panose="02000503000000020004" pitchFamily="2" charset="0"/>
                 <a:cs typeface="Helvetica Neue" panose="02000503000000020004" pitchFamily="2" charset="0"/>
               </a:rPr>
-              <a:t xml:space="preserve">They may also be riding on their own wake if v &gt; </a:t>
-            </a:r>
-            <a:r>
-              <a:rPr lang="en-US" sz="9600" b="1" dirty="0" baseline="0">
-                <a:latin typeface="Helvetica Neue" panose="02000503000000020004" pitchFamily="2" charset="0"/>
-                <a:ea typeface="Helvetica Neue" panose="02000503000000020004" pitchFamily="2" charset="0"/>
-                <a:cs typeface="Helvetica Neue" panose="02000503000000020004" pitchFamily="2" charset="0"/>
-              </a:rPr>
-              <a:t>c</a:t>
-            </a:r>
-            <a:r>
-              <a:rPr lang="en-US" sz="6720" b="1" dirty="0" baseline="-25000">
+              <a:t>They may also be riding on their own wake if v &gt; c</a:t>
+            </a:r>
+            <a:r>
+              <a:rPr lang="en-US" sz="6720" b="1" baseline="-25000" dirty="0">
                 <a:latin typeface="Helvetica Neue" panose="02000503000000020004" pitchFamily="2" charset="0"/>
                 <a:ea typeface="Helvetica Neue" panose="02000503000000020004" pitchFamily="2" charset="0"/>
                 <a:cs typeface="Helvetica Neue" panose="02000503000000020004" pitchFamily="2" charset="0"/>
@@ -3831,12 +3805,12 @@
               <a:t>f</a:t>
             </a:r>
             <a:r>
-              <a:rPr lang="en-US" sz="9600" b="1" dirty="0" baseline="0">
+              <a:rPr lang="en-US" sz="9600" b="1" baseline="0" dirty="0">
                 <a:latin typeface="Helvetica Neue" panose="02000503000000020004" pitchFamily="2" charset="0"/>
                 <a:ea typeface="Helvetica Neue" panose="02000503000000020004" pitchFamily="2" charset="0"/>
                 <a:cs typeface="Helvetica Neue" panose="02000503000000020004" pitchFamily="2" charset="0"/>
               </a:rPr>
-              <a:t xml:space="preserve">. </a:t>
+              <a:t>. </a:t>
             </a:r>
             <a:br>
               <a:rPr lang="en-US" sz="9600" b="1" dirty="0">
@@ -3846,23 +3820,15 @@
               </a:rPr>
             </a:br>
             <a:r>
-              <a:rPr lang="en-US" sz="9600" b="1" dirty="0" baseline="0">
+              <a:rPr lang="en-US" sz="9600" b="1" baseline="0" dirty="0">
                 <a:latin typeface="Helvetica Neue" panose="02000503000000020004" pitchFamily="2" charset="0"/>
                 <a:ea typeface="Helvetica Neue" panose="02000503000000020004" pitchFamily="2" charset="0"/>
                 <a:cs typeface="Helvetica Neue" panose="02000503000000020004" pitchFamily="2" charset="0"/>
               </a:rPr>
-              <a:t>For each partner that has operated at v&gt;</a:t>
-            </a:r>
-            <a:r>
-              <a:rPr lang="en-US" sz="9600" b="1" dirty="0" baseline="0">
-                <a:latin typeface="Helvetica Neue" panose="02000503000000020004" pitchFamily="2" charset="0"/>
-                <a:ea typeface="Helvetica Neue" panose="02000503000000020004" pitchFamily="2" charset="0"/>
-                <a:cs typeface="Helvetica Neue" panose="02000503000000020004" pitchFamily="2" charset="0"/>
-              </a:rPr>
-              <a:t>c</a:t>
-            </a:r>
-            <a:r>
-              <a:rPr lang="en-US" sz="6720" b="1" dirty="0" baseline="-25000">
+              <a:t>For each partner that has operated at v&gt;c</a:t>
+            </a:r>
+            <a:r>
+              <a:rPr lang="en-US" sz="6720" b="1" baseline="-25000" dirty="0">
                 <a:latin typeface="Helvetica Neue" panose="02000503000000020004" pitchFamily="2" charset="0"/>
                 <a:ea typeface="Helvetica Neue" panose="02000503000000020004" pitchFamily="2" charset="0"/>
                 <a:cs typeface="Helvetica Neue" panose="02000503000000020004" pitchFamily="2" charset="0"/>
@@ -3870,12 +3836,12 @@
               <a:t>f</a:t>
             </a:r>
             <a:r>
-              <a:rPr lang="en-US" sz="9600" b="1" dirty="0" baseline="0">
+              <a:rPr lang="en-US" sz="9600" b="1" baseline="0" dirty="0">
                 <a:latin typeface="Helvetica Neue" panose="02000503000000020004" pitchFamily="2" charset="0"/>
                 <a:ea typeface="Helvetica Neue" panose="02000503000000020004" pitchFamily="2" charset="0"/>
                 <a:cs typeface="Helvetica Neue" panose="02000503000000020004" pitchFamily="2" charset="0"/>
               </a:rPr>
-              <a:t xml:space="preserve"> a architrino may encounter multiple of their wakes or a continuous stretch of wake?  </a:t>
+              <a:t> a architrino may encounter multiple of their wakes or a continuous stretch of wake?  </a:t>
             </a:r>
             <a:br>
               <a:rPr lang="en-US" sz="9600" b="1" dirty="0">
@@ -4032,7 +3998,7 @@
     </p:spTree>
     <p:extLst>
       <p:ext uri="{BB962C8B-B14F-4D97-AF65-F5344CB8AC3E}">
-        <ns2:creationId val="596825902"/>
+        <p14:creationId xmlns:p14="http://schemas.microsoft.com/office/powerpoint/2010/main" val="596825902"/>
       </p:ext>
     </p:extLst>
   </p:cSld>
@@ -4659,597 +4625,6 @@
     <p:extLst>
       <p:ext uri="{BB962C8B-B14F-4D97-AF65-F5344CB8AC3E}">
         <p14:creationId xmlns:p14="http://schemas.microsoft.com/office/powerpoint/2010/main" val="2063727443"/>
-      </p:ext>
-    </p:extLst>
-  </p:cSld>
-  <p:clrMapOvr>
-    <a:masterClrMapping/>
-  </p:clrMapOvr>
-</p:sldLayout>
-</file>
-
-<file path=ppt/slideLayouts/slideLayout12.xml><?xml version="1.0" encoding="utf-8"?>
-<p:sldLayout xmlns:a="http://schemas.openxmlformats.org/drawingml/2006/main" xmlns:r="http://schemas.openxmlformats.org/officeDocument/2006/relationships" xmlns:p="http://schemas.openxmlformats.org/presentationml/2006/main" type="title" preserve="1">
-  <p:cSld name="Title Slide">
-    <p:spTree>
-      <p:nvGrpSpPr>
-        <p:cNvPr id="1" name=""/>
-        <p:cNvGrpSpPr/>
-        <p:nvPr/>
-      </p:nvGrpSpPr>
-      <p:grpSpPr>
-        <a:xfrm>
-          <a:off x="0" y="0"/>
-          <a:ext cx="0" cy="0"/>
-          <a:chOff x="0" y="0"/>
-          <a:chExt cx="0" cy="0"/>
-        </a:xfrm>
-      </p:grpSpPr>
-      <p:sp>
-        <p:nvSpPr>
-          <p:cNvPr id="2" name="Title 1">
-            <a:extLst>
-              <a:ext uri="{FF2B5EF4-FFF2-40B4-BE49-F238E27FC236}">
-                <a16:creationId xmlns:a16="http://schemas.microsoft.com/office/drawing/2014/main" id="{08FC2668-EBEB-AE41-BF76-89062B014B13}"/>
-              </a:ext>
-            </a:extLst>
-          </p:cNvPr>
-          <p:cNvSpPr>
-            <a:spLocks noGrp="1"/>
-          </p:cNvSpPr>
-          <p:nvPr>
-            <p:ph type="ctrTitle"/>
-          </p:nvPr>
-        </p:nvSpPr>
-        <p:spPr>
-          <a:xfrm>
-            <a:off x="1524000" y="1122363"/>
-            <a:ext cx="9144000" cy="2387600"/>
-          </a:xfrm>
-        </p:spPr>
-        <p:txBody>
-          <a:bodyPr anchor="b"/>
-          <a:lstStyle>
-            <a:lvl1pPr algn="ctr">
-              <a:defRPr sz="6000"/>
-            </a:lvl1pPr>
-          </a:lstStyle>
-          <a:p>
-            <a:r>
-              <a:rPr lang="en-US" dirty="0"/>
-              <a:t>Click to edit Master title style</a:t>
-            </a:r>
-          </a:p>
-        </p:txBody>
-      </p:sp>
-      <p:sp>
-        <p:nvSpPr>
-          <p:cNvPr id="3" name="Subtitle 2">
-            <a:extLst>
-              <a:ext uri="{FF2B5EF4-FFF2-40B4-BE49-F238E27FC236}">
-                <a16:creationId xmlns:a16="http://schemas.microsoft.com/office/drawing/2014/main" id="{C8C28A4C-0805-8E44-B54E-3B6F671F8D01}"/>
-              </a:ext>
-            </a:extLst>
-          </p:cNvPr>
-          <p:cNvSpPr>
-            <a:spLocks noGrp="1"/>
-          </p:cNvSpPr>
-          <p:nvPr>
-            <p:ph type="subTitle" idx="1"/>
-          </p:nvPr>
-        </p:nvSpPr>
-        <p:spPr>
-          <a:xfrm>
-            <a:off x="1524000" y="3602038"/>
-            <a:ext cx="9144000" cy="1655762"/>
-          </a:xfrm>
-        </p:spPr>
-        <p:txBody>
-          <a:bodyPr/>
-          <a:lstStyle>
-            <a:lvl1pPr marL="0" indent="0" algn="ctr">
-              <a:buNone/>
-              <a:defRPr sz="2400"/>
-            </a:lvl1pPr>
-            <a:lvl2pPr marL="457200" indent="0" algn="ctr">
-              <a:buNone/>
-              <a:defRPr sz="2000"/>
-            </a:lvl2pPr>
-            <a:lvl3pPr marL="914400" indent="0" algn="ctr">
-              <a:buNone/>
-              <a:defRPr sz="1800"/>
-            </a:lvl3pPr>
-            <a:lvl4pPr marL="1371600" indent="0" algn="ctr">
-              <a:buNone/>
-              <a:defRPr sz="1600"/>
-            </a:lvl4pPr>
-            <a:lvl5pPr marL="1828800" indent="0" algn="ctr">
-              <a:buNone/>
-              <a:defRPr sz="1600"/>
-            </a:lvl5pPr>
-            <a:lvl6pPr marL="2286000" indent="0" algn="ctr">
-              <a:buNone/>
-              <a:defRPr sz="1600"/>
-            </a:lvl6pPr>
-            <a:lvl7pPr marL="2743200" indent="0" algn="ctr">
-              <a:buNone/>
-              <a:defRPr sz="1600"/>
-            </a:lvl7pPr>
-            <a:lvl8pPr marL="3200400" indent="0" algn="ctr">
-              <a:buNone/>
-              <a:defRPr sz="1600"/>
-            </a:lvl8pPr>
-            <a:lvl9pPr marL="3657600" indent="0" algn="ctr">
-              <a:buNone/>
-              <a:defRPr sz="1600"/>
-            </a:lvl9pPr>
-          </a:lstStyle>
-          <a:p>
-            <a:r>
-              <a:rPr lang="en-US"/>
-              <a:t>Click to edit Master subtitle style</a:t>
-            </a:r>
-          </a:p>
-        </p:txBody>
-      </p:sp>
-      <p:sp>
-        <p:nvSpPr>
-          <p:cNvPr id="4" name="Date Placeholder 3">
-            <a:extLst>
-              <a:ext uri="{FF2B5EF4-FFF2-40B4-BE49-F238E27FC236}">
-                <a16:creationId xmlns:a16="http://schemas.microsoft.com/office/drawing/2014/main" id="{293B74C2-6265-7F41-BB8F-D8A0A0C89A63}"/>
-              </a:ext>
-            </a:extLst>
-          </p:cNvPr>
-          <p:cNvSpPr>
-            <a:spLocks noGrp="1"/>
-          </p:cNvSpPr>
-          <p:nvPr>
-            <p:ph type="dt" sz="half" idx="10"/>
-          </p:nvPr>
-        </p:nvSpPr>
-        <p:spPr/>
-        <p:txBody>
-          <a:bodyPr/>
-          <a:lstStyle/>
-          <a:p>
-            <a:fld id="{B1CFC895-F8E0-4049-8BEE-E5499394E46C}" type="datetime1">
-              <a:rPr lang="en-US" smtClean="0"/>
-              <a:t>7/3/26</a:t>
-            </a:fld>
-            <a:endParaRPr lang="en-US"/>
-          </a:p>
-        </p:txBody>
-      </p:sp>
-      <p:sp>
-        <p:nvSpPr>
-          <p:cNvPr id="5" name="Footer Placeholder 4">
-            <a:extLst>
-              <a:ext uri="{FF2B5EF4-FFF2-40B4-BE49-F238E27FC236}">
-                <a16:creationId xmlns:a16="http://schemas.microsoft.com/office/drawing/2014/main" id="{74C53590-4180-6C42-A6BF-707655C15A1D}"/>
-              </a:ext>
-            </a:extLst>
-          </p:cNvPr>
-          <p:cNvSpPr>
-            <a:spLocks noGrp="1"/>
-          </p:cNvSpPr>
-          <p:nvPr>
-            <p:ph type="ftr" sz="quarter" idx="11"/>
-          </p:nvPr>
-        </p:nvSpPr>
-        <p:spPr/>
-        <p:txBody>
-          <a:bodyPr/>
-          <a:lstStyle>
-            <a:lvl1pPr>
-              <a:defRPr/>
-            </a:lvl1pPr>
-          </a:lstStyle>
-          <a:p>
-            <a:r>
-              <a:rPr lang="en-US"/>
-              <a:t>J Mark Morris - Model of Nature - April 2019</a:t>
-            </a:r>
-          </a:p>
-        </p:txBody>
-      </p:sp>
-      <p:sp>
-        <p:nvSpPr>
-          <p:cNvPr id="6" name="Slide Number Placeholder 5">
-            <a:extLst>
-              <a:ext uri="{FF2B5EF4-FFF2-40B4-BE49-F238E27FC236}">
-                <a16:creationId xmlns:a16="http://schemas.microsoft.com/office/drawing/2014/main" id="{93A81401-8545-2D4E-A7FB-31AFC7A8DB71}"/>
-              </a:ext>
-            </a:extLst>
-          </p:cNvPr>
-          <p:cNvSpPr>
-            <a:spLocks noGrp="1"/>
-          </p:cNvSpPr>
-          <p:nvPr>
-            <p:ph type="sldNum" sz="quarter" idx="12"/>
-          </p:nvPr>
-        </p:nvSpPr>
-        <p:spPr/>
-        <p:txBody>
-          <a:bodyPr/>
-          <a:lstStyle/>
-          <a:p>
-            <a:fld id="{D73D4D4B-2FF7-BE46-958C-B004BD45EF6F}" type="slidenum">
-              <a:rPr lang="en-US" smtClean="0"/>
-              <a:t>‹#›</a:t>
-            </a:fld>
-            <a:endParaRPr lang="en-US"/>
-          </a:p>
-        </p:txBody>
-      </p:sp>
-    </p:spTree>
-    <p:extLst>
-      <p:ext uri="{BB962C8B-B14F-4D97-AF65-F5344CB8AC3E}">
-        <p14:creationId xmlns:p14="http://schemas.microsoft.com/office/powerpoint/2010/main" val="3372916978"/>
-      </p:ext>
-    </p:extLst>
-  </p:cSld>
-  <p:clrMapOvr>
-    <a:masterClrMapping/>
-  </p:clrMapOvr>
-</p:sldLayout>
-</file>
-
-<file path=ppt/slideLayouts/slideLayout13.xml><?xml version="1.0" encoding="utf-8"?>
-<p:sldLayout xmlns:a="http://schemas.openxmlformats.org/drawingml/2006/main" xmlns:r="http://schemas.openxmlformats.org/officeDocument/2006/relationships" xmlns:p="http://schemas.openxmlformats.org/presentationml/2006/main" type="obj" preserve="1">
-  <p:cSld name="Title and Content">
-    <p:spTree>
-      <p:nvGrpSpPr>
-        <p:cNvPr id="1" name=""/>
-        <p:cNvGrpSpPr/>
-        <p:nvPr/>
-      </p:nvGrpSpPr>
-      <p:grpSpPr>
-        <a:xfrm>
-          <a:off x="0" y="0"/>
-          <a:ext cx="0" cy="0"/>
-          <a:chOff x="0" y="0"/>
-          <a:chExt cx="0" cy="0"/>
-        </a:xfrm>
-      </p:grpSpPr>
-      <p:sp>
-        <p:nvSpPr>
-          <p:cNvPr id="2" name="Title 1">
-            <a:extLst>
-              <a:ext uri="{FF2B5EF4-FFF2-40B4-BE49-F238E27FC236}">
-                <a16:creationId xmlns:a16="http://schemas.microsoft.com/office/drawing/2014/main" id="{EDF560F9-C770-5C4C-9C93-102EC332DBA4}"/>
-              </a:ext>
-            </a:extLst>
-          </p:cNvPr>
-          <p:cNvSpPr>
-            <a:spLocks noGrp="1"/>
-          </p:cNvSpPr>
-          <p:nvPr>
-            <p:ph type="title"/>
-          </p:nvPr>
-        </p:nvSpPr>
-        <p:spPr>
-          <a:xfrm>
-            <a:off x="838200" y="365125"/>
-            <a:ext cx="10515600" cy="777875"/>
-          </a:xfrm>
-        </p:spPr>
-        <p:txBody>
-          <a:bodyPr/>
-          <a:lstStyle/>
-          <a:p>
-            <a:r>
-              <a:rPr lang="en-US" dirty="0"/>
-              <a:t>Click to edit Master title style</a:t>
-            </a:r>
-          </a:p>
-        </p:txBody>
-      </p:sp>
-      <p:sp>
-        <p:nvSpPr>
-          <p:cNvPr id="3" name="Content Placeholder 2">
-            <a:extLst>
-              <a:ext uri="{FF2B5EF4-FFF2-40B4-BE49-F238E27FC236}">
-                <a16:creationId xmlns:a16="http://schemas.microsoft.com/office/drawing/2014/main" id="{80D38EDA-56F1-1C40-B81E-28B921C4E99F}"/>
-              </a:ext>
-            </a:extLst>
-          </p:cNvPr>
-          <p:cNvSpPr>
-            <a:spLocks noGrp="1"/>
-          </p:cNvSpPr>
-          <p:nvPr>
-            <p:ph idx="1"/>
-          </p:nvPr>
-        </p:nvSpPr>
-        <p:spPr>
-          <a:xfrm>
-            <a:off x="838200" y="1295400"/>
-            <a:ext cx="10515600" cy="4881563"/>
-          </a:xfrm>
-        </p:spPr>
-        <p:txBody>
-          <a:bodyPr/>
-          <a:lstStyle/>
-          <a:p>
-            <a:pPr lvl="0"/>
-            <a:r>
-              <a:rPr lang="en-US" dirty="0"/>
-              <a:t>Edit Master text styles</a:t>
-            </a:r>
-          </a:p>
-          <a:p>
-            <a:pPr lvl="1"/>
-            <a:r>
-              <a:rPr lang="en-US" dirty="0"/>
-              <a:t>Second level</a:t>
-            </a:r>
-          </a:p>
-          <a:p>
-            <a:pPr lvl="2"/>
-            <a:r>
-              <a:rPr lang="en-US" dirty="0"/>
-              <a:t>Third level</a:t>
-            </a:r>
-          </a:p>
-          <a:p>
-            <a:pPr lvl="3"/>
-            <a:r>
-              <a:rPr lang="en-US" dirty="0"/>
-              <a:t>Fourth level</a:t>
-            </a:r>
-          </a:p>
-          <a:p>
-            <a:pPr lvl="4"/>
-            <a:r>
-              <a:rPr lang="en-US" dirty="0"/>
-              <a:t>Fifth level</a:t>
-            </a:r>
-          </a:p>
-        </p:txBody>
-      </p:sp>
-      <p:sp>
-        <p:nvSpPr>
-          <p:cNvPr id="4" name="Date Placeholder 3">
-            <a:extLst>
-              <a:ext uri="{FF2B5EF4-FFF2-40B4-BE49-F238E27FC236}">
-                <a16:creationId xmlns:a16="http://schemas.microsoft.com/office/drawing/2014/main" id="{0AD42772-5D80-F641-A1BB-6048573C4E88}"/>
-              </a:ext>
-            </a:extLst>
-          </p:cNvPr>
-          <p:cNvSpPr>
-            <a:spLocks noGrp="1"/>
-          </p:cNvSpPr>
-          <p:nvPr>
-            <p:ph type="dt" sz="half" idx="10"/>
-          </p:nvPr>
-        </p:nvSpPr>
-        <p:spPr/>
-        <p:txBody>
-          <a:bodyPr/>
-          <a:lstStyle/>
-          <a:p>
-            <a:fld id="{A91F55E2-A889-F24B-B1FE-1E878178F308}" type="datetime1">
-              <a:rPr lang="en-US" smtClean="0"/>
-              <a:t>7/3/26</a:t>
-            </a:fld>
-            <a:endParaRPr lang="en-US"/>
-          </a:p>
-        </p:txBody>
-      </p:sp>
-      <p:sp>
-        <p:nvSpPr>
-          <p:cNvPr id="5" name="Footer Placeholder 4">
-            <a:extLst>
-              <a:ext uri="{FF2B5EF4-FFF2-40B4-BE49-F238E27FC236}">
-                <a16:creationId xmlns:a16="http://schemas.microsoft.com/office/drawing/2014/main" id="{C68FC4AF-90CF-484C-B6C7-5CE1A016FB49}"/>
-              </a:ext>
-            </a:extLst>
-          </p:cNvPr>
-          <p:cNvSpPr>
-            <a:spLocks noGrp="1"/>
-          </p:cNvSpPr>
-          <p:nvPr>
-            <p:ph type="ftr" sz="quarter" idx="11"/>
-          </p:nvPr>
-        </p:nvSpPr>
-        <p:spPr/>
-        <p:txBody>
-          <a:bodyPr/>
-          <a:lstStyle/>
-          <a:p>
-            <a:r>
-              <a:rPr lang="en-US"/>
-              <a:t>J Mark Morris - Model of Nature - April 2019</a:t>
-            </a:r>
-          </a:p>
-        </p:txBody>
-      </p:sp>
-      <p:sp>
-        <p:nvSpPr>
-          <p:cNvPr id="6" name="Slide Number Placeholder 5">
-            <a:extLst>
-              <a:ext uri="{FF2B5EF4-FFF2-40B4-BE49-F238E27FC236}">
-                <a16:creationId xmlns:a16="http://schemas.microsoft.com/office/drawing/2014/main" id="{8169AF1E-33D8-3041-A601-1384C718A8B5}"/>
-              </a:ext>
-            </a:extLst>
-          </p:cNvPr>
-          <p:cNvSpPr>
-            <a:spLocks noGrp="1"/>
-          </p:cNvSpPr>
-          <p:nvPr>
-            <p:ph type="sldNum" sz="quarter" idx="12"/>
-          </p:nvPr>
-        </p:nvSpPr>
-        <p:spPr/>
-        <p:txBody>
-          <a:bodyPr/>
-          <a:lstStyle/>
-          <a:p>
-            <a:fld id="{D73D4D4B-2FF7-BE46-958C-B004BD45EF6F}" type="slidenum">
-              <a:rPr lang="en-US" smtClean="0"/>
-              <a:t>‹#›</a:t>
-            </a:fld>
-            <a:endParaRPr lang="en-US"/>
-          </a:p>
-        </p:txBody>
-      </p:sp>
-    </p:spTree>
-    <p:extLst>
-      <p:ext uri="{BB962C8B-B14F-4D97-AF65-F5344CB8AC3E}">
-        <p14:creationId xmlns:p14="http://schemas.microsoft.com/office/powerpoint/2010/main" val="497139919"/>
-      </p:ext>
-    </p:extLst>
-  </p:cSld>
-  <p:clrMapOvr>
-    <a:masterClrMapping/>
-  </p:clrMapOvr>
-</p:sldLayout>
-</file>
-
-<file path=ppt/slideLayouts/slideLayout14.xml><?xml version="1.0" encoding="utf-8"?>
-<p:sldLayout xmlns:a="http://schemas.openxmlformats.org/drawingml/2006/main" xmlns:r="http://schemas.openxmlformats.org/officeDocument/2006/relationships" xmlns:p="http://schemas.openxmlformats.org/presentationml/2006/main" type="titleOnly" preserve="1">
-  <p:cSld name="Title Only">
-    <p:spTree>
-      <p:nvGrpSpPr>
-        <p:cNvPr id="1" name=""/>
-        <p:cNvGrpSpPr/>
-        <p:nvPr/>
-      </p:nvGrpSpPr>
-      <p:grpSpPr>
-        <a:xfrm>
-          <a:off x="0" y="0"/>
-          <a:ext cx="0" cy="0"/>
-          <a:chOff x="0" y="0"/>
-          <a:chExt cx="0" cy="0"/>
-        </a:xfrm>
-      </p:grpSpPr>
-      <p:sp>
-        <p:nvSpPr>
-          <p:cNvPr id="2" name="Title 1">
-            <a:extLst>
-              <a:ext uri="{FF2B5EF4-FFF2-40B4-BE49-F238E27FC236}">
-                <a16:creationId xmlns:a16="http://schemas.microsoft.com/office/drawing/2014/main" id="{5821822D-6D7A-1342-98EF-890C6F2DA174}"/>
-              </a:ext>
-            </a:extLst>
-          </p:cNvPr>
-          <p:cNvSpPr>
-            <a:spLocks noGrp="1"/>
-          </p:cNvSpPr>
-          <p:nvPr>
-            <p:ph type="title"/>
-          </p:nvPr>
-        </p:nvSpPr>
-        <p:spPr>
-          <a:xfrm>
-            <a:off x="838200" y="365125"/>
-            <a:ext cx="10515600" cy="777875"/>
-          </a:xfrm>
-        </p:spPr>
-        <p:txBody>
-          <a:bodyPr/>
-          <a:lstStyle/>
-          <a:p>
-            <a:r>
-              <a:rPr lang="en-US"/>
-              <a:t>Click to edit Master title style</a:t>
-            </a:r>
-          </a:p>
-        </p:txBody>
-      </p:sp>
-      <p:sp>
-        <p:nvSpPr>
-          <p:cNvPr id="3" name="Date Placeholder 2">
-            <a:extLst>
-              <a:ext uri="{FF2B5EF4-FFF2-40B4-BE49-F238E27FC236}">
-                <a16:creationId xmlns:a16="http://schemas.microsoft.com/office/drawing/2014/main" id="{74CF19EA-9170-5B4B-814F-7425C8E22823}"/>
-              </a:ext>
-            </a:extLst>
-          </p:cNvPr>
-          <p:cNvSpPr>
-            <a:spLocks noGrp="1"/>
-          </p:cNvSpPr>
-          <p:nvPr>
-            <p:ph type="dt" sz="half" idx="10"/>
-          </p:nvPr>
-        </p:nvSpPr>
-        <p:spPr/>
-        <p:txBody>
-          <a:bodyPr/>
-          <a:lstStyle/>
-          <a:p>
-            <a:fld id="{C6E8461C-3391-334C-9885-001B32D724C4}" type="datetime1">
-              <a:rPr lang="en-US" smtClean="0"/>
-              <a:t>7/3/26</a:t>
-            </a:fld>
-            <a:endParaRPr lang="en-US"/>
-          </a:p>
-        </p:txBody>
-      </p:sp>
-      <p:sp>
-        <p:nvSpPr>
-          <p:cNvPr id="4" name="Footer Placeholder 3">
-            <a:extLst>
-              <a:ext uri="{FF2B5EF4-FFF2-40B4-BE49-F238E27FC236}">
-                <a16:creationId xmlns:a16="http://schemas.microsoft.com/office/drawing/2014/main" id="{5882B1FB-ECDF-AD43-9020-0267ED91C04E}"/>
-              </a:ext>
-            </a:extLst>
-          </p:cNvPr>
-          <p:cNvSpPr>
-            <a:spLocks noGrp="1"/>
-          </p:cNvSpPr>
-          <p:nvPr>
-            <p:ph type="ftr" sz="quarter" idx="11"/>
-          </p:nvPr>
-        </p:nvSpPr>
-        <p:spPr/>
-        <p:txBody>
-          <a:bodyPr/>
-          <a:lstStyle>
-            <a:lvl1pPr>
-              <a:defRPr/>
-            </a:lvl1pPr>
-          </a:lstStyle>
-          <a:p>
-            <a:r>
-              <a:rPr lang="en-US"/>
-              <a:t>J Mark Morris - Model of Nature - April 2019</a:t>
-            </a:r>
-          </a:p>
-        </p:txBody>
-      </p:sp>
-      <p:sp>
-        <p:nvSpPr>
-          <p:cNvPr id="5" name="Slide Number Placeholder 4">
-            <a:extLst>
-              <a:ext uri="{FF2B5EF4-FFF2-40B4-BE49-F238E27FC236}">
-                <a16:creationId xmlns:a16="http://schemas.microsoft.com/office/drawing/2014/main" id="{D949C470-5AF0-5246-81E7-95EAEE5639EF}"/>
-              </a:ext>
-            </a:extLst>
-          </p:cNvPr>
-          <p:cNvSpPr>
-            <a:spLocks noGrp="1"/>
-          </p:cNvSpPr>
-          <p:nvPr>
-            <p:ph type="sldNum" sz="quarter" idx="12"/>
-          </p:nvPr>
-        </p:nvSpPr>
-        <p:spPr/>
-        <p:txBody>
-          <a:bodyPr/>
-          <a:lstStyle/>
-          <a:p>
-            <a:fld id="{D73D4D4B-2FF7-BE46-958C-B004BD45EF6F}" type="slidenum">
-              <a:rPr lang="en-US" smtClean="0"/>
-              <a:t>‹#›</a:t>
-            </a:fld>
-            <a:endParaRPr lang="en-US"/>
-          </a:p>
-        </p:txBody>
-      </p:sp>
-    </p:spTree>
-    <p:extLst>
-      <p:ext uri="{BB962C8B-B14F-4D97-AF65-F5344CB8AC3E}">
-        <p14:creationId xmlns:p14="http://schemas.microsoft.com/office/powerpoint/2010/main" val="1963469369"/>
       </p:ext>
     </p:extLst>
   </p:cSld>
@@ -7830,582 +7205,8 @@
 </p:sldMaster>
 </file>
 
-<file path=ppt/slideMasters/slideMaster2.xml><?xml version="1.0" encoding="utf-8"?>
-<p:sldMaster xmlns:a="http://schemas.openxmlformats.org/drawingml/2006/main" xmlns:r="http://schemas.openxmlformats.org/officeDocument/2006/relationships" xmlns:p="http://schemas.openxmlformats.org/presentationml/2006/main">
-  <p:cSld>
-    <p:bg>
-      <p:bgRef idx="1001">
-        <a:schemeClr val="bg1"/>
-      </p:bgRef>
-    </p:bg>
-    <p:spTree>
-      <p:nvGrpSpPr>
-        <p:cNvPr id="1" name=""/>
-        <p:cNvGrpSpPr/>
-        <p:nvPr/>
-      </p:nvGrpSpPr>
-      <p:grpSpPr>
-        <a:xfrm>
-          <a:off x="0" y="0"/>
-          <a:ext cx="0" cy="0"/>
-          <a:chOff x="0" y="0"/>
-          <a:chExt cx="0" cy="0"/>
-        </a:xfrm>
-      </p:grpSpPr>
-      <p:sp>
-        <p:nvSpPr>
-          <p:cNvPr id="2" name="Title Placeholder 1">
-            <a:extLst>
-              <a:ext uri="{FF2B5EF4-FFF2-40B4-BE49-F238E27FC236}">
-                <a16:creationId xmlns:a16="http://schemas.microsoft.com/office/drawing/2014/main" id="{4C79A1DB-155B-0846-9CED-8B75F56E0E58}"/>
-              </a:ext>
-            </a:extLst>
-          </p:cNvPr>
-          <p:cNvSpPr>
-            <a:spLocks noGrp="1"/>
-          </p:cNvSpPr>
-          <p:nvPr>
-            <p:ph type="title"/>
-          </p:nvPr>
-        </p:nvSpPr>
-        <p:spPr>
-          <a:xfrm>
-            <a:off x="838200" y="365125"/>
-            <a:ext cx="10515600" cy="1325563"/>
-          </a:xfrm>
-          <a:prstGeom prst="rect">
-            <a:avLst/>
-          </a:prstGeom>
-        </p:spPr>
-        <p:txBody>
-          <a:bodyPr vert="horz" lIns="91440" tIns="45720" rIns="91440" bIns="45720" rtlCol="0" anchor="ctr">
-            <a:normAutofit/>
-          </a:bodyPr>
-          <a:lstStyle/>
-          <a:p>
-            <a:r>
-              <a:rPr lang="en-US" dirty="0"/>
-              <a:t>Click to edit Master title style</a:t>
-            </a:r>
-          </a:p>
-        </p:txBody>
-      </p:sp>
-      <p:sp>
-        <p:nvSpPr>
-          <p:cNvPr id="3" name="Text Placeholder 2">
-            <a:extLst>
-              <a:ext uri="{FF2B5EF4-FFF2-40B4-BE49-F238E27FC236}">
-                <a16:creationId xmlns:a16="http://schemas.microsoft.com/office/drawing/2014/main" id="{FD69736F-08D5-7643-A656-ABAEB9457A7A}"/>
-              </a:ext>
-            </a:extLst>
-          </p:cNvPr>
-          <p:cNvSpPr>
-            <a:spLocks noGrp="1"/>
-          </p:cNvSpPr>
-          <p:nvPr>
-            <p:ph type="body" idx="1"/>
-          </p:nvPr>
-        </p:nvSpPr>
-        <p:spPr>
-          <a:xfrm>
-            <a:off x="838200" y="1825625"/>
-            <a:ext cx="10515600" cy="4351338"/>
-          </a:xfrm>
-          <a:prstGeom prst="rect">
-            <a:avLst/>
-          </a:prstGeom>
-        </p:spPr>
-        <p:txBody>
-          <a:bodyPr vert="horz" lIns="91440" tIns="45720" rIns="91440" bIns="45720" rtlCol="0">
-            <a:normAutofit/>
-          </a:bodyPr>
-          <a:lstStyle/>
-          <a:p>
-            <a:pPr lvl="0"/>
-            <a:r>
-              <a:rPr lang="en-US"/>
-              <a:t>Edit Master text styles</a:t>
-            </a:r>
-          </a:p>
-          <a:p>
-            <a:pPr lvl="1"/>
-            <a:r>
-              <a:rPr lang="en-US"/>
-              <a:t>Second level</a:t>
-            </a:r>
-          </a:p>
-          <a:p>
-            <a:pPr lvl="2"/>
-            <a:r>
-              <a:rPr lang="en-US"/>
-              <a:t>Third level</a:t>
-            </a:r>
-          </a:p>
-          <a:p>
-            <a:pPr lvl="3"/>
-            <a:r>
-              <a:rPr lang="en-US"/>
-              <a:t>Fourth level</a:t>
-            </a:r>
-          </a:p>
-          <a:p>
-            <a:pPr lvl="4"/>
-            <a:r>
-              <a:rPr lang="en-US"/>
-              <a:t>Fifth level</a:t>
-            </a:r>
-          </a:p>
-        </p:txBody>
-      </p:sp>
-      <p:sp>
-        <p:nvSpPr>
-          <p:cNvPr id="4" name="Date Placeholder 3">
-            <a:extLst>
-              <a:ext uri="{FF2B5EF4-FFF2-40B4-BE49-F238E27FC236}">
-                <a16:creationId xmlns:a16="http://schemas.microsoft.com/office/drawing/2014/main" id="{C0433D04-66F5-D74B-8EEA-459FDC00D1E4}"/>
-              </a:ext>
-            </a:extLst>
-          </p:cNvPr>
-          <p:cNvSpPr>
-            <a:spLocks noGrp="1"/>
-          </p:cNvSpPr>
-          <p:nvPr>
-            <p:ph type="dt" sz="half" idx="2"/>
-          </p:nvPr>
-        </p:nvSpPr>
-        <p:spPr>
-          <a:xfrm>
-            <a:off x="838200" y="6356350"/>
-            <a:ext cx="2743200" cy="365125"/>
-          </a:xfrm>
-          <a:prstGeom prst="rect">
-            <a:avLst/>
-          </a:prstGeom>
-        </p:spPr>
-        <p:txBody>
-          <a:bodyPr vert="horz" lIns="91440" tIns="45720" rIns="91440" bIns="45720" rtlCol="0" anchor="ctr"/>
-          <a:lstStyle>
-            <a:lvl1pPr algn="l">
-              <a:defRPr sz="1200">
-                <a:solidFill>
-                  <a:schemeClr val="tx1">
-                    <a:tint val="75000"/>
-                  </a:schemeClr>
-                </a:solidFill>
-                <a:latin typeface="Helvetica Neue" panose="02000503000000020004" pitchFamily="2" charset="0"/>
-                <a:ea typeface="Helvetica Neue" panose="02000503000000020004" pitchFamily="2" charset="0"/>
-                <a:cs typeface="Helvetica Neue" panose="02000503000000020004" pitchFamily="2" charset="0"/>
-              </a:defRPr>
-            </a:lvl1pPr>
-          </a:lstStyle>
-          <a:p>
-            <a:fld id="{2005EE61-3907-C44D-8624-D47E09E871DB}" type="datetime1">
-              <a:rPr lang="en-US" smtClean="0"/>
-              <a:t>7/3/26</a:t>
-            </a:fld>
-            <a:endParaRPr lang="en-US"/>
-          </a:p>
-        </p:txBody>
-      </p:sp>
-      <p:sp>
-        <p:nvSpPr>
-          <p:cNvPr id="5" name="Footer Placeholder 4">
-            <a:extLst>
-              <a:ext uri="{FF2B5EF4-FFF2-40B4-BE49-F238E27FC236}">
-                <a16:creationId xmlns:a16="http://schemas.microsoft.com/office/drawing/2014/main" id="{9FDE6E67-6F97-E149-8437-635D11E7ED43}"/>
-              </a:ext>
-            </a:extLst>
-          </p:cNvPr>
-          <p:cNvSpPr>
-            <a:spLocks noGrp="1"/>
-          </p:cNvSpPr>
-          <p:nvPr>
-            <p:ph type="ftr" sz="quarter" idx="3"/>
-          </p:nvPr>
-        </p:nvSpPr>
-        <p:spPr>
-          <a:xfrm>
-            <a:off x="4038600" y="6356350"/>
-            <a:ext cx="4114800" cy="365125"/>
-          </a:xfrm>
-          <a:prstGeom prst="rect">
-            <a:avLst/>
-          </a:prstGeom>
-        </p:spPr>
-        <p:txBody>
-          <a:bodyPr vert="horz" lIns="91440" tIns="45720" rIns="91440" bIns="45720" rtlCol="0" anchor="ctr"/>
-          <a:lstStyle>
-            <a:lvl1pPr algn="ctr">
-              <a:defRPr sz="1200">
-                <a:solidFill>
-                  <a:schemeClr val="tx1">
-                    <a:tint val="75000"/>
-                  </a:schemeClr>
-                </a:solidFill>
-                <a:latin typeface="Helvetica Neue" panose="02000503000000020004" pitchFamily="2" charset="0"/>
-                <a:ea typeface="Helvetica Neue" panose="02000503000000020004" pitchFamily="2" charset="0"/>
-                <a:cs typeface="Helvetica Neue" panose="02000503000000020004" pitchFamily="2" charset="0"/>
-              </a:defRPr>
-            </a:lvl1pPr>
-          </a:lstStyle>
-          <a:p>
-            <a:r>
-              <a:rPr lang="en-US"/>
-              <a:t>J Mark Morris - Model of Nature - April 2019</a:t>
-            </a:r>
-          </a:p>
-        </p:txBody>
-      </p:sp>
-      <p:sp>
-        <p:nvSpPr>
-          <p:cNvPr id="6" name="Slide Number Placeholder 5">
-            <a:extLst>
-              <a:ext uri="{FF2B5EF4-FFF2-40B4-BE49-F238E27FC236}">
-                <a16:creationId xmlns:a16="http://schemas.microsoft.com/office/drawing/2014/main" id="{D585CC1E-0AB1-F34A-83C6-0956BF9B4AF3}"/>
-              </a:ext>
-            </a:extLst>
-          </p:cNvPr>
-          <p:cNvSpPr>
-            <a:spLocks noGrp="1"/>
-          </p:cNvSpPr>
-          <p:nvPr>
-            <p:ph type="sldNum" sz="quarter" idx="4"/>
-          </p:nvPr>
-        </p:nvSpPr>
-        <p:spPr>
-          <a:xfrm>
-            <a:off x="8610600" y="6356350"/>
-            <a:ext cx="2743200" cy="365125"/>
-          </a:xfrm>
-          <a:prstGeom prst="rect">
-            <a:avLst/>
-          </a:prstGeom>
-        </p:spPr>
-        <p:txBody>
-          <a:bodyPr vert="horz" lIns="91440" tIns="45720" rIns="91440" bIns="45720" rtlCol="0" anchor="ctr"/>
-          <a:lstStyle>
-            <a:lvl1pPr algn="r">
-              <a:defRPr sz="1200">
-                <a:solidFill>
-                  <a:schemeClr val="tx1">
-                    <a:tint val="75000"/>
-                  </a:schemeClr>
-                </a:solidFill>
-                <a:latin typeface="Helvetica Neue" panose="02000503000000020004" pitchFamily="2" charset="0"/>
-                <a:ea typeface="Helvetica Neue" panose="02000503000000020004" pitchFamily="2" charset="0"/>
-                <a:cs typeface="Helvetica Neue" panose="02000503000000020004" pitchFamily="2" charset="0"/>
-              </a:defRPr>
-            </a:lvl1pPr>
-          </a:lstStyle>
-          <a:p>
-            <a:fld id="{D73D4D4B-2FF7-BE46-958C-B004BD45EF6F}" type="slidenum">
-              <a:rPr lang="en-US" smtClean="0"/>
-              <a:pPr/>
-              <a:t>‹#›</a:t>
-            </a:fld>
-            <a:endParaRPr lang="en-US"/>
-          </a:p>
-        </p:txBody>
-      </p:sp>
-    </p:spTree>
-    <p:extLst>
-      <p:ext uri="{BB962C8B-B14F-4D97-AF65-F5344CB8AC3E}">
-        <p14:creationId xmlns:p14="http://schemas.microsoft.com/office/powerpoint/2010/main" val="4188259015"/>
-      </p:ext>
-    </p:extLst>
-  </p:cSld>
-  <p:clrMap bg1="lt1" tx1="dk1" bg2="lt2" tx2="dk2" accent1="accent1" accent2="accent2" accent3="accent3" accent4="accent4" accent5="accent5" accent6="accent6" hlink="hlink" folHlink="folHlink"/>
-  <p:sldLayoutIdLst>
-    <p:sldLayoutId id="2147483665" r:id="rId1"/>
-    <p:sldLayoutId id="2147483666" r:id="rId2"/>
-    <p:sldLayoutId id="2147483667" r:id="rId3"/>
-  </p:sldLayoutIdLst>
-  <p:hf sldNum="0" hdr="0" dt="0"/>
-  <p:txStyles>
-    <p:titleStyle>
-      <a:lvl1pPr algn="l" defTabSz="914400" rtl="0" eaLnBrk="1" latinLnBrk="0" hangingPunct="1">
-        <a:lnSpc>
-          <a:spcPct val="90000"/>
-        </a:lnSpc>
-        <a:spcBef>
-          <a:spcPct val="0"/>
-        </a:spcBef>
-        <a:buNone/>
-        <a:defRPr sz="4400" kern="1200">
-          <a:solidFill>
-            <a:schemeClr val="tx1"/>
-          </a:solidFill>
-          <a:latin typeface="Helvetica Neue" panose="02000503000000020004" pitchFamily="2" charset="0"/>
-          <a:ea typeface="Helvetica Neue" panose="02000503000000020004" pitchFamily="2" charset="0"/>
-          <a:cs typeface="Helvetica Neue" panose="02000503000000020004" pitchFamily="2" charset="0"/>
-        </a:defRPr>
-      </a:lvl1pPr>
-    </p:titleStyle>
-    <p:bodyStyle>
-      <a:lvl1pPr marL="228600" indent="-228600" algn="l" defTabSz="914400" rtl="0" eaLnBrk="1" latinLnBrk="0" hangingPunct="1">
-        <a:lnSpc>
-          <a:spcPct val="90000"/>
-        </a:lnSpc>
-        <a:spcBef>
-          <a:spcPts val="1000"/>
-        </a:spcBef>
-        <a:buFont typeface="Arial" panose="020B0604020202020204" pitchFamily="34" charset="0"/>
-        <a:buChar char="•"/>
-        <a:defRPr sz="2800" kern="1200">
-          <a:solidFill>
-            <a:schemeClr val="tx1"/>
-          </a:solidFill>
-          <a:latin typeface="Helvetica Neue" panose="02000503000000020004" pitchFamily="2" charset="0"/>
-          <a:ea typeface="Helvetica Neue" panose="02000503000000020004" pitchFamily="2" charset="0"/>
-          <a:cs typeface="Helvetica Neue" panose="02000503000000020004" pitchFamily="2" charset="0"/>
-        </a:defRPr>
-      </a:lvl1pPr>
-      <a:lvl2pPr marL="685800" indent="-228600" algn="l" defTabSz="914400" rtl="0" eaLnBrk="1" latinLnBrk="0" hangingPunct="1">
-        <a:lnSpc>
-          <a:spcPct val="90000"/>
-        </a:lnSpc>
-        <a:spcBef>
-          <a:spcPts val="500"/>
-        </a:spcBef>
-        <a:buFont typeface="Arial" panose="020B0604020202020204" pitchFamily="34" charset="0"/>
-        <a:buChar char="•"/>
-        <a:defRPr sz="2400" kern="1200">
-          <a:solidFill>
-            <a:schemeClr val="tx1"/>
-          </a:solidFill>
-          <a:latin typeface="Helvetica Neue" panose="02000503000000020004" pitchFamily="2" charset="0"/>
-          <a:ea typeface="Helvetica Neue" panose="02000503000000020004" pitchFamily="2" charset="0"/>
-          <a:cs typeface="Helvetica Neue" panose="02000503000000020004" pitchFamily="2" charset="0"/>
-        </a:defRPr>
-      </a:lvl2pPr>
-      <a:lvl3pPr marL="1143000" indent="-228600" algn="l" defTabSz="914400" rtl="0" eaLnBrk="1" latinLnBrk="0" hangingPunct="1">
-        <a:lnSpc>
-          <a:spcPct val="90000"/>
-        </a:lnSpc>
-        <a:spcBef>
-          <a:spcPts val="500"/>
-        </a:spcBef>
-        <a:buFont typeface="Arial" panose="020B0604020202020204" pitchFamily="34" charset="0"/>
-        <a:buChar char="•"/>
-        <a:defRPr sz="2000" kern="1200">
-          <a:solidFill>
-            <a:schemeClr val="tx1"/>
-          </a:solidFill>
-          <a:latin typeface="Helvetica Neue" panose="02000503000000020004" pitchFamily="2" charset="0"/>
-          <a:ea typeface="Helvetica Neue" panose="02000503000000020004" pitchFamily="2" charset="0"/>
-          <a:cs typeface="Helvetica Neue" panose="02000503000000020004" pitchFamily="2" charset="0"/>
-        </a:defRPr>
-      </a:lvl3pPr>
-      <a:lvl4pPr marL="1600200" indent="-228600" algn="l" defTabSz="914400" rtl="0" eaLnBrk="1" latinLnBrk="0" hangingPunct="1">
-        <a:lnSpc>
-          <a:spcPct val="90000"/>
-        </a:lnSpc>
-        <a:spcBef>
-          <a:spcPts val="500"/>
-        </a:spcBef>
-        <a:buFont typeface="Arial" panose="020B0604020202020204" pitchFamily="34" charset="0"/>
-        <a:buChar char="•"/>
-        <a:defRPr sz="1800" kern="1200">
-          <a:solidFill>
-            <a:schemeClr val="tx1"/>
-          </a:solidFill>
-          <a:latin typeface="Helvetica Neue" panose="02000503000000020004" pitchFamily="2" charset="0"/>
-          <a:ea typeface="Helvetica Neue" panose="02000503000000020004" pitchFamily="2" charset="0"/>
-          <a:cs typeface="Helvetica Neue" panose="02000503000000020004" pitchFamily="2" charset="0"/>
-        </a:defRPr>
-      </a:lvl4pPr>
-      <a:lvl5pPr marL="2057400" indent="-228600" algn="l" defTabSz="914400" rtl="0" eaLnBrk="1" latinLnBrk="0" hangingPunct="1">
-        <a:lnSpc>
-          <a:spcPct val="90000"/>
-        </a:lnSpc>
-        <a:spcBef>
-          <a:spcPts val="500"/>
-        </a:spcBef>
-        <a:buFont typeface="Arial" panose="020B0604020202020204" pitchFamily="34" charset="0"/>
-        <a:buChar char="•"/>
-        <a:defRPr sz="1800" kern="1200">
-          <a:solidFill>
-            <a:schemeClr val="tx1"/>
-          </a:solidFill>
-          <a:latin typeface="Helvetica Neue" panose="02000503000000020004" pitchFamily="2" charset="0"/>
-          <a:ea typeface="Helvetica Neue" panose="02000503000000020004" pitchFamily="2" charset="0"/>
-          <a:cs typeface="Helvetica Neue" panose="02000503000000020004" pitchFamily="2" charset="0"/>
-        </a:defRPr>
-      </a:lvl5pPr>
-      <a:lvl6pPr marL="2514600" indent="-228600" algn="l" defTabSz="914400" rtl="0" eaLnBrk="1" latinLnBrk="0" hangingPunct="1">
-        <a:lnSpc>
-          <a:spcPct val="90000"/>
-        </a:lnSpc>
-        <a:spcBef>
-          <a:spcPts val="500"/>
-        </a:spcBef>
-        <a:buFont typeface="Arial" panose="020B0604020202020204" pitchFamily="34" charset="0"/>
-        <a:buChar char="•"/>
-        <a:defRPr sz="1800" kern="1200">
-          <a:solidFill>
-            <a:schemeClr val="tx1"/>
-          </a:solidFill>
-          <a:latin typeface="+mn-lt"/>
-          <a:ea typeface="+mn-ea"/>
-          <a:cs typeface="+mn-cs"/>
-        </a:defRPr>
-      </a:lvl6pPr>
-      <a:lvl7pPr marL="2971800" indent="-228600" algn="l" defTabSz="914400" rtl="0" eaLnBrk="1" latinLnBrk="0" hangingPunct="1">
-        <a:lnSpc>
-          <a:spcPct val="90000"/>
-        </a:lnSpc>
-        <a:spcBef>
-          <a:spcPts val="500"/>
-        </a:spcBef>
-        <a:buFont typeface="Arial" panose="020B0604020202020204" pitchFamily="34" charset="0"/>
-        <a:buChar char="•"/>
-        <a:defRPr sz="1800" kern="1200">
-          <a:solidFill>
-            <a:schemeClr val="tx1"/>
-          </a:solidFill>
-          <a:latin typeface="+mn-lt"/>
-          <a:ea typeface="+mn-ea"/>
-          <a:cs typeface="+mn-cs"/>
-        </a:defRPr>
-      </a:lvl7pPr>
-      <a:lvl8pPr marL="3429000" indent="-228600" algn="l" defTabSz="914400" rtl="0" eaLnBrk="1" latinLnBrk="0" hangingPunct="1">
-        <a:lnSpc>
-          <a:spcPct val="90000"/>
-        </a:lnSpc>
-        <a:spcBef>
-          <a:spcPts val="500"/>
-        </a:spcBef>
-        <a:buFont typeface="Arial" panose="020B0604020202020204" pitchFamily="34" charset="0"/>
-        <a:buChar char="•"/>
-        <a:defRPr sz="1800" kern="1200">
-          <a:solidFill>
-            <a:schemeClr val="tx1"/>
-          </a:solidFill>
-          <a:latin typeface="+mn-lt"/>
-          <a:ea typeface="+mn-ea"/>
-          <a:cs typeface="+mn-cs"/>
-        </a:defRPr>
-      </a:lvl8pPr>
-      <a:lvl9pPr marL="3886200" indent="-228600" algn="l" defTabSz="914400" rtl="0" eaLnBrk="1" latinLnBrk="0" hangingPunct="1">
-        <a:lnSpc>
-          <a:spcPct val="90000"/>
-        </a:lnSpc>
-        <a:spcBef>
-          <a:spcPts val="500"/>
-        </a:spcBef>
-        <a:buFont typeface="Arial" panose="020B0604020202020204" pitchFamily="34" charset="0"/>
-        <a:buChar char="•"/>
-        <a:defRPr sz="1800" kern="1200">
-          <a:solidFill>
-            <a:schemeClr val="tx1"/>
-          </a:solidFill>
-          <a:latin typeface="+mn-lt"/>
-          <a:ea typeface="+mn-ea"/>
-          <a:cs typeface="+mn-cs"/>
-        </a:defRPr>
-      </a:lvl9pPr>
-    </p:bodyStyle>
-    <p:otherStyle>
-      <a:defPPr>
-        <a:defRPr lang="en-US"/>
-      </a:defPPr>
-      <a:lvl1pPr marL="0" algn="l" defTabSz="914400" rtl="0" eaLnBrk="1" latinLnBrk="0" hangingPunct="1">
-        <a:defRPr sz="1800" kern="1200">
-          <a:solidFill>
-            <a:schemeClr val="tx1"/>
-          </a:solidFill>
-          <a:latin typeface="+mn-lt"/>
-          <a:ea typeface="+mn-ea"/>
-          <a:cs typeface="+mn-cs"/>
-        </a:defRPr>
-      </a:lvl1pPr>
-      <a:lvl2pPr marL="457200" algn="l" defTabSz="914400" rtl="0" eaLnBrk="1" latinLnBrk="0" hangingPunct="1">
-        <a:defRPr sz="1800" kern="1200">
-          <a:solidFill>
-            <a:schemeClr val="tx1"/>
-          </a:solidFill>
-          <a:latin typeface="+mn-lt"/>
-          <a:ea typeface="+mn-ea"/>
-          <a:cs typeface="+mn-cs"/>
-        </a:defRPr>
-      </a:lvl2pPr>
-      <a:lvl3pPr marL="914400" algn="l" defTabSz="914400" rtl="0" eaLnBrk="1" latinLnBrk="0" hangingPunct="1">
-        <a:defRPr sz="1800" kern="1200">
-          <a:solidFill>
-            <a:schemeClr val="tx1"/>
-          </a:solidFill>
-          <a:latin typeface="+mn-lt"/>
-          <a:ea typeface="+mn-ea"/>
-          <a:cs typeface="+mn-cs"/>
-        </a:defRPr>
-      </a:lvl3pPr>
-      <a:lvl4pPr marL="1371600" algn="l" defTabSz="914400" rtl="0" eaLnBrk="1" latinLnBrk="0" hangingPunct="1">
-        <a:defRPr sz="1800" kern="1200">
-          <a:solidFill>
-            <a:schemeClr val="tx1"/>
-          </a:solidFill>
-          <a:latin typeface="+mn-lt"/>
-          <a:ea typeface="+mn-ea"/>
-          <a:cs typeface="+mn-cs"/>
-        </a:defRPr>
-      </a:lvl4pPr>
-      <a:lvl5pPr marL="1828800" algn="l" defTabSz="914400" rtl="0" eaLnBrk="1" latinLnBrk="0" hangingPunct="1">
-        <a:defRPr sz="1800" kern="1200">
-          <a:solidFill>
-            <a:schemeClr val="tx1"/>
-          </a:solidFill>
-          <a:latin typeface="+mn-lt"/>
-          <a:ea typeface="+mn-ea"/>
-          <a:cs typeface="+mn-cs"/>
-        </a:defRPr>
-      </a:lvl5pPr>
-      <a:lvl6pPr marL="2286000" algn="l" defTabSz="914400" rtl="0" eaLnBrk="1" latinLnBrk="0" hangingPunct="1">
-        <a:defRPr sz="1800" kern="1200">
-          <a:solidFill>
-            <a:schemeClr val="tx1"/>
-          </a:solidFill>
-          <a:latin typeface="+mn-lt"/>
-          <a:ea typeface="+mn-ea"/>
-          <a:cs typeface="+mn-cs"/>
-        </a:defRPr>
-      </a:lvl6pPr>
-      <a:lvl7pPr marL="2743200" algn="l" defTabSz="914400" rtl="0" eaLnBrk="1" latinLnBrk="0" hangingPunct="1">
-        <a:defRPr sz="1800" kern="1200">
-          <a:solidFill>
-            <a:schemeClr val="tx1"/>
-          </a:solidFill>
-          <a:latin typeface="+mn-lt"/>
-          <a:ea typeface="+mn-ea"/>
-          <a:cs typeface="+mn-cs"/>
-        </a:defRPr>
-      </a:lvl7pPr>
-      <a:lvl8pPr marL="3200400" algn="l" defTabSz="914400" rtl="0" eaLnBrk="1" latinLnBrk="0" hangingPunct="1">
-        <a:defRPr sz="1800" kern="1200">
-          <a:solidFill>
-            <a:schemeClr val="tx1"/>
-          </a:solidFill>
-          <a:latin typeface="+mn-lt"/>
-          <a:ea typeface="+mn-ea"/>
-          <a:cs typeface="+mn-cs"/>
-        </a:defRPr>
-      </a:lvl8pPr>
-      <a:lvl9pPr marL="3657600" algn="l" defTabSz="914400" rtl="0" eaLnBrk="1" latinLnBrk="0" hangingPunct="1">
-        <a:defRPr sz="1800" kern="1200">
-          <a:solidFill>
-            <a:schemeClr val="tx1"/>
-          </a:solidFill>
-          <a:latin typeface="+mn-lt"/>
-          <a:ea typeface="+mn-ea"/>
-          <a:cs typeface="+mn-cs"/>
-        </a:defRPr>
-      </a:lvl9pPr>
-    </p:otherStyle>
-  </p:txStyles>
-</p:sldMaster>
-</file>
-
 <file path=ppt/slides/slide1.xml><?xml version="1.0" encoding="utf-8"?>
-<p:sld xmlns:a="http://schemas.openxmlformats.org/drawingml/2006/main" xmlns:ns2="http://schemas.microsoft.com/office/drawing/2014/main" xmlns:ns3="http://schemas.microsoft.com/office/powerpoint/2010/main" xmlns:p="http://schemas.openxmlformats.org/presentationml/2006/main">
+<p:sld xmlns:a="http://schemas.openxmlformats.org/drawingml/2006/main" xmlns:r="http://schemas.openxmlformats.org/officeDocument/2006/relationships" xmlns:p="http://schemas.openxmlformats.org/presentationml/2006/main">
   <p:cSld>
     <p:bg>
       <p:bgPr>
@@ -8420,7 +7221,7 @@
         <p:cNvPr id="1" name="">
           <a:extLst>
             <a:ext uri="{FF2B5EF4-FFF2-40B4-BE49-F238E27FC236}">
-              <ns2:creationId id="{F12CB3D1-0CE0-632F-6109-64380C884133}"/>
+              <a16:creationId xmlns:a16="http://schemas.microsoft.com/office/drawing/2014/main" id="{F12CB3D1-0CE0-632F-6109-64380C884133}"/>
             </a:ext>
           </a:extLst>
         </p:cNvPr>
@@ -8440,7 +7241,7 @@
           <p:cNvPr id="2" name="TextBox 1">
             <a:extLst>
               <a:ext uri="{FF2B5EF4-FFF2-40B4-BE49-F238E27FC236}">
-                <ns2:creationId id="{4BD4ABB3-A2D3-D440-CAE2-3FE090A98AD7}"/>
+                <a16:creationId xmlns:a16="http://schemas.microsoft.com/office/drawing/2014/main" id="{4BD4ABB3-A2D3-D440-CAE2-3FE090A98AD7}"/>
               </a:ext>
             </a:extLst>
           </p:cNvPr>
@@ -8589,7 +7390,7 @@
     </p:spTree>
     <p:extLst>
       <p:ext uri="{BB962C8B-B14F-4D97-AF65-F5344CB8AC3E}">
-        <ns3:creationId val="3704261708"/>
+        <p14:creationId xmlns:p14="http://schemas.microsoft.com/office/powerpoint/2010/main" val="3704261708"/>
       </p:ext>
     </p:extLst>
   </p:cSld>
@@ -8600,7 +7401,7 @@
 </file>
 
 <file path=ppt/slides/slide10.xml><?xml version="1.0" encoding="utf-8"?>
-<p:sld xmlns:a="http://schemas.openxmlformats.org/drawingml/2006/main" xmlns:ns2="http://schemas.microsoft.com/office/drawing/2014/main" xmlns:ns3="http://schemas.microsoft.com/office/powerpoint/2010/main" xmlns:p="http://schemas.openxmlformats.org/presentationml/2006/main">
+<p:sld xmlns:a="http://schemas.openxmlformats.org/drawingml/2006/main" xmlns:r="http://schemas.openxmlformats.org/officeDocument/2006/relationships" xmlns:p="http://schemas.openxmlformats.org/presentationml/2006/main">
   <p:cSld>
     <p:bg>
       <p:bgPr>
@@ -8629,7 +7430,7 @@
           <p:cNvPr id="4" name="Freeform 3">
             <a:extLst>
               <a:ext uri="{FF2B5EF4-FFF2-40B4-BE49-F238E27FC236}">
-                <ns2:creationId id="{557E8D0E-7530-B118-1DC6-82906B4F6D15}"/>
+                <a16:creationId xmlns:a16="http://schemas.microsoft.com/office/drawing/2014/main" id="{557E8D0E-7530-B118-1DC6-82906B4F6D15}"/>
               </a:ext>
             </a:extLst>
           </p:cNvPr>
@@ -9593,7 +8394,7 @@
           <p:cNvPr id="5" name="Footer Placeholder 3">
             <a:extLst>
               <a:ext uri="{FF2B5EF4-FFF2-40B4-BE49-F238E27FC236}">
-                <ns2:creationId id="{668F77D6-DFDA-5A46-8DF1-47F6A167C2B1}"/>
+                <a16:creationId xmlns:a16="http://schemas.microsoft.com/office/drawing/2014/main" id="{668F77D6-DFDA-5A46-8DF1-47F6A167C2B1}"/>
               </a:ext>
             </a:extLst>
           </p:cNvPr>
@@ -9755,7 +8556,7 @@
           <p:cNvPr id="16" name="Freeform 15">
             <a:extLst>
               <a:ext uri="{FF2B5EF4-FFF2-40B4-BE49-F238E27FC236}">
-                <ns2:creationId id="{226B2D26-F692-894E-9B09-F57FBB5CB2A3}"/>
+                <a16:creationId xmlns:a16="http://schemas.microsoft.com/office/drawing/2014/main" id="{226B2D26-F692-894E-9B09-F57FBB5CB2A3}"/>
               </a:ext>
             </a:extLst>
           </p:cNvPr>
@@ -10638,7 +9439,7 @@
           <p:cNvPr id="19" name="Oval 18">
             <a:extLst>
               <a:ext uri="{FF2B5EF4-FFF2-40B4-BE49-F238E27FC236}">
-                <ns2:creationId id="{0592434B-85D0-0A41-95DD-A29D1D3E92A7}"/>
+                <a16:creationId xmlns:a16="http://schemas.microsoft.com/office/drawing/2014/main" id="{0592434B-85D0-0A41-95DD-A29D1D3E92A7}"/>
               </a:ext>
             </a:extLst>
           </p:cNvPr>
@@ -10719,7 +9520,7 @@
           <p:cNvPr id="22" name="TextBox 21">
             <a:extLst>
               <a:ext uri="{FF2B5EF4-FFF2-40B4-BE49-F238E27FC236}">
-                <ns2:creationId id="{32F7BF73-EB2C-9D42-97FB-D39FDCC924EB}"/>
+                <a16:creationId xmlns:a16="http://schemas.microsoft.com/office/drawing/2014/main" id="{32F7BF73-EB2C-9D42-97FB-D39FDCC924EB}"/>
               </a:ext>
             </a:extLst>
           </p:cNvPr>
@@ -10798,7 +9599,7 @@
           <p:cNvPr id="32" name="Group 31">
             <a:extLst>
               <a:ext uri="{FF2B5EF4-FFF2-40B4-BE49-F238E27FC236}">
-                <ns2:creationId id="{A120AE69-6043-195E-40C7-43C019B9D3A9}"/>
+                <a16:creationId xmlns:a16="http://schemas.microsoft.com/office/drawing/2014/main" id="{A120AE69-6043-195E-40C7-43C019B9D3A9}"/>
               </a:ext>
             </a:extLst>
           </p:cNvPr>
@@ -10818,7 +9619,7 @@
             <p:cNvPr id="24" name="Straight Connector 23">
               <a:extLst>
                 <a:ext uri="{FF2B5EF4-FFF2-40B4-BE49-F238E27FC236}">
-                  <ns2:creationId id="{3A19E039-1667-254C-809A-972BBA46D65C}"/>
+                  <a16:creationId xmlns:a16="http://schemas.microsoft.com/office/drawing/2014/main" id="{3A19E039-1667-254C-809A-972BBA46D65C}"/>
                 </a:ext>
               </a:extLst>
             </p:cNvPr>
@@ -10864,7 +9665,7 @@
             <p:cNvPr id="2" name="Oval 1">
               <a:extLst>
                 <a:ext uri="{FF2B5EF4-FFF2-40B4-BE49-F238E27FC236}">
-                  <ns2:creationId id="{38418338-F1E6-81D9-6A8C-D7EB7AA9DDA2}"/>
+                  <a16:creationId xmlns:a16="http://schemas.microsoft.com/office/drawing/2014/main" id="{38418338-F1E6-81D9-6A8C-D7EB7AA9DDA2}"/>
                 </a:ext>
               </a:extLst>
             </p:cNvPr>
@@ -10949,7 +9750,7 @@
           <p:cNvPr id="29" name="TextBox 28">
             <a:extLst>
               <a:ext uri="{FF2B5EF4-FFF2-40B4-BE49-F238E27FC236}">
-                <ns2:creationId id="{2C329E1C-5E54-9E3C-A6FA-AE50E16EEB85}"/>
+                <a16:creationId xmlns:a16="http://schemas.microsoft.com/office/drawing/2014/main" id="{2C329E1C-5E54-9E3C-A6FA-AE50E16EEB85}"/>
               </a:ext>
             </a:extLst>
           </p:cNvPr>
@@ -11028,7 +9829,7 @@
           <p:cNvPr id="40" name="Group 39">
             <a:extLst>
               <a:ext uri="{FF2B5EF4-FFF2-40B4-BE49-F238E27FC236}">
-                <ns2:creationId id="{C105AAA1-FA00-79D8-70E9-DB832351B5E2}"/>
+                <a16:creationId xmlns:a16="http://schemas.microsoft.com/office/drawing/2014/main" id="{C105AAA1-FA00-79D8-70E9-DB832351B5E2}"/>
               </a:ext>
             </a:extLst>
           </p:cNvPr>
@@ -11048,7 +9849,7 @@
             <p:cNvPr id="41" name="Straight Connector 40">
               <a:extLst>
                 <a:ext uri="{FF2B5EF4-FFF2-40B4-BE49-F238E27FC236}">
-                  <ns2:creationId id="{48D05E5C-4059-6EC7-1299-E52A65F46E3D}"/>
+                  <a16:creationId xmlns:a16="http://schemas.microsoft.com/office/drawing/2014/main" id="{48D05E5C-4059-6EC7-1299-E52A65F46E3D}"/>
                 </a:ext>
               </a:extLst>
             </p:cNvPr>
@@ -11094,7 +9895,7 @@
             <p:cNvPr id="42" name="Oval 41">
               <a:extLst>
                 <a:ext uri="{FF2B5EF4-FFF2-40B4-BE49-F238E27FC236}">
-                  <ns2:creationId id="{8174E055-9EC2-40B6-B317-43A23011EC49}"/>
+                  <a16:creationId xmlns:a16="http://schemas.microsoft.com/office/drawing/2014/main" id="{8174E055-9EC2-40B6-B317-43A23011EC49}"/>
                 </a:ext>
               </a:extLst>
             </p:cNvPr>
@@ -11179,7 +9980,7 @@
           <p:cNvPr id="28" name="TextBox 27">
             <a:extLst>
               <a:ext uri="{FF2B5EF4-FFF2-40B4-BE49-F238E27FC236}">
-                <ns2:creationId id="{B86BBAD0-86F6-0D58-180C-6EA1BDCC33FE}"/>
+                <a16:creationId xmlns:a16="http://schemas.microsoft.com/office/drawing/2014/main" id="{B86BBAD0-86F6-0D58-180C-6EA1BDCC33FE}"/>
               </a:ext>
             </a:extLst>
           </p:cNvPr>
@@ -11308,7 +10109,7 @@
           <p:cNvPr id="6" name="Oval 5">
             <a:extLst>
               <a:ext uri="{FF2B5EF4-FFF2-40B4-BE49-F238E27FC236}">
-                <ns2:creationId id="{AC0CFD16-199C-C379-61A7-C2D95EDE2034}"/>
+                <a16:creationId xmlns:a16="http://schemas.microsoft.com/office/drawing/2014/main" id="{AC0CFD16-199C-C379-61A7-C2D95EDE2034}"/>
               </a:ext>
             </a:extLst>
           </p:cNvPr>
@@ -11360,7 +10161,7 @@
           <p:cNvPr id="7" name="TextBox 6">
             <a:extLst>
               <a:ext uri="{FF2B5EF4-FFF2-40B4-BE49-F238E27FC236}">
-                <ns2:creationId id="{74832E6C-887E-D39B-AAC8-6B87F8F0377B}"/>
+                <a16:creationId xmlns:a16="http://schemas.microsoft.com/office/drawing/2014/main" id="{74832E6C-887E-D39B-AAC8-6B87F8F0377B}"/>
               </a:ext>
             </a:extLst>
           </p:cNvPr>
@@ -11407,7 +10208,7 @@
           <p:cNvPr id="9" name="TextBox 8">
             <a:extLst>
               <a:ext uri="{FF2B5EF4-FFF2-40B4-BE49-F238E27FC236}">
-                <ns2:creationId id="{3FBBB3C0-9EF9-2269-F804-566738A12135}"/>
+                <a16:creationId xmlns:a16="http://schemas.microsoft.com/office/drawing/2014/main" id="{3FBBB3C0-9EF9-2269-F804-566738A12135}"/>
               </a:ext>
             </a:extLst>
           </p:cNvPr>
@@ -11454,7 +10255,7 @@
           <p:cNvPr id="10" name="TextBox 9">
             <a:extLst>
               <a:ext uri="{FF2B5EF4-FFF2-40B4-BE49-F238E27FC236}">
-                <ns2:creationId id="{5AD88C91-2B9D-6C66-4521-C91A0EBE16F1}"/>
+                <a16:creationId xmlns:a16="http://schemas.microsoft.com/office/drawing/2014/main" id="{5AD88C91-2B9D-6C66-4521-C91A0EBE16F1}"/>
               </a:ext>
             </a:extLst>
           </p:cNvPr>
@@ -11501,7 +10302,7 @@
           <p:cNvPr id="11" name="Rectangle 10">
             <a:extLst>
               <a:ext uri="{FF2B5EF4-FFF2-40B4-BE49-F238E27FC236}">
-                <ns2:creationId id="{408E88E8-1AC1-3859-ED6E-998C354C18AF}"/>
+                <a16:creationId xmlns:a16="http://schemas.microsoft.com/office/drawing/2014/main" id="{408E88E8-1AC1-3859-ED6E-998C354C18AF}"/>
               </a:ext>
             </a:extLst>
           </p:cNvPr>
@@ -11554,7 +10355,7 @@
           <p:cNvPr id="14" name="Group 13">
             <a:extLst>
               <a:ext uri="{FF2B5EF4-FFF2-40B4-BE49-F238E27FC236}">
-                <ns2:creationId id="{7A05C4D2-699B-5F84-92AE-09238BDBF4E8}"/>
+                <a16:creationId xmlns:a16="http://schemas.microsoft.com/office/drawing/2014/main" id="{7A05C4D2-699B-5F84-92AE-09238BDBF4E8}"/>
               </a:ext>
             </a:extLst>
           </p:cNvPr>
@@ -11563,10 +10364,10 @@
         </p:nvGrpSpPr>
         <p:grpSpPr>
           <a:xfrm>
-            <a:off x="28129" y="1077673"/>
-            <a:ext cx="11664338" cy="5685100"/>
-            <a:chOff x="28129" y="1077673"/>
-            <a:chExt cx="11664338" cy="5685100"/>
+            <a:off x="77020" y="1077673"/>
+            <a:ext cx="11615447" cy="5685100"/>
+            <a:chOff x="77020" y="1077673"/>
+            <a:chExt cx="11615447" cy="5685100"/>
           </a:xfrm>
         </p:grpSpPr>
         <p:cxnSp>
@@ -11574,7 +10375,7 @@
             <p:cNvPr id="15" name="Straight Arrow Connector 14">
               <a:extLst>
                 <a:ext uri="{FF2B5EF4-FFF2-40B4-BE49-F238E27FC236}">
-                  <ns2:creationId id="{6F7FA685-0220-0300-5C81-7977AB43778D}"/>
+                  <a16:creationId xmlns:a16="http://schemas.microsoft.com/office/drawing/2014/main" id="{6F7FA685-0220-0300-5C81-7977AB43778D}"/>
                 </a:ext>
               </a:extLst>
             </p:cNvPr>
@@ -11618,7 +10419,7 @@
             <p:cNvPr id="17" name="Straight Arrow Connector 16">
               <a:extLst>
                 <a:ext uri="{FF2B5EF4-FFF2-40B4-BE49-F238E27FC236}">
-                  <ns2:creationId id="{8DAAADDE-3685-65B3-881A-0143943C0267}"/>
+                  <a16:creationId xmlns:a16="http://schemas.microsoft.com/office/drawing/2014/main" id="{8DAAADDE-3685-65B3-881A-0143943C0267}"/>
                 </a:ext>
               </a:extLst>
             </p:cNvPr>
@@ -11662,7 +10463,7 @@
             <p:cNvPr id="18" name="TextBox 17">
               <a:extLst>
                 <a:ext uri="{FF2B5EF4-FFF2-40B4-BE49-F238E27FC236}">
-                  <ns2:creationId id="{BAA0C0F5-147D-A6B2-DBB6-6DCB0FFF6BAE}"/>
+                  <a16:creationId xmlns:a16="http://schemas.microsoft.com/office/drawing/2014/main" id="{BAA0C0F5-147D-A6B2-DBB6-6DCB0FFF6BAE}"/>
                 </a:ext>
               </a:extLst>
             </p:cNvPr>
@@ -11727,7 +10528,7 @@
             <p:cNvPr id="20" name="TextBox 19">
               <a:extLst>
                 <a:ext uri="{FF2B5EF4-FFF2-40B4-BE49-F238E27FC236}">
-                  <ns2:creationId id="{84C36D57-9425-3680-6F8D-295F2518BF54}"/>
+                  <a16:creationId xmlns:a16="http://schemas.microsoft.com/office/drawing/2014/main" id="{84C36D57-9425-3680-6F8D-295F2518BF54}"/>
                 </a:ext>
               </a:extLst>
             </p:cNvPr>
@@ -11736,8 +10537,8 @@
           </p:nvSpPr>
           <p:spPr>
             <a:xfrm>
-              <a:off x="28129" y="3162375"/>
-              <a:ext cx="1191352" cy="923330"/>
+              <a:off x="77020" y="3162375"/>
+              <a:ext cx="1093569" cy="646331"/>
             </a:xfrm>
             <a:prstGeom prst="rect">
               <a:avLst/>
@@ -11750,75 +10551,35 @@
             </a:bodyPr>
             <a:lstStyle/>
             <a:p>
-              <a:pPr marL="0" marR="0" lvl="0" indent="0" algn="ctr" defTabSz="914400" rtl="0" eaLnBrk="1" fontAlgn="auto" latinLnBrk="0" hangingPunct="1">
-                <a:lnSpc>
-                  <a:spcPct val="100000"/>
-                </a:lnSpc>
-                <a:spcBef>
-                  <a:spcPts val="0"/>
-                </a:spcBef>
-                <a:spcAft>
-                  <a:spcPts val="0"/>
-                </a:spcAft>
-                <a:buClrTx/>
-                <a:buSzTx/>
-                <a:buFontTx/>
-                <a:buNone/>
-                <a:tabLst/>
+              <a:pPr lvl="0" algn="ctr">
                 <a:defRPr/>
               </a:pPr>
               <a:r>
-                <a:rPr kumimoji="0" lang="en-US" sz="1800" b="0" i="0" u="none" strike="noStrike" kern="1200" cap="none" spc="0" normalizeH="0" baseline="0" noProof="0" dirty="0">
-                  <a:ln>
-                    <a:noFill/>
-                  </a:ln>
+                <a:rPr lang="en-US" dirty="0">
                   <a:solidFill>
                     <a:prstClr val="white"/>
                   </a:solidFill>
-                  <a:effectLst/>
-                  <a:uLnTx/>
-                  <a:uFillTx/>
                   <a:latin typeface="Helvetica Neue" panose="02000503000000020004" pitchFamily="2" charset="0"/>
                   <a:ea typeface="Helvetica Neue" panose="02000503000000020004" pitchFamily="2" charset="0"/>
                   <a:cs typeface="Helvetica Neue" panose="02000503000000020004" pitchFamily="2" charset="0"/>
                 </a:rPr>
-                <a:t>Euclidean</a:t>
+                <a:t>Absolute</a:t>
               </a:r>
             </a:p>
             <a:p>
-              <a:pPr marL="0" marR="0" lvl="0" indent="0" algn="ctr" defTabSz="914400" rtl="0" eaLnBrk="1" fontAlgn="auto" latinLnBrk="0" hangingPunct="1">
-                <a:lnSpc>
-                  <a:spcPct val="100000"/>
-                </a:lnSpc>
-                <a:spcBef>
-                  <a:spcPts val="0"/>
-                </a:spcBef>
-                <a:spcAft>
-                  <a:spcPts val="0"/>
-                </a:spcAft>
-                <a:buClrTx/>
-                <a:buSzTx/>
-                <a:buFontTx/>
-                <a:buNone/>
-                <a:tabLst/>
+              <a:pPr lvl="0" algn="ctr">
                 <a:defRPr/>
               </a:pPr>
               <a:r>
-                <a:rPr kumimoji="0" lang="en-US" sz="1800" b="0" i="0" u="none" strike="noStrike" kern="1200" cap="none" spc="0" normalizeH="0" baseline="0" noProof="0" dirty="0">
-                  <a:ln>
-                    <a:noFill/>
-                  </a:ln>
+                <a:rPr lang="en-US" dirty="0">
                   <a:solidFill>
                     <a:prstClr val="white"/>
                   </a:solidFill>
-                  <a:effectLst/>
-                  <a:uLnTx/>
-                  <a:uFillTx/>
                   <a:latin typeface="Helvetica Neue" panose="02000503000000020004" pitchFamily="2" charset="0"/>
                   <a:ea typeface="Helvetica Neue" panose="02000503000000020004" pitchFamily="2" charset="0"/>
                   <a:cs typeface="Helvetica Neue" panose="02000503000000020004" pitchFamily="2" charset="0"/>
                 </a:rPr>
-                <a:t>Void</a:t>
+                <a:t>Space</a:t>
               </a:r>
             </a:p>
           </p:txBody>
@@ -11827,7 +10588,7 @@
     </p:spTree>
     <p:extLst>
       <p:ext uri="{BB962C8B-B14F-4D97-AF65-F5344CB8AC3E}">
-        <ns3:creationId val="1541260098"/>
+        <p14:creationId xmlns:p14="http://schemas.microsoft.com/office/powerpoint/2010/main" val="1541260098"/>
       </p:ext>
     </p:extLst>
   </p:cSld>
@@ -11838,7 +10599,7 @@
 </file>
 
 <file path=ppt/slides/slide11.xml><?xml version="1.0" encoding="utf-8"?>
-<p:sld xmlns:a="http://schemas.openxmlformats.org/drawingml/2006/main" xmlns:ns2="http://schemas.microsoft.com/office/drawing/2014/main" xmlns:ns3="http://schemas.microsoft.com/office/powerpoint/2010/main" xmlns:p="http://schemas.openxmlformats.org/presentationml/2006/main">
+<p:sld xmlns:a="http://schemas.openxmlformats.org/drawingml/2006/main" xmlns:r="http://schemas.openxmlformats.org/officeDocument/2006/relationships" xmlns:p="http://schemas.openxmlformats.org/presentationml/2006/main">
   <p:cSld>
     <p:bg>
       <p:bgPr>
@@ -11867,7 +10628,7 @@
           <p:cNvPr id="5" name="Footer Placeholder 3">
             <a:extLst>
               <a:ext uri="{FF2B5EF4-FFF2-40B4-BE49-F238E27FC236}">
-                <ns2:creationId id="{668F77D6-DFDA-5A46-8DF1-47F6A167C2B1}"/>
+                <a16:creationId xmlns:a16="http://schemas.microsoft.com/office/drawing/2014/main" id="{668F77D6-DFDA-5A46-8DF1-47F6A167C2B1}"/>
               </a:ext>
             </a:extLst>
           </p:cNvPr>
@@ -12029,7 +10790,7 @@
           <p:cNvPr id="13" name="TextBox 12">
             <a:extLst>
               <a:ext uri="{FF2B5EF4-FFF2-40B4-BE49-F238E27FC236}">
-                <ns2:creationId id="{2C3F4604-6C2F-0E4E-9DD3-4F5C89FF51AB}"/>
+                <a16:creationId xmlns:a16="http://schemas.microsoft.com/office/drawing/2014/main" id="{2C3F4604-6C2F-0E4E-9DD3-4F5C89FF51AB}"/>
               </a:ext>
             </a:extLst>
           </p:cNvPr>
@@ -12038,8 +10799,8 @@
         </p:nvSpPr>
         <p:spPr>
           <a:xfrm>
-            <a:off x="34242" y="1364712"/>
-            <a:ext cx="1191352" cy="923330"/>
+            <a:off x="83252" y="1660771"/>
+            <a:ext cx="1093569" cy="646331"/>
           </a:xfrm>
           <a:prstGeom prst="rect">
             <a:avLst/>
@@ -12052,75 +10813,35 @@
           </a:bodyPr>
           <a:lstStyle/>
           <a:p>
-            <a:pPr marL="0" marR="0" lvl="0" indent="0" algn="ctr" defTabSz="914400" rtl="0" eaLnBrk="1" fontAlgn="auto" latinLnBrk="0" hangingPunct="1">
-              <a:lnSpc>
-                <a:spcPct val="100000"/>
-              </a:lnSpc>
-              <a:spcBef>
-                <a:spcPts val="0"/>
-              </a:spcBef>
-              <a:spcAft>
-                <a:spcPts val="0"/>
-              </a:spcAft>
-              <a:buClrTx/>
-              <a:buSzTx/>
-              <a:buFontTx/>
-              <a:buNone/>
-              <a:tabLst/>
+            <a:pPr lvl="0" algn="ctr">
               <a:defRPr/>
             </a:pPr>
             <a:r>
-              <a:rPr kumimoji="0" lang="en-US" sz="1800" b="0" i="0" u="none" strike="noStrike" kern="1200" cap="none" spc="0" normalizeH="0" baseline="0" noProof="0" dirty="0">
-                <a:ln>
-                  <a:noFill/>
-                </a:ln>
+              <a:rPr lang="en-US" dirty="0">
                 <a:solidFill>
                   <a:prstClr val="white"/>
                 </a:solidFill>
-                <a:effectLst/>
-                <a:uLnTx/>
-                <a:uFillTx/>
                 <a:latin typeface="Helvetica Neue" panose="02000503000000020004" pitchFamily="2" charset="0"/>
                 <a:ea typeface="Helvetica Neue" panose="02000503000000020004" pitchFamily="2" charset="0"/>
                 <a:cs typeface="Helvetica Neue" panose="02000503000000020004" pitchFamily="2" charset="0"/>
               </a:rPr>
-              <a:t>Euclidean</a:t>
-            </a:r>
-          </a:p>
-          <a:p>
-            <a:pPr marL="0" marR="0" lvl="0" indent="0" algn="ctr" defTabSz="914400" rtl="0" eaLnBrk="1" fontAlgn="auto" latinLnBrk="0" hangingPunct="1">
-              <a:lnSpc>
-                <a:spcPct val="100000"/>
-              </a:lnSpc>
-              <a:spcBef>
-                <a:spcPts val="0"/>
-              </a:spcBef>
-              <a:spcAft>
-                <a:spcPts val="0"/>
-              </a:spcAft>
-              <a:buClrTx/>
-              <a:buSzTx/>
-              <a:buFontTx/>
-              <a:buNone/>
-              <a:tabLst/>
+              <a:t>Absolute</a:t>
+            </a:r>
+          </a:p>
+          <a:p>
+            <a:pPr lvl="0" algn="ctr">
               <a:defRPr/>
             </a:pPr>
             <a:r>
-              <a:rPr kumimoji="0" lang="en-US" sz="1800" b="0" i="0" u="none" strike="noStrike" kern="1200" cap="none" spc="0" normalizeH="0" baseline="0" noProof="0" dirty="0">
-                <a:ln>
-                  <a:noFill/>
-                </a:ln>
+              <a:rPr lang="en-US" dirty="0">
                 <a:solidFill>
                   <a:prstClr val="white"/>
                 </a:solidFill>
-                <a:effectLst/>
-                <a:uLnTx/>
-                <a:uFillTx/>
                 <a:latin typeface="Helvetica Neue" panose="02000503000000020004" pitchFamily="2" charset="0"/>
                 <a:ea typeface="Helvetica Neue" panose="02000503000000020004" pitchFamily="2" charset="0"/>
                 <a:cs typeface="Helvetica Neue" panose="02000503000000020004" pitchFamily="2" charset="0"/>
               </a:rPr>
-              <a:t>Void</a:t>
+              <a:t>Space</a:t>
             </a:r>
           </a:p>
         </p:txBody>
@@ -12130,7 +10851,7 @@
           <p:cNvPr id="14" name="Freeform 13">
             <a:extLst>
               <a:ext uri="{FF2B5EF4-FFF2-40B4-BE49-F238E27FC236}">
-                <ns2:creationId id="{6D478F86-6608-8240-A60F-2B5B4B14CE42}"/>
+                <a16:creationId xmlns:a16="http://schemas.microsoft.com/office/drawing/2014/main" id="{6D478F86-6608-8240-A60F-2B5B4B14CE42}"/>
               </a:ext>
             </a:extLst>
           </p:cNvPr>
@@ -12671,7 +11392,7 @@
           <p:cNvPr id="16" name="Freeform 15">
             <a:extLst>
               <a:ext uri="{FF2B5EF4-FFF2-40B4-BE49-F238E27FC236}">
-                <ns2:creationId id="{226B2D26-F692-894E-9B09-F57FBB5CB2A3}"/>
+                <a16:creationId xmlns:a16="http://schemas.microsoft.com/office/drawing/2014/main" id="{226B2D26-F692-894E-9B09-F57FBB5CB2A3}"/>
               </a:ext>
             </a:extLst>
           </p:cNvPr>
@@ -13554,7 +12275,7 @@
           <p:cNvPr id="18" name="Oval 17">
             <a:extLst>
               <a:ext uri="{FF2B5EF4-FFF2-40B4-BE49-F238E27FC236}">
-                <ns2:creationId id="{BE4CDC90-4B2E-BE41-BB9D-A84675F3A2FE}"/>
+                <a16:creationId xmlns:a16="http://schemas.microsoft.com/office/drawing/2014/main" id="{BE4CDC90-4B2E-BE41-BB9D-A84675F3A2FE}"/>
               </a:ext>
             </a:extLst>
           </p:cNvPr>
@@ -13635,7 +12356,7 @@
           <p:cNvPr id="19" name="Oval 18">
             <a:extLst>
               <a:ext uri="{FF2B5EF4-FFF2-40B4-BE49-F238E27FC236}">
-                <ns2:creationId id="{0592434B-85D0-0A41-95DD-A29D1D3E92A7}"/>
+                <a16:creationId xmlns:a16="http://schemas.microsoft.com/office/drawing/2014/main" id="{0592434B-85D0-0A41-95DD-A29D1D3E92A7}"/>
               </a:ext>
             </a:extLst>
           </p:cNvPr>
@@ -13716,7 +12437,7 @@
           <p:cNvPr id="21" name="TextBox 20">
             <a:extLst>
               <a:ext uri="{FF2B5EF4-FFF2-40B4-BE49-F238E27FC236}">
-                <ns2:creationId id="{7B549753-C2CD-8744-8435-2E08FD32BDEB}"/>
+                <a16:creationId xmlns:a16="http://schemas.microsoft.com/office/drawing/2014/main" id="{7B549753-C2CD-8744-8435-2E08FD32BDEB}"/>
               </a:ext>
             </a:extLst>
           </p:cNvPr>
@@ -13795,7 +12516,7 @@
           <p:cNvPr id="22" name="TextBox 21">
             <a:extLst>
               <a:ext uri="{FF2B5EF4-FFF2-40B4-BE49-F238E27FC236}">
-                <ns2:creationId id="{32F7BF73-EB2C-9D42-97FB-D39FDCC924EB}"/>
+                <a16:creationId xmlns:a16="http://schemas.microsoft.com/office/drawing/2014/main" id="{32F7BF73-EB2C-9D42-97FB-D39FDCC924EB}"/>
               </a:ext>
             </a:extLst>
           </p:cNvPr>
@@ -13874,7 +12595,7 @@
           <p:cNvPr id="32" name="Group 31">
             <a:extLst>
               <a:ext uri="{FF2B5EF4-FFF2-40B4-BE49-F238E27FC236}">
-                <ns2:creationId id="{A120AE69-6043-195E-40C7-43C019B9D3A9}"/>
+                <a16:creationId xmlns:a16="http://schemas.microsoft.com/office/drawing/2014/main" id="{A120AE69-6043-195E-40C7-43C019B9D3A9}"/>
               </a:ext>
             </a:extLst>
           </p:cNvPr>
@@ -13894,7 +12615,7 @@
             <p:cNvPr id="24" name="Straight Connector 23">
               <a:extLst>
                 <a:ext uri="{FF2B5EF4-FFF2-40B4-BE49-F238E27FC236}">
-                  <ns2:creationId id="{3A19E039-1667-254C-809A-972BBA46D65C}"/>
+                  <a16:creationId xmlns:a16="http://schemas.microsoft.com/office/drawing/2014/main" id="{3A19E039-1667-254C-809A-972BBA46D65C}"/>
                 </a:ext>
               </a:extLst>
             </p:cNvPr>
@@ -13941,7 +12662,7 @@
             <p:cNvPr id="2" name="Oval 1">
               <a:extLst>
                 <a:ext uri="{FF2B5EF4-FFF2-40B4-BE49-F238E27FC236}">
-                  <ns2:creationId id="{38418338-F1E6-81D9-6A8C-D7EB7AA9DDA2}"/>
+                  <a16:creationId xmlns:a16="http://schemas.microsoft.com/office/drawing/2014/main" id="{38418338-F1E6-81D9-6A8C-D7EB7AA9DDA2}"/>
                 </a:ext>
               </a:extLst>
             </p:cNvPr>
@@ -14026,7 +12747,7 @@
           <p:cNvPr id="28" name="TextBox 27">
             <a:extLst>
               <a:ext uri="{FF2B5EF4-FFF2-40B4-BE49-F238E27FC236}">
-                <ns2:creationId id="{B86BBAD0-86F6-0D58-180C-6EA1BDCC33FE}"/>
+                <a16:creationId xmlns:a16="http://schemas.microsoft.com/office/drawing/2014/main" id="{B86BBAD0-86F6-0D58-180C-6EA1BDCC33FE}"/>
               </a:ext>
             </a:extLst>
           </p:cNvPr>
@@ -14105,7 +12826,7 @@
           <p:cNvPr id="29" name="TextBox 28">
             <a:extLst>
               <a:ext uri="{FF2B5EF4-FFF2-40B4-BE49-F238E27FC236}">
-                <ns2:creationId id="{2C329E1C-5E54-9E3C-A6FA-AE50E16EEB85}"/>
+                <a16:creationId xmlns:a16="http://schemas.microsoft.com/office/drawing/2014/main" id="{2C329E1C-5E54-9E3C-A6FA-AE50E16EEB85}"/>
               </a:ext>
             </a:extLst>
           </p:cNvPr>
@@ -14184,7 +12905,7 @@
           <p:cNvPr id="33" name="Group 32">
             <a:extLst>
               <a:ext uri="{FF2B5EF4-FFF2-40B4-BE49-F238E27FC236}">
-                <ns2:creationId id="{1D286D70-C171-9F97-4EF6-3BE92F6BF451}"/>
+                <a16:creationId xmlns:a16="http://schemas.microsoft.com/office/drawing/2014/main" id="{1D286D70-C171-9F97-4EF6-3BE92F6BF451}"/>
               </a:ext>
             </a:extLst>
           </p:cNvPr>
@@ -14204,7 +12925,7 @@
             <p:cNvPr id="34" name="Straight Connector 33">
               <a:extLst>
                 <a:ext uri="{FF2B5EF4-FFF2-40B4-BE49-F238E27FC236}">
-                  <ns2:creationId id="{8592FA4B-D9A7-6E33-AB7A-56BCD3E75DEC}"/>
+                  <a16:creationId xmlns:a16="http://schemas.microsoft.com/office/drawing/2014/main" id="{8592FA4B-D9A7-6E33-AB7A-56BCD3E75DEC}"/>
                 </a:ext>
               </a:extLst>
             </p:cNvPr>
@@ -14250,7 +12971,7 @@
             <p:cNvPr id="35" name="Oval 34">
               <a:extLst>
                 <a:ext uri="{FF2B5EF4-FFF2-40B4-BE49-F238E27FC236}">
-                  <ns2:creationId id="{D1C61822-C414-6D43-5771-23FAB0629304}"/>
+                  <a16:creationId xmlns:a16="http://schemas.microsoft.com/office/drawing/2014/main" id="{D1C61822-C414-6D43-5771-23FAB0629304}"/>
                 </a:ext>
               </a:extLst>
             </p:cNvPr>
@@ -14335,7 +13056,7 @@
           <p:cNvPr id="36" name="Group 35">
             <a:extLst>
               <a:ext uri="{FF2B5EF4-FFF2-40B4-BE49-F238E27FC236}">
-                <ns2:creationId id="{C03937C6-921F-C709-6C11-E769E0AA1568}"/>
+                <a16:creationId xmlns:a16="http://schemas.microsoft.com/office/drawing/2014/main" id="{C03937C6-921F-C709-6C11-E769E0AA1568}"/>
               </a:ext>
             </a:extLst>
           </p:cNvPr>
@@ -14355,7 +13076,7 @@
             <p:cNvPr id="37" name="Straight Connector 36">
               <a:extLst>
                 <a:ext uri="{FF2B5EF4-FFF2-40B4-BE49-F238E27FC236}">
-                  <ns2:creationId id="{BA8BF2BD-3FCE-A586-601D-1E4026152CB6}"/>
+                  <a16:creationId xmlns:a16="http://schemas.microsoft.com/office/drawing/2014/main" id="{BA8BF2BD-3FCE-A586-601D-1E4026152CB6}"/>
                 </a:ext>
               </a:extLst>
             </p:cNvPr>
@@ -14401,7 +13122,7 @@
             <p:cNvPr id="38" name="Oval 37">
               <a:extLst>
                 <a:ext uri="{FF2B5EF4-FFF2-40B4-BE49-F238E27FC236}">
-                  <ns2:creationId id="{9DC53165-740B-C795-C0DF-F1A1A73F6F36}"/>
+                  <a16:creationId xmlns:a16="http://schemas.microsoft.com/office/drawing/2014/main" id="{9DC53165-740B-C795-C0DF-F1A1A73F6F36}"/>
                 </a:ext>
               </a:extLst>
             </p:cNvPr>
@@ -14486,7 +13207,7 @@
           <p:cNvPr id="40" name="Group 39">
             <a:extLst>
               <a:ext uri="{FF2B5EF4-FFF2-40B4-BE49-F238E27FC236}">
-                <ns2:creationId id="{C105AAA1-FA00-79D8-70E9-DB832351B5E2}"/>
+                <a16:creationId xmlns:a16="http://schemas.microsoft.com/office/drawing/2014/main" id="{C105AAA1-FA00-79D8-70E9-DB832351B5E2}"/>
               </a:ext>
             </a:extLst>
           </p:cNvPr>
@@ -14506,7 +13227,7 @@
             <p:cNvPr id="41" name="Straight Connector 40">
               <a:extLst>
                 <a:ext uri="{FF2B5EF4-FFF2-40B4-BE49-F238E27FC236}">
-                  <ns2:creationId id="{48D05E5C-4059-6EC7-1299-E52A65F46E3D}"/>
+                  <a16:creationId xmlns:a16="http://schemas.microsoft.com/office/drawing/2014/main" id="{48D05E5C-4059-6EC7-1299-E52A65F46E3D}"/>
                 </a:ext>
               </a:extLst>
             </p:cNvPr>
@@ -14552,7 +13273,7 @@
             <p:cNvPr id="42" name="Oval 41">
               <a:extLst>
                 <a:ext uri="{FF2B5EF4-FFF2-40B4-BE49-F238E27FC236}">
-                  <ns2:creationId id="{8174E055-9EC2-40B6-B317-43A23011EC49}"/>
+                  <a16:creationId xmlns:a16="http://schemas.microsoft.com/office/drawing/2014/main" id="{8174E055-9EC2-40B6-B317-43A23011EC49}"/>
                 </a:ext>
               </a:extLst>
             </p:cNvPr>
@@ -14637,7 +13358,7 @@
           <p:cNvPr id="4" name="Rectangle 3">
             <a:extLst>
               <a:ext uri="{FF2B5EF4-FFF2-40B4-BE49-F238E27FC236}">
-                <ns2:creationId id="{ADBBA491-EC7F-B7A8-024F-1F1EB3434C26}"/>
+                <a16:creationId xmlns:a16="http://schemas.microsoft.com/office/drawing/2014/main" id="{ADBBA491-EC7F-B7A8-024F-1F1EB3434C26}"/>
               </a:ext>
             </a:extLst>
           </p:cNvPr>
@@ -14690,7 +13411,7 @@
           <p:cNvPr id="6" name="Group 5">
             <a:extLst>
               <a:ext uri="{FF2B5EF4-FFF2-40B4-BE49-F238E27FC236}">
-                <ns2:creationId id="{99AA8219-E43E-724C-056B-B18383E44D07}"/>
+                <a16:creationId xmlns:a16="http://schemas.microsoft.com/office/drawing/2014/main" id="{99AA8219-E43E-724C-056B-B18383E44D07}"/>
               </a:ext>
             </a:extLst>
           </p:cNvPr>
@@ -14710,7 +13431,7 @@
             <p:cNvPr id="7" name="Straight Arrow Connector 6">
               <a:extLst>
                 <a:ext uri="{FF2B5EF4-FFF2-40B4-BE49-F238E27FC236}">
-                  <ns2:creationId id="{D656FE40-D181-9F96-4B12-1D4A1600D94D}"/>
+                  <a16:creationId xmlns:a16="http://schemas.microsoft.com/office/drawing/2014/main" id="{D656FE40-D181-9F96-4B12-1D4A1600D94D}"/>
                 </a:ext>
               </a:extLst>
             </p:cNvPr>
@@ -14754,7 +13475,7 @@
             <p:cNvPr id="9" name="Straight Arrow Connector 8">
               <a:extLst>
                 <a:ext uri="{FF2B5EF4-FFF2-40B4-BE49-F238E27FC236}">
-                  <ns2:creationId id="{A8B296C3-B87D-78ED-4E26-EC9E5A291FD0}"/>
+                  <a16:creationId xmlns:a16="http://schemas.microsoft.com/office/drawing/2014/main" id="{A8B296C3-B87D-78ED-4E26-EC9E5A291FD0}"/>
                 </a:ext>
               </a:extLst>
             </p:cNvPr>
@@ -14798,7 +13519,7 @@
             <p:cNvPr id="10" name="TextBox 9">
               <a:extLst>
                 <a:ext uri="{FF2B5EF4-FFF2-40B4-BE49-F238E27FC236}">
-                  <ns2:creationId id="{F49CBD38-2A34-BF6B-7AF0-E9DF4ADD0FDF}"/>
+                  <a16:creationId xmlns:a16="http://schemas.microsoft.com/office/drawing/2014/main" id="{F49CBD38-2A34-BF6B-7AF0-E9DF4ADD0FDF}"/>
                 </a:ext>
               </a:extLst>
             </p:cNvPr>
@@ -14862,7 +13583,7 @@
     </p:spTree>
     <p:extLst>
       <p:ext uri="{BB962C8B-B14F-4D97-AF65-F5344CB8AC3E}">
-        <ns3:creationId val="3036832815"/>
+        <p14:creationId xmlns:p14="http://schemas.microsoft.com/office/powerpoint/2010/main" val="3036832815"/>
       </p:ext>
     </p:extLst>
   </p:cSld>
@@ -14873,7 +13594,7 @@
 </file>
 
 <file path=ppt/slides/slide12.xml><?xml version="1.0" encoding="utf-8"?>
-<p:sld xmlns:a="http://schemas.openxmlformats.org/drawingml/2006/main" xmlns:ns2="http://schemas.microsoft.com/office/drawing/2014/main" xmlns:ns4="http://schemas.microsoft.com/office/powerpoint/2010/main" xmlns:p="http://schemas.openxmlformats.org/presentationml/2006/main" xmlns:r="http://schemas.openxmlformats.org/officeDocument/2006/relationships">
+<p:sld xmlns:a="http://schemas.openxmlformats.org/drawingml/2006/main" xmlns:r="http://schemas.openxmlformats.org/officeDocument/2006/relationships" xmlns:p="http://schemas.openxmlformats.org/presentationml/2006/main">
   <p:cSld>
     <p:bg>
       <p:bgPr>
@@ -14902,7 +13623,7 @@
           <p:cNvPr id="4" name="TextBox 3">
             <a:extLst>
               <a:ext uri="{FF2B5EF4-FFF2-40B4-BE49-F238E27FC236}">
-                <ns2:creationId id="{04089B0C-3E0D-1D7D-7623-E8C4B9A7F9B0}"/>
+                <a16:creationId xmlns:a16="http://schemas.microsoft.com/office/drawing/2014/main" id="{04089B0C-3E0D-1D7D-7623-E8C4B9A7F9B0}"/>
               </a:ext>
             </a:extLst>
           </p:cNvPr>
@@ -14957,24 +13678,7 @@
                 <a:ea typeface="Helvetica Neue" panose="02000503000000020004" pitchFamily="2" charset="0"/>
                 <a:cs typeface="Helvetica Neue" panose="02000503000000020004" pitchFamily="2" charset="0"/>
               </a:rPr>
-              <a:t xml:space="preserve">A 1D Euclidean-void line with two architrino emitters and wake speed </a:t>
-            </a:r>
-            <a:r>
-              <a:rPr kumimoji="0" lang="en-US" sz="1800" b="0" i="0" u="none" strike="noStrike" kern="1200" cap="none" spc="0" normalizeH="0" baseline="0" noProof="0" dirty="0">
-                <a:ln>
-                  <a:noFill/>
-                </a:ln>
-                <a:solidFill>
-                  <a:prstClr val="white"/>
-                </a:solidFill>
-                <a:effectLst/>
-                <a:uLnTx/>
-                <a:uFillTx/>
-                <a:latin typeface="Helvetica Neue" panose="02000503000000020004" pitchFamily="2" charset="0"/>
-                <a:ea typeface="Helvetica Neue" panose="02000503000000020004" pitchFamily="2" charset="0"/>
-                <a:cs typeface="Helvetica Neue" panose="02000503000000020004" pitchFamily="2" charset="0"/>
-              </a:rPr>
-              <a:t>c</a:t>
+              <a:t>A 1D absolute space with two architrino emitters and wake speed c</a:t>
             </a:r>
             <a:r>
               <a:rPr kumimoji="0" lang="en-US" sz="1260" b="0" i="0" u="none" strike="noStrike" kern="1200" cap="none" spc="0" normalizeH="0" baseline="-25000" noProof="0" dirty="0">
@@ -15013,47 +13717,20 @@
           </a:p>
           <a:p>
             <a:r>
-              <a:rPr baseline="0">
+              <a:rPr>
                 <a:solidFill>
-                  <a:schemeClr val="bg1"/>
+                  <a:prstClr val="white"/>
                 </a:solidFill>
+                <a:latin typeface="Helvetica Neue" panose="02000503000000020004" pitchFamily="2" charset="0"/>
+                <a:ea typeface="Helvetica Neue" panose="02000503000000020004" pitchFamily="2" charset="0"/>
+                <a:cs typeface="Helvetica Neue" panose="02000503000000020004" pitchFamily="2" charset="0"/>
               </a:rPr>
-              <a:t xml:space="preserve">The binary symmetry point occurs when architrino speed |v| = </a:t>
-            </a:r>
-            <a:r>
-              <a:rPr baseline="0">
-                <a:solidFill>
-                  <a:schemeClr val="bg1"/>
-                </a:solidFill>
-              </a:rPr>
-              <a:t>c</a:t>
-            </a:r>
-            <a:r>
-              <a:rPr baseline="-25000" sz="1260">
-                <a:solidFill>
-                  <a:schemeClr val="bg1"/>
-                </a:solidFill>
-              </a:rPr>
-              <a:t>f</a:t>
-            </a:r>
-            <a:r>
-              <a:rPr baseline="0">
-                <a:solidFill>
-                  <a:schemeClr val="bg1"/>
-                </a:solidFill>
-              </a:rPr>
-              <a:t>.</a:t>
-            </a:r>
-            <a:endParaRPr kumimoji="0" lang="en-US" sz="1800" b="0" i="0" u="none" strike="noStrike" kern="1200" cap="none" spc="0" normalizeH="0" baseline="0" noProof="0" dirty="0">
-              <a:ln>
-                <a:noFill/>
-              </a:ln>
+              <a:t>The binary symmetry point occurs when architrino speed |v| = cf.</a:t>
+            </a:r>
+            <a:endParaRPr lang="en-US" dirty="0">
               <a:solidFill>
-                <a:schemeClr val="bg1"/>
+                <a:prstClr val="white"/>
               </a:solidFill>
-              <a:effectLst/>
-              <a:uLnTx/>
-              <a:uFillTx/>
               <a:latin typeface="Helvetica Neue" panose="02000503000000020004" pitchFamily="2" charset="0"/>
               <a:ea typeface="Helvetica Neue" panose="02000503000000020004" pitchFamily="2" charset="0"/>
               <a:cs typeface="Helvetica Neue" panose="02000503000000020004" pitchFamily="2" charset="0"/>
@@ -15214,24 +13891,7 @@
                 <a:ea typeface="Helvetica Neue" panose="02000503000000020004" pitchFamily="2" charset="0"/>
                 <a:cs typeface="Helvetica Neue" panose="02000503000000020004" pitchFamily="2" charset="0"/>
               </a:rPr>
-              <a:t xml:space="preserve">Opposite-polarity architrinos launched from large r with small speed may approach |v| near </a:t>
-            </a:r>
-            <a:r>
-              <a:rPr kumimoji="0" lang="en-US" sz="1800" b="0" i="1" u="none" strike="noStrike" kern="1200" cap="none" spc="0" normalizeH="0" baseline="0" noProof="0" dirty="0">
-                <a:ln>
-                  <a:noFill/>
-                </a:ln>
-                <a:solidFill>
-                  <a:prstClr val="white"/>
-                </a:solidFill>
-                <a:effectLst/>
-                <a:uLnTx/>
-                <a:uFillTx/>
-                <a:latin typeface="Helvetica Neue" panose="02000503000000020004" pitchFamily="2" charset="0"/>
-                <a:ea typeface="Helvetica Neue" panose="02000503000000020004" pitchFamily="2" charset="0"/>
-                <a:cs typeface="Helvetica Neue" panose="02000503000000020004" pitchFamily="2" charset="0"/>
-              </a:rPr>
-              <a:t>c</a:t>
+              <a:t>Opposite-polarity architrinos launched from large r with small speed may approach |v| near c</a:t>
             </a:r>
             <a:r>
               <a:rPr kumimoji="0" lang="en-US" sz="1260" b="0" i="1" u="none" strike="noStrike" kern="1200" cap="none" spc="0" normalizeH="0" baseline="-25000" noProof="0" dirty="0">
@@ -15265,7 +13925,7 @@
                 <a:ea typeface="Helvetica Neue" panose="02000503000000020004" pitchFamily="2" charset="0"/>
                 <a:cs typeface="Helvetica Neue" panose="02000503000000020004" pitchFamily="2" charset="0"/>
               </a:rPr>
-              <a:t xml:space="preserve"> at r = 1.</a:t>
+              <a:t> at r = 1.</a:t>
             </a:r>
           </a:p>
           <a:p>
@@ -15337,24 +13997,7 @@
                 <a:ea typeface="Helvetica Neue" panose="02000503000000020004" pitchFamily="2" charset="0"/>
                 <a:cs typeface="Helvetica Neue" panose="02000503000000020004" pitchFamily="2" charset="0"/>
               </a:rPr>
-              <a:t xml:space="preserve">Same-polarity architrinos launched toward each other above </a:t>
-            </a:r>
-            <a:r>
-              <a:rPr kumimoji="0" lang="en-US" sz="1800" b="0" i="0" u="none" strike="noStrike" kern="1200" cap="none" spc="0" normalizeH="0" baseline="0" noProof="0" dirty="0">
-                <a:ln>
-                  <a:noFill/>
-                </a:ln>
-                <a:solidFill>
-                  <a:prstClr val="white"/>
-                </a:solidFill>
-                <a:effectLst/>
-                <a:uLnTx/>
-                <a:uFillTx/>
-                <a:latin typeface="Helvetica Neue" panose="02000503000000020004" pitchFamily="2" charset="0"/>
-                <a:ea typeface="Helvetica Neue" panose="02000503000000020004" pitchFamily="2" charset="0"/>
-                <a:cs typeface="Helvetica Neue" panose="02000503000000020004" pitchFamily="2" charset="0"/>
-              </a:rPr>
-              <a:t>c</a:t>
+              <a:t>Same-polarity architrinos launched toward each other above c</a:t>
             </a:r>
             <a:r>
               <a:rPr kumimoji="0" lang="en-US" sz="1260" b="0" i="0" u="none" strike="noStrike" kern="1200" cap="none" spc="0" normalizeH="0" baseline="-25000" noProof="0" dirty="0">
@@ -15388,7 +14031,7 @@
                 <a:ea typeface="Helvetica Neue" panose="02000503000000020004" pitchFamily="2" charset="0"/>
                 <a:cs typeface="Helvetica Neue" panose="02000503000000020004" pitchFamily="2" charset="0"/>
               </a:rPr>
-              <a:t xml:space="preserve"> may reverse or cross depending on initial offset.</a:t>
+              <a:t> may reverse or cross depending on initial offset.</a:t>
             </a:r>
           </a:p>
           <a:p>
@@ -15470,7 +14113,7 @@
           <p:cNvPr id="5" name="Group 4">
             <a:extLst>
               <a:ext uri="{FF2B5EF4-FFF2-40B4-BE49-F238E27FC236}">
-                <ns2:creationId id="{28EB18A8-8B6A-033D-A4AD-86FBADCB4D4A}"/>
+                <a16:creationId xmlns:a16="http://schemas.microsoft.com/office/drawing/2014/main" id="{28EB18A8-8B6A-033D-A4AD-86FBADCB4D4A}"/>
               </a:ext>
             </a:extLst>
           </p:cNvPr>
@@ -15490,7 +14133,7 @@
             <p:cNvPr id="3" name="Picture 2">
               <a:extLst>
                 <a:ext uri="{FF2B5EF4-FFF2-40B4-BE49-F238E27FC236}">
-                  <ns2:creationId id="{13746C96-5BF1-B22B-CA42-106D1B63333F}"/>
+                  <a16:creationId xmlns:a16="http://schemas.microsoft.com/office/drawing/2014/main" id="{13746C96-5BF1-B22B-CA42-106D1B63333F}"/>
                 </a:ext>
               </a:extLst>
             </p:cNvPr>
@@ -15520,7 +14163,7 @@
             <p:cNvPr id="6" name="Straight Connector 5">
               <a:extLst>
                 <a:ext uri="{FF2B5EF4-FFF2-40B4-BE49-F238E27FC236}">
-                  <ns2:creationId id="{EE364915-3AF3-C9A5-4E25-440B57D56073}"/>
+                  <a16:creationId xmlns:a16="http://schemas.microsoft.com/office/drawing/2014/main" id="{EE364915-3AF3-C9A5-4E25-440B57D56073}"/>
                 </a:ext>
               </a:extLst>
             </p:cNvPr>
@@ -15563,7 +14206,7 @@
           <p:cNvPr id="7" name="Title 4">
             <a:extLst>
               <a:ext uri="{FF2B5EF4-FFF2-40B4-BE49-F238E27FC236}">
-                <ns2:creationId id="{82AADF08-A238-0E6D-347B-D5A2BAE919D0}"/>
+                <a16:creationId xmlns:a16="http://schemas.microsoft.com/office/drawing/2014/main" id="{82AADF08-A238-0E6D-347B-D5A2BAE919D0}"/>
               </a:ext>
             </a:extLst>
           </p:cNvPr>
@@ -15651,7 +14294,7 @@
     </p:spTree>
     <p:extLst>
       <p:ext uri="{BB962C8B-B14F-4D97-AF65-F5344CB8AC3E}">
-        <ns4:creationId val="3190063365"/>
+        <p14:creationId xmlns:p14="http://schemas.microsoft.com/office/powerpoint/2010/main" val="3190063365"/>
       </p:ext>
     </p:extLst>
   </p:cSld>
@@ -15662,7 +14305,7 @@
 </file>
 
 <file path=ppt/slides/slide13.xml><?xml version="1.0" encoding="utf-8"?>
-<p:sld xmlns:a="http://schemas.openxmlformats.org/drawingml/2006/main" xmlns:ns2="http://schemas.microsoft.com/office/drawing/2014/main" xmlns:ns3="http://schemas.microsoft.com/office/powerpoint/2010/main" xmlns:p="http://schemas.openxmlformats.org/presentationml/2006/main">
+<p:sld xmlns:a="http://schemas.openxmlformats.org/drawingml/2006/main" xmlns:r="http://schemas.openxmlformats.org/officeDocument/2006/relationships" xmlns:p="http://schemas.openxmlformats.org/presentationml/2006/main">
   <p:cSld>
     <p:bg>
       <p:bgPr>
@@ -15677,7 +14320,7 @@
         <p:cNvPr id="1" name="">
           <a:extLst>
             <a:ext uri="{FF2B5EF4-FFF2-40B4-BE49-F238E27FC236}">
-              <ns2:creationId id="{96E919E2-812D-C716-7A6E-78657A604D1E}"/>
+              <a16:creationId xmlns:a16="http://schemas.microsoft.com/office/drawing/2014/main" id="{96E919E2-812D-C716-7A6E-78657A604D1E}"/>
             </a:ext>
           </a:extLst>
         </p:cNvPr>
@@ -15697,7 +14340,7 @@
           <p:cNvPr id="34" name="Freeform 33">
             <a:extLst>
               <a:ext uri="{FF2B5EF4-FFF2-40B4-BE49-F238E27FC236}">
-                <ns2:creationId id="{9FEB1C17-EE9E-6374-14E0-DF4B04BB34CC}"/>
+                <a16:creationId xmlns:a16="http://schemas.microsoft.com/office/drawing/2014/main" id="{9FEB1C17-EE9E-6374-14E0-DF4B04BB34CC}"/>
               </a:ext>
             </a:extLst>
           </p:cNvPr>
@@ -16735,7 +15378,7 @@
           <p:cNvPr id="23" name="Straight Connector 22">
             <a:extLst>
               <a:ext uri="{FF2B5EF4-FFF2-40B4-BE49-F238E27FC236}">
-                <ns2:creationId id="{33DF3D55-999F-17C8-E647-A925ABFD4B29}"/>
+                <a16:creationId xmlns:a16="http://schemas.microsoft.com/office/drawing/2014/main" id="{33DF3D55-999F-17C8-E647-A925ABFD4B29}"/>
               </a:ext>
             </a:extLst>
           </p:cNvPr>
@@ -16781,7 +15424,7 @@
           <p:cNvPr id="11" name="Footer Placeholder 3">
             <a:extLst>
               <a:ext uri="{FF2B5EF4-FFF2-40B4-BE49-F238E27FC236}">
-                <ns2:creationId id="{27AA374C-C403-AE7C-8C5A-C9260FD31350}"/>
+                <a16:creationId xmlns:a16="http://schemas.microsoft.com/office/drawing/2014/main" id="{27AA374C-C403-AE7C-8C5A-C9260FD31350}"/>
               </a:ext>
             </a:extLst>
           </p:cNvPr>
@@ -16915,7 +15558,7 @@
           <p:cNvPr id="6" name="Freeform 5">
             <a:extLst>
               <a:ext uri="{FF2B5EF4-FFF2-40B4-BE49-F238E27FC236}">
-                <ns2:creationId id="{58C91A8E-32A3-E6C9-3B21-6258314CE1E0}"/>
+                <a16:creationId xmlns:a16="http://schemas.microsoft.com/office/drawing/2014/main" id="{58C91A8E-32A3-E6C9-3B21-6258314CE1E0}"/>
               </a:ext>
             </a:extLst>
           </p:cNvPr>
@@ -17511,7 +16154,7 @@
           <p:cNvPr id="7" name="Freeform 6">
             <a:extLst>
               <a:ext uri="{FF2B5EF4-FFF2-40B4-BE49-F238E27FC236}">
-                <ns2:creationId id="{510BA2CB-DE8D-42AC-CE1A-16118C17D521}"/>
+                <a16:creationId xmlns:a16="http://schemas.microsoft.com/office/drawing/2014/main" id="{510BA2CB-DE8D-42AC-CE1A-16118C17D521}"/>
               </a:ext>
             </a:extLst>
           </p:cNvPr>
@@ -18373,7 +17016,7 @@
           <p:cNvPr id="9" name="Oval 8">
             <a:extLst>
               <a:ext uri="{FF2B5EF4-FFF2-40B4-BE49-F238E27FC236}">
-                <ns2:creationId id="{568F11F0-CD68-B68F-145C-42747F6BA3CB}"/>
+                <a16:creationId xmlns:a16="http://schemas.microsoft.com/office/drawing/2014/main" id="{568F11F0-CD68-B68F-145C-42747F6BA3CB}"/>
               </a:ext>
             </a:extLst>
           </p:cNvPr>
@@ -18427,7 +17070,7 @@
           <p:cNvPr id="10" name="Oval 9">
             <a:extLst>
               <a:ext uri="{FF2B5EF4-FFF2-40B4-BE49-F238E27FC236}">
-                <ns2:creationId id="{6BC2B4CC-1274-7B5E-9B1C-D914D507A56F}"/>
+                <a16:creationId xmlns:a16="http://schemas.microsoft.com/office/drawing/2014/main" id="{6BC2B4CC-1274-7B5E-9B1C-D914D507A56F}"/>
               </a:ext>
             </a:extLst>
           </p:cNvPr>
@@ -18481,7 +17124,7 @@
           <p:cNvPr id="25" name="Rectangle 24">
             <a:extLst>
               <a:ext uri="{FF2B5EF4-FFF2-40B4-BE49-F238E27FC236}">
-                <ns2:creationId id="{79427490-B6E9-7801-97EB-47C4A21F9FE6}"/>
+                <a16:creationId xmlns:a16="http://schemas.microsoft.com/office/drawing/2014/main" id="{79427490-B6E9-7801-97EB-47C4A21F9FE6}"/>
               </a:ext>
             </a:extLst>
           </p:cNvPr>
@@ -18490,7 +17133,7 @@
         </p:nvSpPr>
         <p:spPr>
           <a:xfrm>
-            <a:off x="2457264" y="52433"/>
+            <a:off x="2534264" y="52433"/>
             <a:ext cx="3284810" cy="523220"/>
           </a:xfrm>
           <a:prstGeom prst="rect">
@@ -18534,7 +17177,7 @@
           <p:cNvPr id="3" name="Straight Arrow Connector 2">
             <a:extLst>
               <a:ext uri="{FF2B5EF4-FFF2-40B4-BE49-F238E27FC236}">
-                <ns2:creationId id="{EB763B1F-F575-913F-DB72-76ED511A0D0B}"/>
+                <a16:creationId xmlns:a16="http://schemas.microsoft.com/office/drawing/2014/main" id="{EB763B1F-F575-913F-DB72-76ED511A0D0B}"/>
               </a:ext>
             </a:extLst>
           </p:cNvPr>
@@ -18579,7 +17222,7 @@
           <p:cNvPr id="4" name="Straight Arrow Connector 3">
             <a:extLst>
               <a:ext uri="{FF2B5EF4-FFF2-40B4-BE49-F238E27FC236}">
-                <ns2:creationId id="{A90A4078-7CAB-D43F-FE11-DE676579B333}"/>
+                <a16:creationId xmlns:a16="http://schemas.microsoft.com/office/drawing/2014/main" id="{A90A4078-7CAB-D43F-FE11-DE676579B333}"/>
               </a:ext>
             </a:extLst>
           </p:cNvPr>
@@ -18624,7 +17267,7 @@
           <p:cNvPr id="5" name="TextBox 4">
             <a:extLst>
               <a:ext uri="{FF2B5EF4-FFF2-40B4-BE49-F238E27FC236}">
-                <ns2:creationId id="{93EE6640-E2D5-2697-152F-1AC92ACF6299}"/>
+                <a16:creationId xmlns:a16="http://schemas.microsoft.com/office/drawing/2014/main" id="{93EE6640-E2D5-2697-152F-1AC92ACF6299}"/>
               </a:ext>
             </a:extLst>
           </p:cNvPr>
@@ -18689,7 +17332,7 @@
           <p:cNvPr id="8" name="TextBox 7">
             <a:extLst>
               <a:ext uri="{FF2B5EF4-FFF2-40B4-BE49-F238E27FC236}">
-                <ns2:creationId id="{C7F4CB60-409A-DA93-8D6D-DBB74A32F30C}"/>
+                <a16:creationId xmlns:a16="http://schemas.microsoft.com/office/drawing/2014/main" id="{C7F4CB60-409A-DA93-8D6D-DBB74A32F30C}"/>
               </a:ext>
             </a:extLst>
           </p:cNvPr>
@@ -18698,8 +17341,8 @@
         </p:nvSpPr>
         <p:spPr>
           <a:xfrm>
-            <a:off x="-20471" y="24"/>
-            <a:ext cx="1191352" cy="1093569"/>
+            <a:off x="42329" y="685956"/>
+            <a:ext cx="1093569" cy="646331"/>
           </a:xfrm>
           <a:prstGeom prst="rect">
             <a:avLst/>
@@ -18712,75 +17355,35 @@
           </a:bodyPr>
           <a:lstStyle/>
           <a:p>
-            <a:pPr marL="0" marR="0" lvl="0" indent="0" algn="ctr" defTabSz="914400" rtl="0" eaLnBrk="1" fontAlgn="auto" latinLnBrk="0" hangingPunct="1">
-              <a:lnSpc>
-                <a:spcPct val="100000"/>
-              </a:lnSpc>
-              <a:spcBef>
-                <a:spcPts val="0"/>
-              </a:spcBef>
-              <a:spcAft>
-                <a:spcPts val="0"/>
-              </a:spcAft>
-              <a:buClrTx/>
-              <a:buSzTx/>
-              <a:buFontTx/>
-              <a:buNone/>
-              <a:tabLst/>
+            <a:pPr lvl="0" algn="ctr">
               <a:defRPr/>
             </a:pPr>
             <a:r>
-              <a:rPr kumimoji="0" lang="en-US" sz="1800" b="0" i="0" u="none" strike="noStrike" kern="1200" cap="none" spc="0" normalizeH="0" baseline="0" noProof="0" dirty="0">
-                <a:ln>
-                  <a:noFill/>
-                </a:ln>
+              <a:rPr lang="en-US" dirty="0">
                 <a:solidFill>
                   <a:prstClr val="white"/>
                 </a:solidFill>
-                <a:effectLst/>
-                <a:uLnTx/>
-                <a:uFillTx/>
                 <a:latin typeface="Helvetica Neue" panose="02000503000000020004" pitchFamily="2" charset="0"/>
                 <a:ea typeface="Helvetica Neue" panose="02000503000000020004" pitchFamily="2" charset="0"/>
                 <a:cs typeface="Helvetica Neue" panose="02000503000000020004" pitchFamily="2" charset="0"/>
               </a:rPr>
-              <a:t>Euclidean</a:t>
-            </a:r>
-          </a:p>
-          <a:p>
-            <a:pPr marL="0" marR="0" lvl="0" indent="0" algn="ctr" defTabSz="914400" rtl="0" eaLnBrk="1" fontAlgn="auto" latinLnBrk="0" hangingPunct="1">
-              <a:lnSpc>
-                <a:spcPct val="100000"/>
-              </a:lnSpc>
-              <a:spcBef>
-                <a:spcPts val="0"/>
-              </a:spcBef>
-              <a:spcAft>
-                <a:spcPts val="0"/>
-              </a:spcAft>
-              <a:buClrTx/>
-              <a:buSzTx/>
-              <a:buFontTx/>
-              <a:buNone/>
-              <a:tabLst/>
+              <a:t>Absolute</a:t>
+            </a:r>
+          </a:p>
+          <a:p>
+            <a:pPr lvl="0" algn="ctr">
               <a:defRPr/>
             </a:pPr>
             <a:r>
-              <a:rPr kumimoji="0" lang="en-US" sz="1800" b="0" i="0" u="none" strike="noStrike" kern="1200" cap="none" spc="0" normalizeH="0" baseline="0" noProof="0" dirty="0">
-                <a:ln>
-                  <a:noFill/>
-                </a:ln>
+              <a:rPr lang="en-US" dirty="0">
                 <a:solidFill>
                   <a:prstClr val="white"/>
                 </a:solidFill>
-                <a:effectLst/>
-                <a:uLnTx/>
-                <a:uFillTx/>
                 <a:latin typeface="Helvetica Neue" panose="02000503000000020004" pitchFamily="2" charset="0"/>
                 <a:ea typeface="Helvetica Neue" panose="02000503000000020004" pitchFamily="2" charset="0"/>
                 <a:cs typeface="Helvetica Neue" panose="02000503000000020004" pitchFamily="2" charset="0"/>
               </a:rPr>
-              <a:t>Void</a:t>
+              <a:t>Space</a:t>
             </a:r>
           </a:p>
         </p:txBody>
@@ -18790,7 +17393,7 @@
           <p:cNvPr id="17" name="TextBox 16">
             <a:extLst>
               <a:ext uri="{FF2B5EF4-FFF2-40B4-BE49-F238E27FC236}">
-                <ns2:creationId id="{F4E68F9E-0E13-E904-E4B5-DEC42C339288}"/>
+                <a16:creationId xmlns:a16="http://schemas.microsoft.com/office/drawing/2014/main" id="{F4E68F9E-0E13-E904-E4B5-DEC42C339288}"/>
               </a:ext>
             </a:extLst>
           </p:cNvPr>
@@ -18831,7 +17434,7 @@
               <a:defRPr/>
             </a:pPr>
             <a:r>
-              <a:rPr lang="en-US" dirty="0">
+              <a:rPr lang="en-US" baseline="0" dirty="0">
                 <a:solidFill>
                   <a:prstClr val="white"/>
                 </a:solidFill>
@@ -18839,7 +17442,18 @@
                 <a:ea typeface="Helvetica Neue" panose="02000503000000020004" pitchFamily="2" charset="0"/>
                 <a:cs typeface="Helvetica Neue" panose="02000503000000020004" pitchFamily="2" charset="0"/>
               </a:rPr>
-              <a:t>t = t_now</a:t>
+              <a:t>t = t</a:t>
+            </a:r>
+            <a:r>
+              <a:rPr lang="en-US" sz="840" baseline="-25000" dirty="0">
+                <a:solidFill>
+                  <a:prstClr val="white"/>
+                </a:solidFill>
+                <a:latin typeface="Helvetica Neue" panose="02000503000000020004" pitchFamily="2" charset="0"/>
+                <a:ea typeface="Helvetica Neue" panose="02000503000000020004" pitchFamily="2" charset="0"/>
+                <a:cs typeface="Helvetica Neue" panose="02000503000000020004" pitchFamily="2" charset="0"/>
+              </a:rPr>
+              <a:t>now</a:t>
             </a:r>
             <a:endParaRPr kumimoji="0" lang="en-US" sz="1800" b="0" i="0" u="none" strike="noStrike" kern="1200" cap="none" spc="0" normalizeH="0" baseline="-25000" noProof="0" dirty="0">
               <a:ln>
@@ -18863,7 +17477,7 @@
           <p:cNvPr id="31" name="Freeform 30">
             <a:extLst>
               <a:ext uri="{FF2B5EF4-FFF2-40B4-BE49-F238E27FC236}">
-                <ns2:creationId id="{EBDD718E-B038-498A-81E1-4720CA22C4E4}"/>
+                <a16:creationId xmlns:a16="http://schemas.microsoft.com/office/drawing/2014/main" id="{EBDD718E-B038-498A-81E1-4720CA22C4E4}"/>
               </a:ext>
             </a:extLst>
           </p:cNvPr>
@@ -19723,7 +18337,7 @@
           <p:cNvPr id="32" name="Oval 31">
             <a:extLst>
               <a:ext uri="{FF2B5EF4-FFF2-40B4-BE49-F238E27FC236}">
-                <ns2:creationId id="{852BC428-A99B-91EE-DF01-3864DEC4D4BF}"/>
+                <a16:creationId xmlns:a16="http://schemas.microsoft.com/office/drawing/2014/main" id="{852BC428-A99B-91EE-DF01-3864DEC4D4BF}"/>
               </a:ext>
             </a:extLst>
           </p:cNvPr>
@@ -19777,7 +18391,7 @@
           <p:cNvPr id="33" name="Oval 32">
             <a:extLst>
               <a:ext uri="{FF2B5EF4-FFF2-40B4-BE49-F238E27FC236}">
-                <ns2:creationId id="{EFBFF3EA-59F3-C535-EFC4-37E6E9B87AAA}"/>
+                <a16:creationId xmlns:a16="http://schemas.microsoft.com/office/drawing/2014/main" id="{EFBFF3EA-59F3-C535-EFC4-37E6E9B87AAA}"/>
               </a:ext>
             </a:extLst>
           </p:cNvPr>
@@ -19831,7 +18445,7 @@
           <p:cNvPr id="35" name="TextBox 34">
             <a:extLst>
               <a:ext uri="{FF2B5EF4-FFF2-40B4-BE49-F238E27FC236}">
-                <ns2:creationId id="{2A61F73B-4578-41C1-C8EB-DAA0E81D6643}"/>
+                <a16:creationId xmlns:a16="http://schemas.microsoft.com/office/drawing/2014/main" id="{2A61F73B-4578-41C1-C8EB-DAA0E81D6643}"/>
               </a:ext>
             </a:extLst>
           </p:cNvPr>
@@ -19841,7 +18455,7 @@
         <p:spPr>
           <a:xfrm>
             <a:off x="7766488" y="314043"/>
-            <a:ext cx="4144429" cy="5632311"/>
+            <a:ext cx="4144429" cy="5078313"/>
           </a:xfrm>
           <a:prstGeom prst="rect">
             <a:avLst/>
@@ -19916,7 +18530,7 @@
                 <a:ea typeface="Helvetica Neue" panose="02000503000000020004" pitchFamily="2" charset="0"/>
                 <a:cs typeface="Helvetica Neue" panose="02000503000000020004" pitchFamily="2" charset="0"/>
               </a:rPr>
-              <a:t>Euclidean Void</a:t>
+              <a:t>absolute space</a:t>
             </a:r>
           </a:p>
           <a:p>
@@ -20104,7 +18718,7 @@
               <a:defRPr/>
             </a:pPr>
             <a:r>
-              <a:rPr lang="en-US" sz="1200" b="1" dirty="0">
+              <a:rPr lang="en-US" sz="1200" b="1" baseline="0" dirty="0">
                 <a:solidFill>
                   <a:prstClr val="white"/>
                 </a:solidFill>
@@ -20112,7 +18726,18 @@
                 <a:ea typeface="Helvetica Neue" panose="02000503000000020004" pitchFamily="2" charset="0"/>
                 <a:cs typeface="Helvetica Neue" panose="02000503000000020004" pitchFamily="2" charset="0"/>
               </a:rPr>
-              <a:t>path = all [q,t,x,y,z,x',y',z'] for all t &lt; t_now</a:t>
+              <a:t>path = all [q,t,x,y,z,x',y',z'] for all t &lt; t</a:t>
+            </a:r>
+            <a:r>
+              <a:rPr lang="en-US" sz="840" b="1" baseline="-25000" dirty="0">
+                <a:solidFill>
+                  <a:prstClr val="white"/>
+                </a:solidFill>
+                <a:latin typeface="Helvetica Neue" panose="02000503000000020004" pitchFamily="2" charset="0"/>
+                <a:ea typeface="Helvetica Neue" panose="02000503000000020004" pitchFamily="2" charset="0"/>
+                <a:cs typeface="Helvetica Neue" panose="02000503000000020004" pitchFamily="2" charset="0"/>
+              </a:rPr>
+              <a:t>now</a:t>
             </a:r>
           </a:p>
           <a:p>
@@ -20184,7 +18809,7 @@
               <a:defRPr/>
             </a:pPr>
             <a:r>
-              <a:rPr lang="en-US" sz="1200" dirty="0" baseline="0">
+              <a:rPr lang="en-US" sz="1200" baseline="0" dirty="0">
                 <a:solidFill>
                   <a:prstClr val="white"/>
                 </a:solidFill>
@@ -20192,21 +18817,10 @@
                 <a:ea typeface="Helvetica Neue" panose="02000503000000020004" pitchFamily="2" charset="0"/>
                 <a:cs typeface="Helvetica Neue" panose="02000503000000020004" pitchFamily="2" charset="0"/>
               </a:rPr>
-              <a:t xml:space="preserve">expands at wake speed </a:t>
-            </a:r>
-            <a:r>
-              <a:rPr lang="en-US" sz="1200" dirty="0" baseline="0">
-                <a:solidFill>
-                  <a:prstClr val="white"/>
-                </a:solidFill>
-                <a:latin typeface="Helvetica Neue" panose="02000503000000020004" pitchFamily="2" charset="0"/>
-                <a:ea typeface="Helvetica Neue" panose="02000503000000020004" pitchFamily="2" charset="0"/>
-                <a:cs typeface="Helvetica Neue" panose="02000503000000020004" pitchFamily="2" charset="0"/>
-              </a:rPr>
-              <a:t>c</a:t>
-            </a:r>
-            <a:r>
-              <a:rPr lang="en-US" sz="840" dirty="0" baseline="-25000">
+              <a:t>expands at wake speed c</a:t>
+            </a:r>
+            <a:r>
+              <a:rPr lang="en-US" sz="840" baseline="-25000" dirty="0">
                 <a:solidFill>
                   <a:prstClr val="white"/>
                 </a:solidFill>
@@ -20217,7 +18831,7 @@
               <a:t>f</a:t>
             </a:r>
             <a:r>
-              <a:rPr lang="en-US" sz="1200" dirty="0" baseline="0">
+              <a:rPr lang="en-US" sz="1200" baseline="0" dirty="0">
                 <a:solidFill>
                   <a:prstClr val="white"/>
                 </a:solidFill>
@@ -20225,21 +18839,10 @@
                 <a:ea typeface="Helvetica Neue" panose="02000503000000020004" pitchFamily="2" charset="0"/>
                 <a:cs typeface="Helvetica Neue" panose="02000503000000020004" pitchFamily="2" charset="0"/>
               </a:rPr>
-              <a:t xml:space="preserve">; r = </a:t>
-            </a:r>
-            <a:r>
-              <a:rPr lang="en-US" sz="1200" dirty="0" baseline="0">
-                <a:solidFill>
-                  <a:prstClr val="white"/>
-                </a:solidFill>
-                <a:latin typeface="Helvetica Neue" panose="02000503000000020004" pitchFamily="2" charset="0"/>
-                <a:ea typeface="Helvetica Neue" panose="02000503000000020004" pitchFamily="2" charset="0"/>
-                <a:cs typeface="Helvetica Neue" panose="02000503000000020004" pitchFamily="2" charset="0"/>
-              </a:rPr>
-              <a:t>c</a:t>
-            </a:r>
-            <a:r>
-              <a:rPr lang="en-US" sz="840" dirty="0" baseline="-25000">
+              <a:t>; r = c</a:t>
+            </a:r>
+            <a:r>
+              <a:rPr lang="en-US" sz="840" baseline="-25000" dirty="0">
                 <a:solidFill>
                   <a:prstClr val="white"/>
                 </a:solidFill>
@@ -20250,7 +18853,7 @@
               <a:t>f</a:t>
             </a:r>
             <a:r>
-              <a:rPr lang="en-US" sz="1200" dirty="0" baseline="0">
+              <a:rPr lang="en-US" sz="1200" baseline="0" dirty="0">
                 <a:solidFill>
                   <a:prstClr val="white"/>
                 </a:solidFill>
@@ -20258,7 +18861,7 @@
                 <a:ea typeface="Helvetica Neue" panose="02000503000000020004" pitchFamily="2" charset="0"/>
                 <a:cs typeface="Helvetica Neue" panose="02000503000000020004" pitchFamily="2" charset="0"/>
               </a:rPr>
-              <a:t xml:space="preserve"> t</a:t>
+              <a:t> t</a:t>
             </a:r>
           </a:p>
           <a:p>
@@ -20282,7 +18885,7 @@
               <a:defRPr/>
             </a:pPr>
             <a:r>
-              <a:rPr lang="en-US" sz="1200" dirty="0">
+              <a:rPr lang="en-US" sz="1200" baseline="0" dirty="0">
                 <a:solidFill>
                   <a:prstClr val="white"/>
                 </a:solidFill>
@@ -20290,7 +18893,18 @@
                 <a:ea typeface="Helvetica Neue" panose="02000503000000020004" pitchFamily="2" charset="0"/>
                 <a:cs typeface="Helvetica Neue" panose="02000503000000020004" pitchFamily="2" charset="0"/>
               </a:rPr>
-              <a:t>received at t = t_now</a:t>
+              <a:t>received at t = t</a:t>
+            </a:r>
+            <a:r>
+              <a:rPr lang="en-US" sz="840" baseline="-25000" dirty="0">
+                <a:solidFill>
+                  <a:prstClr val="white"/>
+                </a:solidFill>
+                <a:latin typeface="Helvetica Neue" panose="02000503000000020004" pitchFamily="2" charset="0"/>
+                <a:ea typeface="Helvetica Neue" panose="02000503000000020004" pitchFamily="2" charset="0"/>
+                <a:cs typeface="Helvetica Neue" panose="02000503000000020004" pitchFamily="2" charset="0"/>
+              </a:rPr>
+              <a:t>now</a:t>
             </a:r>
           </a:p>
           <a:p>
@@ -20454,7 +19068,7 @@
     </p:spTree>
     <p:extLst>
       <p:ext uri="{BB962C8B-B14F-4D97-AF65-F5344CB8AC3E}">
-        <ns3:creationId val="3144987668"/>
+        <p14:creationId xmlns:p14="http://schemas.microsoft.com/office/powerpoint/2010/main" val="3144987668"/>
       </p:ext>
     </p:extLst>
   </p:cSld>
@@ -20465,428 +19079,7 @@
 </file>
 
 <file path=ppt/slides/slide14.xml><?xml version="1.0" encoding="utf-8"?>
-<p:sld xmlns:a="http://schemas.openxmlformats.org/drawingml/2006/main" xmlns:ns2="http://schemas.microsoft.com/office/drawing/2014/main" xmlns:ns3="http://schemas.microsoft.com/office/drawing/2017/decorative" xmlns:ns4="http://schemas.microsoft.com/office/powerpoint/2015/main" xmlns:ns5="http://schemas.microsoft.com/office/powerpoint/2010/main" xmlns:p="http://schemas.openxmlformats.org/presentationml/2006/main">
-  <p:cSld>
-    <p:bg>
-      <p:bgPr>
-        <a:solidFill>
-          <a:schemeClr val="tx1"/>
-        </a:solidFill>
-        <a:effectLst/>
-      </p:bgPr>
-    </p:bg>
-    <p:spTree>
-      <p:nvGrpSpPr>
-        <p:cNvPr id="1" name=""/>
-        <p:cNvGrpSpPr/>
-        <p:nvPr/>
-      </p:nvGrpSpPr>
-      <p:grpSpPr>
-        <a:xfrm>
-          <a:off x="0" y="0"/>
-          <a:ext cx="0" cy="0"/>
-          <a:chOff x="0" y="0"/>
-          <a:chExt cx="0" cy="0"/>
-        </a:xfrm>
-      </p:grpSpPr>
-      <p:sp>
-        <p:nvSpPr>
-          <p:cNvPr id="9" name="Rectangle 8">
-            <a:extLst>
-              <a:ext uri="{FF2B5EF4-FFF2-40B4-BE49-F238E27FC236}">
-                <ns2:creationId id="{2A8AA5BC-4F7A-4226-8F99-6D824B226A97}"/>
-              </a:ext>
-              <a:ext uri="{C183D7F6-B498-43B3-948B-1728B52AA6E4}">
-                <ns3:decorative val="1"/>
-              </a:ext>
-            </a:extLst>
-          </p:cNvPr>
-          <p:cNvSpPr>
-            <a:spLocks noGrp="1" noRot="1" noChangeAspect="1" noMove="1" noResize="1" noEditPoints="1" noAdjustHandles="1" noChangeArrowheads="1" noChangeShapeType="1" noTextEdit="1"/>
-          </p:cNvSpPr>
-          <p:nvPr>
-            <p:extLst>
-              <p:ext uri="{386F3935-93C4-4BCD-93E2-E3B085C9AB24}">
-                <ns4:designElem val="1"/>
-              </p:ext>
-            </p:extLst>
-          </p:nvPr>
-        </p:nvSpPr>
-        <p:spPr>
-          <a:xfrm>
-            <a:off x="0" y="-3324"/>
-            <a:ext cx="12192000" cy="6861324"/>
-          </a:xfrm>
-          <a:prstGeom prst="rect">
-            <a:avLst/>
-          </a:prstGeom>
-          <a:solidFill>
-            <a:schemeClr val="tx1"/>
-          </a:solidFill>
-          <a:ln>
-            <a:noFill/>
-          </a:ln>
-        </p:spPr>
-        <p:style>
-          <a:lnRef idx="2">
-            <a:schemeClr val="accent1">
-              <a:shade val="50000"/>
-            </a:schemeClr>
-          </a:lnRef>
-          <a:fillRef idx="1">
-            <a:schemeClr val="accent1"/>
-          </a:fillRef>
-          <a:effectRef idx="0">
-            <a:schemeClr val="accent1"/>
-          </a:effectRef>
-          <a:fontRef idx="minor">
-            <a:schemeClr val="lt1"/>
-          </a:fontRef>
-        </p:style>
-        <p:txBody>
-          <a:bodyPr rtlCol="0" anchor="ctr"/>
-          <a:lstStyle/>
-          <a:p>
-            <a:pPr marL="0" marR="0" lvl="0" indent="0" algn="ctr" defTabSz="914400" rtl="0" eaLnBrk="1" fontAlgn="auto" latinLnBrk="0" hangingPunct="1">
-              <a:lnSpc>
-                <a:spcPct val="100000"/>
-              </a:lnSpc>
-              <a:spcBef>
-                <a:spcPts val="0"/>
-              </a:spcBef>
-              <a:spcAft>
-                <a:spcPts val="0"/>
-              </a:spcAft>
-              <a:buClrTx/>
-              <a:buSzTx/>
-              <a:buFontTx/>
-              <a:buNone/>
-              <a:tabLst/>
-              <a:defRPr/>
-            </a:pPr>
-            <a:endParaRPr kumimoji="0" lang="en-US" sz="1800" b="0" i="0" u="none" strike="noStrike" kern="1200" cap="none" spc="0" normalizeH="0" baseline="0" noProof="0">
-              <a:ln>
-                <a:noFill/>
-              </a:ln>
-              <a:solidFill>
-                <a:prstClr val="white"/>
-              </a:solidFill>
-              <a:effectLst/>
-              <a:uLnTx/>
-              <a:uFillTx/>
-              <a:latin typeface="Calibri" panose="020F0502020204030204"/>
-              <a:ea typeface="+mn-ea"/>
-              <a:cs typeface="+mn-cs"/>
-            </a:endParaRPr>
-          </a:p>
-        </p:txBody>
-      </p:sp>
-      <p:sp>
-        <p:nvSpPr>
-          <p:cNvPr id="11" name="Rectangle 10">
-            <a:extLst>
-              <a:ext uri="{FF2B5EF4-FFF2-40B4-BE49-F238E27FC236}">
-                <ns2:creationId id="{3E5445C6-DD42-4979-86FF-03730E8C6DB0}"/>
-              </a:ext>
-              <a:ext uri="{C183D7F6-B498-43B3-948B-1728B52AA6E4}">
-                <ns3:decorative val="1"/>
-              </a:ext>
-            </a:extLst>
-          </p:cNvPr>
-          <p:cNvSpPr>
-            <a:spLocks noGrp="1" noRot="1" noChangeAspect="1" noMove="1" noResize="1" noEditPoints="1" noAdjustHandles="1" noChangeArrowheads="1" noChangeShapeType="1" noTextEdit="1"/>
-          </p:cNvSpPr>
-          <p:nvPr>
-            <p:extLst>
-              <p:ext uri="{386F3935-93C4-4BCD-93E2-E3B085C9AB24}">
-                <ns4:designElem val="1"/>
-              </p:ext>
-            </p:extLst>
-          </p:nvPr>
-        </p:nvSpPr>
-        <p:spPr bwMode="ltGray">
-          <a:xfrm>
-            <a:off x="321734" y="321733"/>
-            <a:ext cx="11573488" cy="6214534"/>
-          </a:xfrm>
-          <a:prstGeom prst="rect">
-            <a:avLst/>
-          </a:prstGeom>
-          <a:solidFill>
-            <a:schemeClr val="bg1">
-              <a:lumMod val="75000"/>
-              <a:lumOff val="25000"/>
-            </a:schemeClr>
-          </a:solidFill>
-          <a:ln w="127000" cap="sq" cmpd="thinThick">
-            <a:solidFill>
-              <a:schemeClr val="bg1">
-                <a:lumMod val="75000"/>
-                <a:lumOff val="25000"/>
-              </a:schemeClr>
-            </a:solidFill>
-          </a:ln>
-        </p:spPr>
-        <p:style>
-          <a:lnRef idx="2">
-            <a:schemeClr val="accent1">
-              <a:shade val="50000"/>
-            </a:schemeClr>
-          </a:lnRef>
-          <a:fillRef idx="1">
-            <a:schemeClr val="accent1"/>
-          </a:fillRef>
-          <a:effectRef idx="0">
-            <a:schemeClr val="accent1"/>
-          </a:effectRef>
-          <a:fontRef idx="minor">
-            <a:schemeClr val="lt1"/>
-          </a:fontRef>
-        </p:style>
-        <p:txBody>
-          <a:bodyPr rtlCol="0" anchor="ctr"/>
-          <a:lstStyle/>
-          <a:p>
-            <a:pPr marL="0" marR="0" lvl="0" indent="0" algn="ctr" defTabSz="914400" rtl="0" eaLnBrk="1" fontAlgn="auto" latinLnBrk="0" hangingPunct="1">
-              <a:lnSpc>
-                <a:spcPct val="100000"/>
-              </a:lnSpc>
-              <a:spcBef>
-                <a:spcPts val="0"/>
-              </a:spcBef>
-              <a:spcAft>
-                <a:spcPts val="0"/>
-              </a:spcAft>
-              <a:buClrTx/>
-              <a:buSzTx/>
-              <a:buFontTx/>
-              <a:buNone/>
-              <a:tabLst/>
-              <a:defRPr/>
-            </a:pPr>
-            <a:endParaRPr kumimoji="0" lang="en-US" sz="1800" b="0" i="0" u="none" strike="noStrike" kern="1200" cap="none" spc="0" normalizeH="0" baseline="0" noProof="0">
-              <a:ln>
-                <a:noFill/>
-              </a:ln>
-              <a:solidFill>
-                <a:prstClr val="white"/>
-              </a:solidFill>
-              <a:effectLst/>
-              <a:uLnTx/>
-              <a:uFillTx/>
-              <a:latin typeface="Calibri" panose="020F0502020204030204"/>
-              <a:ea typeface="+mn-ea"/>
-              <a:cs typeface="+mn-cs"/>
-            </a:endParaRPr>
-          </a:p>
-        </p:txBody>
-      </p:sp>
-      <p:sp>
-        <p:nvSpPr>
-          <p:cNvPr id="2" name="Title 1">
-            <a:extLst>
-              <a:ext uri="{FF2B5EF4-FFF2-40B4-BE49-F238E27FC236}">
-                <ns2:creationId id="{7710B119-EC53-BA46-BAA3-CB758CDEDAF5}"/>
-              </a:ext>
-            </a:extLst>
-          </p:cNvPr>
-          <p:cNvSpPr>
-            <a:spLocks noGrp="1"/>
-          </p:cNvSpPr>
-          <p:nvPr>
-            <p:ph type="ctrTitle"/>
-          </p:nvPr>
-        </p:nvSpPr>
-        <p:spPr>
-          <a:xfrm>
-            <a:off x="1524000" y="1122362"/>
-            <a:ext cx="9144000" cy="2840037"/>
-          </a:xfrm>
-        </p:spPr>
-        <p:txBody>
-          <a:bodyPr>
-            <a:normAutofit/>
-          </a:bodyPr>
-          <a:lstStyle/>
-          <a:p>
-            <a:r>
-              <a:rPr lang="en-US" sz="5800" dirty="0"/>
-              <a:t>Thank You</a:t>
-            </a:r>
-          </a:p>
-        </p:txBody>
-      </p:sp>
-      <p:sp>
-        <p:nvSpPr>
-          <p:cNvPr id="3" name="Subtitle 2">
-            <a:extLst>
-              <a:ext uri="{FF2B5EF4-FFF2-40B4-BE49-F238E27FC236}">
-                <ns2:creationId id="{44E6BC0E-0DB7-C346-A0CC-E3CB36C29A54}"/>
-              </a:ext>
-            </a:extLst>
-          </p:cNvPr>
-          <p:cNvSpPr>
-            <a:spLocks noGrp="1"/>
-          </p:cNvSpPr>
-          <p:nvPr>
-            <p:ph type="subTitle" idx="1"/>
-          </p:nvPr>
-        </p:nvSpPr>
-        <p:spPr>
-          <a:xfrm>
-            <a:off x="1524000" y="4256436"/>
-            <a:ext cx="9144000" cy="1600818"/>
-          </a:xfrm>
-        </p:spPr>
-        <p:txBody>
-          <a:bodyPr>
-            <a:normAutofit/>
-          </a:bodyPr>
-          <a:lstStyle/>
-          <a:p>
-            <a:r>
-              <a:rPr lang="en-US" dirty="0"/>
-              <a:t>Questions?</a:t>
-            </a:r>
-          </a:p>
-        </p:txBody>
-      </p:sp>
-      <p:cxnSp>
-        <p:nvCxnSpPr>
-          <p:cNvPr id="13" name="Straight Connector 12">
-            <a:extLst>
-              <a:ext uri="{FF2B5EF4-FFF2-40B4-BE49-F238E27FC236}">
-                <ns2:creationId id="{45000665-DFC7-417E-8FD7-516A0F15C975}"/>
-              </a:ext>
-              <a:ext uri="{C183D7F6-B498-43B3-948B-1728B52AA6E4}">
-                <ns3:decorative val="1"/>
-              </a:ext>
-            </a:extLst>
-          </p:cNvPr>
-          <p:cNvCxnSpPr>
-            <a:cxnSpLocks noGrp="1" noRot="1" noChangeAspect="1" noMove="1" noResize="1" noEditPoints="1" noAdjustHandles="1" noChangeArrowheads="1" noChangeShapeType="1"/>
-          </p:cNvCxnSpPr>
-          <p:nvPr>
-            <p:extLst>
-              <p:ext uri="{386F3935-93C4-4BCD-93E2-E3B085C9AB24}">
-                <ns4:designElem val="1"/>
-              </p:ext>
-            </p:extLst>
-          </p:nvPr>
-        </p:nvCxnSpPr>
-        <p:spPr>
-          <a:xfrm>
-            <a:off x="4724400" y="4109417"/>
-            <a:ext cx="2743200" cy="0"/>
-          </a:xfrm>
-          <a:prstGeom prst="line">
-            <a:avLst/>
-          </a:prstGeom>
-          <a:ln w="12700">
-            <a:solidFill>
-              <a:schemeClr val="tx1">
-                <a:lumMod val="85000"/>
-              </a:schemeClr>
-            </a:solidFill>
-          </a:ln>
-        </p:spPr>
-        <p:style>
-          <a:lnRef idx="1">
-            <a:schemeClr val="accent1"/>
-          </a:lnRef>
-          <a:fillRef idx="0">
-            <a:schemeClr val="accent1"/>
-          </a:fillRef>
-          <a:effectRef idx="0">
-            <a:schemeClr val="accent1"/>
-          </a:effectRef>
-          <a:fontRef idx="minor">
-            <a:schemeClr val="tx1"/>
-          </a:fontRef>
-        </p:style>
-      </p:cxnSp>
-      <p:sp>
-        <p:nvSpPr>
-          <p:cNvPr id="4" name="Footer Placeholder 3">
-            <a:extLst>
-              <a:ext uri="{FF2B5EF4-FFF2-40B4-BE49-F238E27FC236}">
-                <ns2:creationId id="{9E726E67-7B90-B642-8D26-6DDF890C4785}"/>
-              </a:ext>
-            </a:extLst>
-          </p:cNvPr>
-          <p:cNvSpPr>
-            <a:spLocks noGrp="1"/>
-          </p:cNvSpPr>
-          <p:nvPr>
-            <p:ph type="ftr" sz="quarter" idx="11"/>
-          </p:nvPr>
-        </p:nvSpPr>
-        <p:spPr>
-          <a:xfrm>
-            <a:off x="4038600" y="6159710"/>
-            <a:ext cx="4114800" cy="365125"/>
-          </a:xfrm>
-        </p:spPr>
-        <p:txBody>
-          <a:bodyPr>
-            <a:normAutofit/>
-          </a:bodyPr>
-          <a:lstStyle/>
-          <a:p>
-            <a:pPr marL="0" marR="0" lvl="0" indent="0" algn="ctr" defTabSz="914400" rtl="0" eaLnBrk="1" fontAlgn="auto" latinLnBrk="0" hangingPunct="1">
-              <a:lnSpc>
-                <a:spcPct val="100000"/>
-              </a:lnSpc>
-              <a:spcBef>
-                <a:spcPts val="0"/>
-              </a:spcBef>
-              <a:spcAft>
-                <a:spcPts val="600"/>
-              </a:spcAft>
-              <a:buClrTx/>
-              <a:buSzTx/>
-              <a:buFontTx/>
-              <a:buNone/>
-              <a:tabLst/>
-              <a:defRPr/>
-            </a:pPr>
-            <a:r>
-              <a:rPr kumimoji="0" lang="en-US" sz="1200" b="0" i="0" u="none" strike="noStrike" kern="1200" cap="none" spc="0" normalizeH="0" baseline="0" noProof="0" dirty="0">
-                <a:ln>
-                  <a:noFill/>
-                </a:ln>
-                <a:solidFill>
-                  <a:prstClr val="white">
-                    <a:tint val="75000"/>
-                  </a:prstClr>
-                </a:solidFill>
-                <a:effectLst/>
-                <a:uLnTx/>
-                <a:uFillTx/>
-                <a:latin typeface="Helvetica Neue" panose="02000503000000020004" pitchFamily="2" charset="0"/>
-                <a:ea typeface="Helvetica Neue" panose="02000503000000020004" pitchFamily="2" charset="0"/>
-                <a:cs typeface="Helvetica Neue" panose="02000503000000020004" pitchFamily="2" charset="0"/>
-              </a:rPr>
-              <a:t>J Mark Morris - Architrino Assembly Architecture</a:t>
-            </a:r>
-          </a:p>
-        </p:txBody>
-      </p:sp>
-    </p:spTree>
-    <p:extLst>
-      <p:ext uri="{BB962C8B-B14F-4D97-AF65-F5344CB8AC3E}">
-        <ns5:creationId val="3747833275"/>
-      </p:ext>
-    </p:extLst>
-  </p:cSld>
-  <p:clrMapOvr>
-    <a:overrideClrMapping bg1="dk1" tx1="lt1" bg2="dk2" tx2="lt2" accent1="accent1" accent2="accent2" accent3="accent3" accent4="accent4" accent5="accent5" accent6="accent6" hlink="hlink" folHlink="folHlink"/>
-  </p:clrMapOvr>
-</p:sld>
-</file>
-
-<file path=ppt/slides/slide15.xml><?xml version="1.0" encoding="utf-8"?>
-<p:sld xmlns:a="http://schemas.openxmlformats.org/drawingml/2006/main" xmlns:ns2="http://schemas.microsoft.com/office/drawing/2014/main" xmlns:ns3="http://schemas.microsoft.com/office/powerpoint/2010/main" xmlns:p="http://schemas.openxmlformats.org/presentationml/2006/main">
+<p:sld xmlns:a="http://schemas.openxmlformats.org/drawingml/2006/main" xmlns:r="http://schemas.openxmlformats.org/officeDocument/2006/relationships" xmlns:p="http://schemas.openxmlformats.org/presentationml/2006/main">
   <p:cSld>
     <p:bg>
       <p:bgPr>
@@ -20901,7 +19094,7 @@
         <p:cNvPr id="1" name="">
           <a:extLst>
             <a:ext uri="{FF2B5EF4-FFF2-40B4-BE49-F238E27FC236}">
-              <ns2:creationId id="{804AC981-79ED-95B2-006C-1F07F7D1021C}"/>
+              <a16:creationId xmlns:a16="http://schemas.microsoft.com/office/drawing/2014/main" id="{804AC981-79ED-95B2-006C-1F07F7D1021C}"/>
             </a:ext>
           </a:extLst>
         </p:cNvPr>
@@ -20921,7 +19114,7 @@
           <p:cNvPr id="2" name="TextBox 1">
             <a:extLst>
               <a:ext uri="{FF2B5EF4-FFF2-40B4-BE49-F238E27FC236}">
-                <ns2:creationId id="{25D5C38C-76F4-C791-A566-84A8B395A016}"/>
+                <a16:creationId xmlns:a16="http://schemas.microsoft.com/office/drawing/2014/main" id="{25D5C38C-76F4-C791-A566-84A8B395A016}"/>
               </a:ext>
             </a:extLst>
           </p:cNvPr>
@@ -21018,7 +19211,7 @@
     </p:spTree>
     <p:extLst>
       <p:ext uri="{BB962C8B-B14F-4D97-AF65-F5344CB8AC3E}">
-        <ns3:creationId val="3464736619"/>
+        <p14:creationId xmlns:p14="http://schemas.microsoft.com/office/powerpoint/2010/main" val="3464736619"/>
       </p:ext>
     </p:extLst>
   </p:cSld>
@@ -21028,8 +19221,8 @@
 </p:sld>
 </file>
 
-<file path=ppt/slides/slide16.xml><?xml version="1.0" encoding="utf-8"?>
-<p:sld xmlns:a="http://schemas.openxmlformats.org/drawingml/2006/main" xmlns:ns2="http://schemas.microsoft.com/office/drawing/2014/main" xmlns:ns3="http://schemas.microsoft.com/office/powerpoint/2010/main" xmlns:p="http://schemas.openxmlformats.org/presentationml/2006/main">
+<file path=ppt/slides/slide15.xml><?xml version="1.0" encoding="utf-8"?>
+<p:sld xmlns:a="http://schemas.openxmlformats.org/drawingml/2006/main" xmlns:r="http://schemas.openxmlformats.org/officeDocument/2006/relationships" xmlns:p="http://schemas.openxmlformats.org/presentationml/2006/main">
   <p:cSld>
     <p:bg>
       <p:bgPr>
@@ -21044,7 +19237,7 @@
         <p:cNvPr id="1" name="">
           <a:extLst>
             <a:ext uri="{FF2B5EF4-FFF2-40B4-BE49-F238E27FC236}">
-              <ns2:creationId id="{2CB0C588-8647-6C8C-8DC7-F162DDF8BF26}"/>
+              <a16:creationId xmlns:a16="http://schemas.microsoft.com/office/drawing/2014/main" id="{2CB0C588-8647-6C8C-8DC7-F162DDF8BF26}"/>
             </a:ext>
           </a:extLst>
         </p:cNvPr>
@@ -21064,7 +19257,7 @@
           <p:cNvPr id="5" name="Footer Placeholder 3">
             <a:extLst>
               <a:ext uri="{FF2B5EF4-FFF2-40B4-BE49-F238E27FC236}">
-                <ns2:creationId id="{D8055493-6465-E03D-4E0E-CA86B923D2DB}"/>
+                <a16:creationId xmlns:a16="http://schemas.microsoft.com/office/drawing/2014/main" id="{D8055493-6465-E03D-4E0E-CA86B923D2DB}"/>
               </a:ext>
             </a:extLst>
           </p:cNvPr>
@@ -21226,7 +19419,7 @@
           <p:cNvPr id="19" name="Rectangle 18">
             <a:extLst>
               <a:ext uri="{FF2B5EF4-FFF2-40B4-BE49-F238E27FC236}">
-                <ns2:creationId id="{232D04D3-E71C-CAE2-097F-314B5E11C0F3}"/>
+                <a16:creationId xmlns:a16="http://schemas.microsoft.com/office/drawing/2014/main" id="{232D04D3-E71C-CAE2-097F-314B5E11C0F3}"/>
               </a:ext>
             </a:extLst>
           </p:cNvPr>
@@ -21291,7 +19484,7 @@
           <p:cNvPr id="2" name="TextBox 1">
             <a:extLst>
               <a:ext uri="{FF2B5EF4-FFF2-40B4-BE49-F238E27FC236}">
-                <ns2:creationId id="{5B66C1A2-52BD-EA60-BE8F-C5D3C8F732D2}"/>
+                <a16:creationId xmlns:a16="http://schemas.microsoft.com/office/drawing/2014/main" id="{5B66C1A2-52BD-EA60-BE8F-C5D3C8F732D2}"/>
               </a:ext>
             </a:extLst>
           </p:cNvPr>
@@ -21301,7 +19494,7 @@
         <p:spPr>
           <a:xfrm>
             <a:off x="337206" y="907318"/>
-            <a:ext cx="11695463" cy="4124206"/>
+            <a:ext cx="11695463" cy="1815882"/>
           </a:xfrm>
           <a:prstGeom prst="rect">
             <a:avLst/>
@@ -21346,7 +19539,7 @@
                 <a:ea typeface="Helvetica Neue" panose="02000503000000020004" pitchFamily="2" charset="0"/>
                 <a:cs typeface="Helvetica Neue" panose="02000503000000020004" pitchFamily="2" charset="0"/>
               </a:rPr>
-              <a:t>Nature is modeled as geometry in absolute time and the Euclidean void, populated by equal-and-opposite architrinos.</a:t>
+              <a:t>Nature is modeled as geometry in absolute time and absolute space, populated by equal-and-opposite architrinos.</a:t>
             </a:r>
           </a:p>
           <a:p>
@@ -21418,24 +19611,7 @@
                 <a:ea typeface="Helvetica Neue" panose="02000503000000020004" pitchFamily="2" charset="0"/>
                 <a:cs typeface="Helvetica Neue" panose="02000503000000020004" pitchFamily="2" charset="0"/>
               </a:rPr>
-              <a:t xml:space="preserve">Because an architrino can move faster than wake speed, v = </a:t>
-            </a:r>
-            <a:r>
-              <a:rPr kumimoji="0" lang="en-US" sz="1600" b="0" i="0" u="none" strike="noStrike" kern="1200" cap="none" spc="0" normalizeH="0" baseline="0" noProof="0" dirty="0">
-                <a:ln>
-                  <a:noFill/>
-                </a:ln>
-                <a:solidFill>
-                  <a:prstClr val="white"/>
-                </a:solidFill>
-                <a:effectLst/>
-                <a:uLnTx/>
-                <a:uFillTx/>
-                <a:latin typeface="Helvetica Neue" panose="02000503000000020004" pitchFamily="2" charset="0"/>
-                <a:ea typeface="Helvetica Neue" panose="02000503000000020004" pitchFamily="2" charset="0"/>
-                <a:cs typeface="Helvetica Neue" panose="02000503000000020004" pitchFamily="2" charset="0"/>
-              </a:rPr>
-              <a:t>c</a:t>
+              <a:t>Because an architrino can move faster than wake speed, v = c</a:t>
             </a:r>
             <a:r>
               <a:rPr kumimoji="0" lang="en-US" sz="1120" b="0" i="0" u="none" strike="noStrike" kern="1200" cap="none" spc="0" normalizeH="0" baseline="-25000" noProof="0" dirty="0">
@@ -21469,7 +19645,7 @@
                 <a:ea typeface="Helvetica Neue" panose="02000503000000020004" pitchFamily="2" charset="0"/>
                 <a:cs typeface="Helvetica Neue" panose="02000503000000020004" pitchFamily="2" charset="0"/>
               </a:rPr>
-              <a:t xml:space="preserve"> marks a self-hit onset boundary rather than an observer-level speed limit.</a:t>
+              <a:t> marks a self-hit onset boundary rather than an observer-level speed limit.</a:t>
             </a:r>
           </a:p>
           <a:p>
@@ -21501,7 +19677,7 @@
     </p:spTree>
     <p:extLst>
       <p:ext uri="{BB962C8B-B14F-4D97-AF65-F5344CB8AC3E}">
-        <ns3:creationId val="3670680207"/>
+        <p14:creationId xmlns:p14="http://schemas.microsoft.com/office/powerpoint/2010/main" val="3670680207"/>
       </p:ext>
     </p:extLst>
   </p:cSld>
@@ -21511,8 +19687,8 @@
 </p:sld>
 </file>
 
-<file path=ppt/slides/slide17.xml><?xml version="1.0" encoding="utf-8"?>
-<p:sld xmlns:a="http://schemas.openxmlformats.org/drawingml/2006/main" xmlns:ns2="http://schemas.microsoft.com/office/drawing/2014/main" xmlns:ns3="http://schemas.microsoft.com/office/powerpoint/2010/main" xmlns:p="http://schemas.openxmlformats.org/presentationml/2006/main">
+<file path=ppt/slides/slide16.xml><?xml version="1.0" encoding="utf-8"?>
+<p:sld xmlns:a="http://schemas.openxmlformats.org/drawingml/2006/main" xmlns:r="http://schemas.openxmlformats.org/officeDocument/2006/relationships" xmlns:p="http://schemas.openxmlformats.org/presentationml/2006/main">
   <p:cSld>
     <p:bg>
       <p:bgPr>
@@ -21527,7 +19703,7 @@
         <p:cNvPr id="1" name="">
           <a:extLst>
             <a:ext uri="{FF2B5EF4-FFF2-40B4-BE49-F238E27FC236}">
-              <ns2:creationId id="{8B3A6F17-EFE6-B51A-A63A-3B70333495A1}"/>
+              <a16:creationId xmlns:a16="http://schemas.microsoft.com/office/drawing/2014/main" id="{8B3A6F17-EFE6-B51A-A63A-3B70333495A1}"/>
             </a:ext>
           </a:extLst>
         </p:cNvPr>
@@ -21547,7 +19723,7 @@
           <p:cNvPr id="5" name="Footer Placeholder 3">
             <a:extLst>
               <a:ext uri="{FF2B5EF4-FFF2-40B4-BE49-F238E27FC236}">
-                <ns2:creationId id="{68EB2D01-BE54-DC86-BCD1-1E32DA2C4000}"/>
+                <a16:creationId xmlns:a16="http://schemas.microsoft.com/office/drawing/2014/main" id="{68EB2D01-BE54-DC86-BCD1-1E32DA2C4000}"/>
               </a:ext>
             </a:extLst>
           </p:cNvPr>
@@ -21709,7 +19885,7 @@
           <p:cNvPr id="19" name="Rectangle 18">
             <a:extLst>
               <a:ext uri="{FF2B5EF4-FFF2-40B4-BE49-F238E27FC236}">
-                <ns2:creationId id="{F2D335EE-90BE-310F-3F30-68D612074B92}"/>
+                <a16:creationId xmlns:a16="http://schemas.microsoft.com/office/drawing/2014/main" id="{F2D335EE-90BE-310F-3F30-68D612074B92}"/>
               </a:ext>
             </a:extLst>
           </p:cNvPr>
@@ -21774,7 +19950,7 @@
           <p:cNvPr id="2" name="TextBox 1">
             <a:extLst>
               <a:ext uri="{FF2B5EF4-FFF2-40B4-BE49-F238E27FC236}">
-                <ns2:creationId id="{CBF92790-EC27-682A-21D0-5C88069D4333}"/>
+                <a16:creationId xmlns:a16="http://schemas.microsoft.com/office/drawing/2014/main" id="{CBF92790-EC27-682A-21D0-5C88069D4333}"/>
               </a:ext>
             </a:extLst>
           </p:cNvPr>
@@ -21945,7 +20121,7 @@
     </p:spTree>
     <p:extLst>
       <p:ext uri="{BB962C8B-B14F-4D97-AF65-F5344CB8AC3E}">
-        <ns3:creationId val="653966555"/>
+        <p14:creationId xmlns:p14="http://schemas.microsoft.com/office/powerpoint/2010/main" val="653966555"/>
       </p:ext>
     </p:extLst>
   </p:cSld>
@@ -21955,8 +20131,8 @@
 </p:sld>
 </file>
 
-<file path=ppt/slides/slide18.xml><?xml version="1.0" encoding="utf-8"?>
-<p:sld xmlns:a="http://schemas.openxmlformats.org/drawingml/2006/main" xmlns:ns2="http://schemas.microsoft.com/office/drawing/2014/main" xmlns:ns4="http://schemas.microsoft.com/office/powerpoint/2010/main" xmlns:p="http://schemas.openxmlformats.org/presentationml/2006/main" xmlns:r="http://schemas.openxmlformats.org/officeDocument/2006/relationships">
+<file path=ppt/slides/slide17.xml><?xml version="1.0" encoding="utf-8"?>
+<p:sld xmlns:a="http://schemas.openxmlformats.org/drawingml/2006/main" xmlns:r="http://schemas.openxmlformats.org/officeDocument/2006/relationships" xmlns:p="http://schemas.openxmlformats.org/presentationml/2006/main">
   <p:cSld>
     <p:bg>
       <p:bgPr>
@@ -21971,7 +20147,7 @@
         <p:cNvPr id="1" name="">
           <a:extLst>
             <a:ext uri="{FF2B5EF4-FFF2-40B4-BE49-F238E27FC236}">
-              <ns2:creationId id="{764AD85F-4248-DE78-FCB4-518C065121A3}"/>
+              <a16:creationId xmlns:a16="http://schemas.microsoft.com/office/drawing/2014/main" id="{764AD85F-4248-DE78-FCB4-518C065121A3}"/>
             </a:ext>
           </a:extLst>
         </p:cNvPr>
@@ -21991,7 +20167,7 @@
           <p:cNvPr id="5" name="Footer Placeholder 3">
             <a:extLst>
               <a:ext uri="{FF2B5EF4-FFF2-40B4-BE49-F238E27FC236}">
-                <ns2:creationId id="{0464A0FC-8CE3-207B-0E49-C582E93BE77D}"/>
+                <a16:creationId xmlns:a16="http://schemas.microsoft.com/office/drawing/2014/main" id="{0464A0FC-8CE3-207B-0E49-C582E93BE77D}"/>
               </a:ext>
             </a:extLst>
           </p:cNvPr>
@@ -22153,7 +20329,7 @@
           <p:cNvPr id="19" name="Rectangle 18">
             <a:extLst>
               <a:ext uri="{FF2B5EF4-FFF2-40B4-BE49-F238E27FC236}">
-                <ns2:creationId id="{59C47AE8-E40E-D333-CCEE-591287A99ACE}"/>
+                <a16:creationId xmlns:a16="http://schemas.microsoft.com/office/drawing/2014/main" id="{59C47AE8-E40E-D333-CCEE-591287A99ACE}"/>
               </a:ext>
             </a:extLst>
           </p:cNvPr>
@@ -22218,7 +20394,7 @@
           <p:cNvPr id="2" name="TextBox 1">
             <a:extLst>
               <a:ext uri="{FF2B5EF4-FFF2-40B4-BE49-F238E27FC236}">
-                <ns2:creationId id="{C4927378-5D67-46E3-234B-AEB36EE62C4E}"/>
+                <a16:creationId xmlns:a16="http://schemas.microsoft.com/office/drawing/2014/main" id="{C4927378-5D67-46E3-234B-AEB36EE62C4E}"/>
               </a:ext>
             </a:extLst>
           </p:cNvPr>
@@ -22283,7 +20459,7 @@
           <p:cNvPr id="3" name="Picture 2">
             <a:extLst>
               <a:ext uri="{FF2B5EF4-FFF2-40B4-BE49-F238E27FC236}">
-                <ns2:creationId id="{77DA6E5F-7441-6233-DACB-330BCC7593FF}"/>
+                <a16:creationId xmlns:a16="http://schemas.microsoft.com/office/drawing/2014/main" id="{77DA6E5F-7441-6233-DACB-330BCC7593FF}"/>
               </a:ext>
             </a:extLst>
           </p:cNvPr>
@@ -22311,7 +20487,7 @@
     </p:spTree>
     <p:extLst>
       <p:ext uri="{BB962C8B-B14F-4D97-AF65-F5344CB8AC3E}">
-        <ns4:creationId val="1428032534"/>
+        <p14:creationId xmlns:p14="http://schemas.microsoft.com/office/powerpoint/2010/main" val="1428032534"/>
       </p:ext>
     </p:extLst>
   </p:cSld>
@@ -22322,7 +20498,7 @@
 </file>
 
 <file path=ppt/slides/slide2.xml><?xml version="1.0" encoding="utf-8"?>
-<p:sld xmlns:a="http://schemas.openxmlformats.org/drawingml/2006/main" xmlns:ns2="http://schemas.microsoft.com/office/drawing/2014/main" xmlns:ns3="http://schemas.microsoft.com/office/powerpoint/2010/main" xmlns:p="http://schemas.openxmlformats.org/presentationml/2006/main">
+<p:sld xmlns:a="http://schemas.openxmlformats.org/drawingml/2006/main" xmlns:r="http://schemas.openxmlformats.org/officeDocument/2006/relationships" xmlns:p="http://schemas.openxmlformats.org/presentationml/2006/main">
   <p:cSld>
     <p:bg>
       <p:bgPr>
@@ -22351,7 +20527,7 @@
           <p:cNvPr id="5" name="Footer Placeholder 3">
             <a:extLst>
               <a:ext uri="{FF2B5EF4-FFF2-40B4-BE49-F238E27FC236}">
-                <ns2:creationId id="{668F77D6-DFDA-5A46-8DF1-47F6A167C2B1}"/>
+                <a16:creationId xmlns:a16="http://schemas.microsoft.com/office/drawing/2014/main" id="{668F77D6-DFDA-5A46-8DF1-47F6A167C2B1}"/>
               </a:ext>
             </a:extLst>
           </p:cNvPr>
@@ -22513,7 +20689,7 @@
           <p:cNvPr id="6" name="Group 5">
             <a:extLst>
               <a:ext uri="{FF2B5EF4-FFF2-40B4-BE49-F238E27FC236}">
-                <ns2:creationId id="{CB214E5A-63A5-5C6B-3D5B-75FF74FA3E5A}"/>
+                <a16:creationId xmlns:a16="http://schemas.microsoft.com/office/drawing/2014/main" id="{CB214E5A-63A5-5C6B-3D5B-75FF74FA3E5A}"/>
               </a:ext>
             </a:extLst>
           </p:cNvPr>
@@ -22522,10 +20698,10 @@
         </p:nvGrpSpPr>
         <p:grpSpPr>
           <a:xfrm>
-            <a:off x="28129" y="1077673"/>
-            <a:ext cx="11664338" cy="5685100"/>
-            <a:chOff x="28129" y="1077673"/>
-            <a:chExt cx="11664338" cy="5685100"/>
+            <a:off x="77021" y="1077673"/>
+            <a:ext cx="11615446" cy="5685100"/>
+            <a:chOff x="77021" y="1077673"/>
+            <a:chExt cx="11615446" cy="5685100"/>
           </a:xfrm>
         </p:grpSpPr>
         <p:cxnSp>
@@ -22533,7 +20709,7 @@
             <p:cNvPr id="3" name="Straight Arrow Connector 2">
               <a:extLst>
                 <a:ext uri="{FF2B5EF4-FFF2-40B4-BE49-F238E27FC236}">
-                  <ns2:creationId id="{2EF0199F-22F4-BA42-9B75-8A8183BCDA9B}"/>
+                  <a16:creationId xmlns:a16="http://schemas.microsoft.com/office/drawing/2014/main" id="{2EF0199F-22F4-BA42-9B75-8A8183BCDA9B}"/>
                 </a:ext>
               </a:extLst>
             </p:cNvPr>
@@ -22577,7 +20753,7 @@
             <p:cNvPr id="8" name="Straight Arrow Connector 7">
               <a:extLst>
                 <a:ext uri="{FF2B5EF4-FFF2-40B4-BE49-F238E27FC236}">
-                  <ns2:creationId id="{49AB5343-55D0-6041-8627-E08A73F83930}"/>
+                  <a16:creationId xmlns:a16="http://schemas.microsoft.com/office/drawing/2014/main" id="{49AB5343-55D0-6041-8627-E08A73F83930}"/>
                 </a:ext>
               </a:extLst>
             </p:cNvPr>
@@ -22621,7 +20797,7 @@
             <p:cNvPr id="12" name="TextBox 11">
               <a:extLst>
                 <a:ext uri="{FF2B5EF4-FFF2-40B4-BE49-F238E27FC236}">
-                  <ns2:creationId id="{BF8D86A2-D083-024A-BC90-6BD938C23243}"/>
+                  <a16:creationId xmlns:a16="http://schemas.microsoft.com/office/drawing/2014/main" id="{BF8D86A2-D083-024A-BC90-6BD938C23243}"/>
                 </a:ext>
               </a:extLst>
             </p:cNvPr>
@@ -22686,7 +20862,7 @@
             <p:cNvPr id="13" name="TextBox 12">
               <a:extLst>
                 <a:ext uri="{FF2B5EF4-FFF2-40B4-BE49-F238E27FC236}">
-                  <ns2:creationId id="{2C3F4604-6C2F-0E4E-9DD3-4F5C89FF51AB}"/>
+                  <a16:creationId xmlns:a16="http://schemas.microsoft.com/office/drawing/2014/main" id="{2C3F4604-6C2F-0E4E-9DD3-4F5C89FF51AB}"/>
                 </a:ext>
               </a:extLst>
             </p:cNvPr>
@@ -22695,8 +20871,8 @@
           </p:nvSpPr>
           <p:spPr>
             <a:xfrm>
-              <a:off x="28129" y="3162375"/>
-              <a:ext cx="1191352" cy="923330"/>
+              <a:off x="77021" y="3162375"/>
+              <a:ext cx="1093568" cy="646331"/>
             </a:xfrm>
             <a:prstGeom prst="rect">
               <a:avLst/>
@@ -22741,7 +20917,7 @@
                   <a:ea typeface="Helvetica Neue" panose="02000503000000020004" pitchFamily="2" charset="0"/>
                   <a:cs typeface="Helvetica Neue" panose="02000503000000020004" pitchFamily="2" charset="0"/>
                 </a:rPr>
-                <a:t>Euclidean</a:t>
+                <a:t>Absolute</a:t>
               </a:r>
             </a:p>
             <a:p>
@@ -22763,22 +20939,30 @@
                 <a:defRPr/>
               </a:pPr>
               <a:r>
-                <a:rPr kumimoji="0" lang="en-US" sz="1800" b="0" i="0" u="none" strike="noStrike" kern="1200" cap="none" spc="0" normalizeH="0" baseline="0" noProof="0" dirty="0">
-                  <a:ln>
-                    <a:noFill/>
-                  </a:ln>
+                <a:rPr lang="en-US" dirty="0">
                   <a:solidFill>
                     <a:prstClr val="white"/>
                   </a:solidFill>
-                  <a:effectLst/>
-                  <a:uLnTx/>
-                  <a:uFillTx/>
                   <a:latin typeface="Helvetica Neue" panose="02000503000000020004" pitchFamily="2" charset="0"/>
                   <a:ea typeface="Helvetica Neue" panose="02000503000000020004" pitchFamily="2" charset="0"/>
                   <a:cs typeface="Helvetica Neue" panose="02000503000000020004" pitchFamily="2" charset="0"/>
                 </a:rPr>
-                <a:t>Void</a:t>
+                <a:t>Space</a:t>
               </a:r>
+              <a:endParaRPr kumimoji="0" lang="en-US" sz="1800" b="0" i="0" u="none" strike="noStrike" kern="1200" cap="none" spc="0" normalizeH="0" baseline="0" noProof="0" dirty="0">
+                <a:ln>
+                  <a:noFill/>
+                </a:ln>
+                <a:solidFill>
+                  <a:prstClr val="white"/>
+                </a:solidFill>
+                <a:effectLst/>
+                <a:uLnTx/>
+                <a:uFillTx/>
+                <a:latin typeface="Helvetica Neue" panose="02000503000000020004" pitchFamily="2" charset="0"/>
+                <a:ea typeface="Helvetica Neue" panose="02000503000000020004" pitchFamily="2" charset="0"/>
+                <a:cs typeface="Helvetica Neue" panose="02000503000000020004" pitchFamily="2" charset="0"/>
+              </a:endParaRPr>
             </a:p>
           </p:txBody>
         </p:sp>
@@ -22788,7 +20972,7 @@
           <p:cNvPr id="23" name="Oval 22">
             <a:extLst>
               <a:ext uri="{FF2B5EF4-FFF2-40B4-BE49-F238E27FC236}">
-                <ns2:creationId id="{0112617B-A1D5-1E41-BF92-E67D4E046E39}"/>
+                <a16:creationId xmlns:a16="http://schemas.microsoft.com/office/drawing/2014/main" id="{0112617B-A1D5-1E41-BF92-E67D4E046E39}"/>
               </a:ext>
             </a:extLst>
           </p:cNvPr>
@@ -22872,7 +21056,7 @@
           <p:cNvPr id="27" name="Oval 26">
             <a:extLst>
               <a:ext uri="{FF2B5EF4-FFF2-40B4-BE49-F238E27FC236}">
-                <ns2:creationId id="{6EF0F7DA-5E70-8348-A200-F59A10FF7C55}"/>
+                <a16:creationId xmlns:a16="http://schemas.microsoft.com/office/drawing/2014/main" id="{6EF0F7DA-5E70-8348-A200-F59A10FF7C55}"/>
               </a:ext>
             </a:extLst>
           </p:cNvPr>
@@ -22956,7 +21140,7 @@
           <p:cNvPr id="28" name="Oval 27">
             <a:extLst>
               <a:ext uri="{FF2B5EF4-FFF2-40B4-BE49-F238E27FC236}">
-                <ns2:creationId id="{552F58D0-F613-674A-B294-C894E5FB1683}"/>
+                <a16:creationId xmlns:a16="http://schemas.microsoft.com/office/drawing/2014/main" id="{552F58D0-F613-674A-B294-C894E5FB1683}"/>
               </a:ext>
             </a:extLst>
           </p:cNvPr>
@@ -23040,7 +21224,7 @@
           <p:cNvPr id="29" name="Oval 28">
             <a:extLst>
               <a:ext uri="{FF2B5EF4-FFF2-40B4-BE49-F238E27FC236}">
-                <ns2:creationId id="{9CA7A721-D3BD-744E-9306-85BBED5F74BC}"/>
+                <a16:creationId xmlns:a16="http://schemas.microsoft.com/office/drawing/2014/main" id="{9CA7A721-D3BD-744E-9306-85BBED5F74BC}"/>
               </a:ext>
             </a:extLst>
           </p:cNvPr>
@@ -23124,7 +21308,7 @@
           <p:cNvPr id="30" name="Oval 29">
             <a:extLst>
               <a:ext uri="{FF2B5EF4-FFF2-40B4-BE49-F238E27FC236}">
-                <ns2:creationId id="{F97F1A02-C0C7-3C45-9790-847C152D159A}"/>
+                <a16:creationId xmlns:a16="http://schemas.microsoft.com/office/drawing/2014/main" id="{F97F1A02-C0C7-3C45-9790-847C152D159A}"/>
               </a:ext>
             </a:extLst>
           </p:cNvPr>
@@ -23208,7 +21392,7 @@
           <p:cNvPr id="18" name="Oval 17">
             <a:extLst>
               <a:ext uri="{FF2B5EF4-FFF2-40B4-BE49-F238E27FC236}">
-                <ns2:creationId id="{BE4CDC90-4B2E-BE41-BB9D-A84675F3A2FE}"/>
+                <a16:creationId xmlns:a16="http://schemas.microsoft.com/office/drawing/2014/main" id="{BE4CDC90-4B2E-BE41-BB9D-A84675F3A2FE}"/>
               </a:ext>
             </a:extLst>
           </p:cNvPr>
@@ -23291,7 +21475,7 @@
           <p:cNvPr id="31" name="TextBox 30">
             <a:extLst>
               <a:ext uri="{FF2B5EF4-FFF2-40B4-BE49-F238E27FC236}">
-                <ns2:creationId id="{713B9ACE-B673-2D48-BEF2-2A133C31B527}"/>
+                <a16:creationId xmlns:a16="http://schemas.microsoft.com/office/drawing/2014/main" id="{713B9ACE-B673-2D48-BEF2-2A133C31B527}"/>
               </a:ext>
             </a:extLst>
           </p:cNvPr>
@@ -23349,24 +21533,7 @@
                 <a:ea typeface="Helvetica Neue" panose="02000503000000020004" pitchFamily="2" charset="0"/>
                 <a:cs typeface="Helvetica Neue" panose="02000503000000020004" pitchFamily="2" charset="0"/>
               </a:rPr>
-              <a:t xml:space="preserve">r = </a:t>
-            </a:r>
-            <a:r>
-              <a:rPr kumimoji="0" lang="en-US" sz="1400" b="0" i="1" u="none" strike="noStrike" kern="1200" cap="none" spc="0" normalizeH="0" baseline="0" noProof="0" dirty="0">
-                <a:ln>
-                  <a:noFill/>
-                </a:ln>
-                <a:solidFill>
-                  <a:srgbClr val="FFC000"/>
-                </a:solidFill>
-                <a:effectLst/>
-                <a:uLnTx/>
-                <a:uFillTx/>
-                <a:latin typeface="Helvetica Neue" panose="02000503000000020004" pitchFamily="2" charset="0"/>
-                <a:ea typeface="Helvetica Neue" panose="02000503000000020004" pitchFamily="2" charset="0"/>
-                <a:cs typeface="Helvetica Neue" panose="02000503000000020004" pitchFamily="2" charset="0"/>
-              </a:rPr>
-              <a:t>c</a:t>
+              <a:t>r = c</a:t>
             </a:r>
             <a:r>
               <a:rPr kumimoji="0" lang="en-US" sz="980" b="0" i="1" u="none" strike="noStrike" kern="1200" cap="none" spc="0" normalizeH="0" baseline="-25000" noProof="0" dirty="0">
@@ -23400,7 +21567,7 @@
                 <a:ea typeface="Helvetica Neue" panose="02000503000000020004" pitchFamily="2" charset="0"/>
                 <a:cs typeface="Helvetica Neue" panose="02000503000000020004" pitchFamily="2" charset="0"/>
               </a:rPr>
-              <a:t xml:space="preserve"> t</a:t>
+              <a:t> t</a:t>
             </a:r>
           </a:p>
         </p:txBody>
@@ -23410,7 +21577,7 @@
           <p:cNvPr id="36" name="TextBox 35">
             <a:extLst>
               <a:ext uri="{FF2B5EF4-FFF2-40B4-BE49-F238E27FC236}">
-                <ns2:creationId id="{3A81A480-EF64-094E-825A-8592DAA4C672}"/>
+                <a16:creationId xmlns:a16="http://schemas.microsoft.com/office/drawing/2014/main" id="{3A81A480-EF64-094E-825A-8592DAA4C672}"/>
               </a:ext>
             </a:extLst>
           </p:cNvPr>
@@ -23492,7 +21659,7 @@
           <p:cNvPr id="22" name="Straight Connector 21">
             <a:extLst>
               <a:ext uri="{FF2B5EF4-FFF2-40B4-BE49-F238E27FC236}">
-                <ns2:creationId id="{0C67DA45-6876-7942-9996-48CA0A1696FE}"/>
+                <a16:creationId xmlns:a16="http://schemas.microsoft.com/office/drawing/2014/main" id="{0C67DA45-6876-7942-9996-48CA0A1696FE}"/>
               </a:ext>
             </a:extLst>
           </p:cNvPr>
@@ -23535,7 +21702,7 @@
           <p:cNvPr id="15" name="Straight Arrow Connector 14">
             <a:extLst>
               <a:ext uri="{FF2B5EF4-FFF2-40B4-BE49-F238E27FC236}">
-                <ns2:creationId id="{05289ED1-4679-6543-A669-B23443FD0CD8}"/>
+                <a16:creationId xmlns:a16="http://schemas.microsoft.com/office/drawing/2014/main" id="{05289ED1-4679-6543-A669-B23443FD0CD8}"/>
               </a:ext>
             </a:extLst>
           </p:cNvPr>
@@ -23581,7 +21748,7 @@
           <p:cNvPr id="14" name="Rectangle 13">
             <a:extLst>
               <a:ext uri="{FF2B5EF4-FFF2-40B4-BE49-F238E27FC236}">
-                <ns2:creationId id="{24DFEA8B-B2CC-4557-5832-83CBF458C62D}"/>
+                <a16:creationId xmlns:a16="http://schemas.microsoft.com/office/drawing/2014/main" id="{24DFEA8B-B2CC-4557-5832-83CBF458C62D}"/>
               </a:ext>
             </a:extLst>
           </p:cNvPr>
@@ -23640,24 +21807,7 @@
                 <a:ea typeface="Helvetica Neue" panose="02000503000000020004" pitchFamily="2" charset="0"/>
                 <a:cs typeface="Helvetica Neue" panose="02000503000000020004" pitchFamily="2" charset="0"/>
               </a:rPr>
-              <a:t xml:space="preserve">Wake Speed </a:t>
-            </a:r>
-            <a:r>
-              <a:rPr kumimoji="0" lang="en-US" sz="2000" b="1" i="0" u="none" strike="noStrike" kern="1200" cap="none" spc="0" normalizeH="0" baseline="0" noProof="0" dirty="0">
-                <a:ln>
-                  <a:noFill/>
-                </a:ln>
-                <a:solidFill>
-                  <a:srgbClr val="FF85FF"/>
-                </a:solidFill>
-                <a:effectLst/>
-                <a:uLnTx/>
-                <a:uFillTx/>
-                <a:latin typeface="Helvetica Neue" panose="02000503000000020004" pitchFamily="2" charset="0"/>
-                <a:ea typeface="Helvetica Neue" panose="02000503000000020004" pitchFamily="2" charset="0"/>
-                <a:cs typeface="Helvetica Neue" panose="02000503000000020004" pitchFamily="2" charset="0"/>
-              </a:rPr>
-              <a:t>c</a:t>
+              <a:t>Wake Speed c</a:t>
             </a:r>
             <a:r>
               <a:rPr kumimoji="0" lang="en-US" sz="1400" b="1" i="0" u="none" strike="noStrike" kern="1200" cap="none" spc="0" normalizeH="0" baseline="-25000" noProof="0" dirty="0">
@@ -23691,7 +21841,7 @@
                 <a:ea typeface="Helvetica Neue" panose="02000503000000020004" pitchFamily="2" charset="0"/>
                 <a:cs typeface="Helvetica Neue" panose="02000503000000020004" pitchFamily="2" charset="0"/>
               </a:rPr>
-              <a:t xml:space="preserve"> is a Primitive Constant</a:t>
+              <a:t> is a Primitive Constant</a:t>
             </a:r>
           </a:p>
         </p:txBody>
@@ -23701,7 +21851,7 @@
           <p:cNvPr id="17" name="TextBox 16">
             <a:extLst>
               <a:ext uri="{FF2B5EF4-FFF2-40B4-BE49-F238E27FC236}">
-                <ns2:creationId id="{F6A93B37-78E4-125D-E0BF-C1EC32C24D2E}"/>
+                <a16:creationId xmlns:a16="http://schemas.microsoft.com/office/drawing/2014/main" id="{F6A93B37-78E4-125D-E0BF-C1EC32C24D2E}"/>
               </a:ext>
             </a:extLst>
           </p:cNvPr>
@@ -23756,7 +21906,7 @@
                 <a:ea typeface="Helvetica Neue" panose="02000503000000020004" pitchFamily="2" charset="0"/>
                 <a:cs typeface="Helvetica Neue" panose="02000503000000020004" pitchFamily="2" charset="0"/>
               </a:rPr>
-              <a:t>An architrino at rest emits causal wake surfaces from a common position.</a:t>
+              <a:t>An architrino at rest in the absolute frame emits causal wake surfaces from a common position.</a:t>
             </a:r>
           </a:p>
         </p:txBody>
@@ -23766,7 +21916,7 @@
           <p:cNvPr id="19" name="TextBox 18">
             <a:extLst>
               <a:ext uri="{FF2B5EF4-FFF2-40B4-BE49-F238E27FC236}">
-                <ns2:creationId id="{D1F40738-506F-EAAF-7EBE-CFC9B4FE4D03}"/>
+                <a16:creationId xmlns:a16="http://schemas.microsoft.com/office/drawing/2014/main" id="{D1F40738-506F-EAAF-7EBE-CFC9B4FE4D03}"/>
               </a:ext>
             </a:extLst>
           </p:cNvPr>
@@ -23775,8 +21925,8 @@
         </p:nvSpPr>
         <p:spPr>
           <a:xfrm>
-            <a:off x="1473371" y="187251"/>
-            <a:ext cx="9724009" cy="584775"/>
+            <a:off x="3509582" y="249416"/>
+            <a:ext cx="5717143" cy="584775"/>
           </a:xfrm>
           <a:prstGeom prst="rect">
             <a:avLst/>
@@ -23821,7 +21971,7 @@
                 <a:ea typeface="Helvetica Neue" panose="02000503000000020004" pitchFamily="2" charset="0"/>
                 <a:cs typeface="Helvetica Neue" panose="02000503000000020004" pitchFamily="2" charset="0"/>
               </a:rPr>
-              <a:t>Architrino on Linear Path with Velocity v = 0</a:t>
+              <a:t>Architrino with Velocity v = 0</a:t>
             </a:r>
           </a:p>
         </p:txBody>
@@ -23829,7 +21979,7 @@
     </p:spTree>
     <p:extLst>
       <p:ext uri="{BB962C8B-B14F-4D97-AF65-F5344CB8AC3E}">
-        <ns3:creationId val="4241975687"/>
+        <p14:creationId xmlns:p14="http://schemas.microsoft.com/office/powerpoint/2010/main" val="4241975687"/>
       </p:ext>
     </p:extLst>
   </p:cSld>
@@ -23840,7 +21990,7 @@
 </file>
 
 <file path=ppt/slides/slide3.xml><?xml version="1.0" encoding="utf-8"?>
-<p:sld xmlns:a="http://schemas.openxmlformats.org/drawingml/2006/main" xmlns:ns2="http://schemas.microsoft.com/office/drawing/2014/main" xmlns:ns3="http://schemas.microsoft.com/office/powerpoint/2010/main" xmlns:p="http://schemas.openxmlformats.org/presentationml/2006/main">
+<p:sld xmlns:a="http://schemas.openxmlformats.org/drawingml/2006/main" xmlns:r="http://schemas.openxmlformats.org/officeDocument/2006/relationships" xmlns:p="http://schemas.openxmlformats.org/presentationml/2006/main">
   <p:cSld>
     <p:bg>
       <p:bgPr>
@@ -23855,7 +22005,7 @@
         <p:cNvPr id="1" name="">
           <a:extLst>
             <a:ext uri="{FF2B5EF4-FFF2-40B4-BE49-F238E27FC236}">
-              <ns2:creationId id="{618D555D-7286-B241-E144-DDEC77AD45E3}"/>
+              <a16:creationId xmlns:a16="http://schemas.microsoft.com/office/drawing/2014/main" id="{618D555D-7286-B241-E144-DDEC77AD45E3}"/>
             </a:ext>
           </a:extLst>
         </p:cNvPr>
@@ -23875,7 +22025,7 @@
           <p:cNvPr id="5" name="Footer Placeholder 3">
             <a:extLst>
               <a:ext uri="{FF2B5EF4-FFF2-40B4-BE49-F238E27FC236}">
-                <ns2:creationId id="{614DBC08-8858-F579-1B95-86C501AB042B}"/>
+                <a16:creationId xmlns:a16="http://schemas.microsoft.com/office/drawing/2014/main" id="{614DBC08-8858-F579-1B95-86C501AB042B}"/>
               </a:ext>
             </a:extLst>
           </p:cNvPr>
@@ -24037,7 +22187,7 @@
           <p:cNvPr id="6" name="Group 5">
             <a:extLst>
               <a:ext uri="{FF2B5EF4-FFF2-40B4-BE49-F238E27FC236}">
-                <ns2:creationId id="{17811428-EDBA-0366-BE63-E3E25023C8EC}"/>
+                <a16:creationId xmlns:a16="http://schemas.microsoft.com/office/drawing/2014/main" id="{17811428-EDBA-0366-BE63-E3E25023C8EC}"/>
               </a:ext>
             </a:extLst>
           </p:cNvPr>
@@ -24046,10 +22196,10 @@
         </p:nvGrpSpPr>
         <p:grpSpPr>
           <a:xfrm>
-            <a:off x="28129" y="1077673"/>
-            <a:ext cx="11664338" cy="5685100"/>
-            <a:chOff x="28129" y="1077673"/>
-            <a:chExt cx="11664338" cy="5685100"/>
+            <a:off x="77020" y="1077673"/>
+            <a:ext cx="11615447" cy="5685100"/>
+            <a:chOff x="77020" y="1077673"/>
+            <a:chExt cx="11615447" cy="5685100"/>
           </a:xfrm>
         </p:grpSpPr>
         <p:cxnSp>
@@ -24057,7 +22207,7 @@
             <p:cNvPr id="3" name="Straight Arrow Connector 2">
               <a:extLst>
                 <a:ext uri="{FF2B5EF4-FFF2-40B4-BE49-F238E27FC236}">
-                  <ns2:creationId id="{D482C6FD-3801-AF2C-0D9C-BDC9F781A9F9}"/>
+                  <a16:creationId xmlns:a16="http://schemas.microsoft.com/office/drawing/2014/main" id="{D482C6FD-3801-AF2C-0D9C-BDC9F781A9F9}"/>
                 </a:ext>
               </a:extLst>
             </p:cNvPr>
@@ -24101,7 +22251,7 @@
             <p:cNvPr id="8" name="Straight Arrow Connector 7">
               <a:extLst>
                 <a:ext uri="{FF2B5EF4-FFF2-40B4-BE49-F238E27FC236}">
-                  <ns2:creationId id="{F8DD0551-F57F-FC8B-CDFA-54E4DF3D076B}"/>
+                  <a16:creationId xmlns:a16="http://schemas.microsoft.com/office/drawing/2014/main" id="{F8DD0551-F57F-FC8B-CDFA-54E4DF3D076B}"/>
                 </a:ext>
               </a:extLst>
             </p:cNvPr>
@@ -24145,7 +22295,7 @@
             <p:cNvPr id="12" name="TextBox 11">
               <a:extLst>
                 <a:ext uri="{FF2B5EF4-FFF2-40B4-BE49-F238E27FC236}">
-                  <ns2:creationId id="{2419E9DF-2DD3-3506-BE3B-E485BF80EDAC}"/>
+                  <a16:creationId xmlns:a16="http://schemas.microsoft.com/office/drawing/2014/main" id="{2419E9DF-2DD3-3506-BE3B-E485BF80EDAC}"/>
                 </a:ext>
               </a:extLst>
             </p:cNvPr>
@@ -24210,7 +22360,7 @@
             <p:cNvPr id="13" name="TextBox 12">
               <a:extLst>
                 <a:ext uri="{FF2B5EF4-FFF2-40B4-BE49-F238E27FC236}">
-                  <ns2:creationId id="{93B24559-A789-4B90-E180-1E0D72CE317E}"/>
+                  <a16:creationId xmlns:a16="http://schemas.microsoft.com/office/drawing/2014/main" id="{93B24559-A789-4B90-E180-1E0D72CE317E}"/>
                 </a:ext>
               </a:extLst>
             </p:cNvPr>
@@ -24219,8 +22369,8 @@
           </p:nvSpPr>
           <p:spPr>
             <a:xfrm>
-              <a:off x="28129" y="3162375"/>
-              <a:ext cx="1191352" cy="923330"/>
+              <a:off x="77020" y="3162375"/>
+              <a:ext cx="1093569" cy="646331"/>
             </a:xfrm>
             <a:prstGeom prst="rect">
               <a:avLst/>
@@ -24233,75 +22383,35 @@
             </a:bodyPr>
             <a:lstStyle/>
             <a:p>
-              <a:pPr marL="0" marR="0" lvl="0" indent="0" algn="ctr" defTabSz="914400" rtl="0" eaLnBrk="1" fontAlgn="auto" latinLnBrk="0" hangingPunct="1">
-                <a:lnSpc>
-                  <a:spcPct val="100000"/>
-                </a:lnSpc>
-                <a:spcBef>
-                  <a:spcPts val="0"/>
-                </a:spcBef>
-                <a:spcAft>
-                  <a:spcPts val="0"/>
-                </a:spcAft>
-                <a:buClrTx/>
-                <a:buSzTx/>
-                <a:buFontTx/>
-                <a:buNone/>
-                <a:tabLst/>
+              <a:pPr lvl="0" algn="ctr">
                 <a:defRPr/>
               </a:pPr>
               <a:r>
-                <a:rPr kumimoji="0" lang="en-US" sz="1800" b="0" i="0" u="none" strike="noStrike" kern="1200" cap="none" spc="0" normalizeH="0" baseline="0" noProof="0" dirty="0">
-                  <a:ln>
-                    <a:noFill/>
-                  </a:ln>
+                <a:rPr lang="en-US" dirty="0">
                   <a:solidFill>
                     <a:prstClr val="white"/>
                   </a:solidFill>
-                  <a:effectLst/>
-                  <a:uLnTx/>
-                  <a:uFillTx/>
                   <a:latin typeface="Helvetica Neue" panose="02000503000000020004" pitchFamily="2" charset="0"/>
                   <a:ea typeface="Helvetica Neue" panose="02000503000000020004" pitchFamily="2" charset="0"/>
                   <a:cs typeface="Helvetica Neue" panose="02000503000000020004" pitchFamily="2" charset="0"/>
                 </a:rPr>
-                <a:t>Euclidean</a:t>
+                <a:t>Absolute</a:t>
               </a:r>
             </a:p>
             <a:p>
-              <a:pPr marL="0" marR="0" lvl="0" indent="0" algn="ctr" defTabSz="914400" rtl="0" eaLnBrk="1" fontAlgn="auto" latinLnBrk="0" hangingPunct="1">
-                <a:lnSpc>
-                  <a:spcPct val="100000"/>
-                </a:lnSpc>
-                <a:spcBef>
-                  <a:spcPts val="0"/>
-                </a:spcBef>
-                <a:spcAft>
-                  <a:spcPts val="0"/>
-                </a:spcAft>
-                <a:buClrTx/>
-                <a:buSzTx/>
-                <a:buFontTx/>
-                <a:buNone/>
-                <a:tabLst/>
+              <a:pPr lvl="0" algn="ctr">
                 <a:defRPr/>
               </a:pPr>
               <a:r>
-                <a:rPr kumimoji="0" lang="en-US" sz="1800" b="0" i="0" u="none" strike="noStrike" kern="1200" cap="none" spc="0" normalizeH="0" baseline="0" noProof="0" dirty="0">
-                  <a:ln>
-                    <a:noFill/>
-                  </a:ln>
+                <a:rPr lang="en-US" dirty="0">
                   <a:solidFill>
                     <a:prstClr val="white"/>
                   </a:solidFill>
-                  <a:effectLst/>
-                  <a:uLnTx/>
-                  <a:uFillTx/>
                   <a:latin typeface="Helvetica Neue" panose="02000503000000020004" pitchFamily="2" charset="0"/>
                   <a:ea typeface="Helvetica Neue" panose="02000503000000020004" pitchFamily="2" charset="0"/>
                   <a:cs typeface="Helvetica Neue" panose="02000503000000020004" pitchFamily="2" charset="0"/>
                 </a:rPr>
-                <a:t>Void</a:t>
+                <a:t>Space</a:t>
               </a:r>
             </a:p>
           </p:txBody>
@@ -24312,7 +22422,7 @@
           <p:cNvPr id="23" name="Oval 22">
             <a:extLst>
               <a:ext uri="{FF2B5EF4-FFF2-40B4-BE49-F238E27FC236}">
-                <ns2:creationId id="{61A13369-24B9-E21B-05B9-329B5FF74DB7}"/>
+                <a16:creationId xmlns:a16="http://schemas.microsoft.com/office/drawing/2014/main" id="{61A13369-24B9-E21B-05B9-329B5FF74DB7}"/>
               </a:ext>
             </a:extLst>
           </p:cNvPr>
@@ -24396,7 +22506,7 @@
           <p:cNvPr id="27" name="Oval 26">
             <a:extLst>
               <a:ext uri="{FF2B5EF4-FFF2-40B4-BE49-F238E27FC236}">
-                <ns2:creationId id="{F2B3E963-4F4B-8173-AE7C-E7942A9E266B}"/>
+                <a16:creationId xmlns:a16="http://schemas.microsoft.com/office/drawing/2014/main" id="{F2B3E963-4F4B-8173-AE7C-E7942A9E266B}"/>
               </a:ext>
             </a:extLst>
           </p:cNvPr>
@@ -24480,7 +22590,7 @@
           <p:cNvPr id="28" name="Oval 27">
             <a:extLst>
               <a:ext uri="{FF2B5EF4-FFF2-40B4-BE49-F238E27FC236}">
-                <ns2:creationId id="{9ADB633C-4072-1C73-DADA-398777D0A7CD}"/>
+                <a16:creationId xmlns:a16="http://schemas.microsoft.com/office/drawing/2014/main" id="{9ADB633C-4072-1C73-DADA-398777D0A7CD}"/>
               </a:ext>
             </a:extLst>
           </p:cNvPr>
@@ -24564,7 +22674,7 @@
           <p:cNvPr id="29" name="Oval 28">
             <a:extLst>
               <a:ext uri="{FF2B5EF4-FFF2-40B4-BE49-F238E27FC236}">
-                <ns2:creationId id="{F82B7B38-EA39-2CF9-201C-54B73DBBD4EA}"/>
+                <a16:creationId xmlns:a16="http://schemas.microsoft.com/office/drawing/2014/main" id="{F82B7B38-EA39-2CF9-201C-54B73DBBD4EA}"/>
               </a:ext>
             </a:extLst>
           </p:cNvPr>
@@ -24648,7 +22758,7 @@
           <p:cNvPr id="30" name="Oval 29">
             <a:extLst>
               <a:ext uri="{FF2B5EF4-FFF2-40B4-BE49-F238E27FC236}">
-                <ns2:creationId id="{686BDBE9-0138-6C28-BFAF-00EA8DCD973D}"/>
+                <a16:creationId xmlns:a16="http://schemas.microsoft.com/office/drawing/2014/main" id="{686BDBE9-0138-6C28-BFAF-00EA8DCD973D}"/>
               </a:ext>
             </a:extLst>
           </p:cNvPr>
@@ -24732,7 +22842,7 @@
           <p:cNvPr id="4" name="Straight Connector 3">
             <a:extLst>
               <a:ext uri="{FF2B5EF4-FFF2-40B4-BE49-F238E27FC236}">
-                <ns2:creationId id="{D0AC705D-BF37-4542-CD33-8265C0D398AC}"/>
+                <a16:creationId xmlns:a16="http://schemas.microsoft.com/office/drawing/2014/main" id="{D0AC705D-BF37-4542-CD33-8265C0D398AC}"/>
               </a:ext>
             </a:extLst>
           </p:cNvPr>
@@ -24775,7 +22885,7 @@
           <p:cNvPr id="18" name="Oval 17">
             <a:extLst>
               <a:ext uri="{FF2B5EF4-FFF2-40B4-BE49-F238E27FC236}">
-                <ns2:creationId id="{5CEE4D57-2D48-3E46-8211-494134A5C094}"/>
+                <a16:creationId xmlns:a16="http://schemas.microsoft.com/office/drawing/2014/main" id="{5CEE4D57-2D48-3E46-8211-494134A5C094}"/>
               </a:ext>
             </a:extLst>
           </p:cNvPr>
@@ -24858,7 +22968,7 @@
           <p:cNvPr id="11" name="Group 10">
             <a:extLst>
               <a:ext uri="{FF2B5EF4-FFF2-40B4-BE49-F238E27FC236}">
-                <ns2:creationId id="{D24EBF2A-B7A3-E7EB-6313-BB50CF2D3A83}"/>
+                <a16:creationId xmlns:a16="http://schemas.microsoft.com/office/drawing/2014/main" id="{D24EBF2A-B7A3-E7EB-6313-BB50CF2D3A83}"/>
               </a:ext>
             </a:extLst>
           </p:cNvPr>
@@ -24878,7 +22988,7 @@
             <p:cNvPr id="24" name="Straight Arrow Connector 23">
               <a:extLst>
                 <a:ext uri="{FF2B5EF4-FFF2-40B4-BE49-F238E27FC236}">
-                  <ns2:creationId id="{9C627068-AD0C-E2DC-60AF-7257BB046983}"/>
+                  <a16:creationId xmlns:a16="http://schemas.microsoft.com/office/drawing/2014/main" id="{9C627068-AD0C-E2DC-60AF-7257BB046983}"/>
                 </a:ext>
               </a:extLst>
             </p:cNvPr>
@@ -24923,7 +23033,7 @@
             <p:cNvPr id="10" name="TextBox 9">
               <a:extLst>
                 <a:ext uri="{FF2B5EF4-FFF2-40B4-BE49-F238E27FC236}">
-                  <ns2:creationId id="{D692B828-D19F-3AA3-05F9-AF2DE3D5C9FC}"/>
+                  <a16:creationId xmlns:a16="http://schemas.microsoft.com/office/drawing/2014/main" id="{D692B828-D19F-3AA3-05F9-AF2DE3D5C9FC}"/>
                 </a:ext>
               </a:extLst>
             </p:cNvPr>
@@ -24978,24 +23088,7 @@
                   <a:ea typeface="Helvetica Neue" panose="02000503000000020004" pitchFamily="2" charset="0"/>
                   <a:cs typeface="Helvetica Neue" panose="02000503000000020004" pitchFamily="2" charset="0"/>
                 </a:rPr>
-                <a:t xml:space="preserve">v &lt; </a:t>
-              </a:r>
-              <a:r>
-                <a:rPr kumimoji="0" lang="en-US" sz="1400" b="0" i="1" u="none" strike="noStrike" kern="1200" cap="none" spc="0" normalizeH="0" baseline="0" noProof="0" dirty="0">
-                  <a:ln>
-                    <a:noFill/>
-                  </a:ln>
-                  <a:solidFill>
-                    <a:prstClr val="white"/>
-                  </a:solidFill>
-                  <a:effectLst/>
-                  <a:uLnTx/>
-                  <a:uFillTx/>
-                  <a:latin typeface="Helvetica Neue" panose="02000503000000020004" pitchFamily="2" charset="0"/>
-                  <a:ea typeface="Helvetica Neue" panose="02000503000000020004" pitchFamily="2" charset="0"/>
-                  <a:cs typeface="Helvetica Neue" panose="02000503000000020004" pitchFamily="2" charset="0"/>
-                </a:rPr>
-                <a:t>c</a:t>
+                <a:t>v &lt; c</a:t>
               </a:r>
               <a:r>
                 <a:rPr kumimoji="0" lang="en-US" sz="980" b="0" i="1" u="none" strike="noStrike" kern="1200" cap="none" spc="0" normalizeH="0" baseline="-25000" noProof="0" dirty="0">
@@ -25023,7 +23116,7 @@
           <p:cNvPr id="31" name="TextBox 30">
             <a:extLst>
               <a:ext uri="{FF2B5EF4-FFF2-40B4-BE49-F238E27FC236}">
-                <ns2:creationId id="{12D2397C-9CE3-3A8A-1558-56A5A0738C36}"/>
+                <a16:creationId xmlns:a16="http://schemas.microsoft.com/office/drawing/2014/main" id="{12D2397C-9CE3-3A8A-1558-56A5A0738C36}"/>
               </a:ext>
             </a:extLst>
           </p:cNvPr>
@@ -25081,24 +23174,7 @@
                 <a:ea typeface="Helvetica Neue" panose="02000503000000020004" pitchFamily="2" charset="0"/>
                 <a:cs typeface="Helvetica Neue" panose="02000503000000020004" pitchFamily="2" charset="0"/>
               </a:rPr>
-              <a:t xml:space="preserve">r = </a:t>
-            </a:r>
-            <a:r>
-              <a:rPr kumimoji="0" lang="en-US" sz="1400" b="0" i="1" u="none" strike="noStrike" kern="1200" cap="none" spc="0" normalizeH="0" baseline="0" noProof="0" dirty="0">
-                <a:ln>
-                  <a:noFill/>
-                </a:ln>
-                <a:solidFill>
-                  <a:srgbClr val="FFC000"/>
-                </a:solidFill>
-                <a:effectLst/>
-                <a:uLnTx/>
-                <a:uFillTx/>
-                <a:latin typeface="Helvetica Neue" panose="02000503000000020004" pitchFamily="2" charset="0"/>
-                <a:ea typeface="Helvetica Neue" panose="02000503000000020004" pitchFamily="2" charset="0"/>
-                <a:cs typeface="Helvetica Neue" panose="02000503000000020004" pitchFamily="2" charset="0"/>
-              </a:rPr>
-              <a:t>c</a:t>
+              <a:t>r = c</a:t>
             </a:r>
             <a:r>
               <a:rPr kumimoji="0" lang="en-US" sz="980" b="0" i="1" u="none" strike="noStrike" kern="1200" cap="none" spc="0" normalizeH="0" baseline="-25000" noProof="0" dirty="0">
@@ -25132,7 +23208,7 @@
                 <a:ea typeface="Helvetica Neue" panose="02000503000000020004" pitchFamily="2" charset="0"/>
                 <a:cs typeface="Helvetica Neue" panose="02000503000000020004" pitchFamily="2" charset="0"/>
               </a:rPr>
-              <a:t xml:space="preserve"> t</a:t>
+              <a:t> t</a:t>
             </a:r>
           </a:p>
         </p:txBody>
@@ -25142,7 +23218,7 @@
           <p:cNvPr id="36" name="TextBox 35">
             <a:extLst>
               <a:ext uri="{FF2B5EF4-FFF2-40B4-BE49-F238E27FC236}">
-                <ns2:creationId id="{2FFE4CF6-AAAC-06EA-8AB8-998E05647728}"/>
+                <a16:creationId xmlns:a16="http://schemas.microsoft.com/office/drawing/2014/main" id="{2FFE4CF6-AAAC-06EA-8AB8-998E05647728}"/>
               </a:ext>
             </a:extLst>
           </p:cNvPr>
@@ -25224,7 +23300,7 @@
           <p:cNvPr id="22" name="Straight Connector 21">
             <a:extLst>
               <a:ext uri="{FF2B5EF4-FFF2-40B4-BE49-F238E27FC236}">
-                <ns2:creationId id="{2F9013F0-6C27-F3C3-FDE3-FF0AA12CA620}"/>
+                <a16:creationId xmlns:a16="http://schemas.microsoft.com/office/drawing/2014/main" id="{2F9013F0-6C27-F3C3-FDE3-FF0AA12CA620}"/>
               </a:ext>
             </a:extLst>
           </p:cNvPr>
@@ -25267,7 +23343,7 @@
           <p:cNvPr id="15" name="Straight Arrow Connector 14">
             <a:extLst>
               <a:ext uri="{FF2B5EF4-FFF2-40B4-BE49-F238E27FC236}">
-                <ns2:creationId id="{59CD0CED-2A06-8AB7-8A69-21FAC5EC4A4F}"/>
+                <a16:creationId xmlns:a16="http://schemas.microsoft.com/office/drawing/2014/main" id="{59CD0CED-2A06-8AB7-8A69-21FAC5EC4A4F}"/>
               </a:ext>
             </a:extLst>
           </p:cNvPr>
@@ -25313,7 +23389,7 @@
           <p:cNvPr id="32" name="Straight Arrow Connector 31">
             <a:extLst>
               <a:ext uri="{FF2B5EF4-FFF2-40B4-BE49-F238E27FC236}">
-                <ns2:creationId id="{BCC5A9F1-9339-0CF6-A18E-4B7BE46AB529}"/>
+                <a16:creationId xmlns:a16="http://schemas.microsoft.com/office/drawing/2014/main" id="{BCC5A9F1-9339-0CF6-A18E-4B7BE46AB529}"/>
               </a:ext>
             </a:extLst>
           </p:cNvPr>
@@ -25359,7 +23435,7 @@
           <p:cNvPr id="35" name="Straight Arrow Connector 34">
             <a:extLst>
               <a:ext uri="{FF2B5EF4-FFF2-40B4-BE49-F238E27FC236}">
-                <ns2:creationId id="{8E4A4C4F-C09E-5B89-67FD-259D584337FE}"/>
+                <a16:creationId xmlns:a16="http://schemas.microsoft.com/office/drawing/2014/main" id="{8E4A4C4F-C09E-5B89-67FD-259D584337FE}"/>
               </a:ext>
             </a:extLst>
           </p:cNvPr>
@@ -25405,7 +23481,7 @@
           <p:cNvPr id="39" name="Straight Arrow Connector 38">
             <a:extLst>
               <a:ext uri="{FF2B5EF4-FFF2-40B4-BE49-F238E27FC236}">
-                <ns2:creationId id="{D4742DE8-0901-2B65-C6B7-3A1BE131F28D}"/>
+                <a16:creationId xmlns:a16="http://schemas.microsoft.com/office/drawing/2014/main" id="{D4742DE8-0901-2B65-C6B7-3A1BE131F28D}"/>
               </a:ext>
             </a:extLst>
           </p:cNvPr>
@@ -25451,7 +23527,7 @@
           <p:cNvPr id="47" name="Straight Arrow Connector 46">
             <a:extLst>
               <a:ext uri="{FF2B5EF4-FFF2-40B4-BE49-F238E27FC236}">
-                <ns2:creationId id="{1D9F791F-D5A7-688F-041A-11963370907B}"/>
+                <a16:creationId xmlns:a16="http://schemas.microsoft.com/office/drawing/2014/main" id="{1D9F791F-D5A7-688F-041A-11963370907B}"/>
               </a:ext>
             </a:extLst>
           </p:cNvPr>
@@ -25497,7 +23573,7 @@
           <p:cNvPr id="9" name="TextBox 8">
             <a:extLst>
               <a:ext uri="{FF2B5EF4-FFF2-40B4-BE49-F238E27FC236}">
-                <ns2:creationId id="{349C01A4-7FD7-1FD3-430A-5950B62E2AB0}"/>
+                <a16:creationId xmlns:a16="http://schemas.microsoft.com/office/drawing/2014/main" id="{349C01A4-7FD7-1FD3-430A-5950B62E2AB0}"/>
               </a:ext>
             </a:extLst>
           </p:cNvPr>
@@ -25579,7 +23655,7 @@
           <p:cNvPr id="14" name="Rectangle 13">
             <a:extLst>
               <a:ext uri="{FF2B5EF4-FFF2-40B4-BE49-F238E27FC236}">
-                <ns2:creationId id="{55CC6FCD-E4CC-D5E1-7E8F-917869655222}"/>
+                <a16:creationId xmlns:a16="http://schemas.microsoft.com/office/drawing/2014/main" id="{55CC6FCD-E4CC-D5E1-7E8F-917869655222}"/>
               </a:ext>
             </a:extLst>
           </p:cNvPr>
@@ -25638,24 +23714,7 @@
                 <a:ea typeface="Helvetica Neue" panose="02000503000000020004" pitchFamily="2" charset="0"/>
                 <a:cs typeface="Helvetica Neue" panose="02000503000000020004" pitchFamily="2" charset="0"/>
               </a:rPr>
-              <a:t xml:space="preserve">Wake Speed </a:t>
-            </a:r>
-            <a:r>
-              <a:rPr kumimoji="0" lang="en-US" sz="2000" b="1" i="0" u="none" strike="noStrike" kern="1200" cap="none" spc="0" normalizeH="0" baseline="0" noProof="0" dirty="0">
-                <a:ln>
-                  <a:noFill/>
-                </a:ln>
-                <a:solidFill>
-                  <a:srgbClr val="FF85FF"/>
-                </a:solidFill>
-                <a:effectLst/>
-                <a:uLnTx/>
-                <a:uFillTx/>
-                <a:latin typeface="Helvetica Neue" panose="02000503000000020004" pitchFamily="2" charset="0"/>
-                <a:ea typeface="Helvetica Neue" panose="02000503000000020004" pitchFamily="2" charset="0"/>
-                <a:cs typeface="Helvetica Neue" panose="02000503000000020004" pitchFamily="2" charset="0"/>
-              </a:rPr>
-              <a:t>c</a:t>
+              <a:t>Wake Speed c</a:t>
             </a:r>
             <a:r>
               <a:rPr kumimoji="0" lang="en-US" sz="1400" b="1" i="0" u="none" strike="noStrike" kern="1200" cap="none" spc="0" normalizeH="0" baseline="-25000" noProof="0" dirty="0">
@@ -25689,7 +23748,7 @@
                 <a:ea typeface="Helvetica Neue" panose="02000503000000020004" pitchFamily="2" charset="0"/>
                 <a:cs typeface="Helvetica Neue" panose="02000503000000020004" pitchFamily="2" charset="0"/>
               </a:rPr>
-              <a:t xml:space="preserve"> is a Primitive Constant</a:t>
+              <a:t> is a Primitive Constant</a:t>
             </a:r>
           </a:p>
         </p:txBody>
@@ -25699,7 +23758,7 @@
           <p:cNvPr id="16" name="TextBox 15">
             <a:extLst>
               <a:ext uri="{FF2B5EF4-FFF2-40B4-BE49-F238E27FC236}">
-                <ns2:creationId id="{165EF7AF-4C2A-3413-7653-A4678D7A12B0}"/>
+                <a16:creationId xmlns:a16="http://schemas.microsoft.com/office/drawing/2014/main" id="{165EF7AF-4C2A-3413-7653-A4678D7A12B0}"/>
               </a:ext>
             </a:extLst>
           </p:cNvPr>
@@ -25754,24 +23813,7 @@
                 <a:ea typeface="Helvetica Neue" panose="02000503000000020004" pitchFamily="2" charset="0"/>
                 <a:cs typeface="Helvetica Neue" panose="02000503000000020004" pitchFamily="2" charset="0"/>
               </a:rPr>
-              <a:t xml:space="preserve">Architrino on Linear Path with Velocity v &lt; </a:t>
-            </a:r>
-            <a:r>
-              <a:rPr kumimoji="0" lang="en-US" sz="3200" b="1" i="0" u="none" strike="noStrike" kern="1200" cap="none" spc="0" normalizeH="0" baseline="0" noProof="0" dirty="0">
-                <a:ln>
-                  <a:noFill/>
-                </a:ln>
-                <a:solidFill>
-                  <a:prstClr val="white"/>
-                </a:solidFill>
-                <a:effectLst/>
-                <a:uLnTx/>
-                <a:uFillTx/>
-                <a:latin typeface="Helvetica Neue" panose="02000503000000020004" pitchFamily="2" charset="0"/>
-                <a:ea typeface="Helvetica Neue" panose="02000503000000020004" pitchFamily="2" charset="0"/>
-                <a:cs typeface="Helvetica Neue" panose="02000503000000020004" pitchFamily="2" charset="0"/>
-              </a:rPr>
-              <a:t>c</a:t>
+              <a:t>Architrino on Linear Path with Velocity v &lt; c</a:t>
             </a:r>
             <a:r>
               <a:rPr kumimoji="0" lang="en-US" sz="2240" b="1" i="0" u="none" strike="noStrike" kern="1200" cap="none" spc="0" normalizeH="0" baseline="-25000" noProof="0" dirty="0">
@@ -25798,7 +23840,7 @@
           <p:cNvPr id="17" name="TextBox 16">
             <a:extLst>
               <a:ext uri="{FF2B5EF4-FFF2-40B4-BE49-F238E27FC236}">
-                <ns2:creationId id="{8221C174-AABC-987E-E052-795F476EAF22}"/>
+                <a16:creationId xmlns:a16="http://schemas.microsoft.com/office/drawing/2014/main" id="{8221C174-AABC-987E-E052-795F476EAF22}"/>
               </a:ext>
             </a:extLst>
           </p:cNvPr>
@@ -25925,24 +23967,7 @@
                 <a:ea typeface="Helvetica Neue" panose="02000503000000020004" pitchFamily="2" charset="0"/>
                 <a:cs typeface="Helvetica Neue" panose="02000503000000020004" pitchFamily="2" charset="0"/>
               </a:rPr>
-              <a:t xml:space="preserve">When v &lt; </a:t>
-            </a:r>
-            <a:r>
-              <a:rPr kumimoji="0" lang="en-US" sz="1600" b="0" i="0" u="none" strike="noStrike" kern="1200" cap="none" spc="0" normalizeH="0" baseline="0" noProof="0" dirty="0">
-                <a:ln>
-                  <a:noFill/>
-                </a:ln>
-                <a:solidFill>
-                  <a:prstClr val="white"/>
-                </a:solidFill>
-                <a:effectLst/>
-                <a:uLnTx/>
-                <a:uFillTx/>
-                <a:latin typeface="Helvetica Neue" panose="02000503000000020004" pitchFamily="2" charset="0"/>
-                <a:ea typeface="Helvetica Neue" panose="02000503000000020004" pitchFamily="2" charset="0"/>
-                <a:cs typeface="Helvetica Neue" panose="02000503000000020004" pitchFamily="2" charset="0"/>
-              </a:rPr>
-              <a:t>c</a:t>
+              <a:t>When v &lt; c</a:t>
             </a:r>
             <a:r>
               <a:rPr kumimoji="0" lang="en-US" sz="1120" b="0" i="0" u="none" strike="noStrike" kern="1200" cap="none" spc="0" normalizeH="0" baseline="-25000" noProof="0" dirty="0">
@@ -25976,7 +24001,7 @@
                 <a:ea typeface="Helvetica Neue" panose="02000503000000020004" pitchFamily="2" charset="0"/>
                 <a:cs typeface="Helvetica Neue" panose="02000503000000020004" pitchFamily="2" charset="0"/>
               </a:rPr>
-              <a:t xml:space="preserve"> the architrino does not intercept its own wake, so this is the partner-only regime.</a:t>
+              <a:t> the architrino does not intercept its own wake, so this is the partner-only regime.</a:t>
             </a:r>
           </a:p>
         </p:txBody>
@@ -25984,7 +24009,7 @@
     </p:spTree>
     <p:extLst>
       <p:ext uri="{BB962C8B-B14F-4D97-AF65-F5344CB8AC3E}">
-        <ns3:creationId val="1156335298"/>
+        <p14:creationId xmlns:p14="http://schemas.microsoft.com/office/powerpoint/2010/main" val="1156335298"/>
       </p:ext>
     </p:extLst>
   </p:cSld>
@@ -25995,7 +24020,7 @@
 </file>
 
 <file path=ppt/slides/slide4.xml><?xml version="1.0" encoding="utf-8"?>
-<p:sld xmlns:a="http://schemas.openxmlformats.org/drawingml/2006/main" xmlns:ns2="http://schemas.microsoft.com/office/drawing/2014/main" xmlns:ns3="http://schemas.microsoft.com/office/powerpoint/2010/main" xmlns:p="http://schemas.openxmlformats.org/presentationml/2006/main">
+<p:sld xmlns:a="http://schemas.openxmlformats.org/drawingml/2006/main" xmlns:r="http://schemas.openxmlformats.org/officeDocument/2006/relationships" xmlns:p="http://schemas.openxmlformats.org/presentationml/2006/main">
   <p:cSld>
     <p:bg>
       <p:bgPr>
@@ -26010,7 +24035,7 @@
         <p:cNvPr id="1" name="">
           <a:extLst>
             <a:ext uri="{FF2B5EF4-FFF2-40B4-BE49-F238E27FC236}">
-              <ns2:creationId id="{14568406-B066-AEBE-C74B-068160974652}"/>
+              <a16:creationId xmlns:a16="http://schemas.microsoft.com/office/drawing/2014/main" id="{14568406-B066-AEBE-C74B-068160974652}"/>
             </a:ext>
           </a:extLst>
         </p:cNvPr>
@@ -26030,7 +24055,7 @@
           <p:cNvPr id="5" name="Footer Placeholder 3">
             <a:extLst>
               <a:ext uri="{FF2B5EF4-FFF2-40B4-BE49-F238E27FC236}">
-                <ns2:creationId id="{27CEA6F2-4AF1-97D8-38AC-41B557BE51CF}"/>
+                <a16:creationId xmlns:a16="http://schemas.microsoft.com/office/drawing/2014/main" id="{27CEA6F2-4AF1-97D8-38AC-41B557BE51CF}"/>
               </a:ext>
             </a:extLst>
           </p:cNvPr>
@@ -26192,7 +24217,7 @@
           <p:cNvPr id="6" name="Group 5">
             <a:extLst>
               <a:ext uri="{FF2B5EF4-FFF2-40B4-BE49-F238E27FC236}">
-                <ns2:creationId id="{C81263DC-661D-BD50-5933-E8227696F8DE}"/>
+                <a16:creationId xmlns:a16="http://schemas.microsoft.com/office/drawing/2014/main" id="{C81263DC-661D-BD50-5933-E8227696F8DE}"/>
               </a:ext>
             </a:extLst>
           </p:cNvPr>
@@ -26201,10 +24226,10 @@
         </p:nvGrpSpPr>
         <p:grpSpPr>
           <a:xfrm>
-            <a:off x="28129" y="1077673"/>
-            <a:ext cx="11664338" cy="5685100"/>
-            <a:chOff x="28129" y="1077673"/>
-            <a:chExt cx="11664338" cy="5685100"/>
+            <a:off x="77020" y="1077673"/>
+            <a:ext cx="11615447" cy="5685100"/>
+            <a:chOff x="77020" y="1077673"/>
+            <a:chExt cx="11615447" cy="5685100"/>
           </a:xfrm>
         </p:grpSpPr>
         <p:cxnSp>
@@ -26212,7 +24237,7 @@
             <p:cNvPr id="3" name="Straight Arrow Connector 2">
               <a:extLst>
                 <a:ext uri="{FF2B5EF4-FFF2-40B4-BE49-F238E27FC236}">
-                  <ns2:creationId id="{8B149F79-E249-261E-9112-BF1D70D76419}"/>
+                  <a16:creationId xmlns:a16="http://schemas.microsoft.com/office/drawing/2014/main" id="{8B149F79-E249-261E-9112-BF1D70D76419}"/>
                 </a:ext>
               </a:extLst>
             </p:cNvPr>
@@ -26256,7 +24281,7 @@
             <p:cNvPr id="8" name="Straight Arrow Connector 7">
               <a:extLst>
                 <a:ext uri="{FF2B5EF4-FFF2-40B4-BE49-F238E27FC236}">
-                  <ns2:creationId id="{259C9B9C-0329-E856-17CB-C966D0778D39}"/>
+                  <a16:creationId xmlns:a16="http://schemas.microsoft.com/office/drawing/2014/main" id="{259C9B9C-0329-E856-17CB-C966D0778D39}"/>
                 </a:ext>
               </a:extLst>
             </p:cNvPr>
@@ -26300,7 +24325,7 @@
             <p:cNvPr id="12" name="TextBox 11">
               <a:extLst>
                 <a:ext uri="{FF2B5EF4-FFF2-40B4-BE49-F238E27FC236}">
-                  <ns2:creationId id="{7C27133D-1A03-8C4F-53C4-564B9AE5C189}"/>
+                  <a16:creationId xmlns:a16="http://schemas.microsoft.com/office/drawing/2014/main" id="{7C27133D-1A03-8C4F-53C4-564B9AE5C189}"/>
                 </a:ext>
               </a:extLst>
             </p:cNvPr>
@@ -26365,7 +24390,7 @@
             <p:cNvPr id="13" name="TextBox 12">
               <a:extLst>
                 <a:ext uri="{FF2B5EF4-FFF2-40B4-BE49-F238E27FC236}">
-                  <ns2:creationId id="{0F3C3A2E-72E6-5B26-7E8C-2A2E59D8C3F6}"/>
+                  <a16:creationId xmlns:a16="http://schemas.microsoft.com/office/drawing/2014/main" id="{0F3C3A2E-72E6-5B26-7E8C-2A2E59D8C3F6}"/>
                 </a:ext>
               </a:extLst>
             </p:cNvPr>
@@ -26374,8 +24399,8 @@
           </p:nvSpPr>
           <p:spPr>
             <a:xfrm>
-              <a:off x="28129" y="3162375"/>
-              <a:ext cx="1191352" cy="923330"/>
+              <a:off x="77020" y="3162375"/>
+              <a:ext cx="1093569" cy="646331"/>
             </a:xfrm>
             <a:prstGeom prst="rect">
               <a:avLst/>
@@ -26388,75 +24413,35 @@
             </a:bodyPr>
             <a:lstStyle/>
             <a:p>
-              <a:pPr marL="0" marR="0" lvl="0" indent="0" algn="ctr" defTabSz="914400" rtl="0" eaLnBrk="1" fontAlgn="auto" latinLnBrk="0" hangingPunct="1">
-                <a:lnSpc>
-                  <a:spcPct val="100000"/>
-                </a:lnSpc>
-                <a:spcBef>
-                  <a:spcPts val="0"/>
-                </a:spcBef>
-                <a:spcAft>
-                  <a:spcPts val="0"/>
-                </a:spcAft>
-                <a:buClrTx/>
-                <a:buSzTx/>
-                <a:buFontTx/>
-                <a:buNone/>
-                <a:tabLst/>
+              <a:pPr lvl="0" algn="ctr">
                 <a:defRPr/>
               </a:pPr>
               <a:r>
-                <a:rPr kumimoji="0" lang="en-US" sz="1800" b="0" i="0" u="none" strike="noStrike" kern="1200" cap="none" spc="0" normalizeH="0" baseline="0" noProof="0" dirty="0">
-                  <a:ln>
-                    <a:noFill/>
-                  </a:ln>
+                <a:rPr lang="en-US" dirty="0">
                   <a:solidFill>
                     <a:prstClr val="white"/>
                   </a:solidFill>
-                  <a:effectLst/>
-                  <a:uLnTx/>
-                  <a:uFillTx/>
                   <a:latin typeface="Helvetica Neue" panose="02000503000000020004" pitchFamily="2" charset="0"/>
                   <a:ea typeface="Helvetica Neue" panose="02000503000000020004" pitchFamily="2" charset="0"/>
                   <a:cs typeface="Helvetica Neue" panose="02000503000000020004" pitchFamily="2" charset="0"/>
                 </a:rPr>
-                <a:t>Euclidean</a:t>
+                <a:t>Absolute</a:t>
               </a:r>
             </a:p>
             <a:p>
-              <a:pPr marL="0" marR="0" lvl="0" indent="0" algn="ctr" defTabSz="914400" rtl="0" eaLnBrk="1" fontAlgn="auto" latinLnBrk="0" hangingPunct="1">
-                <a:lnSpc>
-                  <a:spcPct val="100000"/>
-                </a:lnSpc>
-                <a:spcBef>
-                  <a:spcPts val="0"/>
-                </a:spcBef>
-                <a:spcAft>
-                  <a:spcPts val="0"/>
-                </a:spcAft>
-                <a:buClrTx/>
-                <a:buSzTx/>
-                <a:buFontTx/>
-                <a:buNone/>
-                <a:tabLst/>
+              <a:pPr lvl="0" algn="ctr">
                 <a:defRPr/>
               </a:pPr>
               <a:r>
-                <a:rPr kumimoji="0" lang="en-US" sz="1800" b="0" i="0" u="none" strike="noStrike" kern="1200" cap="none" spc="0" normalizeH="0" baseline="0" noProof="0" dirty="0">
-                  <a:ln>
-                    <a:noFill/>
-                  </a:ln>
+                <a:rPr lang="en-US" dirty="0">
                   <a:solidFill>
                     <a:prstClr val="white"/>
                   </a:solidFill>
-                  <a:effectLst/>
-                  <a:uLnTx/>
-                  <a:uFillTx/>
                   <a:latin typeface="Helvetica Neue" panose="02000503000000020004" pitchFamily="2" charset="0"/>
                   <a:ea typeface="Helvetica Neue" panose="02000503000000020004" pitchFamily="2" charset="0"/>
                   <a:cs typeface="Helvetica Neue" panose="02000503000000020004" pitchFamily="2" charset="0"/>
                 </a:rPr>
-                <a:t>Void</a:t>
+                <a:t>Space</a:t>
               </a:r>
             </a:p>
           </p:txBody>
@@ -26467,7 +24452,7 @@
           <p:cNvPr id="23" name="Oval 22">
             <a:extLst>
               <a:ext uri="{FF2B5EF4-FFF2-40B4-BE49-F238E27FC236}">
-                <ns2:creationId id="{F069ACCF-49B1-2004-B9BA-C32EA1E82492}"/>
+                <a16:creationId xmlns:a16="http://schemas.microsoft.com/office/drawing/2014/main" id="{F069ACCF-49B1-2004-B9BA-C32EA1E82492}"/>
               </a:ext>
             </a:extLst>
           </p:cNvPr>
@@ -26551,7 +24536,7 @@
           <p:cNvPr id="27" name="Oval 26">
             <a:extLst>
               <a:ext uri="{FF2B5EF4-FFF2-40B4-BE49-F238E27FC236}">
-                <ns2:creationId id="{A2120CF2-66F6-E863-1722-E1EBC99EB320}"/>
+                <a16:creationId xmlns:a16="http://schemas.microsoft.com/office/drawing/2014/main" id="{A2120CF2-66F6-E863-1722-E1EBC99EB320}"/>
               </a:ext>
             </a:extLst>
           </p:cNvPr>
@@ -26635,7 +24620,7 @@
           <p:cNvPr id="28" name="Oval 27">
             <a:extLst>
               <a:ext uri="{FF2B5EF4-FFF2-40B4-BE49-F238E27FC236}">
-                <ns2:creationId id="{2CF23E24-ED96-772A-8248-1491441DB146}"/>
+                <a16:creationId xmlns:a16="http://schemas.microsoft.com/office/drawing/2014/main" id="{2CF23E24-ED96-772A-8248-1491441DB146}"/>
               </a:ext>
             </a:extLst>
           </p:cNvPr>
@@ -26719,7 +24704,7 @@
           <p:cNvPr id="29" name="Oval 28">
             <a:extLst>
               <a:ext uri="{FF2B5EF4-FFF2-40B4-BE49-F238E27FC236}">
-                <ns2:creationId id="{25A0A0B3-E20A-4CC2-79D9-E97020D601A7}"/>
+                <a16:creationId xmlns:a16="http://schemas.microsoft.com/office/drawing/2014/main" id="{25A0A0B3-E20A-4CC2-79D9-E97020D601A7}"/>
               </a:ext>
             </a:extLst>
           </p:cNvPr>
@@ -26803,7 +24788,7 @@
           <p:cNvPr id="30" name="Oval 29">
             <a:extLst>
               <a:ext uri="{FF2B5EF4-FFF2-40B4-BE49-F238E27FC236}">
-                <ns2:creationId id="{7969DEBF-EEB6-634C-020A-385E24FBF8E1}"/>
+                <a16:creationId xmlns:a16="http://schemas.microsoft.com/office/drawing/2014/main" id="{7969DEBF-EEB6-634C-020A-385E24FBF8E1}"/>
               </a:ext>
             </a:extLst>
           </p:cNvPr>
@@ -26887,7 +24872,7 @@
           <p:cNvPr id="4" name="Straight Connector 3">
             <a:extLst>
               <a:ext uri="{FF2B5EF4-FFF2-40B4-BE49-F238E27FC236}">
-                <ns2:creationId id="{2C66513A-9085-17C4-C9C2-3742BE2C33D7}"/>
+                <a16:creationId xmlns:a16="http://schemas.microsoft.com/office/drawing/2014/main" id="{2C66513A-9085-17C4-C9C2-3742BE2C33D7}"/>
               </a:ext>
             </a:extLst>
           </p:cNvPr>
@@ -26930,7 +24915,7 @@
           <p:cNvPr id="18" name="Oval 17">
             <a:extLst>
               <a:ext uri="{FF2B5EF4-FFF2-40B4-BE49-F238E27FC236}">
-                <ns2:creationId id="{9E30E225-012D-EE67-96E9-8843E769C6E1}"/>
+                <a16:creationId xmlns:a16="http://schemas.microsoft.com/office/drawing/2014/main" id="{9E30E225-012D-EE67-96E9-8843E769C6E1}"/>
               </a:ext>
             </a:extLst>
           </p:cNvPr>
@@ -27013,7 +24998,7 @@
           <p:cNvPr id="11" name="Group 10">
             <a:extLst>
               <a:ext uri="{FF2B5EF4-FFF2-40B4-BE49-F238E27FC236}">
-                <ns2:creationId id="{CE7A3B85-FDA3-45E2-9BB3-D32BED764091}"/>
+                <a16:creationId xmlns:a16="http://schemas.microsoft.com/office/drawing/2014/main" id="{CE7A3B85-FDA3-45E2-9BB3-D32BED764091}"/>
               </a:ext>
             </a:extLst>
           </p:cNvPr>
@@ -27033,7 +25018,7 @@
             <p:cNvPr id="24" name="Straight Arrow Connector 23">
               <a:extLst>
                 <a:ext uri="{FF2B5EF4-FFF2-40B4-BE49-F238E27FC236}">
-                  <ns2:creationId id="{5AAF8464-4AF0-1ED4-EC84-883D9DCBAE2E}"/>
+                  <a16:creationId xmlns:a16="http://schemas.microsoft.com/office/drawing/2014/main" id="{5AAF8464-4AF0-1ED4-EC84-883D9DCBAE2E}"/>
                 </a:ext>
               </a:extLst>
             </p:cNvPr>
@@ -27078,7 +25063,7 @@
             <p:cNvPr id="10" name="TextBox 9">
               <a:extLst>
                 <a:ext uri="{FF2B5EF4-FFF2-40B4-BE49-F238E27FC236}">
-                  <ns2:creationId id="{D4526506-8D04-242E-625D-A7D78BFFEE82}"/>
+                  <a16:creationId xmlns:a16="http://schemas.microsoft.com/office/drawing/2014/main" id="{D4526506-8D04-242E-625D-A7D78BFFEE82}"/>
                 </a:ext>
               </a:extLst>
             </p:cNvPr>
@@ -27133,24 +25118,7 @@
                   <a:ea typeface="Helvetica Neue" panose="02000503000000020004" pitchFamily="2" charset="0"/>
                   <a:cs typeface="Helvetica Neue" panose="02000503000000020004" pitchFamily="2" charset="0"/>
                 </a:rPr>
-                <a:t xml:space="preserve">v &lt; </a:t>
-              </a:r>
-              <a:r>
-                <a:rPr kumimoji="0" lang="en-US" sz="1400" b="0" i="1" u="none" strike="noStrike" kern="1200" cap="none" spc="0" normalizeH="0" baseline="0" noProof="0" dirty="0">
-                  <a:ln>
-                    <a:noFill/>
-                  </a:ln>
-                  <a:solidFill>
-                    <a:prstClr val="white"/>
-                  </a:solidFill>
-                  <a:effectLst/>
-                  <a:uLnTx/>
-                  <a:uFillTx/>
-                  <a:latin typeface="Helvetica Neue" panose="02000503000000020004" pitchFamily="2" charset="0"/>
-                  <a:ea typeface="Helvetica Neue" panose="02000503000000020004" pitchFamily="2" charset="0"/>
-                  <a:cs typeface="Helvetica Neue" panose="02000503000000020004" pitchFamily="2" charset="0"/>
-                </a:rPr>
-                <a:t>c</a:t>
+                <a:t>v &lt; c</a:t>
               </a:r>
               <a:r>
                 <a:rPr kumimoji="0" lang="en-US" sz="980" b="0" i="1" u="none" strike="noStrike" kern="1200" cap="none" spc="0" normalizeH="0" baseline="-25000" noProof="0" dirty="0">
@@ -27178,7 +25146,7 @@
           <p:cNvPr id="31" name="TextBox 30">
             <a:extLst>
               <a:ext uri="{FF2B5EF4-FFF2-40B4-BE49-F238E27FC236}">
-                <ns2:creationId id="{0715B65B-EE48-6433-EFA6-8AFF4BF52B13}"/>
+                <a16:creationId xmlns:a16="http://schemas.microsoft.com/office/drawing/2014/main" id="{0715B65B-EE48-6433-EFA6-8AFF4BF52B13}"/>
               </a:ext>
             </a:extLst>
           </p:cNvPr>
@@ -27236,24 +25204,7 @@
                 <a:ea typeface="Helvetica Neue" panose="02000503000000020004" pitchFamily="2" charset="0"/>
                 <a:cs typeface="Helvetica Neue" panose="02000503000000020004" pitchFamily="2" charset="0"/>
               </a:rPr>
-              <a:t xml:space="preserve">r = </a:t>
-            </a:r>
-            <a:r>
-              <a:rPr kumimoji="0" lang="en-US" sz="1400" b="0" i="1" u="none" strike="noStrike" kern="1200" cap="none" spc="0" normalizeH="0" baseline="0" noProof="0" dirty="0">
-                <a:ln>
-                  <a:noFill/>
-                </a:ln>
-                <a:solidFill>
-                  <a:srgbClr val="FFC000"/>
-                </a:solidFill>
-                <a:effectLst/>
-                <a:uLnTx/>
-                <a:uFillTx/>
-                <a:latin typeface="Helvetica Neue" panose="02000503000000020004" pitchFamily="2" charset="0"/>
-                <a:ea typeface="Helvetica Neue" panose="02000503000000020004" pitchFamily="2" charset="0"/>
-                <a:cs typeface="Helvetica Neue" panose="02000503000000020004" pitchFamily="2" charset="0"/>
-              </a:rPr>
-              <a:t>c</a:t>
+              <a:t>r = c</a:t>
             </a:r>
             <a:r>
               <a:rPr kumimoji="0" lang="en-US" sz="980" b="0" i="1" u="none" strike="noStrike" kern="1200" cap="none" spc="0" normalizeH="0" baseline="-25000" noProof="0" dirty="0">
@@ -27287,7 +25238,7 @@
                 <a:ea typeface="Helvetica Neue" panose="02000503000000020004" pitchFamily="2" charset="0"/>
                 <a:cs typeface="Helvetica Neue" panose="02000503000000020004" pitchFamily="2" charset="0"/>
               </a:rPr>
-              <a:t xml:space="preserve"> t</a:t>
+              <a:t> t</a:t>
             </a:r>
           </a:p>
         </p:txBody>
@@ -27297,7 +25248,7 @@
           <p:cNvPr id="36" name="TextBox 35">
             <a:extLst>
               <a:ext uri="{FF2B5EF4-FFF2-40B4-BE49-F238E27FC236}">
-                <ns2:creationId id="{2639C71E-8510-A47A-CB6E-BD88DBD2D9D2}"/>
+                <a16:creationId xmlns:a16="http://schemas.microsoft.com/office/drawing/2014/main" id="{2639C71E-8510-A47A-CB6E-BD88DBD2D9D2}"/>
               </a:ext>
             </a:extLst>
           </p:cNvPr>
@@ -27379,7 +25330,7 @@
           <p:cNvPr id="22" name="Straight Connector 21">
             <a:extLst>
               <a:ext uri="{FF2B5EF4-FFF2-40B4-BE49-F238E27FC236}">
-                <ns2:creationId id="{48D6CF27-A191-E604-D02B-B71D144C595B}"/>
+                <a16:creationId xmlns:a16="http://schemas.microsoft.com/office/drawing/2014/main" id="{48D6CF27-A191-E604-D02B-B71D144C595B}"/>
               </a:ext>
             </a:extLst>
           </p:cNvPr>
@@ -27422,7 +25373,7 @@
           <p:cNvPr id="2" name="Title 1">
             <a:extLst>
               <a:ext uri="{FF2B5EF4-FFF2-40B4-BE49-F238E27FC236}">
-                <ns2:creationId id="{62407ED0-1A7F-69F0-224E-34E3BAB4AEB7}"/>
+                <a16:creationId xmlns:a16="http://schemas.microsoft.com/office/drawing/2014/main" id="{62407ED0-1A7F-69F0-224E-34E3BAB4AEB7}"/>
               </a:ext>
             </a:extLst>
           </p:cNvPr>
@@ -27496,24 +25447,7 @@
                 <a:ea typeface="Helvetica Neue" panose="02000503000000020004" pitchFamily="2" charset="0"/>
                 <a:cs typeface="Helvetica Neue" panose="02000503000000020004" pitchFamily="2" charset="0"/>
               </a:rPr>
-              <a:t xml:space="preserve">Causal Wake Surfaces Expand at v = </a:t>
-            </a:r>
-            <a:r>
-              <a:rPr kumimoji="0" lang="en-US" sz="3600" b="1" i="0" u="none" strike="noStrike" kern="1200" cap="none" spc="0" normalizeH="0" baseline="0" noProof="0" dirty="0">
-                <a:ln>
-                  <a:noFill/>
-                </a:ln>
-                <a:solidFill>
-                  <a:prstClr val="white"/>
-                </a:solidFill>
-                <a:effectLst/>
-                <a:uLnTx/>
-                <a:uFillTx/>
-                <a:latin typeface="Helvetica Neue" panose="02000503000000020004" pitchFamily="2" charset="0"/>
-                <a:ea typeface="Helvetica Neue" panose="02000503000000020004" pitchFamily="2" charset="0"/>
-                <a:cs typeface="Helvetica Neue" panose="02000503000000020004" pitchFamily="2" charset="0"/>
-              </a:rPr>
-              <a:t>c</a:t>
+              <a:t>Causal Wake Surfaces Expand at v = c</a:t>
             </a:r>
             <a:r>
               <a:rPr kumimoji="0" lang="en-US" sz="2520" b="1" i="0" u="none" strike="noStrike" kern="1200" cap="none" spc="0" normalizeH="0" baseline="-25000" noProof="0" dirty="0">
@@ -27540,7 +25474,7 @@
           <p:cNvPr id="7" name="Rectangle 6">
             <a:extLst>
               <a:ext uri="{FF2B5EF4-FFF2-40B4-BE49-F238E27FC236}">
-                <ns2:creationId id="{E63833BB-E257-5DD8-D2DC-4EDC10C1D9B0}"/>
+                <a16:creationId xmlns:a16="http://schemas.microsoft.com/office/drawing/2014/main" id="{E63833BB-E257-5DD8-D2DC-4EDC10C1D9B0}"/>
               </a:ext>
             </a:extLst>
           </p:cNvPr>
@@ -27604,7 +25538,7 @@
           <p:cNvPr id="15" name="Straight Arrow Connector 14">
             <a:extLst>
               <a:ext uri="{FF2B5EF4-FFF2-40B4-BE49-F238E27FC236}">
-                <ns2:creationId id="{F4A7F80E-6EB4-D3A1-C496-DA676D8B14B8}"/>
+                <a16:creationId xmlns:a16="http://schemas.microsoft.com/office/drawing/2014/main" id="{F4A7F80E-6EB4-D3A1-C496-DA676D8B14B8}"/>
               </a:ext>
             </a:extLst>
           </p:cNvPr>
@@ -27650,7 +25584,7 @@
           <p:cNvPr id="32" name="Straight Arrow Connector 31">
             <a:extLst>
               <a:ext uri="{FF2B5EF4-FFF2-40B4-BE49-F238E27FC236}">
-                <ns2:creationId id="{E4BBFD59-613F-87DB-D8CE-C4CD0658E65A}"/>
+                <a16:creationId xmlns:a16="http://schemas.microsoft.com/office/drawing/2014/main" id="{E4BBFD59-613F-87DB-D8CE-C4CD0658E65A}"/>
               </a:ext>
             </a:extLst>
           </p:cNvPr>
@@ -27696,7 +25630,7 @@
           <p:cNvPr id="35" name="Straight Arrow Connector 34">
             <a:extLst>
               <a:ext uri="{FF2B5EF4-FFF2-40B4-BE49-F238E27FC236}">
-                <ns2:creationId id="{6170C482-A85C-519C-1C68-E52F3D321552}"/>
+                <a16:creationId xmlns:a16="http://schemas.microsoft.com/office/drawing/2014/main" id="{6170C482-A85C-519C-1C68-E52F3D321552}"/>
               </a:ext>
             </a:extLst>
           </p:cNvPr>
@@ -27742,7 +25676,7 @@
           <p:cNvPr id="39" name="Straight Arrow Connector 38">
             <a:extLst>
               <a:ext uri="{FF2B5EF4-FFF2-40B4-BE49-F238E27FC236}">
-                <ns2:creationId id="{4230761A-8EDF-2FA3-7DBE-AF384628B09E}"/>
+                <a16:creationId xmlns:a16="http://schemas.microsoft.com/office/drawing/2014/main" id="{4230761A-8EDF-2FA3-7DBE-AF384628B09E}"/>
               </a:ext>
             </a:extLst>
           </p:cNvPr>
@@ -27788,7 +25722,7 @@
           <p:cNvPr id="47" name="Straight Arrow Connector 46">
             <a:extLst>
               <a:ext uri="{FF2B5EF4-FFF2-40B4-BE49-F238E27FC236}">
-                <ns2:creationId id="{D3EF506B-E81E-4405-B45C-DFB8F9DA0D65}"/>
+                <a16:creationId xmlns:a16="http://schemas.microsoft.com/office/drawing/2014/main" id="{D3EF506B-E81E-4405-B45C-DFB8F9DA0D65}"/>
               </a:ext>
             </a:extLst>
           </p:cNvPr>
@@ -27834,7 +25768,7 @@
           <p:cNvPr id="9" name="TextBox 8">
             <a:extLst>
               <a:ext uri="{FF2B5EF4-FFF2-40B4-BE49-F238E27FC236}">
-                <ns2:creationId id="{9B5DCDDF-276B-4F6E-7066-014AE9A59CCC}"/>
+                <a16:creationId xmlns:a16="http://schemas.microsoft.com/office/drawing/2014/main" id="{9B5DCDDF-276B-4F6E-7066-014AE9A59CCC}"/>
               </a:ext>
             </a:extLst>
           </p:cNvPr>
@@ -27916,7 +25850,7 @@
           <p:cNvPr id="14" name="Rectangle 13">
             <a:extLst>
               <a:ext uri="{FF2B5EF4-FFF2-40B4-BE49-F238E27FC236}">
-                <ns2:creationId id="{99560D5F-868F-8968-4ED0-12355714D7FF}"/>
+                <a16:creationId xmlns:a16="http://schemas.microsoft.com/office/drawing/2014/main" id="{99560D5F-868F-8968-4ED0-12355714D7FF}"/>
               </a:ext>
             </a:extLst>
           </p:cNvPr>
@@ -28017,7 +25951,7 @@
     </p:spTree>
     <p:extLst>
       <p:ext uri="{BB962C8B-B14F-4D97-AF65-F5344CB8AC3E}">
-        <ns3:creationId val="3801198229"/>
+        <p14:creationId xmlns:p14="http://schemas.microsoft.com/office/powerpoint/2010/main" val="3801198229"/>
       </p:ext>
     </p:extLst>
   </p:cSld>
@@ -28028,7 +25962,7 @@
 </file>
 
 <file path=ppt/slides/slide5.xml><?xml version="1.0" encoding="utf-8"?>
-<p:sld xmlns:a="http://schemas.openxmlformats.org/drawingml/2006/main" xmlns:ns2="http://schemas.microsoft.com/office/drawing/2014/main" xmlns:ns3="http://schemas.microsoft.com/office/powerpoint/2010/main" xmlns:p="http://schemas.openxmlformats.org/presentationml/2006/main">
+<p:sld xmlns:a="http://schemas.openxmlformats.org/drawingml/2006/main" xmlns:r="http://schemas.openxmlformats.org/officeDocument/2006/relationships" xmlns:p="http://schemas.openxmlformats.org/presentationml/2006/main">
   <p:cSld>
     <p:bg>
       <p:bgPr>
@@ -28057,7 +25991,7 @@
           <p:cNvPr id="5" name="Footer Placeholder 3">
             <a:extLst>
               <a:ext uri="{FF2B5EF4-FFF2-40B4-BE49-F238E27FC236}">
-                <ns2:creationId id="{668F77D6-DFDA-5A46-8DF1-47F6A167C2B1}"/>
+                <a16:creationId xmlns:a16="http://schemas.microsoft.com/office/drawing/2014/main" id="{668F77D6-DFDA-5A46-8DF1-47F6A167C2B1}"/>
               </a:ext>
             </a:extLst>
           </p:cNvPr>
@@ -28219,7 +26153,7 @@
           <p:cNvPr id="3" name="Straight Arrow Connector 2">
             <a:extLst>
               <a:ext uri="{FF2B5EF4-FFF2-40B4-BE49-F238E27FC236}">
-                <ns2:creationId id="{2EF0199F-22F4-BA42-9B75-8A8183BCDA9B}"/>
+                <a16:creationId xmlns:a16="http://schemas.microsoft.com/office/drawing/2014/main" id="{2EF0199F-22F4-BA42-9B75-8A8183BCDA9B}"/>
               </a:ext>
             </a:extLst>
           </p:cNvPr>
@@ -28263,7 +26197,7 @@
           <p:cNvPr id="8" name="Straight Arrow Connector 7">
             <a:extLst>
               <a:ext uri="{FF2B5EF4-FFF2-40B4-BE49-F238E27FC236}">
-                <ns2:creationId id="{49AB5343-55D0-6041-8627-E08A73F83930}"/>
+                <a16:creationId xmlns:a16="http://schemas.microsoft.com/office/drawing/2014/main" id="{49AB5343-55D0-6041-8627-E08A73F83930}"/>
               </a:ext>
             </a:extLst>
           </p:cNvPr>
@@ -28307,7 +26241,7 @@
           <p:cNvPr id="12" name="TextBox 11">
             <a:extLst>
               <a:ext uri="{FF2B5EF4-FFF2-40B4-BE49-F238E27FC236}">
-                <ns2:creationId id="{BF8D86A2-D083-024A-BC90-6BD938C23243}"/>
+                <a16:creationId xmlns:a16="http://schemas.microsoft.com/office/drawing/2014/main" id="{BF8D86A2-D083-024A-BC90-6BD938C23243}"/>
               </a:ext>
             </a:extLst>
           </p:cNvPr>
@@ -28372,7 +26306,7 @@
           <p:cNvPr id="13" name="TextBox 12">
             <a:extLst>
               <a:ext uri="{FF2B5EF4-FFF2-40B4-BE49-F238E27FC236}">
-                <ns2:creationId id="{2C3F4604-6C2F-0E4E-9DD3-4F5C89FF51AB}"/>
+                <a16:creationId xmlns:a16="http://schemas.microsoft.com/office/drawing/2014/main" id="{2C3F4604-6C2F-0E4E-9DD3-4F5C89FF51AB}"/>
               </a:ext>
             </a:extLst>
           </p:cNvPr>
@@ -28381,8 +26315,8 @@
         </p:nvSpPr>
         <p:spPr>
           <a:xfrm>
-            <a:off x="28129" y="3162375"/>
-            <a:ext cx="1191352" cy="923330"/>
+            <a:off x="77020" y="3162375"/>
+            <a:ext cx="1093569" cy="646331"/>
           </a:xfrm>
           <a:prstGeom prst="rect">
             <a:avLst/>
@@ -28395,75 +26329,35 @@
           </a:bodyPr>
           <a:lstStyle/>
           <a:p>
-            <a:pPr marL="0" marR="0" lvl="0" indent="0" algn="ctr" defTabSz="914400" rtl="0" eaLnBrk="1" fontAlgn="auto" latinLnBrk="0" hangingPunct="1">
-              <a:lnSpc>
-                <a:spcPct val="100000"/>
-              </a:lnSpc>
-              <a:spcBef>
-                <a:spcPts val="0"/>
-              </a:spcBef>
-              <a:spcAft>
-                <a:spcPts val="0"/>
-              </a:spcAft>
-              <a:buClrTx/>
-              <a:buSzTx/>
-              <a:buFontTx/>
-              <a:buNone/>
-              <a:tabLst/>
+            <a:pPr lvl="0" algn="ctr">
               <a:defRPr/>
             </a:pPr>
             <a:r>
-              <a:rPr kumimoji="0" lang="en-US" sz="1800" b="0" i="0" u="none" strike="noStrike" kern="1200" cap="none" spc="0" normalizeH="0" baseline="0" noProof="0" dirty="0">
-                <a:ln>
-                  <a:noFill/>
-                </a:ln>
+              <a:rPr lang="en-US" dirty="0">
                 <a:solidFill>
                   <a:prstClr val="white"/>
                 </a:solidFill>
-                <a:effectLst/>
-                <a:uLnTx/>
-                <a:uFillTx/>
                 <a:latin typeface="Helvetica Neue" panose="02000503000000020004" pitchFamily="2" charset="0"/>
                 <a:ea typeface="Helvetica Neue" panose="02000503000000020004" pitchFamily="2" charset="0"/>
                 <a:cs typeface="Helvetica Neue" panose="02000503000000020004" pitchFamily="2" charset="0"/>
               </a:rPr>
-              <a:t>Euclidean</a:t>
-            </a:r>
-          </a:p>
-          <a:p>
-            <a:pPr marL="0" marR="0" lvl="0" indent="0" algn="ctr" defTabSz="914400" rtl="0" eaLnBrk="1" fontAlgn="auto" latinLnBrk="0" hangingPunct="1">
-              <a:lnSpc>
-                <a:spcPct val="100000"/>
-              </a:lnSpc>
-              <a:spcBef>
-                <a:spcPts val="0"/>
-              </a:spcBef>
-              <a:spcAft>
-                <a:spcPts val="0"/>
-              </a:spcAft>
-              <a:buClrTx/>
-              <a:buSzTx/>
-              <a:buFontTx/>
-              <a:buNone/>
-              <a:tabLst/>
+              <a:t>Absolute</a:t>
+            </a:r>
+          </a:p>
+          <a:p>
+            <a:pPr lvl="0" algn="ctr">
               <a:defRPr/>
             </a:pPr>
             <a:r>
-              <a:rPr kumimoji="0" lang="en-US" sz="1800" b="0" i="0" u="none" strike="noStrike" kern="1200" cap="none" spc="0" normalizeH="0" baseline="0" noProof="0" dirty="0">
-                <a:ln>
-                  <a:noFill/>
-                </a:ln>
+              <a:rPr lang="en-US" dirty="0">
                 <a:solidFill>
                   <a:prstClr val="white"/>
                 </a:solidFill>
-                <a:effectLst/>
-                <a:uLnTx/>
-                <a:uFillTx/>
                 <a:latin typeface="Helvetica Neue" panose="02000503000000020004" pitchFamily="2" charset="0"/>
                 <a:ea typeface="Helvetica Neue" panose="02000503000000020004" pitchFamily="2" charset="0"/>
                 <a:cs typeface="Helvetica Neue" panose="02000503000000020004" pitchFamily="2" charset="0"/>
               </a:rPr>
-              <a:t>Void</a:t>
+              <a:t>Space</a:t>
             </a:r>
           </a:p>
         </p:txBody>
@@ -28473,7 +26367,7 @@
           <p:cNvPr id="23" name="Oval 22">
             <a:extLst>
               <a:ext uri="{FF2B5EF4-FFF2-40B4-BE49-F238E27FC236}">
-                <ns2:creationId id="{0112617B-A1D5-1E41-BF92-E67D4E046E39}"/>
+                <a16:creationId xmlns:a16="http://schemas.microsoft.com/office/drawing/2014/main" id="{0112617B-A1D5-1E41-BF92-E67D4E046E39}"/>
               </a:ext>
             </a:extLst>
           </p:cNvPr>
@@ -28557,7 +26451,7 @@
           <p:cNvPr id="27" name="Oval 26">
             <a:extLst>
               <a:ext uri="{FF2B5EF4-FFF2-40B4-BE49-F238E27FC236}">
-                <ns2:creationId id="{6EF0F7DA-5E70-8348-A200-F59A10FF7C55}"/>
+                <a16:creationId xmlns:a16="http://schemas.microsoft.com/office/drawing/2014/main" id="{6EF0F7DA-5E70-8348-A200-F59A10FF7C55}"/>
               </a:ext>
             </a:extLst>
           </p:cNvPr>
@@ -28641,7 +26535,7 @@
           <p:cNvPr id="28" name="Oval 27">
             <a:extLst>
               <a:ext uri="{FF2B5EF4-FFF2-40B4-BE49-F238E27FC236}">
-                <ns2:creationId id="{552F58D0-F613-674A-B294-C894E5FB1683}"/>
+                <a16:creationId xmlns:a16="http://schemas.microsoft.com/office/drawing/2014/main" id="{552F58D0-F613-674A-B294-C894E5FB1683}"/>
               </a:ext>
             </a:extLst>
           </p:cNvPr>
@@ -28725,7 +26619,7 @@
           <p:cNvPr id="29" name="Oval 28">
             <a:extLst>
               <a:ext uri="{FF2B5EF4-FFF2-40B4-BE49-F238E27FC236}">
-                <ns2:creationId id="{9CA7A721-D3BD-744E-9306-85BBED5F74BC}"/>
+                <a16:creationId xmlns:a16="http://schemas.microsoft.com/office/drawing/2014/main" id="{9CA7A721-D3BD-744E-9306-85BBED5F74BC}"/>
               </a:ext>
             </a:extLst>
           </p:cNvPr>
@@ -28809,7 +26703,7 @@
           <p:cNvPr id="30" name="Oval 29">
             <a:extLst>
               <a:ext uri="{FF2B5EF4-FFF2-40B4-BE49-F238E27FC236}">
-                <ns2:creationId id="{F97F1A02-C0C7-3C45-9790-847C152D159A}"/>
+                <a16:creationId xmlns:a16="http://schemas.microsoft.com/office/drawing/2014/main" id="{F97F1A02-C0C7-3C45-9790-847C152D159A}"/>
               </a:ext>
             </a:extLst>
           </p:cNvPr>
@@ -28893,7 +26787,7 @@
           <p:cNvPr id="4" name="Straight Connector 3">
             <a:extLst>
               <a:ext uri="{FF2B5EF4-FFF2-40B4-BE49-F238E27FC236}">
-                <ns2:creationId id="{9890CC23-4ADC-D744-AF2D-1C8A936F07FC}"/>
+                <a16:creationId xmlns:a16="http://schemas.microsoft.com/office/drawing/2014/main" id="{9890CC23-4ADC-D744-AF2D-1C8A936F07FC}"/>
               </a:ext>
             </a:extLst>
           </p:cNvPr>
@@ -28936,7 +26830,7 @@
           <p:cNvPr id="18" name="Oval 17">
             <a:extLst>
               <a:ext uri="{FF2B5EF4-FFF2-40B4-BE49-F238E27FC236}">
-                <ns2:creationId id="{BE4CDC90-4B2E-BE41-BB9D-A84675F3A2FE}"/>
+                <a16:creationId xmlns:a16="http://schemas.microsoft.com/office/drawing/2014/main" id="{BE4CDC90-4B2E-BE41-BB9D-A84675F3A2FE}"/>
               </a:ext>
             </a:extLst>
           </p:cNvPr>
@@ -29019,7 +26913,7 @@
           <p:cNvPr id="11" name="Group 10">
             <a:extLst>
               <a:ext uri="{FF2B5EF4-FFF2-40B4-BE49-F238E27FC236}">
-                <ns2:creationId id="{33483591-0E05-544C-B822-43CF81B12E63}"/>
+                <a16:creationId xmlns:a16="http://schemas.microsoft.com/office/drawing/2014/main" id="{33483591-0E05-544C-B822-43CF81B12E63}"/>
               </a:ext>
             </a:extLst>
           </p:cNvPr>
@@ -29039,7 +26933,7 @@
             <p:cNvPr id="24" name="Straight Arrow Connector 23">
               <a:extLst>
                 <a:ext uri="{FF2B5EF4-FFF2-40B4-BE49-F238E27FC236}">
-                  <ns2:creationId id="{7BCF22C9-C9AE-324D-B157-A9536FCAF3B6}"/>
+                  <a16:creationId xmlns:a16="http://schemas.microsoft.com/office/drawing/2014/main" id="{7BCF22C9-C9AE-324D-B157-A9536FCAF3B6}"/>
                 </a:ext>
               </a:extLst>
             </p:cNvPr>
@@ -29084,7 +26978,7 @@
             <p:cNvPr id="10" name="TextBox 9">
               <a:extLst>
                 <a:ext uri="{FF2B5EF4-FFF2-40B4-BE49-F238E27FC236}">
-                  <ns2:creationId id="{01A59953-657F-C641-8F36-E48E8EDB0DF1}"/>
+                  <a16:creationId xmlns:a16="http://schemas.microsoft.com/office/drawing/2014/main" id="{01A59953-657F-C641-8F36-E48E8EDB0DF1}"/>
                 </a:ext>
               </a:extLst>
             </p:cNvPr>
@@ -29139,24 +27033,7 @@
                   <a:ea typeface="Helvetica Neue" panose="02000503000000020004" pitchFamily="2" charset="0"/>
                   <a:cs typeface="Helvetica Neue" panose="02000503000000020004" pitchFamily="2" charset="0"/>
                 </a:rPr>
-                <a:t xml:space="preserve">v &lt; </a:t>
-              </a:r>
-              <a:r>
-                <a:rPr kumimoji="0" lang="en-US" sz="1400" b="0" i="1" u="none" strike="noStrike" kern="1200" cap="none" spc="0" normalizeH="0" baseline="0" noProof="0" dirty="0">
-                  <a:ln>
-                    <a:noFill/>
-                  </a:ln>
-                  <a:solidFill>
-                    <a:prstClr val="white"/>
-                  </a:solidFill>
-                  <a:effectLst/>
-                  <a:uLnTx/>
-                  <a:uFillTx/>
-                  <a:latin typeface="Helvetica Neue" panose="02000503000000020004" pitchFamily="2" charset="0"/>
-                  <a:ea typeface="Helvetica Neue" panose="02000503000000020004" pitchFamily="2" charset="0"/>
-                  <a:cs typeface="Helvetica Neue" panose="02000503000000020004" pitchFamily="2" charset="0"/>
-                </a:rPr>
-                <a:t>c</a:t>
+                <a:t>v &lt; c</a:t>
               </a:r>
               <a:r>
                 <a:rPr kumimoji="0" lang="en-US" sz="980" b="0" i="1" u="none" strike="noStrike" kern="1200" cap="none" spc="0" normalizeH="0" baseline="-25000" noProof="0" dirty="0">
@@ -29184,7 +27061,7 @@
           <p:cNvPr id="31" name="TextBox 30">
             <a:extLst>
               <a:ext uri="{FF2B5EF4-FFF2-40B4-BE49-F238E27FC236}">
-                <ns2:creationId id="{713B9ACE-B673-2D48-BEF2-2A133C31B527}"/>
+                <a16:creationId xmlns:a16="http://schemas.microsoft.com/office/drawing/2014/main" id="{713B9ACE-B673-2D48-BEF2-2A133C31B527}"/>
               </a:ext>
             </a:extLst>
           </p:cNvPr>
@@ -29242,24 +27119,7 @@
                 <a:ea typeface="Helvetica Neue" panose="02000503000000020004" pitchFamily="2" charset="0"/>
                 <a:cs typeface="Helvetica Neue" panose="02000503000000020004" pitchFamily="2" charset="0"/>
               </a:rPr>
-              <a:t xml:space="preserve">r = </a:t>
-            </a:r>
-            <a:r>
-              <a:rPr kumimoji="0" lang="en-US" sz="1400" b="0" i="1" u="none" strike="noStrike" kern="1200" cap="none" spc="0" normalizeH="0" baseline="0" noProof="0" dirty="0">
-                <a:ln>
-                  <a:noFill/>
-                </a:ln>
-                <a:solidFill>
-                  <a:srgbClr val="FFC000"/>
-                </a:solidFill>
-                <a:effectLst/>
-                <a:uLnTx/>
-                <a:uFillTx/>
-                <a:latin typeface="Helvetica Neue" panose="02000503000000020004" pitchFamily="2" charset="0"/>
-                <a:ea typeface="Helvetica Neue" panose="02000503000000020004" pitchFamily="2" charset="0"/>
-                <a:cs typeface="Helvetica Neue" panose="02000503000000020004" pitchFamily="2" charset="0"/>
-              </a:rPr>
-              <a:t>c</a:t>
+              <a:t>r = c</a:t>
             </a:r>
             <a:r>
               <a:rPr kumimoji="0" lang="en-US" sz="980" b="0" i="1" u="none" strike="noStrike" kern="1200" cap="none" spc="0" normalizeH="0" baseline="-25000" noProof="0" dirty="0">
@@ -29293,7 +27153,7 @@
                 <a:ea typeface="Helvetica Neue" panose="02000503000000020004" pitchFamily="2" charset="0"/>
                 <a:cs typeface="Helvetica Neue" panose="02000503000000020004" pitchFamily="2" charset="0"/>
               </a:rPr>
-              <a:t xml:space="preserve"> t</a:t>
+              <a:t> t</a:t>
             </a:r>
           </a:p>
         </p:txBody>
@@ -29303,7 +27163,7 @@
           <p:cNvPr id="36" name="TextBox 35">
             <a:extLst>
               <a:ext uri="{FF2B5EF4-FFF2-40B4-BE49-F238E27FC236}">
-                <ns2:creationId id="{3A81A480-EF64-094E-825A-8592DAA4C672}"/>
+                <a16:creationId xmlns:a16="http://schemas.microsoft.com/office/drawing/2014/main" id="{3A81A480-EF64-094E-825A-8592DAA4C672}"/>
               </a:ext>
             </a:extLst>
           </p:cNvPr>
@@ -29385,7 +27245,7 @@
           <p:cNvPr id="7" name="Rectangle 6">
             <a:extLst>
               <a:ext uri="{FF2B5EF4-FFF2-40B4-BE49-F238E27FC236}">
-                <ns2:creationId id="{BED67AD4-F230-35A0-28FB-DE984573A446}"/>
+                <a16:creationId xmlns:a16="http://schemas.microsoft.com/office/drawing/2014/main" id="{BED67AD4-F230-35A0-28FB-DE984573A446}"/>
               </a:ext>
             </a:extLst>
           </p:cNvPr>
@@ -29449,7 +27309,7 @@
           <p:cNvPr id="15" name="Straight Arrow Connector 14">
             <a:extLst>
               <a:ext uri="{FF2B5EF4-FFF2-40B4-BE49-F238E27FC236}">
-                <ns2:creationId id="{05289ED1-4679-6543-A669-B23443FD0CD8}"/>
+                <a16:creationId xmlns:a16="http://schemas.microsoft.com/office/drawing/2014/main" id="{05289ED1-4679-6543-A669-B23443FD0CD8}"/>
               </a:ext>
             </a:extLst>
           </p:cNvPr>
@@ -29495,7 +27355,7 @@
           <p:cNvPr id="32" name="Straight Arrow Connector 31">
             <a:extLst>
               <a:ext uri="{FF2B5EF4-FFF2-40B4-BE49-F238E27FC236}">
-                <ns2:creationId id="{A9F8BF55-7F79-854D-84AD-A730BF43B39C}"/>
+                <a16:creationId xmlns:a16="http://schemas.microsoft.com/office/drawing/2014/main" id="{A9F8BF55-7F79-854D-84AD-A730BF43B39C}"/>
               </a:ext>
             </a:extLst>
           </p:cNvPr>
@@ -29541,7 +27401,7 @@
           <p:cNvPr id="35" name="Straight Arrow Connector 34">
             <a:extLst>
               <a:ext uri="{FF2B5EF4-FFF2-40B4-BE49-F238E27FC236}">
-                <ns2:creationId id="{0415B495-590C-0049-92E6-8AE7464CC78A}"/>
+                <a16:creationId xmlns:a16="http://schemas.microsoft.com/office/drawing/2014/main" id="{0415B495-590C-0049-92E6-8AE7464CC78A}"/>
               </a:ext>
             </a:extLst>
           </p:cNvPr>
@@ -29587,7 +27447,7 @@
           <p:cNvPr id="39" name="Straight Arrow Connector 38">
             <a:extLst>
               <a:ext uri="{FF2B5EF4-FFF2-40B4-BE49-F238E27FC236}">
-                <ns2:creationId id="{E4879E96-726B-4F42-BD7C-09F8D0B14E9A}"/>
+                <a16:creationId xmlns:a16="http://schemas.microsoft.com/office/drawing/2014/main" id="{E4879E96-726B-4F42-BD7C-09F8D0B14E9A}"/>
               </a:ext>
             </a:extLst>
           </p:cNvPr>
@@ -29633,7 +27493,7 @@
           <p:cNvPr id="47" name="Straight Arrow Connector 46">
             <a:extLst>
               <a:ext uri="{FF2B5EF4-FFF2-40B4-BE49-F238E27FC236}">
-                <ns2:creationId id="{0F119609-4333-414A-B8E4-E2447D7E1C10}"/>
+                <a16:creationId xmlns:a16="http://schemas.microsoft.com/office/drawing/2014/main" id="{0F119609-4333-414A-B8E4-E2447D7E1C10}"/>
               </a:ext>
             </a:extLst>
           </p:cNvPr>
@@ -29679,7 +27539,7 @@
           <p:cNvPr id="9" name="TextBox 8">
             <a:extLst>
               <a:ext uri="{FF2B5EF4-FFF2-40B4-BE49-F238E27FC236}">
-                <ns2:creationId id="{F869BF73-0970-4AD4-4DCD-712A77055671}"/>
+                <a16:creationId xmlns:a16="http://schemas.microsoft.com/office/drawing/2014/main" id="{F869BF73-0970-4AD4-4DCD-712A77055671}"/>
               </a:ext>
             </a:extLst>
           </p:cNvPr>
@@ -29761,7 +27621,7 @@
           <p:cNvPr id="16" name="Oval 15">
             <a:extLst>
               <a:ext uri="{FF2B5EF4-FFF2-40B4-BE49-F238E27FC236}">
-                <ns2:creationId id="{47B844F6-2777-F09D-48E3-752AD4A1C08E}"/>
+                <a16:creationId xmlns:a16="http://schemas.microsoft.com/office/drawing/2014/main" id="{47B844F6-2777-F09D-48E3-752AD4A1C08E}"/>
               </a:ext>
             </a:extLst>
           </p:cNvPr>
@@ -29844,7 +27704,7 @@
           <p:cNvPr id="17" name="Straight Connector 16">
             <a:extLst>
               <a:ext uri="{FF2B5EF4-FFF2-40B4-BE49-F238E27FC236}">
-                <ns2:creationId id="{7AC80066-19A2-40E6-CB32-8D867099AEC0}"/>
+                <a16:creationId xmlns:a16="http://schemas.microsoft.com/office/drawing/2014/main" id="{7AC80066-19A2-40E6-CB32-8D867099AEC0}"/>
               </a:ext>
             </a:extLst>
           </p:cNvPr>
@@ -29889,7 +27749,7 @@
           <p:cNvPr id="33" name="Oval 32">
             <a:extLst>
               <a:ext uri="{FF2B5EF4-FFF2-40B4-BE49-F238E27FC236}">
-                <ns2:creationId id="{E44B2491-CAC8-31F5-74F1-2F5E82758D29}"/>
+                <a16:creationId xmlns:a16="http://schemas.microsoft.com/office/drawing/2014/main" id="{E44B2491-CAC8-31F5-74F1-2F5E82758D29}"/>
               </a:ext>
             </a:extLst>
           </p:cNvPr>
@@ -29972,7 +27832,7 @@
           <p:cNvPr id="34" name="Straight Connector 33">
             <a:extLst>
               <a:ext uri="{FF2B5EF4-FFF2-40B4-BE49-F238E27FC236}">
-                <ns2:creationId id="{39925079-57E3-C749-66BE-49320C7E84EA}"/>
+                <a16:creationId xmlns:a16="http://schemas.microsoft.com/office/drawing/2014/main" id="{39925079-57E3-C749-66BE-49320C7E84EA}"/>
               </a:ext>
             </a:extLst>
           </p:cNvPr>
@@ -30015,7 +27875,7 @@
     </p:spTree>
     <p:extLst>
       <p:ext uri="{BB962C8B-B14F-4D97-AF65-F5344CB8AC3E}">
-        <ns3:creationId val="155428920"/>
+        <p14:creationId xmlns:p14="http://schemas.microsoft.com/office/powerpoint/2010/main" val="155428920"/>
       </p:ext>
     </p:extLst>
   </p:cSld>
@@ -30026,7 +27886,7 @@
 </file>
 
 <file path=ppt/slides/slide6.xml><?xml version="1.0" encoding="utf-8"?>
-<p:sld xmlns:a="http://schemas.openxmlformats.org/drawingml/2006/main" xmlns:ns2="http://schemas.microsoft.com/office/drawing/2014/main" xmlns:ns3="http://schemas.microsoft.com/office/powerpoint/2010/main" xmlns:p="http://schemas.openxmlformats.org/presentationml/2006/main">
+<p:sld xmlns:a="http://schemas.openxmlformats.org/drawingml/2006/main" xmlns:r="http://schemas.openxmlformats.org/officeDocument/2006/relationships" xmlns:p="http://schemas.openxmlformats.org/presentationml/2006/main">
   <p:cSld>
     <p:bg>
       <p:bgPr>
@@ -30055,7 +27915,7 @@
           <p:cNvPr id="5" name="Footer Placeholder 3">
             <a:extLst>
               <a:ext uri="{FF2B5EF4-FFF2-40B4-BE49-F238E27FC236}">
-                <ns2:creationId id="{668F77D6-DFDA-5A46-8DF1-47F6A167C2B1}"/>
+                <a16:creationId xmlns:a16="http://schemas.microsoft.com/office/drawing/2014/main" id="{668F77D6-DFDA-5A46-8DF1-47F6A167C2B1}"/>
               </a:ext>
             </a:extLst>
           </p:cNvPr>
@@ -30217,7 +28077,7 @@
           <p:cNvPr id="26" name="TextBox 25">
             <a:extLst>
               <a:ext uri="{FF2B5EF4-FFF2-40B4-BE49-F238E27FC236}">
-                <ns2:creationId id="{FA5E13D2-A15E-F54D-9507-CAD768919361}"/>
+                <a16:creationId xmlns:a16="http://schemas.microsoft.com/office/drawing/2014/main" id="{FA5E13D2-A15E-F54D-9507-CAD768919361}"/>
               </a:ext>
             </a:extLst>
           </p:cNvPr>
@@ -30272,27 +28132,10 @@
                 <a:ea typeface="Helvetica Neue" panose="02000503000000020004" pitchFamily="2" charset="0"/>
                 <a:cs typeface="Helvetica Neue" panose="02000503000000020004" pitchFamily="2" charset="0"/>
               </a:rPr>
-              <a:t xml:space="preserve">At v = </a:t>
-            </a:r>
-            <a:r>
-              <a:rPr kumimoji="0" lang="en-US" b="0" i="0" u="none" strike="noStrike" kern="1200" cap="none" spc="0" normalizeH="0" baseline="0" noProof="0" dirty="0">
-                <a:ln>
-                  <a:noFill/>
-                </a:ln>
-                <a:solidFill>
-                  <a:prstClr val="white"/>
-                </a:solidFill>
-                <a:effectLst/>
-                <a:uLnTx/>
-                <a:uFillTx/>
-                <a:latin typeface="Helvetica Neue" panose="02000503000000020004" pitchFamily="2" charset="0"/>
-                <a:ea typeface="Helvetica Neue" panose="02000503000000020004" pitchFamily="2" charset="0"/>
-                <a:cs typeface="Helvetica Neue" panose="02000503000000020004" pitchFamily="2" charset="0"/>
-              </a:rPr>
-              <a:t>c</a:t>
-            </a:r>
-            <a:r>
-              <a:rPr kumimoji="0" lang="en-US" b="0" i="0" u="none" strike="noStrike" kern="1200" cap="none" spc="0" normalizeH="0" baseline="-25000" noProof="0" dirty="0" sz="1960">
+              <a:t>At v = c</a:t>
+            </a:r>
+            <a:r>
+              <a:rPr kumimoji="0" lang="en-US" sz="1960" b="0" i="0" u="none" strike="noStrike" kern="1200" cap="none" spc="0" normalizeH="0" baseline="-25000" noProof="0" dirty="0">
                 <a:ln>
                   <a:noFill/>
                 </a:ln>
@@ -30477,7 +28320,7 @@
           <p:cNvPr id="23" name="Oval 22">
             <a:extLst>
               <a:ext uri="{FF2B5EF4-FFF2-40B4-BE49-F238E27FC236}">
-                <ns2:creationId id="{0112617B-A1D5-1E41-BF92-E67D4E046E39}"/>
+                <a16:creationId xmlns:a16="http://schemas.microsoft.com/office/drawing/2014/main" id="{0112617B-A1D5-1E41-BF92-E67D4E046E39}"/>
               </a:ext>
             </a:extLst>
           </p:cNvPr>
@@ -30561,7 +28404,7 @@
           <p:cNvPr id="27" name="Oval 26">
             <a:extLst>
               <a:ext uri="{FF2B5EF4-FFF2-40B4-BE49-F238E27FC236}">
-                <ns2:creationId id="{6EF0F7DA-5E70-8348-A200-F59A10FF7C55}"/>
+                <a16:creationId xmlns:a16="http://schemas.microsoft.com/office/drawing/2014/main" id="{6EF0F7DA-5E70-8348-A200-F59A10FF7C55}"/>
               </a:ext>
             </a:extLst>
           </p:cNvPr>
@@ -30645,7 +28488,7 @@
           <p:cNvPr id="28" name="Oval 27">
             <a:extLst>
               <a:ext uri="{FF2B5EF4-FFF2-40B4-BE49-F238E27FC236}">
-                <ns2:creationId id="{552F58D0-F613-674A-B294-C894E5FB1683}"/>
+                <a16:creationId xmlns:a16="http://schemas.microsoft.com/office/drawing/2014/main" id="{552F58D0-F613-674A-B294-C894E5FB1683}"/>
               </a:ext>
             </a:extLst>
           </p:cNvPr>
@@ -30729,7 +28572,7 @@
           <p:cNvPr id="29" name="Oval 28">
             <a:extLst>
               <a:ext uri="{FF2B5EF4-FFF2-40B4-BE49-F238E27FC236}">
-                <ns2:creationId id="{9CA7A721-D3BD-744E-9306-85BBED5F74BC}"/>
+                <a16:creationId xmlns:a16="http://schemas.microsoft.com/office/drawing/2014/main" id="{9CA7A721-D3BD-744E-9306-85BBED5F74BC}"/>
               </a:ext>
             </a:extLst>
           </p:cNvPr>
@@ -30813,7 +28656,7 @@
           <p:cNvPr id="30" name="Oval 29">
             <a:extLst>
               <a:ext uri="{FF2B5EF4-FFF2-40B4-BE49-F238E27FC236}">
-                <ns2:creationId id="{F97F1A02-C0C7-3C45-9790-847C152D159A}"/>
+                <a16:creationId xmlns:a16="http://schemas.microsoft.com/office/drawing/2014/main" id="{F97F1A02-C0C7-3C45-9790-847C152D159A}"/>
               </a:ext>
             </a:extLst>
           </p:cNvPr>
@@ -30897,7 +28740,7 @@
           <p:cNvPr id="15" name="Straight Arrow Connector 14">
             <a:extLst>
               <a:ext uri="{FF2B5EF4-FFF2-40B4-BE49-F238E27FC236}">
-                <ns2:creationId id="{05289ED1-4679-6543-A669-B23443FD0CD8}"/>
+                <a16:creationId xmlns:a16="http://schemas.microsoft.com/office/drawing/2014/main" id="{05289ED1-4679-6543-A669-B23443FD0CD8}"/>
               </a:ext>
             </a:extLst>
           </p:cNvPr>
@@ -30942,7 +28785,7 @@
           <p:cNvPr id="32" name="Straight Arrow Connector 31">
             <a:extLst>
               <a:ext uri="{FF2B5EF4-FFF2-40B4-BE49-F238E27FC236}">
-                <ns2:creationId id="{A9F8BF55-7F79-854D-84AD-A730BF43B39C}"/>
+                <a16:creationId xmlns:a16="http://schemas.microsoft.com/office/drawing/2014/main" id="{A9F8BF55-7F79-854D-84AD-A730BF43B39C}"/>
               </a:ext>
             </a:extLst>
           </p:cNvPr>
@@ -30987,7 +28830,7 @@
           <p:cNvPr id="35" name="Straight Arrow Connector 34">
             <a:extLst>
               <a:ext uri="{FF2B5EF4-FFF2-40B4-BE49-F238E27FC236}">
-                <ns2:creationId id="{0415B495-590C-0049-92E6-8AE7464CC78A}"/>
+                <a16:creationId xmlns:a16="http://schemas.microsoft.com/office/drawing/2014/main" id="{0415B495-590C-0049-92E6-8AE7464CC78A}"/>
               </a:ext>
             </a:extLst>
           </p:cNvPr>
@@ -31032,7 +28875,7 @@
           <p:cNvPr id="39" name="Straight Arrow Connector 38">
             <a:extLst>
               <a:ext uri="{FF2B5EF4-FFF2-40B4-BE49-F238E27FC236}">
-                <ns2:creationId id="{E4879E96-726B-4F42-BD7C-09F8D0B14E9A}"/>
+                <a16:creationId xmlns:a16="http://schemas.microsoft.com/office/drawing/2014/main" id="{E4879E96-726B-4F42-BD7C-09F8D0B14E9A}"/>
               </a:ext>
             </a:extLst>
           </p:cNvPr>
@@ -31077,7 +28920,7 @@
           <p:cNvPr id="47" name="Straight Arrow Connector 46">
             <a:extLst>
               <a:ext uri="{FF2B5EF4-FFF2-40B4-BE49-F238E27FC236}">
-                <ns2:creationId id="{0F119609-4333-414A-B8E4-E2447D7E1C10}"/>
+                <a16:creationId xmlns:a16="http://schemas.microsoft.com/office/drawing/2014/main" id="{0F119609-4333-414A-B8E4-E2447D7E1C10}"/>
               </a:ext>
             </a:extLst>
           </p:cNvPr>
@@ -31122,7 +28965,7 @@
           <p:cNvPr id="4" name="Straight Connector 3">
             <a:extLst>
               <a:ext uri="{FF2B5EF4-FFF2-40B4-BE49-F238E27FC236}">
-                <ns2:creationId id="{9890CC23-4ADC-D744-AF2D-1C8A936F07FC}"/>
+                <a16:creationId xmlns:a16="http://schemas.microsoft.com/office/drawing/2014/main" id="{9890CC23-4ADC-D744-AF2D-1C8A936F07FC}"/>
               </a:ext>
             </a:extLst>
           </p:cNvPr>
@@ -31165,7 +29008,7 @@
           <p:cNvPr id="18" name="Oval 17">
             <a:extLst>
               <a:ext uri="{FF2B5EF4-FFF2-40B4-BE49-F238E27FC236}">
-                <ns2:creationId id="{BE4CDC90-4B2E-BE41-BB9D-A84675F3A2FE}"/>
+                <a16:creationId xmlns:a16="http://schemas.microsoft.com/office/drawing/2014/main" id="{BE4CDC90-4B2E-BE41-BB9D-A84675F3A2FE}"/>
               </a:ext>
             </a:extLst>
           </p:cNvPr>
@@ -31246,7 +29089,7 @@
           <p:cNvPr id="24" name="Straight Arrow Connector 23">
             <a:extLst>
               <a:ext uri="{FF2B5EF4-FFF2-40B4-BE49-F238E27FC236}">
-                <ns2:creationId id="{7BCF22C9-C9AE-324D-B157-A9536FCAF3B6}"/>
+                <a16:creationId xmlns:a16="http://schemas.microsoft.com/office/drawing/2014/main" id="{7BCF22C9-C9AE-324D-B157-A9536FCAF3B6}"/>
               </a:ext>
             </a:extLst>
           </p:cNvPr>
@@ -31291,7 +29134,7 @@
           <p:cNvPr id="10" name="TextBox 9">
             <a:extLst>
               <a:ext uri="{FF2B5EF4-FFF2-40B4-BE49-F238E27FC236}">
-                <ns2:creationId id="{01A59953-657F-C641-8F36-E48E8EDB0DF1}"/>
+                <a16:creationId xmlns:a16="http://schemas.microsoft.com/office/drawing/2014/main" id="{01A59953-657F-C641-8F36-E48E8EDB0DF1}"/>
               </a:ext>
             </a:extLst>
           </p:cNvPr>
@@ -31346,24 +29189,7 @@
                 <a:ea typeface="Helvetica Neue" panose="02000503000000020004" pitchFamily="2" charset="0"/>
                 <a:cs typeface="Helvetica Neue" panose="02000503000000020004" pitchFamily="2" charset="0"/>
               </a:rPr>
-              <a:t xml:space="preserve">v = </a:t>
-            </a:r>
-            <a:r>
-              <a:rPr kumimoji="0" lang="en-US" sz="1400" b="0" i="1" u="none" strike="noStrike" kern="1200" cap="none" spc="0" normalizeH="0" baseline="0" noProof="0" dirty="0">
-                <a:ln>
-                  <a:noFill/>
-                </a:ln>
-                <a:solidFill>
-                  <a:prstClr val="white"/>
-                </a:solidFill>
-                <a:effectLst/>
-                <a:uLnTx/>
-                <a:uFillTx/>
-                <a:latin typeface="Helvetica Neue" panose="02000503000000020004" pitchFamily="2" charset="0"/>
-                <a:ea typeface="Helvetica Neue" panose="02000503000000020004" pitchFamily="2" charset="0"/>
-                <a:cs typeface="Helvetica Neue" panose="02000503000000020004" pitchFamily="2" charset="0"/>
-              </a:rPr>
-              <a:t>c</a:t>
+              <a:t>v = c</a:t>
             </a:r>
             <a:r>
               <a:rPr kumimoji="0" lang="en-US" sz="980" b="0" i="1" u="none" strike="noStrike" kern="1200" cap="none" spc="0" normalizeH="0" baseline="-25000" noProof="0" dirty="0">
@@ -31390,7 +29216,7 @@
           <p:cNvPr id="31" name="TextBox 30">
             <a:extLst>
               <a:ext uri="{FF2B5EF4-FFF2-40B4-BE49-F238E27FC236}">
-                <ns2:creationId id="{713B9ACE-B673-2D48-BEF2-2A133C31B527}"/>
+                <a16:creationId xmlns:a16="http://schemas.microsoft.com/office/drawing/2014/main" id="{713B9ACE-B673-2D48-BEF2-2A133C31B527}"/>
               </a:ext>
             </a:extLst>
           </p:cNvPr>
@@ -31472,7 +29298,7 @@
           <p:cNvPr id="36" name="TextBox 35">
             <a:extLst>
               <a:ext uri="{FF2B5EF4-FFF2-40B4-BE49-F238E27FC236}">
-                <ns2:creationId id="{3A81A480-EF64-094E-825A-8592DAA4C672}"/>
+                <a16:creationId xmlns:a16="http://schemas.microsoft.com/office/drawing/2014/main" id="{3A81A480-EF64-094E-825A-8592DAA4C672}"/>
               </a:ext>
             </a:extLst>
           </p:cNvPr>
@@ -31551,7 +29377,7 @@
           <p:cNvPr id="22" name="Straight Connector 21">
             <a:extLst>
               <a:ext uri="{FF2B5EF4-FFF2-40B4-BE49-F238E27FC236}">
-                <ns2:creationId id="{0C67DA45-6876-7942-9996-48CA0A1696FE}"/>
+                <a16:creationId xmlns:a16="http://schemas.microsoft.com/office/drawing/2014/main" id="{0C67DA45-6876-7942-9996-48CA0A1696FE}"/>
               </a:ext>
             </a:extLst>
           </p:cNvPr>
@@ -31594,7 +29420,7 @@
           <p:cNvPr id="7" name="TextBox 6">
             <a:extLst>
               <a:ext uri="{FF2B5EF4-FFF2-40B4-BE49-F238E27FC236}">
-                <ns2:creationId id="{FE7A6F30-9D38-0B1B-2076-531827EE9F50}"/>
+                <a16:creationId xmlns:a16="http://schemas.microsoft.com/office/drawing/2014/main" id="{FE7A6F30-9D38-0B1B-2076-531827EE9F50}"/>
               </a:ext>
             </a:extLst>
           </p:cNvPr>
@@ -31649,24 +29475,7 @@
                 <a:ea typeface="Helvetica Neue" panose="02000503000000020004" pitchFamily="2" charset="0"/>
                 <a:cs typeface="Helvetica Neue" panose="02000503000000020004" pitchFamily="2" charset="0"/>
               </a:rPr>
-              <a:t xml:space="preserve">Architrino on Linear Path with Velocity v = </a:t>
-            </a:r>
-            <a:r>
-              <a:rPr kumimoji="0" lang="en-US" sz="3200" b="1" i="0" u="none" strike="noStrike" kern="1200" cap="none" spc="0" normalizeH="0" baseline="0" noProof="0" dirty="0">
-                <a:ln>
-                  <a:noFill/>
-                </a:ln>
-                <a:solidFill>
-                  <a:prstClr val="white"/>
-                </a:solidFill>
-                <a:effectLst/>
-                <a:uLnTx/>
-                <a:uFillTx/>
-                <a:latin typeface="Helvetica Neue" panose="02000503000000020004" pitchFamily="2" charset="0"/>
-                <a:ea typeface="Helvetica Neue" panose="02000503000000020004" pitchFamily="2" charset="0"/>
-                <a:cs typeface="Helvetica Neue" panose="02000503000000020004" pitchFamily="2" charset="0"/>
-              </a:rPr>
-              <a:t>c</a:t>
+              <a:t>Architrino on Linear Path with Velocity v = c</a:t>
             </a:r>
             <a:r>
               <a:rPr kumimoji="0" lang="en-US" sz="2240" b="1" i="0" u="none" strike="noStrike" kern="1200" cap="none" spc="0" normalizeH="0" baseline="-25000" noProof="0" dirty="0">
@@ -31693,7 +29502,7 @@
           <p:cNvPr id="2" name="Group 1">
             <a:extLst>
               <a:ext uri="{FF2B5EF4-FFF2-40B4-BE49-F238E27FC236}">
-                <ns2:creationId id="{B98AD1F2-987D-71EB-A470-E4A41A905EDF}"/>
+                <a16:creationId xmlns:a16="http://schemas.microsoft.com/office/drawing/2014/main" id="{B98AD1F2-987D-71EB-A470-E4A41A905EDF}"/>
               </a:ext>
             </a:extLst>
           </p:cNvPr>
@@ -31702,10 +29511,10 @@
         </p:nvGrpSpPr>
         <p:grpSpPr>
           <a:xfrm>
-            <a:off x="28129" y="1077673"/>
-            <a:ext cx="11664338" cy="5685100"/>
-            <a:chOff x="28129" y="1077673"/>
-            <a:chExt cx="11664338" cy="5685100"/>
+            <a:off x="77020" y="1077673"/>
+            <a:ext cx="11615447" cy="5685100"/>
+            <a:chOff x="77020" y="1077673"/>
+            <a:chExt cx="11615447" cy="5685100"/>
           </a:xfrm>
         </p:grpSpPr>
         <p:cxnSp>
@@ -31713,7 +29522,7 @@
             <p:cNvPr id="6" name="Straight Arrow Connector 5">
               <a:extLst>
                 <a:ext uri="{FF2B5EF4-FFF2-40B4-BE49-F238E27FC236}">
-                  <ns2:creationId id="{836C1A95-A13A-0EE6-733B-6B2D96A15332}"/>
+                  <a16:creationId xmlns:a16="http://schemas.microsoft.com/office/drawing/2014/main" id="{836C1A95-A13A-0EE6-733B-6B2D96A15332}"/>
                 </a:ext>
               </a:extLst>
             </p:cNvPr>
@@ -31757,7 +29566,7 @@
             <p:cNvPr id="9" name="Straight Arrow Connector 8">
               <a:extLst>
                 <a:ext uri="{FF2B5EF4-FFF2-40B4-BE49-F238E27FC236}">
-                  <ns2:creationId id="{8AA9E325-051B-BE4A-55F2-7CFF0AFD3797}"/>
+                  <a16:creationId xmlns:a16="http://schemas.microsoft.com/office/drawing/2014/main" id="{8AA9E325-051B-BE4A-55F2-7CFF0AFD3797}"/>
                 </a:ext>
               </a:extLst>
             </p:cNvPr>
@@ -31801,7 +29610,7 @@
             <p:cNvPr id="11" name="TextBox 10">
               <a:extLst>
                 <a:ext uri="{FF2B5EF4-FFF2-40B4-BE49-F238E27FC236}">
-                  <ns2:creationId id="{DF6E9CDB-4ADF-E626-B2A4-DEA60E4A02F0}"/>
+                  <a16:creationId xmlns:a16="http://schemas.microsoft.com/office/drawing/2014/main" id="{DF6E9CDB-4ADF-E626-B2A4-DEA60E4A02F0}"/>
                 </a:ext>
               </a:extLst>
             </p:cNvPr>
@@ -31866,7 +29675,7 @@
             <p:cNvPr id="14" name="TextBox 13">
               <a:extLst>
                 <a:ext uri="{FF2B5EF4-FFF2-40B4-BE49-F238E27FC236}">
-                  <ns2:creationId id="{01E78D1F-323F-0A4F-4B30-4CE146D0EB63}"/>
+                  <a16:creationId xmlns:a16="http://schemas.microsoft.com/office/drawing/2014/main" id="{01E78D1F-323F-0A4F-4B30-4CE146D0EB63}"/>
                 </a:ext>
               </a:extLst>
             </p:cNvPr>
@@ -31875,8 +29684,8 @@
           </p:nvSpPr>
           <p:spPr>
             <a:xfrm>
-              <a:off x="28129" y="3162375"/>
-              <a:ext cx="1191352" cy="923330"/>
+              <a:off x="77020" y="3162375"/>
+              <a:ext cx="1093569" cy="646331"/>
             </a:xfrm>
             <a:prstGeom prst="rect">
               <a:avLst/>
@@ -31889,75 +29698,35 @@
             </a:bodyPr>
             <a:lstStyle/>
             <a:p>
-              <a:pPr marL="0" marR="0" lvl="0" indent="0" algn="ctr" defTabSz="914400" rtl="0" eaLnBrk="1" fontAlgn="auto" latinLnBrk="0" hangingPunct="1">
-                <a:lnSpc>
-                  <a:spcPct val="100000"/>
-                </a:lnSpc>
-                <a:spcBef>
-                  <a:spcPts val="0"/>
-                </a:spcBef>
-                <a:spcAft>
-                  <a:spcPts val="0"/>
-                </a:spcAft>
-                <a:buClrTx/>
-                <a:buSzTx/>
-                <a:buFontTx/>
-                <a:buNone/>
-                <a:tabLst/>
+              <a:pPr lvl="0" algn="ctr">
                 <a:defRPr/>
               </a:pPr>
               <a:r>
-                <a:rPr kumimoji="0" lang="en-US" sz="1800" b="0" i="0" u="none" strike="noStrike" kern="1200" cap="none" spc="0" normalizeH="0" baseline="0" noProof="0" dirty="0">
-                  <a:ln>
-                    <a:noFill/>
-                  </a:ln>
+                <a:rPr lang="en-US" dirty="0">
                   <a:solidFill>
                     <a:prstClr val="white"/>
                   </a:solidFill>
-                  <a:effectLst/>
-                  <a:uLnTx/>
-                  <a:uFillTx/>
                   <a:latin typeface="Helvetica Neue" panose="02000503000000020004" pitchFamily="2" charset="0"/>
                   <a:ea typeface="Helvetica Neue" panose="02000503000000020004" pitchFamily="2" charset="0"/>
                   <a:cs typeface="Helvetica Neue" panose="02000503000000020004" pitchFamily="2" charset="0"/>
                 </a:rPr>
-                <a:t>Euclidean</a:t>
+                <a:t>Absolute</a:t>
               </a:r>
             </a:p>
             <a:p>
-              <a:pPr marL="0" marR="0" lvl="0" indent="0" algn="ctr" defTabSz="914400" rtl="0" eaLnBrk="1" fontAlgn="auto" latinLnBrk="0" hangingPunct="1">
-                <a:lnSpc>
-                  <a:spcPct val="100000"/>
-                </a:lnSpc>
-                <a:spcBef>
-                  <a:spcPts val="0"/>
-                </a:spcBef>
-                <a:spcAft>
-                  <a:spcPts val="0"/>
-                </a:spcAft>
-                <a:buClrTx/>
-                <a:buSzTx/>
-                <a:buFontTx/>
-                <a:buNone/>
-                <a:tabLst/>
+              <a:pPr lvl="0" algn="ctr">
                 <a:defRPr/>
               </a:pPr>
               <a:r>
-                <a:rPr kumimoji="0" lang="en-US" sz="1800" b="0" i="0" u="none" strike="noStrike" kern="1200" cap="none" spc="0" normalizeH="0" baseline="0" noProof="0" dirty="0">
-                  <a:ln>
-                    <a:noFill/>
-                  </a:ln>
+                <a:rPr lang="en-US" dirty="0">
                   <a:solidFill>
                     <a:prstClr val="white"/>
                   </a:solidFill>
-                  <a:effectLst/>
-                  <a:uLnTx/>
-                  <a:uFillTx/>
                   <a:latin typeface="Helvetica Neue" panose="02000503000000020004" pitchFamily="2" charset="0"/>
                   <a:ea typeface="Helvetica Neue" panose="02000503000000020004" pitchFamily="2" charset="0"/>
                   <a:cs typeface="Helvetica Neue" panose="02000503000000020004" pitchFamily="2" charset="0"/>
                 </a:rPr>
-                <a:t>Void</a:t>
+                <a:t>Space</a:t>
               </a:r>
             </a:p>
           </p:txBody>
@@ -31966,7 +29735,7 @@
     </p:spTree>
     <p:extLst>
       <p:ext uri="{BB962C8B-B14F-4D97-AF65-F5344CB8AC3E}">
-        <ns3:creationId val="4081239535"/>
+        <p14:creationId xmlns:p14="http://schemas.microsoft.com/office/powerpoint/2010/main" val="4081239535"/>
       </p:ext>
     </p:extLst>
   </p:cSld>
@@ -31977,7 +29746,7 @@
 </file>
 
 <file path=ppt/slides/slide7.xml><?xml version="1.0" encoding="utf-8"?>
-<p:sld xmlns:a="http://schemas.openxmlformats.org/drawingml/2006/main" xmlns:ns2="http://schemas.microsoft.com/office/drawing/2014/main" xmlns:ns3="http://schemas.microsoft.com/office/powerpoint/2010/main" xmlns:p="http://schemas.openxmlformats.org/presentationml/2006/main">
+<p:sld xmlns:a="http://schemas.openxmlformats.org/drawingml/2006/main" xmlns:r="http://schemas.openxmlformats.org/officeDocument/2006/relationships" xmlns:p="http://schemas.openxmlformats.org/presentationml/2006/main">
   <p:cSld>
     <p:bg>
       <p:bgPr>
@@ -32006,7 +29775,7 @@
           <p:cNvPr id="5" name="Footer Placeholder 3">
             <a:extLst>
               <a:ext uri="{FF2B5EF4-FFF2-40B4-BE49-F238E27FC236}">
-                <ns2:creationId id="{668F77D6-DFDA-5A46-8DF1-47F6A167C2B1}"/>
+                <a16:creationId xmlns:a16="http://schemas.microsoft.com/office/drawing/2014/main" id="{668F77D6-DFDA-5A46-8DF1-47F6A167C2B1}"/>
               </a:ext>
             </a:extLst>
           </p:cNvPr>
@@ -32168,7 +29937,7 @@
           <p:cNvPr id="26" name="TextBox 25">
             <a:extLst>
               <a:ext uri="{FF2B5EF4-FFF2-40B4-BE49-F238E27FC236}">
-                <ns2:creationId id="{FA5E13D2-A15E-F54D-9507-CAD768919361}"/>
+                <a16:creationId xmlns:a16="http://schemas.microsoft.com/office/drawing/2014/main" id="{FA5E13D2-A15E-F54D-9507-CAD768919361}"/>
               </a:ext>
             </a:extLst>
           </p:cNvPr>
@@ -32223,24 +29992,7 @@
                 <a:ea typeface="Helvetica Neue" panose="02000503000000020004" pitchFamily="2" charset="0"/>
                 <a:cs typeface="Helvetica Neue" panose="02000503000000020004" pitchFamily="2" charset="0"/>
               </a:rPr>
-              <a:t xml:space="preserve">Imagine an architrino with linear velocity v &gt; </a:t>
-            </a:r>
-            <a:r>
-              <a:rPr kumimoji="0" lang="en-US" sz="1600" b="0" i="0" u="none" strike="noStrike" kern="1200" cap="none" spc="0" normalizeH="0" baseline="0" noProof="0" dirty="0">
-                <a:ln>
-                  <a:noFill/>
-                </a:ln>
-                <a:solidFill>
-                  <a:prstClr val="white"/>
-                </a:solidFill>
-                <a:effectLst/>
-                <a:uLnTx/>
-                <a:uFillTx/>
-                <a:latin typeface="Helvetica Neue" panose="02000503000000020004" pitchFamily="2" charset="0"/>
-                <a:ea typeface="Helvetica Neue" panose="02000503000000020004" pitchFamily="2" charset="0"/>
-                <a:cs typeface="Helvetica Neue" panose="02000503000000020004" pitchFamily="2" charset="0"/>
-              </a:rPr>
-              <a:t>c</a:t>
+              <a:t>Imagine an architrino with linear velocity v &gt; c</a:t>
             </a:r>
             <a:r>
               <a:rPr kumimoji="0" lang="en-US" sz="1120" b="0" i="0" u="none" strike="noStrike" kern="1200" cap="none" spc="0" normalizeH="0" baseline="-25000" noProof="0" dirty="0">
@@ -32356,7 +30108,7 @@
           <p:cNvPr id="23" name="Oval 22">
             <a:extLst>
               <a:ext uri="{FF2B5EF4-FFF2-40B4-BE49-F238E27FC236}">
-                <ns2:creationId id="{0112617B-A1D5-1E41-BF92-E67D4E046E39}"/>
+                <a16:creationId xmlns:a16="http://schemas.microsoft.com/office/drawing/2014/main" id="{0112617B-A1D5-1E41-BF92-E67D4E046E39}"/>
               </a:ext>
             </a:extLst>
           </p:cNvPr>
@@ -32440,7 +30192,7 @@
           <p:cNvPr id="27" name="Oval 26">
             <a:extLst>
               <a:ext uri="{FF2B5EF4-FFF2-40B4-BE49-F238E27FC236}">
-                <ns2:creationId id="{6EF0F7DA-5E70-8348-A200-F59A10FF7C55}"/>
+                <a16:creationId xmlns:a16="http://schemas.microsoft.com/office/drawing/2014/main" id="{6EF0F7DA-5E70-8348-A200-F59A10FF7C55}"/>
               </a:ext>
             </a:extLst>
           </p:cNvPr>
@@ -32524,7 +30276,7 @@
           <p:cNvPr id="28" name="Oval 27">
             <a:extLst>
               <a:ext uri="{FF2B5EF4-FFF2-40B4-BE49-F238E27FC236}">
-                <ns2:creationId id="{552F58D0-F613-674A-B294-C894E5FB1683}"/>
+                <a16:creationId xmlns:a16="http://schemas.microsoft.com/office/drawing/2014/main" id="{552F58D0-F613-674A-B294-C894E5FB1683}"/>
               </a:ext>
             </a:extLst>
           </p:cNvPr>
@@ -32608,7 +30360,7 @@
           <p:cNvPr id="29" name="Oval 28">
             <a:extLst>
               <a:ext uri="{FF2B5EF4-FFF2-40B4-BE49-F238E27FC236}">
-                <ns2:creationId id="{9CA7A721-D3BD-744E-9306-85BBED5F74BC}"/>
+                <a16:creationId xmlns:a16="http://schemas.microsoft.com/office/drawing/2014/main" id="{9CA7A721-D3BD-744E-9306-85BBED5F74BC}"/>
               </a:ext>
             </a:extLst>
           </p:cNvPr>
@@ -32692,7 +30444,7 @@
           <p:cNvPr id="30" name="Oval 29">
             <a:extLst>
               <a:ext uri="{FF2B5EF4-FFF2-40B4-BE49-F238E27FC236}">
-                <ns2:creationId id="{F97F1A02-C0C7-3C45-9790-847C152D159A}"/>
+                <a16:creationId xmlns:a16="http://schemas.microsoft.com/office/drawing/2014/main" id="{F97F1A02-C0C7-3C45-9790-847C152D159A}"/>
               </a:ext>
             </a:extLst>
           </p:cNvPr>
@@ -32776,7 +30528,7 @@
           <p:cNvPr id="15" name="Straight Arrow Connector 14">
             <a:extLst>
               <a:ext uri="{FF2B5EF4-FFF2-40B4-BE49-F238E27FC236}">
-                <ns2:creationId id="{05289ED1-4679-6543-A669-B23443FD0CD8}"/>
+                <a16:creationId xmlns:a16="http://schemas.microsoft.com/office/drawing/2014/main" id="{05289ED1-4679-6543-A669-B23443FD0CD8}"/>
               </a:ext>
             </a:extLst>
           </p:cNvPr>
@@ -32821,7 +30573,7 @@
           <p:cNvPr id="32" name="Straight Arrow Connector 31">
             <a:extLst>
               <a:ext uri="{FF2B5EF4-FFF2-40B4-BE49-F238E27FC236}">
-                <ns2:creationId id="{A9F8BF55-7F79-854D-84AD-A730BF43B39C}"/>
+                <a16:creationId xmlns:a16="http://schemas.microsoft.com/office/drawing/2014/main" id="{A9F8BF55-7F79-854D-84AD-A730BF43B39C}"/>
               </a:ext>
             </a:extLst>
           </p:cNvPr>
@@ -32866,7 +30618,7 @@
           <p:cNvPr id="35" name="Straight Arrow Connector 34">
             <a:extLst>
               <a:ext uri="{FF2B5EF4-FFF2-40B4-BE49-F238E27FC236}">
-                <ns2:creationId id="{0415B495-590C-0049-92E6-8AE7464CC78A}"/>
+                <a16:creationId xmlns:a16="http://schemas.microsoft.com/office/drawing/2014/main" id="{0415B495-590C-0049-92E6-8AE7464CC78A}"/>
               </a:ext>
             </a:extLst>
           </p:cNvPr>
@@ -32911,7 +30663,7 @@
           <p:cNvPr id="39" name="Straight Arrow Connector 38">
             <a:extLst>
               <a:ext uri="{FF2B5EF4-FFF2-40B4-BE49-F238E27FC236}">
-                <ns2:creationId id="{E4879E96-726B-4F42-BD7C-09F8D0B14E9A}"/>
+                <a16:creationId xmlns:a16="http://schemas.microsoft.com/office/drawing/2014/main" id="{E4879E96-726B-4F42-BD7C-09F8D0B14E9A}"/>
               </a:ext>
             </a:extLst>
           </p:cNvPr>
@@ -32956,7 +30708,7 @@
           <p:cNvPr id="47" name="Straight Arrow Connector 46">
             <a:extLst>
               <a:ext uri="{FF2B5EF4-FFF2-40B4-BE49-F238E27FC236}">
-                <ns2:creationId id="{0F119609-4333-414A-B8E4-E2447D7E1C10}"/>
+                <a16:creationId xmlns:a16="http://schemas.microsoft.com/office/drawing/2014/main" id="{0F119609-4333-414A-B8E4-E2447D7E1C10}"/>
               </a:ext>
             </a:extLst>
           </p:cNvPr>
@@ -33001,7 +30753,7 @@
           <p:cNvPr id="4" name="Straight Connector 3">
             <a:extLst>
               <a:ext uri="{FF2B5EF4-FFF2-40B4-BE49-F238E27FC236}">
-                <ns2:creationId id="{9890CC23-4ADC-D744-AF2D-1C8A936F07FC}"/>
+                <a16:creationId xmlns:a16="http://schemas.microsoft.com/office/drawing/2014/main" id="{9890CC23-4ADC-D744-AF2D-1C8A936F07FC}"/>
               </a:ext>
             </a:extLst>
           </p:cNvPr>
@@ -33044,7 +30796,7 @@
           <p:cNvPr id="18" name="Oval 17">
             <a:extLst>
               <a:ext uri="{FF2B5EF4-FFF2-40B4-BE49-F238E27FC236}">
-                <ns2:creationId id="{BE4CDC90-4B2E-BE41-BB9D-A84675F3A2FE}"/>
+                <a16:creationId xmlns:a16="http://schemas.microsoft.com/office/drawing/2014/main" id="{BE4CDC90-4B2E-BE41-BB9D-A84675F3A2FE}"/>
               </a:ext>
             </a:extLst>
           </p:cNvPr>
@@ -33127,7 +30879,7 @@
           <p:cNvPr id="24" name="Straight Arrow Connector 23">
             <a:extLst>
               <a:ext uri="{FF2B5EF4-FFF2-40B4-BE49-F238E27FC236}">
-                <ns2:creationId id="{7BCF22C9-C9AE-324D-B157-A9536FCAF3B6}"/>
+                <a16:creationId xmlns:a16="http://schemas.microsoft.com/office/drawing/2014/main" id="{7BCF22C9-C9AE-324D-B157-A9536FCAF3B6}"/>
               </a:ext>
             </a:extLst>
           </p:cNvPr>
@@ -33172,7 +30924,7 @@
           <p:cNvPr id="10" name="TextBox 9">
             <a:extLst>
               <a:ext uri="{FF2B5EF4-FFF2-40B4-BE49-F238E27FC236}">
-                <ns2:creationId id="{01A59953-657F-C641-8F36-E48E8EDB0DF1}"/>
+                <a16:creationId xmlns:a16="http://schemas.microsoft.com/office/drawing/2014/main" id="{01A59953-657F-C641-8F36-E48E8EDB0DF1}"/>
               </a:ext>
             </a:extLst>
           </p:cNvPr>
@@ -33230,24 +30982,7 @@
                 <a:ea typeface="Helvetica Neue" panose="02000503000000020004" pitchFamily="2" charset="0"/>
                 <a:cs typeface="Helvetica Neue" panose="02000503000000020004" pitchFamily="2" charset="0"/>
               </a:rPr>
-              <a:t xml:space="preserve">v &gt; </a:t>
-            </a:r>
-            <a:r>
-              <a:rPr kumimoji="0" lang="en-US" sz="1400" b="0" i="1" u="none" strike="noStrike" kern="1200" cap="none" spc="0" normalizeH="0" baseline="0" noProof="0" dirty="0">
-                <a:ln>
-                  <a:noFill/>
-                </a:ln>
-                <a:solidFill>
-                  <a:prstClr val="white"/>
-                </a:solidFill>
-                <a:effectLst/>
-                <a:uLnTx/>
-                <a:uFillTx/>
-                <a:latin typeface="Helvetica Neue" panose="02000503000000020004" pitchFamily="2" charset="0"/>
-                <a:ea typeface="Helvetica Neue" panose="02000503000000020004" pitchFamily="2" charset="0"/>
-                <a:cs typeface="Helvetica Neue" panose="02000503000000020004" pitchFamily="2" charset="0"/>
-              </a:rPr>
-              <a:t>c</a:t>
+              <a:t>v &gt; c</a:t>
             </a:r>
             <a:r>
               <a:rPr kumimoji="0" lang="en-US" sz="980" b="0" i="1" u="none" strike="noStrike" kern="1200" cap="none" spc="0" normalizeH="0" baseline="-25000" noProof="0" dirty="0">
@@ -33274,7 +31009,7 @@
           <p:cNvPr id="31" name="TextBox 30">
             <a:extLst>
               <a:ext uri="{FF2B5EF4-FFF2-40B4-BE49-F238E27FC236}">
-                <ns2:creationId id="{713B9ACE-B673-2D48-BEF2-2A133C31B527}"/>
+                <a16:creationId xmlns:a16="http://schemas.microsoft.com/office/drawing/2014/main" id="{713B9ACE-B673-2D48-BEF2-2A133C31B527}"/>
               </a:ext>
             </a:extLst>
           </p:cNvPr>
@@ -33359,7 +31094,7 @@
           <p:cNvPr id="36" name="TextBox 35">
             <a:extLst>
               <a:ext uri="{FF2B5EF4-FFF2-40B4-BE49-F238E27FC236}">
-                <ns2:creationId id="{3A81A480-EF64-094E-825A-8592DAA4C672}"/>
+                <a16:creationId xmlns:a16="http://schemas.microsoft.com/office/drawing/2014/main" id="{3A81A480-EF64-094E-825A-8592DAA4C672}"/>
               </a:ext>
             </a:extLst>
           </p:cNvPr>
@@ -33441,7 +31176,7 @@
           <p:cNvPr id="22" name="Straight Connector 21">
             <a:extLst>
               <a:ext uri="{FF2B5EF4-FFF2-40B4-BE49-F238E27FC236}">
-                <ns2:creationId id="{0C67DA45-6876-7942-9996-48CA0A1696FE}"/>
+                <a16:creationId xmlns:a16="http://schemas.microsoft.com/office/drawing/2014/main" id="{0C67DA45-6876-7942-9996-48CA0A1696FE}"/>
               </a:ext>
             </a:extLst>
           </p:cNvPr>
@@ -33484,7 +31219,7 @@
           <p:cNvPr id="2" name="TextBox 1">
             <a:extLst>
               <a:ext uri="{FF2B5EF4-FFF2-40B4-BE49-F238E27FC236}">
-                <ns2:creationId id="{25B497FC-A4FB-6E22-82A5-ECE9FFBF1D45}"/>
+                <a16:creationId xmlns:a16="http://schemas.microsoft.com/office/drawing/2014/main" id="{25B497FC-A4FB-6E22-82A5-ECE9FFBF1D45}"/>
               </a:ext>
             </a:extLst>
           </p:cNvPr>
@@ -33539,24 +31274,7 @@
                 <a:ea typeface="Helvetica Neue" panose="02000503000000020004" pitchFamily="2" charset="0"/>
                 <a:cs typeface="Helvetica Neue" panose="02000503000000020004" pitchFamily="2" charset="0"/>
               </a:rPr>
-              <a:t xml:space="preserve">Architrino on Linear Path with Velocity v &gt; </a:t>
-            </a:r>
-            <a:r>
-              <a:rPr kumimoji="0" lang="en-US" sz="3200" b="1" i="0" u="none" strike="noStrike" kern="1200" cap="none" spc="0" normalizeH="0" baseline="0" noProof="0" dirty="0">
-                <a:ln>
-                  <a:noFill/>
-                </a:ln>
-                <a:solidFill>
-                  <a:prstClr val="white"/>
-                </a:solidFill>
-                <a:effectLst/>
-                <a:uLnTx/>
-                <a:uFillTx/>
-                <a:latin typeface="Helvetica Neue" panose="02000503000000020004" pitchFamily="2" charset="0"/>
-                <a:ea typeface="Helvetica Neue" panose="02000503000000020004" pitchFamily="2" charset="0"/>
-                <a:cs typeface="Helvetica Neue" panose="02000503000000020004" pitchFamily="2" charset="0"/>
-              </a:rPr>
-              <a:t>c</a:t>
+              <a:t>Architrino on Linear Path with Velocity v &gt; c</a:t>
             </a:r>
             <a:r>
               <a:rPr kumimoji="0" lang="en-US" sz="2240" b="1" i="0" u="none" strike="noStrike" kern="1200" cap="none" spc="0" normalizeH="0" baseline="-25000" noProof="0" dirty="0">
@@ -33583,7 +31301,7 @@
           <p:cNvPr id="6" name="Straight Arrow Connector 5">
             <a:extLst>
               <a:ext uri="{FF2B5EF4-FFF2-40B4-BE49-F238E27FC236}">
-                <ns2:creationId id="{3B9C4884-FD04-1DA8-E9C2-C28549C7A16E}"/>
+                <a16:creationId xmlns:a16="http://schemas.microsoft.com/office/drawing/2014/main" id="{3B9C4884-FD04-1DA8-E9C2-C28549C7A16E}"/>
               </a:ext>
             </a:extLst>
           </p:cNvPr>
@@ -33627,7 +31345,7 @@
           <p:cNvPr id="7" name="Straight Arrow Connector 6">
             <a:extLst>
               <a:ext uri="{FF2B5EF4-FFF2-40B4-BE49-F238E27FC236}">
-                <ns2:creationId id="{A6FFF53F-C9D7-1557-FC42-A159BAC6A3AE}"/>
+                <a16:creationId xmlns:a16="http://schemas.microsoft.com/office/drawing/2014/main" id="{A6FFF53F-C9D7-1557-FC42-A159BAC6A3AE}"/>
               </a:ext>
             </a:extLst>
           </p:cNvPr>
@@ -33671,7 +31389,7 @@
           <p:cNvPr id="9" name="TextBox 8">
             <a:extLst>
               <a:ext uri="{FF2B5EF4-FFF2-40B4-BE49-F238E27FC236}">
-                <ns2:creationId id="{37A94EE7-D3B6-AC25-503E-E6C0EE1F179B}"/>
+                <a16:creationId xmlns:a16="http://schemas.microsoft.com/office/drawing/2014/main" id="{37A94EE7-D3B6-AC25-503E-E6C0EE1F179B}"/>
               </a:ext>
             </a:extLst>
           </p:cNvPr>
@@ -33736,7 +31454,7 @@
           <p:cNvPr id="11" name="TextBox 10">
             <a:extLst>
               <a:ext uri="{FF2B5EF4-FFF2-40B4-BE49-F238E27FC236}">
-                <ns2:creationId id="{C80380D5-790B-3854-4D6A-3811EF0E2829}"/>
+                <a16:creationId xmlns:a16="http://schemas.microsoft.com/office/drawing/2014/main" id="{C80380D5-790B-3854-4D6A-3811EF0E2829}"/>
               </a:ext>
             </a:extLst>
           </p:cNvPr>
@@ -33745,8 +31463,8 @@
         </p:nvSpPr>
         <p:spPr>
           <a:xfrm>
-            <a:off x="28129" y="3162375"/>
-            <a:ext cx="1191352" cy="923330"/>
+            <a:off x="77020" y="3162375"/>
+            <a:ext cx="1093569" cy="646331"/>
           </a:xfrm>
           <a:prstGeom prst="rect">
             <a:avLst/>
@@ -33759,75 +31477,35 @@
           </a:bodyPr>
           <a:lstStyle/>
           <a:p>
-            <a:pPr marL="0" marR="0" lvl="0" indent="0" algn="ctr" defTabSz="914400" rtl="0" eaLnBrk="1" fontAlgn="auto" latinLnBrk="0" hangingPunct="1">
-              <a:lnSpc>
-                <a:spcPct val="100000"/>
-              </a:lnSpc>
-              <a:spcBef>
-                <a:spcPts val="0"/>
-              </a:spcBef>
-              <a:spcAft>
-                <a:spcPts val="0"/>
-              </a:spcAft>
-              <a:buClrTx/>
-              <a:buSzTx/>
-              <a:buFontTx/>
-              <a:buNone/>
-              <a:tabLst/>
+            <a:pPr lvl="0" algn="ctr">
               <a:defRPr/>
             </a:pPr>
             <a:r>
-              <a:rPr kumimoji="0" lang="en-US" sz="1800" b="0" i="0" u="none" strike="noStrike" kern="1200" cap="none" spc="0" normalizeH="0" baseline="0" noProof="0" dirty="0">
-                <a:ln>
-                  <a:noFill/>
-                </a:ln>
+              <a:rPr lang="en-US" dirty="0">
                 <a:solidFill>
                   <a:prstClr val="white"/>
                 </a:solidFill>
-                <a:effectLst/>
-                <a:uLnTx/>
-                <a:uFillTx/>
                 <a:latin typeface="Helvetica Neue" panose="02000503000000020004" pitchFamily="2" charset="0"/>
                 <a:ea typeface="Helvetica Neue" panose="02000503000000020004" pitchFamily="2" charset="0"/>
                 <a:cs typeface="Helvetica Neue" panose="02000503000000020004" pitchFamily="2" charset="0"/>
               </a:rPr>
-              <a:t>Euclidean</a:t>
-            </a:r>
-          </a:p>
-          <a:p>
-            <a:pPr marL="0" marR="0" lvl="0" indent="0" algn="ctr" defTabSz="914400" rtl="0" eaLnBrk="1" fontAlgn="auto" latinLnBrk="0" hangingPunct="1">
-              <a:lnSpc>
-                <a:spcPct val="100000"/>
-              </a:lnSpc>
-              <a:spcBef>
-                <a:spcPts val="0"/>
-              </a:spcBef>
-              <a:spcAft>
-                <a:spcPts val="0"/>
-              </a:spcAft>
-              <a:buClrTx/>
-              <a:buSzTx/>
-              <a:buFontTx/>
-              <a:buNone/>
-              <a:tabLst/>
+              <a:t>Absolute</a:t>
+            </a:r>
+          </a:p>
+          <a:p>
+            <a:pPr lvl="0" algn="ctr">
               <a:defRPr/>
             </a:pPr>
             <a:r>
-              <a:rPr kumimoji="0" lang="en-US" sz="1800" b="0" i="0" u="none" strike="noStrike" kern="1200" cap="none" spc="0" normalizeH="0" baseline="0" noProof="0" dirty="0">
-                <a:ln>
-                  <a:noFill/>
-                </a:ln>
+              <a:rPr lang="en-US" dirty="0">
                 <a:solidFill>
                   <a:prstClr val="white"/>
                 </a:solidFill>
-                <a:effectLst/>
-                <a:uLnTx/>
-                <a:uFillTx/>
                 <a:latin typeface="Helvetica Neue" panose="02000503000000020004" pitchFamily="2" charset="0"/>
                 <a:ea typeface="Helvetica Neue" panose="02000503000000020004" pitchFamily="2" charset="0"/>
                 <a:cs typeface="Helvetica Neue" panose="02000503000000020004" pitchFamily="2" charset="0"/>
               </a:rPr>
-              <a:t>Void</a:t>
+              <a:t>Space</a:t>
             </a:r>
           </a:p>
         </p:txBody>
@@ -33835,7 +31513,7 @@
     </p:spTree>
     <p:extLst>
       <p:ext uri="{BB962C8B-B14F-4D97-AF65-F5344CB8AC3E}">
-        <ns3:creationId val="2347082703"/>
+        <p14:creationId xmlns:p14="http://schemas.microsoft.com/office/powerpoint/2010/main" val="2347082703"/>
       </p:ext>
     </p:extLst>
   </p:cSld>
@@ -33846,7 +31524,7 @@
 </file>
 
 <file path=ppt/slides/slide8.xml><?xml version="1.0" encoding="utf-8"?>
-<p:sld xmlns:a="http://schemas.openxmlformats.org/drawingml/2006/main" xmlns:ns2="http://schemas.microsoft.com/office/drawing/2014/main" xmlns:ns4="http://schemas.microsoft.com/office/powerpoint/2010/main" xmlns:p="http://schemas.openxmlformats.org/presentationml/2006/main" xmlns:r="http://schemas.openxmlformats.org/officeDocument/2006/relationships">
+<p:sld xmlns:a="http://schemas.openxmlformats.org/drawingml/2006/main" xmlns:r="http://schemas.openxmlformats.org/officeDocument/2006/relationships" xmlns:p="http://schemas.openxmlformats.org/presentationml/2006/main">
   <p:cSld>
     <p:bg>
       <p:bgPr>
@@ -33861,7 +31539,7 @@
         <p:cNvPr id="1" name="">
           <a:extLst>
             <a:ext uri="{FF2B5EF4-FFF2-40B4-BE49-F238E27FC236}">
-              <ns2:creationId id="{0AB73162-F4FB-AD38-1F35-FA4B5AB487CE}"/>
+              <a16:creationId xmlns:a16="http://schemas.microsoft.com/office/drawing/2014/main" id="{0AB73162-F4FB-AD38-1F35-FA4B5AB487CE}"/>
             </a:ext>
           </a:extLst>
         </p:cNvPr>
@@ -33881,7 +31559,7 @@
           <p:cNvPr id="5" name="Footer Placeholder 3">
             <a:extLst>
               <a:ext uri="{FF2B5EF4-FFF2-40B4-BE49-F238E27FC236}">
-                <ns2:creationId id="{8949F10E-6D23-F0EA-2E56-92DD2DE28C2A}"/>
+                <a16:creationId xmlns:a16="http://schemas.microsoft.com/office/drawing/2014/main" id="{8949F10E-6D23-F0EA-2E56-92DD2DE28C2A}"/>
               </a:ext>
             </a:extLst>
           </p:cNvPr>
@@ -34043,7 +31721,7 @@
           <p:cNvPr id="9" name="Group 8">
             <a:extLst>
               <a:ext uri="{FF2B5EF4-FFF2-40B4-BE49-F238E27FC236}">
-                <ns2:creationId id="{E9850113-AB4C-1F87-EB30-16E25C586B5C}"/>
+                <a16:creationId xmlns:a16="http://schemas.microsoft.com/office/drawing/2014/main" id="{E9850113-AB4C-1F87-EB30-16E25C586B5C}"/>
               </a:ext>
             </a:extLst>
           </p:cNvPr>
@@ -34063,7 +31741,7 @@
             <p:cNvPr id="3" name="Picture 2">
               <a:extLst>
                 <a:ext uri="{FF2B5EF4-FFF2-40B4-BE49-F238E27FC236}">
-                  <ns2:creationId id="{9851A9B8-C2CC-C4AE-6C06-EB4B33725392}"/>
+                  <a16:creationId xmlns:a16="http://schemas.microsoft.com/office/drawing/2014/main" id="{9851A9B8-C2CC-C4AE-6C06-EB4B33725392}"/>
                 </a:ext>
               </a:extLst>
             </p:cNvPr>
@@ -34100,7 +31778,7 @@
             <p:cNvPr id="4" name="Freeform 3">
               <a:extLst>
                 <a:ext uri="{FF2B5EF4-FFF2-40B4-BE49-F238E27FC236}">
-                  <ns2:creationId id="{A6E4734A-F61C-B1B6-E09B-251407A8B0F9}"/>
+                  <a16:creationId xmlns:a16="http://schemas.microsoft.com/office/drawing/2014/main" id="{A6E4734A-F61C-B1B6-E09B-251407A8B0F9}"/>
                 </a:ext>
               </a:extLst>
             </p:cNvPr>
@@ -34245,7 +31923,7 @@
             <p:cNvPr id="6" name="Freeform 5">
               <a:extLst>
                 <a:ext uri="{FF2B5EF4-FFF2-40B4-BE49-F238E27FC236}">
-                  <ns2:creationId id="{AE9693B7-399D-4648-5934-BAF780F94BB8}"/>
+                  <a16:creationId xmlns:a16="http://schemas.microsoft.com/office/drawing/2014/main" id="{AE9693B7-399D-4648-5934-BAF780F94BB8}"/>
                 </a:ext>
               </a:extLst>
             </p:cNvPr>
@@ -34431,7 +32109,7 @@
           <p:cNvPr id="7" name="Title 1">
             <a:extLst>
               <a:ext uri="{FF2B5EF4-FFF2-40B4-BE49-F238E27FC236}">
-                <ns2:creationId id="{B4E061E7-B3BA-067C-8AC0-2AEC475558B3}"/>
+                <a16:creationId xmlns:a16="http://schemas.microsoft.com/office/drawing/2014/main" id="{B4E061E7-B3BA-067C-8AC0-2AEC475558B3}"/>
               </a:ext>
             </a:extLst>
           </p:cNvPr>
@@ -34515,7 +32193,7 @@
           <p:cNvPr id="10" name="TextBox 9">
             <a:extLst>
               <a:ext uri="{FF2B5EF4-FFF2-40B4-BE49-F238E27FC236}">
-                <ns2:creationId id="{FFF14DD8-B78C-E1D8-EB01-782F6700411F}"/>
+                <a16:creationId xmlns:a16="http://schemas.microsoft.com/office/drawing/2014/main" id="{FFF14DD8-B78C-E1D8-EB01-782F6700411F}"/>
               </a:ext>
             </a:extLst>
           </p:cNvPr>
@@ -34525,7 +32203,7 @@
         <p:spPr>
           <a:xfrm>
             <a:off x="6358919" y="1651553"/>
-            <a:ext cx="5639963" cy="3362844"/>
+            <a:ext cx="5639963" cy="3778342"/>
           </a:xfrm>
           <a:prstGeom prst="rect">
             <a:avLst/>
@@ -34570,7 +32248,7 @@
                 <a:ea typeface="Helvetica Neue" panose="02000503000000020004" pitchFamily="2" charset="0"/>
                 <a:cs typeface="Helvetica Neue" panose="02000503000000020004" pitchFamily="2" charset="0"/>
               </a:rPr>
-              <a:t>Paths are continuous in absolute time and the Euclidean void.</a:t>
+              <a:t>Paths are continuous in absolute time and absolute space.</a:t>
             </a:r>
           </a:p>
           <a:p>
@@ -34714,7 +32392,41 @@
                 <a:ea typeface="Helvetica Neue" panose="02000503000000020004" pitchFamily="2" charset="0"/>
                 <a:cs typeface="Helvetica Neue" panose="02000503000000020004" pitchFamily="2" charset="0"/>
               </a:rPr>
-              <a:t>Wake-surface density decreases as 1/r^2 with radius from the emission point.</a:t>
+              <a:t>Wake-surface density decreases as 1/r</a:t>
+            </a:r>
+            <a:r>
+              <a:rPr kumimoji="0" lang="en-US" sz="1800" b="1" i="0" u="none" strike="noStrike" kern="1200" cap="none" spc="0" normalizeH="0" baseline="30000" noProof="0" dirty="0">
+                <a:ln>
+                  <a:noFill/>
+                </a:ln>
+                <a:solidFill>
+                  <a:prstClr val="white"/>
+                </a:solidFill>
+                <a:effectLst/>
+                <a:uLnTx/>
+                <a:uFillTx/>
+                <a:latin typeface="Helvetica Neue" panose="02000503000000020004" pitchFamily="2" charset="0"/>
+                <a:ea typeface="Helvetica Neue" panose="02000503000000020004" pitchFamily="2" charset="0"/>
+                <a:cs typeface="Helvetica Neue" panose="02000503000000020004" pitchFamily="2" charset="0"/>
+              </a:rPr>
+              <a:t>2</a:t>
+            </a:r>
+            <a:r>
+              <a:rPr kumimoji="0" lang="en-US" sz="1800" b="1" i="0" u="none" strike="noStrike" kern="1200" cap="none" spc="0" normalizeH="0" baseline="0" noProof="0" dirty="0">
+                <a:ln>
+                  <a:noFill/>
+                </a:ln>
+                <a:solidFill>
+                  <a:prstClr val="white"/>
+                </a:solidFill>
+                <a:effectLst/>
+                <a:uLnTx/>
+                <a:uFillTx/>
+                <a:latin typeface="Helvetica Neue" panose="02000503000000020004" pitchFamily="2" charset="0"/>
+                <a:ea typeface="Helvetica Neue" panose="02000503000000020004" pitchFamily="2" charset="0"/>
+                <a:cs typeface="Helvetica Neue" panose="02000503000000020004" pitchFamily="2" charset="0"/>
+              </a:rPr>
+              <a:t> with radius from the emission point.</a:t>
             </a:r>
             <a:endParaRPr kumimoji="0" lang="en-US" sz="1800" b="1" i="0" u="none" strike="noStrike" kern="1200" cap="none" spc="0" normalizeH="0" baseline="30000" noProof="0" dirty="0">
               <a:ln>
@@ -34736,7 +32448,7 @@
     </p:spTree>
     <p:extLst>
       <p:ext uri="{BB962C8B-B14F-4D97-AF65-F5344CB8AC3E}">
-        <ns4:creationId val="3392406910"/>
+        <p14:creationId xmlns:p14="http://schemas.microsoft.com/office/powerpoint/2010/main" val="3392406910"/>
       </p:ext>
     </p:extLst>
   </p:cSld>
@@ -34747,7 +32459,7 @@
 </file>
 
 <file path=ppt/slides/slide9.xml><?xml version="1.0" encoding="utf-8"?>
-<p:sld xmlns:a="http://schemas.openxmlformats.org/drawingml/2006/main" xmlns:ns2="http://schemas.microsoft.com/office/drawing/2014/main" xmlns:ns3="http://schemas.microsoft.com/office/powerpoint/2010/main" xmlns:p="http://schemas.openxmlformats.org/presentationml/2006/main">
+<p:sld xmlns:a="http://schemas.openxmlformats.org/drawingml/2006/main" xmlns:r="http://schemas.openxmlformats.org/officeDocument/2006/relationships" xmlns:p="http://schemas.openxmlformats.org/presentationml/2006/main">
   <p:cSld>
     <p:bg>
       <p:bgPr>
@@ -34776,7 +32488,7 @@
           <p:cNvPr id="11" name="Footer Placeholder 3">
             <a:extLst>
               <a:ext uri="{FF2B5EF4-FFF2-40B4-BE49-F238E27FC236}">
-                <ns2:creationId id="{7C94C084-4476-0C4E-B896-CB3AC89A47F6}"/>
+                <a16:creationId xmlns:a16="http://schemas.microsoft.com/office/drawing/2014/main" id="{7C94C084-4476-0C4E-B896-CB3AC89A47F6}"/>
               </a:ext>
             </a:extLst>
           </p:cNvPr>
@@ -34910,7 +32622,7 @@
           <p:cNvPr id="6" name="Freeform 5">
             <a:extLst>
               <a:ext uri="{FF2B5EF4-FFF2-40B4-BE49-F238E27FC236}">
-                <ns2:creationId id="{A25DAE9F-BED8-3A57-CD97-EDBD9F0EDD69}"/>
+                <a16:creationId xmlns:a16="http://schemas.microsoft.com/office/drawing/2014/main" id="{A25DAE9F-BED8-3A57-CD97-EDBD9F0EDD69}"/>
               </a:ext>
             </a:extLst>
           </p:cNvPr>
@@ -35506,7 +33218,7 @@
           <p:cNvPr id="7" name="Freeform 6">
             <a:extLst>
               <a:ext uri="{FF2B5EF4-FFF2-40B4-BE49-F238E27FC236}">
-                <ns2:creationId id="{3F833B4A-7F30-F940-BD46-AAD4F1EC84C2}"/>
+                <a16:creationId xmlns:a16="http://schemas.microsoft.com/office/drawing/2014/main" id="{3F833B4A-7F30-F940-BD46-AAD4F1EC84C2}"/>
               </a:ext>
             </a:extLst>
           </p:cNvPr>
@@ -36368,7 +34080,7 @@
           <p:cNvPr id="9" name="Oval 8">
             <a:extLst>
               <a:ext uri="{FF2B5EF4-FFF2-40B4-BE49-F238E27FC236}">
-                <ns2:creationId id="{C1204F89-67E6-2520-9CB7-C11AD96E6395}"/>
+                <a16:creationId xmlns:a16="http://schemas.microsoft.com/office/drawing/2014/main" id="{C1204F89-67E6-2520-9CB7-C11AD96E6395}"/>
               </a:ext>
             </a:extLst>
           </p:cNvPr>
@@ -36420,7 +34132,7 @@
           <p:cNvPr id="10" name="Oval 9">
             <a:extLst>
               <a:ext uri="{FF2B5EF4-FFF2-40B4-BE49-F238E27FC236}">
-                <ns2:creationId id="{C20E3F99-5E93-DCB1-5438-4A8D42DA25E5}"/>
+                <a16:creationId xmlns:a16="http://schemas.microsoft.com/office/drawing/2014/main" id="{C20E3F99-5E93-DCB1-5438-4A8D42DA25E5}"/>
               </a:ext>
             </a:extLst>
           </p:cNvPr>
@@ -36472,7 +34184,7 @@
           <p:cNvPr id="12" name="Straight Connector 11">
             <a:extLst>
               <a:ext uri="{FF2B5EF4-FFF2-40B4-BE49-F238E27FC236}">
-                <ns2:creationId id="{981DDF22-4015-B62D-15E4-53D55BFB533D}"/>
+                <a16:creationId xmlns:a16="http://schemas.microsoft.com/office/drawing/2014/main" id="{981DDF22-4015-B62D-15E4-53D55BFB533D}"/>
               </a:ext>
             </a:extLst>
           </p:cNvPr>
@@ -36518,7 +34230,7 @@
           <p:cNvPr id="13" name="Oval 12">
             <a:extLst>
               <a:ext uri="{FF2B5EF4-FFF2-40B4-BE49-F238E27FC236}">
-                <ns2:creationId id="{54ADE077-5C44-29DF-0132-D3CEA80605F9}"/>
+                <a16:creationId xmlns:a16="http://schemas.microsoft.com/office/drawing/2014/main" id="{54ADE077-5C44-29DF-0132-D3CEA80605F9}"/>
               </a:ext>
             </a:extLst>
           </p:cNvPr>
@@ -36573,7 +34285,7 @@
           <p:cNvPr id="14" name="Oval 13">
             <a:extLst>
               <a:ext uri="{FF2B5EF4-FFF2-40B4-BE49-F238E27FC236}">
-                <ns2:creationId id="{00672CFA-7F0E-A719-10B0-29AE35096E30}"/>
+                <a16:creationId xmlns:a16="http://schemas.microsoft.com/office/drawing/2014/main" id="{00672CFA-7F0E-A719-10B0-29AE35096E30}"/>
               </a:ext>
             </a:extLst>
           </p:cNvPr>
@@ -36625,7 +34337,7 @@
           <p:cNvPr id="15" name="TextBox 14">
             <a:extLst>
               <a:ext uri="{FF2B5EF4-FFF2-40B4-BE49-F238E27FC236}">
-                <ns2:creationId id="{D484D63C-CCDB-0923-AC0F-BC6DCC85B056}"/>
+                <a16:creationId xmlns:a16="http://schemas.microsoft.com/office/drawing/2014/main" id="{D484D63C-CCDB-0923-AC0F-BC6DCC85B056}"/>
               </a:ext>
             </a:extLst>
           </p:cNvPr>
@@ -36649,7 +34361,7 @@
           <a:lstStyle/>
           <a:p>
             <a:r>
-              <a:rPr lang="en-US" dirty="0" baseline="0">
+              <a:rPr lang="en-US" baseline="0" dirty="0">
                 <a:solidFill>
                   <a:srgbClr val="00B050"/>
                 </a:solidFill>
@@ -36657,21 +34369,10 @@
                 <a:ea typeface="Helvetica Neue" panose="02000503000000020004" pitchFamily="2" charset="0"/>
                 <a:cs typeface="Helvetica Neue" panose="02000503000000020004" pitchFamily="2" charset="0"/>
               </a:rPr>
-              <a:t xml:space="preserve">The causal wake emitted by architrino A at time t' expands at wake speed </a:t>
-            </a:r>
-            <a:r>
-              <a:rPr lang="en-US" dirty="0" baseline="0">
-                <a:solidFill>
-                  <a:srgbClr val="00B050"/>
-                </a:solidFill>
-                <a:latin typeface="Helvetica Neue" panose="02000503000000020004" pitchFamily="2" charset="0"/>
-                <a:ea typeface="Helvetica Neue" panose="02000503000000020004" pitchFamily="2" charset="0"/>
-                <a:cs typeface="Helvetica Neue" panose="02000503000000020004" pitchFamily="2" charset="0"/>
-              </a:rPr>
-              <a:t>c</a:t>
-            </a:r>
-            <a:r>
-              <a:rPr lang="en-US" dirty="0" baseline="-25000" sz="1260">
+              <a:t>The causal wake emitted by architrino A at time t' expands at wake speed c</a:t>
+            </a:r>
+            <a:r>
+              <a:rPr lang="en-US" sz="1260" baseline="-25000" dirty="0">
                 <a:solidFill>
                   <a:srgbClr val="00B050"/>
                 </a:solidFill>
@@ -36682,7 +34383,7 @@
               <a:t>f</a:t>
             </a:r>
             <a:r>
-              <a:rPr lang="en-US" dirty="0" baseline="0">
+              <a:rPr lang="en-US" baseline="0" dirty="0">
                 <a:solidFill>
                   <a:srgbClr val="00B050"/>
                 </a:solidFill>
@@ -36718,7 +34419,7 @@
           <p:cNvPr id="16" name="TextBox 15">
             <a:extLst>
               <a:ext uri="{FF2B5EF4-FFF2-40B4-BE49-F238E27FC236}">
-                <ns2:creationId id="{2FB06A3B-C8A7-7640-2EE9-203EA6BD717B}"/>
+                <a16:creationId xmlns:a16="http://schemas.microsoft.com/office/drawing/2014/main" id="{2FB06A3B-C8A7-7640-2EE9-203EA6BD717B}"/>
               </a:ext>
             </a:extLst>
           </p:cNvPr>
@@ -36765,7 +34466,7 @@
           <p:cNvPr id="19" name="TextBox 18">
             <a:extLst>
               <a:ext uri="{FF2B5EF4-FFF2-40B4-BE49-F238E27FC236}">
-                <ns2:creationId id="{499A2693-D878-2253-1439-ED993C1F2AD5}"/>
+                <a16:creationId xmlns:a16="http://schemas.microsoft.com/office/drawing/2014/main" id="{499A2693-D878-2253-1439-ED993C1F2AD5}"/>
               </a:ext>
             </a:extLst>
           </p:cNvPr>
@@ -36812,7 +34513,7 @@
           <p:cNvPr id="20" name="TextBox 19">
             <a:extLst>
               <a:ext uri="{FF2B5EF4-FFF2-40B4-BE49-F238E27FC236}">
-                <ns2:creationId id="{328F02D2-95BB-4767-7DBC-B06A0A6115E7}"/>
+                <a16:creationId xmlns:a16="http://schemas.microsoft.com/office/drawing/2014/main" id="{328F02D2-95BB-4767-7DBC-B06A0A6115E7}"/>
               </a:ext>
             </a:extLst>
           </p:cNvPr>
@@ -36859,7 +34560,7 @@
           <p:cNvPr id="21" name="TextBox 20">
             <a:extLst>
               <a:ext uri="{FF2B5EF4-FFF2-40B4-BE49-F238E27FC236}">
-                <ns2:creationId id="{5C915F9D-42F7-1C6D-E114-D633D6E4C109}"/>
+                <a16:creationId xmlns:a16="http://schemas.microsoft.com/office/drawing/2014/main" id="{5C915F9D-42F7-1C6D-E114-D633D6E4C109}"/>
               </a:ext>
             </a:extLst>
           </p:cNvPr>
@@ -36906,7 +34607,7 @@
           <p:cNvPr id="22" name="TextBox 21">
             <a:extLst>
               <a:ext uri="{FF2B5EF4-FFF2-40B4-BE49-F238E27FC236}">
-                <ns2:creationId id="{82FA558D-A9BC-01CE-74CD-F383AA8AFB6C}"/>
+                <a16:creationId xmlns:a16="http://schemas.microsoft.com/office/drawing/2014/main" id="{82FA558D-A9BC-01CE-74CD-F383AA8AFB6C}"/>
               </a:ext>
             </a:extLst>
           </p:cNvPr>
@@ -36953,7 +34654,7 @@
           <p:cNvPr id="25" name="Rectangle 24">
             <a:extLst>
               <a:ext uri="{FF2B5EF4-FFF2-40B4-BE49-F238E27FC236}">
-                <ns2:creationId id="{B4DF9014-6E71-4887-15FC-288C0BE2E472}"/>
+                <a16:creationId xmlns:a16="http://schemas.microsoft.com/office/drawing/2014/main" id="{B4DF9014-6E71-4887-15FC-288C0BE2E472}"/>
               </a:ext>
             </a:extLst>
           </p:cNvPr>
@@ -37006,7 +34707,7 @@
           <p:cNvPr id="2" name="Group 1">
             <a:extLst>
               <a:ext uri="{FF2B5EF4-FFF2-40B4-BE49-F238E27FC236}">
-                <ns2:creationId id="{8513F8A2-0C1C-FA83-EB1D-12942054ECC6}"/>
+                <a16:creationId xmlns:a16="http://schemas.microsoft.com/office/drawing/2014/main" id="{8513F8A2-0C1C-FA83-EB1D-12942054ECC6}"/>
               </a:ext>
             </a:extLst>
           </p:cNvPr>
@@ -37015,10 +34716,10 @@
         </p:nvGrpSpPr>
         <p:grpSpPr>
           <a:xfrm>
-            <a:off x="28129" y="1077673"/>
-            <a:ext cx="11664338" cy="5685100"/>
-            <a:chOff x="28129" y="1077673"/>
-            <a:chExt cx="11664338" cy="5685100"/>
+            <a:off x="77020" y="1077673"/>
+            <a:ext cx="11615447" cy="5685100"/>
+            <a:chOff x="77020" y="1077673"/>
+            <a:chExt cx="11615447" cy="5685100"/>
           </a:xfrm>
         </p:grpSpPr>
         <p:cxnSp>
@@ -37026,7 +34727,7 @@
             <p:cNvPr id="3" name="Straight Arrow Connector 2">
               <a:extLst>
                 <a:ext uri="{FF2B5EF4-FFF2-40B4-BE49-F238E27FC236}">
-                  <ns2:creationId id="{F0E8E829-2926-9AC8-8FBE-CD87D209F5BD}"/>
+                  <a16:creationId xmlns:a16="http://schemas.microsoft.com/office/drawing/2014/main" id="{F0E8E829-2926-9AC8-8FBE-CD87D209F5BD}"/>
                 </a:ext>
               </a:extLst>
             </p:cNvPr>
@@ -37070,7 +34771,7 @@
             <p:cNvPr id="4" name="Straight Arrow Connector 3">
               <a:extLst>
                 <a:ext uri="{FF2B5EF4-FFF2-40B4-BE49-F238E27FC236}">
-                  <ns2:creationId id="{D50F6F6C-E0DD-959D-833A-36F07808AC1D}"/>
+                  <a16:creationId xmlns:a16="http://schemas.microsoft.com/office/drawing/2014/main" id="{D50F6F6C-E0DD-959D-833A-36F07808AC1D}"/>
                 </a:ext>
               </a:extLst>
             </p:cNvPr>
@@ -37114,7 +34815,7 @@
             <p:cNvPr id="5" name="TextBox 4">
               <a:extLst>
                 <a:ext uri="{FF2B5EF4-FFF2-40B4-BE49-F238E27FC236}">
-                  <ns2:creationId id="{EDB020C7-9F2F-9DAE-DC6F-0F4AB0106806}"/>
+                  <a16:creationId xmlns:a16="http://schemas.microsoft.com/office/drawing/2014/main" id="{EDB020C7-9F2F-9DAE-DC6F-0F4AB0106806}"/>
                 </a:ext>
               </a:extLst>
             </p:cNvPr>
@@ -37179,7 +34880,7 @@
             <p:cNvPr id="8" name="TextBox 7">
               <a:extLst>
                 <a:ext uri="{FF2B5EF4-FFF2-40B4-BE49-F238E27FC236}">
-                  <ns2:creationId id="{9833DACC-1D55-AD72-1025-41BEFCBBEFC1}"/>
+                  <a16:creationId xmlns:a16="http://schemas.microsoft.com/office/drawing/2014/main" id="{9833DACC-1D55-AD72-1025-41BEFCBBEFC1}"/>
                 </a:ext>
               </a:extLst>
             </p:cNvPr>
@@ -37188,8 +34889,8 @@
           </p:nvSpPr>
           <p:spPr>
             <a:xfrm>
-              <a:off x="28129" y="3162375"/>
-              <a:ext cx="1191352" cy="923330"/>
+              <a:off x="77020" y="3162375"/>
+              <a:ext cx="1093569" cy="646331"/>
             </a:xfrm>
             <a:prstGeom prst="rect">
               <a:avLst/>
@@ -37202,75 +34903,35 @@
             </a:bodyPr>
             <a:lstStyle/>
             <a:p>
-              <a:pPr marL="0" marR="0" lvl="0" indent="0" algn="ctr" defTabSz="914400" rtl="0" eaLnBrk="1" fontAlgn="auto" latinLnBrk="0" hangingPunct="1">
-                <a:lnSpc>
-                  <a:spcPct val="100000"/>
-                </a:lnSpc>
-                <a:spcBef>
-                  <a:spcPts val="0"/>
-                </a:spcBef>
-                <a:spcAft>
-                  <a:spcPts val="0"/>
-                </a:spcAft>
-                <a:buClrTx/>
-                <a:buSzTx/>
-                <a:buFontTx/>
-                <a:buNone/>
-                <a:tabLst/>
+              <a:pPr lvl="0" algn="ctr">
                 <a:defRPr/>
               </a:pPr>
               <a:r>
-                <a:rPr kumimoji="0" lang="en-US" sz="1800" b="0" i="0" u="none" strike="noStrike" kern="1200" cap="none" spc="0" normalizeH="0" baseline="0" noProof="0" dirty="0">
-                  <a:ln>
-                    <a:noFill/>
-                  </a:ln>
+                <a:rPr lang="en-US" dirty="0">
                   <a:solidFill>
                     <a:prstClr val="white"/>
                   </a:solidFill>
-                  <a:effectLst/>
-                  <a:uLnTx/>
-                  <a:uFillTx/>
                   <a:latin typeface="Helvetica Neue" panose="02000503000000020004" pitchFamily="2" charset="0"/>
                   <a:ea typeface="Helvetica Neue" panose="02000503000000020004" pitchFamily="2" charset="0"/>
                   <a:cs typeface="Helvetica Neue" panose="02000503000000020004" pitchFamily="2" charset="0"/>
                 </a:rPr>
-                <a:t>Euclidean</a:t>
+                <a:t>Absolute</a:t>
               </a:r>
             </a:p>
             <a:p>
-              <a:pPr marL="0" marR="0" lvl="0" indent="0" algn="ctr" defTabSz="914400" rtl="0" eaLnBrk="1" fontAlgn="auto" latinLnBrk="0" hangingPunct="1">
-                <a:lnSpc>
-                  <a:spcPct val="100000"/>
-                </a:lnSpc>
-                <a:spcBef>
-                  <a:spcPts val="0"/>
-                </a:spcBef>
-                <a:spcAft>
-                  <a:spcPts val="0"/>
-                </a:spcAft>
-                <a:buClrTx/>
-                <a:buSzTx/>
-                <a:buFontTx/>
-                <a:buNone/>
-                <a:tabLst/>
+              <a:pPr lvl="0" algn="ctr">
                 <a:defRPr/>
               </a:pPr>
               <a:r>
-                <a:rPr kumimoji="0" lang="en-US" sz="1800" b="0" i="0" u="none" strike="noStrike" kern="1200" cap="none" spc="0" normalizeH="0" baseline="0" noProof="0" dirty="0">
-                  <a:ln>
-                    <a:noFill/>
-                  </a:ln>
+                <a:rPr lang="en-US" dirty="0">
                   <a:solidFill>
                     <a:prstClr val="white"/>
                   </a:solidFill>
-                  <a:effectLst/>
-                  <a:uLnTx/>
-                  <a:uFillTx/>
                   <a:latin typeface="Helvetica Neue" panose="02000503000000020004" pitchFamily="2" charset="0"/>
                   <a:ea typeface="Helvetica Neue" panose="02000503000000020004" pitchFamily="2" charset="0"/>
                   <a:cs typeface="Helvetica Neue" panose="02000503000000020004" pitchFamily="2" charset="0"/>
                 </a:rPr>
-                <a:t>Void</a:t>
+                <a:t>Space</a:t>
               </a:r>
             </a:p>
           </p:txBody>
@@ -37279,7 +34940,7 @@
     </p:spTree>
     <p:extLst>
       <p:ext uri="{BB962C8B-B14F-4D97-AF65-F5344CB8AC3E}">
-        <ns3:creationId val="2649229030"/>
+        <p14:creationId xmlns:p14="http://schemas.microsoft.com/office/powerpoint/2010/main" val="2649229030"/>
       </p:ext>
     </p:extLst>
   </p:cSld>
@@ -37585,334 +35246,6 @@
 </file>
 
 <file path=ppt/theme/theme2.xml><?xml version="1.0" encoding="utf-8"?>
-<a:theme xmlns:a="http://schemas.openxmlformats.org/drawingml/2006/main" name="2_Office Theme">
-  <a:themeElements>
-    <a:clrScheme name="Office">
-      <a:dk1>
-        <a:sysClr val="windowText" lastClr="000000"/>
-      </a:dk1>
-      <a:lt1>
-        <a:sysClr val="window" lastClr="FFFFFF"/>
-      </a:lt1>
-      <a:dk2>
-        <a:srgbClr val="44546A"/>
-      </a:dk2>
-      <a:lt2>
-        <a:srgbClr val="E7E6E6"/>
-      </a:lt2>
-      <a:accent1>
-        <a:srgbClr val="4472C4"/>
-      </a:accent1>
-      <a:accent2>
-        <a:srgbClr val="ED7D31"/>
-      </a:accent2>
-      <a:accent3>
-        <a:srgbClr val="A5A5A5"/>
-      </a:accent3>
-      <a:accent4>
-        <a:srgbClr val="FFC000"/>
-      </a:accent4>
-      <a:accent5>
-        <a:srgbClr val="5B9BD5"/>
-      </a:accent5>
-      <a:accent6>
-        <a:srgbClr val="70AD47"/>
-      </a:accent6>
-      <a:hlink>
-        <a:srgbClr val="0563C1"/>
-      </a:hlink>
-      <a:folHlink>
-        <a:srgbClr val="954F72"/>
-      </a:folHlink>
-    </a:clrScheme>
-    <a:fontScheme name="Office">
-      <a:majorFont>
-        <a:latin typeface="Calibri Light" panose="020F0302020204030204"/>
-        <a:ea typeface=""/>
-        <a:cs typeface=""/>
-        <a:font script="Jpan" typeface="游ゴシック Light"/>
-        <a:font script="Hang" typeface="맑은 고딕"/>
-        <a:font script="Hans" typeface="等线 Light"/>
-        <a:font script="Hant" typeface="新細明體"/>
-        <a:font script="Arab" typeface="Times New Roman"/>
-        <a:font script="Hebr" typeface="Times New Roman"/>
-        <a:font script="Thai" typeface="Angsana New"/>
-        <a:font script="Ethi" typeface="Nyala"/>
-        <a:font script="Beng" typeface="Vrinda"/>
-        <a:font script="Gujr" typeface="Shruti"/>
-        <a:font script="Khmr" typeface="MoolBoran"/>
-        <a:font script="Knda" typeface="Tunga"/>
-        <a:font script="Guru" typeface="Raavi"/>
-        <a:font script="Cans" typeface="Euphemia"/>
-        <a:font script="Cher" typeface="Plantagenet Cherokee"/>
-        <a:font script="Yiii" typeface="Microsoft Yi Baiti"/>
-        <a:font script="Tibt" typeface="Microsoft Himalaya"/>
-        <a:font script="Thaa" typeface="MV Boli"/>
-        <a:font script="Deva" typeface="Mangal"/>
-        <a:font script="Telu" typeface="Gautami"/>
-        <a:font script="Taml" typeface="Latha"/>
-        <a:font script="Syrc" typeface="Estrangelo Edessa"/>
-        <a:font script="Orya" typeface="Kalinga"/>
-        <a:font script="Mlym" typeface="Kartika"/>
-        <a:font script="Laoo" typeface="DokChampa"/>
-        <a:font script="Sinh" typeface="Iskoola Pota"/>
-        <a:font script="Mong" typeface="Mongolian Baiti"/>
-        <a:font script="Viet" typeface="Times New Roman"/>
-        <a:font script="Uigh" typeface="Microsoft Uighur"/>
-        <a:font script="Geor" typeface="Sylfaen"/>
-        <a:font script="Armn" typeface="Arial"/>
-        <a:font script="Bugi" typeface="Leelawadee UI"/>
-        <a:font script="Bopo" typeface="Microsoft JhengHei"/>
-        <a:font script="Java" typeface="Javanese Text"/>
-        <a:font script="Lisu" typeface="Segoe UI"/>
-        <a:font script="Mymr" typeface="Myanmar Text"/>
-        <a:font script="Nkoo" typeface="Ebrima"/>
-        <a:font script="Olck" typeface="Nirmala UI"/>
-        <a:font script="Osma" typeface="Ebrima"/>
-        <a:font script="Phag" typeface="Phagspa"/>
-        <a:font script="Syrn" typeface="Estrangelo Edessa"/>
-        <a:font script="Syrj" typeface="Estrangelo Edessa"/>
-        <a:font script="Syre" typeface="Estrangelo Edessa"/>
-        <a:font script="Sora" typeface="Nirmala UI"/>
-        <a:font script="Tale" typeface="Microsoft Tai Le"/>
-        <a:font script="Talu" typeface="Microsoft New Tai Lue"/>
-        <a:font script="Tfng" typeface="Ebrima"/>
-      </a:majorFont>
-      <a:minorFont>
-        <a:latin typeface="Calibri" panose="020F0502020204030204"/>
-        <a:ea typeface=""/>
-        <a:cs typeface=""/>
-        <a:font script="Jpan" typeface="游ゴシック"/>
-        <a:font script="Hang" typeface="맑은 고딕"/>
-        <a:font script="Hans" typeface="等线"/>
-        <a:font script="Hant" typeface="新細明體"/>
-        <a:font script="Arab" typeface="Arial"/>
-        <a:font script="Hebr" typeface="Arial"/>
-        <a:font script="Thai" typeface="Cordia New"/>
-        <a:font script="Ethi" typeface="Nyala"/>
-        <a:font script="Beng" typeface="Vrinda"/>
-        <a:font script="Gujr" typeface="Shruti"/>
-        <a:font script="Khmr" typeface="DaunPenh"/>
-        <a:font script="Knda" typeface="Tunga"/>
-        <a:font script="Guru" typeface="Raavi"/>
-        <a:font script="Cans" typeface="Euphemia"/>
-        <a:font script="Cher" typeface="Plantagenet Cherokee"/>
-        <a:font script="Yiii" typeface="Microsoft Yi Baiti"/>
-        <a:font script="Tibt" typeface="Microsoft Himalaya"/>
-        <a:font script="Thaa" typeface="MV Boli"/>
-        <a:font script="Deva" typeface="Mangal"/>
-        <a:font script="Telu" typeface="Gautami"/>
-        <a:font script="Taml" typeface="Latha"/>
-        <a:font script="Syrc" typeface="Estrangelo Edessa"/>
-        <a:font script="Orya" typeface="Kalinga"/>
-        <a:font script="Mlym" typeface="Kartika"/>
-        <a:font script="Laoo" typeface="DokChampa"/>
-        <a:font script="Sinh" typeface="Iskoola Pota"/>
-        <a:font script="Mong" typeface="Mongolian Baiti"/>
-        <a:font script="Viet" typeface="Arial"/>
-        <a:font script="Uigh" typeface="Microsoft Uighur"/>
-        <a:font script="Geor" typeface="Sylfaen"/>
-        <a:font script="Armn" typeface="Arial"/>
-        <a:font script="Bugi" typeface="Leelawadee UI"/>
-        <a:font script="Bopo" typeface="Microsoft JhengHei"/>
-        <a:font script="Java" typeface="Javanese Text"/>
-        <a:font script="Lisu" typeface="Segoe UI"/>
-        <a:font script="Mymr" typeface="Myanmar Text"/>
-        <a:font script="Nkoo" typeface="Ebrima"/>
-        <a:font script="Olck" typeface="Nirmala UI"/>
-        <a:font script="Osma" typeface="Ebrima"/>
-        <a:font script="Phag" typeface="Phagspa"/>
-        <a:font script="Syrn" typeface="Estrangelo Edessa"/>
-        <a:font script="Syrj" typeface="Estrangelo Edessa"/>
-        <a:font script="Syre" typeface="Estrangelo Edessa"/>
-        <a:font script="Sora" typeface="Nirmala UI"/>
-        <a:font script="Tale" typeface="Microsoft Tai Le"/>
-        <a:font script="Talu" typeface="Microsoft New Tai Lue"/>
-        <a:font script="Tfng" typeface="Ebrima"/>
-      </a:minorFont>
-    </a:fontScheme>
-    <a:fmtScheme name="Office">
-      <a:fillStyleLst>
-        <a:solidFill>
-          <a:schemeClr val="phClr"/>
-        </a:solidFill>
-        <a:gradFill rotWithShape="1">
-          <a:gsLst>
-            <a:gs pos="0">
-              <a:schemeClr val="phClr">
-                <a:lumMod val="110000"/>
-                <a:satMod val="105000"/>
-                <a:tint val="67000"/>
-              </a:schemeClr>
-            </a:gs>
-            <a:gs pos="50000">
-              <a:schemeClr val="phClr">
-                <a:lumMod val="105000"/>
-                <a:satMod val="103000"/>
-                <a:tint val="73000"/>
-              </a:schemeClr>
-            </a:gs>
-            <a:gs pos="100000">
-              <a:schemeClr val="phClr">
-                <a:lumMod val="105000"/>
-                <a:satMod val="109000"/>
-                <a:tint val="81000"/>
-              </a:schemeClr>
-            </a:gs>
-          </a:gsLst>
-          <a:lin ang="5400000" scaled="0"/>
-        </a:gradFill>
-        <a:gradFill rotWithShape="1">
-          <a:gsLst>
-            <a:gs pos="0">
-              <a:schemeClr val="phClr">
-                <a:satMod val="103000"/>
-                <a:lumMod val="102000"/>
-                <a:tint val="94000"/>
-              </a:schemeClr>
-            </a:gs>
-            <a:gs pos="50000">
-              <a:schemeClr val="phClr">
-                <a:satMod val="110000"/>
-                <a:lumMod val="100000"/>
-                <a:shade val="100000"/>
-              </a:schemeClr>
-            </a:gs>
-            <a:gs pos="100000">
-              <a:schemeClr val="phClr">
-                <a:lumMod val="99000"/>
-                <a:satMod val="120000"/>
-                <a:shade val="78000"/>
-              </a:schemeClr>
-            </a:gs>
-          </a:gsLst>
-          <a:lin ang="5400000" scaled="0"/>
-        </a:gradFill>
-      </a:fillStyleLst>
-      <a:lnStyleLst>
-        <a:ln w="6350" cap="flat" cmpd="sng" algn="ctr">
-          <a:solidFill>
-            <a:schemeClr val="phClr"/>
-          </a:solidFill>
-          <a:prstDash val="solid"/>
-          <a:miter lim="800000"/>
-        </a:ln>
-        <a:ln w="12700" cap="flat" cmpd="sng" algn="ctr">
-          <a:solidFill>
-            <a:schemeClr val="phClr"/>
-          </a:solidFill>
-          <a:prstDash val="solid"/>
-          <a:miter lim="800000"/>
-        </a:ln>
-        <a:ln w="19050" cap="flat" cmpd="sng" algn="ctr">
-          <a:solidFill>
-            <a:schemeClr val="phClr"/>
-          </a:solidFill>
-          <a:prstDash val="solid"/>
-          <a:miter lim="800000"/>
-        </a:ln>
-      </a:lnStyleLst>
-      <a:effectStyleLst>
-        <a:effectStyle>
-          <a:effectLst/>
-        </a:effectStyle>
-        <a:effectStyle>
-          <a:effectLst/>
-        </a:effectStyle>
-        <a:effectStyle>
-          <a:effectLst>
-            <a:outerShdw blurRad="57150" dist="19050" dir="5400000" algn="ctr" rotWithShape="0">
-              <a:srgbClr val="000000">
-                <a:alpha val="63000"/>
-              </a:srgbClr>
-            </a:outerShdw>
-          </a:effectLst>
-        </a:effectStyle>
-      </a:effectStyleLst>
-      <a:bgFillStyleLst>
-        <a:solidFill>
-          <a:schemeClr val="phClr"/>
-        </a:solidFill>
-        <a:solidFill>
-          <a:schemeClr val="phClr">
-            <a:tint val="95000"/>
-            <a:satMod val="170000"/>
-          </a:schemeClr>
-        </a:solidFill>
-        <a:gradFill rotWithShape="1">
-          <a:gsLst>
-            <a:gs pos="0">
-              <a:schemeClr val="phClr">
-                <a:tint val="93000"/>
-                <a:satMod val="150000"/>
-                <a:shade val="98000"/>
-                <a:lumMod val="102000"/>
-              </a:schemeClr>
-            </a:gs>
-            <a:gs pos="50000">
-              <a:schemeClr val="phClr">
-                <a:tint val="98000"/>
-                <a:satMod val="130000"/>
-                <a:shade val="90000"/>
-                <a:lumMod val="103000"/>
-              </a:schemeClr>
-            </a:gs>
-            <a:gs pos="100000">
-              <a:schemeClr val="phClr">
-                <a:shade val="63000"/>
-                <a:satMod val="120000"/>
-              </a:schemeClr>
-            </a:gs>
-          </a:gsLst>
-          <a:lin ang="5400000" scaled="0"/>
-        </a:gradFill>
-      </a:bgFillStyleLst>
-    </a:fmtScheme>
-  </a:themeElements>
-  <a:objectDefaults>
-    <a:spDef>
-      <a:spPr/>
-      <a:bodyPr wrap="none">
-        <a:spAutoFit/>
-      </a:bodyPr>
-      <a:lstStyle>
-        <a:defPPr algn="l">
-          <a:defRPr sz="2400" dirty="0" smtClean="0">
-            <a:latin typeface="Helvetica Neue" panose="02000503000000020004" pitchFamily="2" charset="0"/>
-            <a:ea typeface="Helvetica Neue" panose="02000503000000020004" pitchFamily="2" charset="0"/>
-            <a:cs typeface="Helvetica Neue" panose="02000503000000020004" pitchFamily="2" charset="0"/>
-          </a:defRPr>
-        </a:defPPr>
-      </a:lstStyle>
-    </a:spDef>
-    <a:txDef>
-      <a:spPr>
-        <a:noFill/>
-      </a:spPr>
-      <a:bodyPr wrap="none" rtlCol="0">
-        <a:spAutoFit/>
-      </a:bodyPr>
-      <a:lstStyle>
-        <a:defPPr algn="l">
-          <a:defRPr dirty="0" smtClean="0">
-            <a:latin typeface="Helvetica Neue" panose="02000503000000020004" pitchFamily="2" charset="0"/>
-            <a:ea typeface="Helvetica Neue" panose="02000503000000020004" pitchFamily="2" charset="0"/>
-            <a:cs typeface="Helvetica Neue" panose="02000503000000020004" pitchFamily="2" charset="0"/>
-          </a:defRPr>
-        </a:defPPr>
-      </a:lstStyle>
-    </a:txDef>
-  </a:objectDefaults>
-  <a:extraClrSchemeLst/>
-  <a:extLst>
-    <a:ext uri="{05A4C25C-085E-4340-85A3-A5531E510DB2}">
-      <thm15:themeFamily xmlns:thm15="http://schemas.microsoft.com/office/thememl/2012/main" name="Office Theme" id="{62F939B6-93AF-4DB8-9C6B-D6C7DFDC589F}" vid="{4A3C46E8-61CC-4603-A589-7422A47A8E4A}"/>
-    </a:ext>
-  </a:extLst>
-</a:theme>
-</file>
-
-<file path=ppt/theme/theme3.xml><?xml version="1.0" encoding="utf-8"?>
 <a:theme xmlns:a="http://schemas.openxmlformats.org/drawingml/2006/main" name="Office Theme">
   <a:themeElements>
     <a:clrScheme name="Office">

--- a/reference/archie/presentations/NPQG Fundamentals - Paths.pptx
+++ b/reference/archie/presentations/NPQG Fundamentals - Paths.pptx
@@ -553,55 +553,37 @@
           <a:bodyPr/>
           <a:lstStyle/>
           <a:p>
-            <a:r>
-              <a:rPr lang="en-US" dirty="0"/>
-              <a:t>Hi. Welcome to this episode of Emergent Nature. </a:t>
-            </a:r>
+            <a:endParaRPr/>
           </a:p>
           <a:p>
             <a:endParaRPr lang="en-US" dirty="0"/>
           </a:p>
           <a:p>
-            <a:r>
-              <a:rPr lang="en-US" dirty="0"/>
-              <a:t>My name is J Mark Morris. I go by Mark.</a:t>
-            </a:r>
-          </a:p>
-          <a:p>
             <a:endParaRPr lang="en-US" dirty="0"/>
           </a:p>
           <a:p>
-            <a:r>
-              <a:rPr lang="en-US" dirty="0"/>
-              <a:t>In this episode I’ll discuss the error that caused science to go off track into general relativity and quantum mechanics.</a:t>
-            </a:r>
-          </a:p>
-          <a:p>
             <a:endParaRPr lang="en-US" dirty="0"/>
           </a:p>
           <a:p>
-            <a:r>
-              <a:rPr lang="en-US" dirty="0"/>
-              <a:t>That may seem like an unusual thing to say, since general relativity and quantum theory are generally considered to be successful effective theories.</a:t>
-            </a:r>
-          </a:p>
-          <a:p>
             <a:endParaRPr lang="en-US" dirty="0"/>
           </a:p>
           <a:p>
-            <a:r>
-              <a:rPr lang="en-US" dirty="0"/>
-              <a:t>However, as we will see, an error circa 1900 threw science off track.</a:t>
-            </a:r>
-          </a:p>
-          <a:p>
             <a:endParaRPr lang="en-US" dirty="0"/>
           </a:p>
           <a:p>
-            <a:r>
-              <a:rPr lang="en-US" dirty="0"/>
-              <a:t>There is a parsimonious solution to nature.</a:t>
-            </a:r>
+            <a:endParaRPr lang="en-US" dirty="0"/>
+          </a:p>
+          <a:p>
+            <a:endParaRPr lang="en-US" dirty="0"/>
+          </a:p>
+          <a:p>
+            <a:endParaRPr lang="en-US" dirty="0"/>
+          </a:p>
+          <a:p>
+            <a:endParaRPr lang="en-US" dirty="0"/>
+          </a:p>
+          <a:p>
+            <a:endParaRPr lang="en-US" dirty="0"/>
           </a:p>
           <a:p>
             <a:endParaRPr lang="en-US" dirty="0"/>
@@ -774,14 +756,6 @@
               <a:tabLst/>
               <a:defRPr/>
             </a:pPr>
-            <a:r>
-              <a:rPr lang="en-US" sz="9600" b="1" dirty="0">
-                <a:latin typeface="Helvetica Neue" panose="02000503000000020004" pitchFamily="2" charset="0"/>
-                <a:ea typeface="Helvetica Neue" panose="02000503000000020004" pitchFamily="2" charset="0"/>
-                <a:cs typeface="Helvetica Neue" panose="02000503000000020004" pitchFamily="2" charset="0"/>
-              </a:rPr>
-              <a:t>The tracer circles represent spheres in 3D absolute represent the 3D spatial length of the radius.  </a:t>
-            </a:r>
             <a:br>
               <a:rPr lang="en-US" sz="9600" b="1" dirty="0">
                 <a:latin typeface="Helvetica Neue" panose="02000503000000020004" pitchFamily="2" charset="0"/>
@@ -789,14 +763,6 @@
                 <a:cs typeface="Helvetica Neue" panose="02000503000000020004" pitchFamily="2" charset="0"/>
               </a:rPr>
             </a:br>
-            <a:r>
-              <a:rPr lang="en-US" sz="9600" b="1" dirty="0">
-                <a:latin typeface="Helvetica Neue" panose="02000503000000020004" pitchFamily="2" charset="0"/>
-                <a:ea typeface="Helvetica Neue" panose="02000503000000020004" pitchFamily="2" charset="0"/>
-                <a:cs typeface="Helvetica Neue" panose="02000503000000020004" pitchFamily="2" charset="0"/>
-              </a:rPr>
-              <a:t>The  forward tilt of all arrows represents absolute time. </a:t>
-            </a:r>
             <a:br>
               <a:rPr lang="en-US" sz="9600" b="1" dirty="0">
                 <a:latin typeface="Helvetica Neue" panose="02000503000000020004" pitchFamily="2" charset="0"/>
@@ -804,14 +770,6 @@
                 <a:cs typeface="Helvetica Neue" panose="02000503000000020004" pitchFamily="2" charset="0"/>
               </a:rPr>
             </a:br>
-            <a:r>
-              <a:rPr lang="en-US" sz="9600" b="1" dirty="0">
-                <a:latin typeface="Helvetica Neue" panose="02000503000000020004" pitchFamily="2" charset="0"/>
-                <a:ea typeface="Helvetica Neue" panose="02000503000000020004" pitchFamily="2" charset="0"/>
-                <a:cs typeface="Helvetica Neue" panose="02000503000000020004" pitchFamily="2" charset="0"/>
-              </a:rPr>
-              <a:t>Essentially every architrino is continuously riding on the wake emitted by every other architrino in the past.  </a:t>
-            </a:r>
             <a:br>
               <a:rPr lang="en-US" sz="9600" b="1" dirty="0">
                 <a:latin typeface="Helvetica Neue" panose="02000503000000020004" pitchFamily="2" charset="0"/>
@@ -819,30 +777,6 @@
                 <a:cs typeface="Helvetica Neue" panose="02000503000000020004" pitchFamily="2" charset="0"/>
               </a:rPr>
             </a:br>
-            <a:r>
-              <a:rPr lang="en-US" sz="9600" b="1" baseline="0" dirty="0">
-                <a:latin typeface="Helvetica Neue" panose="02000503000000020004" pitchFamily="2" charset="0"/>
-                <a:ea typeface="Helvetica Neue" panose="02000503000000020004" pitchFamily="2" charset="0"/>
-                <a:cs typeface="Helvetica Neue" panose="02000503000000020004" pitchFamily="2" charset="0"/>
-              </a:rPr>
-              <a:t>They may also be riding on their own wake if v &gt; c</a:t>
-            </a:r>
-            <a:r>
-              <a:rPr lang="en-US" sz="6720" b="1" baseline="-25000" dirty="0">
-                <a:latin typeface="Helvetica Neue" panose="02000503000000020004" pitchFamily="2" charset="0"/>
-                <a:ea typeface="Helvetica Neue" panose="02000503000000020004" pitchFamily="2" charset="0"/>
-                <a:cs typeface="Helvetica Neue" panose="02000503000000020004" pitchFamily="2" charset="0"/>
-              </a:rPr>
-              <a:t>f</a:t>
-            </a:r>
-            <a:r>
-              <a:rPr lang="en-US" sz="9600" b="1" baseline="0" dirty="0">
-                <a:latin typeface="Helvetica Neue" panose="02000503000000020004" pitchFamily="2" charset="0"/>
-                <a:ea typeface="Helvetica Neue" panose="02000503000000020004" pitchFamily="2" charset="0"/>
-                <a:cs typeface="Helvetica Neue" panose="02000503000000020004" pitchFamily="2" charset="0"/>
-              </a:rPr>
-              <a:t>. </a:t>
-            </a:r>
             <a:br>
               <a:rPr lang="en-US" sz="9600" b="1" dirty="0">
                 <a:latin typeface="Helvetica Neue" panose="02000503000000020004" pitchFamily="2" charset="0"/>
@@ -850,30 +784,6 @@
                 <a:cs typeface="Helvetica Neue" panose="02000503000000020004" pitchFamily="2" charset="0"/>
               </a:rPr>
             </a:br>
-            <a:r>
-              <a:rPr lang="en-US" sz="9600" b="1" baseline="0" dirty="0">
-                <a:latin typeface="Helvetica Neue" panose="02000503000000020004" pitchFamily="2" charset="0"/>
-                <a:ea typeface="Helvetica Neue" panose="02000503000000020004" pitchFamily="2" charset="0"/>
-                <a:cs typeface="Helvetica Neue" panose="02000503000000020004" pitchFamily="2" charset="0"/>
-              </a:rPr>
-              <a:t>For each partner that has operated at v&gt;c</a:t>
-            </a:r>
-            <a:r>
-              <a:rPr lang="en-US" sz="6720" b="1" baseline="-25000" dirty="0">
-                <a:latin typeface="Helvetica Neue" panose="02000503000000020004" pitchFamily="2" charset="0"/>
-                <a:ea typeface="Helvetica Neue" panose="02000503000000020004" pitchFamily="2" charset="0"/>
-                <a:cs typeface="Helvetica Neue" panose="02000503000000020004" pitchFamily="2" charset="0"/>
-              </a:rPr>
-              <a:t>f</a:t>
-            </a:r>
-            <a:r>
-              <a:rPr lang="en-US" sz="9600" b="1" baseline="0" dirty="0">
-                <a:latin typeface="Helvetica Neue" panose="02000503000000020004" pitchFamily="2" charset="0"/>
-                <a:ea typeface="Helvetica Neue" panose="02000503000000020004" pitchFamily="2" charset="0"/>
-                <a:cs typeface="Helvetica Neue" panose="02000503000000020004" pitchFamily="2" charset="0"/>
-              </a:rPr>
-              <a:t> a architrino may encounter multiple of their wakes or a continuous stretch of wake?  </a:t>
-            </a:r>
             <a:br>
               <a:rPr lang="en-US" sz="9600" b="1" dirty="0">
                 <a:latin typeface="Helvetica Neue" panose="02000503000000020004" pitchFamily="2" charset="0"/>
@@ -881,14 +791,11 @@
                 <a:cs typeface="Helvetica Neue" panose="02000503000000020004" pitchFamily="2" charset="0"/>
               </a:rPr>
             </a:br>
-            <a:r>
-              <a:rPr lang="en-US" sz="9600" b="1" dirty="0">
-                <a:latin typeface="Helvetica Neue" panose="02000503000000020004" pitchFamily="2" charset="0"/>
-                <a:ea typeface="Helvetica Neue" panose="02000503000000020004" pitchFamily="2" charset="0"/>
-                <a:cs typeface="Helvetica Neue" panose="02000503000000020004" pitchFamily="2" charset="0"/>
-              </a:rPr>
-              <a:t>What path would yield a continuous stretch of wake from a partner?</a:t>
-            </a:r>
+            <a:endParaRPr lang="en-US" sz="9600" b="1" dirty="0">
+              <a:latin typeface="Helvetica Neue" panose="02000503000000020004" pitchFamily="2" charset="0"/>
+              <a:ea typeface="Helvetica Neue" panose="02000503000000020004" pitchFamily="2" charset="0"/>
+              <a:cs typeface="Helvetica Neue" panose="02000503000000020004" pitchFamily="2" charset="0"/>
+            </a:endParaRPr>
           </a:p>
         </p:txBody>
       </p:sp>
@@ -1202,34 +1109,7 @@
                 <a:spcPts val="0"/>
               </a:spcAft>
             </a:pPr>
-            <a:r>
-              <a:rPr lang="en-US" sz="1800" dirty="0" err="1">
-                <a:effectLst/>
-                <a:latin typeface="Helvetica Neue" panose="02000503000000020004" pitchFamily="2" charset="0"/>
-              </a:rPr>
-              <a:t>Lienard</a:t>
-            </a:r>
-            <a:r>
-              <a:rPr lang="en-US" sz="1800" dirty="0">
-                <a:effectLst/>
-                <a:latin typeface="Helvetica Neue" panose="02000503000000020004" pitchFamily="2" charset="0"/>
-              </a:rPr>
-              <a:t> and </a:t>
-            </a:r>
-            <a:r>
-              <a:rPr lang="en-US" sz="1800" dirty="0" err="1">
-                <a:effectLst/>
-                <a:latin typeface="Helvetica Neue" panose="02000503000000020004" pitchFamily="2" charset="0"/>
-              </a:rPr>
-              <a:t>Wiechert</a:t>
-            </a:r>
-            <a:r>
-              <a:rPr lang="en-US" sz="1800" dirty="0">
-                <a:effectLst/>
-                <a:latin typeface="Helvetica Neue" panose="02000503000000020004" pitchFamily="2" charset="0"/>
-              </a:rPr>
-              <a:t> were scientists.</a:t>
-            </a:r>
+            <a:endParaRPr/>
           </a:p>
           <a:p>
             <a:pPr marL="0" marR="0" rtl="0">
@@ -1240,13 +1120,7 @@
                 <a:spcPts val="0"/>
               </a:spcAft>
             </a:pPr>
-            <a:r>
-              <a:rPr lang="en-US" sz="1800" dirty="0">
-                <a:effectLst/>
-                <a:latin typeface="Helvetica Neue" panose="02000503000000020004" pitchFamily="2" charset="0"/>
-              </a:rPr>
-              <a:t>Among the areas they each researched were point charges, the paths of point charges, the history of the potential emitted by point charges, and the action on point charges when potential intersects with them.</a:t>
-            </a:r>
+            <a:endParaRPr/>
           </a:p>
           <a:p>
             <a:pPr marL="0" marR="0" rtl="0">
@@ -1257,13 +1131,7 @@
                 <a:spcPts val="0"/>
               </a:spcAft>
             </a:pPr>
-            <a:r>
-              <a:rPr lang="en-US" sz="1800" dirty="0">
-                <a:effectLst/>
-                <a:latin typeface="Helvetica Neue" panose="02000503000000020004" pitchFamily="2" charset="0"/>
-              </a:rPr>
-              <a:t>Shown in this figure are two point charges A and B.</a:t>
-            </a:r>
+            <a:endParaRPr/>
           </a:p>
           <a:p>
             <a:pPr marL="0" marR="0" rtl="0">
@@ -1274,13 +1142,7 @@
                 <a:spcPts val="0"/>
               </a:spcAft>
             </a:pPr>
-            <a:r>
-              <a:rPr lang="en-US" sz="1800" dirty="0">
-                <a:effectLst/>
-                <a:latin typeface="Helvetica Neue" panose="02000503000000020004" pitchFamily="2" charset="0"/>
-              </a:rPr>
-              <a:t>They move around through space and time on a path.</a:t>
-            </a:r>
+            <a:endParaRPr/>
           </a:p>
           <a:p>
             <a:pPr marL="0" marR="0" rtl="0">
@@ -1291,13 +1153,7 @@
                 <a:spcPts val="0"/>
               </a:spcAft>
             </a:pPr>
-            <a:r>
-              <a:rPr lang="en-US" sz="1800" dirty="0">
-                <a:effectLst/>
-                <a:latin typeface="Helvetica Neue" panose="02000503000000020004" pitchFamily="2" charset="0"/>
-              </a:rPr>
-              <a:t>That movement is due to the action upon those point charges from all intersecting potential waves.</a:t>
-            </a:r>
+            <a:endParaRPr/>
           </a:p>
           <a:p>
             <a:pPr marL="0" marR="0" rtl="0">
@@ -1308,13 +1164,7 @@
                 <a:spcPts val="0"/>
               </a:spcAft>
             </a:pPr>
-            <a:r>
-              <a:rPr lang="en-US" sz="1800" dirty="0">
-                <a:effectLst/>
-                <a:latin typeface="Helvetica Neue" panose="02000503000000020004" pitchFamily="2" charset="0"/>
-              </a:rPr>
-              <a:t>Let's start by looking at the influence that point architrino A has on point architrino B at time t.</a:t>
-            </a:r>
+            <a:endParaRPr/>
           </a:p>
           <a:p>
             <a:pPr marL="0" marR="0" rtl="0">
@@ -1325,13 +1175,7 @@
                 <a:spcPts val="0"/>
               </a:spcAft>
             </a:pPr>
-            <a:r>
-              <a:rPr lang="en-US" sz="1800" dirty="0">
-                <a:effectLst/>
-                <a:latin typeface="Helvetica Neue" panose="02000503000000020004" pitchFamily="2" charset="0"/>
-              </a:rPr>
-              <a:t>What we see is that at time t', point architrino A has emitted potential that expands spherically and intersects point architrino B at time t.</a:t>
-            </a:r>
+            <a:endParaRPr/>
           </a:p>
           <a:p>
             <a:pPr marL="0" marR="0" rtl="0">
@@ -1342,13 +1186,7 @@
                 <a:spcPts val="0"/>
               </a:spcAft>
             </a:pPr>
-            <a:r>
-              <a:rPr lang="en-US" sz="1800" dirty="0">
-                <a:effectLst/>
-                <a:latin typeface="Helvetica Neue" panose="02000503000000020004" pitchFamily="2" charset="0"/>
-              </a:rPr>
-              <a:t>The radius of a spherical potential wave increases at the universal constant field speed, which I have given the at sign symbol. </a:t>
-            </a:r>
+            <a:endParaRPr/>
           </a:p>
           <a:p>
             <a:pPr marL="0" marR="0" rtl="0">
@@ -1359,13 +1197,7 @@
                 <a:spcPts val="0"/>
               </a:spcAft>
             </a:pPr>
-            <a:r>
-              <a:rPr lang="en-US" sz="1800" dirty="0">
-                <a:effectLst/>
-                <a:latin typeface="Helvetica Neue" panose="02000503000000020004" pitchFamily="2" charset="0"/>
-              </a:rPr>
-              <a:t>The speed of potential is not the same as the speed of light, c, although they are related, which will be explained in a future episode.</a:t>
-            </a:r>
+            <a:endParaRPr/>
           </a:p>
           <a:p>
             <a:pPr marL="0" marR="0" rtl="0">
@@ -1376,13 +1208,7 @@
                 <a:spcPts val="0"/>
               </a:spcAft>
             </a:pPr>
-            <a:r>
-              <a:rPr lang="en-US" sz="1800" dirty="0">
-                <a:effectLst/>
-                <a:latin typeface="Helvetica Neue" panose="02000503000000020004" pitchFamily="2" charset="0"/>
-              </a:rPr>
-              <a:t>What we see is that there is a delay. It's not that the current position of A impacts B at time t.</a:t>
-            </a:r>
+            <a:endParaRPr/>
           </a:p>
           <a:p>
             <a:pPr marL="0" marR="0" rtl="0">
@@ -1393,13 +1219,7 @@
                 <a:spcPts val="0"/>
               </a:spcAft>
             </a:pPr>
-            <a:r>
-              <a:rPr lang="en-US" sz="1800" dirty="0">
-                <a:effectLst/>
-                <a:latin typeface="Helvetica Neue" panose="02000503000000020004" pitchFamily="2" charset="0"/>
-              </a:rPr>
-              <a:t>Rather it is a historical position on A's path where A emitted potential that now intersects B at time t. </a:t>
-            </a:r>
+            <a:endParaRPr/>
           </a:p>
           <a:p>
             <a:pPr marL="0" marR="0" rtl="0">
@@ -1410,13 +1230,7 @@
                 <a:spcPts val="0"/>
               </a:spcAft>
             </a:pPr>
-            <a:r>
-              <a:rPr lang="en-US" sz="1800" dirty="0">
-                <a:effectLst/>
-                <a:latin typeface="Helvetica Neue" panose="02000503000000020004" pitchFamily="2" charset="0"/>
-              </a:rPr>
-              <a:t>The distance between A(t') and B(t) is given by field speed multiplied by the time difference between t' and t.</a:t>
-            </a:r>
+            <a:endParaRPr/>
           </a:p>
           <a:p>
             <a:pPr marL="0" marR="0" rtl="0">
@@ -1427,13 +1241,7 @@
                 <a:spcPts val="0"/>
               </a:spcAft>
             </a:pPr>
-            <a:r>
-              <a:rPr lang="en-US" sz="1800" dirty="0">
-                <a:effectLst/>
-                <a:latin typeface="Helvetica Neue" panose="02000503000000020004" pitchFamily="2" charset="0"/>
-              </a:rPr>
-              <a:t>Action occurs when a potential wave intersects a point charge and this influences the future path of point charge. </a:t>
-            </a:r>
+            <a:endParaRPr/>
           </a:p>
           <a:p>
             <a:pPr marL="0" marR="0" rtl="0">
@@ -1444,13 +1252,7 @@
                 <a:spcPts val="0"/>
               </a:spcAft>
             </a:pPr>
-            <a:r>
-              <a:rPr lang="en-US" sz="1800" dirty="0">
-                <a:effectLst/>
-                <a:latin typeface="Helvetica Neue" panose="02000503000000020004" pitchFamily="2" charset="0"/>
-              </a:rPr>
-              <a:t>This action is not only a function of the distance between A(t') and B(t), but also the velocity of A at time t' and the velocity of B at time t.</a:t>
-            </a:r>
+            <a:endParaRPr/>
           </a:p>
           <a:p>
             <a:pPr marL="0" marR="0" rtl="0">
@@ -1461,27 +1263,7 @@
                 <a:spcPts val="0"/>
               </a:spcAft>
             </a:pPr>
-            <a:r>
-              <a:rPr lang="en-US" sz="1800" dirty="0">
-                <a:effectLst/>
-                <a:latin typeface="Helvetica Neue" panose="02000503000000020004" pitchFamily="2" charset="0"/>
-              </a:rPr>
-              <a:t>This system evolves as a dynamical geometry. This is true whether it is two </a:t>
-            </a:r>
-            <a:r>
-              <a:rPr lang="en-US" sz="1800" dirty="0" err="1">
-                <a:effectLst/>
-                <a:latin typeface="Helvetica Neue" panose="02000503000000020004" pitchFamily="2" charset="0"/>
-              </a:rPr>
-              <a:t>isoloated</a:t>
-            </a:r>
-            <a:r>
-              <a:rPr lang="en-US" sz="1800" dirty="0">
-                <a:effectLst/>
-                <a:latin typeface="Helvetica Neue" panose="02000503000000020004" pitchFamily="2" charset="0"/>
-              </a:rPr>
-              <a:t> point charges or all point charges in the universe, even if that is a countably infinite number of point charges.</a:t>
-            </a:r>
+            <a:endParaRPr/>
           </a:p>
           <a:p>
             <a:pPr marL="0" marR="0" rtl="0">
@@ -1492,13 +1274,7 @@
                 <a:spcPts val="0"/>
               </a:spcAft>
             </a:pPr>
-            <a:r>
-              <a:rPr lang="en-US" sz="1800" dirty="0">
-                <a:effectLst/>
-                <a:latin typeface="Helvetica Neue" panose="02000503000000020004" pitchFamily="2" charset="0"/>
-              </a:rPr>
-              <a:t>There are some fascinating behaviors in this dynamical geometry. </a:t>
-            </a:r>
+            <a:endParaRPr/>
           </a:p>
           <a:p>
             <a:pPr marL="0" marR="0" rtl="0">
@@ -1509,13 +1285,7 @@
                 <a:spcPts val="0"/>
               </a:spcAft>
             </a:pPr>
-            <a:r>
-              <a:rPr lang="en-US" sz="1800" dirty="0">
-                <a:effectLst/>
-                <a:latin typeface="Helvetica Neue" panose="02000503000000020004" pitchFamily="2" charset="0"/>
-              </a:rPr>
-              <a:t>Each point charge is continuously emitting a potential wave that expands spherically.</a:t>
-            </a:r>
+            <a:endParaRPr/>
           </a:p>
           <a:p>
             <a:pPr marL="0" marR="0" rtl="0">
@@ -1526,13 +1296,7 @@
                 <a:spcPts val="0"/>
               </a:spcAft>
             </a:pPr>
-            <a:r>
-              <a:rPr lang="en-US" sz="1800" dirty="0">
-                <a:effectLst/>
-                <a:latin typeface="Helvetica Neue" panose="02000503000000020004" pitchFamily="2" charset="0"/>
-              </a:rPr>
-              <a:t>In our example, point architrino A emitted a potential wave at time t' that resulted in action on point architrino B at time t. That action influences B's path. Yet B is also continuously emitting potential. So when B's path changes that will be reflected in the potential wave it emits. This wave then results in action on point architrino A when they intersect. This dynamical feedback is continuous between both point charges in our example, and in the universe between all point charges.  </a:t>
-            </a:r>
+            <a:endParaRPr/>
           </a:p>
           <a:p>
             <a:pPr marL="0" marR="0" rtl="0">
@@ -1543,13 +1307,7 @@
                 <a:spcPts val="0"/>
               </a:spcAft>
             </a:pPr>
-            <a:r>
-              <a:rPr lang="en-US" sz="1800" dirty="0">
-                <a:effectLst/>
-                <a:latin typeface="Helvetica Neue" panose="02000503000000020004" pitchFamily="2" charset="0"/>
-              </a:rPr>
-              <a:t>Overall, this dynamical geometry mirrors Mach's principle, but with charge instead of mass.  </a:t>
-            </a:r>
+            <a:endParaRPr/>
           </a:p>
           <a:p>
             <a:pPr marL="0" marR="0" rtl="0">
@@ -1560,13 +1318,7 @@
                 <a:spcPts val="0"/>
               </a:spcAft>
             </a:pPr>
-            <a:r>
-              <a:rPr lang="en-US" sz="1800" dirty="0">
-                <a:effectLst/>
-                <a:latin typeface="Helvetica Neue" panose="02000503000000020004" pitchFamily="2" charset="0"/>
-              </a:rPr>
-              <a:t>Point charges continuously emit potential that expands spherically. </a:t>
-            </a:r>
+            <a:endParaRPr/>
           </a:p>
           <a:p>
             <a:pPr marL="0" marR="0" rtl="0">
@@ -1577,13 +1329,7 @@
                 <a:spcPts val="0"/>
               </a:spcAft>
             </a:pPr>
-            <a:r>
-              <a:rPr lang="en-US" sz="1800" dirty="0">
-                <a:effectLst/>
-                <a:latin typeface="Helvetica Neue" panose="02000503000000020004" pitchFamily="2" charset="0"/>
-              </a:rPr>
-              <a:t>Intersecting spherical potential waves tell point charges how to move.</a:t>
-            </a:r>
+            <a:endParaRPr/>
           </a:p>
           <a:p>
             <a:pPr marL="0" marR="0" rtl="0">
@@ -1594,13 +1340,7 @@
                 <a:spcPts val="0"/>
               </a:spcAft>
             </a:pPr>
-            <a:r>
-              <a:rPr lang="en-US" sz="1800" dirty="0">
-                <a:effectLst/>
-                <a:latin typeface="Helvetica Neue" panose="02000503000000020004" pitchFamily="2" charset="0"/>
-              </a:rPr>
-              <a:t>In our example we have shown the relationship between two point charges, but it is also possible for self-action to occur, where a point charge responds to potential it emitted on its own past path history. We'll cover this topic in detail in a future episode.</a:t>
-            </a:r>
+            <a:endParaRPr/>
           </a:p>
           <a:p>
             <a:pPr marL="0" marR="0" rtl="0">
@@ -1611,13 +1351,7 @@
                 <a:spcPts val="0"/>
               </a:spcAft>
             </a:pPr>
-            <a:r>
-              <a:rPr lang="en-US" sz="1800" dirty="0">
-                <a:effectLst/>
-                <a:latin typeface="Helvetica Neue" panose="02000503000000020004" pitchFamily="2" charset="0"/>
-              </a:rPr>
-              <a:t> </a:t>
-            </a:r>
+            <a:endParaRPr/>
           </a:p>
           <a:p>
             <a:pPr marL="0" marR="0" rtl="0">
@@ -1628,13 +1362,7 @@
                 <a:spcPts val="0"/>
               </a:spcAft>
             </a:pPr>
-            <a:r>
-              <a:rPr lang="en-US" sz="1800" dirty="0">
-                <a:effectLst/>
-                <a:latin typeface="Helvetica Neue" panose="02000503000000020004" pitchFamily="2" charset="0"/>
-              </a:rPr>
-              <a:t> </a:t>
-            </a:r>
+            <a:endParaRPr/>
           </a:p>
           <a:p>
             <a:pPr marL="0" marR="0" rtl="0">
@@ -1645,13 +1373,7 @@
                 <a:spcPts val="0"/>
               </a:spcAft>
             </a:pPr>
-            <a:r>
-              <a:rPr lang="en-US" sz="1800" dirty="0">
-                <a:effectLst/>
-                <a:latin typeface="Helvetica Neue" panose="02000503000000020004" pitchFamily="2" charset="0"/>
-              </a:rPr>
-              <a:t> </a:t>
-            </a:r>
+            <a:endParaRPr/>
           </a:p>
           <a:p>
             <a:pPr marL="0" marR="0" rtl="0">
@@ -1662,13 +1384,7 @@
                 <a:spcPts val="0"/>
               </a:spcAft>
             </a:pPr>
-            <a:r>
-              <a:rPr lang="en-US" sz="1800" dirty="0">
-                <a:effectLst/>
-                <a:latin typeface="Helvetica Neue" panose="02000503000000020004" pitchFamily="2" charset="0"/>
-              </a:rPr>
-              <a:t> </a:t>
-            </a:r>
+            <a:endParaRPr/>
           </a:p>
           <a:p>
             <a:pPr marL="0" marR="0" rtl="0">
@@ -1679,13 +1395,7 @@
                 <a:spcPts val="0"/>
               </a:spcAft>
             </a:pPr>
-            <a:r>
-              <a:rPr lang="en-US" sz="1800" dirty="0">
-                <a:effectLst/>
-                <a:latin typeface="Helvetica Neue" panose="02000503000000020004" pitchFamily="2" charset="0"/>
-              </a:rPr>
-              <a:t> </a:t>
-            </a:r>
+            <a:endParaRPr/>
           </a:p>
           <a:p>
             <a:pPr marL="0" marR="0" rtl="0">
@@ -1696,13 +1406,7 @@
                 <a:spcPts val="0"/>
               </a:spcAft>
             </a:pPr>
-            <a:r>
-              <a:rPr lang="en-US" sz="1800" dirty="0">
-                <a:effectLst/>
-                <a:latin typeface="Helvetica Neue" panose="02000503000000020004" pitchFamily="2" charset="0"/>
-              </a:rPr>
-              <a:t> </a:t>
-            </a:r>
+            <a:endParaRPr/>
           </a:p>
           <a:p>
             <a:pPr marL="0" marR="0" rtl="0">
@@ -1713,13 +1417,7 @@
                 <a:spcPts val="0"/>
               </a:spcAft>
             </a:pPr>
-            <a:r>
-              <a:rPr lang="en-US" sz="1800" dirty="0">
-                <a:effectLst/>
-                <a:latin typeface="Helvetica Neue" panose="02000503000000020004" pitchFamily="2" charset="0"/>
-              </a:rPr>
-              <a:t> </a:t>
-            </a:r>
+            <a:endParaRPr/>
           </a:p>
           <a:p>
             <a:endParaRPr lang="en-US" dirty="0"/>
@@ -1830,55 +1528,37 @@
           <a:bodyPr/>
           <a:lstStyle/>
           <a:p>
-            <a:r>
-              <a:rPr lang="en-US" dirty="0"/>
-              <a:t>Hi. Welcome to this episode of Emergent Nature. </a:t>
-            </a:r>
+            <a:endParaRPr/>
           </a:p>
           <a:p>
             <a:endParaRPr lang="en-US" dirty="0"/>
           </a:p>
           <a:p>
-            <a:r>
-              <a:rPr lang="en-US" dirty="0"/>
-              <a:t>My name is J Mark Morris. I go by Mark.</a:t>
-            </a:r>
-          </a:p>
-          <a:p>
             <a:endParaRPr lang="en-US" dirty="0"/>
           </a:p>
           <a:p>
-            <a:r>
-              <a:rPr lang="en-US" dirty="0"/>
-              <a:t>In this episode I’ll discuss the error that caused science to go off track into general relativity and quantum mechanics.</a:t>
-            </a:r>
-          </a:p>
-          <a:p>
             <a:endParaRPr lang="en-US" dirty="0"/>
           </a:p>
           <a:p>
-            <a:r>
-              <a:rPr lang="en-US" dirty="0"/>
-              <a:t>That may seem like an unusual thing to say, since general relativity and quantum theory are generally considered to be successful effective theories.</a:t>
-            </a:r>
-          </a:p>
-          <a:p>
             <a:endParaRPr lang="en-US" dirty="0"/>
           </a:p>
           <a:p>
-            <a:r>
-              <a:rPr lang="en-US" dirty="0"/>
-              <a:t>However, as we will see, an error circa 1900 threw science off track.</a:t>
-            </a:r>
-          </a:p>
-          <a:p>
             <a:endParaRPr lang="en-US" dirty="0"/>
           </a:p>
           <a:p>
-            <a:r>
-              <a:rPr lang="en-US" dirty="0"/>
-              <a:t>There is a parsimonious solution to nature.</a:t>
-            </a:r>
+            <a:endParaRPr lang="en-US" dirty="0"/>
+          </a:p>
+          <a:p>
+            <a:endParaRPr lang="en-US" dirty="0"/>
+          </a:p>
+          <a:p>
+            <a:endParaRPr lang="en-US" dirty="0"/>
+          </a:p>
+          <a:p>
+            <a:endParaRPr lang="en-US" dirty="0"/>
+          </a:p>
+          <a:p>
+            <a:endParaRPr lang="en-US" dirty="0"/>
           </a:p>
           <a:p>
             <a:endParaRPr lang="en-US" dirty="0"/>
@@ -2051,18 +1731,7 @@
               <a:tabLst/>
               <a:defRPr/>
             </a:pPr>
-            <a:r>
-              <a:rPr lang="en-US" dirty="0"/>
-              <a:t>In mathematics, the Dirac delta distribution (</a:t>
-            </a:r>
-            <a:r>
-              <a:rPr lang="el-GR" dirty="0"/>
-              <a:t>δ </a:t>
-            </a:r>
-            <a:r>
-              <a:rPr lang="en-US" dirty="0"/>
-              <a:t>distribution), also known as the unit impulse symbol, is a generalized function or distribution over the real numbers, whose value is zero everywhere except at zero, and whose integral over the entire real line is equal to one. - Wikipedia</a:t>
-            </a:r>
+            <a:endParaRPr/>
           </a:p>
         </p:txBody>
       </p:sp>
@@ -2241,18 +1910,7 @@
               <a:tabLst/>
               <a:defRPr/>
             </a:pPr>
-            <a:r>
-              <a:rPr lang="en-US" dirty="0"/>
-              <a:t>In mathematics, the Dirac delta distribution (</a:t>
-            </a:r>
-            <a:r>
-              <a:rPr lang="el-GR" dirty="0"/>
-              <a:t>δ </a:t>
-            </a:r>
-            <a:r>
-              <a:rPr lang="en-US" dirty="0"/>
-              <a:t>distribution), also known as the unit impulse symbol, is a generalized function or distribution over the real numbers, whose value is zero everywhere except at zero, and whose integral over the entire real line is equal to one. - Wikipedia</a:t>
-            </a:r>
+            <a:endParaRPr/>
           </a:p>
         </p:txBody>
       </p:sp>
@@ -2437,18 +2095,7 @@
               <a:tabLst/>
               <a:defRPr/>
             </a:pPr>
-            <a:r>
-              <a:rPr lang="en-US" dirty="0"/>
-              <a:t>In mathematics, the Dirac delta distribution (</a:t>
-            </a:r>
-            <a:r>
-              <a:rPr lang="el-GR" dirty="0"/>
-              <a:t>δ </a:t>
-            </a:r>
-            <a:r>
-              <a:rPr lang="en-US" dirty="0"/>
-              <a:t>distribution), also known as the unit impulse symbol, is a generalized function or distribution over the real numbers, whose value is zero everywhere except at zero, and whose integral over the entire real line is equal to one. - Wikipedia</a:t>
-            </a:r>
+            <a:endParaRPr/>
           </a:p>
         </p:txBody>
       </p:sp>
@@ -2615,18 +2262,7 @@
               <a:tabLst/>
               <a:defRPr/>
             </a:pPr>
-            <a:r>
-              <a:rPr lang="en-US" dirty="0"/>
-              <a:t>In mathematics, the Dirac delta distribution (</a:t>
-            </a:r>
-            <a:r>
-              <a:rPr lang="el-GR" dirty="0"/>
-              <a:t>δ </a:t>
-            </a:r>
-            <a:r>
-              <a:rPr lang="en-US" dirty="0"/>
-              <a:t>distribution), also known as the unit impulse symbol, is a generalized function or distribution over the real numbers, whose value is zero everywhere except at zero, and whose integral over the entire real line is equal to one. - Wikipedia</a:t>
-            </a:r>
+            <a:endParaRPr/>
           </a:p>
         </p:txBody>
       </p:sp>
@@ -2787,18 +2423,7 @@
               <a:tabLst/>
               <a:defRPr/>
             </a:pPr>
-            <a:r>
-              <a:rPr lang="en-US" dirty="0"/>
-              <a:t>In mathematics, the Dirac delta distribution (</a:t>
-            </a:r>
-            <a:r>
-              <a:rPr lang="el-GR" dirty="0"/>
-              <a:t>δ </a:t>
-            </a:r>
-            <a:r>
-              <a:rPr lang="en-US" dirty="0"/>
-              <a:t>distribution), also known as the unit impulse symbol, is a generalized function or distribution over the real numbers, whose value is zero everywhere except at zero, and whose integral over the entire real line is equal to one. - Wikipedia</a:t>
-            </a:r>
+            <a:endParaRPr/>
           </a:p>
         </p:txBody>
       </p:sp>
@@ -2959,18 +2584,7 @@
               <a:tabLst/>
               <a:defRPr/>
             </a:pPr>
-            <a:r>
-              <a:rPr lang="en-US" dirty="0"/>
-              <a:t>In mathematics, the Dirac delta distribution (</a:t>
-            </a:r>
-            <a:r>
-              <a:rPr lang="el-GR" dirty="0"/>
-              <a:t>δ </a:t>
-            </a:r>
-            <a:r>
-              <a:rPr lang="en-US" dirty="0"/>
-              <a:t>distribution), also known as the unit impulse symbol, is a generalized function or distribution over the real numbers, whose value is zero everywhere except at zero, and whose integral over the entire real line is equal to one. - Wikipedia</a:t>
-            </a:r>
+            <a:endParaRPr/>
           </a:p>
         </p:txBody>
       </p:sp>
@@ -3122,34 +2736,7 @@
                 <a:spcPts val="0"/>
               </a:spcAft>
             </a:pPr>
-            <a:r>
-              <a:rPr lang="en-US" sz="1800" dirty="0" err="1">
-                <a:effectLst/>
-                <a:latin typeface="Helvetica Neue" panose="02000503000000020004" pitchFamily="2" charset="0"/>
-              </a:rPr>
-              <a:t>Lienard</a:t>
-            </a:r>
-            <a:r>
-              <a:rPr lang="en-US" sz="1800" dirty="0">
-                <a:effectLst/>
-                <a:latin typeface="Helvetica Neue" panose="02000503000000020004" pitchFamily="2" charset="0"/>
-              </a:rPr>
-              <a:t> and </a:t>
-            </a:r>
-            <a:r>
-              <a:rPr lang="en-US" sz="1800" dirty="0" err="1">
-                <a:effectLst/>
-                <a:latin typeface="Helvetica Neue" panose="02000503000000020004" pitchFamily="2" charset="0"/>
-              </a:rPr>
-              <a:t>Wiechert</a:t>
-            </a:r>
-            <a:r>
-              <a:rPr lang="en-US" sz="1800" dirty="0">
-                <a:effectLst/>
-                <a:latin typeface="Helvetica Neue" panose="02000503000000020004" pitchFamily="2" charset="0"/>
-              </a:rPr>
-              <a:t> were scientists.</a:t>
-            </a:r>
+            <a:endParaRPr/>
           </a:p>
           <a:p>
             <a:pPr marL="0" marR="0" rtl="0">
@@ -3160,13 +2747,7 @@
                 <a:spcPts val="0"/>
               </a:spcAft>
             </a:pPr>
-            <a:r>
-              <a:rPr lang="en-US" sz="1800" dirty="0">
-                <a:effectLst/>
-                <a:latin typeface="Helvetica Neue" panose="02000503000000020004" pitchFamily="2" charset="0"/>
-              </a:rPr>
-              <a:t>Among the areas they each researched were point charges, the paths of point charges, the history of the potential emitted by point charges, and the action on point charges when potential intersects with them.</a:t>
-            </a:r>
+            <a:endParaRPr/>
           </a:p>
           <a:p>
             <a:pPr marL="0" marR="0" rtl="0">
@@ -3177,13 +2758,7 @@
                 <a:spcPts val="0"/>
               </a:spcAft>
             </a:pPr>
-            <a:r>
-              <a:rPr lang="en-US" sz="1800" dirty="0">
-                <a:effectLst/>
-                <a:latin typeface="Helvetica Neue" panose="02000503000000020004" pitchFamily="2" charset="0"/>
-              </a:rPr>
-              <a:t>Shown in this figure are two point charges A and B.</a:t>
-            </a:r>
+            <a:endParaRPr/>
           </a:p>
           <a:p>
             <a:pPr marL="0" marR="0" rtl="0">
@@ -3194,13 +2769,7 @@
                 <a:spcPts val="0"/>
               </a:spcAft>
             </a:pPr>
-            <a:r>
-              <a:rPr lang="en-US" sz="1800" dirty="0">
-                <a:effectLst/>
-                <a:latin typeface="Helvetica Neue" panose="02000503000000020004" pitchFamily="2" charset="0"/>
-              </a:rPr>
-              <a:t>They move around through space and time on a path.</a:t>
-            </a:r>
+            <a:endParaRPr/>
           </a:p>
           <a:p>
             <a:pPr marL="0" marR="0" rtl="0">
@@ -3211,13 +2780,7 @@
                 <a:spcPts val="0"/>
               </a:spcAft>
             </a:pPr>
-            <a:r>
-              <a:rPr lang="en-US" sz="1800" dirty="0">
-                <a:effectLst/>
-                <a:latin typeface="Helvetica Neue" panose="02000503000000020004" pitchFamily="2" charset="0"/>
-              </a:rPr>
-              <a:t>That movement is due to the action upon those point charges from all intersecting potential waves.</a:t>
-            </a:r>
+            <a:endParaRPr/>
           </a:p>
           <a:p>
             <a:pPr marL="0" marR="0" rtl="0">
@@ -3228,13 +2791,7 @@
                 <a:spcPts val="0"/>
               </a:spcAft>
             </a:pPr>
-            <a:r>
-              <a:rPr lang="en-US" sz="1800" dirty="0">
-                <a:effectLst/>
-                <a:latin typeface="Helvetica Neue" panose="02000503000000020004" pitchFamily="2" charset="0"/>
-              </a:rPr>
-              <a:t>Let's start by looking at the influence that point architrino A has on point architrino B at time t.</a:t>
-            </a:r>
+            <a:endParaRPr/>
           </a:p>
           <a:p>
             <a:pPr marL="0" marR="0" rtl="0">
@@ -3245,13 +2802,7 @@
                 <a:spcPts val="0"/>
               </a:spcAft>
             </a:pPr>
-            <a:r>
-              <a:rPr lang="en-US" sz="1800" dirty="0">
-                <a:effectLst/>
-                <a:latin typeface="Helvetica Neue" panose="02000503000000020004" pitchFamily="2" charset="0"/>
-              </a:rPr>
-              <a:t>What we see is that at time t', point architrino A has emitted potential that expands spherically and intersects point architrino B at time t.</a:t>
-            </a:r>
+            <a:endParaRPr/>
           </a:p>
           <a:p>
             <a:pPr marL="0" marR="0" rtl="0">
@@ -3262,13 +2813,7 @@
                 <a:spcPts val="0"/>
               </a:spcAft>
             </a:pPr>
-            <a:r>
-              <a:rPr lang="en-US" sz="1800" dirty="0">
-                <a:effectLst/>
-                <a:latin typeface="Helvetica Neue" panose="02000503000000020004" pitchFamily="2" charset="0"/>
-              </a:rPr>
-              <a:t>The radius of a spherical potential wave increases at the universal constant field speed, which I have given the at sign symbol. </a:t>
-            </a:r>
+            <a:endParaRPr/>
           </a:p>
           <a:p>
             <a:pPr marL="0" marR="0" rtl="0">
@@ -3279,13 +2824,7 @@
                 <a:spcPts val="0"/>
               </a:spcAft>
             </a:pPr>
-            <a:r>
-              <a:rPr lang="en-US" sz="1800" dirty="0">
-                <a:effectLst/>
-                <a:latin typeface="Helvetica Neue" panose="02000503000000020004" pitchFamily="2" charset="0"/>
-              </a:rPr>
-              <a:t>The speed of potential is not the same as the speed of light, c, although they are related, which will be explained in a future episode.</a:t>
-            </a:r>
+            <a:endParaRPr/>
           </a:p>
           <a:p>
             <a:pPr marL="0" marR="0" rtl="0">
@@ -3296,13 +2835,7 @@
                 <a:spcPts val="0"/>
               </a:spcAft>
             </a:pPr>
-            <a:r>
-              <a:rPr lang="en-US" sz="1800" dirty="0">
-                <a:effectLst/>
-                <a:latin typeface="Helvetica Neue" panose="02000503000000020004" pitchFamily="2" charset="0"/>
-              </a:rPr>
-              <a:t>What we see is that there is a delay. It's not that the current position of A impacts B at time t.</a:t>
-            </a:r>
+            <a:endParaRPr/>
           </a:p>
           <a:p>
             <a:pPr marL="0" marR="0" rtl="0">
@@ -3313,13 +2846,7 @@
                 <a:spcPts val="0"/>
               </a:spcAft>
             </a:pPr>
-            <a:r>
-              <a:rPr lang="en-US" sz="1800" dirty="0">
-                <a:effectLst/>
-                <a:latin typeface="Helvetica Neue" panose="02000503000000020004" pitchFamily="2" charset="0"/>
-              </a:rPr>
-              <a:t>Rather it is a historical position on A's path where A emitted potential that now intersects B at time t. </a:t>
-            </a:r>
+            <a:endParaRPr/>
           </a:p>
           <a:p>
             <a:pPr marL="0" marR="0" rtl="0">
@@ -3330,13 +2857,7 @@
                 <a:spcPts val="0"/>
               </a:spcAft>
             </a:pPr>
-            <a:r>
-              <a:rPr lang="en-US" sz="1800" dirty="0">
-                <a:effectLst/>
-                <a:latin typeface="Helvetica Neue" panose="02000503000000020004" pitchFamily="2" charset="0"/>
-              </a:rPr>
-              <a:t>The distance between A(t') and B(t) is given by field speed multiplied by the time difference between t' and t.</a:t>
-            </a:r>
+            <a:endParaRPr/>
           </a:p>
           <a:p>
             <a:pPr marL="0" marR="0" rtl="0">
@@ -3347,13 +2868,7 @@
                 <a:spcPts val="0"/>
               </a:spcAft>
             </a:pPr>
-            <a:r>
-              <a:rPr lang="en-US" sz="1800" dirty="0">
-                <a:effectLst/>
-                <a:latin typeface="Helvetica Neue" panose="02000503000000020004" pitchFamily="2" charset="0"/>
-              </a:rPr>
-              <a:t>Action occurs when a potential wave intersects a point charge and this influences the future path of point charge. </a:t>
-            </a:r>
+            <a:endParaRPr/>
           </a:p>
           <a:p>
             <a:pPr marL="0" marR="0" rtl="0">
@@ -3364,13 +2879,7 @@
                 <a:spcPts val="0"/>
               </a:spcAft>
             </a:pPr>
-            <a:r>
-              <a:rPr lang="en-US" sz="1800" dirty="0">
-                <a:effectLst/>
-                <a:latin typeface="Helvetica Neue" panose="02000503000000020004" pitchFamily="2" charset="0"/>
-              </a:rPr>
-              <a:t>This action is not only a function of the distance between A(t') and B(t), but also the velocity of A at time t' and the velocity of B at time t.</a:t>
-            </a:r>
+            <a:endParaRPr/>
           </a:p>
           <a:p>
             <a:pPr marL="0" marR="0" rtl="0">
@@ -3381,27 +2890,7 @@
                 <a:spcPts val="0"/>
               </a:spcAft>
             </a:pPr>
-            <a:r>
-              <a:rPr lang="en-US" sz="1800" dirty="0">
-                <a:effectLst/>
-                <a:latin typeface="Helvetica Neue" panose="02000503000000020004" pitchFamily="2" charset="0"/>
-              </a:rPr>
-              <a:t>This system evolves as a dynamical geometry. This is true whether it is two </a:t>
-            </a:r>
-            <a:r>
-              <a:rPr lang="en-US" sz="1800" dirty="0" err="1">
-                <a:effectLst/>
-                <a:latin typeface="Helvetica Neue" panose="02000503000000020004" pitchFamily="2" charset="0"/>
-              </a:rPr>
-              <a:t>isoloated</a:t>
-            </a:r>
-            <a:r>
-              <a:rPr lang="en-US" sz="1800" dirty="0">
-                <a:effectLst/>
-                <a:latin typeface="Helvetica Neue" panose="02000503000000020004" pitchFamily="2" charset="0"/>
-              </a:rPr>
-              <a:t> point charges or all point charges in the universe, even if that is a countably infinite number of point charges.</a:t>
-            </a:r>
+            <a:endParaRPr/>
           </a:p>
           <a:p>
             <a:pPr marL="0" marR="0" rtl="0">
@@ -3412,13 +2901,7 @@
                 <a:spcPts val="0"/>
               </a:spcAft>
             </a:pPr>
-            <a:r>
-              <a:rPr lang="en-US" sz="1800" dirty="0">
-                <a:effectLst/>
-                <a:latin typeface="Helvetica Neue" panose="02000503000000020004" pitchFamily="2" charset="0"/>
-              </a:rPr>
-              <a:t>There are some fascinating behaviors in this dynamical geometry. </a:t>
-            </a:r>
+            <a:endParaRPr/>
           </a:p>
           <a:p>
             <a:pPr marL="0" marR="0" rtl="0">
@@ -3429,13 +2912,7 @@
                 <a:spcPts val="0"/>
               </a:spcAft>
             </a:pPr>
-            <a:r>
-              <a:rPr lang="en-US" sz="1800" dirty="0">
-                <a:effectLst/>
-                <a:latin typeface="Helvetica Neue" panose="02000503000000020004" pitchFamily="2" charset="0"/>
-              </a:rPr>
-              <a:t>Each point charge is continuously emitting a potential wave that expands spherically.</a:t>
-            </a:r>
+            <a:endParaRPr/>
           </a:p>
           <a:p>
             <a:pPr marL="0" marR="0" rtl="0">
@@ -3446,13 +2923,7 @@
                 <a:spcPts val="0"/>
               </a:spcAft>
             </a:pPr>
-            <a:r>
-              <a:rPr lang="en-US" sz="1800" dirty="0">
-                <a:effectLst/>
-                <a:latin typeface="Helvetica Neue" panose="02000503000000020004" pitchFamily="2" charset="0"/>
-              </a:rPr>
-              <a:t>In our example, point architrino A emitted a potential wave at time t' that resulted in action on point architrino B at time t. That action influences B's path. Yet B is also continuously emitting potential. So when B's path changes that will be reflected in the potential wave it emits. This wave then results in action on point architrino A when they intersect. This dynamical feedback is continuous between both point charges in our example, and in the universe between all point charges.  </a:t>
-            </a:r>
+            <a:endParaRPr/>
           </a:p>
           <a:p>
             <a:pPr marL="0" marR="0" rtl="0">
@@ -3463,13 +2934,7 @@
                 <a:spcPts val="0"/>
               </a:spcAft>
             </a:pPr>
-            <a:r>
-              <a:rPr lang="en-US" sz="1800" dirty="0">
-                <a:effectLst/>
-                <a:latin typeface="Helvetica Neue" panose="02000503000000020004" pitchFamily="2" charset="0"/>
-              </a:rPr>
-              <a:t>Overall, this dynamical geometry mirrors Mach's principle, but with charge instead of mass.  </a:t>
-            </a:r>
+            <a:endParaRPr/>
           </a:p>
           <a:p>
             <a:pPr marL="0" marR="0" rtl="0">
@@ -3480,13 +2945,7 @@
                 <a:spcPts val="0"/>
               </a:spcAft>
             </a:pPr>
-            <a:r>
-              <a:rPr lang="en-US" sz="1800" dirty="0">
-                <a:effectLst/>
-                <a:latin typeface="Helvetica Neue" panose="02000503000000020004" pitchFamily="2" charset="0"/>
-              </a:rPr>
-              <a:t>Point charges continuously emit potential that expands spherically. </a:t>
-            </a:r>
+            <a:endParaRPr/>
           </a:p>
           <a:p>
             <a:pPr marL="0" marR="0" rtl="0">
@@ -3497,13 +2956,7 @@
                 <a:spcPts val="0"/>
               </a:spcAft>
             </a:pPr>
-            <a:r>
-              <a:rPr lang="en-US" sz="1800" dirty="0">
-                <a:effectLst/>
-                <a:latin typeface="Helvetica Neue" panose="02000503000000020004" pitchFamily="2" charset="0"/>
-              </a:rPr>
-              <a:t>Intersecting spherical potential waves tell point charges how to move.</a:t>
-            </a:r>
+            <a:endParaRPr/>
           </a:p>
           <a:p>
             <a:pPr marL="0" marR="0" rtl="0">
@@ -3514,13 +2967,7 @@
                 <a:spcPts val="0"/>
               </a:spcAft>
             </a:pPr>
-            <a:r>
-              <a:rPr lang="en-US" sz="1800" dirty="0">
-                <a:effectLst/>
-                <a:latin typeface="Helvetica Neue" panose="02000503000000020004" pitchFamily="2" charset="0"/>
-              </a:rPr>
-              <a:t>In our example we have shown the relationship between two point charges, but it is also possible for self-action to occur, where a point charge responds to potential it emitted on its own past path history. We'll cover this topic in detail in a future episode.</a:t>
-            </a:r>
+            <a:endParaRPr/>
           </a:p>
           <a:p>
             <a:pPr marL="0" marR="0" rtl="0">
@@ -3531,13 +2978,7 @@
                 <a:spcPts val="0"/>
               </a:spcAft>
             </a:pPr>
-            <a:r>
-              <a:rPr lang="en-US" sz="1800" dirty="0">
-                <a:effectLst/>
-                <a:latin typeface="Helvetica Neue" panose="02000503000000020004" pitchFamily="2" charset="0"/>
-              </a:rPr>
-              <a:t> </a:t>
-            </a:r>
+            <a:endParaRPr/>
           </a:p>
           <a:p>
             <a:pPr marL="0" marR="0" rtl="0">
@@ -3548,13 +2989,7 @@
                 <a:spcPts val="0"/>
               </a:spcAft>
             </a:pPr>
-            <a:r>
-              <a:rPr lang="en-US" sz="1800" dirty="0">
-                <a:effectLst/>
-                <a:latin typeface="Helvetica Neue" panose="02000503000000020004" pitchFamily="2" charset="0"/>
-              </a:rPr>
-              <a:t> </a:t>
-            </a:r>
+            <a:endParaRPr/>
           </a:p>
           <a:p>
             <a:pPr marL="0" marR="0" rtl="0">
@@ -3565,13 +3000,7 @@
                 <a:spcPts val="0"/>
               </a:spcAft>
             </a:pPr>
-            <a:r>
-              <a:rPr lang="en-US" sz="1800" dirty="0">
-                <a:effectLst/>
-                <a:latin typeface="Helvetica Neue" panose="02000503000000020004" pitchFamily="2" charset="0"/>
-              </a:rPr>
-              <a:t> </a:t>
-            </a:r>
+            <a:endParaRPr/>
           </a:p>
           <a:p>
             <a:pPr marL="0" marR="0" rtl="0">
@@ -3582,13 +3011,7 @@
                 <a:spcPts val="0"/>
               </a:spcAft>
             </a:pPr>
-            <a:r>
-              <a:rPr lang="en-US" sz="1800" dirty="0">
-                <a:effectLst/>
-                <a:latin typeface="Helvetica Neue" panose="02000503000000020004" pitchFamily="2" charset="0"/>
-              </a:rPr>
-              <a:t> </a:t>
-            </a:r>
+            <a:endParaRPr/>
           </a:p>
           <a:p>
             <a:pPr marL="0" marR="0" rtl="0">
@@ -3599,13 +3022,7 @@
                 <a:spcPts val="0"/>
               </a:spcAft>
             </a:pPr>
-            <a:r>
-              <a:rPr lang="en-US" sz="1800" dirty="0">
-                <a:effectLst/>
-                <a:latin typeface="Helvetica Neue" panose="02000503000000020004" pitchFamily="2" charset="0"/>
-              </a:rPr>
-              <a:t> </a:t>
-            </a:r>
+            <a:endParaRPr/>
           </a:p>
           <a:p>
             <a:pPr marL="0" marR="0" rtl="0">
@@ -3616,13 +3033,7 @@
                 <a:spcPts val="0"/>
               </a:spcAft>
             </a:pPr>
-            <a:r>
-              <a:rPr lang="en-US" sz="1800" dirty="0">
-                <a:effectLst/>
-                <a:latin typeface="Helvetica Neue" panose="02000503000000020004" pitchFamily="2" charset="0"/>
-              </a:rPr>
-              <a:t> </a:t>
-            </a:r>
+            <a:endParaRPr/>
           </a:p>
           <a:p>
             <a:pPr marL="0" marR="0" rtl="0">
@@ -3633,13 +3044,7 @@
                 <a:spcPts val="0"/>
               </a:spcAft>
             </a:pPr>
-            <a:r>
-              <a:rPr lang="en-US" sz="1800" dirty="0">
-                <a:effectLst/>
-                <a:latin typeface="Helvetica Neue" panose="02000503000000020004" pitchFamily="2" charset="0"/>
-              </a:rPr>
-              <a:t> </a:t>
-            </a:r>
+            <a:endParaRPr/>
           </a:p>
           <a:p>
             <a:endParaRPr lang="en-US" dirty="0"/>
@@ -3743,14 +3148,6 @@
               <a:tabLst/>
               <a:defRPr/>
             </a:pPr>
-            <a:r>
-              <a:rPr lang="en-US" sz="9600" b="1" dirty="0">
-                <a:latin typeface="Helvetica Neue" panose="02000503000000020004" pitchFamily="2" charset="0"/>
-                <a:ea typeface="Helvetica Neue" panose="02000503000000020004" pitchFamily="2" charset="0"/>
-                <a:cs typeface="Helvetica Neue" panose="02000503000000020004" pitchFamily="2" charset="0"/>
-              </a:rPr>
-              <a:t>The tracer circles represent spheres in 3D absolute represent the 3D spatial length of the radius.  </a:t>
-            </a:r>
             <a:br>
               <a:rPr lang="en-US" sz="9600" b="1" dirty="0">
                 <a:latin typeface="Helvetica Neue" panose="02000503000000020004" pitchFamily="2" charset="0"/>
@@ -3758,14 +3155,6 @@
                 <a:cs typeface="Helvetica Neue" panose="02000503000000020004" pitchFamily="2" charset="0"/>
               </a:rPr>
             </a:br>
-            <a:r>
-              <a:rPr lang="en-US" sz="9600" b="1" dirty="0">
-                <a:latin typeface="Helvetica Neue" panose="02000503000000020004" pitchFamily="2" charset="0"/>
-                <a:ea typeface="Helvetica Neue" panose="02000503000000020004" pitchFamily="2" charset="0"/>
-                <a:cs typeface="Helvetica Neue" panose="02000503000000020004" pitchFamily="2" charset="0"/>
-              </a:rPr>
-              <a:t>The  forward tilt of all arrows represents absolute time. </a:t>
-            </a:r>
             <a:br>
               <a:rPr lang="en-US" sz="9600" b="1" dirty="0">
                 <a:latin typeface="Helvetica Neue" panose="02000503000000020004" pitchFamily="2" charset="0"/>
@@ -3773,14 +3162,6 @@
                 <a:cs typeface="Helvetica Neue" panose="02000503000000020004" pitchFamily="2" charset="0"/>
               </a:rPr>
             </a:br>
-            <a:r>
-              <a:rPr lang="en-US" sz="9600" b="1" dirty="0">
-                <a:latin typeface="Helvetica Neue" panose="02000503000000020004" pitchFamily="2" charset="0"/>
-                <a:ea typeface="Helvetica Neue" panose="02000503000000020004" pitchFamily="2" charset="0"/>
-                <a:cs typeface="Helvetica Neue" panose="02000503000000020004" pitchFamily="2" charset="0"/>
-              </a:rPr>
-              <a:t>Essentially every architrino is continuously riding on the wake emitted by every other architrino in the past.  </a:t>
-            </a:r>
             <a:br>
               <a:rPr lang="en-US" sz="9600" b="1" dirty="0">
                 <a:latin typeface="Helvetica Neue" panose="02000503000000020004" pitchFamily="2" charset="0"/>
@@ -3788,30 +3169,6 @@
                 <a:cs typeface="Helvetica Neue" panose="02000503000000020004" pitchFamily="2" charset="0"/>
               </a:rPr>
             </a:br>
-            <a:r>
-              <a:rPr lang="en-US" sz="9600" b="1" baseline="0" dirty="0">
-                <a:latin typeface="Helvetica Neue" panose="02000503000000020004" pitchFamily="2" charset="0"/>
-                <a:ea typeface="Helvetica Neue" panose="02000503000000020004" pitchFamily="2" charset="0"/>
-                <a:cs typeface="Helvetica Neue" panose="02000503000000020004" pitchFamily="2" charset="0"/>
-              </a:rPr>
-              <a:t>They may also be riding on their own wake if v &gt; c</a:t>
-            </a:r>
-            <a:r>
-              <a:rPr lang="en-US" sz="6720" b="1" baseline="-25000" dirty="0">
-                <a:latin typeface="Helvetica Neue" panose="02000503000000020004" pitchFamily="2" charset="0"/>
-                <a:ea typeface="Helvetica Neue" panose="02000503000000020004" pitchFamily="2" charset="0"/>
-                <a:cs typeface="Helvetica Neue" panose="02000503000000020004" pitchFamily="2" charset="0"/>
-              </a:rPr>
-              <a:t>f</a:t>
-            </a:r>
-            <a:r>
-              <a:rPr lang="en-US" sz="9600" b="1" baseline="0" dirty="0">
-                <a:latin typeface="Helvetica Neue" panose="02000503000000020004" pitchFamily="2" charset="0"/>
-                <a:ea typeface="Helvetica Neue" panose="02000503000000020004" pitchFamily="2" charset="0"/>
-                <a:cs typeface="Helvetica Neue" panose="02000503000000020004" pitchFamily="2" charset="0"/>
-              </a:rPr>
-              <a:t>. </a:t>
-            </a:r>
             <a:br>
               <a:rPr lang="en-US" sz="9600" b="1" dirty="0">
                 <a:latin typeface="Helvetica Neue" panose="02000503000000020004" pitchFamily="2" charset="0"/>
@@ -3819,30 +3176,6 @@
                 <a:cs typeface="Helvetica Neue" panose="02000503000000020004" pitchFamily="2" charset="0"/>
               </a:rPr>
             </a:br>
-            <a:r>
-              <a:rPr lang="en-US" sz="9600" b="1" baseline="0" dirty="0">
-                <a:latin typeface="Helvetica Neue" panose="02000503000000020004" pitchFamily="2" charset="0"/>
-                <a:ea typeface="Helvetica Neue" panose="02000503000000020004" pitchFamily="2" charset="0"/>
-                <a:cs typeface="Helvetica Neue" panose="02000503000000020004" pitchFamily="2" charset="0"/>
-              </a:rPr>
-              <a:t>For each partner that has operated at v&gt;c</a:t>
-            </a:r>
-            <a:r>
-              <a:rPr lang="en-US" sz="6720" b="1" baseline="-25000" dirty="0">
-                <a:latin typeface="Helvetica Neue" panose="02000503000000020004" pitchFamily="2" charset="0"/>
-                <a:ea typeface="Helvetica Neue" panose="02000503000000020004" pitchFamily="2" charset="0"/>
-                <a:cs typeface="Helvetica Neue" panose="02000503000000020004" pitchFamily="2" charset="0"/>
-              </a:rPr>
-              <a:t>f</a:t>
-            </a:r>
-            <a:r>
-              <a:rPr lang="en-US" sz="9600" b="1" baseline="0" dirty="0">
-                <a:latin typeface="Helvetica Neue" panose="02000503000000020004" pitchFamily="2" charset="0"/>
-                <a:ea typeface="Helvetica Neue" panose="02000503000000020004" pitchFamily="2" charset="0"/>
-                <a:cs typeface="Helvetica Neue" panose="02000503000000020004" pitchFamily="2" charset="0"/>
-              </a:rPr>
-              <a:t> a architrino may encounter multiple of their wakes or a continuous stretch of wake?  </a:t>
-            </a:r>
             <a:br>
               <a:rPr lang="en-US" sz="9600" b="1" dirty="0">
                 <a:latin typeface="Helvetica Neue" panose="02000503000000020004" pitchFamily="2" charset="0"/>
@@ -3850,14 +3183,11 @@
                 <a:cs typeface="Helvetica Neue" panose="02000503000000020004" pitchFamily="2" charset="0"/>
               </a:rPr>
             </a:br>
-            <a:r>
-              <a:rPr lang="en-US" sz="9600" b="1" dirty="0">
-                <a:latin typeface="Helvetica Neue" panose="02000503000000020004" pitchFamily="2" charset="0"/>
-                <a:ea typeface="Helvetica Neue" panose="02000503000000020004" pitchFamily="2" charset="0"/>
-                <a:cs typeface="Helvetica Neue" panose="02000503000000020004" pitchFamily="2" charset="0"/>
-              </a:rPr>
-              <a:t>What path would yield a continuous stretch of wake from a partner?</a:t>
-            </a:r>
+            <a:endParaRPr lang="en-US" sz="9600" b="1" dirty="0">
+              <a:latin typeface="Helvetica Neue" panose="02000503000000020004" pitchFamily="2" charset="0"/>
+              <a:ea typeface="Helvetica Neue" panose="02000503000000020004" pitchFamily="2" charset="0"/>
+              <a:cs typeface="Helvetica Neue" panose="02000503000000020004" pitchFamily="2" charset="0"/>
+            </a:endParaRPr>
           </a:p>
           <a:p>
             <a:pPr marL="0" marR="0" indent="0" algn="l" defTabSz="914400" rtl="0" eaLnBrk="1" fontAlgn="auto" latinLnBrk="0" hangingPunct="1">
@@ -3901,14 +3231,11 @@
               <a:tabLst/>
               <a:defRPr/>
             </a:pPr>
-            <a:r>
-              <a:rPr lang="en-US" sz="9600" b="1" dirty="0">
-                <a:latin typeface="Helvetica Neue" panose="02000503000000020004" pitchFamily="2" charset="0"/>
-                <a:ea typeface="Helvetica Neue" panose="02000503000000020004" pitchFamily="2" charset="0"/>
-                <a:cs typeface="Helvetica Neue" panose="02000503000000020004" pitchFamily="2" charset="0"/>
-              </a:rPr>
-              <a:t>To do : animate this and make an episode.</a:t>
-            </a:r>
+            <a:endParaRPr lang="en-US" sz="9600" b="1" dirty="0">
+              <a:latin typeface="Helvetica Neue" panose="02000503000000020004" pitchFamily="2" charset="0"/>
+              <a:ea typeface="Helvetica Neue" panose="02000503000000020004" pitchFamily="2" charset="0"/>
+              <a:cs typeface="Helvetica Neue" panose="02000503000000020004" pitchFamily="2" charset="0"/>
+            </a:endParaRPr>
           </a:p>
         </p:txBody>
       </p:sp>
@@ -25384,7 +24711,7 @@
         </p:nvSpPr>
         <p:spPr>
           <a:xfrm>
-            <a:off x="2928993" y="279249"/>
+            <a:off x="3296740" y="279249"/>
             <a:ext cx="6201156" cy="777875"/>
           </a:xfrm>
           <a:prstGeom prst="rect">
@@ -25483,7 +24810,7 @@
         </p:nvSpPr>
         <p:spPr>
           <a:xfrm>
-            <a:off x="1349309" y="1050303"/>
+            <a:off x="1717056" y="1050303"/>
             <a:ext cx="9576532" cy="523220"/>
           </a:xfrm>
           <a:prstGeom prst="rect">

--- a/reference/archie/presentations/NPQG Fundamentals - Paths.pptx
+++ b/reference/archie/presentations/NPQG Fundamentals - Paths.pptx
@@ -5,7 +5,7 @@
     <p:sldMasterId id="2147483648" r:id="rId1"/>
   </p:sldMasterIdLst>
   <p:notesMasterIdLst>
-    <p:notesMasterId r:id="rId19"/>
+    <p:notesMasterId r:id="rId16"/>
   </p:notesMasterIdLst>
   <p:sldIdLst>
     <p:sldId id="890" r:id="rId2"/>
@@ -21,10 +21,7 @@
     <p:sldId id="767" r:id="rId12"/>
     <p:sldId id="812" r:id="rId13"/>
     <p:sldId id="889" r:id="rId14"/>
-    <p:sldId id="884" r:id="rId15"/>
-    <p:sldId id="885" r:id="rId16"/>
-    <p:sldId id="886" r:id="rId17"/>
-    <p:sldId id="887" r:id="rId18"/>
+    <p:sldId id="885" r:id="rId15"/>
   </p:sldIdLst>
   <p:sldSz cx="12192000" cy="6858000"/>
   <p:notesSz cx="6858000" cy="9144000"/>
@@ -797,6 +794,254 @@
               <a:cs typeface="Helvetica Neue" panose="02000503000000020004" pitchFamily="2" charset="0"/>
             </a:endParaRPr>
           </a:p>
+          <a:p>
+            <a:pPr marL="0" marR="0" indent="0" algn="l" defTabSz="914400" rtl="0" eaLnBrk="1" fontAlgn="auto" latinLnBrk="0" hangingPunct="1">
+              <a:lnSpc>
+                <a:spcPct val="200000"/>
+              </a:lnSpc>
+              <a:spcBef>
+                <a:spcPts val="0"/>
+              </a:spcBef>
+              <a:spcAft>
+                <a:spcPts val="0"/>
+              </a:spcAft>
+              <a:buClrTx/>
+              <a:buSzTx/>
+              <a:buFontTx/>
+              <a:buNone/>
+              <a:tabLst/>
+              <a:defRPr/>
+            </a:pPr>
+            <a:endParaRPr lang="en-US" sz="9600" b="1" dirty="0">
+              <a:latin typeface="Helvetica Neue" panose="02000503000000020004" pitchFamily="2" charset="0"/>
+              <a:ea typeface="Helvetica Neue" panose="02000503000000020004" pitchFamily="2" charset="0"/>
+              <a:cs typeface="Helvetica Neue" panose="02000503000000020004" pitchFamily="2" charset="0"/>
+            </a:endParaRPr>
+          </a:p>
+          <a:p>
+            <a:pPr marL="0" marR="0" indent="0" algn="l" defTabSz="914400" rtl="0" eaLnBrk="1" fontAlgn="auto" latinLnBrk="0" hangingPunct="1">
+              <a:lnSpc>
+                <a:spcPct val="200000"/>
+              </a:lnSpc>
+              <a:spcBef>
+                <a:spcPts val="0"/>
+              </a:spcBef>
+              <a:spcAft>
+                <a:spcPts val="0"/>
+              </a:spcAft>
+              <a:buClrTx/>
+              <a:buSzTx/>
+              <a:buFontTx/>
+              <a:buNone/>
+              <a:tabLst/>
+              <a:defRPr/>
+            </a:pPr>
+            <a:endParaRPr lang="en-US" sz="9600" b="1" dirty="0">
+              <a:latin typeface="Helvetica Neue" panose="02000503000000020004" pitchFamily="2" charset="0"/>
+              <a:ea typeface="Helvetica Neue" panose="02000503000000020004" pitchFamily="2" charset="0"/>
+              <a:cs typeface="Helvetica Neue" panose="02000503000000020004" pitchFamily="2" charset="0"/>
+            </a:endParaRPr>
+          </a:p>
+        </p:txBody>
+      </p:sp>
+      <p:sp>
+        <p:nvSpPr>
+          <p:cNvPr id="4" name="Slide Number Placeholder 3"/>
+          <p:cNvSpPr>
+            <a:spLocks noGrp="1"/>
+          </p:cNvSpPr>
+          <p:nvPr>
+            <p:ph type="sldNum" sz="quarter" idx="5"/>
+          </p:nvPr>
+        </p:nvSpPr>
+        <p:spPr/>
+        <p:txBody>
+          <a:bodyPr/>
+          <a:lstStyle/>
+          <a:p>
+            <a:pPr marL="0" marR="0" lvl="0" indent="0" algn="r" defTabSz="914400" rtl="0" eaLnBrk="1" fontAlgn="auto" latinLnBrk="0" hangingPunct="1">
+              <a:lnSpc>
+                <a:spcPct val="100000"/>
+              </a:lnSpc>
+              <a:spcBef>
+                <a:spcPts val="0"/>
+              </a:spcBef>
+              <a:spcAft>
+                <a:spcPts val="0"/>
+              </a:spcAft>
+              <a:buClrTx/>
+              <a:buSzTx/>
+              <a:buFontTx/>
+              <a:buNone/>
+              <a:tabLst/>
+              <a:defRPr/>
+            </a:pPr>
+            <a:fld id="{4DC398A3-AF21-A342-B6A8-6929C36BB1BF}" type="slidenum">
+              <a:rPr kumimoji="0" lang="en-US" sz="1200" b="0" i="0" u="none" strike="noStrike" kern="1200" cap="none" spc="0" normalizeH="0" baseline="0" noProof="0" smtClean="0">
+                <a:ln>
+                  <a:noFill/>
+                </a:ln>
+                <a:solidFill>
+                  <a:prstClr val="black"/>
+                </a:solidFill>
+                <a:effectLst/>
+                <a:uLnTx/>
+                <a:uFillTx/>
+                <a:latin typeface="Calibri" panose="020F0502020204030204"/>
+                <a:ea typeface="+mn-ea"/>
+                <a:cs typeface="+mn-cs"/>
+              </a:rPr>
+              <a:pPr marL="0" marR="0" lvl="0" indent="0" algn="r" defTabSz="914400" rtl="0" eaLnBrk="1" fontAlgn="auto" latinLnBrk="0" hangingPunct="1">
+                <a:lnSpc>
+                  <a:spcPct val="100000"/>
+                </a:lnSpc>
+                <a:spcBef>
+                  <a:spcPts val="0"/>
+                </a:spcBef>
+                <a:spcAft>
+                  <a:spcPts val="0"/>
+                </a:spcAft>
+                <a:buClrTx/>
+                <a:buSzTx/>
+                <a:buFontTx/>
+                <a:buNone/>
+                <a:tabLst/>
+                <a:defRPr/>
+              </a:pPr>
+              <a:t>10</a:t>
+            </a:fld>
+            <a:endParaRPr kumimoji="0" lang="en-US" sz="1200" b="0" i="0" u="none" strike="noStrike" kern="1200" cap="none" spc="0" normalizeH="0" baseline="0" noProof="0">
+              <a:ln>
+                <a:noFill/>
+              </a:ln>
+              <a:solidFill>
+                <a:prstClr val="black"/>
+              </a:solidFill>
+              <a:effectLst/>
+              <a:uLnTx/>
+              <a:uFillTx/>
+              <a:latin typeface="Calibri" panose="020F0502020204030204"/>
+              <a:ea typeface="+mn-ea"/>
+              <a:cs typeface="+mn-cs"/>
+            </a:endParaRPr>
+          </a:p>
+        </p:txBody>
+      </p:sp>
+    </p:spTree>
+    <p:extLst>
+      <p:ext uri="{BB962C8B-B14F-4D97-AF65-F5344CB8AC3E}">
+        <p14:creationId xmlns:p14="http://schemas.microsoft.com/office/powerpoint/2010/main" val="596825902"/>
+      </p:ext>
+    </p:extLst>
+  </p:cSld>
+  <p:clrMapOvr>
+    <a:masterClrMapping/>
+  </p:clrMapOvr>
+</p:notes>
+</file>
+
+<file path=ppt/notesSlides/notesSlide11.xml><?xml version="1.0" encoding="utf-8"?>
+<p:notes xmlns:a="http://schemas.openxmlformats.org/drawingml/2006/main" xmlns:r="http://schemas.openxmlformats.org/officeDocument/2006/relationships" xmlns:p="http://schemas.openxmlformats.org/presentationml/2006/main">
+  <p:cSld>
+    <p:spTree>
+      <p:nvGrpSpPr>
+        <p:cNvPr id="1" name=""/>
+        <p:cNvGrpSpPr/>
+        <p:nvPr/>
+      </p:nvGrpSpPr>
+      <p:grpSpPr>
+        <a:xfrm>
+          <a:off x="0" y="0"/>
+          <a:ext cx="0" cy="0"/>
+          <a:chOff x="0" y="0"/>
+          <a:chExt cx="0" cy="0"/>
+        </a:xfrm>
+      </p:grpSpPr>
+      <p:sp>
+        <p:nvSpPr>
+          <p:cNvPr id="2" name="Slide Image Placeholder 1"/>
+          <p:cNvSpPr>
+            <a:spLocks noGrp="1" noRot="1" noChangeAspect="1"/>
+          </p:cNvSpPr>
+          <p:nvPr>
+            <p:ph type="sldImg"/>
+          </p:nvPr>
+        </p:nvSpPr>
+        <p:spPr/>
+      </p:sp>
+      <p:sp>
+        <p:nvSpPr>
+          <p:cNvPr id="3" name="Notes Placeholder 2"/>
+          <p:cNvSpPr>
+            <a:spLocks noGrp="1"/>
+          </p:cNvSpPr>
+          <p:nvPr>
+            <p:ph type="body" idx="1"/>
+          </p:nvPr>
+        </p:nvSpPr>
+        <p:spPr/>
+        <p:txBody>
+          <a:bodyPr/>
+          <a:lstStyle/>
+          <a:p>
+            <a:pPr marL="0" marR="0" indent="0" algn="l" defTabSz="914400" rtl="0" eaLnBrk="1" fontAlgn="auto" latinLnBrk="0" hangingPunct="1">
+              <a:lnSpc>
+                <a:spcPct val="200000"/>
+              </a:lnSpc>
+              <a:spcBef>
+                <a:spcPts val="0"/>
+              </a:spcBef>
+              <a:spcAft>
+                <a:spcPts val="0"/>
+              </a:spcAft>
+              <a:buClrTx/>
+              <a:buSzTx/>
+              <a:buFontTx/>
+              <a:buNone/>
+              <a:tabLst/>
+              <a:defRPr/>
+            </a:pPr>
+            <a:br>
+              <a:rPr lang="en-US" sz="9600" b="1" dirty="0">
+                <a:latin typeface="Helvetica Neue" panose="02000503000000020004" pitchFamily="2" charset="0"/>
+                <a:ea typeface="Helvetica Neue" panose="02000503000000020004" pitchFamily="2" charset="0"/>
+                <a:cs typeface="Helvetica Neue" panose="02000503000000020004" pitchFamily="2" charset="0"/>
+              </a:rPr>
+            </a:br>
+            <a:br>
+              <a:rPr lang="en-US" sz="9600" b="1" dirty="0">
+                <a:latin typeface="Helvetica Neue" panose="02000503000000020004" pitchFamily="2" charset="0"/>
+                <a:ea typeface="Helvetica Neue" panose="02000503000000020004" pitchFamily="2" charset="0"/>
+                <a:cs typeface="Helvetica Neue" panose="02000503000000020004" pitchFamily="2" charset="0"/>
+              </a:rPr>
+            </a:br>
+            <a:br>
+              <a:rPr lang="en-US" sz="9600" b="1" dirty="0">
+                <a:latin typeface="Helvetica Neue" panose="02000503000000020004" pitchFamily="2" charset="0"/>
+                <a:ea typeface="Helvetica Neue" panose="02000503000000020004" pitchFamily="2" charset="0"/>
+                <a:cs typeface="Helvetica Neue" panose="02000503000000020004" pitchFamily="2" charset="0"/>
+              </a:rPr>
+            </a:br>
+            <a:br>
+              <a:rPr lang="en-US" sz="9600" b="1" dirty="0">
+                <a:latin typeface="Helvetica Neue" panose="02000503000000020004" pitchFamily="2" charset="0"/>
+                <a:ea typeface="Helvetica Neue" panose="02000503000000020004" pitchFamily="2" charset="0"/>
+                <a:cs typeface="Helvetica Neue" panose="02000503000000020004" pitchFamily="2" charset="0"/>
+              </a:rPr>
+            </a:br>
+            <a:br>
+              <a:rPr lang="en-US" sz="9600" b="1" dirty="0">
+                <a:latin typeface="Helvetica Neue" panose="02000503000000020004" pitchFamily="2" charset="0"/>
+                <a:ea typeface="Helvetica Neue" panose="02000503000000020004" pitchFamily="2" charset="0"/>
+                <a:cs typeface="Helvetica Neue" panose="02000503000000020004" pitchFamily="2" charset="0"/>
+              </a:rPr>
+            </a:br>
+            <a:endParaRPr lang="en-US" sz="9600" b="1" dirty="0">
+              <a:latin typeface="Helvetica Neue" panose="02000503000000020004" pitchFamily="2" charset="0"/>
+              <a:ea typeface="Helvetica Neue" panose="02000503000000020004" pitchFamily="2" charset="0"/>
+              <a:cs typeface="Helvetica Neue" panose="02000503000000020004" pitchFamily="2" charset="0"/>
+            </a:endParaRPr>
+          </a:p>
         </p:txBody>
       </p:sp>
       <p:sp>
@@ -895,7 +1140,7 @@
 </p:notes>
 </file>
 
-<file path=ppt/notesSlides/notesSlide11.xml><?xml version="1.0" encoding="utf-8"?>
+<file path=ppt/notesSlides/notesSlide12.xml><?xml version="1.0" encoding="utf-8"?>
 <p:notes xmlns:a="http://schemas.openxmlformats.org/drawingml/2006/main" xmlns:r="http://schemas.openxmlformats.org/officeDocument/2006/relationships" xmlns:p="http://schemas.openxmlformats.org/presentationml/2006/main">
   <p:cSld>
     <p:spTree>
@@ -1039,7 +1284,7 @@
 </p:notes>
 </file>
 
-<file path=ppt/notesSlides/notesSlide12.xml><?xml version="1.0" encoding="utf-8"?>
+<file path=ppt/notesSlides/notesSlide13.xml><?xml version="1.0" encoding="utf-8"?>
 <p:notes xmlns:a="http://schemas.openxmlformats.org/drawingml/2006/main" xmlns:r="http://schemas.openxmlformats.org/officeDocument/2006/relationships" xmlns:p="http://schemas.openxmlformats.org/presentationml/2006/main">
   <p:cSld>
     <p:spTree>
@@ -1457,210 +1702,6 @@
     <p:extLst>
       <p:ext uri="{BB962C8B-B14F-4D97-AF65-F5344CB8AC3E}">
         <p14:creationId xmlns:p14="http://schemas.microsoft.com/office/powerpoint/2010/main" val="1879055837"/>
-      </p:ext>
-    </p:extLst>
-  </p:cSld>
-  <p:clrMapOvr>
-    <a:masterClrMapping/>
-  </p:clrMapOvr>
-</p:notes>
-</file>
-
-<file path=ppt/notesSlides/notesSlide13.xml><?xml version="1.0" encoding="utf-8"?>
-<p:notes xmlns:a="http://schemas.openxmlformats.org/drawingml/2006/main" xmlns:r="http://schemas.openxmlformats.org/officeDocument/2006/relationships" xmlns:p="http://schemas.openxmlformats.org/presentationml/2006/main">
-  <p:cSld>
-    <p:spTree>
-      <p:nvGrpSpPr>
-        <p:cNvPr id="1" name="">
-          <a:extLst>
-            <a:ext uri="{FF2B5EF4-FFF2-40B4-BE49-F238E27FC236}">
-              <a16:creationId xmlns:a16="http://schemas.microsoft.com/office/drawing/2014/main" id="{F4B2594E-083A-33B0-1887-4D75961D8DFC}"/>
-            </a:ext>
-          </a:extLst>
-        </p:cNvPr>
-        <p:cNvGrpSpPr/>
-        <p:nvPr/>
-      </p:nvGrpSpPr>
-      <p:grpSpPr>
-        <a:xfrm>
-          <a:off x="0" y="0"/>
-          <a:ext cx="0" cy="0"/>
-          <a:chOff x="0" y="0"/>
-          <a:chExt cx="0" cy="0"/>
-        </a:xfrm>
-      </p:grpSpPr>
-      <p:sp>
-        <p:nvSpPr>
-          <p:cNvPr id="2" name="Slide Image Placeholder 1">
-            <a:extLst>
-              <a:ext uri="{FF2B5EF4-FFF2-40B4-BE49-F238E27FC236}">
-                <a16:creationId xmlns:a16="http://schemas.microsoft.com/office/drawing/2014/main" id="{649C972F-8115-0086-8D46-F43BA6CB6AFD}"/>
-              </a:ext>
-            </a:extLst>
-          </p:cNvPr>
-          <p:cNvSpPr>
-            <a:spLocks noGrp="1" noRot="1" noChangeAspect="1"/>
-          </p:cNvSpPr>
-          <p:nvPr>
-            <p:ph type="sldImg"/>
-          </p:nvPr>
-        </p:nvSpPr>
-        <p:spPr/>
-      </p:sp>
-      <p:sp>
-        <p:nvSpPr>
-          <p:cNvPr id="3" name="Notes Placeholder 2">
-            <a:extLst>
-              <a:ext uri="{FF2B5EF4-FFF2-40B4-BE49-F238E27FC236}">
-                <a16:creationId xmlns:a16="http://schemas.microsoft.com/office/drawing/2014/main" id="{7ECA05C0-C97B-9722-138D-940A0126F522}"/>
-              </a:ext>
-            </a:extLst>
-          </p:cNvPr>
-          <p:cNvSpPr>
-            <a:spLocks noGrp="1"/>
-          </p:cNvSpPr>
-          <p:nvPr>
-            <p:ph type="body" idx="1"/>
-          </p:nvPr>
-        </p:nvSpPr>
-        <p:spPr/>
-        <p:txBody>
-          <a:bodyPr/>
-          <a:lstStyle/>
-          <a:p>
-            <a:endParaRPr/>
-          </a:p>
-          <a:p>
-            <a:endParaRPr lang="en-US" dirty="0"/>
-          </a:p>
-          <a:p>
-            <a:endParaRPr lang="en-US" dirty="0"/>
-          </a:p>
-          <a:p>
-            <a:endParaRPr lang="en-US" dirty="0"/>
-          </a:p>
-          <a:p>
-            <a:endParaRPr lang="en-US" dirty="0"/>
-          </a:p>
-          <a:p>
-            <a:endParaRPr lang="en-US" dirty="0"/>
-          </a:p>
-          <a:p>
-            <a:endParaRPr lang="en-US" dirty="0"/>
-          </a:p>
-          <a:p>
-            <a:endParaRPr lang="en-US" dirty="0"/>
-          </a:p>
-          <a:p>
-            <a:endParaRPr lang="en-US" dirty="0"/>
-          </a:p>
-          <a:p>
-            <a:endParaRPr lang="en-US" dirty="0"/>
-          </a:p>
-          <a:p>
-            <a:endParaRPr lang="en-US" dirty="0"/>
-          </a:p>
-          <a:p>
-            <a:endParaRPr lang="en-US" dirty="0"/>
-          </a:p>
-          <a:p>
-            <a:endParaRPr lang="en-US" dirty="0"/>
-          </a:p>
-        </p:txBody>
-      </p:sp>
-      <p:sp>
-        <p:nvSpPr>
-          <p:cNvPr id="4" name="Slide Number Placeholder 3">
-            <a:extLst>
-              <a:ext uri="{FF2B5EF4-FFF2-40B4-BE49-F238E27FC236}">
-                <a16:creationId xmlns:a16="http://schemas.microsoft.com/office/drawing/2014/main" id="{49D93F59-9C10-56A8-29DB-C5BD61D5AF10}"/>
-              </a:ext>
-            </a:extLst>
-          </p:cNvPr>
-          <p:cNvSpPr>
-            <a:spLocks noGrp="1"/>
-          </p:cNvSpPr>
-          <p:nvPr>
-            <p:ph type="sldNum" sz="quarter" idx="5"/>
-          </p:nvPr>
-        </p:nvSpPr>
-        <p:spPr/>
-        <p:txBody>
-          <a:bodyPr/>
-          <a:lstStyle/>
-          <a:p>
-            <a:pPr marL="0" marR="0" lvl="0" indent="0" algn="r" defTabSz="914400" rtl="0" eaLnBrk="1" fontAlgn="auto" latinLnBrk="0" hangingPunct="1">
-              <a:lnSpc>
-                <a:spcPct val="100000"/>
-              </a:lnSpc>
-              <a:spcBef>
-                <a:spcPts val="0"/>
-              </a:spcBef>
-              <a:spcAft>
-                <a:spcPts val="0"/>
-              </a:spcAft>
-              <a:buClrTx/>
-              <a:buSzTx/>
-              <a:buFontTx/>
-              <a:buNone/>
-              <a:tabLst/>
-              <a:defRPr/>
-            </a:pPr>
-            <a:fld id="{4DC398A3-AF21-A342-B6A8-6929C36BB1BF}" type="slidenum">
-              <a:rPr kumimoji="0" lang="en-US" sz="1200" b="0" i="0" u="none" strike="noStrike" kern="1200" cap="none" spc="0" normalizeH="0" baseline="0" noProof="0" smtClean="0">
-                <a:ln>
-                  <a:noFill/>
-                </a:ln>
-                <a:solidFill>
-                  <a:prstClr val="black"/>
-                </a:solidFill>
-                <a:effectLst/>
-                <a:uLnTx/>
-                <a:uFillTx/>
-                <a:latin typeface="Calibri" panose="020F0502020204030204"/>
-                <a:ea typeface="+mn-ea"/>
-                <a:cs typeface="+mn-cs"/>
-              </a:rPr>
-              <a:pPr marL="0" marR="0" lvl="0" indent="0" algn="r" defTabSz="914400" rtl="0" eaLnBrk="1" fontAlgn="auto" latinLnBrk="0" hangingPunct="1">
-                <a:lnSpc>
-                  <a:spcPct val="100000"/>
-                </a:lnSpc>
-                <a:spcBef>
-                  <a:spcPts val="0"/>
-                </a:spcBef>
-                <a:spcAft>
-                  <a:spcPts val="0"/>
-                </a:spcAft>
-                <a:buClrTx/>
-                <a:buSzTx/>
-                <a:buFontTx/>
-                <a:buNone/>
-                <a:tabLst/>
-                <a:defRPr/>
-              </a:pPr>
-              <a:t>14</a:t>
-            </a:fld>
-            <a:endParaRPr kumimoji="0" lang="en-US" sz="1200" b="0" i="0" u="none" strike="noStrike" kern="1200" cap="none" spc="0" normalizeH="0" baseline="0" noProof="0">
-              <a:ln>
-                <a:noFill/>
-              </a:ln>
-              <a:solidFill>
-                <a:prstClr val="black"/>
-              </a:solidFill>
-              <a:effectLst/>
-              <a:uLnTx/>
-              <a:uFillTx/>
-              <a:latin typeface="Calibri" panose="020F0502020204030204"/>
-              <a:ea typeface="+mn-ea"/>
-              <a:cs typeface="+mn-cs"/>
-            </a:endParaRPr>
-          </a:p>
-        </p:txBody>
-      </p:sp>
-    </p:spTree>
-    <p:extLst>
-      <p:ext uri="{BB962C8B-B14F-4D97-AF65-F5344CB8AC3E}">
-        <p14:creationId xmlns:p14="http://schemas.microsoft.com/office/powerpoint/2010/main" val="1734577285"/>
       </p:ext>
     </p:extLst>
   </p:cSld>
@@ -2728,326 +2769,7 @@
           <a:bodyPr/>
           <a:lstStyle/>
           <a:p>
-            <a:pPr marL="0" marR="0" rtl="0">
-              <a:spcBef>
-                <a:spcPts val="0"/>
-              </a:spcBef>
-              <a:spcAft>
-                <a:spcPts val="0"/>
-              </a:spcAft>
-            </a:pPr>
-            <a:endParaRPr/>
-          </a:p>
-          <a:p>
-            <a:pPr marL="0" marR="0" rtl="0">
-              <a:spcBef>
-                <a:spcPts val="0"/>
-              </a:spcBef>
-              <a:spcAft>
-                <a:spcPts val="0"/>
-              </a:spcAft>
-            </a:pPr>
-            <a:endParaRPr/>
-          </a:p>
-          <a:p>
-            <a:pPr marL="0" marR="0" rtl="0">
-              <a:spcBef>
-                <a:spcPts val="0"/>
-              </a:spcBef>
-              <a:spcAft>
-                <a:spcPts val="0"/>
-              </a:spcAft>
-            </a:pPr>
-            <a:endParaRPr/>
-          </a:p>
-          <a:p>
-            <a:pPr marL="0" marR="0" rtl="0">
-              <a:spcBef>
-                <a:spcPts val="0"/>
-              </a:spcBef>
-              <a:spcAft>
-                <a:spcPts val="0"/>
-              </a:spcAft>
-            </a:pPr>
-            <a:endParaRPr/>
-          </a:p>
-          <a:p>
-            <a:pPr marL="0" marR="0" rtl="0">
-              <a:spcBef>
-                <a:spcPts val="0"/>
-              </a:spcBef>
-              <a:spcAft>
-                <a:spcPts val="0"/>
-              </a:spcAft>
-            </a:pPr>
-            <a:endParaRPr/>
-          </a:p>
-          <a:p>
-            <a:pPr marL="0" marR="0" rtl="0">
-              <a:spcBef>
-                <a:spcPts val="0"/>
-              </a:spcBef>
-              <a:spcAft>
-                <a:spcPts val="0"/>
-              </a:spcAft>
-            </a:pPr>
-            <a:endParaRPr/>
-          </a:p>
-          <a:p>
-            <a:pPr marL="0" marR="0" rtl="0">
-              <a:spcBef>
-                <a:spcPts val="0"/>
-              </a:spcBef>
-              <a:spcAft>
-                <a:spcPts val="0"/>
-              </a:spcAft>
-            </a:pPr>
-            <a:endParaRPr/>
-          </a:p>
-          <a:p>
-            <a:pPr marL="0" marR="0" rtl="0">
-              <a:spcBef>
-                <a:spcPts val="0"/>
-              </a:spcBef>
-              <a:spcAft>
-                <a:spcPts val="0"/>
-              </a:spcAft>
-            </a:pPr>
-            <a:endParaRPr/>
-          </a:p>
-          <a:p>
-            <a:pPr marL="0" marR="0" rtl="0">
-              <a:spcBef>
-                <a:spcPts val="0"/>
-              </a:spcBef>
-              <a:spcAft>
-                <a:spcPts val="0"/>
-              </a:spcAft>
-            </a:pPr>
-            <a:endParaRPr/>
-          </a:p>
-          <a:p>
-            <a:pPr marL="0" marR="0" rtl="0">
-              <a:spcBef>
-                <a:spcPts val="0"/>
-              </a:spcBef>
-              <a:spcAft>
-                <a:spcPts val="0"/>
-              </a:spcAft>
-            </a:pPr>
-            <a:endParaRPr/>
-          </a:p>
-          <a:p>
-            <a:pPr marL="0" marR="0" rtl="0">
-              <a:spcBef>
-                <a:spcPts val="0"/>
-              </a:spcBef>
-              <a:spcAft>
-                <a:spcPts val="0"/>
-              </a:spcAft>
-            </a:pPr>
-            <a:endParaRPr/>
-          </a:p>
-          <a:p>
-            <a:pPr marL="0" marR="0" rtl="0">
-              <a:spcBef>
-                <a:spcPts val="0"/>
-              </a:spcBef>
-              <a:spcAft>
-                <a:spcPts val="0"/>
-              </a:spcAft>
-            </a:pPr>
-            <a:endParaRPr/>
-          </a:p>
-          <a:p>
-            <a:pPr marL="0" marR="0" rtl="0">
-              <a:spcBef>
-                <a:spcPts val="0"/>
-              </a:spcBef>
-              <a:spcAft>
-                <a:spcPts val="0"/>
-              </a:spcAft>
-            </a:pPr>
-            <a:endParaRPr/>
-          </a:p>
-          <a:p>
-            <a:pPr marL="0" marR="0" rtl="0">
-              <a:spcBef>
-                <a:spcPts val="0"/>
-              </a:spcBef>
-              <a:spcAft>
-                <a:spcPts val="0"/>
-              </a:spcAft>
-            </a:pPr>
-            <a:endParaRPr/>
-          </a:p>
-          <a:p>
-            <a:pPr marL="0" marR="0" rtl="0">
-              <a:spcBef>
-                <a:spcPts val="0"/>
-              </a:spcBef>
-              <a:spcAft>
-                <a:spcPts val="0"/>
-              </a:spcAft>
-            </a:pPr>
-            <a:endParaRPr/>
-          </a:p>
-          <a:p>
-            <a:pPr marL="0" marR="0" rtl="0">
-              <a:spcBef>
-                <a:spcPts val="0"/>
-              </a:spcBef>
-              <a:spcAft>
-                <a:spcPts val="0"/>
-              </a:spcAft>
-            </a:pPr>
-            <a:endParaRPr/>
-          </a:p>
-          <a:p>
-            <a:pPr marL="0" marR="0" rtl="0">
-              <a:spcBef>
-                <a:spcPts val="0"/>
-              </a:spcBef>
-              <a:spcAft>
-                <a:spcPts val="0"/>
-              </a:spcAft>
-            </a:pPr>
-            <a:endParaRPr/>
-          </a:p>
-          <a:p>
-            <a:pPr marL="0" marR="0" rtl="0">
-              <a:spcBef>
-                <a:spcPts val="0"/>
-              </a:spcBef>
-              <a:spcAft>
-                <a:spcPts val="0"/>
-              </a:spcAft>
-            </a:pPr>
-            <a:endParaRPr/>
-          </a:p>
-          <a:p>
-            <a:pPr marL="0" marR="0" rtl="0">
-              <a:spcBef>
-                <a:spcPts val="0"/>
-              </a:spcBef>
-              <a:spcAft>
-                <a:spcPts val="0"/>
-              </a:spcAft>
-            </a:pPr>
-            <a:endParaRPr/>
-          </a:p>
-          <a:p>
-            <a:pPr marL="0" marR="0" rtl="0">
-              <a:spcBef>
-                <a:spcPts val="0"/>
-              </a:spcBef>
-              <a:spcAft>
-                <a:spcPts val="0"/>
-              </a:spcAft>
-            </a:pPr>
-            <a:endParaRPr/>
-          </a:p>
-          <a:p>
-            <a:pPr marL="0" marR="0" rtl="0">
-              <a:spcBef>
-                <a:spcPts val="0"/>
-              </a:spcBef>
-              <a:spcAft>
-                <a:spcPts val="0"/>
-              </a:spcAft>
-            </a:pPr>
-            <a:endParaRPr/>
-          </a:p>
-          <a:p>
-            <a:pPr marL="0" marR="0" rtl="0">
-              <a:spcBef>
-                <a:spcPts val="0"/>
-              </a:spcBef>
-              <a:spcAft>
-                <a:spcPts val="0"/>
-              </a:spcAft>
-            </a:pPr>
-            <a:endParaRPr/>
-          </a:p>
-          <a:p>
-            <a:pPr marL="0" marR="0" rtl="0">
-              <a:spcBef>
-                <a:spcPts val="0"/>
-              </a:spcBef>
-              <a:spcAft>
-                <a:spcPts val="0"/>
-              </a:spcAft>
-            </a:pPr>
-            <a:endParaRPr/>
-          </a:p>
-          <a:p>
-            <a:pPr marL="0" marR="0" rtl="0">
-              <a:spcBef>
-                <a:spcPts val="0"/>
-              </a:spcBef>
-              <a:spcAft>
-                <a:spcPts val="0"/>
-              </a:spcAft>
-            </a:pPr>
-            <a:endParaRPr/>
-          </a:p>
-          <a:p>
-            <a:pPr marL="0" marR="0" rtl="0">
-              <a:spcBef>
-                <a:spcPts val="0"/>
-              </a:spcBef>
-              <a:spcAft>
-                <a:spcPts val="0"/>
-              </a:spcAft>
-            </a:pPr>
-            <a:endParaRPr/>
-          </a:p>
-          <a:p>
-            <a:pPr marL="0" marR="0" rtl="0">
-              <a:spcBef>
-                <a:spcPts val="0"/>
-              </a:spcBef>
-              <a:spcAft>
-                <a:spcPts val="0"/>
-              </a:spcAft>
-            </a:pPr>
-            <a:endParaRPr/>
-          </a:p>
-          <a:p>
-            <a:pPr marL="0" marR="0" rtl="0">
-              <a:spcBef>
-                <a:spcPts val="0"/>
-              </a:spcBef>
-              <a:spcAft>
-                <a:spcPts val="0"/>
-              </a:spcAft>
-            </a:pPr>
-            <a:endParaRPr/>
-          </a:p>
-          <a:p>
-            <a:pPr marL="0" marR="0" rtl="0">
-              <a:spcBef>
-                <a:spcPts val="0"/>
-              </a:spcBef>
-              <a:spcAft>
-                <a:spcPts val="0"/>
-              </a:spcAft>
-            </a:pPr>
-            <a:endParaRPr/>
-          </a:p>
-          <a:p>
-            <a:pPr marL="0" marR="0" rtl="0">
-              <a:spcBef>
-                <a:spcPts val="0"/>
-              </a:spcBef>
-              <a:spcAft>
-                <a:spcPts val="0"/>
-              </a:spcAft>
-            </a:pPr>
-            <a:endParaRPr/>
-          </a:p>
-          <a:p>
-            <a:endParaRPr lang="en-US" dirty="0"/>
+            <a:endParaRPr lang="en-US"/>
           </a:p>
         </p:txBody>
       </p:sp>
@@ -3068,7 +2790,7 @@
           <a:p>
             <a:fld id="{4DC398A3-AF21-A342-B6A8-6929C36BB1BF}" type="slidenum">
               <a:rPr lang="en-US" smtClean="0"/>
-              <a:t>9</a:t>
+              <a:t>8</a:t>
             </a:fld>
             <a:endParaRPr lang="en-US"/>
           </a:p>
@@ -3077,7 +2799,7 @@
     </p:spTree>
     <p:extLst>
       <p:ext uri="{BB962C8B-B14F-4D97-AF65-F5344CB8AC3E}">
-        <p14:creationId xmlns:p14="http://schemas.microsoft.com/office/powerpoint/2010/main" val="1191104622"/>
+        <p14:creationId xmlns:p14="http://schemas.microsoft.com/office/powerpoint/2010/main" val="3869182022"/>
       </p:ext>
     </p:extLst>
   </p:cSld>
@@ -3131,111 +2853,326 @@
           <a:bodyPr/>
           <a:lstStyle/>
           <a:p>
-            <a:pPr marL="0" marR="0" indent="0" algn="l" defTabSz="914400" rtl="0" eaLnBrk="1" fontAlgn="auto" latinLnBrk="0" hangingPunct="1">
-              <a:lnSpc>
-                <a:spcPct val="200000"/>
-              </a:lnSpc>
+            <a:pPr marL="0" marR="0" rtl="0">
               <a:spcBef>
                 <a:spcPts val="0"/>
               </a:spcBef>
               <a:spcAft>
                 <a:spcPts val="0"/>
               </a:spcAft>
-              <a:buClrTx/>
-              <a:buSzTx/>
-              <a:buFontTx/>
-              <a:buNone/>
-              <a:tabLst/>
-              <a:defRPr/>
             </a:pPr>
-            <a:br>
-              <a:rPr lang="en-US" sz="9600" b="1" dirty="0">
-                <a:latin typeface="Helvetica Neue" panose="02000503000000020004" pitchFamily="2" charset="0"/>
-                <a:ea typeface="Helvetica Neue" panose="02000503000000020004" pitchFamily="2" charset="0"/>
-                <a:cs typeface="Helvetica Neue" panose="02000503000000020004" pitchFamily="2" charset="0"/>
-              </a:rPr>
-            </a:br>
-            <a:br>
-              <a:rPr lang="en-US" sz="9600" b="1" dirty="0">
-                <a:latin typeface="Helvetica Neue" panose="02000503000000020004" pitchFamily="2" charset="0"/>
-                <a:ea typeface="Helvetica Neue" panose="02000503000000020004" pitchFamily="2" charset="0"/>
-                <a:cs typeface="Helvetica Neue" panose="02000503000000020004" pitchFamily="2" charset="0"/>
-              </a:rPr>
-            </a:br>
-            <a:br>
-              <a:rPr lang="en-US" sz="9600" b="1" dirty="0">
-                <a:latin typeface="Helvetica Neue" panose="02000503000000020004" pitchFamily="2" charset="0"/>
-                <a:ea typeface="Helvetica Neue" panose="02000503000000020004" pitchFamily="2" charset="0"/>
-                <a:cs typeface="Helvetica Neue" panose="02000503000000020004" pitchFamily="2" charset="0"/>
-              </a:rPr>
-            </a:br>
-            <a:br>
-              <a:rPr lang="en-US" sz="9600" b="1" dirty="0">
-                <a:latin typeface="Helvetica Neue" panose="02000503000000020004" pitchFamily="2" charset="0"/>
-                <a:ea typeface="Helvetica Neue" panose="02000503000000020004" pitchFamily="2" charset="0"/>
-                <a:cs typeface="Helvetica Neue" panose="02000503000000020004" pitchFamily="2" charset="0"/>
-              </a:rPr>
-            </a:br>
-            <a:br>
-              <a:rPr lang="en-US" sz="9600" b="1" dirty="0">
-                <a:latin typeface="Helvetica Neue" panose="02000503000000020004" pitchFamily="2" charset="0"/>
-                <a:ea typeface="Helvetica Neue" panose="02000503000000020004" pitchFamily="2" charset="0"/>
-                <a:cs typeface="Helvetica Neue" panose="02000503000000020004" pitchFamily="2" charset="0"/>
-              </a:rPr>
-            </a:br>
-            <a:endParaRPr lang="en-US" sz="9600" b="1" dirty="0">
-              <a:latin typeface="Helvetica Neue" panose="02000503000000020004" pitchFamily="2" charset="0"/>
-              <a:ea typeface="Helvetica Neue" panose="02000503000000020004" pitchFamily="2" charset="0"/>
-              <a:cs typeface="Helvetica Neue" panose="02000503000000020004" pitchFamily="2" charset="0"/>
-            </a:endParaRPr>
-          </a:p>
-          <a:p>
-            <a:pPr marL="0" marR="0" indent="0" algn="l" defTabSz="914400" rtl="0" eaLnBrk="1" fontAlgn="auto" latinLnBrk="0" hangingPunct="1">
-              <a:lnSpc>
-                <a:spcPct val="200000"/>
-              </a:lnSpc>
+            <a:endParaRPr/>
+          </a:p>
+          <a:p>
+            <a:pPr marL="0" marR="0" rtl="0">
               <a:spcBef>
                 <a:spcPts val="0"/>
               </a:spcBef>
               <a:spcAft>
                 <a:spcPts val="0"/>
               </a:spcAft>
-              <a:buClrTx/>
-              <a:buSzTx/>
-              <a:buFontTx/>
-              <a:buNone/>
-              <a:tabLst/>
-              <a:defRPr/>
             </a:pPr>
-            <a:endParaRPr lang="en-US" sz="9600" b="1" dirty="0">
-              <a:latin typeface="Helvetica Neue" panose="02000503000000020004" pitchFamily="2" charset="0"/>
-              <a:ea typeface="Helvetica Neue" panose="02000503000000020004" pitchFamily="2" charset="0"/>
-              <a:cs typeface="Helvetica Neue" panose="02000503000000020004" pitchFamily="2" charset="0"/>
-            </a:endParaRPr>
-          </a:p>
-          <a:p>
-            <a:pPr marL="0" marR="0" indent="0" algn="l" defTabSz="914400" rtl="0" eaLnBrk="1" fontAlgn="auto" latinLnBrk="0" hangingPunct="1">
-              <a:lnSpc>
-                <a:spcPct val="200000"/>
-              </a:lnSpc>
+            <a:endParaRPr/>
+          </a:p>
+          <a:p>
+            <a:pPr marL="0" marR="0" rtl="0">
               <a:spcBef>
                 <a:spcPts val="0"/>
               </a:spcBef>
               <a:spcAft>
                 <a:spcPts val="0"/>
               </a:spcAft>
-              <a:buClrTx/>
-              <a:buSzTx/>
-              <a:buFontTx/>
-              <a:buNone/>
-              <a:tabLst/>
-              <a:defRPr/>
             </a:pPr>
-            <a:endParaRPr lang="en-US" sz="9600" b="1" dirty="0">
-              <a:latin typeface="Helvetica Neue" panose="02000503000000020004" pitchFamily="2" charset="0"/>
-              <a:ea typeface="Helvetica Neue" panose="02000503000000020004" pitchFamily="2" charset="0"/>
-              <a:cs typeface="Helvetica Neue" panose="02000503000000020004" pitchFamily="2" charset="0"/>
-            </a:endParaRPr>
+            <a:endParaRPr/>
+          </a:p>
+          <a:p>
+            <a:pPr marL="0" marR="0" rtl="0">
+              <a:spcBef>
+                <a:spcPts val="0"/>
+              </a:spcBef>
+              <a:spcAft>
+                <a:spcPts val="0"/>
+              </a:spcAft>
+            </a:pPr>
+            <a:endParaRPr/>
+          </a:p>
+          <a:p>
+            <a:pPr marL="0" marR="0" rtl="0">
+              <a:spcBef>
+                <a:spcPts val="0"/>
+              </a:spcBef>
+              <a:spcAft>
+                <a:spcPts val="0"/>
+              </a:spcAft>
+            </a:pPr>
+            <a:endParaRPr/>
+          </a:p>
+          <a:p>
+            <a:pPr marL="0" marR="0" rtl="0">
+              <a:spcBef>
+                <a:spcPts val="0"/>
+              </a:spcBef>
+              <a:spcAft>
+                <a:spcPts val="0"/>
+              </a:spcAft>
+            </a:pPr>
+            <a:endParaRPr/>
+          </a:p>
+          <a:p>
+            <a:pPr marL="0" marR="0" rtl="0">
+              <a:spcBef>
+                <a:spcPts val="0"/>
+              </a:spcBef>
+              <a:spcAft>
+                <a:spcPts val="0"/>
+              </a:spcAft>
+            </a:pPr>
+            <a:endParaRPr/>
+          </a:p>
+          <a:p>
+            <a:pPr marL="0" marR="0" rtl="0">
+              <a:spcBef>
+                <a:spcPts val="0"/>
+              </a:spcBef>
+              <a:spcAft>
+                <a:spcPts val="0"/>
+              </a:spcAft>
+            </a:pPr>
+            <a:endParaRPr/>
+          </a:p>
+          <a:p>
+            <a:pPr marL="0" marR="0" rtl="0">
+              <a:spcBef>
+                <a:spcPts val="0"/>
+              </a:spcBef>
+              <a:spcAft>
+                <a:spcPts val="0"/>
+              </a:spcAft>
+            </a:pPr>
+            <a:endParaRPr/>
+          </a:p>
+          <a:p>
+            <a:pPr marL="0" marR="0" rtl="0">
+              <a:spcBef>
+                <a:spcPts val="0"/>
+              </a:spcBef>
+              <a:spcAft>
+                <a:spcPts val="0"/>
+              </a:spcAft>
+            </a:pPr>
+            <a:endParaRPr/>
+          </a:p>
+          <a:p>
+            <a:pPr marL="0" marR="0" rtl="0">
+              <a:spcBef>
+                <a:spcPts val="0"/>
+              </a:spcBef>
+              <a:spcAft>
+                <a:spcPts val="0"/>
+              </a:spcAft>
+            </a:pPr>
+            <a:endParaRPr/>
+          </a:p>
+          <a:p>
+            <a:pPr marL="0" marR="0" rtl="0">
+              <a:spcBef>
+                <a:spcPts val="0"/>
+              </a:spcBef>
+              <a:spcAft>
+                <a:spcPts val="0"/>
+              </a:spcAft>
+            </a:pPr>
+            <a:endParaRPr/>
+          </a:p>
+          <a:p>
+            <a:pPr marL="0" marR="0" rtl="0">
+              <a:spcBef>
+                <a:spcPts val="0"/>
+              </a:spcBef>
+              <a:spcAft>
+                <a:spcPts val="0"/>
+              </a:spcAft>
+            </a:pPr>
+            <a:endParaRPr/>
+          </a:p>
+          <a:p>
+            <a:pPr marL="0" marR="0" rtl="0">
+              <a:spcBef>
+                <a:spcPts val="0"/>
+              </a:spcBef>
+              <a:spcAft>
+                <a:spcPts val="0"/>
+              </a:spcAft>
+            </a:pPr>
+            <a:endParaRPr/>
+          </a:p>
+          <a:p>
+            <a:pPr marL="0" marR="0" rtl="0">
+              <a:spcBef>
+                <a:spcPts val="0"/>
+              </a:spcBef>
+              <a:spcAft>
+                <a:spcPts val="0"/>
+              </a:spcAft>
+            </a:pPr>
+            <a:endParaRPr/>
+          </a:p>
+          <a:p>
+            <a:pPr marL="0" marR="0" rtl="0">
+              <a:spcBef>
+                <a:spcPts val="0"/>
+              </a:spcBef>
+              <a:spcAft>
+                <a:spcPts val="0"/>
+              </a:spcAft>
+            </a:pPr>
+            <a:endParaRPr/>
+          </a:p>
+          <a:p>
+            <a:pPr marL="0" marR="0" rtl="0">
+              <a:spcBef>
+                <a:spcPts val="0"/>
+              </a:spcBef>
+              <a:spcAft>
+                <a:spcPts val="0"/>
+              </a:spcAft>
+            </a:pPr>
+            <a:endParaRPr/>
+          </a:p>
+          <a:p>
+            <a:pPr marL="0" marR="0" rtl="0">
+              <a:spcBef>
+                <a:spcPts val="0"/>
+              </a:spcBef>
+              <a:spcAft>
+                <a:spcPts val="0"/>
+              </a:spcAft>
+            </a:pPr>
+            <a:endParaRPr/>
+          </a:p>
+          <a:p>
+            <a:pPr marL="0" marR="0" rtl="0">
+              <a:spcBef>
+                <a:spcPts val="0"/>
+              </a:spcBef>
+              <a:spcAft>
+                <a:spcPts val="0"/>
+              </a:spcAft>
+            </a:pPr>
+            <a:endParaRPr/>
+          </a:p>
+          <a:p>
+            <a:pPr marL="0" marR="0" rtl="0">
+              <a:spcBef>
+                <a:spcPts val="0"/>
+              </a:spcBef>
+              <a:spcAft>
+                <a:spcPts val="0"/>
+              </a:spcAft>
+            </a:pPr>
+            <a:endParaRPr/>
+          </a:p>
+          <a:p>
+            <a:pPr marL="0" marR="0" rtl="0">
+              <a:spcBef>
+                <a:spcPts val="0"/>
+              </a:spcBef>
+              <a:spcAft>
+                <a:spcPts val="0"/>
+              </a:spcAft>
+            </a:pPr>
+            <a:endParaRPr/>
+          </a:p>
+          <a:p>
+            <a:pPr marL="0" marR="0" rtl="0">
+              <a:spcBef>
+                <a:spcPts val="0"/>
+              </a:spcBef>
+              <a:spcAft>
+                <a:spcPts val="0"/>
+              </a:spcAft>
+            </a:pPr>
+            <a:endParaRPr/>
+          </a:p>
+          <a:p>
+            <a:pPr marL="0" marR="0" rtl="0">
+              <a:spcBef>
+                <a:spcPts val="0"/>
+              </a:spcBef>
+              <a:spcAft>
+                <a:spcPts val="0"/>
+              </a:spcAft>
+            </a:pPr>
+            <a:endParaRPr/>
+          </a:p>
+          <a:p>
+            <a:pPr marL="0" marR="0" rtl="0">
+              <a:spcBef>
+                <a:spcPts val="0"/>
+              </a:spcBef>
+              <a:spcAft>
+                <a:spcPts val="0"/>
+              </a:spcAft>
+            </a:pPr>
+            <a:endParaRPr/>
+          </a:p>
+          <a:p>
+            <a:pPr marL="0" marR="0" rtl="0">
+              <a:spcBef>
+                <a:spcPts val="0"/>
+              </a:spcBef>
+              <a:spcAft>
+                <a:spcPts val="0"/>
+              </a:spcAft>
+            </a:pPr>
+            <a:endParaRPr/>
+          </a:p>
+          <a:p>
+            <a:pPr marL="0" marR="0" rtl="0">
+              <a:spcBef>
+                <a:spcPts val="0"/>
+              </a:spcBef>
+              <a:spcAft>
+                <a:spcPts val="0"/>
+              </a:spcAft>
+            </a:pPr>
+            <a:endParaRPr/>
+          </a:p>
+          <a:p>
+            <a:pPr marL="0" marR="0" rtl="0">
+              <a:spcBef>
+                <a:spcPts val="0"/>
+              </a:spcBef>
+              <a:spcAft>
+                <a:spcPts val="0"/>
+              </a:spcAft>
+            </a:pPr>
+            <a:endParaRPr/>
+          </a:p>
+          <a:p>
+            <a:pPr marL="0" marR="0" rtl="0">
+              <a:spcBef>
+                <a:spcPts val="0"/>
+              </a:spcBef>
+              <a:spcAft>
+                <a:spcPts val="0"/>
+              </a:spcAft>
+            </a:pPr>
+            <a:endParaRPr/>
+          </a:p>
+          <a:p>
+            <a:pPr marL="0" marR="0" rtl="0">
+              <a:spcBef>
+                <a:spcPts val="0"/>
+              </a:spcBef>
+              <a:spcAft>
+                <a:spcPts val="0"/>
+              </a:spcAft>
+            </a:pPr>
+            <a:endParaRPr/>
+          </a:p>
+          <a:p>
+            <a:endParaRPr lang="en-US" dirty="0"/>
           </a:p>
         </p:txBody>
       </p:sp>
@@ -3254,78 +3191,18 @@
           <a:bodyPr/>
           <a:lstStyle/>
           <a:p>
-            <a:pPr marL="0" marR="0" lvl="0" indent="0" algn="r" defTabSz="914400" rtl="0" eaLnBrk="1" fontAlgn="auto" latinLnBrk="0" hangingPunct="1">
-              <a:lnSpc>
-                <a:spcPct val="100000"/>
-              </a:lnSpc>
-              <a:spcBef>
-                <a:spcPts val="0"/>
-              </a:spcBef>
-              <a:spcAft>
-                <a:spcPts val="0"/>
-              </a:spcAft>
-              <a:buClrTx/>
-              <a:buSzTx/>
-              <a:buFontTx/>
-              <a:buNone/>
-              <a:tabLst/>
-              <a:defRPr/>
-            </a:pPr>
             <a:fld id="{4DC398A3-AF21-A342-B6A8-6929C36BB1BF}" type="slidenum">
-              <a:rPr kumimoji="0" lang="en-US" sz="1200" b="0" i="0" u="none" strike="noStrike" kern="1200" cap="none" spc="0" normalizeH="0" baseline="0" noProof="0" smtClean="0">
-                <a:ln>
-                  <a:noFill/>
-                </a:ln>
-                <a:solidFill>
-                  <a:prstClr val="black"/>
-                </a:solidFill>
-                <a:effectLst/>
-                <a:uLnTx/>
-                <a:uFillTx/>
-                <a:latin typeface="Calibri" panose="020F0502020204030204"/>
-                <a:ea typeface="+mn-ea"/>
-                <a:cs typeface="+mn-cs"/>
-              </a:rPr>
-              <a:pPr marL="0" marR="0" lvl="0" indent="0" algn="r" defTabSz="914400" rtl="0" eaLnBrk="1" fontAlgn="auto" latinLnBrk="0" hangingPunct="1">
-                <a:lnSpc>
-                  <a:spcPct val="100000"/>
-                </a:lnSpc>
-                <a:spcBef>
-                  <a:spcPts val="0"/>
-                </a:spcBef>
-                <a:spcAft>
-                  <a:spcPts val="0"/>
-                </a:spcAft>
-                <a:buClrTx/>
-                <a:buSzTx/>
-                <a:buFontTx/>
-                <a:buNone/>
-                <a:tabLst/>
-                <a:defRPr/>
-              </a:pPr>
-              <a:t>10</a:t>
+              <a:rPr lang="en-US" smtClean="0"/>
+              <a:t>9</a:t>
             </a:fld>
-            <a:endParaRPr kumimoji="0" lang="en-US" sz="1200" b="0" i="0" u="none" strike="noStrike" kern="1200" cap="none" spc="0" normalizeH="0" baseline="0" noProof="0">
-              <a:ln>
-                <a:noFill/>
-              </a:ln>
-              <a:solidFill>
-                <a:prstClr val="black"/>
-              </a:solidFill>
-              <a:effectLst/>
-              <a:uLnTx/>
-              <a:uFillTx/>
-              <a:latin typeface="Calibri" panose="020F0502020204030204"/>
-              <a:ea typeface="+mn-ea"/>
-              <a:cs typeface="+mn-cs"/>
-            </a:endParaRPr>
+            <a:endParaRPr lang="en-US"/>
           </a:p>
         </p:txBody>
       </p:sp>
     </p:spTree>
     <p:extLst>
       <p:ext uri="{BB962C8B-B14F-4D97-AF65-F5344CB8AC3E}">
-        <p14:creationId xmlns:p14="http://schemas.microsoft.com/office/powerpoint/2010/main" val="596825902"/>
+        <p14:creationId xmlns:p14="http://schemas.microsoft.com/office/powerpoint/2010/main" val="1191104622"/>
       </p:ext>
     </p:extLst>
   </p:cSld>
@@ -6733,7 +6610,7 @@
     <p:bg>
       <p:bgPr>
         <a:solidFill>
-          <a:schemeClr val="tx1"/>
+          <a:srgbClr val="7030A0"/>
         </a:solidFill>
         <a:effectLst/>
       </p:bgPr>
@@ -7683,7 +7560,7 @@
           <a:noFill/>
           <a:ln w="38100">
             <a:solidFill>
-              <a:srgbClr val="7030A0"/>
+              <a:schemeClr val="bg1"/>
             </a:solidFill>
           </a:ln>
         </p:spPr>
@@ -8703,7 +8580,7 @@
           <a:noFill/>
           <a:ln w="38100">
             <a:solidFill>
-              <a:srgbClr val="7030A0"/>
+              <a:schemeClr val="bg1"/>
             </a:solidFill>
           </a:ln>
         </p:spPr>
@@ -9638,25 +9515,23 @@
         </p:nvSpPr>
         <p:spPr>
           <a:xfrm>
-            <a:off x="3306195" y="258919"/>
-            <a:ext cx="6849952" cy="523220"/>
+            <a:off x="0" y="0"/>
+            <a:ext cx="12192000" cy="585216"/>
           </a:xfrm>
           <a:prstGeom prst="rect">
             <a:avLst/>
           </a:prstGeom>
-          <a:solidFill>
-            <a:srgbClr val="7030A0"/>
-          </a:solidFill>
+          <a:noFill/>
         </p:spPr>
         <p:txBody>
-          <a:bodyPr wrap="none">
+          <a:bodyPr wrap="square">
             <a:spAutoFit/>
           </a:bodyPr>
           <a:lstStyle/>
           <a:p>
             <a:pPr algn="ctr"/>
             <a:r>
-              <a:rPr lang="en-US" sz="2800" b="1" dirty="0">
+              <a:rPr lang="en-US" sz="3200" b="1" dirty="0">
                 <a:solidFill>
                   <a:schemeClr val="bg1"/>
                 </a:solidFill>
@@ -9666,7 +9541,7 @@
               </a:rPr>
               <a:t>Architrino Path History and Wake Hits</a:t>
             </a:r>
-            <a:endParaRPr lang="en-US" sz="2800" b="1" baseline="30000" dirty="0">
+            <a:endParaRPr lang="en-US" sz="3200" b="1" baseline="30000" dirty="0">
               <a:solidFill>
                 <a:schemeClr val="bg1"/>
               </a:solidFill>
@@ -9931,7 +9806,7 @@
     <p:bg>
       <p:bgPr>
         <a:solidFill>
-          <a:schemeClr val="tx1"/>
+          <a:srgbClr val="7030A0"/>
         </a:solidFill>
         <a:effectLst/>
       </p:bgPr>
@@ -10656,7 +10531,7 @@
           <a:noFill/>
           <a:ln w="38100">
             <a:solidFill>
-              <a:srgbClr val="7030A0"/>
+              <a:schemeClr val="bg1"/>
             </a:solidFill>
           </a:ln>
         </p:spPr>
@@ -11539,7 +11414,7 @@
           <a:noFill/>
           <a:ln w="38100">
             <a:solidFill>
-              <a:srgbClr val="7030A0"/>
+              <a:schemeClr val="bg1"/>
             </a:solidFill>
           </a:ln>
         </p:spPr>
@@ -12694,25 +12569,23 @@
         </p:nvSpPr>
         <p:spPr>
           <a:xfrm>
-            <a:off x="2750180" y="307606"/>
-            <a:ext cx="6849952" cy="523220"/>
+            <a:off x="0" y="0"/>
+            <a:ext cx="12192000" cy="585216"/>
           </a:xfrm>
           <a:prstGeom prst="rect">
             <a:avLst/>
           </a:prstGeom>
-          <a:solidFill>
-            <a:srgbClr val="7030A0"/>
-          </a:solidFill>
+          <a:noFill/>
         </p:spPr>
         <p:txBody>
-          <a:bodyPr wrap="none">
+          <a:bodyPr wrap="square">
             <a:spAutoFit/>
           </a:bodyPr>
           <a:lstStyle/>
           <a:p>
             <a:pPr algn="ctr"/>
             <a:r>
-              <a:rPr lang="en-US" sz="2800" b="1" dirty="0">
+              <a:rPr lang="en-US" sz="3200" b="1" dirty="0">
                 <a:solidFill>
                   <a:schemeClr val="bg1"/>
                 </a:solidFill>
@@ -12722,7 +12595,7 @@
               </a:rPr>
               <a:t>Architrino Path History and Wake Hits</a:t>
             </a:r>
-            <a:endParaRPr lang="en-US" sz="2800" b="1" baseline="30000" dirty="0">
+            <a:endParaRPr lang="en-US" sz="3200" b="1" baseline="30000" dirty="0">
               <a:solidFill>
                 <a:schemeClr val="bg1"/>
               </a:solidFill>
@@ -13052,7 +12925,29 @@
                 <a:ea typeface="Helvetica Neue" panose="02000503000000020004" pitchFamily="2" charset="0"/>
                 <a:cs typeface="Helvetica Neue" panose="02000503000000020004" pitchFamily="2" charset="0"/>
               </a:rPr>
-              <a:t>The binary symmetry point occurs when architrino speed |v| = cf.</a:t>
+              <a:t>The binary symmetry point occurs when architrino speed |v| = c</a:t>
+            </a:r>
+            <a:r>
+              <a:rPr baseline="-25000">
+                <a:solidFill>
+                  <a:prstClr val="white"/>
+                </a:solidFill>
+                <a:latin typeface="Helvetica Neue" panose="02000503000000020004" pitchFamily="2" charset="0"/>
+                <a:ea typeface="Helvetica Neue" panose="02000503000000020004" pitchFamily="2" charset="0"/>
+                <a:cs typeface="Helvetica Neue" panose="02000503000000020004" pitchFamily="2" charset="0"/>
+              </a:rPr>
+              <a:t>f</a:t>
+            </a:r>
+            <a:r>
+              <a:rPr>
+                <a:solidFill>
+                  <a:prstClr val="white"/>
+                </a:solidFill>
+                <a:latin typeface="Helvetica Neue" panose="02000503000000020004" pitchFamily="2" charset="0"/>
+                <a:ea typeface="Helvetica Neue" panose="02000503000000020004" pitchFamily="2" charset="0"/>
+                <a:cs typeface="Helvetica Neue" panose="02000503000000020004" pitchFamily="2" charset="0"/>
+              </a:rPr>
+              <a:t>.</a:t>
             </a:r>
             <a:endParaRPr lang="en-US" dirty="0">
               <a:solidFill>
@@ -13544,8 +13439,8 @@
         </p:nvSpPr>
         <p:spPr>
           <a:xfrm>
-            <a:off x="796730" y="91586"/>
-            <a:ext cx="10854481" cy="777875"/>
+            <a:off x="0" y="0"/>
+            <a:ext cx="12192000" cy="585216"/>
           </a:xfrm>
           <a:prstGeom prst="rect">
             <a:avLst/>
@@ -13581,7 +13476,7 @@
             </a:lvl1pPr>
           </a:lstStyle>
           <a:p>
-            <a:pPr marL="0" marR="0" lvl="0" indent="0" algn="l" defTabSz="914400" rtl="0" eaLnBrk="1" fontAlgn="auto" latinLnBrk="0" hangingPunct="1">
+            <a:pPr marL="0" marR="0" lvl="0" indent="0" algn="ctr" defTabSz="914400" rtl="0" eaLnBrk="1" fontAlgn="auto" latinLnBrk="0" hangingPunct="1">
               <a:lnSpc>
                 <a:spcPct val="90000"/>
               </a:lnSpc>
@@ -13599,7 +13494,7 @@
               <a:defRPr/>
             </a:pPr>
             <a:r>
-              <a:rPr kumimoji="0" lang="en-US" sz="4400" b="1" i="0" u="none" strike="noStrike" kern="1200" cap="none" spc="0" normalizeH="0" baseline="0" noProof="0" dirty="0">
+              <a:rPr kumimoji="0" lang="en-US" sz="3200" b="1" i="0" u="none" strike="noStrike" kern="1200" cap="none" spc="0" normalizeH="0" baseline="0" noProof="0" dirty="0">
                 <a:ln>
                   <a:noFill/>
                 </a:ln>
@@ -14715,9 +14610,9 @@
           <p:nvPr/>
         </p:nvCxnSpPr>
         <p:spPr>
-          <a:xfrm>
-            <a:off x="7091183" y="0"/>
-            <a:ext cx="0" cy="6858000"/>
+          <a:xfrm flipH="1">
+            <a:off x="7072815" y="560599"/>
+            <a:ext cx="20662" cy="5641418"/>
           </a:xfrm>
           <a:prstGeom prst="line">
             <a:avLst/>
@@ -14727,8 +14622,8 @@
               <a:schemeClr val="bg1"/>
             </a:solidFill>
             <a:prstDash val="solid"/>
-            <a:headEnd type="triangle" w="lg" len="lg"/>
-            <a:tailEnd type="triangle" w="lg" len="lg"/>
+            <a:headEnd type="none" w="lg" len="lg"/>
+            <a:tailEnd type="none" w="lg" len="lg"/>
           </a:ln>
         </p:spPr>
         <p:style>
@@ -16460,8 +16355,8 @@
         </p:nvSpPr>
         <p:spPr>
           <a:xfrm>
-            <a:off x="2534264" y="52433"/>
-            <a:ext cx="3284810" cy="523220"/>
+            <a:off x="0" y="0"/>
+            <a:ext cx="12192000" cy="585216"/>
           </a:xfrm>
           <a:prstGeom prst="rect">
             <a:avLst/>
@@ -16471,14 +16366,14 @@
           </a:solidFill>
         </p:spPr>
         <p:txBody>
-          <a:bodyPr wrap="none">
+          <a:bodyPr wrap="square">
             <a:spAutoFit/>
           </a:bodyPr>
           <a:lstStyle/>
           <a:p>
             <a:pPr algn="ctr"/>
             <a:r>
-              <a:rPr lang="en-US" sz="2800" b="1" dirty="0">
+              <a:rPr lang="en-US" sz="3200" b="1" dirty="0">
                 <a:solidFill>
                   <a:schemeClr val="bg1"/>
                 </a:solidFill>
@@ -16488,7 +16383,7 @@
               </a:rPr>
               <a:t>Architrino Assembly Architecture</a:t>
             </a:r>
-            <a:endParaRPr lang="en-US" sz="2800" b="1" baseline="30000" dirty="0">
+            <a:endParaRPr lang="en-US" sz="3200" b="1" baseline="30000" dirty="0">
               <a:solidFill>
                 <a:schemeClr val="bg1"/>
               </a:solidFill>
@@ -16560,8 +16455,8 @@
         </p:nvCxnSpPr>
         <p:spPr>
           <a:xfrm flipV="1">
-            <a:off x="1249796" y="21500"/>
-            <a:ext cx="0" cy="6836500"/>
+            <a:off x="1249796" y="487017"/>
+            <a:ext cx="0" cy="5810383"/>
           </a:xfrm>
           <a:prstGeom prst="straightConnector1">
             <a:avLst/>
@@ -16570,7 +16465,7 @@
             <a:solidFill>
               <a:schemeClr val="bg1"/>
             </a:solidFill>
-            <a:headEnd type="triangle" w="lg" len="lg"/>
+            <a:headEnd type="none" w="lg" len="lg"/>
             <a:tailEnd type="triangle" w="lg" len="lg"/>
           </a:ln>
         </p:spPr>
@@ -16603,7 +16498,7 @@
         </p:nvSpPr>
         <p:spPr>
           <a:xfrm>
-            <a:off x="2050550" y="6388664"/>
+            <a:off x="4693208" y="6368139"/>
             <a:ext cx="4098238" cy="437428"/>
           </a:xfrm>
           <a:prstGeom prst="rect">
@@ -16668,7 +16563,7 @@
         </p:nvSpPr>
         <p:spPr>
           <a:xfrm>
-            <a:off x="42329" y="685956"/>
+            <a:off x="62494" y="846339"/>
             <a:ext cx="1093569" cy="646331"/>
           </a:xfrm>
           <a:prstGeom prst="rect">
@@ -16729,7 +16624,7 @@
         </p:nvSpPr>
         <p:spPr>
           <a:xfrm>
-            <a:off x="6187636" y="5392688"/>
+            <a:off x="6299738" y="5873111"/>
             <a:ext cx="885179" cy="369332"/>
           </a:xfrm>
           <a:prstGeom prst="rect">
@@ -17781,7 +17676,7 @@
         </p:nvSpPr>
         <p:spPr>
           <a:xfrm>
-            <a:off x="7766488" y="314043"/>
+            <a:off x="7756549" y="900593"/>
             <a:ext cx="4144429" cy="5078313"/>
           </a:xfrm>
           <a:prstGeom prst="rect">
@@ -18406,149 +18301,6 @@
 </file>
 
 <file path=ppt/slides/slide14.xml><?xml version="1.0" encoding="utf-8"?>
-<p:sld xmlns:a="http://schemas.openxmlformats.org/drawingml/2006/main" xmlns:r="http://schemas.openxmlformats.org/officeDocument/2006/relationships" xmlns:p="http://schemas.openxmlformats.org/presentationml/2006/main">
-  <p:cSld>
-    <p:bg>
-      <p:bgPr>
-        <a:solidFill>
-          <a:srgbClr val="7030A0"/>
-        </a:solidFill>
-        <a:effectLst/>
-      </p:bgPr>
-    </p:bg>
-    <p:spTree>
-      <p:nvGrpSpPr>
-        <p:cNvPr id="1" name="">
-          <a:extLst>
-            <a:ext uri="{FF2B5EF4-FFF2-40B4-BE49-F238E27FC236}">
-              <a16:creationId xmlns:a16="http://schemas.microsoft.com/office/drawing/2014/main" id="{804AC981-79ED-95B2-006C-1F07F7D1021C}"/>
-            </a:ext>
-          </a:extLst>
-        </p:cNvPr>
-        <p:cNvGrpSpPr/>
-        <p:nvPr/>
-      </p:nvGrpSpPr>
-      <p:grpSpPr>
-        <a:xfrm>
-          <a:off x="0" y="0"/>
-          <a:ext cx="0" cy="0"/>
-          <a:chOff x="0" y="0"/>
-          <a:chExt cx="0" cy="0"/>
-        </a:xfrm>
-      </p:grpSpPr>
-      <p:sp>
-        <p:nvSpPr>
-          <p:cNvPr id="2" name="TextBox 1">
-            <a:extLst>
-              <a:ext uri="{FF2B5EF4-FFF2-40B4-BE49-F238E27FC236}">
-                <a16:creationId xmlns:a16="http://schemas.microsoft.com/office/drawing/2014/main" id="{25D5C38C-76F4-C791-A566-84A8B395A016}"/>
-              </a:ext>
-            </a:extLst>
-          </p:cNvPr>
-          <p:cNvSpPr txBox="1"/>
-          <p:nvPr/>
-        </p:nvSpPr>
-        <p:spPr>
-          <a:xfrm>
-            <a:off x="0" y="358254"/>
-            <a:ext cx="12191999" cy="2785378"/>
-          </a:xfrm>
-          <a:prstGeom prst="rect">
-            <a:avLst/>
-          </a:prstGeom>
-          <a:noFill/>
-        </p:spPr>
-        <p:txBody>
-          <a:bodyPr wrap="square" rtlCol="0">
-            <a:spAutoFit/>
-          </a:bodyPr>
-          <a:lstStyle/>
-          <a:p>
-            <a:pPr marL="0" marR="0" lvl="0" indent="0" algn="ctr" defTabSz="914400" rtl="0" eaLnBrk="1" fontAlgn="auto" latinLnBrk="0" hangingPunct="1">
-              <a:lnSpc>
-                <a:spcPts val="11000"/>
-              </a:lnSpc>
-              <a:spcBef>
-                <a:spcPts val="0"/>
-              </a:spcBef>
-              <a:spcAft>
-                <a:spcPts val="0"/>
-              </a:spcAft>
-              <a:buClrTx/>
-              <a:buSzTx/>
-              <a:buFontTx/>
-              <a:buNone/>
-              <a:tabLst/>
-              <a:defRPr/>
-            </a:pPr>
-            <a:endParaRPr/>
-          </a:p>
-          <a:p>
-            <a:pPr marL="0" marR="0" lvl="0" indent="0" algn="ctr" defTabSz="914400" rtl="0" eaLnBrk="1" fontAlgn="auto" latinLnBrk="0" hangingPunct="1">
-              <a:lnSpc>
-                <a:spcPts val="10000"/>
-              </a:lnSpc>
-              <a:spcBef>
-                <a:spcPts val="0"/>
-              </a:spcBef>
-              <a:spcAft>
-                <a:spcPts val="0"/>
-              </a:spcAft>
-              <a:buClrTx/>
-              <a:buSzTx/>
-              <a:buFontTx/>
-              <a:buNone/>
-              <a:tabLst/>
-              <a:defRPr/>
-            </a:pPr>
-            <a:r>
-              <a:rPr kumimoji="0" lang="en-US" sz="9600" b="1" i="0" u="none" strike="noStrike" kern="1200" cap="none" spc="0" normalizeH="0" baseline="0" noProof="0" dirty="0">
-                <a:ln>
-                  <a:noFill/>
-                </a:ln>
-                <a:solidFill>
-                  <a:srgbClr val="FFC000"/>
-                </a:solidFill>
-                <a:effectLst/>
-                <a:uLnTx/>
-                <a:uFillTx/>
-                <a:latin typeface="Helvetica Neue Condensed Black" panose="02000503000000020004" pitchFamily="2" charset="0"/>
-                <a:ea typeface="Helvetica Neue Condensed Black" panose="02000503000000020004" pitchFamily="2" charset="0"/>
-                <a:cs typeface="Helvetica Neue Condensed Black" panose="02000503000000020004" pitchFamily="2" charset="0"/>
-              </a:rPr>
-              <a:t>Causal Wakes and Zeno's Paradox</a:t>
-            </a:r>
-            <a:endParaRPr kumimoji="0" lang="en-US" sz="8000" b="1" i="0" u="none" strike="noStrike" kern="1200" cap="none" spc="0" normalizeH="0" baseline="0" noProof="0" dirty="0">
-              <a:ln>
-                <a:noFill/>
-              </a:ln>
-              <a:solidFill>
-                <a:srgbClr val="FF8AD8"/>
-              </a:solidFill>
-              <a:effectLst/>
-              <a:uLnTx/>
-              <a:uFillTx/>
-              <a:latin typeface="Helvetica Neue Condensed Black" panose="02000503000000020004" pitchFamily="2" charset="0"/>
-              <a:ea typeface="Helvetica Neue Condensed Black" panose="02000503000000020004" pitchFamily="2" charset="0"/>
-              <a:cs typeface="Helvetica Neue Condensed Black" panose="02000503000000020004" pitchFamily="2" charset="0"/>
-            </a:endParaRPr>
-          </a:p>
-        </p:txBody>
-      </p:sp>
-    </p:spTree>
-    <p:extLst>
-      <p:ext uri="{BB962C8B-B14F-4D97-AF65-F5344CB8AC3E}">
-        <p14:creationId xmlns:p14="http://schemas.microsoft.com/office/powerpoint/2010/main" val="3464736619"/>
-      </p:ext>
-    </p:extLst>
-  </p:cSld>
-  <p:clrMapOvr>
-    <a:masterClrMapping/>
-  </p:clrMapOvr>
-</p:sld>
-</file>
-
-<file path=ppt/slides/slide15.xml><?xml version="1.0" encoding="utf-8"?>
 <p:sld xmlns:a="http://schemas.openxmlformats.org/drawingml/2006/main" xmlns:r="http://schemas.openxmlformats.org/officeDocument/2006/relationships" xmlns:p="http://schemas.openxmlformats.org/presentationml/2006/main">
   <p:cSld>
     <p:bg>
@@ -18755,8 +18507,8 @@
         </p:nvSpPr>
         <p:spPr>
           <a:xfrm>
-            <a:off x="680197" y="309028"/>
-            <a:ext cx="11009488" cy="523220"/>
+            <a:off x="0" y="0"/>
+            <a:ext cx="12192000" cy="585216"/>
           </a:xfrm>
           <a:prstGeom prst="rect">
             <a:avLst/>
@@ -18764,7 +18516,7 @@
           <a:noFill/>
         </p:spPr>
         <p:txBody>
-          <a:bodyPr wrap="none">
+          <a:bodyPr wrap="square">
             <a:spAutoFit/>
           </a:bodyPr>
           <a:lstStyle/>
@@ -18787,7 +18539,7 @@
               <a:defRPr/>
             </a:pPr>
             <a:r>
-              <a:rPr kumimoji="0" lang="en-US" sz="2800" b="1" i="0" u="none" strike="noStrike" kern="1200" cap="none" spc="0" normalizeH="0" baseline="0" noProof="0" dirty="0">
+              <a:rPr kumimoji="0" lang="en-US" sz="3200" b="1" i="0" u="none" strike="noStrike" kern="1200" cap="none" spc="0" normalizeH="0" baseline="0" noProof="0" dirty="0">
                 <a:ln>
                   <a:noFill/>
                 </a:ln>
@@ -18801,7 +18553,7 @@
                 <a:ea typeface="Helvetica Neue" panose="02000503000000020004" pitchFamily="2" charset="0"/>
                 <a:cs typeface="Helvetica Neue" panose="02000503000000020004" pitchFamily="2" charset="0"/>
               </a:rPr>
-              <a:t>Causal Wakes and the 1/r Curve</a:t>
+              <a:t>Zeno’s Paradox, Causal Wakes, and the 1/r Curve</a:t>
             </a:r>
           </a:p>
         </p:txBody>
@@ -18820,8 +18572,8 @@
         </p:nvSpPr>
         <p:spPr>
           <a:xfrm>
-            <a:off x="337206" y="907318"/>
-            <a:ext cx="11695463" cy="1815882"/>
+            <a:off x="371047" y="1354579"/>
+            <a:ext cx="11695463" cy="4062651"/>
           </a:xfrm>
           <a:prstGeom prst="rect">
             <a:avLst/>
@@ -18852,7 +18604,7 @@
               <a:defRPr/>
             </a:pPr>
             <a:r>
-              <a:rPr kumimoji="0" lang="en-US" sz="1600" b="0" i="0" u="none" strike="noStrike" kern="1200" cap="none" spc="0" normalizeH="0" baseline="0" noProof="0" dirty="0">
+              <a:rPr kumimoji="0" lang="en-US" sz="2000" b="0" i="0" u="none" strike="noStrike" kern="1200" cap="none" spc="0" normalizeH="0" baseline="0" noProof="0" dirty="0">
                 <a:ln>
                   <a:noFill/>
                 </a:ln>
@@ -18866,17 +18618,29 @@
                 <a:ea typeface="Helvetica Neue" panose="02000503000000020004" pitchFamily="2" charset="0"/>
                 <a:cs typeface="Helvetica Neue" panose="02000503000000020004" pitchFamily="2" charset="0"/>
               </a:rPr>
-              <a:t>Nature is modeled as geometry in absolute time and absolute space, populated by equal-and-opposite architrinos.</a:t>
+              <a:t>Zeno’s paradox becomes a causal-root problem</a:t>
             </a:r>
           </a:p>
           <a:p>
-            <a:pPr marL="457200" indent="-457200">
+            <a:pPr marL="457200" marR="0" lvl="0" indent="-457200" algn="l" defTabSz="914400" rtl="0" eaLnBrk="1" fontAlgn="auto" latinLnBrk="0" hangingPunct="1">
+              <a:lnSpc>
+                <a:spcPct val="100000"/>
+              </a:lnSpc>
+              <a:spcBef>
+                <a:spcPts val="0"/>
+              </a:spcBef>
+              <a:spcAft>
+                <a:spcPts val="0"/>
+              </a:spcAft>
+              <a:buClrTx/>
+              <a:buSzTx/>
               <a:buFont typeface="Arial" panose="020B0604020202020204" pitchFamily="34" charset="0"/>
               <a:buChar char="•"/>
+              <a:tabLst/>
               <a:defRPr/>
             </a:pPr>
             <a:r>
-              <a:rPr kumimoji="0" lang="en-US" sz="1600" b="0" i="0" u="none" strike="noStrike" kern="1200" cap="none" spc="0" normalizeH="0" baseline="0" noProof="0" dirty="0">
+              <a:rPr kumimoji="0" lang="en-US" sz="2000" b="0" i="0" u="none" strike="noStrike" kern="1200" cap="none" spc="0" normalizeH="0" baseline="0" noProof="0" dirty="0">
                 <a:ln>
                   <a:noFill/>
                 </a:ln>
@@ -18890,17 +18654,29 @@
                 <a:ea typeface="Helvetica Neue" panose="02000503000000020004" pitchFamily="2" charset="0"/>
                 <a:cs typeface="Helvetica Neue" panose="02000503000000020004" pitchFamily="2" charset="0"/>
               </a:rPr>
-              <a:t>Each architrino is a polarity-bearing emitter/receiver; its continuous path emits causal wake surfaces.</a:t>
+              <a:t>Zeno’s paradox asks how motion can ever complete if every trip can be divided into endlessly smaller remaining distances.</a:t>
             </a:r>
           </a:p>
           <a:p>
-            <a:pPr marL="914400" lvl="1" indent="-457200">
+            <a:pPr marL="457200" marR="0" lvl="0" indent="-457200" algn="l" defTabSz="914400" rtl="0" eaLnBrk="1" fontAlgn="auto" latinLnBrk="0" hangingPunct="1">
+              <a:lnSpc>
+                <a:spcPct val="100000"/>
+              </a:lnSpc>
+              <a:spcBef>
+                <a:spcPts val="0"/>
+              </a:spcBef>
+              <a:spcAft>
+                <a:spcPts val="0"/>
+              </a:spcAft>
+              <a:buClrTx/>
+              <a:buSzTx/>
               <a:buFont typeface="Arial" panose="020B0604020202020204" pitchFamily="34" charset="0"/>
               <a:buChar char="•"/>
+              <a:tabLst/>
               <a:defRPr/>
             </a:pPr>
             <a:r>
-              <a:rPr kumimoji="0" lang="en-US" sz="1600" b="0" i="0" u="none" strike="noStrike" kern="1200" cap="none" spc="0" normalizeH="0" baseline="0" noProof="0" dirty="0">
+              <a:rPr kumimoji="0" lang="en-US" sz="2000" b="0" i="0" u="none" strike="noStrike" kern="1200" cap="none" spc="0" normalizeH="0" baseline="0" noProof="0" dirty="0">
                 <a:ln>
                   <a:noFill/>
                 </a:ln>
@@ -18914,17 +18690,29 @@
                 <a:ea typeface="Helvetica Neue" panose="02000503000000020004" pitchFamily="2" charset="0"/>
                 <a:cs typeface="Helvetica Neue" panose="02000503000000020004" pitchFamily="2" charset="0"/>
               </a:rPr>
-              <a:t>A received hit occurs when a receiver intersects a causal wake surface; superposition determines the net response.</a:t>
+              <a:t>In AAA, a similar confusion appears near a 1/r curve. If r approaches 0, the curve seems to demand an infinite response.</a:t>
             </a:r>
           </a:p>
           <a:p>
-            <a:pPr marL="914400" lvl="1" indent="-457200">
+            <a:pPr marL="457200" marR="0" lvl="0" indent="-457200" algn="l" defTabSz="914400" rtl="0" eaLnBrk="1" fontAlgn="auto" latinLnBrk="0" hangingPunct="1">
+              <a:lnSpc>
+                <a:spcPct val="100000"/>
+              </a:lnSpc>
+              <a:spcBef>
+                <a:spcPts val="0"/>
+              </a:spcBef>
+              <a:spcAft>
+                <a:spcPts val="0"/>
+              </a:spcAft>
+              <a:buClrTx/>
+              <a:buSzTx/>
               <a:buFont typeface="Arial" panose="020B0604020202020204" pitchFamily="34" charset="0"/>
               <a:buChar char="•"/>
+              <a:tabLst/>
               <a:defRPr/>
             </a:pPr>
             <a:r>
-              <a:rPr kumimoji="0" lang="en-US" sz="1600" b="0" i="0" u="none" strike="noStrike" kern="1200" cap="none" spc="0" normalizeH="0" baseline="0" noProof="0" dirty="0">
+              <a:rPr kumimoji="0" lang="en-US" sz="2000" b="0" i="0" u="none" strike="noStrike" kern="1200" cap="none" spc="0" normalizeH="0" baseline="0" noProof="0" dirty="0">
                 <a:ln>
                   <a:noFill/>
                 </a:ln>
@@ -18938,10 +18726,46 @@
                 <a:ea typeface="Helvetica Neue" panose="02000503000000020004" pitchFamily="2" charset="0"/>
                 <a:cs typeface="Helvetica Neue" panose="02000503000000020004" pitchFamily="2" charset="0"/>
               </a:rPr>
-              <a:t>Because an architrino can move faster than wake speed, v = c</a:t>
+              <a:t>That static curve is not the primitive geometry.</a:t>
+            </a:r>
+          </a:p>
+          <a:p>
+            <a:pPr marL="457200" marR="0" lvl="0" indent="-457200" algn="l" defTabSz="914400" rtl="0" eaLnBrk="1" fontAlgn="auto" latinLnBrk="0" hangingPunct="1">
+              <a:lnSpc>
+                <a:spcPct val="100000"/>
+              </a:lnSpc>
+              <a:spcBef>
+                <a:spcPts val="0"/>
+              </a:spcBef>
+              <a:spcAft>
+                <a:spcPts val="0"/>
+              </a:spcAft>
+              <a:buClrTx/>
+              <a:buSzTx/>
+              <a:buFont typeface="Arial" panose="020B0604020202020204" pitchFamily="34" charset="0"/>
+              <a:buChar char="•"/>
+              <a:tabLst/>
+              <a:defRPr/>
+            </a:pPr>
+            <a:r>
+              <a:rPr kumimoji="0" lang="en-US" sz="2000" b="0" i="0" u="none" strike="noStrike" kern="1200" cap="none" spc="0" normalizeH="0" baseline="0" noProof="0" dirty="0">
+                <a:ln>
+                  <a:noFill/>
+                </a:ln>
+                <a:solidFill>
+                  <a:prstClr val="white"/>
+                </a:solidFill>
+                <a:effectLst/>
+                <a:uLnTx/>
+                <a:uFillTx/>
+                <a:latin typeface="Helvetica Neue" panose="02000503000000020004" pitchFamily="2" charset="0"/>
+                <a:ea typeface="Helvetica Neue" panose="02000503000000020004" pitchFamily="2" charset="0"/>
+                <a:cs typeface="Helvetica Neue" panose="02000503000000020004" pitchFamily="2" charset="0"/>
+              </a:rPr>
+              <a:t>An architrino follows a continuous path in absolute time and absolute space. Its causal wakes come from earlier path history and expand at finite wake speed c</a:t>
             </a:r>
             <a:r>
-              <a:rPr kumimoji="0" lang="en-US" sz="1120" b="0" i="0" u="none" strike="noStrike" kern="1200" cap="none" spc="0" normalizeH="0" baseline="-25000" noProof="0" dirty="0">
+              <a:rPr kumimoji="0" lang="en-US" sz="2000" b="0" i="0" u="none" strike="noStrike" kern="1200" cap="none" spc="0" normalizeH="0" baseline="-25000" noProof="0" dirty="0">
                 <a:ln>
                   <a:noFill/>
                 </a:ln>
@@ -18958,7 +18782,7 @@
               <a:t>f</a:t>
             </a:r>
             <a:r>
-              <a:rPr kumimoji="0" lang="en-US" sz="1600" b="0" i="0" u="none" strike="noStrike" kern="1200" cap="none" spc="0" normalizeH="0" baseline="0" noProof="0" dirty="0">
+              <a:rPr kumimoji="0" lang="en-US" sz="2000" b="0" i="0" u="none" strike="noStrike" kern="1200" cap="none" spc="0" normalizeH="0" baseline="0" noProof="0" dirty="0">
                 <a:ln>
                   <a:noFill/>
                 </a:ln>
@@ -18972,17 +18796,29 @@
                 <a:ea typeface="Helvetica Neue" panose="02000503000000020004" pitchFamily="2" charset="0"/>
                 <a:cs typeface="Helvetica Neue" panose="02000503000000020004" pitchFamily="2" charset="0"/>
               </a:rPr>
-              <a:t> marks a self-hit onset boundary rather than an observer-level speed limit.</a:t>
+              <a:t>.</a:t>
             </a:r>
           </a:p>
           <a:p>
-            <a:pPr marL="914400" lvl="1" indent="-457200">
+            <a:pPr marL="457200" marR="0" lvl="0" indent="-457200" algn="l" defTabSz="914400" rtl="0" eaLnBrk="1" fontAlgn="auto" latinLnBrk="0" hangingPunct="1">
+              <a:lnSpc>
+                <a:spcPct val="100000"/>
+              </a:lnSpc>
+              <a:spcBef>
+                <a:spcPts val="0"/>
+              </a:spcBef>
+              <a:spcAft>
+                <a:spcPts val="0"/>
+              </a:spcAft>
+              <a:buClrTx/>
+              <a:buSzTx/>
               <a:buFont typeface="Arial" panose="020B0604020202020204" pitchFamily="34" charset="0"/>
               <a:buChar char="•"/>
+              <a:tabLst/>
               <a:defRPr/>
             </a:pPr>
             <a:r>
-              <a:rPr kumimoji="0" lang="en-US" sz="1600" b="0" i="0" u="none" strike="noStrike" kern="1200" cap="none" spc="0" normalizeH="0" baseline="0" noProof="0" dirty="0">
+              <a:rPr kumimoji="0" lang="en-US" sz="2000" b="0" i="0" u="none" strike="noStrike" kern="1200" cap="none" spc="0" normalizeH="0" baseline="0" noProof="0" dirty="0">
                 <a:ln>
                   <a:noFill/>
                 </a:ln>
@@ -18996,179 +18832,11 @@
                 <a:ea typeface="Helvetica Neue" panose="02000503000000020004" pitchFamily="2" charset="0"/>
                 <a:cs typeface="Helvetica Neue" panose="02000503000000020004" pitchFamily="2" charset="0"/>
               </a:rPr>
-              <a:t>Ideal binaries must be tested through causal-root ledgers, path-history feedback, and branch stability, not through an instantaneous 1/r curve alone.</a:t>
+              <a:t>A received hit occurs only when a causal wake surface intersects a receiver.</a:t>
             </a:r>
           </a:p>
-        </p:txBody>
-      </p:sp>
-    </p:spTree>
-    <p:extLst>
-      <p:ext uri="{BB962C8B-B14F-4D97-AF65-F5344CB8AC3E}">
-        <p14:creationId xmlns:p14="http://schemas.microsoft.com/office/powerpoint/2010/main" val="3670680207"/>
-      </p:ext>
-    </p:extLst>
-  </p:cSld>
-  <p:clrMapOvr>
-    <a:masterClrMapping/>
-  </p:clrMapOvr>
-</p:sld>
-</file>
-
-<file path=ppt/slides/slide16.xml><?xml version="1.0" encoding="utf-8"?>
-<p:sld xmlns:a="http://schemas.openxmlformats.org/drawingml/2006/main" xmlns:r="http://schemas.openxmlformats.org/officeDocument/2006/relationships" xmlns:p="http://schemas.openxmlformats.org/presentationml/2006/main">
-  <p:cSld>
-    <p:bg>
-      <p:bgPr>
-        <a:solidFill>
-          <a:srgbClr val="7030A0"/>
-        </a:solidFill>
-        <a:effectLst/>
-      </p:bgPr>
-    </p:bg>
-    <p:spTree>
-      <p:nvGrpSpPr>
-        <p:cNvPr id="1" name="">
-          <a:extLst>
-            <a:ext uri="{FF2B5EF4-FFF2-40B4-BE49-F238E27FC236}">
-              <a16:creationId xmlns:a16="http://schemas.microsoft.com/office/drawing/2014/main" id="{8B3A6F17-EFE6-B51A-A63A-3B70333495A1}"/>
-            </a:ext>
-          </a:extLst>
-        </p:cNvPr>
-        <p:cNvGrpSpPr/>
-        <p:nvPr/>
-      </p:nvGrpSpPr>
-      <p:grpSpPr>
-        <a:xfrm>
-          <a:off x="0" y="0"/>
-          <a:ext cx="0" cy="0"/>
-          <a:chOff x="0" y="0"/>
-          <a:chExt cx="0" cy="0"/>
-        </a:xfrm>
-      </p:grpSpPr>
-      <p:sp>
-        <p:nvSpPr>
-          <p:cNvPr id="5" name="Footer Placeholder 3">
-            <a:extLst>
-              <a:ext uri="{FF2B5EF4-FFF2-40B4-BE49-F238E27FC236}">
-                <a16:creationId xmlns:a16="http://schemas.microsoft.com/office/drawing/2014/main" id="{68EB2D01-BE54-DC86-BCD1-1E32DA2C4000}"/>
-              </a:ext>
-            </a:extLst>
-          </p:cNvPr>
-          <p:cNvSpPr txBox="1">
-            <a:spLocks/>
-          </p:cNvSpPr>
-          <p:nvPr/>
-        </p:nvSpPr>
-        <p:spPr>
-          <a:xfrm>
-            <a:off x="10924248" y="6388602"/>
-            <a:ext cx="1142262" cy="365125"/>
-          </a:xfrm>
-          <a:prstGeom prst="rect">
-            <a:avLst/>
-          </a:prstGeom>
-        </p:spPr>
-        <p:txBody>
-          <a:bodyPr vert="horz" lIns="91440" tIns="45720" rIns="91440" bIns="45720" rtlCol="0" anchor="ctr"/>
-          <a:lstStyle>
-            <a:defPPr>
-              <a:defRPr lang="en-US"/>
-            </a:defPPr>
-            <a:lvl1pPr marL="0" algn="ctr" defTabSz="914400" rtl="0" eaLnBrk="1" latinLnBrk="0" hangingPunct="1">
-              <a:defRPr sz="1200" kern="1200">
-                <a:solidFill>
-                  <a:schemeClr val="tx1">
-                    <a:tint val="75000"/>
-                  </a:schemeClr>
-                </a:solidFill>
-                <a:latin typeface="+mn-lt"/>
-                <a:ea typeface="+mn-ea"/>
-                <a:cs typeface="+mn-cs"/>
-              </a:defRPr>
-            </a:lvl1pPr>
-            <a:lvl2pPr marL="457200" algn="l" defTabSz="914400" rtl="0" eaLnBrk="1" latinLnBrk="0" hangingPunct="1">
-              <a:defRPr sz="1800" kern="1200">
-                <a:solidFill>
-                  <a:schemeClr val="tx1"/>
-                </a:solidFill>
-                <a:latin typeface="+mn-lt"/>
-                <a:ea typeface="+mn-ea"/>
-                <a:cs typeface="+mn-cs"/>
-              </a:defRPr>
-            </a:lvl2pPr>
-            <a:lvl3pPr marL="914400" algn="l" defTabSz="914400" rtl="0" eaLnBrk="1" latinLnBrk="0" hangingPunct="1">
-              <a:defRPr sz="1800" kern="1200">
-                <a:solidFill>
-                  <a:schemeClr val="tx1"/>
-                </a:solidFill>
-                <a:latin typeface="+mn-lt"/>
-                <a:ea typeface="+mn-ea"/>
-                <a:cs typeface="+mn-cs"/>
-              </a:defRPr>
-            </a:lvl3pPr>
-            <a:lvl4pPr marL="1371600" algn="l" defTabSz="914400" rtl="0" eaLnBrk="1" latinLnBrk="0" hangingPunct="1">
-              <a:defRPr sz="1800" kern="1200">
-                <a:solidFill>
-                  <a:schemeClr val="tx1"/>
-                </a:solidFill>
-                <a:latin typeface="+mn-lt"/>
-                <a:ea typeface="+mn-ea"/>
-                <a:cs typeface="+mn-cs"/>
-              </a:defRPr>
-            </a:lvl4pPr>
-            <a:lvl5pPr marL="1828800" algn="l" defTabSz="914400" rtl="0" eaLnBrk="1" latinLnBrk="0" hangingPunct="1">
-              <a:defRPr sz="1800" kern="1200">
-                <a:solidFill>
-                  <a:schemeClr val="tx1"/>
-                </a:solidFill>
-                <a:latin typeface="+mn-lt"/>
-                <a:ea typeface="+mn-ea"/>
-                <a:cs typeface="+mn-cs"/>
-              </a:defRPr>
-            </a:lvl5pPr>
-            <a:lvl6pPr marL="2286000" algn="l" defTabSz="914400" rtl="0" eaLnBrk="1" latinLnBrk="0" hangingPunct="1">
-              <a:defRPr sz="1800" kern="1200">
-                <a:solidFill>
-                  <a:schemeClr val="tx1"/>
-                </a:solidFill>
-                <a:latin typeface="+mn-lt"/>
-                <a:ea typeface="+mn-ea"/>
-                <a:cs typeface="+mn-cs"/>
-              </a:defRPr>
-            </a:lvl6pPr>
-            <a:lvl7pPr marL="2743200" algn="l" defTabSz="914400" rtl="0" eaLnBrk="1" latinLnBrk="0" hangingPunct="1">
-              <a:defRPr sz="1800" kern="1200">
-                <a:solidFill>
-                  <a:schemeClr val="tx1"/>
-                </a:solidFill>
-                <a:latin typeface="+mn-lt"/>
-                <a:ea typeface="+mn-ea"/>
-                <a:cs typeface="+mn-cs"/>
-              </a:defRPr>
-            </a:lvl7pPr>
-            <a:lvl8pPr marL="3200400" algn="l" defTabSz="914400" rtl="0" eaLnBrk="1" latinLnBrk="0" hangingPunct="1">
-              <a:defRPr sz="1800" kern="1200">
-                <a:solidFill>
-                  <a:schemeClr val="tx1"/>
-                </a:solidFill>
-                <a:latin typeface="+mn-lt"/>
-                <a:ea typeface="+mn-ea"/>
-                <a:cs typeface="+mn-cs"/>
-              </a:defRPr>
-            </a:lvl8pPr>
-            <a:lvl9pPr marL="3657600" algn="l" defTabSz="914400" rtl="0" eaLnBrk="1" latinLnBrk="0" hangingPunct="1">
-              <a:defRPr sz="1800" kern="1200">
-                <a:solidFill>
-                  <a:schemeClr val="tx1"/>
-                </a:solidFill>
-                <a:latin typeface="+mn-lt"/>
-                <a:ea typeface="+mn-ea"/>
-                <a:cs typeface="+mn-cs"/>
-              </a:defRPr>
-            </a:lvl9pPr>
-          </a:lstStyle>
-          <a:p>
-            <a:pPr marL="0" marR="0" lvl="0" indent="0" algn="ctr" defTabSz="914400" rtl="0" eaLnBrk="1" fontAlgn="auto" latinLnBrk="0" hangingPunct="1">
+          <a:p>
+            <a:pPr marL="457200" marR="0" lvl="0" indent="-457200" algn="l" defTabSz="914400" rtl="0" eaLnBrk="1" fontAlgn="auto" latinLnBrk="0" hangingPunct="1">
               <a:lnSpc>
                 <a:spcPct val="100000"/>
               </a:lnSpc>
@@ -19180,80 +18848,13 @@
               </a:spcAft>
               <a:buClrTx/>
               <a:buSzTx/>
-              <a:buFontTx/>
-              <a:buNone/>
+              <a:buFont typeface="Arial" panose="020B0604020202020204" pitchFamily="34" charset="0"/>
+              <a:buChar char="•"/>
               <a:tabLst/>
               <a:defRPr/>
             </a:pPr>
             <a:r>
-              <a:rPr kumimoji="0" lang="en-US" sz="1200" b="0" i="0" u="none" strike="noStrike" kern="1200" cap="none" spc="0" normalizeH="0" baseline="0" noProof="0" dirty="0">
-                <a:ln>
-                  <a:noFill/>
-                </a:ln>
-                <a:solidFill>
-                  <a:prstClr val="black">
-                    <a:tint val="75000"/>
-                  </a:prstClr>
-                </a:solidFill>
-                <a:effectLst/>
-                <a:uLnTx/>
-                <a:uFillTx/>
-                <a:latin typeface="Helvetica Neue" panose="02000503000000020004" pitchFamily="2" charset="0"/>
-                <a:ea typeface="Helvetica Neue" panose="02000503000000020004" pitchFamily="2" charset="0"/>
-                <a:cs typeface="Helvetica Neue" panose="02000503000000020004" pitchFamily="2" charset="0"/>
-              </a:rPr>
-              <a:t>J Mark Morris</a:t>
-            </a:r>
-          </a:p>
-        </p:txBody>
-      </p:sp>
-      <p:sp>
-        <p:nvSpPr>
-          <p:cNvPr id="19" name="Rectangle 18">
-            <a:extLst>
-              <a:ext uri="{FF2B5EF4-FFF2-40B4-BE49-F238E27FC236}">
-                <a16:creationId xmlns:a16="http://schemas.microsoft.com/office/drawing/2014/main" id="{F2D335EE-90BE-310F-3F30-68D612074B92}"/>
-              </a:ext>
-            </a:extLst>
-          </p:cNvPr>
-          <p:cNvSpPr/>
-          <p:nvPr/>
-        </p:nvSpPr>
-        <p:spPr>
-          <a:xfrm>
-            <a:off x="680197" y="309028"/>
-            <a:ext cx="11009488" cy="523220"/>
-          </a:xfrm>
-          <a:prstGeom prst="rect">
-            <a:avLst/>
-          </a:prstGeom>
-          <a:noFill/>
-        </p:spPr>
-        <p:txBody>
-          <a:bodyPr wrap="none">
-            <a:spAutoFit/>
-          </a:bodyPr>
-          <a:lstStyle/>
-          <a:p>
-            <a:pPr marL="0" marR="0" lvl="0" indent="0" algn="ctr" defTabSz="914400" rtl="0" eaLnBrk="1" fontAlgn="auto" latinLnBrk="0" hangingPunct="1">
-              <a:lnSpc>
-                <a:spcPct val="100000"/>
-              </a:lnSpc>
-              <a:spcBef>
-                <a:spcPts val="0"/>
-              </a:spcBef>
-              <a:spcAft>
-                <a:spcPts val="0"/>
-              </a:spcAft>
-              <a:buClrTx/>
-              <a:buSzTx/>
-              <a:buFontTx/>
-              <a:buNone/>
-              <a:tabLst/>
-              <a:defRPr/>
-            </a:pPr>
-            <a:r>
-              <a:rPr kumimoji="0" lang="en-US" sz="2800" b="1" i="0" u="none" strike="noStrike" kern="1200" cap="none" spc="0" normalizeH="0" baseline="0" noProof="0" dirty="0">
+              <a:rPr kumimoji="0" lang="en-US" sz="2000" b="0" i="0" u="none" strike="noStrike" kern="1200" cap="none" spc="0" normalizeH="0" baseline="0" noProof="0" dirty="0">
                 <a:ln>
                   <a:noFill/>
                 </a:ln>
@@ -19267,554 +18868,30 @@
                 <a:ea typeface="Helvetica Neue" panose="02000503000000020004" pitchFamily="2" charset="0"/>
                 <a:cs typeface="Helvetica Neue" panose="02000503000000020004" pitchFamily="2" charset="0"/>
               </a:rPr>
-              <a:t>Causal Wakes and the 1/r Curve</a:t>
+              <a:t>So the real question near r = 0 is not what the curve does at zero. It is which causal roots exist, what hit sequence is received, and whether the feedback settles into a branch, diverges, or becomes invalid.</a:t>
             </a:r>
           </a:p>
-        </p:txBody>
-      </p:sp>
-      <p:sp>
-        <p:nvSpPr>
-          <p:cNvPr id="2" name="TextBox 1">
-            <a:extLst>
-              <a:ext uri="{FF2B5EF4-FFF2-40B4-BE49-F238E27FC236}">
-                <a16:creationId xmlns:a16="http://schemas.microsoft.com/office/drawing/2014/main" id="{CBF92790-EC27-682A-21D0-5C88069D4333}"/>
-              </a:ext>
-            </a:extLst>
-          </p:cNvPr>
-          <p:cNvSpPr txBox="1"/>
-          <p:nvPr/>
-        </p:nvSpPr>
-        <p:spPr>
-          <a:xfrm>
-            <a:off x="337206" y="907318"/>
-            <a:ext cx="11695463" cy="5109091"/>
-          </a:xfrm>
-          <a:prstGeom prst="rect">
-            <a:avLst/>
-          </a:prstGeom>
-          <a:noFill/>
-        </p:spPr>
-        <p:txBody>
-          <a:bodyPr wrap="square" rtlCol="0">
-            <a:spAutoFit/>
-          </a:bodyPr>
-          <a:lstStyle/>
-          <a:p>
-            <a:pPr marL="457200" marR="0" lvl="0" indent="-457200" algn="l" defTabSz="914400" rtl="0" eaLnBrk="1" fontAlgn="auto" latinLnBrk="0" hangingPunct="1">
-              <a:lnSpc>
-                <a:spcPct val="100000"/>
-              </a:lnSpc>
-              <a:spcBef>
-                <a:spcPts val="0"/>
-              </a:spcBef>
-              <a:spcAft>
-                <a:spcPts val="0"/>
-              </a:spcAft>
-              <a:buClrTx/>
-              <a:buSzTx/>
+          <a:p>
+            <a:pPr marL="914400" lvl="1" indent="-457200">
               <a:buFont typeface="Arial" panose="020B0604020202020204" pitchFamily="34" charset="0"/>
               <a:buChar char="•"/>
-              <a:tabLst/>
               <a:defRPr/>
             </a:pPr>
-            <a:r>
-              <a:rPr kumimoji="0" lang="en-US" sz="1600" b="0" i="0" u="none" strike="noStrike" kern="1200" cap="none" spc="0" normalizeH="0" baseline="0" noProof="0" dirty="0">
-                <a:ln>
-                  <a:noFill/>
-                </a:ln>
-                <a:solidFill>
-                  <a:prstClr val="white"/>
-                </a:solidFill>
-                <a:effectLst/>
-                <a:uLnTx/>
-                <a:uFillTx/>
-                <a:latin typeface="Helvetica Neue" panose="02000503000000020004" pitchFamily="2" charset="0"/>
-                <a:ea typeface="Helvetica Neue" panose="02000503000000020004" pitchFamily="2" charset="0"/>
-                <a:cs typeface="Helvetica Neue" panose="02000503000000020004" pitchFamily="2" charset="0"/>
-              </a:rPr>
-              <a:t>The 1/r curve is an effective trace of wake geometry, not a constraint that every architrino pair must remain on one static curve.</a:t>
-            </a:r>
-          </a:p>
-          <a:p>
-            <a:pPr marL="457200" marR="0" lvl="0" indent="-457200" algn="l" defTabSz="914400" rtl="0" eaLnBrk="1" fontAlgn="auto" latinLnBrk="0" hangingPunct="1">
-              <a:lnSpc>
-                <a:spcPct val="100000"/>
-              </a:lnSpc>
-              <a:spcBef>
-                <a:spcPts val="0"/>
-              </a:spcBef>
-              <a:spcAft>
-                <a:spcPts val="0"/>
-              </a:spcAft>
-              <a:buClrTx/>
-              <a:buSzTx/>
-              <a:buFont typeface="Arial" panose="020B0604020202020204" pitchFamily="34" charset="0"/>
-              <a:buChar char="•"/>
-              <a:tabLst/>
-              <a:defRPr/>
-            </a:pPr>
-            <a:r>
-              <a:rPr kumimoji="0" lang="en-US" sz="1600" b="0" i="0" u="none" strike="noStrike" kern="1200" cap="none" spc="0" normalizeH="0" baseline="0" noProof="0" dirty="0">
-                <a:ln>
-                  <a:noFill/>
-                </a:ln>
-                <a:solidFill>
-                  <a:prstClr val="white"/>
-                </a:solidFill>
-                <a:effectLst/>
-                <a:uLnTx/>
-                <a:uFillTx/>
-                <a:latin typeface="Helvetica Neue" panose="02000503000000020004" pitchFamily="2" charset="0"/>
-                <a:ea typeface="Helvetica Neue" panose="02000503000000020004" pitchFamily="2" charset="0"/>
-                <a:cs typeface="Helvetica Neue" panose="02000503000000020004" pitchFamily="2" charset="0"/>
-              </a:rPr>
-              <a:t>A receiver can pass through many wake surfaces while its path is determined by the superposed causal-root ledger.</a:t>
-            </a:r>
-          </a:p>
-          <a:p>
-            <a:pPr marL="457200" marR="0" lvl="0" indent="-457200" algn="l" defTabSz="914400" rtl="0" eaLnBrk="1" fontAlgn="auto" latinLnBrk="0" hangingPunct="1">
-              <a:lnSpc>
-                <a:spcPct val="100000"/>
-              </a:lnSpc>
-              <a:spcBef>
-                <a:spcPts val="0"/>
-              </a:spcBef>
-              <a:spcAft>
-                <a:spcPts val="0"/>
-              </a:spcAft>
-              <a:buClrTx/>
-              <a:buSzTx/>
-              <a:buFont typeface="Arial" panose="020B0604020202020204" pitchFamily="34" charset="0"/>
-              <a:buChar char="•"/>
-              <a:tabLst/>
-              <a:defRPr/>
-            </a:pPr>
-            <a:r>
-              <a:rPr kumimoji="0" lang="en-US" sz="1600" b="0" i="0" u="none" strike="noStrike" kern="1200" cap="none" spc="0" normalizeH="0" baseline="0" noProof="0" dirty="0">
-                <a:ln>
-                  <a:noFill/>
-                </a:ln>
-                <a:solidFill>
-                  <a:prstClr val="white"/>
-                </a:solidFill>
-                <a:effectLst/>
-                <a:uLnTx/>
-                <a:uFillTx/>
-                <a:latin typeface="Helvetica Neue" panose="02000503000000020004" pitchFamily="2" charset="0"/>
-                <a:ea typeface="Helvetica Neue" panose="02000503000000020004" pitchFamily="2" charset="0"/>
-                <a:cs typeface="Helvetica Neue" panose="02000503000000020004" pitchFamily="2" charset="0"/>
-              </a:rPr>
-              <a:t>In the super-field-speed regime, same-source roots can appear: an architrino may intercept its own earlier wake.</a:t>
-            </a:r>
-          </a:p>
-          <a:p>
-            <a:pPr marL="457200" marR="0" lvl="0" indent="-457200" algn="l" defTabSz="914400" rtl="0" eaLnBrk="1" fontAlgn="auto" latinLnBrk="0" hangingPunct="1">
-              <a:lnSpc>
-                <a:spcPct val="100000"/>
-              </a:lnSpc>
-              <a:spcBef>
-                <a:spcPts val="0"/>
-              </a:spcBef>
-              <a:spcAft>
-                <a:spcPts val="0"/>
-              </a:spcAft>
-              <a:buClrTx/>
-              <a:buSzTx/>
-              <a:buFont typeface="Arial" panose="020B0604020202020204" pitchFamily="34" charset="0"/>
-              <a:buChar char="•"/>
-              <a:tabLst/>
-              <a:defRPr/>
-            </a:pPr>
-            <a:r>
-              <a:rPr kumimoji="0" lang="en-US" sz="1600" b="0" i="0" u="none" strike="noStrike" kern="1200" cap="none" spc="0" normalizeH="0" baseline="0" noProof="0" dirty="0">
-                <a:ln>
-                  <a:noFill/>
-                </a:ln>
-                <a:solidFill>
-                  <a:prstClr val="white"/>
-                </a:solidFill>
-                <a:effectLst/>
-                <a:uLnTx/>
-                <a:uFillTx/>
-                <a:latin typeface="Helvetica Neue" panose="02000503000000020004" pitchFamily="2" charset="0"/>
-                <a:ea typeface="Helvetica Neue" panose="02000503000000020004" pitchFamily="2" charset="0"/>
-                <a:cs typeface="Helvetica Neue" panose="02000503000000020004" pitchFamily="2" charset="0"/>
-              </a:rPr>
-              <a:t>The open calculation is to integrate that self-hit feedback and determine whether it approaches a finite branch, a divergence, or a rejected chart.</a:t>
-            </a:r>
+            <a:endParaRPr lang="en-US" sz="2000" dirty="0">
+              <a:solidFill>
+                <a:prstClr val="white"/>
+              </a:solidFill>
+              <a:latin typeface="Helvetica Neue" panose="02000503000000020004" pitchFamily="2" charset="0"/>
+              <a:ea typeface="Helvetica Neue" panose="02000503000000020004" pitchFamily="2" charset="0"/>
+              <a:cs typeface="Helvetica Neue" panose="02000503000000020004" pitchFamily="2" charset="0"/>
+            </a:endParaRPr>
           </a:p>
         </p:txBody>
       </p:sp>
     </p:spTree>
     <p:extLst>
       <p:ext uri="{BB962C8B-B14F-4D97-AF65-F5344CB8AC3E}">
-        <p14:creationId xmlns:p14="http://schemas.microsoft.com/office/powerpoint/2010/main" val="653966555"/>
-      </p:ext>
-    </p:extLst>
-  </p:cSld>
-  <p:clrMapOvr>
-    <a:masterClrMapping/>
-  </p:clrMapOvr>
-</p:sld>
-</file>
-
-<file path=ppt/slides/slide17.xml><?xml version="1.0" encoding="utf-8"?>
-<p:sld xmlns:a="http://schemas.openxmlformats.org/drawingml/2006/main" xmlns:r="http://schemas.openxmlformats.org/officeDocument/2006/relationships" xmlns:p="http://schemas.openxmlformats.org/presentationml/2006/main">
-  <p:cSld>
-    <p:bg>
-      <p:bgPr>
-        <a:solidFill>
-          <a:srgbClr val="7030A0"/>
-        </a:solidFill>
-        <a:effectLst/>
-      </p:bgPr>
-    </p:bg>
-    <p:spTree>
-      <p:nvGrpSpPr>
-        <p:cNvPr id="1" name="">
-          <a:extLst>
-            <a:ext uri="{FF2B5EF4-FFF2-40B4-BE49-F238E27FC236}">
-              <a16:creationId xmlns:a16="http://schemas.microsoft.com/office/drawing/2014/main" id="{764AD85F-4248-DE78-FCB4-518C065121A3}"/>
-            </a:ext>
-          </a:extLst>
-        </p:cNvPr>
-        <p:cNvGrpSpPr/>
-        <p:nvPr/>
-      </p:nvGrpSpPr>
-      <p:grpSpPr>
-        <a:xfrm>
-          <a:off x="0" y="0"/>
-          <a:ext cx="0" cy="0"/>
-          <a:chOff x="0" y="0"/>
-          <a:chExt cx="0" cy="0"/>
-        </a:xfrm>
-      </p:grpSpPr>
-      <p:sp>
-        <p:nvSpPr>
-          <p:cNvPr id="5" name="Footer Placeholder 3">
-            <a:extLst>
-              <a:ext uri="{FF2B5EF4-FFF2-40B4-BE49-F238E27FC236}">
-                <a16:creationId xmlns:a16="http://schemas.microsoft.com/office/drawing/2014/main" id="{0464A0FC-8CE3-207B-0E49-C582E93BE77D}"/>
-              </a:ext>
-            </a:extLst>
-          </p:cNvPr>
-          <p:cNvSpPr txBox="1">
-            <a:spLocks/>
-          </p:cNvSpPr>
-          <p:nvPr/>
-        </p:nvSpPr>
-        <p:spPr>
-          <a:xfrm>
-            <a:off x="10924248" y="6388602"/>
-            <a:ext cx="1142262" cy="365125"/>
-          </a:xfrm>
-          <a:prstGeom prst="rect">
-            <a:avLst/>
-          </a:prstGeom>
-        </p:spPr>
-        <p:txBody>
-          <a:bodyPr vert="horz" lIns="91440" tIns="45720" rIns="91440" bIns="45720" rtlCol="0" anchor="ctr"/>
-          <a:lstStyle>
-            <a:defPPr>
-              <a:defRPr lang="en-US"/>
-            </a:defPPr>
-            <a:lvl1pPr marL="0" algn="ctr" defTabSz="914400" rtl="0" eaLnBrk="1" latinLnBrk="0" hangingPunct="1">
-              <a:defRPr sz="1200" kern="1200">
-                <a:solidFill>
-                  <a:schemeClr val="tx1">
-                    <a:tint val="75000"/>
-                  </a:schemeClr>
-                </a:solidFill>
-                <a:latin typeface="+mn-lt"/>
-                <a:ea typeface="+mn-ea"/>
-                <a:cs typeface="+mn-cs"/>
-              </a:defRPr>
-            </a:lvl1pPr>
-            <a:lvl2pPr marL="457200" algn="l" defTabSz="914400" rtl="0" eaLnBrk="1" latinLnBrk="0" hangingPunct="1">
-              <a:defRPr sz="1800" kern="1200">
-                <a:solidFill>
-                  <a:schemeClr val="tx1"/>
-                </a:solidFill>
-                <a:latin typeface="+mn-lt"/>
-                <a:ea typeface="+mn-ea"/>
-                <a:cs typeface="+mn-cs"/>
-              </a:defRPr>
-            </a:lvl2pPr>
-            <a:lvl3pPr marL="914400" algn="l" defTabSz="914400" rtl="0" eaLnBrk="1" latinLnBrk="0" hangingPunct="1">
-              <a:defRPr sz="1800" kern="1200">
-                <a:solidFill>
-                  <a:schemeClr val="tx1"/>
-                </a:solidFill>
-                <a:latin typeface="+mn-lt"/>
-                <a:ea typeface="+mn-ea"/>
-                <a:cs typeface="+mn-cs"/>
-              </a:defRPr>
-            </a:lvl3pPr>
-            <a:lvl4pPr marL="1371600" algn="l" defTabSz="914400" rtl="0" eaLnBrk="1" latinLnBrk="0" hangingPunct="1">
-              <a:defRPr sz="1800" kern="1200">
-                <a:solidFill>
-                  <a:schemeClr val="tx1"/>
-                </a:solidFill>
-                <a:latin typeface="+mn-lt"/>
-                <a:ea typeface="+mn-ea"/>
-                <a:cs typeface="+mn-cs"/>
-              </a:defRPr>
-            </a:lvl4pPr>
-            <a:lvl5pPr marL="1828800" algn="l" defTabSz="914400" rtl="0" eaLnBrk="1" latinLnBrk="0" hangingPunct="1">
-              <a:defRPr sz="1800" kern="1200">
-                <a:solidFill>
-                  <a:schemeClr val="tx1"/>
-                </a:solidFill>
-                <a:latin typeface="+mn-lt"/>
-                <a:ea typeface="+mn-ea"/>
-                <a:cs typeface="+mn-cs"/>
-              </a:defRPr>
-            </a:lvl5pPr>
-            <a:lvl6pPr marL="2286000" algn="l" defTabSz="914400" rtl="0" eaLnBrk="1" latinLnBrk="0" hangingPunct="1">
-              <a:defRPr sz="1800" kern="1200">
-                <a:solidFill>
-                  <a:schemeClr val="tx1"/>
-                </a:solidFill>
-                <a:latin typeface="+mn-lt"/>
-                <a:ea typeface="+mn-ea"/>
-                <a:cs typeface="+mn-cs"/>
-              </a:defRPr>
-            </a:lvl6pPr>
-            <a:lvl7pPr marL="2743200" algn="l" defTabSz="914400" rtl="0" eaLnBrk="1" latinLnBrk="0" hangingPunct="1">
-              <a:defRPr sz="1800" kern="1200">
-                <a:solidFill>
-                  <a:schemeClr val="tx1"/>
-                </a:solidFill>
-                <a:latin typeface="+mn-lt"/>
-                <a:ea typeface="+mn-ea"/>
-                <a:cs typeface="+mn-cs"/>
-              </a:defRPr>
-            </a:lvl7pPr>
-            <a:lvl8pPr marL="3200400" algn="l" defTabSz="914400" rtl="0" eaLnBrk="1" latinLnBrk="0" hangingPunct="1">
-              <a:defRPr sz="1800" kern="1200">
-                <a:solidFill>
-                  <a:schemeClr val="tx1"/>
-                </a:solidFill>
-                <a:latin typeface="+mn-lt"/>
-                <a:ea typeface="+mn-ea"/>
-                <a:cs typeface="+mn-cs"/>
-              </a:defRPr>
-            </a:lvl8pPr>
-            <a:lvl9pPr marL="3657600" algn="l" defTabSz="914400" rtl="0" eaLnBrk="1" latinLnBrk="0" hangingPunct="1">
-              <a:defRPr sz="1800" kern="1200">
-                <a:solidFill>
-                  <a:schemeClr val="tx1"/>
-                </a:solidFill>
-                <a:latin typeface="+mn-lt"/>
-                <a:ea typeface="+mn-ea"/>
-                <a:cs typeface="+mn-cs"/>
-              </a:defRPr>
-            </a:lvl9pPr>
-          </a:lstStyle>
-          <a:p>
-            <a:pPr marL="0" marR="0" lvl="0" indent="0" algn="ctr" defTabSz="914400" rtl="0" eaLnBrk="1" fontAlgn="auto" latinLnBrk="0" hangingPunct="1">
-              <a:lnSpc>
-                <a:spcPct val="100000"/>
-              </a:lnSpc>
-              <a:spcBef>
-                <a:spcPts val="0"/>
-              </a:spcBef>
-              <a:spcAft>
-                <a:spcPts val="0"/>
-              </a:spcAft>
-              <a:buClrTx/>
-              <a:buSzTx/>
-              <a:buFontTx/>
-              <a:buNone/>
-              <a:tabLst/>
-              <a:defRPr/>
-            </a:pPr>
-            <a:r>
-              <a:rPr kumimoji="0" lang="en-US" sz="1200" b="0" i="0" u="none" strike="noStrike" kern="1200" cap="none" spc="0" normalizeH="0" baseline="0" noProof="0" dirty="0">
-                <a:ln>
-                  <a:noFill/>
-                </a:ln>
-                <a:solidFill>
-                  <a:prstClr val="black">
-                    <a:tint val="75000"/>
-                  </a:prstClr>
-                </a:solidFill>
-                <a:effectLst/>
-                <a:uLnTx/>
-                <a:uFillTx/>
-                <a:latin typeface="Helvetica Neue" panose="02000503000000020004" pitchFamily="2" charset="0"/>
-                <a:ea typeface="Helvetica Neue" panose="02000503000000020004" pitchFamily="2" charset="0"/>
-                <a:cs typeface="Helvetica Neue" panose="02000503000000020004" pitchFamily="2" charset="0"/>
-              </a:rPr>
-              <a:t>J Mark Morris</a:t>
-            </a:r>
-          </a:p>
-        </p:txBody>
-      </p:sp>
-      <p:sp>
-        <p:nvSpPr>
-          <p:cNvPr id="19" name="Rectangle 18">
-            <a:extLst>
-              <a:ext uri="{FF2B5EF4-FFF2-40B4-BE49-F238E27FC236}">
-                <a16:creationId xmlns:a16="http://schemas.microsoft.com/office/drawing/2014/main" id="{59C47AE8-E40E-D333-CCEE-591287A99ACE}"/>
-              </a:ext>
-            </a:extLst>
-          </p:cNvPr>
-          <p:cNvSpPr/>
-          <p:nvPr/>
-        </p:nvSpPr>
-        <p:spPr>
-          <a:xfrm>
-            <a:off x="680197" y="309028"/>
-            <a:ext cx="11009488" cy="523220"/>
-          </a:xfrm>
-          <a:prstGeom prst="rect">
-            <a:avLst/>
-          </a:prstGeom>
-          <a:noFill/>
-        </p:spPr>
-        <p:txBody>
-          <a:bodyPr wrap="none">
-            <a:spAutoFit/>
-          </a:bodyPr>
-          <a:lstStyle/>
-          <a:p>
-            <a:pPr marL="0" marR="0" lvl="0" indent="0" algn="ctr" defTabSz="914400" rtl="0" eaLnBrk="1" fontAlgn="auto" latinLnBrk="0" hangingPunct="1">
-              <a:lnSpc>
-                <a:spcPct val="100000"/>
-              </a:lnSpc>
-              <a:spcBef>
-                <a:spcPts val="0"/>
-              </a:spcBef>
-              <a:spcAft>
-                <a:spcPts val="0"/>
-              </a:spcAft>
-              <a:buClrTx/>
-              <a:buSzTx/>
-              <a:buFontTx/>
-              <a:buNone/>
-              <a:tabLst/>
-              <a:defRPr/>
-            </a:pPr>
-            <a:r>
-              <a:rPr kumimoji="0" lang="en-US" sz="2800" b="1" i="0" u="none" strike="noStrike" kern="1200" cap="none" spc="0" normalizeH="0" baseline="0" noProof="0" dirty="0">
-                <a:ln>
-                  <a:noFill/>
-                </a:ln>
-                <a:solidFill>
-                  <a:prstClr val="white"/>
-                </a:solidFill>
-                <a:effectLst/>
-                <a:uLnTx/>
-                <a:uFillTx/>
-                <a:latin typeface="Helvetica Neue" panose="02000503000000020004" pitchFamily="2" charset="0"/>
-                <a:ea typeface="Helvetica Neue" panose="02000503000000020004" pitchFamily="2" charset="0"/>
-                <a:cs typeface="Helvetica Neue" panose="02000503000000020004" pitchFamily="2" charset="0"/>
-              </a:rPr>
-              <a:t>Causal Wakes and the 1/r Curve</a:t>
-            </a:r>
-          </a:p>
-        </p:txBody>
-      </p:sp>
-      <p:sp>
-        <p:nvSpPr>
-          <p:cNvPr id="2" name="TextBox 1">
-            <a:extLst>
-              <a:ext uri="{FF2B5EF4-FFF2-40B4-BE49-F238E27FC236}">
-                <a16:creationId xmlns:a16="http://schemas.microsoft.com/office/drawing/2014/main" id="{C4927378-5D67-46E3-234B-AEB36EE62C4E}"/>
-              </a:ext>
-            </a:extLst>
-          </p:cNvPr>
-          <p:cNvSpPr txBox="1"/>
-          <p:nvPr/>
-        </p:nvSpPr>
-        <p:spPr>
-          <a:xfrm>
-            <a:off x="337206" y="907318"/>
-            <a:ext cx="11695463" cy="923330"/>
-          </a:xfrm>
-          <a:prstGeom prst="rect">
-            <a:avLst/>
-          </a:prstGeom>
-          <a:noFill/>
-        </p:spPr>
-        <p:txBody>
-          <a:bodyPr wrap="square" rtlCol="0">
-            <a:spAutoFit/>
-          </a:bodyPr>
-          <a:lstStyle/>
-          <a:p>
-            <a:pPr marL="457200" marR="0" lvl="0" indent="-457200" algn="l" defTabSz="914400" rtl="0" eaLnBrk="1" fontAlgn="auto" latinLnBrk="0" hangingPunct="1">
-              <a:lnSpc>
-                <a:spcPct val="100000"/>
-              </a:lnSpc>
-              <a:spcBef>
-                <a:spcPts val="0"/>
-              </a:spcBef>
-              <a:spcAft>
-                <a:spcPts val="0"/>
-              </a:spcAft>
-              <a:buClrTx/>
-              <a:buSzTx/>
-              <a:buFont typeface="Arial" panose="020B0604020202020204" pitchFamily="34" charset="0"/>
-              <a:buChar char="•"/>
-              <a:tabLst/>
-              <a:defRPr/>
-            </a:pPr>
-            <a:r>
-              <a:rPr kumimoji="0" lang="en-US" sz="1600" b="0" i="0" u="none" strike="noStrike" kern="1200" cap="none" spc="0" normalizeH="0" baseline="0" noProof="0" dirty="0">
-                <a:ln>
-                  <a:noFill/>
-                </a:ln>
-                <a:solidFill>
-                  <a:prstClr val="white"/>
-                </a:solidFill>
-                <a:effectLst/>
-                <a:uLnTx/>
-                <a:uFillTx/>
-                <a:latin typeface="Helvetica Neue" panose="02000503000000020004" pitchFamily="2" charset="0"/>
-                <a:ea typeface="Helvetica Neue" panose="02000503000000020004" pitchFamily="2" charset="0"/>
-                <a:cs typeface="Helvetica Neue" panose="02000503000000020004" pitchFamily="2" charset="0"/>
-              </a:rPr>
-              <a:t>Zeno's paradox becomes a causal-root ledger problem: finite wake speed, continuous paths, and received hits replace infinite subdivision as the controlling geometry.</a:t>
-            </a:r>
-          </a:p>
-        </p:txBody>
-      </p:sp>
-      <p:pic>
-        <p:nvPicPr>
-          <p:cNvPr id="3" name="Picture 2">
-            <a:extLst>
-              <a:ext uri="{FF2B5EF4-FFF2-40B4-BE49-F238E27FC236}">
-                <a16:creationId xmlns:a16="http://schemas.microsoft.com/office/drawing/2014/main" id="{77DA6E5F-7441-6233-DACB-330BCC7593FF}"/>
-              </a:ext>
-            </a:extLst>
-          </p:cNvPr>
-          <p:cNvPicPr>
-            <a:picLocks noChangeAspect="1"/>
-          </p:cNvPicPr>
-          <p:nvPr/>
-        </p:nvPicPr>
-        <p:blipFill>
-          <a:blip r:embed="rId2"/>
-          <a:stretch>
-            <a:fillRect/>
-          </a:stretch>
-        </p:blipFill>
-        <p:spPr>
-          <a:xfrm>
-            <a:off x="3120632" y="1544892"/>
-            <a:ext cx="6572599" cy="5004080"/>
-          </a:xfrm>
-          <a:prstGeom prst="rect">
-            <a:avLst/>
-          </a:prstGeom>
-        </p:spPr>
-      </p:pic>
-    </p:spTree>
-    <p:extLst>
-      <p:ext uri="{BB962C8B-B14F-4D97-AF65-F5344CB8AC3E}">
-        <p14:creationId xmlns:p14="http://schemas.microsoft.com/office/powerpoint/2010/main" val="1428032534"/>
+        <p14:creationId xmlns:p14="http://schemas.microsoft.com/office/powerpoint/2010/main" val="3670680207"/>
       </p:ext>
     </p:extLst>
   </p:cSld>
@@ -21252,8 +20329,8 @@
         </p:nvSpPr>
         <p:spPr>
           <a:xfrm>
-            <a:off x="3509582" y="249416"/>
-            <a:ext cx="5717143" cy="584775"/>
+            <a:off x="0" y="0"/>
+            <a:ext cx="12192000" cy="585216"/>
           </a:xfrm>
           <a:prstGeom prst="rect">
             <a:avLst/>
@@ -21261,12 +20338,12 @@
           <a:noFill/>
         </p:spPr>
         <p:txBody>
-          <a:bodyPr wrap="none" rtlCol="0">
+          <a:bodyPr wrap="square" rtlCol="0">
             <a:spAutoFit/>
           </a:bodyPr>
           <a:lstStyle/>
           <a:p>
-            <a:pPr marL="0" marR="0" lvl="0" indent="0" algn="l" defTabSz="914400" rtl="0" eaLnBrk="1" fontAlgn="auto" latinLnBrk="0" hangingPunct="1">
+            <a:pPr marL="0" marR="0" lvl="0" indent="0" algn="ctr" defTabSz="914400" rtl="0" eaLnBrk="1" fontAlgn="auto" latinLnBrk="0" hangingPunct="1">
               <a:lnSpc>
                 <a:spcPct val="100000"/>
               </a:lnSpc>
@@ -23094,8 +22171,8 @@
         </p:nvSpPr>
         <p:spPr>
           <a:xfrm>
-            <a:off x="1473371" y="187251"/>
-            <a:ext cx="9724009" cy="584775"/>
+            <a:off x="0" y="0"/>
+            <a:ext cx="12192000" cy="585216"/>
           </a:xfrm>
           <a:prstGeom prst="rect">
             <a:avLst/>
@@ -23103,12 +22180,12 @@
           <a:noFill/>
         </p:spPr>
         <p:txBody>
-          <a:bodyPr wrap="none" rtlCol="0">
+          <a:bodyPr wrap="square" rtlCol="0">
             <a:spAutoFit/>
           </a:bodyPr>
           <a:lstStyle/>
           <a:p>
-            <a:pPr marL="0" marR="0" lvl="0" indent="0" algn="l" defTabSz="914400" rtl="0" eaLnBrk="1" fontAlgn="auto" latinLnBrk="0" hangingPunct="1">
+            <a:pPr marL="0" marR="0" lvl="0" indent="0" algn="ctr" defTabSz="914400" rtl="0" eaLnBrk="1" fontAlgn="auto" latinLnBrk="0" hangingPunct="1">
               <a:lnSpc>
                 <a:spcPct val="100000"/>
               </a:lnSpc>
@@ -23143,7 +22220,7 @@
               <a:t>Architrino on Linear Path with Velocity v &lt; c</a:t>
             </a:r>
             <a:r>
-              <a:rPr kumimoji="0" lang="en-US" sz="2240" b="1" i="0" u="none" strike="noStrike" kern="1200" cap="none" spc="0" normalizeH="0" baseline="-25000" noProof="0" dirty="0">
+              <a:rPr kumimoji="0" lang="en-US" sz="3200" b="1" i="0" u="none" strike="noStrike" kern="1200" cap="none" spc="0" normalizeH="0" baseline="-25000" noProof="0" dirty="0">
                 <a:ln>
                   <a:noFill/>
                 </a:ln>
@@ -24711,8 +23788,8 @@
         </p:nvSpPr>
         <p:spPr>
           <a:xfrm>
-            <a:off x="3296740" y="279249"/>
-            <a:ext cx="6201156" cy="777875"/>
+            <a:off x="0" y="0"/>
+            <a:ext cx="12192000" cy="585216"/>
           </a:xfrm>
           <a:prstGeom prst="rect">
             <a:avLst/>
@@ -24760,7 +23837,7 @@
               <a:defRPr/>
             </a:pPr>
             <a:r>
-              <a:rPr kumimoji="0" lang="en-US" sz="3600" b="1" i="0" u="none" strike="noStrike" kern="1200" cap="none" spc="0" normalizeH="0" baseline="0" noProof="0" dirty="0">
+              <a:rPr kumimoji="0" lang="en-US" sz="3200" b="1" i="0" u="none" strike="noStrike" kern="1200" cap="none" spc="0" normalizeH="0" baseline="0" noProof="0" dirty="0">
                 <a:ln>
                   <a:noFill/>
                 </a:ln>
@@ -24777,7 +23854,7 @@
               <a:t>Causal Wake Surfaces Expand at v = c</a:t>
             </a:r>
             <a:r>
-              <a:rPr kumimoji="0" lang="en-US" sz="2520" b="1" i="0" u="none" strike="noStrike" kern="1200" cap="none" spc="0" normalizeH="0" baseline="-25000" noProof="0" dirty="0">
+              <a:rPr kumimoji="0" lang="en-US" sz="3200" b="1" i="0" u="none" strike="noStrike" kern="1200" cap="none" spc="0" normalizeH="0" baseline="-25000" noProof="0" dirty="0">
                 <a:ln>
                   <a:noFill/>
                 </a:ln>
@@ -26581,15 +25658,15 @@
         </p:nvSpPr>
         <p:spPr>
           <a:xfrm>
-            <a:off x="328266" y="450303"/>
-            <a:ext cx="11535467" cy="523220"/>
+            <a:off x="0" y="0"/>
+            <a:ext cx="12192000" cy="584775"/>
           </a:xfrm>
           <a:prstGeom prst="rect">
             <a:avLst/>
           </a:prstGeom>
         </p:spPr>
         <p:txBody>
-          <a:bodyPr wrap="none">
+          <a:bodyPr wrap="square">
             <a:spAutoFit/>
           </a:bodyPr>
           <a:lstStyle/>
@@ -26612,7 +25689,7 @@
               <a:defRPr/>
             </a:pPr>
             <a:r>
-              <a:rPr kumimoji="0" lang="en-US" sz="2800" b="1" i="0" u="none" strike="noStrike" kern="1200" cap="none" spc="0" normalizeH="0" baseline="0" noProof="0" dirty="0">
+              <a:rPr kumimoji="0" lang="en-US" sz="3200" b="1" i="0" u="none" strike="noStrike" kern="1200" cap="none" spc="0" normalizeH="0" baseline="0" noProof="0" dirty="0">
                 <a:ln>
                   <a:noFill/>
                 </a:ln>
@@ -26626,7 +25703,7 @@
                 <a:ea typeface="Helvetica Neue" panose="02000503000000020004" pitchFamily="2" charset="0"/>
                 <a:cs typeface="Helvetica Neue" panose="02000503000000020004" pitchFamily="2" charset="0"/>
               </a:rPr>
-              <a:t>A Wake Hit Occurs when a Wake Surface Intersects an Architrino</a:t>
+              <a:t>A Wake Hit Occurs when a Wake Intersects an Architrino</a:t>
             </a:r>
           </a:p>
         </p:txBody>
@@ -28756,8 +27833,8 @@
         </p:nvSpPr>
         <p:spPr>
           <a:xfrm>
-            <a:off x="1473371" y="187251"/>
-            <a:ext cx="9724009" cy="584775"/>
+            <a:off x="0" y="0"/>
+            <a:ext cx="12192000" cy="585216"/>
           </a:xfrm>
           <a:prstGeom prst="rect">
             <a:avLst/>
@@ -28765,12 +27842,12 @@
           <a:noFill/>
         </p:spPr>
         <p:txBody>
-          <a:bodyPr wrap="none" rtlCol="0">
+          <a:bodyPr wrap="square" rtlCol="0">
             <a:spAutoFit/>
           </a:bodyPr>
           <a:lstStyle/>
           <a:p>
-            <a:pPr marL="0" marR="0" lvl="0" indent="0" algn="l" defTabSz="914400" rtl="0" eaLnBrk="1" fontAlgn="auto" latinLnBrk="0" hangingPunct="1">
+            <a:pPr marL="0" marR="0" lvl="0" indent="0" algn="ctr" defTabSz="914400" rtl="0" eaLnBrk="1" fontAlgn="auto" latinLnBrk="0" hangingPunct="1">
               <a:lnSpc>
                 <a:spcPct val="100000"/>
               </a:lnSpc>
@@ -28805,7 +27882,7 @@
               <a:t>Architrino on Linear Path with Velocity v = c</a:t>
             </a:r>
             <a:r>
-              <a:rPr kumimoji="0" lang="en-US" sz="2240" b="1" i="0" u="none" strike="noStrike" kern="1200" cap="none" spc="0" normalizeH="0" baseline="-25000" noProof="0" dirty="0">
+              <a:rPr kumimoji="0" lang="en-US" sz="3200" b="1" i="0" u="none" strike="noStrike" kern="1200" cap="none" spc="0" normalizeH="0" baseline="-25000" noProof="0" dirty="0">
                 <a:ln>
                   <a:noFill/>
                 </a:ln>
@@ -30555,8 +29632,8 @@
         </p:nvSpPr>
         <p:spPr>
           <a:xfrm>
-            <a:off x="1478847" y="228414"/>
-            <a:ext cx="9927030" cy="584775"/>
+            <a:off x="0" y="0"/>
+            <a:ext cx="12192000" cy="585216"/>
           </a:xfrm>
           <a:prstGeom prst="rect">
             <a:avLst/>
@@ -30569,7 +29646,7 @@
           </a:bodyPr>
           <a:lstStyle/>
           <a:p>
-            <a:pPr marL="0" marR="0" lvl="0" indent="0" algn="l" defTabSz="914400" rtl="0" eaLnBrk="1" fontAlgn="auto" latinLnBrk="0" hangingPunct="1">
+            <a:pPr marL="0" marR="0" lvl="0" indent="0" algn="ctr" defTabSz="914400" rtl="0" eaLnBrk="1" fontAlgn="auto" latinLnBrk="0" hangingPunct="1">
               <a:lnSpc>
                 <a:spcPct val="100000"/>
               </a:lnSpc>
@@ -30604,7 +29681,7 @@
               <a:t>Architrino on Linear Path with Velocity v &gt; c</a:t>
             </a:r>
             <a:r>
-              <a:rPr kumimoji="0" lang="en-US" sz="2240" b="1" i="0" u="none" strike="noStrike" kern="1200" cap="none" spc="0" normalizeH="0" baseline="-25000" noProof="0" dirty="0">
+              <a:rPr kumimoji="0" lang="en-US" sz="3200" b="1" i="0" u="none" strike="noStrike" kern="1200" cap="none" spc="0" normalizeH="0" baseline="-25000" noProof="0" dirty="0">
                 <a:ln>
                   <a:noFill/>
                 </a:ln>
@@ -31078,7 +30155,7 @@
             <p:nvPr/>
           </p:nvPicPr>
           <p:blipFill>
-            <a:blip r:embed="rId2"/>
+            <a:blip r:embed="rId3"/>
             <a:stretch>
               <a:fillRect/>
             </a:stretch>
@@ -31447,8 +30524,8 @@
         </p:nvSpPr>
         <p:spPr>
           <a:xfrm>
-            <a:off x="2845864" y="237369"/>
-            <a:ext cx="6201156" cy="777875"/>
+            <a:off x="0" y="0"/>
+            <a:ext cx="12192000" cy="585216"/>
           </a:xfrm>
           <a:prstGeom prst="rect">
             <a:avLst/>
@@ -31496,7 +30573,7 @@
               <a:defRPr/>
             </a:pPr>
             <a:r>
-              <a:rPr kumimoji="0" lang="en-US" sz="4800" b="1" i="0" u="none" strike="noStrike" kern="1200" cap="none" spc="0" normalizeH="0" baseline="0" noProof="0" dirty="0">
+              <a:rPr kumimoji="0" lang="en-US" sz="3200" b="1" i="0" u="none" strike="noStrike" kern="1200" cap="none" spc="0" normalizeH="0" baseline="0" noProof="0" dirty="0">
                 <a:ln>
                   <a:noFill/>
                 </a:ln>
@@ -31791,7 +30868,7 @@
     <p:bg>
       <p:bgPr>
         <a:solidFill>
-          <a:schemeClr val="tx1"/>
+          <a:srgbClr val="7030A0"/>
         </a:solidFill>
         <a:effectLst/>
       </p:bgPr>
@@ -32511,7 +31588,7 @@
           <a:noFill/>
           <a:ln w="38100">
             <a:solidFill>
-              <a:srgbClr val="7030A0"/>
+              <a:schemeClr val="bg1"/>
             </a:solidFill>
           </a:ln>
         </p:spPr>
@@ -33373,7 +32450,7 @@
           <a:noFill/>
           <a:ln w="38100">
             <a:solidFill>
-              <a:srgbClr val="7030A0"/>
+              <a:schemeClr val="bg1"/>
             </a:solidFill>
           </a:ln>
         </p:spPr>
@@ -33990,25 +33067,23 @@
         </p:nvSpPr>
         <p:spPr>
           <a:xfrm>
-            <a:off x="2750180" y="307606"/>
-            <a:ext cx="6849952" cy="523220"/>
+            <a:off x="0" y="0"/>
+            <a:ext cx="12192000" cy="585216"/>
           </a:xfrm>
           <a:prstGeom prst="rect">
             <a:avLst/>
           </a:prstGeom>
-          <a:solidFill>
-            <a:srgbClr val="7030A0"/>
-          </a:solidFill>
+          <a:noFill/>
         </p:spPr>
         <p:txBody>
-          <a:bodyPr wrap="none">
+          <a:bodyPr wrap="square">
             <a:spAutoFit/>
           </a:bodyPr>
           <a:lstStyle/>
           <a:p>
             <a:pPr algn="ctr"/>
             <a:r>
-              <a:rPr lang="en-US" sz="2800" b="1" dirty="0">
+              <a:rPr lang="en-US" sz="3200" b="1" dirty="0">
                 <a:solidFill>
                   <a:schemeClr val="bg1"/>
                 </a:solidFill>
@@ -34018,7 +33093,7 @@
               </a:rPr>
               <a:t>Architrino Path History and Wake Hits</a:t>
             </a:r>
-            <a:endParaRPr lang="en-US" sz="2800" b="1" baseline="30000" dirty="0">
+            <a:endParaRPr lang="en-US" sz="3200" b="1" baseline="30000" dirty="0">
               <a:solidFill>
                 <a:schemeClr val="bg1"/>
               </a:solidFill>

--- a/reference/archie/presentations/NPQG Fundamentals - Paths.pptx
+++ b/reference/archie/presentations/NPQG Fundamentals - Paths.pptx
@@ -6410,7 +6410,7 @@
 </file>
 
 <file path=ppt/slides/slide1.xml><?xml version="1.0" encoding="utf-8"?>
-<p:sld xmlns:a="http://schemas.openxmlformats.org/drawingml/2006/main" xmlns:ns2="http://schemas.microsoft.com/office/drawing/2014/main" xmlns:ns3="http://schemas.microsoft.com/office/powerpoint/2010/main" xmlns:p="http://schemas.openxmlformats.org/presentationml/2006/main">
+<p:sld xmlns:a="http://schemas.openxmlformats.org/drawingml/2006/main" xmlns:r="http://schemas.openxmlformats.org/officeDocument/2006/relationships" xmlns:p="http://schemas.openxmlformats.org/presentationml/2006/main">
   <p:cSld>
     <p:bg>
       <p:bgPr>
@@ -6425,7 +6425,7 @@
         <p:cNvPr id="1" name="">
           <a:extLst>
             <a:ext uri="{FF2B5EF4-FFF2-40B4-BE49-F238E27FC236}">
-              <ns2:creationId id="{F12CB3D1-0CE0-632F-6109-64380C884133}"/>
+              <a16:creationId xmlns:a16="http://schemas.microsoft.com/office/drawing/2014/main" id="{F12CB3D1-0CE0-632F-6109-64380C884133}"/>
             </a:ext>
           </a:extLst>
         </p:cNvPr>
@@ -6445,7 +6445,7 @@
           <p:cNvPr id="2" name="TextBox 1">
             <a:extLst>
               <a:ext uri="{FF2B5EF4-FFF2-40B4-BE49-F238E27FC236}">
-                <ns2:creationId id="{4BD4ABB3-A2D3-D440-CAE2-3FE090A98AD7}"/>
+                <a16:creationId xmlns:a16="http://schemas.microsoft.com/office/drawing/2014/main" id="{4BD4ABB3-A2D3-D440-CAE2-3FE090A98AD7}"/>
               </a:ext>
             </a:extLst>
           </p:cNvPr>
@@ -6594,7 +6594,7 @@
     </p:spTree>
     <p:extLst>
       <p:ext uri="{BB962C8B-B14F-4D97-AF65-F5344CB8AC3E}">
-        <ns3:creationId val="3704261708"/>
+        <p14:creationId xmlns:p14="http://schemas.microsoft.com/office/powerpoint/2010/main" val="3704261708"/>
       </p:ext>
     </p:extLst>
   </p:cSld>
@@ -6605,7 +6605,7 @@
 </file>
 
 <file path=ppt/slides/slide10.xml><?xml version="1.0" encoding="utf-8"?>
-<p:sld xmlns:a="http://schemas.openxmlformats.org/drawingml/2006/main" xmlns:ns2="http://schemas.microsoft.com/office/drawing/2014/main" xmlns:p="http://schemas.openxmlformats.org/presentationml/2006/main" xmlns:p14="http://schemas.microsoft.com/office/powerpoint/2010/main">
+<p:sld xmlns:a="http://schemas.openxmlformats.org/drawingml/2006/main" xmlns:r="http://schemas.openxmlformats.org/officeDocument/2006/relationships" xmlns:p="http://schemas.openxmlformats.org/presentationml/2006/main">
   <p:cSld>
     <p:bg>
       <p:bgPr>
@@ -6634,7 +6634,7 @@
           <p:cNvPr id="4" name="Freeform 3">
             <a:extLst>
               <a:ext uri="{FF2B5EF4-FFF2-40B4-BE49-F238E27FC236}">
-                <ns2:creationId id="{557E8D0E-7530-B118-1DC6-82906B4F6D15}"/>
+                <a16:creationId xmlns:a16="http://schemas.microsoft.com/office/drawing/2014/main" id="{557E8D0E-7530-B118-1DC6-82906B4F6D15}"/>
               </a:ext>
             </a:extLst>
           </p:cNvPr>
@@ -7598,7 +7598,7 @@
           <p:cNvPr id="5" name="Footer Placeholder 3">
             <a:extLst>
               <a:ext uri="{FF2B5EF4-FFF2-40B4-BE49-F238E27FC236}">
-                <ns2:creationId id="{668F77D6-DFDA-5A46-8DF1-47F6A167C2B1}"/>
+                <a16:creationId xmlns:a16="http://schemas.microsoft.com/office/drawing/2014/main" id="{668F77D6-DFDA-5A46-8DF1-47F6A167C2B1}"/>
               </a:ext>
             </a:extLst>
           </p:cNvPr>
@@ -7760,7 +7760,7 @@
           <p:cNvPr id="16" name="Freeform 15">
             <a:extLst>
               <a:ext uri="{FF2B5EF4-FFF2-40B4-BE49-F238E27FC236}">
-                <ns2:creationId id="{226B2D26-F692-894E-9B09-F57FBB5CB2A3}"/>
+                <a16:creationId xmlns:a16="http://schemas.microsoft.com/office/drawing/2014/main" id="{226B2D26-F692-894E-9B09-F57FBB5CB2A3}"/>
               </a:ext>
             </a:extLst>
           </p:cNvPr>
@@ -8643,7 +8643,7 @@
           <p:cNvPr id="19" name="Oval 18">
             <a:extLst>
               <a:ext uri="{FF2B5EF4-FFF2-40B4-BE49-F238E27FC236}">
-                <ns2:creationId id="{0592434B-85D0-0A41-95DD-A29D1D3E92A7}"/>
+                <a16:creationId xmlns:a16="http://schemas.microsoft.com/office/drawing/2014/main" id="{0592434B-85D0-0A41-95DD-A29D1D3E92A7}"/>
               </a:ext>
             </a:extLst>
           </p:cNvPr>
@@ -8724,7 +8724,7 @@
           <p:cNvPr id="22" name="TextBox 21">
             <a:extLst>
               <a:ext uri="{FF2B5EF4-FFF2-40B4-BE49-F238E27FC236}">
-                <ns2:creationId id="{32F7BF73-EB2C-9D42-97FB-D39FDCC924EB}"/>
+                <a16:creationId xmlns:a16="http://schemas.microsoft.com/office/drawing/2014/main" id="{32F7BF73-EB2C-9D42-97FB-D39FDCC924EB}"/>
               </a:ext>
             </a:extLst>
           </p:cNvPr>
@@ -8803,7 +8803,7 @@
           <p:cNvPr id="32" name="Group 31">
             <a:extLst>
               <a:ext uri="{FF2B5EF4-FFF2-40B4-BE49-F238E27FC236}">
-                <ns2:creationId id="{A120AE69-6043-195E-40C7-43C019B9D3A9}"/>
+                <a16:creationId xmlns:a16="http://schemas.microsoft.com/office/drawing/2014/main" id="{A120AE69-6043-195E-40C7-43C019B9D3A9}"/>
               </a:ext>
             </a:extLst>
           </p:cNvPr>
@@ -8823,7 +8823,7 @@
             <p:cNvPr id="24" name="Straight Connector 23">
               <a:extLst>
                 <a:ext uri="{FF2B5EF4-FFF2-40B4-BE49-F238E27FC236}">
-                  <ns2:creationId id="{3A19E039-1667-254C-809A-972BBA46D65C}"/>
+                  <a16:creationId xmlns:a16="http://schemas.microsoft.com/office/drawing/2014/main" id="{3A19E039-1667-254C-809A-972BBA46D65C}"/>
                 </a:ext>
               </a:extLst>
             </p:cNvPr>
@@ -8869,7 +8869,7 @@
             <p:cNvPr id="2" name="Oval 1">
               <a:extLst>
                 <a:ext uri="{FF2B5EF4-FFF2-40B4-BE49-F238E27FC236}">
-                  <ns2:creationId id="{38418338-F1E6-81D9-6A8C-D7EB7AA9DDA2}"/>
+                  <a16:creationId xmlns:a16="http://schemas.microsoft.com/office/drawing/2014/main" id="{38418338-F1E6-81D9-6A8C-D7EB7AA9DDA2}"/>
                 </a:ext>
               </a:extLst>
             </p:cNvPr>
@@ -8954,7 +8954,7 @@
           <p:cNvPr id="29" name="TextBox 28">
             <a:extLst>
               <a:ext uri="{FF2B5EF4-FFF2-40B4-BE49-F238E27FC236}">
-                <ns2:creationId id="{2C329E1C-5E54-9E3C-A6FA-AE50E16EEB85}"/>
+                <a16:creationId xmlns:a16="http://schemas.microsoft.com/office/drawing/2014/main" id="{2C329E1C-5E54-9E3C-A6FA-AE50E16EEB85}"/>
               </a:ext>
             </a:extLst>
           </p:cNvPr>
@@ -9033,7 +9033,7 @@
           <p:cNvPr id="40" name="Group 39">
             <a:extLst>
               <a:ext uri="{FF2B5EF4-FFF2-40B4-BE49-F238E27FC236}">
-                <ns2:creationId id="{C105AAA1-FA00-79D8-70E9-DB832351B5E2}"/>
+                <a16:creationId xmlns:a16="http://schemas.microsoft.com/office/drawing/2014/main" id="{C105AAA1-FA00-79D8-70E9-DB832351B5E2}"/>
               </a:ext>
             </a:extLst>
           </p:cNvPr>
@@ -9053,7 +9053,7 @@
             <p:cNvPr id="41" name="Straight Connector 40">
               <a:extLst>
                 <a:ext uri="{FF2B5EF4-FFF2-40B4-BE49-F238E27FC236}">
-                  <ns2:creationId id="{48D05E5C-4059-6EC7-1299-E52A65F46E3D}"/>
+                  <a16:creationId xmlns:a16="http://schemas.microsoft.com/office/drawing/2014/main" id="{48D05E5C-4059-6EC7-1299-E52A65F46E3D}"/>
                 </a:ext>
               </a:extLst>
             </p:cNvPr>
@@ -9099,7 +9099,7 @@
             <p:cNvPr id="42" name="Oval 41">
               <a:extLst>
                 <a:ext uri="{FF2B5EF4-FFF2-40B4-BE49-F238E27FC236}">
-                  <ns2:creationId id="{8174E055-9EC2-40B6-B317-43A23011EC49}"/>
+                  <a16:creationId xmlns:a16="http://schemas.microsoft.com/office/drawing/2014/main" id="{8174E055-9EC2-40B6-B317-43A23011EC49}"/>
                 </a:ext>
               </a:extLst>
             </p:cNvPr>
@@ -9184,7 +9184,7 @@
           <p:cNvPr id="28" name="TextBox 27">
             <a:extLst>
               <a:ext uri="{FF2B5EF4-FFF2-40B4-BE49-F238E27FC236}">
-                <ns2:creationId id="{B86BBAD0-86F6-0D58-180C-6EA1BDCC33FE}"/>
+                <a16:creationId xmlns:a16="http://schemas.microsoft.com/office/drawing/2014/main" id="{B86BBAD0-86F6-0D58-180C-6EA1BDCC33FE}"/>
               </a:ext>
             </a:extLst>
           </p:cNvPr>
@@ -9313,7 +9313,7 @@
           <p:cNvPr id="6" name="Oval 5">
             <a:extLst>
               <a:ext uri="{FF2B5EF4-FFF2-40B4-BE49-F238E27FC236}">
-                <ns2:creationId id="{AC0CFD16-199C-C379-61A7-C2D95EDE2034}"/>
+                <a16:creationId xmlns:a16="http://schemas.microsoft.com/office/drawing/2014/main" id="{AC0CFD16-199C-C379-61A7-C2D95EDE2034}"/>
               </a:ext>
             </a:extLst>
           </p:cNvPr>
@@ -9365,7 +9365,7 @@
           <p:cNvPr id="7" name="TextBox 6">
             <a:extLst>
               <a:ext uri="{FF2B5EF4-FFF2-40B4-BE49-F238E27FC236}">
-                <ns2:creationId id="{74832E6C-887E-D39B-AAC8-6B87F8F0377B}"/>
+                <a16:creationId xmlns:a16="http://schemas.microsoft.com/office/drawing/2014/main" id="{74832E6C-887E-D39B-AAC8-6B87F8F0377B}"/>
               </a:ext>
             </a:extLst>
           </p:cNvPr>
@@ -9412,7 +9412,7 @@
           <p:cNvPr id="9" name="TextBox 8">
             <a:extLst>
               <a:ext uri="{FF2B5EF4-FFF2-40B4-BE49-F238E27FC236}">
-                <ns2:creationId id="{3FBBB3C0-9EF9-2269-F804-566738A12135}"/>
+                <a16:creationId xmlns:a16="http://schemas.microsoft.com/office/drawing/2014/main" id="{3FBBB3C0-9EF9-2269-F804-566738A12135}"/>
               </a:ext>
             </a:extLst>
           </p:cNvPr>
@@ -9459,7 +9459,7 @@
           <p:cNvPr id="10" name="TextBox 9">
             <a:extLst>
               <a:ext uri="{FF2B5EF4-FFF2-40B4-BE49-F238E27FC236}">
-                <ns2:creationId id="{5AD88C91-2B9D-6C66-4521-C91A0EBE16F1}"/>
+                <a16:creationId xmlns:a16="http://schemas.microsoft.com/office/drawing/2014/main" id="{5AD88C91-2B9D-6C66-4521-C91A0EBE16F1}"/>
               </a:ext>
             </a:extLst>
           </p:cNvPr>
@@ -9506,7 +9506,7 @@
           <p:cNvPr id="11" name="Rectangle 10">
             <a:extLst>
               <a:ext uri="{FF2B5EF4-FFF2-40B4-BE49-F238E27FC236}">
-                <ns2:creationId id="{408E88E8-1AC1-3859-ED6E-998C354C18AF}"/>
+                <a16:creationId xmlns:a16="http://schemas.microsoft.com/office/drawing/2014/main" id="{408E88E8-1AC1-3859-ED6E-998C354C18AF}"/>
               </a:ext>
             </a:extLst>
           </p:cNvPr>
@@ -9557,7 +9557,7 @@
           <p:cNvPr id="14" name="Group 13">
             <a:extLst>
               <a:ext uri="{FF2B5EF4-FFF2-40B4-BE49-F238E27FC236}">
-                <ns2:creationId id="{7A05C4D2-699B-5F84-92AE-09238BDBF4E8}"/>
+                <a16:creationId xmlns:a16="http://schemas.microsoft.com/office/drawing/2014/main" id="{7A05C4D2-699B-5F84-92AE-09238BDBF4E8}"/>
               </a:ext>
             </a:extLst>
           </p:cNvPr>
@@ -9577,7 +9577,7 @@
             <p:cNvPr id="15" name="Straight Arrow Connector 14">
               <a:extLst>
                 <a:ext uri="{FF2B5EF4-FFF2-40B4-BE49-F238E27FC236}">
-                  <ns2:creationId id="{6F7FA685-0220-0300-5C81-7977AB43778D}"/>
+                  <a16:creationId xmlns:a16="http://schemas.microsoft.com/office/drawing/2014/main" id="{6F7FA685-0220-0300-5C81-7977AB43778D}"/>
                 </a:ext>
               </a:extLst>
             </p:cNvPr>
@@ -9621,7 +9621,7 @@
             <p:cNvPr id="17" name="Straight Arrow Connector 16">
               <a:extLst>
                 <a:ext uri="{FF2B5EF4-FFF2-40B4-BE49-F238E27FC236}">
-                  <ns2:creationId id="{8DAAADDE-3685-65B3-881A-0143943C0267}"/>
+                  <a16:creationId xmlns:a16="http://schemas.microsoft.com/office/drawing/2014/main" id="{8DAAADDE-3685-65B3-881A-0143943C0267}"/>
                 </a:ext>
               </a:extLst>
             </p:cNvPr>
@@ -9665,7 +9665,7 @@
             <p:cNvPr id="18" name="TextBox 17">
               <a:extLst>
                 <a:ext uri="{FF2B5EF4-FFF2-40B4-BE49-F238E27FC236}">
-                  <ns2:creationId id="{BAA0C0F5-147D-A6B2-DBB6-6DCB0FFF6BAE}"/>
+                  <a16:creationId xmlns:a16="http://schemas.microsoft.com/office/drawing/2014/main" id="{BAA0C0F5-147D-A6B2-DBB6-6DCB0FFF6BAE}"/>
                 </a:ext>
               </a:extLst>
             </p:cNvPr>
@@ -9730,7 +9730,7 @@
             <p:cNvPr id="20" name="TextBox 19">
               <a:extLst>
                 <a:ext uri="{FF2B5EF4-FFF2-40B4-BE49-F238E27FC236}">
-                  <ns2:creationId id="{84C36D57-9425-3680-6F8D-295F2518BF54}"/>
+                  <a16:creationId xmlns:a16="http://schemas.microsoft.com/office/drawing/2014/main" id="{84C36D57-9425-3680-6F8D-295F2518BF54}"/>
                 </a:ext>
               </a:extLst>
             </p:cNvPr>
@@ -9790,7 +9790,7 @@
     </p:spTree>
     <p:extLst>
       <p:ext uri="{BB962C8B-B14F-4D97-AF65-F5344CB8AC3E}">
-        <p14:creationId val="1541260098"/>
+        <p14:creationId xmlns:p14="http://schemas.microsoft.com/office/powerpoint/2010/main" val="1541260098"/>
       </p:ext>
     </p:extLst>
   </p:cSld>
@@ -9801,7 +9801,7 @@
 </file>
 
 <file path=ppt/slides/slide11.xml><?xml version="1.0" encoding="utf-8"?>
-<p:sld xmlns:a="http://schemas.openxmlformats.org/drawingml/2006/main" xmlns:ns2="http://schemas.microsoft.com/office/drawing/2014/main" xmlns:p="http://schemas.openxmlformats.org/presentationml/2006/main" xmlns:p14="http://schemas.microsoft.com/office/powerpoint/2010/main">
+<p:sld xmlns:a="http://schemas.openxmlformats.org/drawingml/2006/main" xmlns:r="http://schemas.openxmlformats.org/officeDocument/2006/relationships" xmlns:p="http://schemas.openxmlformats.org/presentationml/2006/main">
   <p:cSld>
     <p:bg>
       <p:bgPr>
@@ -9830,7 +9830,7 @@
           <p:cNvPr id="5" name="Footer Placeholder 3">
             <a:extLst>
               <a:ext uri="{FF2B5EF4-FFF2-40B4-BE49-F238E27FC236}">
-                <ns2:creationId id="{668F77D6-DFDA-5A46-8DF1-47F6A167C2B1}"/>
+                <a16:creationId xmlns:a16="http://schemas.microsoft.com/office/drawing/2014/main" id="{668F77D6-DFDA-5A46-8DF1-47F6A167C2B1}"/>
               </a:ext>
             </a:extLst>
           </p:cNvPr>
@@ -9992,7 +9992,7 @@
           <p:cNvPr id="13" name="TextBox 12">
             <a:extLst>
               <a:ext uri="{FF2B5EF4-FFF2-40B4-BE49-F238E27FC236}">
-                <ns2:creationId id="{2C3F4604-6C2F-0E4E-9DD3-4F5C89FF51AB}"/>
+                <a16:creationId xmlns:a16="http://schemas.microsoft.com/office/drawing/2014/main" id="{2C3F4604-6C2F-0E4E-9DD3-4F5C89FF51AB}"/>
               </a:ext>
             </a:extLst>
           </p:cNvPr>
@@ -10053,7 +10053,7 @@
           <p:cNvPr id="14" name="Freeform 13">
             <a:extLst>
               <a:ext uri="{FF2B5EF4-FFF2-40B4-BE49-F238E27FC236}">
-                <ns2:creationId id="{6D478F86-6608-8240-A60F-2B5B4B14CE42}"/>
+                <a16:creationId xmlns:a16="http://schemas.microsoft.com/office/drawing/2014/main" id="{6D478F86-6608-8240-A60F-2B5B4B14CE42}"/>
               </a:ext>
             </a:extLst>
           </p:cNvPr>
@@ -10594,7 +10594,7 @@
           <p:cNvPr id="16" name="Freeform 15">
             <a:extLst>
               <a:ext uri="{FF2B5EF4-FFF2-40B4-BE49-F238E27FC236}">
-                <ns2:creationId id="{226B2D26-F692-894E-9B09-F57FBB5CB2A3}"/>
+                <a16:creationId xmlns:a16="http://schemas.microsoft.com/office/drawing/2014/main" id="{226B2D26-F692-894E-9B09-F57FBB5CB2A3}"/>
               </a:ext>
             </a:extLst>
           </p:cNvPr>
@@ -11477,7 +11477,7 @@
           <p:cNvPr id="18" name="Oval 17">
             <a:extLst>
               <a:ext uri="{FF2B5EF4-FFF2-40B4-BE49-F238E27FC236}">
-                <ns2:creationId id="{BE4CDC90-4B2E-BE41-BB9D-A84675F3A2FE}"/>
+                <a16:creationId xmlns:a16="http://schemas.microsoft.com/office/drawing/2014/main" id="{BE4CDC90-4B2E-BE41-BB9D-A84675F3A2FE}"/>
               </a:ext>
             </a:extLst>
           </p:cNvPr>
@@ -11558,7 +11558,7 @@
           <p:cNvPr id="19" name="Oval 18">
             <a:extLst>
               <a:ext uri="{FF2B5EF4-FFF2-40B4-BE49-F238E27FC236}">
-                <ns2:creationId id="{0592434B-85D0-0A41-95DD-A29D1D3E92A7}"/>
+                <a16:creationId xmlns:a16="http://schemas.microsoft.com/office/drawing/2014/main" id="{0592434B-85D0-0A41-95DD-A29D1D3E92A7}"/>
               </a:ext>
             </a:extLst>
           </p:cNvPr>
@@ -11639,7 +11639,7 @@
           <p:cNvPr id="21" name="TextBox 20">
             <a:extLst>
               <a:ext uri="{FF2B5EF4-FFF2-40B4-BE49-F238E27FC236}">
-                <ns2:creationId id="{7B549753-C2CD-8744-8435-2E08FD32BDEB}"/>
+                <a16:creationId xmlns:a16="http://schemas.microsoft.com/office/drawing/2014/main" id="{7B549753-C2CD-8744-8435-2E08FD32BDEB}"/>
               </a:ext>
             </a:extLst>
           </p:cNvPr>
@@ -11718,7 +11718,7 @@
           <p:cNvPr id="22" name="TextBox 21">
             <a:extLst>
               <a:ext uri="{FF2B5EF4-FFF2-40B4-BE49-F238E27FC236}">
-                <ns2:creationId id="{32F7BF73-EB2C-9D42-97FB-D39FDCC924EB}"/>
+                <a16:creationId xmlns:a16="http://schemas.microsoft.com/office/drawing/2014/main" id="{32F7BF73-EB2C-9D42-97FB-D39FDCC924EB}"/>
               </a:ext>
             </a:extLst>
           </p:cNvPr>
@@ -11797,7 +11797,7 @@
           <p:cNvPr id="32" name="Group 31">
             <a:extLst>
               <a:ext uri="{FF2B5EF4-FFF2-40B4-BE49-F238E27FC236}">
-                <ns2:creationId id="{A120AE69-6043-195E-40C7-43C019B9D3A9}"/>
+                <a16:creationId xmlns:a16="http://schemas.microsoft.com/office/drawing/2014/main" id="{A120AE69-6043-195E-40C7-43C019B9D3A9}"/>
               </a:ext>
             </a:extLst>
           </p:cNvPr>
@@ -11817,7 +11817,7 @@
             <p:cNvPr id="24" name="Straight Connector 23">
               <a:extLst>
                 <a:ext uri="{FF2B5EF4-FFF2-40B4-BE49-F238E27FC236}">
-                  <ns2:creationId id="{3A19E039-1667-254C-809A-972BBA46D65C}"/>
+                  <a16:creationId xmlns:a16="http://schemas.microsoft.com/office/drawing/2014/main" id="{3A19E039-1667-254C-809A-972BBA46D65C}"/>
                 </a:ext>
               </a:extLst>
             </p:cNvPr>
@@ -11864,7 +11864,7 @@
             <p:cNvPr id="2" name="Oval 1">
               <a:extLst>
                 <a:ext uri="{FF2B5EF4-FFF2-40B4-BE49-F238E27FC236}">
-                  <ns2:creationId id="{38418338-F1E6-81D9-6A8C-D7EB7AA9DDA2}"/>
+                  <a16:creationId xmlns:a16="http://schemas.microsoft.com/office/drawing/2014/main" id="{38418338-F1E6-81D9-6A8C-D7EB7AA9DDA2}"/>
                 </a:ext>
               </a:extLst>
             </p:cNvPr>
@@ -11949,7 +11949,7 @@
           <p:cNvPr id="28" name="TextBox 27">
             <a:extLst>
               <a:ext uri="{FF2B5EF4-FFF2-40B4-BE49-F238E27FC236}">
-                <ns2:creationId id="{B86BBAD0-86F6-0D58-180C-6EA1BDCC33FE}"/>
+                <a16:creationId xmlns:a16="http://schemas.microsoft.com/office/drawing/2014/main" id="{B86BBAD0-86F6-0D58-180C-6EA1BDCC33FE}"/>
               </a:ext>
             </a:extLst>
           </p:cNvPr>
@@ -12028,7 +12028,7 @@
           <p:cNvPr id="29" name="TextBox 28">
             <a:extLst>
               <a:ext uri="{FF2B5EF4-FFF2-40B4-BE49-F238E27FC236}">
-                <ns2:creationId id="{2C329E1C-5E54-9E3C-A6FA-AE50E16EEB85}"/>
+                <a16:creationId xmlns:a16="http://schemas.microsoft.com/office/drawing/2014/main" id="{2C329E1C-5E54-9E3C-A6FA-AE50E16EEB85}"/>
               </a:ext>
             </a:extLst>
           </p:cNvPr>
@@ -12107,7 +12107,7 @@
           <p:cNvPr id="33" name="Group 32">
             <a:extLst>
               <a:ext uri="{FF2B5EF4-FFF2-40B4-BE49-F238E27FC236}">
-                <ns2:creationId id="{1D286D70-C171-9F97-4EF6-3BE92F6BF451}"/>
+                <a16:creationId xmlns:a16="http://schemas.microsoft.com/office/drawing/2014/main" id="{1D286D70-C171-9F97-4EF6-3BE92F6BF451}"/>
               </a:ext>
             </a:extLst>
           </p:cNvPr>
@@ -12127,7 +12127,7 @@
             <p:cNvPr id="34" name="Straight Connector 33">
               <a:extLst>
                 <a:ext uri="{FF2B5EF4-FFF2-40B4-BE49-F238E27FC236}">
-                  <ns2:creationId id="{8592FA4B-D9A7-6E33-AB7A-56BCD3E75DEC}"/>
+                  <a16:creationId xmlns:a16="http://schemas.microsoft.com/office/drawing/2014/main" id="{8592FA4B-D9A7-6E33-AB7A-56BCD3E75DEC}"/>
                 </a:ext>
               </a:extLst>
             </p:cNvPr>
@@ -12173,7 +12173,7 @@
             <p:cNvPr id="35" name="Oval 34">
               <a:extLst>
                 <a:ext uri="{FF2B5EF4-FFF2-40B4-BE49-F238E27FC236}">
-                  <ns2:creationId id="{D1C61822-C414-6D43-5771-23FAB0629304}"/>
+                  <a16:creationId xmlns:a16="http://schemas.microsoft.com/office/drawing/2014/main" id="{D1C61822-C414-6D43-5771-23FAB0629304}"/>
                 </a:ext>
               </a:extLst>
             </p:cNvPr>
@@ -12258,7 +12258,7 @@
           <p:cNvPr id="36" name="Group 35">
             <a:extLst>
               <a:ext uri="{FF2B5EF4-FFF2-40B4-BE49-F238E27FC236}">
-                <ns2:creationId id="{C03937C6-921F-C709-6C11-E769E0AA1568}"/>
+                <a16:creationId xmlns:a16="http://schemas.microsoft.com/office/drawing/2014/main" id="{C03937C6-921F-C709-6C11-E769E0AA1568}"/>
               </a:ext>
             </a:extLst>
           </p:cNvPr>
@@ -12278,7 +12278,7 @@
             <p:cNvPr id="37" name="Straight Connector 36">
               <a:extLst>
                 <a:ext uri="{FF2B5EF4-FFF2-40B4-BE49-F238E27FC236}">
-                  <ns2:creationId id="{BA8BF2BD-3FCE-A586-601D-1E4026152CB6}"/>
+                  <a16:creationId xmlns:a16="http://schemas.microsoft.com/office/drawing/2014/main" id="{BA8BF2BD-3FCE-A586-601D-1E4026152CB6}"/>
                 </a:ext>
               </a:extLst>
             </p:cNvPr>
@@ -12324,7 +12324,7 @@
             <p:cNvPr id="38" name="Oval 37">
               <a:extLst>
                 <a:ext uri="{FF2B5EF4-FFF2-40B4-BE49-F238E27FC236}">
-                  <ns2:creationId id="{9DC53165-740B-C795-C0DF-F1A1A73F6F36}"/>
+                  <a16:creationId xmlns:a16="http://schemas.microsoft.com/office/drawing/2014/main" id="{9DC53165-740B-C795-C0DF-F1A1A73F6F36}"/>
                 </a:ext>
               </a:extLst>
             </p:cNvPr>
@@ -12409,7 +12409,7 @@
           <p:cNvPr id="40" name="Group 39">
             <a:extLst>
               <a:ext uri="{FF2B5EF4-FFF2-40B4-BE49-F238E27FC236}">
-                <ns2:creationId id="{C105AAA1-FA00-79D8-70E9-DB832351B5E2}"/>
+                <a16:creationId xmlns:a16="http://schemas.microsoft.com/office/drawing/2014/main" id="{C105AAA1-FA00-79D8-70E9-DB832351B5E2}"/>
               </a:ext>
             </a:extLst>
           </p:cNvPr>
@@ -12429,7 +12429,7 @@
             <p:cNvPr id="41" name="Straight Connector 40">
               <a:extLst>
                 <a:ext uri="{FF2B5EF4-FFF2-40B4-BE49-F238E27FC236}">
-                  <ns2:creationId id="{48D05E5C-4059-6EC7-1299-E52A65F46E3D}"/>
+                  <a16:creationId xmlns:a16="http://schemas.microsoft.com/office/drawing/2014/main" id="{48D05E5C-4059-6EC7-1299-E52A65F46E3D}"/>
                 </a:ext>
               </a:extLst>
             </p:cNvPr>
@@ -12475,7 +12475,7 @@
             <p:cNvPr id="42" name="Oval 41">
               <a:extLst>
                 <a:ext uri="{FF2B5EF4-FFF2-40B4-BE49-F238E27FC236}">
-                  <ns2:creationId id="{8174E055-9EC2-40B6-B317-43A23011EC49}"/>
+                  <a16:creationId xmlns:a16="http://schemas.microsoft.com/office/drawing/2014/main" id="{8174E055-9EC2-40B6-B317-43A23011EC49}"/>
                 </a:ext>
               </a:extLst>
             </p:cNvPr>
@@ -12560,7 +12560,7 @@
           <p:cNvPr id="4" name="Rectangle 3">
             <a:extLst>
               <a:ext uri="{FF2B5EF4-FFF2-40B4-BE49-F238E27FC236}">
-                <ns2:creationId id="{ADBBA491-EC7F-B7A8-024F-1F1EB3434C26}"/>
+                <a16:creationId xmlns:a16="http://schemas.microsoft.com/office/drawing/2014/main" id="{ADBBA491-EC7F-B7A8-024F-1F1EB3434C26}"/>
               </a:ext>
             </a:extLst>
           </p:cNvPr>
@@ -12611,7 +12611,7 @@
           <p:cNvPr id="6" name="Group 5">
             <a:extLst>
               <a:ext uri="{FF2B5EF4-FFF2-40B4-BE49-F238E27FC236}">
-                <ns2:creationId id="{99AA8219-E43E-724C-056B-B18383E44D07}"/>
+                <a16:creationId xmlns:a16="http://schemas.microsoft.com/office/drawing/2014/main" id="{99AA8219-E43E-724C-056B-B18383E44D07}"/>
               </a:ext>
             </a:extLst>
           </p:cNvPr>
@@ -12631,7 +12631,7 @@
             <p:cNvPr id="7" name="Straight Arrow Connector 6">
               <a:extLst>
                 <a:ext uri="{FF2B5EF4-FFF2-40B4-BE49-F238E27FC236}">
-                  <ns2:creationId id="{D656FE40-D181-9F96-4B12-1D4A1600D94D}"/>
+                  <a16:creationId xmlns:a16="http://schemas.microsoft.com/office/drawing/2014/main" id="{D656FE40-D181-9F96-4B12-1D4A1600D94D}"/>
                 </a:ext>
               </a:extLst>
             </p:cNvPr>
@@ -12675,7 +12675,7 @@
             <p:cNvPr id="9" name="Straight Arrow Connector 8">
               <a:extLst>
                 <a:ext uri="{FF2B5EF4-FFF2-40B4-BE49-F238E27FC236}">
-                  <ns2:creationId id="{A8B296C3-B87D-78ED-4E26-EC9E5A291FD0}"/>
+                  <a16:creationId xmlns:a16="http://schemas.microsoft.com/office/drawing/2014/main" id="{A8B296C3-B87D-78ED-4E26-EC9E5A291FD0}"/>
                 </a:ext>
               </a:extLst>
             </p:cNvPr>
@@ -12719,7 +12719,7 @@
             <p:cNvPr id="10" name="TextBox 9">
               <a:extLst>
                 <a:ext uri="{FF2B5EF4-FFF2-40B4-BE49-F238E27FC236}">
-                  <ns2:creationId id="{F49CBD38-2A34-BF6B-7AF0-E9DF4ADD0FDF}"/>
+                  <a16:creationId xmlns:a16="http://schemas.microsoft.com/office/drawing/2014/main" id="{F49CBD38-2A34-BF6B-7AF0-E9DF4ADD0FDF}"/>
                 </a:ext>
               </a:extLst>
             </p:cNvPr>
@@ -12783,7 +12783,7 @@
     </p:spTree>
     <p:extLst>
       <p:ext uri="{BB962C8B-B14F-4D97-AF65-F5344CB8AC3E}">
-        <p14:creationId val="3036832815"/>
+        <p14:creationId xmlns:p14="http://schemas.microsoft.com/office/powerpoint/2010/main" val="3036832815"/>
       </p:ext>
     </p:extLst>
   </p:cSld>
@@ -12794,7 +12794,7 @@
 </file>
 
 <file path=ppt/slides/slide12.xml><?xml version="1.0" encoding="utf-8"?>
-<p:sld xmlns:a="http://schemas.openxmlformats.org/drawingml/2006/main" xmlns:ns2="http://schemas.microsoft.com/office/drawing/2014/main" xmlns:p="http://schemas.openxmlformats.org/presentationml/2006/main" xmlns:p14="http://schemas.microsoft.com/office/powerpoint/2010/main">
+<p:sld xmlns:a="http://schemas.openxmlformats.org/drawingml/2006/main" xmlns:r="http://schemas.openxmlformats.org/officeDocument/2006/relationships" xmlns:p="http://schemas.openxmlformats.org/presentationml/2006/main">
   <p:cSld>
     <p:bg>
       <p:bgPr>
@@ -12809,7 +12809,7 @@
         <p:cNvPr id="1" name="">
           <a:extLst>
             <a:ext uri="{FF2B5EF4-FFF2-40B4-BE49-F238E27FC236}">
-              <ns2:creationId id="{96E919E2-812D-C716-7A6E-78657A604D1E}"/>
+              <a16:creationId xmlns:a16="http://schemas.microsoft.com/office/drawing/2014/main" id="{96E919E2-812D-C716-7A6E-78657A604D1E}"/>
             </a:ext>
           </a:extLst>
         </p:cNvPr>
@@ -12829,7 +12829,7 @@
           <p:cNvPr id="34" name="Freeform 33">
             <a:extLst>
               <a:ext uri="{FF2B5EF4-FFF2-40B4-BE49-F238E27FC236}">
-                <ns2:creationId id="{9FEB1C17-EE9E-6374-14E0-DF4B04BB34CC}"/>
+                <a16:creationId xmlns:a16="http://schemas.microsoft.com/office/drawing/2014/main" id="{9FEB1C17-EE9E-6374-14E0-DF4B04BB34CC}"/>
               </a:ext>
             </a:extLst>
           </p:cNvPr>
@@ -13867,7 +13867,7 @@
           <p:cNvPr id="23" name="Straight Connector 22">
             <a:extLst>
               <a:ext uri="{FF2B5EF4-FFF2-40B4-BE49-F238E27FC236}">
-                <ns2:creationId id="{33DF3D55-999F-17C8-E647-A925ABFD4B29}"/>
+                <a16:creationId xmlns:a16="http://schemas.microsoft.com/office/drawing/2014/main" id="{33DF3D55-999F-17C8-E647-A925ABFD4B29}"/>
               </a:ext>
             </a:extLst>
           </p:cNvPr>
@@ -13913,7 +13913,7 @@
           <p:cNvPr id="11" name="Footer Placeholder 3">
             <a:extLst>
               <a:ext uri="{FF2B5EF4-FFF2-40B4-BE49-F238E27FC236}">
-                <ns2:creationId id="{27AA374C-C403-AE7C-8C5A-C9260FD31350}"/>
+                <a16:creationId xmlns:a16="http://schemas.microsoft.com/office/drawing/2014/main" id="{27AA374C-C403-AE7C-8C5A-C9260FD31350}"/>
               </a:ext>
             </a:extLst>
           </p:cNvPr>
@@ -14047,7 +14047,7 @@
           <p:cNvPr id="6" name="Freeform 5">
             <a:extLst>
               <a:ext uri="{FF2B5EF4-FFF2-40B4-BE49-F238E27FC236}">
-                <ns2:creationId id="{58C91A8E-32A3-E6C9-3B21-6258314CE1E0}"/>
+                <a16:creationId xmlns:a16="http://schemas.microsoft.com/office/drawing/2014/main" id="{58C91A8E-32A3-E6C9-3B21-6258314CE1E0}"/>
               </a:ext>
             </a:extLst>
           </p:cNvPr>
@@ -14643,7 +14643,7 @@
           <p:cNvPr id="7" name="Freeform 6">
             <a:extLst>
               <a:ext uri="{FF2B5EF4-FFF2-40B4-BE49-F238E27FC236}">
-                <ns2:creationId id="{510BA2CB-DE8D-42AC-CE1A-16118C17D521}"/>
+                <a16:creationId xmlns:a16="http://schemas.microsoft.com/office/drawing/2014/main" id="{510BA2CB-DE8D-42AC-CE1A-16118C17D521}"/>
               </a:ext>
             </a:extLst>
           </p:cNvPr>
@@ -15505,7 +15505,7 @@
           <p:cNvPr id="9" name="Oval 8">
             <a:extLst>
               <a:ext uri="{FF2B5EF4-FFF2-40B4-BE49-F238E27FC236}">
-                <ns2:creationId id="{568F11F0-CD68-B68F-145C-42747F6BA3CB}"/>
+                <a16:creationId xmlns:a16="http://schemas.microsoft.com/office/drawing/2014/main" id="{568F11F0-CD68-B68F-145C-42747F6BA3CB}"/>
               </a:ext>
             </a:extLst>
           </p:cNvPr>
@@ -15559,7 +15559,7 @@
           <p:cNvPr id="10" name="Oval 9">
             <a:extLst>
               <a:ext uri="{FF2B5EF4-FFF2-40B4-BE49-F238E27FC236}">
-                <ns2:creationId id="{6BC2B4CC-1274-7B5E-9B1C-D914D507A56F}"/>
+                <a16:creationId xmlns:a16="http://schemas.microsoft.com/office/drawing/2014/main" id="{6BC2B4CC-1274-7B5E-9B1C-D914D507A56F}"/>
               </a:ext>
             </a:extLst>
           </p:cNvPr>
@@ -15613,7 +15613,7 @@
           <p:cNvPr id="25" name="Rectangle 24">
             <a:extLst>
               <a:ext uri="{FF2B5EF4-FFF2-40B4-BE49-F238E27FC236}">
-                <ns2:creationId id="{79427490-B6E9-7801-97EB-47C4A21F9FE6}"/>
+                <a16:creationId xmlns:a16="http://schemas.microsoft.com/office/drawing/2014/main" id="{79427490-B6E9-7801-97EB-47C4A21F9FE6}"/>
               </a:ext>
             </a:extLst>
           </p:cNvPr>
@@ -15666,7 +15666,7 @@
           <p:cNvPr id="3" name="Straight Arrow Connector 2">
             <a:extLst>
               <a:ext uri="{FF2B5EF4-FFF2-40B4-BE49-F238E27FC236}">
-                <ns2:creationId id="{EB763B1F-F575-913F-DB72-76ED511A0D0B}"/>
+                <a16:creationId xmlns:a16="http://schemas.microsoft.com/office/drawing/2014/main" id="{EB763B1F-F575-913F-DB72-76ED511A0D0B}"/>
               </a:ext>
             </a:extLst>
           </p:cNvPr>
@@ -15711,7 +15711,7 @@
           <p:cNvPr id="4" name="Straight Arrow Connector 3">
             <a:extLst>
               <a:ext uri="{FF2B5EF4-FFF2-40B4-BE49-F238E27FC236}">
-                <ns2:creationId id="{A90A4078-7CAB-D43F-FE11-DE676579B333}"/>
+                <a16:creationId xmlns:a16="http://schemas.microsoft.com/office/drawing/2014/main" id="{A90A4078-7CAB-D43F-FE11-DE676579B333}"/>
               </a:ext>
             </a:extLst>
           </p:cNvPr>
@@ -15756,7 +15756,7 @@
           <p:cNvPr id="5" name="TextBox 4">
             <a:extLst>
               <a:ext uri="{FF2B5EF4-FFF2-40B4-BE49-F238E27FC236}">
-                <ns2:creationId id="{93EE6640-E2D5-2697-152F-1AC92ACF6299}"/>
+                <a16:creationId xmlns:a16="http://schemas.microsoft.com/office/drawing/2014/main" id="{93EE6640-E2D5-2697-152F-1AC92ACF6299}"/>
               </a:ext>
             </a:extLst>
           </p:cNvPr>
@@ -15821,7 +15821,7 @@
           <p:cNvPr id="8" name="TextBox 7">
             <a:extLst>
               <a:ext uri="{FF2B5EF4-FFF2-40B4-BE49-F238E27FC236}">
-                <ns2:creationId id="{C7F4CB60-409A-DA93-8D6D-DBB74A32F30C}"/>
+                <a16:creationId xmlns:a16="http://schemas.microsoft.com/office/drawing/2014/main" id="{C7F4CB60-409A-DA93-8D6D-DBB74A32F30C}"/>
               </a:ext>
             </a:extLst>
           </p:cNvPr>
@@ -15882,7 +15882,7 @@
           <p:cNvPr id="17" name="TextBox 16">
             <a:extLst>
               <a:ext uri="{FF2B5EF4-FFF2-40B4-BE49-F238E27FC236}">
-                <ns2:creationId id="{F4E68F9E-0E13-E904-E4B5-DEC42C339288}"/>
+                <a16:creationId xmlns:a16="http://schemas.microsoft.com/office/drawing/2014/main" id="{F4E68F9E-0E13-E904-E4B5-DEC42C339288}"/>
               </a:ext>
             </a:extLst>
           </p:cNvPr>
@@ -15966,7 +15966,7 @@
           <p:cNvPr id="31" name="Freeform 30">
             <a:extLst>
               <a:ext uri="{FF2B5EF4-FFF2-40B4-BE49-F238E27FC236}">
-                <ns2:creationId id="{EBDD718E-B038-498A-81E1-4720CA22C4E4}"/>
+                <a16:creationId xmlns:a16="http://schemas.microsoft.com/office/drawing/2014/main" id="{EBDD718E-B038-498A-81E1-4720CA22C4E4}"/>
               </a:ext>
             </a:extLst>
           </p:cNvPr>
@@ -16826,7 +16826,7 @@
           <p:cNvPr id="32" name="Oval 31">
             <a:extLst>
               <a:ext uri="{FF2B5EF4-FFF2-40B4-BE49-F238E27FC236}">
-                <ns2:creationId id="{852BC428-A99B-91EE-DF01-3864DEC4D4BF}"/>
+                <a16:creationId xmlns:a16="http://schemas.microsoft.com/office/drawing/2014/main" id="{852BC428-A99B-91EE-DF01-3864DEC4D4BF}"/>
               </a:ext>
             </a:extLst>
           </p:cNvPr>
@@ -16880,7 +16880,7 @@
           <p:cNvPr id="33" name="Oval 32">
             <a:extLst>
               <a:ext uri="{FF2B5EF4-FFF2-40B4-BE49-F238E27FC236}">
-                <ns2:creationId id="{EFBFF3EA-59F3-C535-EFC4-37E6E9B87AAA}"/>
+                <a16:creationId xmlns:a16="http://schemas.microsoft.com/office/drawing/2014/main" id="{EFBFF3EA-59F3-C535-EFC4-37E6E9B87AAA}"/>
               </a:ext>
             </a:extLst>
           </p:cNvPr>
@@ -16934,7 +16934,7 @@
           <p:cNvPr id="35" name="TextBox 34">
             <a:extLst>
               <a:ext uri="{FF2B5EF4-FFF2-40B4-BE49-F238E27FC236}">
-                <ns2:creationId id="{2A61F73B-4578-41C1-C8EB-DAA0E81D6643}"/>
+                <a16:creationId xmlns:a16="http://schemas.microsoft.com/office/drawing/2014/main" id="{2A61F73B-4578-41C1-C8EB-DAA0E81D6643}"/>
               </a:ext>
             </a:extLst>
           </p:cNvPr>
@@ -16943,8 +16943,8 @@
         </p:nvSpPr>
         <p:spPr>
           <a:xfrm>
-            <a:off x="7756549" y="900593"/>
-            <a:ext cx="4144429" cy="5078313"/>
+            <a:off x="7276358" y="764020"/>
+            <a:ext cx="4853148" cy="5262979"/>
           </a:xfrm>
           <a:prstGeom prst="rect">
             <a:avLst/>
@@ -16957,7 +16957,7 @@
           </a:bodyPr>
           <a:lstStyle/>
           <a:p>
-            <a:pPr marR="0" lvl="0" defTabSz="914400" rtl="0" eaLnBrk="1" fontAlgn="auto" latinLnBrk="0" hangingPunct="1">
+            <a:pPr marL="171450" marR="0" lvl="0" indent="-171450" defTabSz="914400" rtl="0" eaLnBrk="1" fontAlgn="auto" latinLnBrk="0" hangingPunct="1">
               <a:lnSpc>
                 <a:spcPct val="100000"/>
               </a:lnSpc>
@@ -16969,11 +16969,13 @@
               </a:spcAft>
               <a:buClrTx/>
               <a:buSzTx/>
+              <a:buFont typeface="Arial" panose="020B0604020202020204" pitchFamily="34" charset="0"/>
+              <a:buChar char="•"/>
               <a:tabLst/>
               <a:defRPr/>
             </a:pPr>
             <a:r>
-              <a:rPr kumimoji="0" lang="en-US" sz="1200" b="1" u="none" strike="noStrike" kern="1200" cap="none" spc="0" normalizeH="0" baseline="0" noProof="0" dirty="0">
+              <a:rPr kumimoji="0" lang="en-US" sz="1400" b="1" u="none" strike="noStrike" kern="1200" cap="none" spc="0" normalizeH="0" baseline="0" noProof="0" dirty="0">
                 <a:ln>
                   <a:noFill/>
                 </a:ln>
@@ -16991,14 +16993,22 @@
             </a:r>
           </a:p>
           <a:p>
-            <a:pPr lvl="1">
+            <a:pPr marL="628650" lvl="1" indent="-171450">
+              <a:buFont typeface="Arial" panose="020B0604020202020204" pitchFamily="34" charset="0"/>
+              <a:buChar char="•"/>
               <a:defRPr/>
             </a:pPr>
             <a:r>
-              <a:rPr lang="en-US" sz="1200" dirty="0">
+              <a:rPr kumimoji="0" lang="en-US" sz="1400" b="1" u="none" strike="noStrike" kern="1200" cap="none" spc="0" normalizeH="0" baseline="0" noProof="0" dirty="0">
+                <a:ln>
+                  <a:noFill/>
+                </a:ln>
                 <a:solidFill>
                   <a:prstClr val="white"/>
                 </a:solidFill>
+                <a:effectLst/>
+                <a:uLnTx/>
+                <a:uFillTx/>
                 <a:latin typeface="Helvetica Neue" panose="02000503000000020004" pitchFamily="2" charset="0"/>
                 <a:ea typeface="Helvetica Neue" panose="02000503000000020004" pitchFamily="2" charset="0"/>
                 <a:cs typeface="Helvetica Neue" panose="02000503000000020004" pitchFamily="2" charset="0"/>
@@ -17007,14 +17017,34 @@
             </a:r>
           </a:p>
           <a:p>
-            <a:pPr lvl="1">
+            <a:pPr marL="171450" marR="0" lvl="0" indent="-171450" defTabSz="914400" rtl="0" eaLnBrk="1" fontAlgn="auto" latinLnBrk="0" hangingPunct="1">
+              <a:lnSpc>
+                <a:spcPct val="100000"/>
+              </a:lnSpc>
+              <a:spcBef>
+                <a:spcPts val="0"/>
+              </a:spcBef>
+              <a:spcAft>
+                <a:spcPts val="0"/>
+              </a:spcAft>
+              <a:buClrTx/>
+              <a:buSzTx/>
+              <a:buFont typeface="Arial" panose="020B0604020202020204" pitchFamily="34" charset="0"/>
+              <a:buChar char="•"/>
+              <a:tabLst/>
               <a:defRPr/>
             </a:pPr>
             <a:r>
-              <a:rPr lang="en-US" sz="1200" dirty="0">
+              <a:rPr kumimoji="0" lang="en-US" sz="1400" b="1" u="none" strike="noStrike" kern="1200" cap="none" spc="0" normalizeH="0" baseline="0" noProof="0" dirty="0">
+                <a:ln>
+                  <a:noFill/>
+                </a:ln>
                 <a:solidFill>
                   <a:prstClr val="white"/>
                 </a:solidFill>
+                <a:effectLst/>
+                <a:uLnTx/>
+                <a:uFillTx/>
                 <a:latin typeface="Helvetica Neue" panose="02000503000000020004" pitchFamily="2" charset="0"/>
                 <a:ea typeface="Helvetica Neue" panose="02000503000000020004" pitchFamily="2" charset="0"/>
                 <a:cs typeface="Helvetica Neue" panose="02000503000000020004" pitchFamily="2" charset="0"/>
@@ -17023,7 +17053,31 @@
             </a:r>
           </a:p>
           <a:p>
-            <a:pPr marR="0" lvl="0" defTabSz="914400" rtl="0" eaLnBrk="1" fontAlgn="auto" latinLnBrk="0" hangingPunct="1">
+            <a:pPr marL="628650" lvl="1" indent="-171450">
+              <a:buFont typeface="Arial" panose="020B0604020202020204" pitchFamily="34" charset="0"/>
+              <a:buChar char="•"/>
+              <a:defRPr/>
+            </a:pPr>
+            <a:r>
+              <a:rPr kumimoji="0" lang="en-US" sz="1400" b="1" u="none" strike="noStrike" kern="1200" cap="none" spc="0" normalizeH="0" baseline="0" noProof="0" dirty="0">
+                <a:ln>
+                  <a:noFill/>
+                </a:ln>
+                <a:solidFill>
+                  <a:prstClr val="white"/>
+                </a:solidFill>
+                <a:effectLst/>
+                <a:uLnTx/>
+                <a:uFillTx/>
+                <a:latin typeface="Helvetica Neue" panose="02000503000000020004" pitchFamily="2" charset="0"/>
+                <a:ea typeface="Helvetica Neue" panose="02000503000000020004" pitchFamily="2" charset="0"/>
+                <a:cs typeface="Helvetica Neue" panose="02000503000000020004" pitchFamily="2" charset="0"/>
+              </a:rPr>
+              <a:t>fixed 3D space with no preferred origin or direction</a:t>
+            </a:r>
+          </a:p>
+          <a:p>
+            <a:pPr marL="171450" marR="0" lvl="0" indent="-171450" defTabSz="914400" rtl="0" eaLnBrk="1" fontAlgn="auto" latinLnBrk="0" hangingPunct="1">
               <a:lnSpc>
                 <a:spcPct val="100000"/>
               </a:lnSpc>
@@ -17035,46 +17089,22 @@
               </a:spcAft>
               <a:buClrTx/>
               <a:buSzTx/>
+              <a:buFont typeface="Arial" panose="020B0604020202020204" pitchFamily="34" charset="0"/>
+              <a:buChar char="•"/>
               <a:tabLst/>
               <a:defRPr/>
             </a:pPr>
             <a:r>
-              <a:rPr lang="en-US" sz="1200" b="1" dirty="0">
+              <a:rPr kumimoji="0" lang="en-US" sz="1400" b="1" u="none" strike="noStrike" kern="1200" cap="none" spc="0" normalizeH="0" baseline="0" noProof="0" dirty="0">
+                <a:ln>
+                  <a:noFill/>
+                </a:ln>
                 <a:solidFill>
                   <a:prstClr val="white"/>
                 </a:solidFill>
-                <a:latin typeface="Helvetica Neue" panose="02000503000000020004" pitchFamily="2" charset="0"/>
-                <a:ea typeface="Helvetica Neue" panose="02000503000000020004" pitchFamily="2" charset="0"/>
-                <a:cs typeface="Helvetica Neue" panose="02000503000000020004" pitchFamily="2" charset="0"/>
-              </a:rPr>
-              <a:t>fixed 3D space</a:t>
-            </a:r>
-          </a:p>
-          <a:p>
-            <a:pPr lvl="1">
-              <a:defRPr/>
-            </a:pPr>
-            <a:r>
-              <a:rPr lang="en-US" sz="1200" dirty="0">
-                <a:solidFill>
-                  <a:prstClr val="white"/>
-                </a:solidFill>
-                <a:latin typeface="Helvetica Neue" panose="02000503000000020004" pitchFamily="2" charset="0"/>
-                <a:ea typeface="Helvetica Neue" panose="02000503000000020004" pitchFamily="2" charset="0"/>
-                <a:cs typeface="Helvetica Neue" panose="02000503000000020004" pitchFamily="2" charset="0"/>
-              </a:rPr>
-              <a:t>no preferred origin or direction</a:t>
-            </a:r>
-          </a:p>
-          <a:p>
-            <a:pPr lvl="1">
-              <a:defRPr/>
-            </a:pPr>
-            <a:r>
-              <a:rPr lang="en-US" sz="1200" dirty="0">
-                <a:solidFill>
-                  <a:prstClr val="white"/>
-                </a:solidFill>
+                <a:effectLst/>
+                <a:uLnTx/>
+                <a:uFillTx/>
                 <a:latin typeface="Helvetica Neue" panose="02000503000000020004" pitchFamily="2" charset="0"/>
                 <a:ea typeface="Helvetica Neue" panose="02000503000000020004" pitchFamily="2" charset="0"/>
                 <a:cs typeface="Helvetica Neue" panose="02000503000000020004" pitchFamily="2" charset="0"/>
@@ -17083,26 +17113,22 @@
             </a:r>
           </a:p>
           <a:p>
-            <a:pPr marR="0" lvl="0" defTabSz="914400" rtl="0" eaLnBrk="1" fontAlgn="auto" latinLnBrk="0" hangingPunct="1">
-              <a:lnSpc>
-                <a:spcPct val="100000"/>
-              </a:lnSpc>
-              <a:spcBef>
-                <a:spcPts val="0"/>
-              </a:spcBef>
-              <a:spcAft>
-                <a:spcPts val="0"/>
-              </a:spcAft>
-              <a:buClrTx/>
-              <a:buSzTx/>
-              <a:tabLst/>
+            <a:pPr marL="628650" lvl="1" indent="-171450">
+              <a:buFont typeface="Arial" panose="020B0604020202020204" pitchFamily="34" charset="0"/>
+              <a:buChar char="•"/>
               <a:defRPr/>
             </a:pPr>
             <a:r>
-              <a:rPr lang="en-US" sz="1200" b="1" dirty="0">
+              <a:rPr kumimoji="0" lang="en-US" sz="1400" b="1" u="none" strike="noStrike" kern="1200" cap="none" spc="0" normalizeH="0" baseline="0" noProof="0" dirty="0">
+                <a:ln>
+                  <a:noFill/>
+                </a:ln>
                 <a:solidFill>
                   <a:prstClr val="white"/>
                 </a:solidFill>
+                <a:effectLst/>
+                <a:uLnTx/>
+                <a:uFillTx/>
                 <a:latin typeface="Helvetica Neue" panose="02000503000000020004" pitchFamily="2" charset="0"/>
                 <a:ea typeface="Helvetica Neue" panose="02000503000000020004" pitchFamily="2" charset="0"/>
                 <a:cs typeface="Helvetica Neue" panose="02000503000000020004" pitchFamily="2" charset="0"/>
@@ -17111,14 +17137,22 @@
             </a:r>
           </a:p>
           <a:p>
-            <a:pPr lvl="1">
+            <a:pPr marL="628650" lvl="1" indent="-171450">
+              <a:buFont typeface="Arial" panose="020B0604020202020204" pitchFamily="34" charset="0"/>
+              <a:buChar char="•"/>
               <a:defRPr/>
             </a:pPr>
             <a:r>
-              <a:rPr lang="en-US" sz="1200" dirty="0">
+              <a:rPr kumimoji="0" lang="en-US" sz="1400" b="1" u="none" strike="noStrike" kern="1200" cap="none" spc="0" normalizeH="0" baseline="0" noProof="0" dirty="0">
+                <a:ln>
+                  <a:noFill/>
+                </a:ln>
                 <a:solidFill>
                   <a:prstClr val="white"/>
                 </a:solidFill>
+                <a:effectLst/>
+                <a:uLnTx/>
+                <a:uFillTx/>
                 <a:latin typeface="Helvetica Neue" panose="02000503000000020004" pitchFamily="2" charset="0"/>
                 <a:ea typeface="Helvetica Neue" panose="02000503000000020004" pitchFamily="2" charset="0"/>
                 <a:cs typeface="Helvetica Neue" panose="02000503000000020004" pitchFamily="2" charset="0"/>
@@ -17127,46 +17161,58 @@
             </a:r>
           </a:p>
           <a:p>
-            <a:pPr lvl="1">
+            <a:pPr marL="628650" lvl="1" indent="-171450">
+              <a:buFont typeface="Arial" panose="020B0604020202020204" pitchFamily="34" charset="0"/>
+              <a:buChar char="•"/>
               <a:defRPr/>
             </a:pPr>
             <a:r>
-              <a:rPr lang="en-US" sz="1200" dirty="0">
+              <a:rPr kumimoji="0" lang="en-US" sz="1400" b="1" u="none" strike="noStrike" kern="1200" cap="none" spc="0" normalizeH="0" baseline="0" noProof="0" dirty="0">
+                <a:ln>
+                  <a:noFill/>
+                </a:ln>
                 <a:solidFill>
                   <a:prstClr val="white"/>
                 </a:solidFill>
+                <a:effectLst/>
+                <a:uLnTx/>
+                <a:uFillTx/>
                 <a:latin typeface="Helvetica Neue" panose="02000503000000020004" pitchFamily="2" charset="0"/>
                 <a:ea typeface="Helvetica Neue" panose="02000503000000020004" pitchFamily="2" charset="0"/>
                 <a:cs typeface="Helvetica Neue" panose="02000503000000020004" pitchFamily="2" charset="0"/>
               </a:rPr>
-              <a:t>carry path history in absolute time and space</a:t>
+              <a:t>carry path history and can move faster than wake speed</a:t>
             </a:r>
           </a:p>
           <a:p>
-            <a:pPr lvl="1">
+            <a:pPr marL="171450" marR="0" lvl="0" indent="-171450" defTabSz="914400" rtl="0" eaLnBrk="1" fontAlgn="auto" latinLnBrk="0" hangingPunct="1">
+              <a:lnSpc>
+                <a:spcPct val="100000"/>
+              </a:lnSpc>
+              <a:spcBef>
+                <a:spcPts val="0"/>
+              </a:spcBef>
+              <a:spcAft>
+                <a:spcPts val="0"/>
+              </a:spcAft>
+              <a:buClrTx/>
+              <a:buSzTx/>
+              <a:buFont typeface="Arial" panose="020B0604020202020204" pitchFamily="34" charset="0"/>
+              <a:buChar char="•"/>
+              <a:tabLst/>
               <a:defRPr/>
             </a:pPr>
             <a:r>
-              <a:rPr lang="en-US" sz="1200" dirty="0">
+              <a:rPr kumimoji="0" lang="en-US" sz="1400" b="1" u="none" strike="noStrike" kern="1200" cap="none" spc="0" normalizeH="0" baseline="0" noProof="0" dirty="0">
+                <a:ln>
+                  <a:noFill/>
+                </a:ln>
                 <a:solidFill>
                   <a:prstClr val="white"/>
                 </a:solidFill>
-                <a:latin typeface="Helvetica Neue" panose="02000503000000020004" pitchFamily="2" charset="0"/>
-                <a:ea typeface="Helvetica Neue" panose="02000503000000020004" pitchFamily="2" charset="0"/>
-                <a:cs typeface="Helvetica Neue" panose="02000503000000020004" pitchFamily="2" charset="0"/>
-              </a:rPr>
-              <a:t>can move faster than wake speed</a:t>
-            </a:r>
-          </a:p>
-          <a:p>
-            <a:pPr lvl="1">
-              <a:defRPr/>
-            </a:pPr>
-            <a:r>
-              <a:rPr lang="en-US" sz="1200" dirty="0">
-                <a:solidFill>
-                  <a:prstClr val="white"/>
-                </a:solidFill>
+                <a:effectLst/>
+                <a:uLnTx/>
+                <a:uFillTx/>
                 <a:latin typeface="Helvetica Neue" panose="02000503000000020004" pitchFamily="2" charset="0"/>
                 <a:ea typeface="Helvetica Neue" panose="02000503000000020004" pitchFamily="2" charset="0"/>
                 <a:cs typeface="Helvetica Neue" panose="02000503000000020004" pitchFamily="2" charset="0"/>
@@ -17175,23 +17221,31 @@
             </a:r>
           </a:p>
           <a:p>
-            <a:pPr lvl="1">
+            <a:pPr marL="628650" lvl="1" indent="-171450">
+              <a:buFont typeface="Arial" panose="020B0604020202020204" pitchFamily="34" charset="0"/>
+              <a:buChar char="•"/>
               <a:defRPr/>
             </a:pPr>
             <a:r>
-              <a:rPr lang="en-US" sz="1200" dirty="0">
+              <a:rPr kumimoji="0" lang="en-US" sz="1400" b="1" u="none" strike="noStrike" kern="1200" cap="none" spc="0" normalizeH="0" baseline="0" noProof="0" dirty="0">
+                <a:ln>
+                  <a:noFill/>
+                </a:ln>
                 <a:solidFill>
                   <a:prstClr val="white"/>
                 </a:solidFill>
+                <a:effectLst/>
+                <a:uLnTx/>
+                <a:uFillTx/>
                 <a:latin typeface="Helvetica Neue" panose="02000503000000020004" pitchFamily="2" charset="0"/>
                 <a:ea typeface="Helvetica Neue" panose="02000503000000020004" pitchFamily="2" charset="0"/>
                 <a:cs typeface="Helvetica Neue" panose="02000503000000020004" pitchFamily="2" charset="0"/>
               </a:rPr>
-              <a:t>continuous history through time and space</a:t>
+              <a:t>continuous record of polarity, time, position, and velocity</a:t>
             </a:r>
           </a:p>
           <a:p>
-            <a:pPr marR="0" lvl="0" defTabSz="914400" rtl="0" eaLnBrk="1" fontAlgn="auto" latinLnBrk="0" hangingPunct="1">
+            <a:pPr marL="171450" marR="0" lvl="0" indent="-171450" defTabSz="914400" rtl="0" eaLnBrk="1" fontAlgn="auto" latinLnBrk="0" hangingPunct="1">
               <a:lnSpc>
                 <a:spcPct val="100000"/>
               </a:lnSpc>
@@ -17203,30 +17257,22 @@
               </a:spcAft>
               <a:buClrTx/>
               <a:buSzTx/>
+              <a:buFont typeface="Arial" panose="020B0604020202020204" pitchFamily="34" charset="0"/>
+              <a:buChar char="•"/>
               <a:tabLst/>
               <a:defRPr/>
             </a:pPr>
             <a:r>
-              <a:rPr lang="en-US" sz="1200" b="1" baseline="0" dirty="0">
+              <a:rPr kumimoji="0" lang="en-US" sz="1400" b="1" u="none" strike="noStrike" kern="1200" cap="none" spc="0" normalizeH="0" baseline="0" noProof="0" dirty="0">
+                <a:ln>
+                  <a:noFill/>
+                </a:ln>
                 <a:solidFill>
                   <a:prstClr val="white"/>
                 </a:solidFill>
-                <a:latin typeface="Helvetica Neue" panose="02000503000000020004" pitchFamily="2" charset="0"/>
-                <a:ea typeface="Helvetica Neue" panose="02000503000000020004" pitchFamily="2" charset="0"/>
-                <a:cs typeface="Helvetica Neue" panose="02000503000000020004" pitchFamily="2" charset="0"/>
-              </a:rPr>
-              <a:t>record polarity, time, position, and velocity</a:t>
-            </a:r>
-          </a:p>
-          <a:p>
-            <a:pPr lvl="1">
-              <a:defRPr/>
-            </a:pPr>
-            <a:r>
-              <a:rPr lang="en-US" sz="1200" dirty="0">
-                <a:solidFill>
-                  <a:prstClr val="white"/>
-                </a:solidFill>
+                <a:effectLst/>
+                <a:uLnTx/>
+                <a:uFillTx/>
                 <a:latin typeface="Helvetica Neue" panose="02000503000000020004" pitchFamily="2" charset="0"/>
                 <a:ea typeface="Helvetica Neue" panose="02000503000000020004" pitchFamily="2" charset="0"/>
                 <a:cs typeface="Helvetica Neue" panose="02000503000000020004" pitchFamily="2" charset="0"/>
@@ -17235,78 +17281,82 @@
             </a:r>
           </a:p>
           <a:p>
-            <a:pPr lvl="1">
+            <a:pPr marL="628650" lvl="1" indent="-171450">
+              <a:buFont typeface="Arial" panose="020B0604020202020204" pitchFamily="34" charset="0"/>
+              <a:buChar char="•"/>
               <a:defRPr/>
             </a:pPr>
             <a:r>
-              <a:rPr lang="en-US" sz="1200" dirty="0">
+              <a:rPr kumimoji="0" lang="en-US" sz="1400" b="1" u="none" strike="noStrike" kern="1200" cap="none" spc="0" normalizeH="0" baseline="0" noProof="0" dirty="0">
+                <a:ln>
+                  <a:noFill/>
+                </a:ln>
                 <a:solidFill>
                   <a:prstClr val="white"/>
                 </a:solidFill>
+                <a:effectLst/>
+                <a:uLnTx/>
+                <a:uFillTx/>
                 <a:latin typeface="Helvetica Neue" panose="02000503000000020004" pitchFamily="2" charset="0"/>
                 <a:ea typeface="Helvetica Neue" panose="02000503000000020004" pitchFamily="2" charset="0"/>
                 <a:cs typeface="Helvetica Neue" panose="02000503000000020004" pitchFamily="2" charset="0"/>
               </a:rPr>
-              <a:t>emitted along the path</a:t>
+              <a:t>emitted along the path at a steady polarity-source rate</a:t>
             </a:r>
           </a:p>
           <a:p>
-            <a:pPr>
+            <a:pPr marL="628650" lvl="1" indent="-171450">
+              <a:buFont typeface="Arial" panose="020B0604020202020204" pitchFamily="34" charset="0"/>
+              <a:buChar char="•"/>
               <a:defRPr/>
             </a:pPr>
             <a:r>
-              <a:rPr lang="en-US" sz="1200" b="1" dirty="0">
+              <a:rPr kumimoji="0" lang="en-US" sz="1400" b="1" u="none" strike="noStrike" kern="1200" cap="none" spc="0" normalizeH="0" baseline="0" noProof="0" dirty="0">
+                <a:ln>
+                  <a:noFill/>
+                </a:ln>
                 <a:solidFill>
                   <a:prstClr val="white"/>
                 </a:solidFill>
+                <a:effectLst/>
+                <a:uLnTx/>
+                <a:uFillTx/>
                 <a:latin typeface="Helvetica Neue" panose="02000503000000020004" pitchFamily="2" charset="0"/>
                 <a:ea typeface="Helvetica Neue" panose="02000503000000020004" pitchFamily="2" charset="0"/>
                 <a:cs typeface="Helvetica Neue" panose="02000503000000020004" pitchFamily="2" charset="0"/>
               </a:rPr>
-              <a:t>steady polarity-source rate</a:t>
+              <a:t>wake surfaces grow at wake speed</a:t>
             </a:r>
           </a:p>
           <a:p>
-            <a:pPr lvl="1">
+            <a:pPr marL="171450" marR="0" lvl="0" indent="-171450" defTabSz="914400" rtl="0" eaLnBrk="1" fontAlgn="auto" latinLnBrk="0" hangingPunct="1">
+              <a:lnSpc>
+                <a:spcPct val="100000"/>
+              </a:lnSpc>
+              <a:spcBef>
+                <a:spcPts val="0"/>
+              </a:spcBef>
+              <a:spcAft>
+                <a:spcPts val="0"/>
+              </a:spcAft>
+              <a:buClrTx/>
+              <a:buSzTx/>
+              <a:buFont typeface="Arial" panose="020B0604020202020204" pitchFamily="34" charset="0"/>
+              <a:buChar char="•"/>
+              <a:tabLst/>
               <a:defRPr/>
             </a:pPr>
             <a:r>
-              <a:rPr lang="en-US" sz="1200" dirty="0">
+              <a:rPr kumimoji="0" lang="en-US" sz="1400" b="1" u="none" strike="noStrike" kern="1200" cap="none" spc="0" normalizeH="0" baseline="0" noProof="0" dirty="0">
+                <a:ln>
+                  <a:noFill/>
+                </a:ln>
                 <a:solidFill>
                   <a:prstClr val="white"/>
                 </a:solidFill>
-                <a:latin typeface="Helvetica Neue" panose="02000503000000020004" pitchFamily="2" charset="0"/>
-                <a:ea typeface="Helvetica Neue" panose="02000503000000020004" pitchFamily="2" charset="0"/>
-                <a:cs typeface="Helvetica Neue" panose="02000503000000020004" pitchFamily="2" charset="0"/>
-              </a:rPr>
-              <a:t>wake surface</a:t>
-            </a:r>
-          </a:p>
-          <a:p>
-            <a:pPr lvl="1">
-              <a:defRPr/>
-            </a:pPr>
-            <a:r>
-              <a:rPr lang="en-US" sz="1200" baseline="0" dirty="0">
-                <a:solidFill>
-                  <a:prstClr val="white"/>
-                </a:solidFill>
-                <a:latin typeface="Helvetica Neue" panose="02000503000000020004" pitchFamily="2" charset="0"/>
-                <a:ea typeface="Helvetica Neue" panose="02000503000000020004" pitchFamily="2" charset="0"/>
-                <a:cs typeface="Helvetica Neue" panose="02000503000000020004" pitchFamily="2" charset="0"/>
-              </a:rPr>
-              <a:t>grows at wake speed</a:t>
-            </a:r>
-          </a:p>
-          <a:p>
-            <a:pPr lvl="1">
-              <a:defRPr/>
-            </a:pPr>
-            <a:r>
-              <a:rPr lang="en-US" sz="1200" dirty="0">
-                <a:solidFill>
-                  <a:prstClr val="white"/>
-                </a:solidFill>
+                <a:effectLst/>
+                <a:uLnTx/>
+                <a:uFillTx/>
                 <a:latin typeface="Helvetica Neue" panose="02000503000000020004" pitchFamily="2" charset="0"/>
                 <a:ea typeface="Helvetica Neue" panose="02000503000000020004" pitchFamily="2" charset="0"/>
                 <a:cs typeface="Helvetica Neue" panose="02000503000000020004" pitchFamily="2" charset="0"/>
@@ -17315,89 +17365,73 @@
             </a:r>
           </a:p>
           <a:p>
-            <a:pPr lvl="1">
+            <a:pPr marL="628650" lvl="1" indent="-171450">
+              <a:buFont typeface="Arial" panose="020B0604020202020204" pitchFamily="34" charset="0"/>
+              <a:buChar char="•"/>
               <a:defRPr/>
             </a:pPr>
             <a:r>
-              <a:rPr lang="en-US" sz="1200" baseline="0" dirty="0">
+              <a:rPr kumimoji="0" lang="en-US" sz="1400" b="1" u="none" strike="noStrike" kern="1200" cap="none" spc="0" normalizeH="0" baseline="0" noProof="0" dirty="0">
+                <a:ln>
+                  <a:noFill/>
+                </a:ln>
                 <a:solidFill>
                   <a:prstClr val="white"/>
                 </a:solidFill>
+                <a:effectLst/>
+                <a:uLnTx/>
+                <a:uFillTx/>
                 <a:latin typeface="Helvetica Neue" panose="02000503000000020004" pitchFamily="2" charset="0"/>
                 <a:ea typeface="Helvetica Neue" panose="02000503000000020004" pitchFamily="2" charset="0"/>
                 <a:cs typeface="Helvetica Neue" panose="02000503000000020004" pitchFamily="2" charset="0"/>
               </a:rPr>
-              <a:t>received at the current time</a:t>
+              <a:t>received when a receiver meets a wake surface</a:t>
             </a:r>
           </a:p>
           <a:p>
-            <a:pPr lvl="1">
+            <a:pPr marL="628650" lvl="1" indent="-171450">
+              <a:buFont typeface="Arial" panose="020B0604020202020204" pitchFamily="34" charset="0"/>
+              <a:buChar char="•"/>
               <a:defRPr/>
             </a:pPr>
             <a:r>
-              <a:rPr lang="en-US" sz="1200" dirty="0">
+              <a:rPr kumimoji="0" lang="en-US" sz="1400" b="1" u="none" strike="noStrike" kern="1200" cap="none" spc="0" normalizeH="0" baseline="0" noProof="0" dirty="0">
+                <a:ln>
+                  <a:noFill/>
+                </a:ln>
                 <a:solidFill>
                   <a:prstClr val="white"/>
                 </a:solidFill>
+                <a:effectLst/>
+                <a:uLnTx/>
+                <a:uFillTx/>
                 <a:latin typeface="Helvetica Neue" panose="02000503000000020004" pitchFamily="2" charset="0"/>
                 <a:ea typeface="Helvetica Neue" panose="02000503000000020004" pitchFamily="2" charset="0"/>
                 <a:cs typeface="Helvetica Neue" panose="02000503000000020004" pitchFamily="2" charset="0"/>
               </a:rPr>
-              <a:t>where a receiver meets a wake surface</a:t>
+              <a:t>many hits add together, and the net response changes the path</a:t>
             </a:r>
           </a:p>
           <a:p>
-            <a:pPr>
+            <a:pPr marL="171450" marR="0" lvl="0" indent="-171450" defTabSz="914400" rtl="0" eaLnBrk="1" fontAlgn="auto" latinLnBrk="0" hangingPunct="1">
+              <a:lnSpc>
+                <a:spcPct val="100000"/>
+              </a:lnSpc>
+              <a:spcBef>
+                <a:spcPts val="0"/>
+              </a:spcBef>
+              <a:spcAft>
+                <a:spcPts val="0"/>
+              </a:spcAft>
+              <a:buClrTx/>
+              <a:buSzTx/>
+              <a:buFont typeface="Arial" panose="020B0604020202020204" pitchFamily="34" charset="0"/>
+              <a:buChar char="•"/>
+              <a:tabLst/>
               <a:defRPr/>
             </a:pPr>
             <a:r>
-              <a:rPr lang="en-US" sz="1200" b="1" dirty="0">
-                <a:solidFill>
-                  <a:prstClr val="white"/>
-                </a:solidFill>
-                <a:latin typeface="Helvetica Neue" panose="02000503000000020004" pitchFamily="2" charset="0"/>
-                <a:ea typeface="Helvetica Neue" panose="02000503000000020004" pitchFamily="2" charset="0"/>
-                <a:cs typeface="Helvetica Neue" panose="02000503000000020004" pitchFamily="2" charset="0"/>
-              </a:rPr>
-              <a:t>many hits add together</a:t>
-            </a:r>
-          </a:p>
-          <a:p>
-            <a:pPr lvl="1">
-              <a:defRPr/>
-            </a:pPr>
-            <a:r>
-              <a:rPr lang="en-US" sz="1200" dirty="0">
-                <a:solidFill>
-                  <a:prstClr val="white"/>
-                </a:solidFill>
-                <a:latin typeface="Helvetica Neue" panose="02000503000000020004" pitchFamily="2" charset="0"/>
-                <a:ea typeface="Helvetica Neue" panose="02000503000000020004" pitchFamily="2" charset="0"/>
-                <a:cs typeface="Helvetica Neue" panose="02000503000000020004" pitchFamily="2" charset="0"/>
-              </a:rPr>
-              <a:t>net response changes the path</a:t>
-            </a:r>
-            <a:endParaRPr kumimoji="0" lang="en-US" sz="1200" u="none" strike="noStrike" kern="1200" cap="none" spc="0" normalizeH="0" baseline="-25000" noProof="0" dirty="0">
-              <a:ln>
-                <a:noFill/>
-              </a:ln>
-              <a:solidFill>
-                <a:prstClr val="white"/>
-              </a:solidFill>
-              <a:effectLst/>
-              <a:uLnTx/>
-              <a:uFillTx/>
-              <a:latin typeface="Helvetica Neue" panose="02000503000000020004" pitchFamily="2" charset="0"/>
-              <a:ea typeface="Helvetica Neue" panose="02000503000000020004" pitchFamily="2" charset="0"/>
-              <a:cs typeface="Helvetica Neue" panose="02000503000000020004" pitchFamily="2" charset="0"/>
-            </a:endParaRPr>
-          </a:p>
-          <a:p>
-            <a:pPr lvl="1">
-              <a:defRPr/>
-            </a:pPr>
-            <a:r>
-              <a:rPr kumimoji="0" lang="en-US" sz="1200" u="none" strike="noStrike" kern="1200" cap="none" spc="0" normalizeH="0" baseline="0" noProof="0" dirty="0">
+              <a:rPr kumimoji="0" lang="en-US" sz="1400" b="1" u="none" strike="noStrike" kern="1200" cap="none" spc="0" normalizeH="0" baseline="0" noProof="0" dirty="0">
                 <a:ln>
                   <a:noFill/>
                 </a:ln>
@@ -17415,27 +17449,13 @@
             </a:r>
           </a:p>
           <a:p>
-            <a:pPr lvl="1">
+            <a:pPr marL="628650" lvl="1" indent="-171450">
+              <a:buFont typeface="Arial" panose="020B0604020202020204" pitchFamily="34" charset="0"/>
+              <a:buChar char="•"/>
               <a:defRPr/>
             </a:pPr>
             <a:r>
-              <a:rPr lang="en-US" sz="1200" dirty="0">
-                <a:solidFill>
-                  <a:prstClr val="white"/>
-                </a:solidFill>
-                <a:latin typeface="Helvetica Neue" panose="02000503000000020004" pitchFamily="2" charset="0"/>
-                <a:ea typeface="Helvetica Neue" panose="02000503000000020004" pitchFamily="2" charset="0"/>
-                <a:cs typeface="Helvetica Neue" panose="02000503000000020004" pitchFamily="2" charset="0"/>
-              </a:rPr>
-              <a:t>population density</a:t>
-            </a:r>
-          </a:p>
-          <a:p>
-            <a:pPr lvl="1">
-              <a:defRPr/>
-            </a:pPr>
-            <a:r>
-              <a:rPr kumimoji="0" lang="en-US" sz="1200" u="none" strike="noStrike" kern="1200" cap="none" spc="0" normalizeH="0" baseline="0" noProof="0" dirty="0">
+              <a:rPr kumimoji="0" lang="en-US" sz="1400" b="1" u="none" strike="noStrike" kern="1200" cap="none" spc="0" normalizeH="0" baseline="0" noProof="0" dirty="0">
                 <a:ln>
                   <a:noFill/>
                 </a:ln>
@@ -17449,41 +17469,7 @@
                 <a:ea typeface="Helvetica Neue" panose="02000503000000020004" pitchFamily="2" charset="0"/>
                 <a:cs typeface="Helvetica Neue" panose="02000503000000020004" pitchFamily="2" charset="0"/>
               </a:rPr>
-              <a:t>energy carried by architrino assemblies</a:t>
-            </a:r>
-          </a:p>
-          <a:p>
-            <a:pPr marR="0" lvl="0" defTabSz="914400" rtl="0" eaLnBrk="1" fontAlgn="auto" latinLnBrk="0" hangingPunct="1">
-              <a:lnSpc>
-                <a:spcPct val="100000"/>
-              </a:lnSpc>
-              <a:spcBef>
-                <a:spcPts val="0"/>
-              </a:spcBef>
-              <a:spcAft>
-                <a:spcPts val="0"/>
-              </a:spcAft>
-              <a:buClrTx/>
-              <a:buSzTx/>
-              <a:tabLst/>
-              <a:defRPr/>
-            </a:pPr>
-            <a:r>
-              <a:rPr kumimoji="0" lang="en-US" sz="1200" b="1" u="none" strike="noStrike" kern="1200" cap="none" spc="0" normalizeH="0" baseline="0" noProof="0" dirty="0">
-                <a:ln>
-                  <a:noFill/>
-                </a:ln>
-                <a:solidFill>
-                  <a:prstClr val="white"/>
-                </a:solidFill>
-                <a:effectLst/>
-                <a:uLnTx/>
-                <a:uFillTx/>
-                <a:latin typeface="Helvetica Neue" panose="02000503000000020004" pitchFamily="2" charset="0"/>
-                <a:ea typeface="Helvetica Neue" panose="02000503000000020004" pitchFamily="2" charset="0"/>
-                <a:cs typeface="Helvetica Neue" panose="02000503000000020004" pitchFamily="2" charset="0"/>
-              </a:rPr>
-              <a:t>locally balanced polarity distribution</a:t>
+              <a:t>population density, assembly energy, and locally balanced polarity</a:t>
             </a:r>
           </a:p>
         </p:txBody>
@@ -17491,7 +17477,7 @@
     </p:spTree>
     <p:extLst>
       <p:ext uri="{BB962C8B-B14F-4D97-AF65-F5344CB8AC3E}">
-        <p14:creationId val="3144987668"/>
+        <p14:creationId xmlns:p14="http://schemas.microsoft.com/office/powerpoint/2010/main" val="3144987668"/>
       </p:ext>
     </p:extLst>
   </p:cSld>
@@ -17502,7 +17488,7 @@
 </file>
 
 <file path=ppt/slides/slide13.xml><?xml version="1.0" encoding="utf-8"?>
-<p:sld xmlns:a="http://schemas.openxmlformats.org/drawingml/2006/main" xmlns:ns2="http://schemas.microsoft.com/office/drawing/2014/main" xmlns:p="http://schemas.openxmlformats.org/presentationml/2006/main" xmlns:p14="http://schemas.microsoft.com/office/powerpoint/2010/main" xmlns:r="http://schemas.openxmlformats.org/officeDocument/2006/relationships">
+<p:sld xmlns:a="http://schemas.openxmlformats.org/drawingml/2006/main" xmlns:r="http://schemas.openxmlformats.org/officeDocument/2006/relationships" xmlns:p="http://schemas.openxmlformats.org/presentationml/2006/main">
   <p:cSld>
     <p:bg>
       <p:bgPr>
@@ -17531,7 +17517,7 @@
           <p:cNvPr id="4" name="TextBox 3">
             <a:extLst>
               <a:ext uri="{FF2B5EF4-FFF2-40B4-BE49-F238E27FC236}">
-                <ns2:creationId id="{04089B0C-3E0D-1D7D-7623-E8C4B9A7F9B0}"/>
+                <a16:creationId xmlns:a16="http://schemas.microsoft.com/office/drawing/2014/main" id="{04089B0C-3E0D-1D7D-7623-E8C4B9A7F9B0}"/>
               </a:ext>
             </a:extLst>
           </p:cNvPr>
@@ -17586,32 +17572,11 @@
                 <a:ea typeface="Helvetica Neue" panose="02000503000000020004" pitchFamily="2" charset="0"/>
                 <a:cs typeface="Helvetica Neue" panose="02000503000000020004" pitchFamily="2" charset="0"/>
               </a:rPr>
-              <a:t>Use a 1D test case with two architrino emitters and wake speed.</a:t>
+              <a:t>Use a 1D two-body test: two architrinos and one wake speed.</a:t>
             </a:r>
           </a:p>
           <a:p>
-            <a:r>
-              <a:rPr>
-                <a:solidFill>
-                  <a:prstClr val="white"/>
-                </a:solidFill>
-                <a:latin typeface="Helvetica Neue" panose="02000503000000020004" pitchFamily="2" charset="0"/>
-                <a:ea typeface="Helvetica Neue" panose="02000503000000020004" pitchFamily="2" charset="0"/>
-                <a:cs typeface="Helvetica Neue" panose="02000503000000020004" pitchFamily="2" charset="0"/>
-              </a:rPr>
-              <a:t>The key speed is |v| = wake speed.</a:t>
-            </a:r>
-            <a:endParaRPr lang="en-US" dirty="0">
-              <a:solidFill>
-                <a:prstClr val="white"/>
-              </a:solidFill>
-              <a:latin typeface="Helvetica Neue" panose="02000503000000020004" pitchFamily="2" charset="0"/>
-              <a:ea typeface="Helvetica Neue" panose="02000503000000020004" pitchFamily="2" charset="0"/>
-              <a:cs typeface="Helvetica Neue" panose="02000503000000020004" pitchFamily="2" charset="0"/>
-            </a:endParaRPr>
-          </a:p>
-          <a:p>
-            <a:pPr marL="285750" marR="0" lvl="0" indent="-285750" algn="l" defTabSz="914400" rtl="0" eaLnBrk="1" fontAlgn="auto" latinLnBrk="0" hangingPunct="1">
+            <a:pPr marL="0" marR="0" lvl="0" indent="0" algn="l" defTabSz="914400" rtl="0" eaLnBrk="1" fontAlgn="auto" latinLnBrk="0" hangingPunct="1">
               <a:lnSpc>
                 <a:spcPct val="100000"/>
               </a:lnSpc>
@@ -17623,8 +17588,8 @@
               </a:spcAft>
               <a:buClrTx/>
               <a:buSzTx/>
-              <a:buFont typeface="Arial" panose="020B0604020202020204" pitchFamily="34" charset="0"/>
-              <a:buChar char="•"/>
+              <a:buFontTx/>
+              <a:buNone/>
               <a:tabLst/>
               <a:defRPr/>
             </a:pPr>
@@ -17643,25 +17608,11 @@
                 <a:ea typeface="Helvetica Neue" panose="02000503000000020004" pitchFamily="2" charset="0"/>
                 <a:cs typeface="Helvetica Neue" panose="02000503000000020004" pitchFamily="2" charset="0"/>
               </a:rPr>
-              <a:t>Open question: does that speed line up with the special point r = 1 on the 1/r curve?</a:t>
+              <a:t>The key threshold is |v| = wake speed.</a:t>
             </a:r>
-            <a:endParaRPr kumimoji="0" lang="en-US" sz="1800" b="1" i="1" u="none" strike="noStrike" kern="1200" cap="none" spc="0" normalizeH="0" baseline="0" noProof="0" dirty="0">
-              <a:ln>
-                <a:noFill/>
-              </a:ln>
-              <a:solidFill>
-                <a:prstClr val="white"/>
-              </a:solidFill>
-              <a:effectLst/>
-              <a:uLnTx/>
-              <a:uFillTx/>
-              <a:latin typeface="Helvetica Neue" panose="02000503000000020004" pitchFamily="2" charset="0"/>
-              <a:ea typeface="Helvetica Neue" panose="02000503000000020004" pitchFamily="2" charset="0"/>
-              <a:cs typeface="Helvetica Neue" panose="02000503000000020004" pitchFamily="2" charset="0"/>
-            </a:endParaRPr>
-          </a:p>
-          <a:p>
-            <a:pPr marL="742950" marR="0" lvl="1" indent="-285750" algn="l" defTabSz="914400" rtl="0" eaLnBrk="1" fontAlgn="auto" latinLnBrk="0" hangingPunct="1">
+          </a:p>
+          <a:p>
+            <a:pPr marL="0" marR="0" lvl="0" indent="0" algn="l" defTabSz="914400" rtl="0" eaLnBrk="1" fontAlgn="auto" latinLnBrk="0" hangingPunct="1">
               <a:lnSpc>
                 <a:spcPct val="100000"/>
               </a:lnSpc>
@@ -17673,8 +17624,8 @@
               </a:spcAft>
               <a:buClrTx/>
               <a:buSzTx/>
-              <a:buFont typeface="Arial" panose="020B0604020202020204" pitchFamily="34" charset="0"/>
-              <a:buChar char="•"/>
+              <a:buFontTx/>
+              <a:buNone/>
               <a:tabLst/>
               <a:defRPr/>
             </a:pPr>
@@ -17693,11 +17644,11 @@
                 <a:ea typeface="Helvetica Neue" panose="02000503000000020004" pitchFamily="2" charset="0"/>
                 <a:cs typeface="Helvetica Neue" panose="02000503000000020004" pitchFamily="2" charset="0"/>
               </a:rPr>
-              <a:t>In this toy picture, the area on each side of r = 1 looks balanced.</a:t>
+              <a:t>Open question: does that threshold line up with r = 1 on the 1/r curve?</a:t>
             </a:r>
           </a:p>
           <a:p>
-            <a:pPr marL="742950" marR="0" lvl="1" indent="-285750" algn="l" defTabSz="914400" rtl="0" eaLnBrk="1" fontAlgn="auto" latinLnBrk="0" hangingPunct="1">
+            <a:pPr marL="0" marR="0" lvl="0" indent="0" algn="l" defTabSz="914400" rtl="0" eaLnBrk="1" fontAlgn="auto" latinLnBrk="0" hangingPunct="1">
               <a:lnSpc>
                 <a:spcPct val="100000"/>
               </a:lnSpc>
@@ -17709,8 +17660,8 @@
               </a:spcAft>
               <a:buClrTx/>
               <a:buSzTx/>
-              <a:buFont typeface="Arial" panose="020B0604020202020204" pitchFamily="34" charset="0"/>
-              <a:buChar char="•"/>
+              <a:buFontTx/>
+              <a:buNone/>
               <a:tabLst/>
               <a:defRPr/>
             </a:pPr>
@@ -17729,11 +17680,11 @@
                 <a:ea typeface="Helvetica Neue" panose="02000503000000020004" pitchFamily="2" charset="0"/>
                 <a:cs typeface="Helvetica Neue" panose="02000503000000020004" pitchFamily="2" charset="0"/>
               </a:rPr>
-              <a:t>That may be why orbit equations link speed and radius.</a:t>
+              <a:t>The toy picture suggests the two sides of r = 1 balance, which may link orbit speed and radius.</a:t>
             </a:r>
           </a:p>
           <a:p>
-            <a:pPr marL="742950" marR="0" lvl="1" indent="-285750" algn="l" defTabSz="914400" rtl="0" eaLnBrk="1" fontAlgn="auto" latinLnBrk="0" hangingPunct="1">
+            <a:pPr marL="0" marR="0" lvl="0" indent="0" algn="l" defTabSz="914400" rtl="0" eaLnBrk="1" fontAlgn="auto" latinLnBrk="0" hangingPunct="1">
               <a:lnSpc>
                 <a:spcPct val="100000"/>
               </a:lnSpc>
@@ -17745,13 +17696,13 @@
               </a:spcAft>
               <a:buClrTx/>
               <a:buSzTx/>
-              <a:buFont typeface="Arial" panose="020B0604020202020204" pitchFamily="34" charset="0"/>
-              <a:buChar char="•"/>
+              <a:buFontTx/>
+              <a:buNone/>
               <a:tabLst/>
               <a:defRPr/>
             </a:pPr>
             <a:r>
-              <a:rPr kumimoji="0" lang="en-US" sz="1800" b="0" i="1" u="none" strike="noStrike" kern="1200" cap="none" spc="0" normalizeH="0" baseline="0" noProof="0" dirty="0">
+              <a:rPr kumimoji="0" lang="en-US" sz="1800" b="0" i="0" u="none" strike="noStrike" kern="1200" cap="none" spc="0" normalizeH="0" baseline="0" noProof="0" dirty="0">
                 <a:ln>
                   <a:noFill/>
                 </a:ln>
@@ -17769,7 +17720,7 @@
             </a:r>
           </a:p>
           <a:p>
-            <a:pPr marL="285750" marR="0" lvl="0" indent="-285750" algn="l" defTabSz="914400" rtl="0" eaLnBrk="1" fontAlgn="auto" latinLnBrk="0" hangingPunct="1">
+            <a:pPr marL="0" marR="0" lvl="0" indent="0" algn="l" defTabSz="914400" rtl="0" eaLnBrk="1" fontAlgn="auto" latinLnBrk="0" hangingPunct="1">
               <a:lnSpc>
                 <a:spcPct val="100000"/>
               </a:lnSpc>
@@ -17781,8 +17732,44 @@
               </a:spcAft>
               <a:buClrTx/>
               <a:buSzTx/>
-              <a:buFont typeface="Arial" panose="020B0604020202020204" pitchFamily="34" charset="0"/>
-              <a:buChar char="•"/>
+              <a:buFontTx/>
+              <a:buNone/>
+              <a:tabLst/>
+              <a:defRPr/>
+            </a:pPr>
+            <a:r>
+              <a:rPr kumimoji="0" lang="en-US" sz="1800" b="0" i="0" u="none" strike="noStrike" kern="1200" cap="none" spc="0" normalizeH="0" baseline="0" noProof="0" dirty="0">
+                <a:ln>
+                  <a:noFill/>
+                </a:ln>
+                <a:solidFill>
+                  <a:prstClr val="white"/>
+                </a:solidFill>
+                <a:effectLst/>
+                <a:uLnTx/>
+                <a:uFillTx/>
+                <a:latin typeface="Helvetica Neue" panose="02000503000000020004" pitchFamily="2" charset="0"/>
+                <a:ea typeface="Helvetica Neue" panose="02000503000000020004" pitchFamily="2" charset="0"/>
+                <a:cs typeface="Helvetica Neue" panose="02000503000000020004" pitchFamily="2" charset="0"/>
+              </a:rPr>
+              <a:t>Same-polarity pairs may reverse or cross, depending on the starting offset.</a:t>
+            </a:r>
+          </a:p>
+          <a:p>
+            <a:pPr marL="0" marR="0" lvl="0" indent="0" algn="l" defTabSz="914400" rtl="0" eaLnBrk="1" fontAlgn="auto" latinLnBrk="0" hangingPunct="1">
+              <a:lnSpc>
+                <a:spcPct val="100000"/>
+              </a:lnSpc>
+              <a:spcBef>
+                <a:spcPts val="0"/>
+              </a:spcBef>
+              <a:spcAft>
+                <a:spcPts val="0"/>
+              </a:spcAft>
+              <a:buClrTx/>
+              <a:buSzTx/>
+              <a:buFontTx/>
+              <a:buNone/>
               <a:tabLst/>
               <a:defRPr/>
             </a:pPr>
@@ -17805,7 +17792,7 @@
             </a:r>
           </a:p>
           <a:p>
-            <a:pPr marL="742950" marR="0" lvl="1" indent="-285750" algn="l" defTabSz="914400" rtl="0" eaLnBrk="1" fontAlgn="auto" latinLnBrk="0" hangingPunct="1">
+            <a:pPr marL="0" marR="0" lvl="0" indent="0" algn="l" defTabSz="914400" rtl="0" eaLnBrk="1" fontAlgn="auto" latinLnBrk="0" hangingPunct="1">
               <a:lnSpc>
                 <a:spcPct val="100000"/>
               </a:lnSpc>
@@ -17817,80 +17804,8 @@
               </a:spcAft>
               <a:buClrTx/>
               <a:buSzTx/>
-              <a:buFont typeface="Arial" panose="020B0604020202020204" pitchFamily="34" charset="0"/>
-              <a:buChar char="•"/>
-              <a:tabLst/>
-              <a:defRPr/>
-            </a:pPr>
-            <a:r>
-              <a:rPr kumimoji="0" lang="en-US" sz="1800" b="0" i="0" u="none" strike="noStrike" kern="1200" cap="none" spc="0" normalizeH="0" baseline="0" noProof="0" dirty="0">
-                <a:ln>
-                  <a:noFill/>
-                </a:ln>
-                <a:solidFill>
-                  <a:prstClr val="white"/>
-                </a:solidFill>
-                <a:effectLst/>
-                <a:uLnTx/>
-                <a:uFillTx/>
-                <a:latin typeface="Helvetica Neue" panose="02000503000000020004" pitchFamily="2" charset="0"/>
-                <a:ea typeface="Helvetica Neue" panose="02000503000000020004" pitchFamily="2" charset="0"/>
-                <a:cs typeface="Helvetica Neue" panose="02000503000000020004" pitchFamily="2" charset="0"/>
-              </a:rPr>
-              <a:t>Same-polarity pairs moving toward each other above wake speed may reverse or cross, depending on the starting offset.</a:t>
-            </a:r>
-          </a:p>
-          <a:p>
-            <a:pPr marL="742950" marR="0" lvl="1" indent="-285750" algn="l" defTabSz="914400" rtl="0" eaLnBrk="1" fontAlgn="auto" latinLnBrk="0" hangingPunct="1">
-              <a:lnSpc>
-                <a:spcPct val="100000"/>
-              </a:lnSpc>
-              <a:spcBef>
-                <a:spcPts val="0"/>
-              </a:spcBef>
-              <a:spcAft>
-                <a:spcPts val="0"/>
-              </a:spcAft>
-              <a:buClrTx/>
-              <a:buSzTx/>
-              <a:buFont typeface="Arial" panose="020B0604020202020204" pitchFamily="34" charset="0"/>
-              <a:buChar char="•"/>
-              <a:tabLst/>
-              <a:defRPr/>
-            </a:pPr>
-            <a:r>
-              <a:rPr kumimoji="0" lang="en-US" sz="1800" b="0" i="0" u="none" strike="noStrike" kern="1200" cap="none" spc="0" normalizeH="0" baseline="0" noProof="0" dirty="0">
-                <a:ln>
-                  <a:noFill/>
-                </a:ln>
-                <a:solidFill>
-                  <a:prstClr val="white"/>
-                </a:solidFill>
-                <a:effectLst/>
-                <a:uLnTx/>
-                <a:uFillTx/>
-                <a:latin typeface="Helvetica Neue" panose="02000503000000020004" pitchFamily="2" charset="0"/>
-                <a:ea typeface="Helvetica Neue" panose="02000503000000020004" pitchFamily="2" charset="0"/>
-                <a:cs typeface="Helvetica Neue" panose="02000503000000020004" pitchFamily="2" charset="0"/>
-              </a:rPr>
-              <a:t>Same-polarity and opposite-polarity pairs are not just mirror copies.</a:t>
-            </a:r>
-          </a:p>
-          <a:p>
-            <a:pPr marL="1200150" marR="0" lvl="2" indent="-285750" algn="l" defTabSz="914400" rtl="0" eaLnBrk="1" fontAlgn="auto" latinLnBrk="0" hangingPunct="1">
-              <a:lnSpc>
-                <a:spcPct val="100000"/>
-              </a:lnSpc>
-              <a:spcBef>
-                <a:spcPts val="0"/>
-              </a:spcBef>
-              <a:spcAft>
-                <a:spcPts val="0"/>
-              </a:spcAft>
-              <a:buClrTx/>
-              <a:buSzTx/>
-              <a:buFont typeface="Arial" panose="020B0604020202020204" pitchFamily="34" charset="0"/>
-              <a:buChar char="•"/>
+              <a:buFontTx/>
+              <a:buNone/>
               <a:tabLst/>
               <a:defRPr/>
             </a:pPr>
@@ -17919,7 +17834,7 @@
           <p:cNvPr id="5" name="Group 4">
             <a:extLst>
               <a:ext uri="{FF2B5EF4-FFF2-40B4-BE49-F238E27FC236}">
-                <ns2:creationId id="{28EB18A8-8B6A-033D-A4AD-86FBADCB4D4A}"/>
+                <a16:creationId xmlns:a16="http://schemas.microsoft.com/office/drawing/2014/main" id="{28EB18A8-8B6A-033D-A4AD-86FBADCB4D4A}"/>
               </a:ext>
             </a:extLst>
           </p:cNvPr>
@@ -17939,7 +17854,7 @@
             <p:cNvPr id="3" name="Picture 2">
               <a:extLst>
                 <a:ext uri="{FF2B5EF4-FFF2-40B4-BE49-F238E27FC236}">
-                  <ns2:creationId id="{13746C96-5BF1-B22B-CA42-106D1B63333F}"/>
+                  <a16:creationId xmlns:a16="http://schemas.microsoft.com/office/drawing/2014/main" id="{13746C96-5BF1-B22B-CA42-106D1B63333F}"/>
                 </a:ext>
               </a:extLst>
             </p:cNvPr>
@@ -17969,7 +17884,7 @@
             <p:cNvPr id="6" name="Straight Connector 5">
               <a:extLst>
                 <a:ext uri="{FF2B5EF4-FFF2-40B4-BE49-F238E27FC236}">
-                  <ns2:creationId id="{EE364915-3AF3-C9A5-4E25-440B57D56073}"/>
+                  <a16:creationId xmlns:a16="http://schemas.microsoft.com/office/drawing/2014/main" id="{EE364915-3AF3-C9A5-4E25-440B57D56073}"/>
                 </a:ext>
               </a:extLst>
             </p:cNvPr>
@@ -18012,7 +17927,7 @@
           <p:cNvPr id="7" name="Title 4">
             <a:extLst>
               <a:ext uri="{FF2B5EF4-FFF2-40B4-BE49-F238E27FC236}">
-                <ns2:creationId id="{82AADF08-A238-0E6D-347B-D5A2BAE919D0}"/>
+                <a16:creationId xmlns:a16="http://schemas.microsoft.com/office/drawing/2014/main" id="{82AADF08-A238-0E6D-347B-D5A2BAE919D0}"/>
               </a:ext>
             </a:extLst>
           </p:cNvPr>
@@ -18102,7 +18017,7 @@
           <p:cNvPr id="2" name="Footer Placeholder 3">
             <a:extLst>
               <a:ext uri="{FF2B5EF4-FFF2-40B4-BE49-F238E27FC236}">
-                <ns2:creationId id="{D74AEA6F-1F62-494C-BFCD-404180B7B064}"/>
+                <a16:creationId xmlns:a16="http://schemas.microsoft.com/office/drawing/2014/main" id="{D74AEA6F-1F62-494C-BFCD-404180B7B064}"/>
               </a:ext>
             </a:extLst>
           </p:cNvPr>
@@ -18262,7 +18177,7 @@
     </p:spTree>
     <p:extLst>
       <p:ext uri="{BB962C8B-B14F-4D97-AF65-F5344CB8AC3E}">
-        <p14:creationId val="3190063365"/>
+        <p14:creationId xmlns:p14="http://schemas.microsoft.com/office/powerpoint/2010/main" val="3190063365"/>
       </p:ext>
     </p:extLst>
   </p:cSld>
@@ -18273,7 +18188,7 @@
 </file>
 
 <file path=ppt/slides/slide14.xml><?xml version="1.0" encoding="utf-8"?>
-<p:sld xmlns:a="http://schemas.openxmlformats.org/drawingml/2006/main" xmlns:ns2="http://schemas.microsoft.com/office/drawing/2014/main" xmlns:p="http://schemas.openxmlformats.org/presentationml/2006/main" xmlns:p14="http://schemas.microsoft.com/office/powerpoint/2010/main">
+<p:sld xmlns:a="http://schemas.openxmlformats.org/drawingml/2006/main" xmlns:r="http://schemas.openxmlformats.org/officeDocument/2006/relationships" xmlns:p="http://schemas.openxmlformats.org/presentationml/2006/main">
   <p:cSld>
     <p:bg>
       <p:bgPr>
@@ -18288,7 +18203,7 @@
         <p:cNvPr id="1" name="">
           <a:extLst>
             <a:ext uri="{FF2B5EF4-FFF2-40B4-BE49-F238E27FC236}">
-              <ns2:creationId id="{2CB0C588-8647-6C8C-8DC7-F162DDF8BF26}"/>
+              <a16:creationId xmlns:a16="http://schemas.microsoft.com/office/drawing/2014/main" id="{2CB0C588-8647-6C8C-8DC7-F162DDF8BF26}"/>
             </a:ext>
           </a:extLst>
         </p:cNvPr>
@@ -18308,7 +18223,7 @@
           <p:cNvPr id="5" name="Footer Placeholder 3">
             <a:extLst>
               <a:ext uri="{FF2B5EF4-FFF2-40B4-BE49-F238E27FC236}">
-                <ns2:creationId id="{D8055493-6465-E03D-4E0E-CA86B923D2DB}"/>
+                <a16:creationId xmlns:a16="http://schemas.microsoft.com/office/drawing/2014/main" id="{D8055493-6465-E03D-4E0E-CA86B923D2DB}"/>
               </a:ext>
             </a:extLst>
           </p:cNvPr>
@@ -18470,7 +18385,7 @@
           <p:cNvPr id="19" name="Rectangle 18">
             <a:extLst>
               <a:ext uri="{FF2B5EF4-FFF2-40B4-BE49-F238E27FC236}">
-                <ns2:creationId id="{232D04D3-E71C-CAE2-097F-314B5E11C0F3}"/>
+                <a16:creationId xmlns:a16="http://schemas.microsoft.com/office/drawing/2014/main" id="{232D04D3-E71C-CAE2-097F-314B5E11C0F3}"/>
               </a:ext>
             </a:extLst>
           </p:cNvPr>
@@ -18535,7 +18450,7 @@
           <p:cNvPr id="2" name="TextBox 1">
             <a:extLst>
               <a:ext uri="{FF2B5EF4-FFF2-40B4-BE49-F238E27FC236}">
-                <ns2:creationId id="{5B66C1A2-52BD-EA60-BE8F-C5D3C8F732D2}"/>
+                <a16:creationId xmlns:a16="http://schemas.microsoft.com/office/drawing/2014/main" id="{5B66C1A2-52BD-EA60-BE8F-C5D3C8F732D2}"/>
               </a:ext>
             </a:extLst>
           </p:cNvPr>
@@ -18829,7 +18744,7 @@
     </p:spTree>
     <p:extLst>
       <p:ext uri="{BB962C8B-B14F-4D97-AF65-F5344CB8AC3E}">
-        <p14:creationId val="3670680207"/>
+        <p14:creationId xmlns:p14="http://schemas.microsoft.com/office/powerpoint/2010/main" val="3670680207"/>
       </p:ext>
     </p:extLst>
   </p:cSld>
@@ -18840,7 +18755,7 @@
 </file>
 
 <file path=ppt/slides/slide2.xml><?xml version="1.0" encoding="utf-8"?>
-<p:sld xmlns:a="http://schemas.openxmlformats.org/drawingml/2006/main" xmlns:ns2="http://schemas.microsoft.com/office/drawing/2014/main" xmlns:p="http://schemas.openxmlformats.org/presentationml/2006/main" xmlns:p14="http://schemas.microsoft.com/office/powerpoint/2010/main">
+<p:sld xmlns:a="http://schemas.openxmlformats.org/drawingml/2006/main" xmlns:r="http://schemas.openxmlformats.org/officeDocument/2006/relationships" xmlns:p="http://schemas.openxmlformats.org/presentationml/2006/main">
   <p:cSld>
     <p:bg>
       <p:bgPr>
@@ -18855,7 +18770,7 @@
         <p:cNvPr id="1" name="">
           <a:extLst>
             <a:ext uri="{FF2B5EF4-FFF2-40B4-BE49-F238E27FC236}">
-              <ns2:creationId id="{14568406-B066-AEBE-C74B-068160974652}"/>
+              <a16:creationId xmlns:a16="http://schemas.microsoft.com/office/drawing/2014/main" id="{14568406-B066-AEBE-C74B-068160974652}"/>
             </a:ext>
           </a:extLst>
         </p:cNvPr>
@@ -18875,7 +18790,7 @@
           <p:cNvPr id="5" name="Footer Placeholder 3">
             <a:extLst>
               <a:ext uri="{FF2B5EF4-FFF2-40B4-BE49-F238E27FC236}">
-                <ns2:creationId id="{27CEA6F2-4AF1-97D8-38AC-41B557BE51CF}"/>
+                <a16:creationId xmlns:a16="http://schemas.microsoft.com/office/drawing/2014/main" id="{27CEA6F2-4AF1-97D8-38AC-41B557BE51CF}"/>
               </a:ext>
             </a:extLst>
           </p:cNvPr>
@@ -19037,7 +18952,7 @@
           <p:cNvPr id="6" name="Group 5">
             <a:extLst>
               <a:ext uri="{FF2B5EF4-FFF2-40B4-BE49-F238E27FC236}">
-                <ns2:creationId id="{C81263DC-661D-BD50-5933-E8227696F8DE}"/>
+                <a16:creationId xmlns:a16="http://schemas.microsoft.com/office/drawing/2014/main" id="{C81263DC-661D-BD50-5933-E8227696F8DE}"/>
               </a:ext>
             </a:extLst>
           </p:cNvPr>
@@ -19057,7 +18972,7 @@
             <p:cNvPr id="3" name="Straight Arrow Connector 2">
               <a:extLst>
                 <a:ext uri="{FF2B5EF4-FFF2-40B4-BE49-F238E27FC236}">
-                  <ns2:creationId id="{8B149F79-E249-261E-9112-BF1D70D76419}"/>
+                  <a16:creationId xmlns:a16="http://schemas.microsoft.com/office/drawing/2014/main" id="{8B149F79-E249-261E-9112-BF1D70D76419}"/>
                 </a:ext>
               </a:extLst>
             </p:cNvPr>
@@ -19101,7 +19016,7 @@
             <p:cNvPr id="8" name="Straight Arrow Connector 7">
               <a:extLst>
                 <a:ext uri="{FF2B5EF4-FFF2-40B4-BE49-F238E27FC236}">
-                  <ns2:creationId id="{259C9B9C-0329-E856-17CB-C966D0778D39}"/>
+                  <a16:creationId xmlns:a16="http://schemas.microsoft.com/office/drawing/2014/main" id="{259C9B9C-0329-E856-17CB-C966D0778D39}"/>
                 </a:ext>
               </a:extLst>
             </p:cNvPr>
@@ -19145,7 +19060,7 @@
             <p:cNvPr id="12" name="TextBox 11">
               <a:extLst>
                 <a:ext uri="{FF2B5EF4-FFF2-40B4-BE49-F238E27FC236}">
-                  <ns2:creationId id="{7C27133D-1A03-8C4F-53C4-564B9AE5C189}"/>
+                  <a16:creationId xmlns:a16="http://schemas.microsoft.com/office/drawing/2014/main" id="{7C27133D-1A03-8C4F-53C4-564B9AE5C189}"/>
                 </a:ext>
               </a:extLst>
             </p:cNvPr>
@@ -19210,7 +19125,7 @@
             <p:cNvPr id="13" name="TextBox 12">
               <a:extLst>
                 <a:ext uri="{FF2B5EF4-FFF2-40B4-BE49-F238E27FC236}">
-                  <ns2:creationId id="{0F3C3A2E-72E6-5B26-7E8C-2A2E59D8C3F6}"/>
+                  <a16:creationId xmlns:a16="http://schemas.microsoft.com/office/drawing/2014/main" id="{0F3C3A2E-72E6-5B26-7E8C-2A2E59D8C3F6}"/>
                 </a:ext>
               </a:extLst>
             </p:cNvPr>
@@ -19272,7 +19187,7 @@
           <p:cNvPr id="23" name="Oval 22">
             <a:extLst>
               <a:ext uri="{FF2B5EF4-FFF2-40B4-BE49-F238E27FC236}">
-                <ns2:creationId id="{F069ACCF-49B1-2004-B9BA-C32EA1E82492}"/>
+                <a16:creationId xmlns:a16="http://schemas.microsoft.com/office/drawing/2014/main" id="{F069ACCF-49B1-2004-B9BA-C32EA1E82492}"/>
               </a:ext>
             </a:extLst>
           </p:cNvPr>
@@ -19356,7 +19271,7 @@
           <p:cNvPr id="27" name="Oval 26">
             <a:extLst>
               <a:ext uri="{FF2B5EF4-FFF2-40B4-BE49-F238E27FC236}">
-                <ns2:creationId id="{A2120CF2-66F6-E863-1722-E1EBC99EB320}"/>
+                <a16:creationId xmlns:a16="http://schemas.microsoft.com/office/drawing/2014/main" id="{A2120CF2-66F6-E863-1722-E1EBC99EB320}"/>
               </a:ext>
             </a:extLst>
           </p:cNvPr>
@@ -19440,7 +19355,7 @@
           <p:cNvPr id="28" name="Oval 27">
             <a:extLst>
               <a:ext uri="{FF2B5EF4-FFF2-40B4-BE49-F238E27FC236}">
-                <ns2:creationId id="{2CF23E24-ED96-772A-8248-1491441DB146}"/>
+                <a16:creationId xmlns:a16="http://schemas.microsoft.com/office/drawing/2014/main" id="{2CF23E24-ED96-772A-8248-1491441DB146}"/>
               </a:ext>
             </a:extLst>
           </p:cNvPr>
@@ -19524,7 +19439,7 @@
           <p:cNvPr id="29" name="Oval 28">
             <a:extLst>
               <a:ext uri="{FF2B5EF4-FFF2-40B4-BE49-F238E27FC236}">
-                <ns2:creationId id="{25A0A0B3-E20A-4CC2-79D9-E97020D601A7}"/>
+                <a16:creationId xmlns:a16="http://schemas.microsoft.com/office/drawing/2014/main" id="{25A0A0B3-E20A-4CC2-79D9-E97020D601A7}"/>
               </a:ext>
             </a:extLst>
           </p:cNvPr>
@@ -19608,7 +19523,7 @@
           <p:cNvPr id="30" name="Oval 29">
             <a:extLst>
               <a:ext uri="{FF2B5EF4-FFF2-40B4-BE49-F238E27FC236}">
-                <ns2:creationId id="{7969DEBF-EEB6-634C-020A-385E24FBF8E1}"/>
+                <a16:creationId xmlns:a16="http://schemas.microsoft.com/office/drawing/2014/main" id="{7969DEBF-EEB6-634C-020A-385E24FBF8E1}"/>
               </a:ext>
             </a:extLst>
           </p:cNvPr>
@@ -19692,7 +19607,7 @@
           <p:cNvPr id="4" name="Straight Connector 3">
             <a:extLst>
               <a:ext uri="{FF2B5EF4-FFF2-40B4-BE49-F238E27FC236}">
-                <ns2:creationId id="{2C66513A-9085-17C4-C9C2-3742BE2C33D7}"/>
+                <a16:creationId xmlns:a16="http://schemas.microsoft.com/office/drawing/2014/main" id="{2C66513A-9085-17C4-C9C2-3742BE2C33D7}"/>
               </a:ext>
             </a:extLst>
           </p:cNvPr>
@@ -19735,7 +19650,7 @@
           <p:cNvPr id="18" name="Oval 17">
             <a:extLst>
               <a:ext uri="{FF2B5EF4-FFF2-40B4-BE49-F238E27FC236}">
-                <ns2:creationId id="{9E30E225-012D-EE67-96E9-8843E769C6E1}"/>
+                <a16:creationId xmlns:a16="http://schemas.microsoft.com/office/drawing/2014/main" id="{9E30E225-012D-EE67-96E9-8843E769C6E1}"/>
               </a:ext>
             </a:extLst>
           </p:cNvPr>
@@ -19818,7 +19733,7 @@
           <p:cNvPr id="11" name="Group 10">
             <a:extLst>
               <a:ext uri="{FF2B5EF4-FFF2-40B4-BE49-F238E27FC236}">
-                <ns2:creationId id="{CE7A3B85-FDA3-45E2-9BB3-D32BED764091}"/>
+                <a16:creationId xmlns:a16="http://schemas.microsoft.com/office/drawing/2014/main" id="{CE7A3B85-FDA3-45E2-9BB3-D32BED764091}"/>
               </a:ext>
             </a:extLst>
           </p:cNvPr>
@@ -19838,7 +19753,7 @@
             <p:cNvPr id="24" name="Straight Arrow Connector 23">
               <a:extLst>
                 <a:ext uri="{FF2B5EF4-FFF2-40B4-BE49-F238E27FC236}">
-                  <ns2:creationId id="{5AAF8464-4AF0-1ED4-EC84-883D9DCBAE2E}"/>
+                  <a16:creationId xmlns:a16="http://schemas.microsoft.com/office/drawing/2014/main" id="{5AAF8464-4AF0-1ED4-EC84-883D9DCBAE2E}"/>
                 </a:ext>
               </a:extLst>
             </p:cNvPr>
@@ -19883,7 +19798,7 @@
             <p:cNvPr id="10" name="TextBox 9">
               <a:extLst>
                 <a:ext uri="{FF2B5EF4-FFF2-40B4-BE49-F238E27FC236}">
-                  <ns2:creationId id="{D4526506-8D04-242E-625D-A7D78BFFEE82}"/>
+                  <a16:creationId xmlns:a16="http://schemas.microsoft.com/office/drawing/2014/main" id="{D4526506-8D04-242E-625D-A7D78BFFEE82}"/>
                 </a:ext>
               </a:extLst>
             </p:cNvPr>
@@ -19966,7 +19881,7 @@
           <p:cNvPr id="31" name="TextBox 30">
             <a:extLst>
               <a:ext uri="{FF2B5EF4-FFF2-40B4-BE49-F238E27FC236}">
-                <ns2:creationId id="{0715B65B-EE48-6433-EFA6-8AFF4BF52B13}"/>
+                <a16:creationId xmlns:a16="http://schemas.microsoft.com/office/drawing/2014/main" id="{0715B65B-EE48-6433-EFA6-8AFF4BF52B13}"/>
               </a:ext>
             </a:extLst>
           </p:cNvPr>
@@ -20068,7 +19983,7 @@
           <p:cNvPr id="36" name="TextBox 35">
             <a:extLst>
               <a:ext uri="{FF2B5EF4-FFF2-40B4-BE49-F238E27FC236}">
-                <ns2:creationId id="{2639C71E-8510-A47A-CB6E-BD88DBD2D9D2}"/>
+                <a16:creationId xmlns:a16="http://schemas.microsoft.com/office/drawing/2014/main" id="{2639C71E-8510-A47A-CB6E-BD88DBD2D9D2}"/>
               </a:ext>
             </a:extLst>
           </p:cNvPr>
@@ -20150,7 +20065,7 @@
           <p:cNvPr id="22" name="Straight Connector 21">
             <a:extLst>
               <a:ext uri="{FF2B5EF4-FFF2-40B4-BE49-F238E27FC236}">
-                <ns2:creationId id="{48D6CF27-A191-E604-D02B-B71D144C595B}"/>
+                <a16:creationId xmlns:a16="http://schemas.microsoft.com/office/drawing/2014/main" id="{48D6CF27-A191-E604-D02B-B71D144C595B}"/>
               </a:ext>
             </a:extLst>
           </p:cNvPr>
@@ -20193,7 +20108,7 @@
           <p:cNvPr id="2" name="Title 1">
             <a:extLst>
               <a:ext uri="{FF2B5EF4-FFF2-40B4-BE49-F238E27FC236}">
-                <ns2:creationId id="{62407ED0-1A7F-69F0-224E-34E3BAB4AEB7}"/>
+                <a16:creationId xmlns:a16="http://schemas.microsoft.com/office/drawing/2014/main" id="{62407ED0-1A7F-69F0-224E-34E3BAB4AEB7}"/>
               </a:ext>
             </a:extLst>
           </p:cNvPr>
@@ -20277,7 +20192,7 @@
           <p:cNvPr id="7" name="Rectangle 6">
             <a:extLst>
               <a:ext uri="{FF2B5EF4-FFF2-40B4-BE49-F238E27FC236}">
-                <ns2:creationId id="{E63833BB-E257-5DD8-D2DC-4EDC10C1D9B0}"/>
+                <a16:creationId xmlns:a16="http://schemas.microsoft.com/office/drawing/2014/main" id="{E63833BB-E257-5DD8-D2DC-4EDC10C1D9B0}"/>
               </a:ext>
             </a:extLst>
           </p:cNvPr>
@@ -20286,15 +20201,15 @@
         </p:nvSpPr>
         <p:spPr>
           <a:xfrm>
-            <a:off x="1717056" y="1050303"/>
-            <a:ext cx="9576532" cy="523220"/>
+            <a:off x="0" y="512381"/>
+            <a:ext cx="12191999" cy="523220"/>
           </a:xfrm>
           <a:prstGeom prst="rect">
             <a:avLst/>
           </a:prstGeom>
         </p:spPr>
         <p:txBody>
-          <a:bodyPr wrap="none">
+          <a:bodyPr wrap="square">
             <a:spAutoFit/>
           </a:bodyPr>
           <a:lstStyle/>
@@ -20341,7 +20256,7 @@
           <p:cNvPr id="15" name="Straight Arrow Connector 14">
             <a:extLst>
               <a:ext uri="{FF2B5EF4-FFF2-40B4-BE49-F238E27FC236}">
-                <ns2:creationId id="{F4A7F80E-6EB4-D3A1-C496-DA676D8B14B8}"/>
+                <a16:creationId xmlns:a16="http://schemas.microsoft.com/office/drawing/2014/main" id="{F4A7F80E-6EB4-D3A1-C496-DA676D8B14B8}"/>
               </a:ext>
             </a:extLst>
           </p:cNvPr>
@@ -20387,7 +20302,7 @@
           <p:cNvPr id="32" name="Straight Arrow Connector 31">
             <a:extLst>
               <a:ext uri="{FF2B5EF4-FFF2-40B4-BE49-F238E27FC236}">
-                <ns2:creationId id="{E4BBFD59-613F-87DB-D8CE-C4CD0658E65A}"/>
+                <a16:creationId xmlns:a16="http://schemas.microsoft.com/office/drawing/2014/main" id="{E4BBFD59-613F-87DB-D8CE-C4CD0658E65A}"/>
               </a:ext>
             </a:extLst>
           </p:cNvPr>
@@ -20433,7 +20348,7 @@
           <p:cNvPr id="35" name="Straight Arrow Connector 34">
             <a:extLst>
               <a:ext uri="{FF2B5EF4-FFF2-40B4-BE49-F238E27FC236}">
-                <ns2:creationId id="{6170C482-A85C-519C-1C68-E52F3D321552}"/>
+                <a16:creationId xmlns:a16="http://schemas.microsoft.com/office/drawing/2014/main" id="{6170C482-A85C-519C-1C68-E52F3D321552}"/>
               </a:ext>
             </a:extLst>
           </p:cNvPr>
@@ -20479,7 +20394,7 @@
           <p:cNvPr id="39" name="Straight Arrow Connector 38">
             <a:extLst>
               <a:ext uri="{FF2B5EF4-FFF2-40B4-BE49-F238E27FC236}">
-                <ns2:creationId id="{4230761A-8EDF-2FA3-7DBE-AF384628B09E}"/>
+                <a16:creationId xmlns:a16="http://schemas.microsoft.com/office/drawing/2014/main" id="{4230761A-8EDF-2FA3-7DBE-AF384628B09E}"/>
               </a:ext>
             </a:extLst>
           </p:cNvPr>
@@ -20525,7 +20440,7 @@
           <p:cNvPr id="47" name="Straight Arrow Connector 46">
             <a:extLst>
               <a:ext uri="{FF2B5EF4-FFF2-40B4-BE49-F238E27FC236}">
-                <ns2:creationId id="{D3EF506B-E81E-4405-B45C-DFB8F9DA0D65}"/>
+                <a16:creationId xmlns:a16="http://schemas.microsoft.com/office/drawing/2014/main" id="{D3EF506B-E81E-4405-B45C-DFB8F9DA0D65}"/>
               </a:ext>
             </a:extLst>
           </p:cNvPr>
@@ -20571,7 +20486,7 @@
           <p:cNvPr id="9" name="TextBox 8">
             <a:extLst>
               <a:ext uri="{FF2B5EF4-FFF2-40B4-BE49-F238E27FC236}">
-                <ns2:creationId id="{9B5DCDDF-276B-4F6E-7066-014AE9A59CCC}"/>
+                <a16:creationId xmlns:a16="http://schemas.microsoft.com/office/drawing/2014/main" id="{9B5DCDDF-276B-4F6E-7066-014AE9A59CCC}"/>
               </a:ext>
             </a:extLst>
           </p:cNvPr>
@@ -20653,7 +20568,7 @@
           <p:cNvPr id="14" name="Rectangle 13">
             <a:extLst>
               <a:ext uri="{FF2B5EF4-FFF2-40B4-BE49-F238E27FC236}">
-                <ns2:creationId id="{99560D5F-868F-8968-4ED0-12355714D7FF}"/>
+                <a16:creationId xmlns:a16="http://schemas.microsoft.com/office/drawing/2014/main" id="{99560D5F-868F-8968-4ED0-12355714D7FF}"/>
               </a:ext>
             </a:extLst>
           </p:cNvPr>
@@ -20720,7 +20635,7 @@
     </p:spTree>
     <p:extLst>
       <p:ext uri="{BB962C8B-B14F-4D97-AF65-F5344CB8AC3E}">
-        <p14:creationId val="3801198229"/>
+        <p14:creationId xmlns:p14="http://schemas.microsoft.com/office/powerpoint/2010/main" val="3801198229"/>
       </p:ext>
     </p:extLst>
   </p:cSld>
@@ -20731,7 +20646,7 @@
 </file>
 
 <file path=ppt/slides/slide3.xml><?xml version="1.0" encoding="utf-8"?>
-<p:sld xmlns:a="http://schemas.openxmlformats.org/drawingml/2006/main" xmlns:ns2="http://schemas.microsoft.com/office/drawing/2014/main" xmlns:p="http://schemas.openxmlformats.org/presentationml/2006/main" xmlns:p14="http://schemas.microsoft.com/office/powerpoint/2010/main">
+<p:sld xmlns:a="http://schemas.openxmlformats.org/drawingml/2006/main" xmlns:r="http://schemas.openxmlformats.org/officeDocument/2006/relationships" xmlns:p="http://schemas.openxmlformats.org/presentationml/2006/main">
   <p:cSld>
     <p:bg>
       <p:bgPr>
@@ -20760,7 +20675,7 @@
           <p:cNvPr id="5" name="Footer Placeholder 3">
             <a:extLst>
               <a:ext uri="{FF2B5EF4-FFF2-40B4-BE49-F238E27FC236}">
-                <ns2:creationId id="{668F77D6-DFDA-5A46-8DF1-47F6A167C2B1}"/>
+                <a16:creationId xmlns:a16="http://schemas.microsoft.com/office/drawing/2014/main" id="{668F77D6-DFDA-5A46-8DF1-47F6A167C2B1}"/>
               </a:ext>
             </a:extLst>
           </p:cNvPr>
@@ -20922,7 +20837,7 @@
           <p:cNvPr id="6" name="Group 5">
             <a:extLst>
               <a:ext uri="{FF2B5EF4-FFF2-40B4-BE49-F238E27FC236}">
-                <ns2:creationId id="{CB214E5A-63A5-5C6B-3D5B-75FF74FA3E5A}"/>
+                <a16:creationId xmlns:a16="http://schemas.microsoft.com/office/drawing/2014/main" id="{CB214E5A-63A5-5C6B-3D5B-75FF74FA3E5A}"/>
               </a:ext>
             </a:extLst>
           </p:cNvPr>
@@ -20942,7 +20857,7 @@
             <p:cNvPr id="3" name="Straight Arrow Connector 2">
               <a:extLst>
                 <a:ext uri="{FF2B5EF4-FFF2-40B4-BE49-F238E27FC236}">
-                  <ns2:creationId id="{2EF0199F-22F4-BA42-9B75-8A8183BCDA9B}"/>
+                  <a16:creationId xmlns:a16="http://schemas.microsoft.com/office/drawing/2014/main" id="{2EF0199F-22F4-BA42-9B75-8A8183BCDA9B}"/>
                 </a:ext>
               </a:extLst>
             </p:cNvPr>
@@ -20986,7 +20901,7 @@
             <p:cNvPr id="8" name="Straight Arrow Connector 7">
               <a:extLst>
                 <a:ext uri="{FF2B5EF4-FFF2-40B4-BE49-F238E27FC236}">
-                  <ns2:creationId id="{49AB5343-55D0-6041-8627-E08A73F83930}"/>
+                  <a16:creationId xmlns:a16="http://schemas.microsoft.com/office/drawing/2014/main" id="{49AB5343-55D0-6041-8627-E08A73F83930}"/>
                 </a:ext>
               </a:extLst>
             </p:cNvPr>
@@ -21030,7 +20945,7 @@
             <p:cNvPr id="12" name="TextBox 11">
               <a:extLst>
                 <a:ext uri="{FF2B5EF4-FFF2-40B4-BE49-F238E27FC236}">
-                  <ns2:creationId id="{BF8D86A2-D083-024A-BC90-6BD938C23243}"/>
+                  <a16:creationId xmlns:a16="http://schemas.microsoft.com/office/drawing/2014/main" id="{BF8D86A2-D083-024A-BC90-6BD938C23243}"/>
                 </a:ext>
               </a:extLst>
             </p:cNvPr>
@@ -21095,7 +21010,7 @@
             <p:cNvPr id="13" name="TextBox 12">
               <a:extLst>
                 <a:ext uri="{FF2B5EF4-FFF2-40B4-BE49-F238E27FC236}">
-                  <ns2:creationId id="{2C3F4604-6C2F-0E4E-9DD3-4F5C89FF51AB}"/>
+                  <a16:creationId xmlns:a16="http://schemas.microsoft.com/office/drawing/2014/main" id="{2C3F4604-6C2F-0E4E-9DD3-4F5C89FF51AB}"/>
                 </a:ext>
               </a:extLst>
             </p:cNvPr>
@@ -21205,7 +21120,7 @@
           <p:cNvPr id="23" name="Oval 22">
             <a:extLst>
               <a:ext uri="{FF2B5EF4-FFF2-40B4-BE49-F238E27FC236}">
-                <ns2:creationId id="{0112617B-A1D5-1E41-BF92-E67D4E046E39}"/>
+                <a16:creationId xmlns:a16="http://schemas.microsoft.com/office/drawing/2014/main" id="{0112617B-A1D5-1E41-BF92-E67D4E046E39}"/>
               </a:ext>
             </a:extLst>
           </p:cNvPr>
@@ -21289,7 +21204,7 @@
           <p:cNvPr id="27" name="Oval 26">
             <a:extLst>
               <a:ext uri="{FF2B5EF4-FFF2-40B4-BE49-F238E27FC236}">
-                <ns2:creationId id="{6EF0F7DA-5E70-8348-A200-F59A10FF7C55}"/>
+                <a16:creationId xmlns:a16="http://schemas.microsoft.com/office/drawing/2014/main" id="{6EF0F7DA-5E70-8348-A200-F59A10FF7C55}"/>
               </a:ext>
             </a:extLst>
           </p:cNvPr>
@@ -21373,7 +21288,7 @@
           <p:cNvPr id="28" name="Oval 27">
             <a:extLst>
               <a:ext uri="{FF2B5EF4-FFF2-40B4-BE49-F238E27FC236}">
-                <ns2:creationId id="{552F58D0-F613-674A-B294-C894E5FB1683}"/>
+                <a16:creationId xmlns:a16="http://schemas.microsoft.com/office/drawing/2014/main" id="{552F58D0-F613-674A-B294-C894E5FB1683}"/>
               </a:ext>
             </a:extLst>
           </p:cNvPr>
@@ -21457,7 +21372,7 @@
           <p:cNvPr id="29" name="Oval 28">
             <a:extLst>
               <a:ext uri="{FF2B5EF4-FFF2-40B4-BE49-F238E27FC236}">
-                <ns2:creationId id="{9CA7A721-D3BD-744E-9306-85BBED5F74BC}"/>
+                <a16:creationId xmlns:a16="http://schemas.microsoft.com/office/drawing/2014/main" id="{9CA7A721-D3BD-744E-9306-85BBED5F74BC}"/>
               </a:ext>
             </a:extLst>
           </p:cNvPr>
@@ -21541,7 +21456,7 @@
           <p:cNvPr id="30" name="Oval 29">
             <a:extLst>
               <a:ext uri="{FF2B5EF4-FFF2-40B4-BE49-F238E27FC236}">
-                <ns2:creationId id="{F97F1A02-C0C7-3C45-9790-847C152D159A}"/>
+                <a16:creationId xmlns:a16="http://schemas.microsoft.com/office/drawing/2014/main" id="{F97F1A02-C0C7-3C45-9790-847C152D159A}"/>
               </a:ext>
             </a:extLst>
           </p:cNvPr>
@@ -21625,7 +21540,7 @@
           <p:cNvPr id="18" name="Oval 17">
             <a:extLst>
               <a:ext uri="{FF2B5EF4-FFF2-40B4-BE49-F238E27FC236}">
-                <ns2:creationId id="{BE4CDC90-4B2E-BE41-BB9D-A84675F3A2FE}"/>
+                <a16:creationId xmlns:a16="http://schemas.microsoft.com/office/drawing/2014/main" id="{BE4CDC90-4B2E-BE41-BB9D-A84675F3A2FE}"/>
               </a:ext>
             </a:extLst>
           </p:cNvPr>
@@ -21708,7 +21623,7 @@
           <p:cNvPr id="31" name="TextBox 30">
             <a:extLst>
               <a:ext uri="{FF2B5EF4-FFF2-40B4-BE49-F238E27FC236}">
-                <ns2:creationId id="{713B9ACE-B673-2D48-BEF2-2A133C31B527}"/>
+                <a16:creationId xmlns:a16="http://schemas.microsoft.com/office/drawing/2014/main" id="{713B9ACE-B673-2D48-BEF2-2A133C31B527}"/>
               </a:ext>
             </a:extLst>
           </p:cNvPr>
@@ -21810,7 +21725,7 @@
           <p:cNvPr id="36" name="TextBox 35">
             <a:extLst>
               <a:ext uri="{FF2B5EF4-FFF2-40B4-BE49-F238E27FC236}">
-                <ns2:creationId id="{3A81A480-EF64-094E-825A-8592DAA4C672}"/>
+                <a16:creationId xmlns:a16="http://schemas.microsoft.com/office/drawing/2014/main" id="{3A81A480-EF64-094E-825A-8592DAA4C672}"/>
               </a:ext>
             </a:extLst>
           </p:cNvPr>
@@ -21892,7 +21807,7 @@
           <p:cNvPr id="22" name="Straight Connector 21">
             <a:extLst>
               <a:ext uri="{FF2B5EF4-FFF2-40B4-BE49-F238E27FC236}">
-                <ns2:creationId id="{0C67DA45-6876-7942-9996-48CA0A1696FE}"/>
+                <a16:creationId xmlns:a16="http://schemas.microsoft.com/office/drawing/2014/main" id="{0C67DA45-6876-7942-9996-48CA0A1696FE}"/>
               </a:ext>
             </a:extLst>
           </p:cNvPr>
@@ -21935,7 +21850,7 @@
           <p:cNvPr id="15" name="Straight Arrow Connector 14">
             <a:extLst>
               <a:ext uri="{FF2B5EF4-FFF2-40B4-BE49-F238E27FC236}">
-                <ns2:creationId id="{05289ED1-4679-6543-A669-B23443FD0CD8}"/>
+                <a16:creationId xmlns:a16="http://schemas.microsoft.com/office/drawing/2014/main" id="{05289ED1-4679-6543-A669-B23443FD0CD8}"/>
               </a:ext>
             </a:extLst>
           </p:cNvPr>
@@ -21981,7 +21896,7 @@
           <p:cNvPr id="14" name="Rectangle 13">
             <a:extLst>
               <a:ext uri="{FF2B5EF4-FFF2-40B4-BE49-F238E27FC236}">
-                <ns2:creationId id="{24DFEA8B-B2CC-4557-5832-83CBF458C62D}"/>
+                <a16:creationId xmlns:a16="http://schemas.microsoft.com/office/drawing/2014/main" id="{24DFEA8B-B2CC-4557-5832-83CBF458C62D}"/>
               </a:ext>
             </a:extLst>
           </p:cNvPr>
@@ -22050,7 +21965,7 @@
           <p:cNvPr id="17" name="TextBox 16">
             <a:extLst>
               <a:ext uri="{FF2B5EF4-FFF2-40B4-BE49-F238E27FC236}">
-                <ns2:creationId id="{F6A93B37-78E4-125D-E0BF-C1EC32C24D2E}"/>
+                <a16:creationId xmlns:a16="http://schemas.microsoft.com/office/drawing/2014/main" id="{F6A93B37-78E4-125D-E0BF-C1EC32C24D2E}"/>
               </a:ext>
             </a:extLst>
           </p:cNvPr>
@@ -22059,8 +21974,8 @@
         </p:nvSpPr>
         <p:spPr>
           <a:xfrm>
-            <a:off x="2368330" y="5253265"/>
-            <a:ext cx="9220186" cy="338554"/>
+            <a:off x="3314814" y="5245329"/>
+            <a:ext cx="6597142" cy="369332"/>
           </a:xfrm>
           <a:prstGeom prst="rect">
             <a:avLst/>
@@ -22073,7 +21988,7 @@
           </a:bodyPr>
           <a:lstStyle/>
           <a:p>
-            <a:pPr marL="285750" marR="0" lvl="0" indent="-285750" algn="l" defTabSz="914400" rtl="0" eaLnBrk="1" fontAlgn="auto" latinLnBrk="0" hangingPunct="1">
+            <a:pPr marR="0" lvl="0" algn="ctr" defTabSz="914400" rtl="0" eaLnBrk="1" fontAlgn="auto" latinLnBrk="0" hangingPunct="1">
               <a:lnSpc>
                 <a:spcPct val="100000"/>
               </a:lnSpc>
@@ -22085,13 +22000,11 @@
               </a:spcAft>
               <a:buClrTx/>
               <a:buSzTx/>
-              <a:buFont typeface="Arial" panose="020B0604020202020204" pitchFamily="34" charset="0"/>
-              <a:buChar char="•"/>
               <a:tabLst/>
               <a:defRPr/>
             </a:pPr>
             <a:r>
-              <a:rPr kumimoji="0" lang="en-US" sz="1600" b="0" i="0" u="none" strike="noStrike" kern="1200" cap="none" spc="0" normalizeH="0" baseline="0" noProof="0" dirty="0">
+              <a:rPr kumimoji="0" lang="en-US" b="0" i="0" u="none" strike="noStrike" kern="1200" cap="none" spc="0" normalizeH="0" baseline="0" noProof="0" dirty="0">
                 <a:ln>
                   <a:noFill/>
                 </a:ln>
@@ -22115,7 +22028,7 @@
           <p:cNvPr id="19" name="TextBox 18">
             <a:extLst>
               <a:ext uri="{FF2B5EF4-FFF2-40B4-BE49-F238E27FC236}">
-                <ns2:creationId id="{D1F40738-506F-EAAF-7EBE-CFC9B4FE4D03}"/>
+                <a16:creationId xmlns:a16="http://schemas.microsoft.com/office/drawing/2014/main" id="{D1F40738-506F-EAAF-7EBE-CFC9B4FE4D03}"/>
               </a:ext>
             </a:extLst>
           </p:cNvPr>
@@ -22178,7 +22091,7 @@
     </p:spTree>
     <p:extLst>
       <p:ext uri="{BB962C8B-B14F-4D97-AF65-F5344CB8AC3E}">
-        <p14:creationId val="4241975687"/>
+        <p14:creationId xmlns:p14="http://schemas.microsoft.com/office/powerpoint/2010/main" val="4241975687"/>
       </p:ext>
     </p:extLst>
   </p:cSld>
@@ -22189,7 +22102,7 @@
 </file>
 
 <file path=ppt/slides/slide4.xml><?xml version="1.0" encoding="utf-8"?>
-<p:sld xmlns:a="http://schemas.openxmlformats.org/drawingml/2006/main" xmlns:ns2="http://schemas.microsoft.com/office/drawing/2014/main" xmlns:p="http://schemas.openxmlformats.org/presentationml/2006/main" xmlns:p14="http://schemas.microsoft.com/office/powerpoint/2010/main">
+<p:sld xmlns:a="http://schemas.openxmlformats.org/drawingml/2006/main" xmlns:r="http://schemas.openxmlformats.org/officeDocument/2006/relationships" xmlns:p="http://schemas.openxmlformats.org/presentationml/2006/main">
   <p:cSld>
     <p:bg>
       <p:bgPr>
@@ -22204,7 +22117,7 @@
         <p:cNvPr id="1" name="">
           <a:extLst>
             <a:ext uri="{FF2B5EF4-FFF2-40B4-BE49-F238E27FC236}">
-              <ns2:creationId id="{618D555D-7286-B241-E144-DDEC77AD45E3}"/>
+              <a16:creationId xmlns:a16="http://schemas.microsoft.com/office/drawing/2014/main" id="{618D555D-7286-B241-E144-DDEC77AD45E3}"/>
             </a:ext>
           </a:extLst>
         </p:cNvPr>
@@ -22224,7 +22137,7 @@
           <p:cNvPr id="5" name="Footer Placeholder 3">
             <a:extLst>
               <a:ext uri="{FF2B5EF4-FFF2-40B4-BE49-F238E27FC236}">
-                <ns2:creationId id="{614DBC08-8858-F579-1B95-86C501AB042B}"/>
+                <a16:creationId xmlns:a16="http://schemas.microsoft.com/office/drawing/2014/main" id="{614DBC08-8858-F579-1B95-86C501AB042B}"/>
               </a:ext>
             </a:extLst>
           </p:cNvPr>
@@ -22386,7 +22299,7 @@
           <p:cNvPr id="6" name="Group 5">
             <a:extLst>
               <a:ext uri="{FF2B5EF4-FFF2-40B4-BE49-F238E27FC236}">
-                <ns2:creationId id="{17811428-EDBA-0366-BE63-E3E25023C8EC}"/>
+                <a16:creationId xmlns:a16="http://schemas.microsoft.com/office/drawing/2014/main" id="{17811428-EDBA-0366-BE63-E3E25023C8EC}"/>
               </a:ext>
             </a:extLst>
           </p:cNvPr>
@@ -22406,7 +22319,7 @@
             <p:cNvPr id="3" name="Straight Arrow Connector 2">
               <a:extLst>
                 <a:ext uri="{FF2B5EF4-FFF2-40B4-BE49-F238E27FC236}">
-                  <ns2:creationId id="{D482C6FD-3801-AF2C-0D9C-BDC9F781A9F9}"/>
+                  <a16:creationId xmlns:a16="http://schemas.microsoft.com/office/drawing/2014/main" id="{D482C6FD-3801-AF2C-0D9C-BDC9F781A9F9}"/>
                 </a:ext>
               </a:extLst>
             </p:cNvPr>
@@ -22450,7 +22363,7 @@
             <p:cNvPr id="8" name="Straight Arrow Connector 7">
               <a:extLst>
                 <a:ext uri="{FF2B5EF4-FFF2-40B4-BE49-F238E27FC236}">
-                  <ns2:creationId id="{F8DD0551-F57F-FC8B-CDFA-54E4DF3D076B}"/>
+                  <a16:creationId xmlns:a16="http://schemas.microsoft.com/office/drawing/2014/main" id="{F8DD0551-F57F-FC8B-CDFA-54E4DF3D076B}"/>
                 </a:ext>
               </a:extLst>
             </p:cNvPr>
@@ -22494,7 +22407,7 @@
             <p:cNvPr id="12" name="TextBox 11">
               <a:extLst>
                 <a:ext uri="{FF2B5EF4-FFF2-40B4-BE49-F238E27FC236}">
-                  <ns2:creationId id="{2419E9DF-2DD3-3506-BE3B-E485BF80EDAC}"/>
+                  <a16:creationId xmlns:a16="http://schemas.microsoft.com/office/drawing/2014/main" id="{2419E9DF-2DD3-3506-BE3B-E485BF80EDAC}"/>
                 </a:ext>
               </a:extLst>
             </p:cNvPr>
@@ -22559,7 +22472,7 @@
             <p:cNvPr id="13" name="TextBox 12">
               <a:extLst>
                 <a:ext uri="{FF2B5EF4-FFF2-40B4-BE49-F238E27FC236}">
-                  <ns2:creationId id="{93B24559-A789-4B90-E180-1E0D72CE317E}"/>
+                  <a16:creationId xmlns:a16="http://schemas.microsoft.com/office/drawing/2014/main" id="{93B24559-A789-4B90-E180-1E0D72CE317E}"/>
                 </a:ext>
               </a:extLst>
             </p:cNvPr>
@@ -22621,7 +22534,7 @@
           <p:cNvPr id="23" name="Oval 22">
             <a:extLst>
               <a:ext uri="{FF2B5EF4-FFF2-40B4-BE49-F238E27FC236}">
-                <ns2:creationId id="{61A13369-24B9-E21B-05B9-329B5FF74DB7}"/>
+                <a16:creationId xmlns:a16="http://schemas.microsoft.com/office/drawing/2014/main" id="{61A13369-24B9-E21B-05B9-329B5FF74DB7}"/>
               </a:ext>
             </a:extLst>
           </p:cNvPr>
@@ -22705,7 +22618,7 @@
           <p:cNvPr id="27" name="Oval 26">
             <a:extLst>
               <a:ext uri="{FF2B5EF4-FFF2-40B4-BE49-F238E27FC236}">
-                <ns2:creationId id="{F2B3E963-4F4B-8173-AE7C-E7942A9E266B}"/>
+                <a16:creationId xmlns:a16="http://schemas.microsoft.com/office/drawing/2014/main" id="{F2B3E963-4F4B-8173-AE7C-E7942A9E266B}"/>
               </a:ext>
             </a:extLst>
           </p:cNvPr>
@@ -22789,7 +22702,7 @@
           <p:cNvPr id="28" name="Oval 27">
             <a:extLst>
               <a:ext uri="{FF2B5EF4-FFF2-40B4-BE49-F238E27FC236}">
-                <ns2:creationId id="{9ADB633C-4072-1C73-DADA-398777D0A7CD}"/>
+                <a16:creationId xmlns:a16="http://schemas.microsoft.com/office/drawing/2014/main" id="{9ADB633C-4072-1C73-DADA-398777D0A7CD}"/>
               </a:ext>
             </a:extLst>
           </p:cNvPr>
@@ -22873,7 +22786,7 @@
           <p:cNvPr id="29" name="Oval 28">
             <a:extLst>
               <a:ext uri="{FF2B5EF4-FFF2-40B4-BE49-F238E27FC236}">
-                <ns2:creationId id="{F82B7B38-EA39-2CF9-201C-54B73DBBD4EA}"/>
+                <a16:creationId xmlns:a16="http://schemas.microsoft.com/office/drawing/2014/main" id="{F82B7B38-EA39-2CF9-201C-54B73DBBD4EA}"/>
               </a:ext>
             </a:extLst>
           </p:cNvPr>
@@ -22957,7 +22870,7 @@
           <p:cNvPr id="30" name="Oval 29">
             <a:extLst>
               <a:ext uri="{FF2B5EF4-FFF2-40B4-BE49-F238E27FC236}">
-                <ns2:creationId id="{686BDBE9-0138-6C28-BFAF-00EA8DCD973D}"/>
+                <a16:creationId xmlns:a16="http://schemas.microsoft.com/office/drawing/2014/main" id="{686BDBE9-0138-6C28-BFAF-00EA8DCD973D}"/>
               </a:ext>
             </a:extLst>
           </p:cNvPr>
@@ -23041,7 +22954,7 @@
           <p:cNvPr id="4" name="Straight Connector 3">
             <a:extLst>
               <a:ext uri="{FF2B5EF4-FFF2-40B4-BE49-F238E27FC236}">
-                <ns2:creationId id="{D0AC705D-BF37-4542-CD33-8265C0D398AC}"/>
+                <a16:creationId xmlns:a16="http://schemas.microsoft.com/office/drawing/2014/main" id="{D0AC705D-BF37-4542-CD33-8265C0D398AC}"/>
               </a:ext>
             </a:extLst>
           </p:cNvPr>
@@ -23084,7 +22997,7 @@
           <p:cNvPr id="18" name="Oval 17">
             <a:extLst>
               <a:ext uri="{FF2B5EF4-FFF2-40B4-BE49-F238E27FC236}">
-                <ns2:creationId id="{5CEE4D57-2D48-3E46-8211-494134A5C094}"/>
+                <a16:creationId xmlns:a16="http://schemas.microsoft.com/office/drawing/2014/main" id="{5CEE4D57-2D48-3E46-8211-494134A5C094}"/>
               </a:ext>
             </a:extLst>
           </p:cNvPr>
@@ -23167,7 +23080,7 @@
           <p:cNvPr id="11" name="Group 10">
             <a:extLst>
               <a:ext uri="{FF2B5EF4-FFF2-40B4-BE49-F238E27FC236}">
-                <ns2:creationId id="{D24EBF2A-B7A3-E7EB-6313-BB50CF2D3A83}"/>
+                <a16:creationId xmlns:a16="http://schemas.microsoft.com/office/drawing/2014/main" id="{D24EBF2A-B7A3-E7EB-6313-BB50CF2D3A83}"/>
               </a:ext>
             </a:extLst>
           </p:cNvPr>
@@ -23187,7 +23100,7 @@
             <p:cNvPr id="24" name="Straight Arrow Connector 23">
               <a:extLst>
                 <a:ext uri="{FF2B5EF4-FFF2-40B4-BE49-F238E27FC236}">
-                  <ns2:creationId id="{9C627068-AD0C-E2DC-60AF-7257BB046983}"/>
+                  <a16:creationId xmlns:a16="http://schemas.microsoft.com/office/drawing/2014/main" id="{9C627068-AD0C-E2DC-60AF-7257BB046983}"/>
                 </a:ext>
               </a:extLst>
             </p:cNvPr>
@@ -23232,7 +23145,7 @@
             <p:cNvPr id="10" name="TextBox 9">
               <a:extLst>
                 <a:ext uri="{FF2B5EF4-FFF2-40B4-BE49-F238E27FC236}">
-                  <ns2:creationId id="{D692B828-D19F-3AA3-05F9-AF2DE3D5C9FC}"/>
+                  <a16:creationId xmlns:a16="http://schemas.microsoft.com/office/drawing/2014/main" id="{D692B828-D19F-3AA3-05F9-AF2DE3D5C9FC}"/>
                 </a:ext>
               </a:extLst>
             </p:cNvPr>
@@ -23315,7 +23228,7 @@
           <p:cNvPr id="31" name="TextBox 30">
             <a:extLst>
               <a:ext uri="{FF2B5EF4-FFF2-40B4-BE49-F238E27FC236}">
-                <ns2:creationId id="{12D2397C-9CE3-3A8A-1558-56A5A0738C36}"/>
+                <a16:creationId xmlns:a16="http://schemas.microsoft.com/office/drawing/2014/main" id="{12D2397C-9CE3-3A8A-1558-56A5A0738C36}"/>
               </a:ext>
             </a:extLst>
           </p:cNvPr>
@@ -23417,7 +23330,7 @@
           <p:cNvPr id="36" name="TextBox 35">
             <a:extLst>
               <a:ext uri="{FF2B5EF4-FFF2-40B4-BE49-F238E27FC236}">
-                <ns2:creationId id="{2FFE4CF6-AAAC-06EA-8AB8-998E05647728}"/>
+                <a16:creationId xmlns:a16="http://schemas.microsoft.com/office/drawing/2014/main" id="{2FFE4CF6-AAAC-06EA-8AB8-998E05647728}"/>
               </a:ext>
             </a:extLst>
           </p:cNvPr>
@@ -23499,7 +23412,7 @@
           <p:cNvPr id="22" name="Straight Connector 21">
             <a:extLst>
               <a:ext uri="{FF2B5EF4-FFF2-40B4-BE49-F238E27FC236}">
-                <ns2:creationId id="{2F9013F0-6C27-F3C3-FDE3-FF0AA12CA620}"/>
+                <a16:creationId xmlns:a16="http://schemas.microsoft.com/office/drawing/2014/main" id="{2F9013F0-6C27-F3C3-FDE3-FF0AA12CA620}"/>
               </a:ext>
             </a:extLst>
           </p:cNvPr>
@@ -23542,7 +23455,7 @@
           <p:cNvPr id="15" name="Straight Arrow Connector 14">
             <a:extLst>
               <a:ext uri="{FF2B5EF4-FFF2-40B4-BE49-F238E27FC236}">
-                <ns2:creationId id="{59CD0CED-2A06-8AB7-8A69-21FAC5EC4A4F}"/>
+                <a16:creationId xmlns:a16="http://schemas.microsoft.com/office/drawing/2014/main" id="{59CD0CED-2A06-8AB7-8A69-21FAC5EC4A4F}"/>
               </a:ext>
             </a:extLst>
           </p:cNvPr>
@@ -23588,7 +23501,7 @@
           <p:cNvPr id="32" name="Straight Arrow Connector 31">
             <a:extLst>
               <a:ext uri="{FF2B5EF4-FFF2-40B4-BE49-F238E27FC236}">
-                <ns2:creationId id="{BCC5A9F1-9339-0CF6-A18E-4B7BE46AB529}"/>
+                <a16:creationId xmlns:a16="http://schemas.microsoft.com/office/drawing/2014/main" id="{BCC5A9F1-9339-0CF6-A18E-4B7BE46AB529}"/>
               </a:ext>
             </a:extLst>
           </p:cNvPr>
@@ -23634,7 +23547,7 @@
           <p:cNvPr id="35" name="Straight Arrow Connector 34">
             <a:extLst>
               <a:ext uri="{FF2B5EF4-FFF2-40B4-BE49-F238E27FC236}">
-                <ns2:creationId id="{8E4A4C4F-C09E-5B89-67FD-259D584337FE}"/>
+                <a16:creationId xmlns:a16="http://schemas.microsoft.com/office/drawing/2014/main" id="{8E4A4C4F-C09E-5B89-67FD-259D584337FE}"/>
               </a:ext>
             </a:extLst>
           </p:cNvPr>
@@ -23680,7 +23593,7 @@
           <p:cNvPr id="39" name="Straight Arrow Connector 38">
             <a:extLst>
               <a:ext uri="{FF2B5EF4-FFF2-40B4-BE49-F238E27FC236}">
-                <ns2:creationId id="{D4742DE8-0901-2B65-C6B7-3A1BE131F28D}"/>
+                <a16:creationId xmlns:a16="http://schemas.microsoft.com/office/drawing/2014/main" id="{D4742DE8-0901-2B65-C6B7-3A1BE131F28D}"/>
               </a:ext>
             </a:extLst>
           </p:cNvPr>
@@ -23726,7 +23639,7 @@
           <p:cNvPr id="47" name="Straight Arrow Connector 46">
             <a:extLst>
               <a:ext uri="{FF2B5EF4-FFF2-40B4-BE49-F238E27FC236}">
-                <ns2:creationId id="{1D9F791F-D5A7-688F-041A-11963370907B}"/>
+                <a16:creationId xmlns:a16="http://schemas.microsoft.com/office/drawing/2014/main" id="{1D9F791F-D5A7-688F-041A-11963370907B}"/>
               </a:ext>
             </a:extLst>
           </p:cNvPr>
@@ -23772,7 +23685,7 @@
           <p:cNvPr id="9" name="TextBox 8">
             <a:extLst>
               <a:ext uri="{FF2B5EF4-FFF2-40B4-BE49-F238E27FC236}">
-                <ns2:creationId id="{349C01A4-7FD7-1FD3-430A-5950B62E2AB0}"/>
+                <a16:creationId xmlns:a16="http://schemas.microsoft.com/office/drawing/2014/main" id="{349C01A4-7FD7-1FD3-430A-5950B62E2AB0}"/>
               </a:ext>
             </a:extLst>
           </p:cNvPr>
@@ -23854,7 +23767,7 @@
           <p:cNvPr id="14" name="Rectangle 13">
             <a:extLst>
               <a:ext uri="{FF2B5EF4-FFF2-40B4-BE49-F238E27FC236}">
-                <ns2:creationId id="{55CC6FCD-E4CC-D5E1-7E8F-917869655222}"/>
+                <a16:creationId xmlns:a16="http://schemas.microsoft.com/office/drawing/2014/main" id="{55CC6FCD-E4CC-D5E1-7E8F-917869655222}"/>
               </a:ext>
             </a:extLst>
           </p:cNvPr>
@@ -23923,7 +23836,7 @@
           <p:cNvPr id="16" name="TextBox 15">
             <a:extLst>
               <a:ext uri="{FF2B5EF4-FFF2-40B4-BE49-F238E27FC236}">
-                <ns2:creationId id="{165EF7AF-4C2A-3413-7653-A4678D7A12B0}"/>
+                <a16:creationId xmlns:a16="http://schemas.microsoft.com/office/drawing/2014/main" id="{165EF7AF-4C2A-3413-7653-A4678D7A12B0}"/>
               </a:ext>
             </a:extLst>
           </p:cNvPr>
@@ -23988,7 +23901,7 @@
           <p:cNvPr id="17" name="TextBox 16">
             <a:extLst>
               <a:ext uri="{FF2B5EF4-FFF2-40B4-BE49-F238E27FC236}">
-                <ns2:creationId id="{8221C174-AABC-987E-E052-795F476EAF22}"/>
+                <a16:creationId xmlns:a16="http://schemas.microsoft.com/office/drawing/2014/main" id="{8221C174-AABC-987E-E052-795F476EAF22}"/>
               </a:ext>
             </a:extLst>
           </p:cNvPr>
@@ -24079,7 +23992,41 @@
                 <a:ea typeface="Helvetica Neue" panose="02000503000000020004" pitchFamily="2" charset="0"/>
                 <a:cs typeface="Helvetica Neue" panose="02000503000000020004" pitchFamily="2" charset="0"/>
               </a:rPr>
-              <a:t>The wake comes from polarity and spreads outward; its density falls like 1/r^2.</a:t>
+              <a:t>The wake comes from polarity and spreads outward; its density falls like 1/r</a:t>
+            </a:r>
+            <a:r>
+              <a:rPr kumimoji="0" lang="en-US" sz="1600" b="0" i="0" u="none" strike="noStrike" kern="1200" cap="none" spc="0" normalizeH="0" baseline="30000" noProof="0" dirty="0">
+                <a:ln>
+                  <a:noFill/>
+                </a:ln>
+                <a:solidFill>
+                  <a:prstClr val="white"/>
+                </a:solidFill>
+                <a:effectLst/>
+                <a:uLnTx/>
+                <a:uFillTx/>
+                <a:latin typeface="Helvetica Neue" panose="02000503000000020004" pitchFamily="2" charset="0"/>
+                <a:ea typeface="Helvetica Neue" panose="02000503000000020004" pitchFamily="2" charset="0"/>
+                <a:cs typeface="Helvetica Neue" panose="02000503000000020004" pitchFamily="2" charset="0"/>
+              </a:rPr>
+              <a:t>2</a:t>
+            </a:r>
+            <a:r>
+              <a:rPr kumimoji="0" lang="en-US" sz="1600" b="0" i="0" u="none" strike="noStrike" kern="1200" cap="none" spc="0" normalizeH="0" baseline="0" noProof="0" dirty="0">
+                <a:ln>
+                  <a:noFill/>
+                </a:ln>
+                <a:solidFill>
+                  <a:prstClr val="white"/>
+                </a:solidFill>
+                <a:effectLst/>
+                <a:uLnTx/>
+                <a:uFillTx/>
+                <a:latin typeface="Helvetica Neue" panose="02000503000000020004" pitchFamily="2" charset="0"/>
+                <a:ea typeface="Helvetica Neue" panose="02000503000000020004" pitchFamily="2" charset="0"/>
+                <a:cs typeface="Helvetica Neue" panose="02000503000000020004" pitchFamily="2" charset="0"/>
+              </a:rPr>
+              <a:t>.</a:t>
             </a:r>
           </a:p>
           <a:p>
@@ -24123,7 +24070,7 @@
     </p:spTree>
     <p:extLst>
       <p:ext uri="{BB962C8B-B14F-4D97-AF65-F5344CB8AC3E}">
-        <p14:creationId val="1156335298"/>
+        <p14:creationId xmlns:p14="http://schemas.microsoft.com/office/powerpoint/2010/main" val="1156335298"/>
       </p:ext>
     </p:extLst>
   </p:cSld>
@@ -24134,7 +24081,7 @@
 </file>
 
 <file path=ppt/slides/slide5.xml><?xml version="1.0" encoding="utf-8"?>
-<p:sld xmlns:a="http://schemas.openxmlformats.org/drawingml/2006/main" xmlns:ns2="http://schemas.microsoft.com/office/drawing/2014/main" xmlns:p="http://schemas.openxmlformats.org/presentationml/2006/main" xmlns:p14="http://schemas.microsoft.com/office/powerpoint/2010/main">
+<p:sld xmlns:a="http://schemas.openxmlformats.org/drawingml/2006/main" xmlns:r="http://schemas.openxmlformats.org/officeDocument/2006/relationships" xmlns:p="http://schemas.openxmlformats.org/presentationml/2006/main">
   <p:cSld>
     <p:bg>
       <p:bgPr>
@@ -24163,7 +24110,7 @@
           <p:cNvPr id="5" name="Footer Placeholder 3">
             <a:extLst>
               <a:ext uri="{FF2B5EF4-FFF2-40B4-BE49-F238E27FC236}">
-                <ns2:creationId id="{668F77D6-DFDA-5A46-8DF1-47F6A167C2B1}"/>
+                <a16:creationId xmlns:a16="http://schemas.microsoft.com/office/drawing/2014/main" id="{668F77D6-DFDA-5A46-8DF1-47F6A167C2B1}"/>
               </a:ext>
             </a:extLst>
           </p:cNvPr>
@@ -24325,7 +24272,7 @@
           <p:cNvPr id="3" name="Straight Arrow Connector 2">
             <a:extLst>
               <a:ext uri="{FF2B5EF4-FFF2-40B4-BE49-F238E27FC236}">
-                <ns2:creationId id="{2EF0199F-22F4-BA42-9B75-8A8183BCDA9B}"/>
+                <a16:creationId xmlns:a16="http://schemas.microsoft.com/office/drawing/2014/main" id="{2EF0199F-22F4-BA42-9B75-8A8183BCDA9B}"/>
               </a:ext>
             </a:extLst>
           </p:cNvPr>
@@ -24369,7 +24316,7 @@
           <p:cNvPr id="8" name="Straight Arrow Connector 7">
             <a:extLst>
               <a:ext uri="{FF2B5EF4-FFF2-40B4-BE49-F238E27FC236}">
-                <ns2:creationId id="{49AB5343-55D0-6041-8627-E08A73F83930}"/>
+                <a16:creationId xmlns:a16="http://schemas.microsoft.com/office/drawing/2014/main" id="{49AB5343-55D0-6041-8627-E08A73F83930}"/>
               </a:ext>
             </a:extLst>
           </p:cNvPr>
@@ -24413,7 +24360,7 @@
           <p:cNvPr id="12" name="TextBox 11">
             <a:extLst>
               <a:ext uri="{FF2B5EF4-FFF2-40B4-BE49-F238E27FC236}">
-                <ns2:creationId id="{BF8D86A2-D083-024A-BC90-6BD938C23243}"/>
+                <a16:creationId xmlns:a16="http://schemas.microsoft.com/office/drawing/2014/main" id="{BF8D86A2-D083-024A-BC90-6BD938C23243}"/>
               </a:ext>
             </a:extLst>
           </p:cNvPr>
@@ -24478,7 +24425,7 @@
           <p:cNvPr id="13" name="TextBox 12">
             <a:extLst>
               <a:ext uri="{FF2B5EF4-FFF2-40B4-BE49-F238E27FC236}">
-                <ns2:creationId id="{2C3F4604-6C2F-0E4E-9DD3-4F5C89FF51AB}"/>
+                <a16:creationId xmlns:a16="http://schemas.microsoft.com/office/drawing/2014/main" id="{2C3F4604-6C2F-0E4E-9DD3-4F5C89FF51AB}"/>
               </a:ext>
             </a:extLst>
           </p:cNvPr>
@@ -24539,7 +24486,7 @@
           <p:cNvPr id="23" name="Oval 22">
             <a:extLst>
               <a:ext uri="{FF2B5EF4-FFF2-40B4-BE49-F238E27FC236}">
-                <ns2:creationId id="{0112617B-A1D5-1E41-BF92-E67D4E046E39}"/>
+                <a16:creationId xmlns:a16="http://schemas.microsoft.com/office/drawing/2014/main" id="{0112617B-A1D5-1E41-BF92-E67D4E046E39}"/>
               </a:ext>
             </a:extLst>
           </p:cNvPr>
@@ -24623,7 +24570,7 @@
           <p:cNvPr id="27" name="Oval 26">
             <a:extLst>
               <a:ext uri="{FF2B5EF4-FFF2-40B4-BE49-F238E27FC236}">
-                <ns2:creationId id="{6EF0F7DA-5E70-8348-A200-F59A10FF7C55}"/>
+                <a16:creationId xmlns:a16="http://schemas.microsoft.com/office/drawing/2014/main" id="{6EF0F7DA-5E70-8348-A200-F59A10FF7C55}"/>
               </a:ext>
             </a:extLst>
           </p:cNvPr>
@@ -24707,7 +24654,7 @@
           <p:cNvPr id="28" name="Oval 27">
             <a:extLst>
               <a:ext uri="{FF2B5EF4-FFF2-40B4-BE49-F238E27FC236}">
-                <ns2:creationId id="{552F58D0-F613-674A-B294-C894E5FB1683}"/>
+                <a16:creationId xmlns:a16="http://schemas.microsoft.com/office/drawing/2014/main" id="{552F58D0-F613-674A-B294-C894E5FB1683}"/>
               </a:ext>
             </a:extLst>
           </p:cNvPr>
@@ -24791,7 +24738,7 @@
           <p:cNvPr id="29" name="Oval 28">
             <a:extLst>
               <a:ext uri="{FF2B5EF4-FFF2-40B4-BE49-F238E27FC236}">
-                <ns2:creationId id="{9CA7A721-D3BD-744E-9306-85BBED5F74BC}"/>
+                <a16:creationId xmlns:a16="http://schemas.microsoft.com/office/drawing/2014/main" id="{9CA7A721-D3BD-744E-9306-85BBED5F74BC}"/>
               </a:ext>
             </a:extLst>
           </p:cNvPr>
@@ -24875,7 +24822,7 @@
           <p:cNvPr id="30" name="Oval 29">
             <a:extLst>
               <a:ext uri="{FF2B5EF4-FFF2-40B4-BE49-F238E27FC236}">
-                <ns2:creationId id="{F97F1A02-C0C7-3C45-9790-847C152D159A}"/>
+                <a16:creationId xmlns:a16="http://schemas.microsoft.com/office/drawing/2014/main" id="{F97F1A02-C0C7-3C45-9790-847C152D159A}"/>
               </a:ext>
             </a:extLst>
           </p:cNvPr>
@@ -24959,7 +24906,7 @@
           <p:cNvPr id="4" name="Straight Connector 3">
             <a:extLst>
               <a:ext uri="{FF2B5EF4-FFF2-40B4-BE49-F238E27FC236}">
-                <ns2:creationId id="{9890CC23-4ADC-D744-AF2D-1C8A936F07FC}"/>
+                <a16:creationId xmlns:a16="http://schemas.microsoft.com/office/drawing/2014/main" id="{9890CC23-4ADC-D744-AF2D-1C8A936F07FC}"/>
               </a:ext>
             </a:extLst>
           </p:cNvPr>
@@ -25002,7 +24949,7 @@
           <p:cNvPr id="18" name="Oval 17">
             <a:extLst>
               <a:ext uri="{FF2B5EF4-FFF2-40B4-BE49-F238E27FC236}">
-                <ns2:creationId id="{BE4CDC90-4B2E-BE41-BB9D-A84675F3A2FE}"/>
+                <a16:creationId xmlns:a16="http://schemas.microsoft.com/office/drawing/2014/main" id="{BE4CDC90-4B2E-BE41-BB9D-A84675F3A2FE}"/>
               </a:ext>
             </a:extLst>
           </p:cNvPr>
@@ -25085,7 +25032,7 @@
           <p:cNvPr id="11" name="Group 10">
             <a:extLst>
               <a:ext uri="{FF2B5EF4-FFF2-40B4-BE49-F238E27FC236}">
-                <ns2:creationId id="{33483591-0E05-544C-B822-43CF81B12E63}"/>
+                <a16:creationId xmlns:a16="http://schemas.microsoft.com/office/drawing/2014/main" id="{33483591-0E05-544C-B822-43CF81B12E63}"/>
               </a:ext>
             </a:extLst>
           </p:cNvPr>
@@ -25105,7 +25052,7 @@
             <p:cNvPr id="24" name="Straight Arrow Connector 23">
               <a:extLst>
                 <a:ext uri="{FF2B5EF4-FFF2-40B4-BE49-F238E27FC236}">
-                  <ns2:creationId id="{7BCF22C9-C9AE-324D-B157-A9536FCAF3B6}"/>
+                  <a16:creationId xmlns:a16="http://schemas.microsoft.com/office/drawing/2014/main" id="{7BCF22C9-C9AE-324D-B157-A9536FCAF3B6}"/>
                 </a:ext>
               </a:extLst>
             </p:cNvPr>
@@ -25150,7 +25097,7 @@
             <p:cNvPr id="10" name="TextBox 9">
               <a:extLst>
                 <a:ext uri="{FF2B5EF4-FFF2-40B4-BE49-F238E27FC236}">
-                  <ns2:creationId id="{01A59953-657F-C641-8F36-E48E8EDB0DF1}"/>
+                  <a16:creationId xmlns:a16="http://schemas.microsoft.com/office/drawing/2014/main" id="{01A59953-657F-C641-8F36-E48E8EDB0DF1}"/>
                 </a:ext>
               </a:extLst>
             </p:cNvPr>
@@ -25233,7 +25180,7 @@
           <p:cNvPr id="31" name="TextBox 30">
             <a:extLst>
               <a:ext uri="{FF2B5EF4-FFF2-40B4-BE49-F238E27FC236}">
-                <ns2:creationId id="{713B9ACE-B673-2D48-BEF2-2A133C31B527}"/>
+                <a16:creationId xmlns:a16="http://schemas.microsoft.com/office/drawing/2014/main" id="{713B9ACE-B673-2D48-BEF2-2A133C31B527}"/>
               </a:ext>
             </a:extLst>
           </p:cNvPr>
@@ -25335,7 +25282,7 @@
           <p:cNvPr id="36" name="TextBox 35">
             <a:extLst>
               <a:ext uri="{FF2B5EF4-FFF2-40B4-BE49-F238E27FC236}">
-                <ns2:creationId id="{3A81A480-EF64-094E-825A-8592DAA4C672}"/>
+                <a16:creationId xmlns:a16="http://schemas.microsoft.com/office/drawing/2014/main" id="{3A81A480-EF64-094E-825A-8592DAA4C672}"/>
               </a:ext>
             </a:extLst>
           </p:cNvPr>
@@ -25417,7 +25364,7 @@
           <p:cNvPr id="7" name="Rectangle 6">
             <a:extLst>
               <a:ext uri="{FF2B5EF4-FFF2-40B4-BE49-F238E27FC236}">
-                <ns2:creationId id="{BED67AD4-F230-35A0-28FB-DE984573A446}"/>
+                <a16:creationId xmlns:a16="http://schemas.microsoft.com/office/drawing/2014/main" id="{BED67AD4-F230-35A0-28FB-DE984573A446}"/>
               </a:ext>
             </a:extLst>
           </p:cNvPr>
@@ -25481,7 +25428,7 @@
           <p:cNvPr id="15" name="Straight Arrow Connector 14">
             <a:extLst>
               <a:ext uri="{FF2B5EF4-FFF2-40B4-BE49-F238E27FC236}">
-                <ns2:creationId id="{05289ED1-4679-6543-A669-B23443FD0CD8}"/>
+                <a16:creationId xmlns:a16="http://schemas.microsoft.com/office/drawing/2014/main" id="{05289ED1-4679-6543-A669-B23443FD0CD8}"/>
               </a:ext>
             </a:extLst>
           </p:cNvPr>
@@ -25527,7 +25474,7 @@
           <p:cNvPr id="32" name="Straight Arrow Connector 31">
             <a:extLst>
               <a:ext uri="{FF2B5EF4-FFF2-40B4-BE49-F238E27FC236}">
-                <ns2:creationId id="{A9F8BF55-7F79-854D-84AD-A730BF43B39C}"/>
+                <a16:creationId xmlns:a16="http://schemas.microsoft.com/office/drawing/2014/main" id="{A9F8BF55-7F79-854D-84AD-A730BF43B39C}"/>
               </a:ext>
             </a:extLst>
           </p:cNvPr>
@@ -25573,7 +25520,7 @@
           <p:cNvPr id="35" name="Straight Arrow Connector 34">
             <a:extLst>
               <a:ext uri="{FF2B5EF4-FFF2-40B4-BE49-F238E27FC236}">
-                <ns2:creationId id="{0415B495-590C-0049-92E6-8AE7464CC78A}"/>
+                <a16:creationId xmlns:a16="http://schemas.microsoft.com/office/drawing/2014/main" id="{0415B495-590C-0049-92E6-8AE7464CC78A}"/>
               </a:ext>
             </a:extLst>
           </p:cNvPr>
@@ -25619,7 +25566,7 @@
           <p:cNvPr id="39" name="Straight Arrow Connector 38">
             <a:extLst>
               <a:ext uri="{FF2B5EF4-FFF2-40B4-BE49-F238E27FC236}">
-                <ns2:creationId id="{E4879E96-726B-4F42-BD7C-09F8D0B14E9A}"/>
+                <a16:creationId xmlns:a16="http://schemas.microsoft.com/office/drawing/2014/main" id="{E4879E96-726B-4F42-BD7C-09F8D0B14E9A}"/>
               </a:ext>
             </a:extLst>
           </p:cNvPr>
@@ -25665,7 +25612,7 @@
           <p:cNvPr id="47" name="Straight Arrow Connector 46">
             <a:extLst>
               <a:ext uri="{FF2B5EF4-FFF2-40B4-BE49-F238E27FC236}">
-                <ns2:creationId id="{0F119609-4333-414A-B8E4-E2447D7E1C10}"/>
+                <a16:creationId xmlns:a16="http://schemas.microsoft.com/office/drawing/2014/main" id="{0F119609-4333-414A-B8E4-E2447D7E1C10}"/>
               </a:ext>
             </a:extLst>
           </p:cNvPr>
@@ -25711,7 +25658,7 @@
           <p:cNvPr id="9" name="TextBox 8">
             <a:extLst>
               <a:ext uri="{FF2B5EF4-FFF2-40B4-BE49-F238E27FC236}">
-                <ns2:creationId id="{F869BF73-0970-4AD4-4DCD-712A77055671}"/>
+                <a16:creationId xmlns:a16="http://schemas.microsoft.com/office/drawing/2014/main" id="{F869BF73-0970-4AD4-4DCD-712A77055671}"/>
               </a:ext>
             </a:extLst>
           </p:cNvPr>
@@ -25793,7 +25740,7 @@
           <p:cNvPr id="16" name="Oval 15">
             <a:extLst>
               <a:ext uri="{FF2B5EF4-FFF2-40B4-BE49-F238E27FC236}">
-                <ns2:creationId id="{47B844F6-2777-F09D-48E3-752AD4A1C08E}"/>
+                <a16:creationId xmlns:a16="http://schemas.microsoft.com/office/drawing/2014/main" id="{47B844F6-2777-F09D-48E3-752AD4A1C08E}"/>
               </a:ext>
             </a:extLst>
           </p:cNvPr>
@@ -25876,7 +25823,7 @@
           <p:cNvPr id="17" name="Straight Connector 16">
             <a:extLst>
               <a:ext uri="{FF2B5EF4-FFF2-40B4-BE49-F238E27FC236}">
-                <ns2:creationId id="{7AC80066-19A2-40E6-CB32-8D867099AEC0}"/>
+                <a16:creationId xmlns:a16="http://schemas.microsoft.com/office/drawing/2014/main" id="{7AC80066-19A2-40E6-CB32-8D867099AEC0}"/>
               </a:ext>
             </a:extLst>
           </p:cNvPr>
@@ -25921,7 +25868,7 @@
           <p:cNvPr id="33" name="Oval 32">
             <a:extLst>
               <a:ext uri="{FF2B5EF4-FFF2-40B4-BE49-F238E27FC236}">
-                <ns2:creationId id="{E44B2491-CAC8-31F5-74F1-2F5E82758D29}"/>
+                <a16:creationId xmlns:a16="http://schemas.microsoft.com/office/drawing/2014/main" id="{E44B2491-CAC8-31F5-74F1-2F5E82758D29}"/>
               </a:ext>
             </a:extLst>
           </p:cNvPr>
@@ -26004,7 +25951,7 @@
           <p:cNvPr id="34" name="Straight Connector 33">
             <a:extLst>
               <a:ext uri="{FF2B5EF4-FFF2-40B4-BE49-F238E27FC236}">
-                <ns2:creationId id="{39925079-57E3-C749-66BE-49320C7E84EA}"/>
+                <a16:creationId xmlns:a16="http://schemas.microsoft.com/office/drawing/2014/main" id="{39925079-57E3-C749-66BE-49320C7E84EA}"/>
               </a:ext>
             </a:extLst>
           </p:cNvPr>
@@ -26047,7 +25994,7 @@
     </p:spTree>
     <p:extLst>
       <p:ext uri="{BB962C8B-B14F-4D97-AF65-F5344CB8AC3E}">
-        <p14:creationId val="155428920"/>
+        <p14:creationId xmlns:p14="http://schemas.microsoft.com/office/powerpoint/2010/main" val="155428920"/>
       </p:ext>
     </p:extLst>
   </p:cSld>
@@ -26058,7 +26005,7 @@
 </file>
 
 <file path=ppt/slides/slide6.xml><?xml version="1.0" encoding="utf-8"?>
-<p:sld xmlns:a="http://schemas.openxmlformats.org/drawingml/2006/main" xmlns:ns2="http://schemas.microsoft.com/office/drawing/2014/main" xmlns:p="http://schemas.openxmlformats.org/presentationml/2006/main" xmlns:p14="http://schemas.microsoft.com/office/powerpoint/2010/main">
+<p:sld xmlns:a="http://schemas.openxmlformats.org/drawingml/2006/main" xmlns:r="http://schemas.openxmlformats.org/officeDocument/2006/relationships" xmlns:p="http://schemas.openxmlformats.org/presentationml/2006/main">
   <p:cSld>
     <p:bg>
       <p:bgPr>
@@ -26087,7 +26034,7 @@
           <p:cNvPr id="5" name="Footer Placeholder 3">
             <a:extLst>
               <a:ext uri="{FF2B5EF4-FFF2-40B4-BE49-F238E27FC236}">
-                <ns2:creationId id="{668F77D6-DFDA-5A46-8DF1-47F6A167C2B1}"/>
+                <a16:creationId xmlns:a16="http://schemas.microsoft.com/office/drawing/2014/main" id="{668F77D6-DFDA-5A46-8DF1-47F6A167C2B1}"/>
               </a:ext>
             </a:extLst>
           </p:cNvPr>
@@ -26249,7 +26196,7 @@
           <p:cNvPr id="26" name="TextBox 25">
             <a:extLst>
               <a:ext uri="{FF2B5EF4-FFF2-40B4-BE49-F238E27FC236}">
-                <ns2:creationId id="{FA5E13D2-A15E-F54D-9507-CAD768919361}"/>
+                <a16:creationId xmlns:a16="http://schemas.microsoft.com/office/drawing/2014/main" id="{FA5E13D2-A15E-F54D-9507-CAD768919361}"/>
               </a:ext>
             </a:extLst>
           </p:cNvPr>
@@ -26258,7 +26205,7 @@
         </p:nvSpPr>
         <p:spPr>
           <a:xfrm>
-            <a:off x="1788936" y="4683408"/>
+            <a:off x="2767504" y="4701784"/>
             <a:ext cx="9598423" cy="1477328"/>
           </a:xfrm>
           <a:prstGeom prst="rect">
@@ -26458,7 +26405,7 @@
           <p:cNvPr id="23" name="Oval 22">
             <a:extLst>
               <a:ext uri="{FF2B5EF4-FFF2-40B4-BE49-F238E27FC236}">
-                <ns2:creationId id="{0112617B-A1D5-1E41-BF92-E67D4E046E39}"/>
+                <a16:creationId xmlns:a16="http://schemas.microsoft.com/office/drawing/2014/main" id="{0112617B-A1D5-1E41-BF92-E67D4E046E39}"/>
               </a:ext>
             </a:extLst>
           </p:cNvPr>
@@ -26542,7 +26489,7 @@
           <p:cNvPr id="27" name="Oval 26">
             <a:extLst>
               <a:ext uri="{FF2B5EF4-FFF2-40B4-BE49-F238E27FC236}">
-                <ns2:creationId id="{6EF0F7DA-5E70-8348-A200-F59A10FF7C55}"/>
+                <a16:creationId xmlns:a16="http://schemas.microsoft.com/office/drawing/2014/main" id="{6EF0F7DA-5E70-8348-A200-F59A10FF7C55}"/>
               </a:ext>
             </a:extLst>
           </p:cNvPr>
@@ -26626,7 +26573,7 @@
           <p:cNvPr id="28" name="Oval 27">
             <a:extLst>
               <a:ext uri="{FF2B5EF4-FFF2-40B4-BE49-F238E27FC236}">
-                <ns2:creationId id="{552F58D0-F613-674A-B294-C894E5FB1683}"/>
+                <a16:creationId xmlns:a16="http://schemas.microsoft.com/office/drawing/2014/main" id="{552F58D0-F613-674A-B294-C894E5FB1683}"/>
               </a:ext>
             </a:extLst>
           </p:cNvPr>
@@ -26710,7 +26657,7 @@
           <p:cNvPr id="29" name="Oval 28">
             <a:extLst>
               <a:ext uri="{FF2B5EF4-FFF2-40B4-BE49-F238E27FC236}">
-                <ns2:creationId id="{9CA7A721-D3BD-744E-9306-85BBED5F74BC}"/>
+                <a16:creationId xmlns:a16="http://schemas.microsoft.com/office/drawing/2014/main" id="{9CA7A721-D3BD-744E-9306-85BBED5F74BC}"/>
               </a:ext>
             </a:extLst>
           </p:cNvPr>
@@ -26794,7 +26741,7 @@
           <p:cNvPr id="30" name="Oval 29">
             <a:extLst>
               <a:ext uri="{FF2B5EF4-FFF2-40B4-BE49-F238E27FC236}">
-                <ns2:creationId id="{F97F1A02-C0C7-3C45-9790-847C152D159A}"/>
+                <a16:creationId xmlns:a16="http://schemas.microsoft.com/office/drawing/2014/main" id="{F97F1A02-C0C7-3C45-9790-847C152D159A}"/>
               </a:ext>
             </a:extLst>
           </p:cNvPr>
@@ -26878,7 +26825,7 @@
           <p:cNvPr id="15" name="Straight Arrow Connector 14">
             <a:extLst>
               <a:ext uri="{FF2B5EF4-FFF2-40B4-BE49-F238E27FC236}">
-                <ns2:creationId id="{05289ED1-4679-6543-A669-B23443FD0CD8}"/>
+                <a16:creationId xmlns:a16="http://schemas.microsoft.com/office/drawing/2014/main" id="{05289ED1-4679-6543-A669-B23443FD0CD8}"/>
               </a:ext>
             </a:extLst>
           </p:cNvPr>
@@ -26923,7 +26870,7 @@
           <p:cNvPr id="32" name="Straight Arrow Connector 31">
             <a:extLst>
               <a:ext uri="{FF2B5EF4-FFF2-40B4-BE49-F238E27FC236}">
-                <ns2:creationId id="{A9F8BF55-7F79-854D-84AD-A730BF43B39C}"/>
+                <a16:creationId xmlns:a16="http://schemas.microsoft.com/office/drawing/2014/main" id="{A9F8BF55-7F79-854D-84AD-A730BF43B39C}"/>
               </a:ext>
             </a:extLst>
           </p:cNvPr>
@@ -26968,7 +26915,7 @@
           <p:cNvPr id="35" name="Straight Arrow Connector 34">
             <a:extLst>
               <a:ext uri="{FF2B5EF4-FFF2-40B4-BE49-F238E27FC236}">
-                <ns2:creationId id="{0415B495-590C-0049-92E6-8AE7464CC78A}"/>
+                <a16:creationId xmlns:a16="http://schemas.microsoft.com/office/drawing/2014/main" id="{0415B495-590C-0049-92E6-8AE7464CC78A}"/>
               </a:ext>
             </a:extLst>
           </p:cNvPr>
@@ -27013,7 +26960,7 @@
           <p:cNvPr id="39" name="Straight Arrow Connector 38">
             <a:extLst>
               <a:ext uri="{FF2B5EF4-FFF2-40B4-BE49-F238E27FC236}">
-                <ns2:creationId id="{E4879E96-726B-4F42-BD7C-09F8D0B14E9A}"/>
+                <a16:creationId xmlns:a16="http://schemas.microsoft.com/office/drawing/2014/main" id="{E4879E96-726B-4F42-BD7C-09F8D0B14E9A}"/>
               </a:ext>
             </a:extLst>
           </p:cNvPr>
@@ -27058,7 +27005,7 @@
           <p:cNvPr id="47" name="Straight Arrow Connector 46">
             <a:extLst>
               <a:ext uri="{FF2B5EF4-FFF2-40B4-BE49-F238E27FC236}">
-                <ns2:creationId id="{0F119609-4333-414A-B8E4-E2447D7E1C10}"/>
+                <a16:creationId xmlns:a16="http://schemas.microsoft.com/office/drawing/2014/main" id="{0F119609-4333-414A-B8E4-E2447D7E1C10}"/>
               </a:ext>
             </a:extLst>
           </p:cNvPr>
@@ -27103,7 +27050,7 @@
           <p:cNvPr id="4" name="Straight Connector 3">
             <a:extLst>
               <a:ext uri="{FF2B5EF4-FFF2-40B4-BE49-F238E27FC236}">
-                <ns2:creationId id="{9890CC23-4ADC-D744-AF2D-1C8A936F07FC}"/>
+                <a16:creationId xmlns:a16="http://schemas.microsoft.com/office/drawing/2014/main" id="{9890CC23-4ADC-D744-AF2D-1C8A936F07FC}"/>
               </a:ext>
             </a:extLst>
           </p:cNvPr>
@@ -27146,7 +27093,7 @@
           <p:cNvPr id="18" name="Oval 17">
             <a:extLst>
               <a:ext uri="{FF2B5EF4-FFF2-40B4-BE49-F238E27FC236}">
-                <ns2:creationId id="{BE4CDC90-4B2E-BE41-BB9D-A84675F3A2FE}"/>
+                <a16:creationId xmlns:a16="http://schemas.microsoft.com/office/drawing/2014/main" id="{BE4CDC90-4B2E-BE41-BB9D-A84675F3A2FE}"/>
               </a:ext>
             </a:extLst>
           </p:cNvPr>
@@ -27227,7 +27174,7 @@
           <p:cNvPr id="24" name="Straight Arrow Connector 23">
             <a:extLst>
               <a:ext uri="{FF2B5EF4-FFF2-40B4-BE49-F238E27FC236}">
-                <ns2:creationId id="{7BCF22C9-C9AE-324D-B157-A9536FCAF3B6}"/>
+                <a16:creationId xmlns:a16="http://schemas.microsoft.com/office/drawing/2014/main" id="{7BCF22C9-C9AE-324D-B157-A9536FCAF3B6}"/>
               </a:ext>
             </a:extLst>
           </p:cNvPr>
@@ -27272,7 +27219,7 @@
           <p:cNvPr id="10" name="TextBox 9">
             <a:extLst>
               <a:ext uri="{FF2B5EF4-FFF2-40B4-BE49-F238E27FC236}">
-                <ns2:creationId id="{01A59953-657F-C641-8F36-E48E8EDB0DF1}"/>
+                <a16:creationId xmlns:a16="http://schemas.microsoft.com/office/drawing/2014/main" id="{01A59953-657F-C641-8F36-E48E8EDB0DF1}"/>
               </a:ext>
             </a:extLst>
           </p:cNvPr>
@@ -27354,7 +27301,7 @@
           <p:cNvPr id="31" name="TextBox 30">
             <a:extLst>
               <a:ext uri="{FF2B5EF4-FFF2-40B4-BE49-F238E27FC236}">
-                <ns2:creationId id="{713B9ACE-B673-2D48-BEF2-2A133C31B527}"/>
+                <a16:creationId xmlns:a16="http://schemas.microsoft.com/office/drawing/2014/main" id="{713B9ACE-B673-2D48-BEF2-2A133C31B527}"/>
               </a:ext>
             </a:extLst>
           </p:cNvPr>
@@ -27436,7 +27383,7 @@
           <p:cNvPr id="36" name="TextBox 35">
             <a:extLst>
               <a:ext uri="{FF2B5EF4-FFF2-40B4-BE49-F238E27FC236}">
-                <ns2:creationId id="{3A81A480-EF64-094E-825A-8592DAA4C672}"/>
+                <a16:creationId xmlns:a16="http://schemas.microsoft.com/office/drawing/2014/main" id="{3A81A480-EF64-094E-825A-8592DAA4C672}"/>
               </a:ext>
             </a:extLst>
           </p:cNvPr>
@@ -27515,7 +27462,7 @@
           <p:cNvPr id="22" name="Straight Connector 21">
             <a:extLst>
               <a:ext uri="{FF2B5EF4-FFF2-40B4-BE49-F238E27FC236}">
-                <ns2:creationId id="{0C67DA45-6876-7942-9996-48CA0A1696FE}"/>
+                <a16:creationId xmlns:a16="http://schemas.microsoft.com/office/drawing/2014/main" id="{0C67DA45-6876-7942-9996-48CA0A1696FE}"/>
               </a:ext>
             </a:extLst>
           </p:cNvPr>
@@ -27558,7 +27505,7 @@
           <p:cNvPr id="7" name="TextBox 6">
             <a:extLst>
               <a:ext uri="{FF2B5EF4-FFF2-40B4-BE49-F238E27FC236}">
-                <ns2:creationId id="{FE7A6F30-9D38-0B1B-2076-531827EE9F50}"/>
+                <a16:creationId xmlns:a16="http://schemas.microsoft.com/office/drawing/2014/main" id="{FE7A6F30-9D38-0B1B-2076-531827EE9F50}"/>
               </a:ext>
             </a:extLst>
           </p:cNvPr>
@@ -27623,7 +27570,7 @@
           <p:cNvPr id="2" name="Group 1">
             <a:extLst>
               <a:ext uri="{FF2B5EF4-FFF2-40B4-BE49-F238E27FC236}">
-                <ns2:creationId id="{B98AD1F2-987D-71EB-A470-E4A41A905EDF}"/>
+                <a16:creationId xmlns:a16="http://schemas.microsoft.com/office/drawing/2014/main" id="{B98AD1F2-987D-71EB-A470-E4A41A905EDF}"/>
               </a:ext>
             </a:extLst>
           </p:cNvPr>
@@ -27643,7 +27590,7 @@
             <p:cNvPr id="6" name="Straight Arrow Connector 5">
               <a:extLst>
                 <a:ext uri="{FF2B5EF4-FFF2-40B4-BE49-F238E27FC236}">
-                  <ns2:creationId id="{836C1A95-A13A-0EE6-733B-6B2D96A15332}"/>
+                  <a16:creationId xmlns:a16="http://schemas.microsoft.com/office/drawing/2014/main" id="{836C1A95-A13A-0EE6-733B-6B2D96A15332}"/>
                 </a:ext>
               </a:extLst>
             </p:cNvPr>
@@ -27687,7 +27634,7 @@
             <p:cNvPr id="9" name="Straight Arrow Connector 8">
               <a:extLst>
                 <a:ext uri="{FF2B5EF4-FFF2-40B4-BE49-F238E27FC236}">
-                  <ns2:creationId id="{8AA9E325-051B-BE4A-55F2-7CFF0AFD3797}"/>
+                  <a16:creationId xmlns:a16="http://schemas.microsoft.com/office/drawing/2014/main" id="{8AA9E325-051B-BE4A-55F2-7CFF0AFD3797}"/>
                 </a:ext>
               </a:extLst>
             </p:cNvPr>
@@ -27731,7 +27678,7 @@
             <p:cNvPr id="11" name="TextBox 10">
               <a:extLst>
                 <a:ext uri="{FF2B5EF4-FFF2-40B4-BE49-F238E27FC236}">
-                  <ns2:creationId id="{DF6E9CDB-4ADF-E626-B2A4-DEA60E4A02F0}"/>
+                  <a16:creationId xmlns:a16="http://schemas.microsoft.com/office/drawing/2014/main" id="{DF6E9CDB-4ADF-E626-B2A4-DEA60E4A02F0}"/>
                 </a:ext>
               </a:extLst>
             </p:cNvPr>
@@ -27796,7 +27743,7 @@
             <p:cNvPr id="14" name="TextBox 13">
               <a:extLst>
                 <a:ext uri="{FF2B5EF4-FFF2-40B4-BE49-F238E27FC236}">
-                  <ns2:creationId id="{01E78D1F-323F-0A4F-4B30-4CE146D0EB63}"/>
+                  <a16:creationId xmlns:a16="http://schemas.microsoft.com/office/drawing/2014/main" id="{01E78D1F-323F-0A4F-4B30-4CE146D0EB63}"/>
                 </a:ext>
               </a:extLst>
             </p:cNvPr>
@@ -27856,7 +27803,7 @@
     </p:spTree>
     <p:extLst>
       <p:ext uri="{BB962C8B-B14F-4D97-AF65-F5344CB8AC3E}">
-        <p14:creationId val="4081239535"/>
+        <p14:creationId xmlns:p14="http://schemas.microsoft.com/office/powerpoint/2010/main" val="4081239535"/>
       </p:ext>
     </p:extLst>
   </p:cSld>
@@ -27867,7 +27814,7 @@
 </file>
 
 <file path=ppt/slides/slide7.xml><?xml version="1.0" encoding="utf-8"?>
-<p:sld xmlns:a="http://schemas.openxmlformats.org/drawingml/2006/main" xmlns:ns2="http://schemas.microsoft.com/office/drawing/2014/main" xmlns:p="http://schemas.openxmlformats.org/presentationml/2006/main" xmlns:p14="http://schemas.microsoft.com/office/powerpoint/2010/main">
+<p:sld xmlns:a="http://schemas.openxmlformats.org/drawingml/2006/main" xmlns:r="http://schemas.openxmlformats.org/officeDocument/2006/relationships" xmlns:p="http://schemas.openxmlformats.org/presentationml/2006/main">
   <p:cSld>
     <p:bg>
       <p:bgPr>
@@ -27896,7 +27843,7 @@
           <p:cNvPr id="5" name="Footer Placeholder 3">
             <a:extLst>
               <a:ext uri="{FF2B5EF4-FFF2-40B4-BE49-F238E27FC236}">
-                <ns2:creationId id="{668F77D6-DFDA-5A46-8DF1-47F6A167C2B1}"/>
+                <a16:creationId xmlns:a16="http://schemas.microsoft.com/office/drawing/2014/main" id="{668F77D6-DFDA-5A46-8DF1-47F6A167C2B1}"/>
               </a:ext>
             </a:extLst>
           </p:cNvPr>
@@ -28058,7 +28005,7 @@
           <p:cNvPr id="26" name="TextBox 25">
             <a:extLst>
               <a:ext uri="{FF2B5EF4-FFF2-40B4-BE49-F238E27FC236}">
-                <ns2:creationId id="{FA5E13D2-A15E-F54D-9507-CAD768919361}"/>
+                <a16:creationId xmlns:a16="http://schemas.microsoft.com/office/drawing/2014/main" id="{FA5E13D2-A15E-F54D-9507-CAD768919361}"/>
               </a:ext>
             </a:extLst>
           </p:cNvPr>
@@ -28195,7 +28142,7 @@
           <p:cNvPr id="23" name="Oval 22">
             <a:extLst>
               <a:ext uri="{FF2B5EF4-FFF2-40B4-BE49-F238E27FC236}">
-                <ns2:creationId id="{0112617B-A1D5-1E41-BF92-E67D4E046E39}"/>
+                <a16:creationId xmlns:a16="http://schemas.microsoft.com/office/drawing/2014/main" id="{0112617B-A1D5-1E41-BF92-E67D4E046E39}"/>
               </a:ext>
             </a:extLst>
           </p:cNvPr>
@@ -28279,7 +28226,7 @@
           <p:cNvPr id="27" name="Oval 26">
             <a:extLst>
               <a:ext uri="{FF2B5EF4-FFF2-40B4-BE49-F238E27FC236}">
-                <ns2:creationId id="{6EF0F7DA-5E70-8348-A200-F59A10FF7C55}"/>
+                <a16:creationId xmlns:a16="http://schemas.microsoft.com/office/drawing/2014/main" id="{6EF0F7DA-5E70-8348-A200-F59A10FF7C55}"/>
               </a:ext>
             </a:extLst>
           </p:cNvPr>
@@ -28363,7 +28310,7 @@
           <p:cNvPr id="28" name="Oval 27">
             <a:extLst>
               <a:ext uri="{FF2B5EF4-FFF2-40B4-BE49-F238E27FC236}">
-                <ns2:creationId id="{552F58D0-F613-674A-B294-C894E5FB1683}"/>
+                <a16:creationId xmlns:a16="http://schemas.microsoft.com/office/drawing/2014/main" id="{552F58D0-F613-674A-B294-C894E5FB1683}"/>
               </a:ext>
             </a:extLst>
           </p:cNvPr>
@@ -28447,7 +28394,7 @@
           <p:cNvPr id="29" name="Oval 28">
             <a:extLst>
               <a:ext uri="{FF2B5EF4-FFF2-40B4-BE49-F238E27FC236}">
-                <ns2:creationId id="{9CA7A721-D3BD-744E-9306-85BBED5F74BC}"/>
+                <a16:creationId xmlns:a16="http://schemas.microsoft.com/office/drawing/2014/main" id="{9CA7A721-D3BD-744E-9306-85BBED5F74BC}"/>
               </a:ext>
             </a:extLst>
           </p:cNvPr>
@@ -28531,7 +28478,7 @@
           <p:cNvPr id="30" name="Oval 29">
             <a:extLst>
               <a:ext uri="{FF2B5EF4-FFF2-40B4-BE49-F238E27FC236}">
-                <ns2:creationId id="{F97F1A02-C0C7-3C45-9790-847C152D159A}"/>
+                <a16:creationId xmlns:a16="http://schemas.microsoft.com/office/drawing/2014/main" id="{F97F1A02-C0C7-3C45-9790-847C152D159A}"/>
               </a:ext>
             </a:extLst>
           </p:cNvPr>
@@ -28615,7 +28562,7 @@
           <p:cNvPr id="15" name="Straight Arrow Connector 14">
             <a:extLst>
               <a:ext uri="{FF2B5EF4-FFF2-40B4-BE49-F238E27FC236}">
-                <ns2:creationId id="{05289ED1-4679-6543-A669-B23443FD0CD8}"/>
+                <a16:creationId xmlns:a16="http://schemas.microsoft.com/office/drawing/2014/main" id="{05289ED1-4679-6543-A669-B23443FD0CD8}"/>
               </a:ext>
             </a:extLst>
           </p:cNvPr>
@@ -28660,7 +28607,7 @@
           <p:cNvPr id="32" name="Straight Arrow Connector 31">
             <a:extLst>
               <a:ext uri="{FF2B5EF4-FFF2-40B4-BE49-F238E27FC236}">
-                <ns2:creationId id="{A9F8BF55-7F79-854D-84AD-A730BF43B39C}"/>
+                <a16:creationId xmlns:a16="http://schemas.microsoft.com/office/drawing/2014/main" id="{A9F8BF55-7F79-854D-84AD-A730BF43B39C}"/>
               </a:ext>
             </a:extLst>
           </p:cNvPr>
@@ -28705,7 +28652,7 @@
           <p:cNvPr id="35" name="Straight Arrow Connector 34">
             <a:extLst>
               <a:ext uri="{FF2B5EF4-FFF2-40B4-BE49-F238E27FC236}">
-                <ns2:creationId id="{0415B495-590C-0049-92E6-8AE7464CC78A}"/>
+                <a16:creationId xmlns:a16="http://schemas.microsoft.com/office/drawing/2014/main" id="{0415B495-590C-0049-92E6-8AE7464CC78A}"/>
               </a:ext>
             </a:extLst>
           </p:cNvPr>
@@ -28750,7 +28697,7 @@
           <p:cNvPr id="39" name="Straight Arrow Connector 38">
             <a:extLst>
               <a:ext uri="{FF2B5EF4-FFF2-40B4-BE49-F238E27FC236}">
-                <ns2:creationId id="{E4879E96-726B-4F42-BD7C-09F8D0B14E9A}"/>
+                <a16:creationId xmlns:a16="http://schemas.microsoft.com/office/drawing/2014/main" id="{E4879E96-726B-4F42-BD7C-09F8D0B14E9A}"/>
               </a:ext>
             </a:extLst>
           </p:cNvPr>
@@ -28795,7 +28742,7 @@
           <p:cNvPr id="47" name="Straight Arrow Connector 46">
             <a:extLst>
               <a:ext uri="{FF2B5EF4-FFF2-40B4-BE49-F238E27FC236}">
-                <ns2:creationId id="{0F119609-4333-414A-B8E4-E2447D7E1C10}"/>
+                <a16:creationId xmlns:a16="http://schemas.microsoft.com/office/drawing/2014/main" id="{0F119609-4333-414A-B8E4-E2447D7E1C10}"/>
               </a:ext>
             </a:extLst>
           </p:cNvPr>
@@ -28840,7 +28787,7 @@
           <p:cNvPr id="4" name="Straight Connector 3">
             <a:extLst>
               <a:ext uri="{FF2B5EF4-FFF2-40B4-BE49-F238E27FC236}">
-                <ns2:creationId id="{9890CC23-4ADC-D744-AF2D-1C8A936F07FC}"/>
+                <a16:creationId xmlns:a16="http://schemas.microsoft.com/office/drawing/2014/main" id="{9890CC23-4ADC-D744-AF2D-1C8A936F07FC}"/>
               </a:ext>
             </a:extLst>
           </p:cNvPr>
@@ -28883,7 +28830,7 @@
           <p:cNvPr id="18" name="Oval 17">
             <a:extLst>
               <a:ext uri="{FF2B5EF4-FFF2-40B4-BE49-F238E27FC236}">
-                <ns2:creationId id="{BE4CDC90-4B2E-BE41-BB9D-A84675F3A2FE}"/>
+                <a16:creationId xmlns:a16="http://schemas.microsoft.com/office/drawing/2014/main" id="{BE4CDC90-4B2E-BE41-BB9D-A84675F3A2FE}"/>
               </a:ext>
             </a:extLst>
           </p:cNvPr>
@@ -28966,7 +28913,7 @@
           <p:cNvPr id="24" name="Straight Arrow Connector 23">
             <a:extLst>
               <a:ext uri="{FF2B5EF4-FFF2-40B4-BE49-F238E27FC236}">
-                <ns2:creationId id="{7BCF22C9-C9AE-324D-B157-A9536FCAF3B6}"/>
+                <a16:creationId xmlns:a16="http://schemas.microsoft.com/office/drawing/2014/main" id="{7BCF22C9-C9AE-324D-B157-A9536FCAF3B6}"/>
               </a:ext>
             </a:extLst>
           </p:cNvPr>
@@ -29011,7 +28958,7 @@
           <p:cNvPr id="10" name="TextBox 9">
             <a:extLst>
               <a:ext uri="{FF2B5EF4-FFF2-40B4-BE49-F238E27FC236}">
-                <ns2:creationId id="{01A59953-657F-C641-8F36-E48E8EDB0DF1}"/>
+                <a16:creationId xmlns:a16="http://schemas.microsoft.com/office/drawing/2014/main" id="{01A59953-657F-C641-8F36-E48E8EDB0DF1}"/>
               </a:ext>
             </a:extLst>
           </p:cNvPr>
@@ -29096,7 +29043,7 @@
           <p:cNvPr id="31" name="TextBox 30">
             <a:extLst>
               <a:ext uri="{FF2B5EF4-FFF2-40B4-BE49-F238E27FC236}">
-                <ns2:creationId id="{713B9ACE-B673-2D48-BEF2-2A133C31B527}"/>
+                <a16:creationId xmlns:a16="http://schemas.microsoft.com/office/drawing/2014/main" id="{713B9ACE-B673-2D48-BEF2-2A133C31B527}"/>
               </a:ext>
             </a:extLst>
           </p:cNvPr>
@@ -29181,7 +29128,7 @@
           <p:cNvPr id="36" name="TextBox 35">
             <a:extLst>
               <a:ext uri="{FF2B5EF4-FFF2-40B4-BE49-F238E27FC236}">
-                <ns2:creationId id="{3A81A480-EF64-094E-825A-8592DAA4C672}"/>
+                <a16:creationId xmlns:a16="http://schemas.microsoft.com/office/drawing/2014/main" id="{3A81A480-EF64-094E-825A-8592DAA4C672}"/>
               </a:ext>
             </a:extLst>
           </p:cNvPr>
@@ -29263,7 +29210,7 @@
           <p:cNvPr id="22" name="Straight Connector 21">
             <a:extLst>
               <a:ext uri="{FF2B5EF4-FFF2-40B4-BE49-F238E27FC236}">
-                <ns2:creationId id="{0C67DA45-6876-7942-9996-48CA0A1696FE}"/>
+                <a16:creationId xmlns:a16="http://schemas.microsoft.com/office/drawing/2014/main" id="{0C67DA45-6876-7942-9996-48CA0A1696FE}"/>
               </a:ext>
             </a:extLst>
           </p:cNvPr>
@@ -29306,7 +29253,7 @@
           <p:cNvPr id="2" name="TextBox 1">
             <a:extLst>
               <a:ext uri="{FF2B5EF4-FFF2-40B4-BE49-F238E27FC236}">
-                <ns2:creationId id="{25B497FC-A4FB-6E22-82A5-ECE9FFBF1D45}"/>
+                <a16:creationId xmlns:a16="http://schemas.microsoft.com/office/drawing/2014/main" id="{25B497FC-A4FB-6E22-82A5-ECE9FFBF1D45}"/>
               </a:ext>
             </a:extLst>
           </p:cNvPr>
@@ -29371,7 +29318,7 @@
           <p:cNvPr id="6" name="Straight Arrow Connector 5">
             <a:extLst>
               <a:ext uri="{FF2B5EF4-FFF2-40B4-BE49-F238E27FC236}">
-                <ns2:creationId id="{3B9C4884-FD04-1DA8-E9C2-C28549C7A16E}"/>
+                <a16:creationId xmlns:a16="http://schemas.microsoft.com/office/drawing/2014/main" id="{3B9C4884-FD04-1DA8-E9C2-C28549C7A16E}"/>
               </a:ext>
             </a:extLst>
           </p:cNvPr>
@@ -29415,7 +29362,7 @@
           <p:cNvPr id="7" name="Straight Arrow Connector 6">
             <a:extLst>
               <a:ext uri="{FF2B5EF4-FFF2-40B4-BE49-F238E27FC236}">
-                <ns2:creationId id="{A6FFF53F-C9D7-1557-FC42-A159BAC6A3AE}"/>
+                <a16:creationId xmlns:a16="http://schemas.microsoft.com/office/drawing/2014/main" id="{A6FFF53F-C9D7-1557-FC42-A159BAC6A3AE}"/>
               </a:ext>
             </a:extLst>
           </p:cNvPr>
@@ -29459,7 +29406,7 @@
           <p:cNvPr id="9" name="TextBox 8">
             <a:extLst>
               <a:ext uri="{FF2B5EF4-FFF2-40B4-BE49-F238E27FC236}">
-                <ns2:creationId id="{37A94EE7-D3B6-AC25-503E-E6C0EE1F179B}"/>
+                <a16:creationId xmlns:a16="http://schemas.microsoft.com/office/drawing/2014/main" id="{37A94EE7-D3B6-AC25-503E-E6C0EE1F179B}"/>
               </a:ext>
             </a:extLst>
           </p:cNvPr>
@@ -29524,7 +29471,7 @@
           <p:cNvPr id="11" name="TextBox 10">
             <a:extLst>
               <a:ext uri="{FF2B5EF4-FFF2-40B4-BE49-F238E27FC236}">
-                <ns2:creationId id="{C80380D5-790B-3854-4D6A-3811EF0E2829}"/>
+                <a16:creationId xmlns:a16="http://schemas.microsoft.com/office/drawing/2014/main" id="{C80380D5-790B-3854-4D6A-3811EF0E2829}"/>
               </a:ext>
             </a:extLst>
           </p:cNvPr>
@@ -29583,7 +29530,7 @@
     </p:spTree>
     <p:extLst>
       <p:ext uri="{BB962C8B-B14F-4D97-AF65-F5344CB8AC3E}">
-        <p14:creationId val="2347082703"/>
+        <p14:creationId xmlns:p14="http://schemas.microsoft.com/office/powerpoint/2010/main" val="2347082703"/>
       </p:ext>
     </p:extLst>
   </p:cSld>
@@ -29594,7 +29541,7 @@
 </file>
 
 <file path=ppt/slides/slide8.xml><?xml version="1.0" encoding="utf-8"?>
-<p:sld xmlns:a="http://schemas.openxmlformats.org/drawingml/2006/main" xmlns:ns2="http://schemas.microsoft.com/office/drawing/2014/main" xmlns:p="http://schemas.openxmlformats.org/presentationml/2006/main" xmlns:p14="http://schemas.microsoft.com/office/powerpoint/2010/main" xmlns:r="http://schemas.openxmlformats.org/officeDocument/2006/relationships">
+<p:sld xmlns:a="http://schemas.openxmlformats.org/drawingml/2006/main" xmlns:r="http://schemas.openxmlformats.org/officeDocument/2006/relationships" xmlns:p="http://schemas.openxmlformats.org/presentationml/2006/main">
   <p:cSld>
     <p:bg>
       <p:bgPr>
@@ -29609,7 +29556,7 @@
         <p:cNvPr id="1" name="">
           <a:extLst>
             <a:ext uri="{FF2B5EF4-FFF2-40B4-BE49-F238E27FC236}">
-              <ns2:creationId id="{0AB73162-F4FB-AD38-1F35-FA4B5AB487CE}"/>
+              <a16:creationId xmlns:a16="http://schemas.microsoft.com/office/drawing/2014/main" id="{0AB73162-F4FB-AD38-1F35-FA4B5AB487CE}"/>
             </a:ext>
           </a:extLst>
         </p:cNvPr>
@@ -29629,7 +29576,7 @@
           <p:cNvPr id="5" name="Footer Placeholder 3">
             <a:extLst>
               <a:ext uri="{FF2B5EF4-FFF2-40B4-BE49-F238E27FC236}">
-                <ns2:creationId id="{8949F10E-6D23-F0EA-2E56-92DD2DE28C2A}"/>
+                <a16:creationId xmlns:a16="http://schemas.microsoft.com/office/drawing/2014/main" id="{8949F10E-6D23-F0EA-2E56-92DD2DE28C2A}"/>
               </a:ext>
             </a:extLst>
           </p:cNvPr>
@@ -29791,7 +29738,7 @@
           <p:cNvPr id="9" name="Group 8">
             <a:extLst>
               <a:ext uri="{FF2B5EF4-FFF2-40B4-BE49-F238E27FC236}">
-                <ns2:creationId id="{E9850113-AB4C-1F87-EB30-16E25C586B5C}"/>
+                <a16:creationId xmlns:a16="http://schemas.microsoft.com/office/drawing/2014/main" id="{E9850113-AB4C-1F87-EB30-16E25C586B5C}"/>
               </a:ext>
             </a:extLst>
           </p:cNvPr>
@@ -29800,8 +29747,8 @@
         </p:nvGrpSpPr>
         <p:grpSpPr>
           <a:xfrm>
-            <a:off x="664625" y="1173522"/>
-            <a:ext cx="5475154" cy="5405229"/>
+            <a:off x="664625" y="1173523"/>
+            <a:ext cx="3915396" cy="4312878"/>
             <a:chOff x="3484605" y="1083438"/>
             <a:chExt cx="5475154" cy="5405229"/>
           </a:xfrm>
@@ -29811,7 +29758,7 @@
             <p:cNvPr id="3" name="Picture 2">
               <a:extLst>
                 <a:ext uri="{FF2B5EF4-FFF2-40B4-BE49-F238E27FC236}">
-                  <ns2:creationId id="{9851A9B8-C2CC-C4AE-6C06-EB4B33725392}"/>
+                  <a16:creationId xmlns:a16="http://schemas.microsoft.com/office/drawing/2014/main" id="{9851A9B8-C2CC-C4AE-6C06-EB4B33725392}"/>
                 </a:ext>
               </a:extLst>
             </p:cNvPr>
@@ -29848,7 +29795,7 @@
             <p:cNvPr id="4" name="Freeform 3">
               <a:extLst>
                 <a:ext uri="{FF2B5EF4-FFF2-40B4-BE49-F238E27FC236}">
-                  <ns2:creationId id="{A6E4734A-F61C-B1B6-E09B-251407A8B0F9}"/>
+                  <a16:creationId xmlns:a16="http://schemas.microsoft.com/office/drawing/2014/main" id="{A6E4734A-F61C-B1B6-E09B-251407A8B0F9}"/>
                 </a:ext>
               </a:extLst>
             </p:cNvPr>
@@ -29993,7 +29940,7 @@
             <p:cNvPr id="6" name="Freeform 5">
               <a:extLst>
                 <a:ext uri="{FF2B5EF4-FFF2-40B4-BE49-F238E27FC236}">
-                  <ns2:creationId id="{AE9693B7-399D-4648-5934-BAF780F94BB8}"/>
+                  <a16:creationId xmlns:a16="http://schemas.microsoft.com/office/drawing/2014/main" id="{AE9693B7-399D-4648-5934-BAF780F94BB8}"/>
                 </a:ext>
               </a:extLst>
             </p:cNvPr>
@@ -30179,7 +30126,7 @@
           <p:cNvPr id="7" name="Title 1">
             <a:extLst>
               <a:ext uri="{FF2B5EF4-FFF2-40B4-BE49-F238E27FC236}">
-                <ns2:creationId id="{B4E061E7-B3BA-067C-8AC0-2AEC475558B3}"/>
+                <a16:creationId xmlns:a16="http://schemas.microsoft.com/office/drawing/2014/main" id="{B4E061E7-B3BA-067C-8AC0-2AEC475558B3}"/>
               </a:ext>
             </a:extLst>
           </p:cNvPr>
@@ -30263,7 +30210,7 @@
           <p:cNvPr id="10" name="TextBox 9">
             <a:extLst>
               <a:ext uri="{FF2B5EF4-FFF2-40B4-BE49-F238E27FC236}">
-                <ns2:creationId id="{FFF14DD8-B78C-E1D8-EB01-782F6700411F}"/>
+                <a16:creationId xmlns:a16="http://schemas.microsoft.com/office/drawing/2014/main" id="{FFF14DD8-B78C-E1D8-EB01-782F6700411F}"/>
               </a:ext>
             </a:extLst>
           </p:cNvPr>
@@ -30272,8 +30219,8 @@
         </p:nvSpPr>
         <p:spPr>
           <a:xfrm>
-            <a:off x="6358919" y="1651553"/>
-            <a:ext cx="5639963" cy="3778342"/>
+            <a:off x="5382127" y="1651553"/>
+            <a:ext cx="6616756" cy="2532103"/>
           </a:xfrm>
           <a:prstGeom prst="rect">
             <a:avLst/>
@@ -30304,7 +30251,7 @@
               <a:defRPr/>
             </a:pPr>
             <a:r>
-              <a:rPr kumimoji="0" lang="en-US" sz="1800" b="1" i="0" u="none" strike="noStrike" kern="1200" cap="none" spc="0" normalizeH="0" baseline="0" noProof="0" dirty="0">
+              <a:rPr kumimoji="0" lang="en-US" sz="1800" i="0" u="none" strike="noStrike" kern="1200" cap="none" spc="0" normalizeH="0" baseline="0" noProof="0" dirty="0">
                 <a:ln>
                   <a:noFill/>
                 </a:ln>
@@ -30340,7 +30287,7 @@
               <a:defRPr/>
             </a:pPr>
             <a:r>
-              <a:rPr kumimoji="0" lang="en-US" sz="1800" b="1" i="0" u="none" strike="noStrike" kern="1200" cap="none" spc="0" normalizeH="0" baseline="0" noProof="0" dirty="0">
+              <a:rPr kumimoji="0" lang="en-US" sz="1800" i="0" u="none" strike="noStrike" kern="1200" cap="none" spc="0" normalizeH="0" baseline="0" noProof="0" dirty="0">
                 <a:ln>
                   <a:noFill/>
                 </a:ln>
@@ -30376,7 +30323,7 @@
               <a:defRPr/>
             </a:pPr>
             <a:r>
-              <a:rPr kumimoji="0" lang="en-US" sz="1800" b="1" i="0" u="none" strike="noStrike" kern="1200" cap="none" spc="0" normalizeH="0" baseline="0" noProof="0" dirty="0">
+              <a:rPr kumimoji="0" lang="en-US" sz="1800" i="0" u="none" strike="noStrike" kern="1200" cap="none" spc="0" normalizeH="0" baseline="0" noProof="0" dirty="0">
                 <a:ln>
                   <a:noFill/>
                 </a:ln>
@@ -30412,7 +30359,7 @@
               <a:defRPr/>
             </a:pPr>
             <a:r>
-              <a:rPr kumimoji="0" lang="en-US" sz="1800" b="1" i="0" u="none" strike="noStrike" kern="1200" cap="none" spc="0" normalizeH="0" baseline="0" noProof="0" dirty="0">
+              <a:rPr kumimoji="0" lang="en-US" sz="1800" i="0" u="none" strike="noStrike" kern="1200" cap="none" spc="0" normalizeH="0" baseline="0" noProof="0" dirty="0">
                 <a:ln>
                   <a:noFill/>
                 </a:ln>
@@ -30448,7 +30395,7 @@
               <a:defRPr/>
             </a:pPr>
             <a:r>
-              <a:rPr kumimoji="0" lang="en-US" sz="1800" b="1" i="0" u="none" strike="noStrike" kern="1200" cap="none" spc="0" normalizeH="0" baseline="0" noProof="0" dirty="0">
+              <a:rPr kumimoji="0" lang="en-US" sz="1800" i="0" u="none" strike="noStrike" kern="1200" cap="none" spc="0" normalizeH="0" baseline="0" noProof="0" dirty="0">
                 <a:ln>
                   <a:noFill/>
                 </a:ln>
@@ -30462,9 +30409,43 @@
                 <a:ea typeface="Helvetica Neue" panose="02000503000000020004" pitchFamily="2" charset="0"/>
                 <a:cs typeface="Helvetica Neue" panose="02000503000000020004" pitchFamily="2" charset="0"/>
               </a:rPr>
-              <a:t>Wake density falls with distance, like 1/r^2.</a:t>
+              <a:t>Wake density falls with distance, like 1/r</a:t>
             </a:r>
-            <a:endParaRPr kumimoji="0" lang="en-US" sz="1800" b="1" i="0" u="none" strike="noStrike" kern="1200" cap="none" spc="0" normalizeH="0" baseline="30000" noProof="0" dirty="0">
+            <a:r>
+              <a:rPr kumimoji="0" lang="en-US" sz="1800" i="0" u="none" strike="noStrike" kern="1200" cap="none" spc="0" normalizeH="0" baseline="30000" noProof="0" dirty="0">
+                <a:ln>
+                  <a:noFill/>
+                </a:ln>
+                <a:solidFill>
+                  <a:prstClr val="white"/>
+                </a:solidFill>
+                <a:effectLst/>
+                <a:uLnTx/>
+                <a:uFillTx/>
+                <a:latin typeface="Helvetica Neue" panose="02000503000000020004" pitchFamily="2" charset="0"/>
+                <a:ea typeface="Helvetica Neue" panose="02000503000000020004" pitchFamily="2" charset="0"/>
+                <a:cs typeface="Helvetica Neue" panose="02000503000000020004" pitchFamily="2" charset="0"/>
+              </a:rPr>
+              <a:t>2</a:t>
+            </a:r>
+            <a:r>
+              <a:rPr kumimoji="0" lang="en-US" sz="1800" i="0" u="none" strike="noStrike" kern="1200" cap="none" spc="0" normalizeH="0" baseline="0" noProof="0" dirty="0">
+                <a:ln>
+                  <a:noFill/>
+                </a:ln>
+                <a:solidFill>
+                  <a:prstClr val="white"/>
+                </a:solidFill>
+                <a:effectLst/>
+                <a:uLnTx/>
+                <a:uFillTx/>
+                <a:latin typeface="Helvetica Neue" panose="02000503000000020004" pitchFamily="2" charset="0"/>
+                <a:ea typeface="Helvetica Neue" panose="02000503000000020004" pitchFamily="2" charset="0"/>
+                <a:cs typeface="Helvetica Neue" panose="02000503000000020004" pitchFamily="2" charset="0"/>
+              </a:rPr>
+              <a:t>.</a:t>
+            </a:r>
+            <a:endParaRPr kumimoji="0" lang="en-US" sz="1800" i="0" u="none" strike="noStrike" kern="1200" cap="none" spc="0" normalizeH="0" baseline="30000" noProof="0" dirty="0">
               <a:ln>
                 <a:noFill/>
               </a:ln>
@@ -30484,7 +30465,7 @@
     </p:spTree>
     <p:extLst>
       <p:ext uri="{BB962C8B-B14F-4D97-AF65-F5344CB8AC3E}">
-        <p14:creationId val="3392406910"/>
+        <p14:creationId xmlns:p14="http://schemas.microsoft.com/office/powerpoint/2010/main" val="3392406910"/>
       </p:ext>
     </p:extLst>
   </p:cSld>
@@ -30495,7 +30476,7 @@
 </file>
 
 <file path=ppt/slides/slide9.xml><?xml version="1.0" encoding="utf-8"?>
-<p:sld xmlns:a="http://schemas.openxmlformats.org/drawingml/2006/main" xmlns:ns2="http://schemas.microsoft.com/office/drawing/2014/main" xmlns:p="http://schemas.openxmlformats.org/presentationml/2006/main" xmlns:p14="http://schemas.microsoft.com/office/powerpoint/2010/main">
+<p:sld xmlns:a="http://schemas.openxmlformats.org/drawingml/2006/main" xmlns:r="http://schemas.openxmlformats.org/officeDocument/2006/relationships" xmlns:p="http://schemas.openxmlformats.org/presentationml/2006/main">
   <p:cSld>
     <p:bg>
       <p:bgPr>
@@ -30524,7 +30505,7 @@
           <p:cNvPr id="11" name="Footer Placeholder 3">
             <a:extLst>
               <a:ext uri="{FF2B5EF4-FFF2-40B4-BE49-F238E27FC236}">
-                <ns2:creationId id="{7C94C084-4476-0C4E-B896-CB3AC89A47F6}"/>
+                <a16:creationId xmlns:a16="http://schemas.microsoft.com/office/drawing/2014/main" id="{7C94C084-4476-0C4E-B896-CB3AC89A47F6}"/>
               </a:ext>
             </a:extLst>
           </p:cNvPr>
@@ -30658,7 +30639,7 @@
           <p:cNvPr id="6" name="Freeform 5">
             <a:extLst>
               <a:ext uri="{FF2B5EF4-FFF2-40B4-BE49-F238E27FC236}">
-                <ns2:creationId id="{A25DAE9F-BED8-3A57-CD97-EDBD9F0EDD69}"/>
+                <a16:creationId xmlns:a16="http://schemas.microsoft.com/office/drawing/2014/main" id="{A25DAE9F-BED8-3A57-CD97-EDBD9F0EDD69}"/>
               </a:ext>
             </a:extLst>
           </p:cNvPr>
@@ -31254,7 +31235,7 @@
           <p:cNvPr id="7" name="Freeform 6">
             <a:extLst>
               <a:ext uri="{FF2B5EF4-FFF2-40B4-BE49-F238E27FC236}">
-                <ns2:creationId id="{3F833B4A-7F30-F940-BD46-AAD4F1EC84C2}"/>
+                <a16:creationId xmlns:a16="http://schemas.microsoft.com/office/drawing/2014/main" id="{3F833B4A-7F30-F940-BD46-AAD4F1EC84C2}"/>
               </a:ext>
             </a:extLst>
           </p:cNvPr>
@@ -32116,7 +32097,7 @@
           <p:cNvPr id="9" name="Oval 8">
             <a:extLst>
               <a:ext uri="{FF2B5EF4-FFF2-40B4-BE49-F238E27FC236}">
-                <ns2:creationId id="{C1204F89-67E6-2520-9CB7-C11AD96E6395}"/>
+                <a16:creationId xmlns:a16="http://schemas.microsoft.com/office/drawing/2014/main" id="{C1204F89-67E6-2520-9CB7-C11AD96E6395}"/>
               </a:ext>
             </a:extLst>
           </p:cNvPr>
@@ -32168,7 +32149,7 @@
           <p:cNvPr id="10" name="Oval 9">
             <a:extLst>
               <a:ext uri="{FF2B5EF4-FFF2-40B4-BE49-F238E27FC236}">
-                <ns2:creationId id="{C20E3F99-5E93-DCB1-5438-4A8D42DA25E5}"/>
+                <a16:creationId xmlns:a16="http://schemas.microsoft.com/office/drawing/2014/main" id="{C20E3F99-5E93-DCB1-5438-4A8D42DA25E5}"/>
               </a:ext>
             </a:extLst>
           </p:cNvPr>
@@ -32220,7 +32201,7 @@
           <p:cNvPr id="12" name="Straight Connector 11">
             <a:extLst>
               <a:ext uri="{FF2B5EF4-FFF2-40B4-BE49-F238E27FC236}">
-                <ns2:creationId id="{981DDF22-4015-B62D-15E4-53D55BFB533D}"/>
+                <a16:creationId xmlns:a16="http://schemas.microsoft.com/office/drawing/2014/main" id="{981DDF22-4015-B62D-15E4-53D55BFB533D}"/>
               </a:ext>
             </a:extLst>
           </p:cNvPr>
@@ -32266,7 +32247,7 @@
           <p:cNvPr id="13" name="Oval 12">
             <a:extLst>
               <a:ext uri="{FF2B5EF4-FFF2-40B4-BE49-F238E27FC236}">
-                <ns2:creationId id="{54ADE077-5C44-29DF-0132-D3CEA80605F9}"/>
+                <a16:creationId xmlns:a16="http://schemas.microsoft.com/office/drawing/2014/main" id="{54ADE077-5C44-29DF-0132-D3CEA80605F9}"/>
               </a:ext>
             </a:extLst>
           </p:cNvPr>
@@ -32321,7 +32302,7 @@
           <p:cNvPr id="14" name="Oval 13">
             <a:extLst>
               <a:ext uri="{FF2B5EF4-FFF2-40B4-BE49-F238E27FC236}">
-                <ns2:creationId id="{00672CFA-7F0E-A719-10B0-29AE35096E30}"/>
+                <a16:creationId xmlns:a16="http://schemas.microsoft.com/office/drawing/2014/main" id="{00672CFA-7F0E-A719-10B0-29AE35096E30}"/>
               </a:ext>
             </a:extLst>
           </p:cNvPr>
@@ -32373,7 +32354,7 @@
           <p:cNvPr id="15" name="TextBox 14">
             <a:extLst>
               <a:ext uri="{FF2B5EF4-FFF2-40B4-BE49-F238E27FC236}">
-                <ns2:creationId id="{D484D63C-CCDB-0923-AC0F-BC6DCC85B056}"/>
+                <a16:creationId xmlns:a16="http://schemas.microsoft.com/office/drawing/2014/main" id="{D484D63C-CCDB-0923-AC0F-BC6DCC85B056}"/>
               </a:ext>
             </a:extLst>
           </p:cNvPr>
@@ -32433,7 +32414,7 @@
           <p:cNvPr id="16" name="TextBox 15">
             <a:extLst>
               <a:ext uri="{FF2B5EF4-FFF2-40B4-BE49-F238E27FC236}">
-                <ns2:creationId id="{2FB06A3B-C8A7-7640-2EE9-203EA6BD717B}"/>
+                <a16:creationId xmlns:a16="http://schemas.microsoft.com/office/drawing/2014/main" id="{2FB06A3B-C8A7-7640-2EE9-203EA6BD717B}"/>
               </a:ext>
             </a:extLst>
           </p:cNvPr>
@@ -32480,7 +32461,7 @@
           <p:cNvPr id="19" name="TextBox 18">
             <a:extLst>
               <a:ext uri="{FF2B5EF4-FFF2-40B4-BE49-F238E27FC236}">
-                <ns2:creationId id="{499A2693-D878-2253-1439-ED993C1F2AD5}"/>
+                <a16:creationId xmlns:a16="http://schemas.microsoft.com/office/drawing/2014/main" id="{499A2693-D878-2253-1439-ED993C1F2AD5}"/>
               </a:ext>
             </a:extLst>
           </p:cNvPr>
@@ -32527,7 +32508,7 @@
           <p:cNvPr id="20" name="TextBox 19">
             <a:extLst>
               <a:ext uri="{FF2B5EF4-FFF2-40B4-BE49-F238E27FC236}">
-                <ns2:creationId id="{328F02D2-95BB-4767-7DBC-B06A0A6115E7}"/>
+                <a16:creationId xmlns:a16="http://schemas.microsoft.com/office/drawing/2014/main" id="{328F02D2-95BB-4767-7DBC-B06A0A6115E7}"/>
               </a:ext>
             </a:extLst>
           </p:cNvPr>
@@ -32574,7 +32555,7 @@
           <p:cNvPr id="21" name="TextBox 20">
             <a:extLst>
               <a:ext uri="{FF2B5EF4-FFF2-40B4-BE49-F238E27FC236}">
-                <ns2:creationId id="{5C915F9D-42F7-1C6D-E114-D633D6E4C109}"/>
+                <a16:creationId xmlns:a16="http://schemas.microsoft.com/office/drawing/2014/main" id="{5C915F9D-42F7-1C6D-E114-D633D6E4C109}"/>
               </a:ext>
             </a:extLst>
           </p:cNvPr>
@@ -32621,7 +32602,7 @@
           <p:cNvPr id="22" name="TextBox 21">
             <a:extLst>
               <a:ext uri="{FF2B5EF4-FFF2-40B4-BE49-F238E27FC236}">
-                <ns2:creationId id="{82FA558D-A9BC-01CE-74CD-F383AA8AFB6C}"/>
+                <a16:creationId xmlns:a16="http://schemas.microsoft.com/office/drawing/2014/main" id="{82FA558D-A9BC-01CE-74CD-F383AA8AFB6C}"/>
               </a:ext>
             </a:extLst>
           </p:cNvPr>
@@ -32668,7 +32649,7 @@
           <p:cNvPr id="25" name="Rectangle 24">
             <a:extLst>
               <a:ext uri="{FF2B5EF4-FFF2-40B4-BE49-F238E27FC236}">
-                <ns2:creationId id="{B4DF9014-6E71-4887-15FC-288C0BE2E472}"/>
+                <a16:creationId xmlns:a16="http://schemas.microsoft.com/office/drawing/2014/main" id="{B4DF9014-6E71-4887-15FC-288C0BE2E472}"/>
               </a:ext>
             </a:extLst>
           </p:cNvPr>
@@ -32719,7 +32700,7 @@
           <p:cNvPr id="2" name="Group 1">
             <a:extLst>
               <a:ext uri="{FF2B5EF4-FFF2-40B4-BE49-F238E27FC236}">
-                <ns2:creationId id="{8513F8A2-0C1C-FA83-EB1D-12942054ECC6}"/>
+                <a16:creationId xmlns:a16="http://schemas.microsoft.com/office/drawing/2014/main" id="{8513F8A2-0C1C-FA83-EB1D-12942054ECC6}"/>
               </a:ext>
             </a:extLst>
           </p:cNvPr>
@@ -32739,7 +32720,7 @@
             <p:cNvPr id="3" name="Straight Arrow Connector 2">
               <a:extLst>
                 <a:ext uri="{FF2B5EF4-FFF2-40B4-BE49-F238E27FC236}">
-                  <ns2:creationId id="{F0E8E829-2926-9AC8-8FBE-CD87D209F5BD}"/>
+                  <a16:creationId xmlns:a16="http://schemas.microsoft.com/office/drawing/2014/main" id="{F0E8E829-2926-9AC8-8FBE-CD87D209F5BD}"/>
                 </a:ext>
               </a:extLst>
             </p:cNvPr>
@@ -32783,7 +32764,7 @@
             <p:cNvPr id="4" name="Straight Arrow Connector 3">
               <a:extLst>
                 <a:ext uri="{FF2B5EF4-FFF2-40B4-BE49-F238E27FC236}">
-                  <ns2:creationId id="{D50F6F6C-E0DD-959D-833A-36F07808AC1D}"/>
+                  <a16:creationId xmlns:a16="http://schemas.microsoft.com/office/drawing/2014/main" id="{D50F6F6C-E0DD-959D-833A-36F07808AC1D}"/>
                 </a:ext>
               </a:extLst>
             </p:cNvPr>
@@ -32827,7 +32808,7 @@
             <p:cNvPr id="5" name="TextBox 4">
               <a:extLst>
                 <a:ext uri="{FF2B5EF4-FFF2-40B4-BE49-F238E27FC236}">
-                  <ns2:creationId id="{EDB020C7-9F2F-9DAE-DC6F-0F4AB0106806}"/>
+                  <a16:creationId xmlns:a16="http://schemas.microsoft.com/office/drawing/2014/main" id="{EDB020C7-9F2F-9DAE-DC6F-0F4AB0106806}"/>
                 </a:ext>
               </a:extLst>
             </p:cNvPr>
@@ -32892,7 +32873,7 @@
             <p:cNvPr id="8" name="TextBox 7">
               <a:extLst>
                 <a:ext uri="{FF2B5EF4-FFF2-40B4-BE49-F238E27FC236}">
-                  <ns2:creationId id="{9833DACC-1D55-AD72-1025-41BEFCBBEFC1}"/>
+                  <a16:creationId xmlns:a16="http://schemas.microsoft.com/office/drawing/2014/main" id="{9833DACC-1D55-AD72-1025-41BEFCBBEFC1}"/>
                 </a:ext>
               </a:extLst>
             </p:cNvPr>
@@ -32952,7 +32933,7 @@
     </p:spTree>
     <p:extLst>
       <p:ext uri="{BB962C8B-B14F-4D97-AF65-F5344CB8AC3E}">
-        <p14:creationId val="2649229030"/>
+        <p14:creationId xmlns:p14="http://schemas.microsoft.com/office/powerpoint/2010/main" val="2649229030"/>
       </p:ext>
     </p:extLst>
   </p:cSld>

--- a/reference/archie/presentations/NPQG Fundamentals - Paths.pptx
+++ b/reference/archie/presentations/NPQG Fundamentals - Paths.pptx
@@ -6180,7 +6180,7 @@
 </file>
 
 <file path=ppt/slides/slide1.xml><?xml version="1.0" encoding="utf-8"?>
-<p:sld xmlns:a="http://schemas.openxmlformats.org/drawingml/2006/main" xmlns:ns2="http://schemas.microsoft.com/office/drawing/2014/main" xmlns:p="http://schemas.openxmlformats.org/presentationml/2006/main" xmlns:p14="http://schemas.microsoft.com/office/powerpoint/2010/main">
+<p:sld xmlns:a="http://schemas.openxmlformats.org/drawingml/2006/main" xmlns:a16="http://schemas.microsoft.com/office/drawing/2014/main" xmlns:ns3="http://schemas.microsoft.com/office/powerpoint/2010/main" xmlns:p="http://schemas.openxmlformats.org/presentationml/2006/main">
   <p:cSld>
     <p:bg>
       <p:bgPr>
@@ -6195,7 +6195,7 @@
         <p:cNvPr id="1" name="">
           <a:extLst>
             <a:ext uri="{FF2B5EF4-FFF2-40B4-BE49-F238E27FC236}">
-              <ns2:creationId id="{F12CB3D1-0CE0-632F-6109-64380C884133}"/>
+              <a16:creationId id="{F12CB3D1-0CE0-632F-6109-64380C884133}"/>
             </a:ext>
           </a:extLst>
         </p:cNvPr>
@@ -6215,7 +6215,7 @@
           <p:cNvPr id="2" name="TextBox 1">
             <a:extLst>
               <a:ext uri="{FF2B5EF4-FFF2-40B4-BE49-F238E27FC236}">
-                <ns2:creationId id="{4BD4ABB3-A2D3-D440-CAE2-3FE090A98AD7}"/>
+                <a16:creationId id="{4BD4ABB3-A2D3-D440-CAE2-3FE090A98AD7}"/>
               </a:ext>
             </a:extLst>
           </p:cNvPr>
@@ -6363,13 +6363,7 @@
       </p:sp>
       <p:sp>
         <p:nvSpPr>
-          <p:cNvPr id="3" name="Footer Placeholder 3">
-            <a:extLst>
-              <a:ext uri="{FF2B5EF4-FFF2-40B4-BE49-F238E27FC236}">
-                <ns2:creationId id="{27CEA6F2-4AF1-97D8-38AC-41B557BE51CF}"/>
-              </a:ext>
-            </a:extLst>
-          </p:cNvPr>
+          <p:cNvPr id="3" name="Footer Placeholder 3"/>
           <p:cNvSpPr txBox="1">
             <a:spLocks/>
           </p:cNvSpPr>
@@ -6526,7 +6520,7 @@
     </p:spTree>
     <p:extLst>
       <p:ext uri="{BB962C8B-B14F-4D97-AF65-F5344CB8AC3E}">
-        <p14:creationId val="3704261708"/>
+        <ns3:creationId val="3704261708"/>
       </p:ext>
     </p:extLst>
   </p:cSld>
@@ -6537,7 +6531,7 @@
 </file>
 
 <file path=ppt/slides/slide10.xml><?xml version="1.0" encoding="utf-8"?>
-<p:sld xmlns:a="http://schemas.openxmlformats.org/drawingml/2006/main" xmlns:ns2="http://schemas.microsoft.com/office/drawing/2014/main" xmlns:p="http://schemas.openxmlformats.org/presentationml/2006/main" xmlns:p14="http://schemas.microsoft.com/office/powerpoint/2010/main">
+<p:sld xmlns:a="http://schemas.openxmlformats.org/drawingml/2006/main" xmlns:a16="http://schemas.microsoft.com/office/drawing/2014/main" xmlns:ns3="http://schemas.microsoft.com/office/powerpoint/2010/main" xmlns:p="http://schemas.openxmlformats.org/presentationml/2006/main">
   <p:cSld>
     <p:bg>
       <p:bgPr>
@@ -6563,13 +6557,7 @@
       </p:grpSpPr>
       <p:sp>
         <p:nvSpPr>
-          <p:cNvPr id="5" name="Footer Placeholder 3">
-            <a:extLst>
-              <a:ext uri="{FF2B5EF4-FFF2-40B4-BE49-F238E27FC236}">
-                <ns2:creationId id="{668F77D6-DFDA-5A46-8DF1-47F6A167C2B1}"/>
-              </a:ext>
-            </a:extLst>
-          </p:cNvPr>
+          <p:cNvPr id="5" name="Footer Placeholder 3"/>
           <p:cNvSpPr txBox="1">
             <a:spLocks/>
           </p:cNvSpPr>
@@ -6728,7 +6716,7 @@
           <p:cNvPr id="13" name="TextBox 12">
             <a:extLst>
               <a:ext uri="{FF2B5EF4-FFF2-40B4-BE49-F238E27FC236}">
-                <ns2:creationId id="{2C3F4604-6C2F-0E4E-9DD3-4F5C89FF51AB}"/>
+                <a16:creationId id="{2C3F4604-6C2F-0E4E-9DD3-4F5C89FF51AB}"/>
               </a:ext>
             </a:extLst>
           </p:cNvPr>
@@ -6789,7 +6777,7 @@
           <p:cNvPr id="14" name="Freeform 13">
             <a:extLst>
               <a:ext uri="{FF2B5EF4-FFF2-40B4-BE49-F238E27FC236}">
-                <ns2:creationId id="{6D478F86-6608-8240-A60F-2B5B4B14CE42}"/>
+                <a16:creationId id="{6D478F86-6608-8240-A60F-2B5B4B14CE42}"/>
               </a:ext>
             </a:extLst>
           </p:cNvPr>
@@ -7330,7 +7318,7 @@
           <p:cNvPr id="16" name="Freeform 15">
             <a:extLst>
               <a:ext uri="{FF2B5EF4-FFF2-40B4-BE49-F238E27FC236}">
-                <ns2:creationId id="{226B2D26-F692-894E-9B09-F57FBB5CB2A3}"/>
+                <a16:creationId id="{226B2D26-F692-894E-9B09-F57FBB5CB2A3}"/>
               </a:ext>
             </a:extLst>
           </p:cNvPr>
@@ -8213,7 +8201,7 @@
           <p:cNvPr id="18" name="Oval 17">
             <a:extLst>
               <a:ext uri="{FF2B5EF4-FFF2-40B4-BE49-F238E27FC236}">
-                <ns2:creationId id="{BE4CDC90-4B2E-BE41-BB9D-A84675F3A2FE}"/>
+                <a16:creationId id="{BE4CDC90-4B2E-BE41-BB9D-A84675F3A2FE}"/>
               </a:ext>
             </a:extLst>
           </p:cNvPr>
@@ -8294,7 +8282,7 @@
           <p:cNvPr id="19" name="Oval 18">
             <a:extLst>
               <a:ext uri="{FF2B5EF4-FFF2-40B4-BE49-F238E27FC236}">
-                <ns2:creationId id="{0592434B-85D0-0A41-95DD-A29D1D3E92A7}"/>
+                <a16:creationId id="{0592434B-85D0-0A41-95DD-A29D1D3E92A7}"/>
               </a:ext>
             </a:extLst>
           </p:cNvPr>
@@ -8375,7 +8363,7 @@
           <p:cNvPr id="21" name="TextBox 20">
             <a:extLst>
               <a:ext uri="{FF2B5EF4-FFF2-40B4-BE49-F238E27FC236}">
-                <ns2:creationId id="{7B549753-C2CD-8744-8435-2E08FD32BDEB}"/>
+                <a16:creationId id="{7B549753-C2CD-8744-8435-2E08FD32BDEB}"/>
               </a:ext>
             </a:extLst>
           </p:cNvPr>
@@ -8454,7 +8442,7 @@
           <p:cNvPr id="22" name="TextBox 21">
             <a:extLst>
               <a:ext uri="{FF2B5EF4-FFF2-40B4-BE49-F238E27FC236}">
-                <ns2:creationId id="{32F7BF73-EB2C-9D42-97FB-D39FDCC924EB}"/>
+                <a16:creationId id="{32F7BF73-EB2C-9D42-97FB-D39FDCC924EB}"/>
               </a:ext>
             </a:extLst>
           </p:cNvPr>
@@ -8533,7 +8521,7 @@
           <p:cNvPr id="32" name="Group 31">
             <a:extLst>
               <a:ext uri="{FF2B5EF4-FFF2-40B4-BE49-F238E27FC236}">
-                <ns2:creationId id="{A120AE69-6043-195E-40C7-43C019B9D3A9}"/>
+                <a16:creationId id="{A120AE69-6043-195E-40C7-43C019B9D3A9}"/>
               </a:ext>
             </a:extLst>
           </p:cNvPr>
@@ -8553,7 +8541,7 @@
             <p:cNvPr id="24" name="Straight Connector 23">
               <a:extLst>
                 <a:ext uri="{FF2B5EF4-FFF2-40B4-BE49-F238E27FC236}">
-                  <ns2:creationId id="{3A19E039-1667-254C-809A-972BBA46D65C}"/>
+                  <a16:creationId id="{3A19E039-1667-254C-809A-972BBA46D65C}"/>
                 </a:ext>
               </a:extLst>
             </p:cNvPr>
@@ -8600,7 +8588,7 @@
             <p:cNvPr id="2" name="Oval 1">
               <a:extLst>
                 <a:ext uri="{FF2B5EF4-FFF2-40B4-BE49-F238E27FC236}">
-                  <ns2:creationId id="{38418338-F1E6-81D9-6A8C-D7EB7AA9DDA2}"/>
+                  <a16:creationId id="{38418338-F1E6-81D9-6A8C-D7EB7AA9DDA2}"/>
                 </a:ext>
               </a:extLst>
             </p:cNvPr>
@@ -8685,7 +8673,7 @@
           <p:cNvPr id="28" name="TextBox 27">
             <a:extLst>
               <a:ext uri="{FF2B5EF4-FFF2-40B4-BE49-F238E27FC236}">
-                <ns2:creationId id="{B86BBAD0-86F6-0D58-180C-6EA1BDCC33FE}"/>
+                <a16:creationId id="{B86BBAD0-86F6-0D58-180C-6EA1BDCC33FE}"/>
               </a:ext>
             </a:extLst>
           </p:cNvPr>
@@ -8764,7 +8752,7 @@
           <p:cNvPr id="29" name="TextBox 28">
             <a:extLst>
               <a:ext uri="{FF2B5EF4-FFF2-40B4-BE49-F238E27FC236}">
-                <ns2:creationId id="{2C329E1C-5E54-9E3C-A6FA-AE50E16EEB85}"/>
+                <a16:creationId id="{2C329E1C-5E54-9E3C-A6FA-AE50E16EEB85}"/>
               </a:ext>
             </a:extLst>
           </p:cNvPr>
@@ -8843,7 +8831,7 @@
           <p:cNvPr id="33" name="Group 32">
             <a:extLst>
               <a:ext uri="{FF2B5EF4-FFF2-40B4-BE49-F238E27FC236}">
-                <ns2:creationId id="{1D286D70-C171-9F97-4EF6-3BE92F6BF451}"/>
+                <a16:creationId id="{1D286D70-C171-9F97-4EF6-3BE92F6BF451}"/>
               </a:ext>
             </a:extLst>
           </p:cNvPr>
@@ -8863,7 +8851,7 @@
             <p:cNvPr id="34" name="Straight Connector 33">
               <a:extLst>
                 <a:ext uri="{FF2B5EF4-FFF2-40B4-BE49-F238E27FC236}">
-                  <ns2:creationId id="{8592FA4B-D9A7-6E33-AB7A-56BCD3E75DEC}"/>
+                  <a16:creationId id="{8592FA4B-D9A7-6E33-AB7A-56BCD3E75DEC}"/>
                 </a:ext>
               </a:extLst>
             </p:cNvPr>
@@ -8909,7 +8897,7 @@
             <p:cNvPr id="35" name="Oval 34">
               <a:extLst>
                 <a:ext uri="{FF2B5EF4-FFF2-40B4-BE49-F238E27FC236}">
-                  <ns2:creationId id="{D1C61822-C414-6D43-5771-23FAB0629304}"/>
+                  <a16:creationId id="{D1C61822-C414-6D43-5771-23FAB0629304}"/>
                 </a:ext>
               </a:extLst>
             </p:cNvPr>
@@ -8994,7 +8982,7 @@
           <p:cNvPr id="36" name="Group 35">
             <a:extLst>
               <a:ext uri="{FF2B5EF4-FFF2-40B4-BE49-F238E27FC236}">
-                <ns2:creationId id="{C03937C6-921F-C709-6C11-E769E0AA1568}"/>
+                <a16:creationId id="{C03937C6-921F-C709-6C11-E769E0AA1568}"/>
               </a:ext>
             </a:extLst>
           </p:cNvPr>
@@ -9014,7 +9002,7 @@
             <p:cNvPr id="37" name="Straight Connector 36">
               <a:extLst>
                 <a:ext uri="{FF2B5EF4-FFF2-40B4-BE49-F238E27FC236}">
-                  <ns2:creationId id="{BA8BF2BD-3FCE-A586-601D-1E4026152CB6}"/>
+                  <a16:creationId id="{BA8BF2BD-3FCE-A586-601D-1E4026152CB6}"/>
                 </a:ext>
               </a:extLst>
             </p:cNvPr>
@@ -9060,7 +9048,7 @@
             <p:cNvPr id="38" name="Oval 37">
               <a:extLst>
                 <a:ext uri="{FF2B5EF4-FFF2-40B4-BE49-F238E27FC236}">
-                  <ns2:creationId id="{9DC53165-740B-C795-C0DF-F1A1A73F6F36}"/>
+                  <a16:creationId id="{9DC53165-740B-C795-C0DF-F1A1A73F6F36}"/>
                 </a:ext>
               </a:extLst>
             </p:cNvPr>
@@ -9145,7 +9133,7 @@
           <p:cNvPr id="40" name="Group 39">
             <a:extLst>
               <a:ext uri="{FF2B5EF4-FFF2-40B4-BE49-F238E27FC236}">
-                <ns2:creationId id="{C105AAA1-FA00-79D8-70E9-DB832351B5E2}"/>
+                <a16:creationId id="{C105AAA1-FA00-79D8-70E9-DB832351B5E2}"/>
               </a:ext>
             </a:extLst>
           </p:cNvPr>
@@ -9165,7 +9153,7 @@
             <p:cNvPr id="41" name="Straight Connector 40">
               <a:extLst>
                 <a:ext uri="{FF2B5EF4-FFF2-40B4-BE49-F238E27FC236}">
-                  <ns2:creationId id="{48D05E5C-4059-6EC7-1299-E52A65F46E3D}"/>
+                  <a16:creationId id="{48D05E5C-4059-6EC7-1299-E52A65F46E3D}"/>
                 </a:ext>
               </a:extLst>
             </p:cNvPr>
@@ -9211,7 +9199,7 @@
             <p:cNvPr id="42" name="Oval 41">
               <a:extLst>
                 <a:ext uri="{FF2B5EF4-FFF2-40B4-BE49-F238E27FC236}">
-                  <ns2:creationId id="{8174E055-9EC2-40B6-B317-43A23011EC49}"/>
+                  <a16:creationId id="{8174E055-9EC2-40B6-B317-43A23011EC49}"/>
                 </a:ext>
               </a:extLst>
             </p:cNvPr>
@@ -9296,7 +9284,7 @@
           <p:cNvPr id="4" name="Rectangle 3">
             <a:extLst>
               <a:ext uri="{FF2B5EF4-FFF2-40B4-BE49-F238E27FC236}">
-                <ns2:creationId id="{ADBBA491-EC7F-B7A8-024F-1F1EB3434C26}"/>
+                <a16:creationId id="{ADBBA491-EC7F-B7A8-024F-1F1EB3434C26}"/>
               </a:ext>
             </a:extLst>
           </p:cNvPr>
@@ -9347,7 +9335,7 @@
           <p:cNvPr id="6" name="Group 5">
             <a:extLst>
               <a:ext uri="{FF2B5EF4-FFF2-40B4-BE49-F238E27FC236}">
-                <ns2:creationId id="{99AA8219-E43E-724C-056B-B18383E44D07}"/>
+                <a16:creationId id="{99AA8219-E43E-724C-056B-B18383E44D07}"/>
               </a:ext>
             </a:extLst>
           </p:cNvPr>
@@ -9367,7 +9355,7 @@
             <p:cNvPr id="7" name="Straight Arrow Connector 6">
               <a:extLst>
                 <a:ext uri="{FF2B5EF4-FFF2-40B4-BE49-F238E27FC236}">
-                  <ns2:creationId id="{D656FE40-D181-9F96-4B12-1D4A1600D94D}"/>
+                  <a16:creationId id="{D656FE40-D181-9F96-4B12-1D4A1600D94D}"/>
                 </a:ext>
               </a:extLst>
             </p:cNvPr>
@@ -9411,7 +9399,7 @@
             <p:cNvPr id="9" name="Straight Arrow Connector 8">
               <a:extLst>
                 <a:ext uri="{FF2B5EF4-FFF2-40B4-BE49-F238E27FC236}">
-                  <ns2:creationId id="{A8B296C3-B87D-78ED-4E26-EC9E5A291FD0}"/>
+                  <a16:creationId id="{A8B296C3-B87D-78ED-4E26-EC9E5A291FD0}"/>
                 </a:ext>
               </a:extLst>
             </p:cNvPr>
@@ -9455,7 +9443,7 @@
             <p:cNvPr id="10" name="TextBox 9">
               <a:extLst>
                 <a:ext uri="{FF2B5EF4-FFF2-40B4-BE49-F238E27FC236}">
-                  <ns2:creationId id="{F49CBD38-2A34-BF6B-7AF0-E9DF4ADD0FDF}"/>
+                  <a16:creationId id="{F49CBD38-2A34-BF6B-7AF0-E9DF4ADD0FDF}"/>
                 </a:ext>
               </a:extLst>
             </p:cNvPr>
@@ -9519,7 +9507,7 @@
     </p:spTree>
     <p:extLst>
       <p:ext uri="{BB962C8B-B14F-4D97-AF65-F5344CB8AC3E}">
-        <p14:creationId val="3036832815"/>
+        <ns3:creationId val="3036832815"/>
       </p:ext>
     </p:extLst>
   </p:cSld>
@@ -9530,7 +9518,7 @@
 </file>
 
 <file path=ppt/slides/slide11.xml><?xml version="1.0" encoding="utf-8"?>
-<p:sld xmlns:a="http://schemas.openxmlformats.org/drawingml/2006/main" xmlns:ns2="http://schemas.microsoft.com/office/drawing/2014/main" xmlns:p="http://schemas.openxmlformats.org/presentationml/2006/main" xmlns:p14="http://schemas.microsoft.com/office/powerpoint/2010/main">
+<p:sld xmlns:a="http://schemas.openxmlformats.org/drawingml/2006/main" xmlns:a16="http://schemas.microsoft.com/office/drawing/2014/main" xmlns:ns3="http://schemas.microsoft.com/office/powerpoint/2010/main" xmlns:p="http://schemas.openxmlformats.org/presentationml/2006/main">
   <p:cSld>
     <p:bg>
       <p:bgPr>
@@ -9545,7 +9533,7 @@
         <p:cNvPr id="1" name="">
           <a:extLst>
             <a:ext uri="{FF2B5EF4-FFF2-40B4-BE49-F238E27FC236}">
-              <ns2:creationId id="{96E919E2-812D-C716-7A6E-78657A604D1E}"/>
+              <a16:creationId id="{96E919E2-812D-C716-7A6E-78657A604D1E}"/>
             </a:ext>
           </a:extLst>
         </p:cNvPr>
@@ -9565,7 +9553,7 @@
           <p:cNvPr id="34" name="Freeform 33">
             <a:extLst>
               <a:ext uri="{FF2B5EF4-FFF2-40B4-BE49-F238E27FC236}">
-                <ns2:creationId id="{9FEB1C17-EE9E-6374-14E0-DF4B04BB34CC}"/>
+                <a16:creationId id="{9FEB1C17-EE9E-6374-14E0-DF4B04BB34CC}"/>
               </a:ext>
             </a:extLst>
           </p:cNvPr>
@@ -10603,7 +10591,7 @@
           <p:cNvPr id="23" name="Straight Connector 22">
             <a:extLst>
               <a:ext uri="{FF2B5EF4-FFF2-40B4-BE49-F238E27FC236}">
-                <ns2:creationId id="{33DF3D55-999F-17C8-E647-A925ABFD4B29}"/>
+                <a16:creationId id="{33DF3D55-999F-17C8-E647-A925ABFD4B29}"/>
               </a:ext>
             </a:extLst>
           </p:cNvPr>
@@ -10646,13 +10634,7 @@
       </p:cxnSp>
       <p:sp>
         <p:nvSpPr>
-          <p:cNvPr id="11" name="Footer Placeholder 3">
-            <a:extLst>
-              <a:ext uri="{FF2B5EF4-FFF2-40B4-BE49-F238E27FC236}">
-                <ns2:creationId id="{27AA374C-C403-AE7C-8C5A-C9260FD31350}"/>
-              </a:ext>
-            </a:extLst>
-          </p:cNvPr>
+          <p:cNvPr id="11" name="Footer Placeholder 3"/>
           <p:cNvSpPr txBox="1">
             <a:spLocks/>
           </p:cNvSpPr>
@@ -10811,7 +10793,7 @@
           <p:cNvPr id="6" name="Freeform 5">
             <a:extLst>
               <a:ext uri="{FF2B5EF4-FFF2-40B4-BE49-F238E27FC236}">
-                <ns2:creationId id="{58C91A8E-32A3-E6C9-3B21-6258314CE1E0}"/>
+                <a16:creationId id="{58C91A8E-32A3-E6C9-3B21-6258314CE1E0}"/>
               </a:ext>
             </a:extLst>
           </p:cNvPr>
@@ -11407,7 +11389,7 @@
           <p:cNvPr id="7" name="Freeform 6">
             <a:extLst>
               <a:ext uri="{FF2B5EF4-FFF2-40B4-BE49-F238E27FC236}">
-                <ns2:creationId id="{510BA2CB-DE8D-42AC-CE1A-16118C17D521}"/>
+                <a16:creationId id="{510BA2CB-DE8D-42AC-CE1A-16118C17D521}"/>
               </a:ext>
             </a:extLst>
           </p:cNvPr>
@@ -12269,7 +12251,7 @@
           <p:cNvPr id="9" name="Oval 8">
             <a:extLst>
               <a:ext uri="{FF2B5EF4-FFF2-40B4-BE49-F238E27FC236}">
-                <ns2:creationId id="{568F11F0-CD68-B68F-145C-42747F6BA3CB}"/>
+                <a16:creationId id="{568F11F0-CD68-B68F-145C-42747F6BA3CB}"/>
               </a:ext>
             </a:extLst>
           </p:cNvPr>
@@ -12323,7 +12305,7 @@
           <p:cNvPr id="10" name="Oval 9">
             <a:extLst>
               <a:ext uri="{FF2B5EF4-FFF2-40B4-BE49-F238E27FC236}">
-                <ns2:creationId id="{6BC2B4CC-1274-7B5E-9B1C-D914D507A56F}"/>
+                <a16:creationId id="{6BC2B4CC-1274-7B5E-9B1C-D914D507A56F}"/>
               </a:ext>
             </a:extLst>
           </p:cNvPr>
@@ -12377,7 +12359,7 @@
           <p:cNvPr id="25" name="Rectangle 24">
             <a:extLst>
               <a:ext uri="{FF2B5EF4-FFF2-40B4-BE49-F238E27FC236}">
-                <ns2:creationId id="{79427490-B6E9-7801-97EB-47C4A21F9FE6}"/>
+                <a16:creationId id="{79427490-B6E9-7801-97EB-47C4A21F9FE6}"/>
               </a:ext>
             </a:extLst>
           </p:cNvPr>
@@ -12430,7 +12412,7 @@
           <p:cNvPr id="3" name="Straight Arrow Connector 2">
             <a:extLst>
               <a:ext uri="{FF2B5EF4-FFF2-40B4-BE49-F238E27FC236}">
-                <ns2:creationId id="{EB763B1F-F575-913F-DB72-76ED511A0D0B}"/>
+                <a16:creationId id="{EB763B1F-F575-913F-DB72-76ED511A0D0B}"/>
               </a:ext>
             </a:extLst>
           </p:cNvPr>
@@ -12475,7 +12457,7 @@
           <p:cNvPr id="4" name="Straight Arrow Connector 3">
             <a:extLst>
               <a:ext uri="{FF2B5EF4-FFF2-40B4-BE49-F238E27FC236}">
-                <ns2:creationId id="{A90A4078-7CAB-D43F-FE11-DE676579B333}"/>
+                <a16:creationId id="{A90A4078-7CAB-D43F-FE11-DE676579B333}"/>
               </a:ext>
             </a:extLst>
           </p:cNvPr>
@@ -12520,7 +12502,7 @@
           <p:cNvPr id="5" name="TextBox 4">
             <a:extLst>
               <a:ext uri="{FF2B5EF4-FFF2-40B4-BE49-F238E27FC236}">
-                <ns2:creationId id="{93EE6640-E2D5-2697-152F-1AC92ACF6299}"/>
+                <a16:creationId id="{93EE6640-E2D5-2697-152F-1AC92ACF6299}"/>
               </a:ext>
             </a:extLst>
           </p:cNvPr>
@@ -12585,7 +12567,7 @@
           <p:cNvPr id="8" name="TextBox 7">
             <a:extLst>
               <a:ext uri="{FF2B5EF4-FFF2-40B4-BE49-F238E27FC236}">
-                <ns2:creationId id="{C7F4CB60-409A-DA93-8D6D-DBB74A32F30C}"/>
+                <a16:creationId id="{C7F4CB60-409A-DA93-8D6D-DBB74A32F30C}"/>
               </a:ext>
             </a:extLst>
           </p:cNvPr>
@@ -12646,7 +12628,7 @@
           <p:cNvPr id="17" name="TextBox 16">
             <a:extLst>
               <a:ext uri="{FF2B5EF4-FFF2-40B4-BE49-F238E27FC236}">
-                <ns2:creationId id="{F4E68F9E-0E13-E904-E4B5-DEC42C339288}"/>
+                <a16:creationId id="{F4E68F9E-0E13-E904-E4B5-DEC42C339288}"/>
               </a:ext>
             </a:extLst>
           </p:cNvPr>
@@ -12730,7 +12712,7 @@
           <p:cNvPr id="31" name="Freeform 30">
             <a:extLst>
               <a:ext uri="{FF2B5EF4-FFF2-40B4-BE49-F238E27FC236}">
-                <ns2:creationId id="{EBDD718E-B038-498A-81E1-4720CA22C4E4}"/>
+                <a16:creationId id="{EBDD718E-B038-498A-81E1-4720CA22C4E4}"/>
               </a:ext>
             </a:extLst>
           </p:cNvPr>
@@ -13590,7 +13572,7 @@
           <p:cNvPr id="32" name="Oval 31">
             <a:extLst>
               <a:ext uri="{FF2B5EF4-FFF2-40B4-BE49-F238E27FC236}">
-                <ns2:creationId id="{852BC428-A99B-91EE-DF01-3864DEC4D4BF}"/>
+                <a16:creationId id="{852BC428-A99B-91EE-DF01-3864DEC4D4BF}"/>
               </a:ext>
             </a:extLst>
           </p:cNvPr>
@@ -13644,7 +13626,7 @@
           <p:cNvPr id="33" name="Oval 32">
             <a:extLst>
               <a:ext uri="{FF2B5EF4-FFF2-40B4-BE49-F238E27FC236}">
-                <ns2:creationId id="{EFBFF3EA-59F3-C535-EFC4-37E6E9B87AAA}"/>
+                <a16:creationId id="{EFBFF3EA-59F3-C535-EFC4-37E6E9B87AAA}"/>
               </a:ext>
             </a:extLst>
           </p:cNvPr>
@@ -13698,7 +13680,7 @@
           <p:cNvPr id="35" name="TextBox 34">
             <a:extLst>
               <a:ext uri="{FF2B5EF4-FFF2-40B4-BE49-F238E27FC236}">
-                <ns2:creationId id="{2A61F73B-4578-41C1-C8EB-DAA0E81D6643}"/>
+                <a16:creationId id="{2A61F73B-4578-41C1-C8EB-DAA0E81D6643}"/>
               </a:ext>
             </a:extLst>
           </p:cNvPr>
@@ -14289,7 +14271,7 @@
     </p:spTree>
     <p:extLst>
       <p:ext uri="{BB962C8B-B14F-4D97-AF65-F5344CB8AC3E}">
-        <p14:creationId val="3144987668"/>
+        <ns3:creationId val="3144987668"/>
       </p:ext>
     </p:extLst>
   </p:cSld>
@@ -14300,7 +14282,7 @@
 </file>
 
 <file path=ppt/slides/slide12.xml><?xml version="1.0" encoding="utf-8"?>
-<p:sld xmlns:a="http://schemas.openxmlformats.org/drawingml/2006/main" xmlns:ns2="http://schemas.microsoft.com/office/drawing/2014/main" xmlns:p="http://schemas.openxmlformats.org/presentationml/2006/main" xmlns:p14="http://schemas.microsoft.com/office/powerpoint/2010/main">
+<p:sld xmlns:a="http://schemas.openxmlformats.org/drawingml/2006/main" xmlns:a16="http://schemas.microsoft.com/office/drawing/2014/main" xmlns:ns3="http://schemas.microsoft.com/office/powerpoint/2010/main" xmlns:p="http://schemas.openxmlformats.org/presentationml/2006/main">
   <p:cSld>
     <p:bg>
       <p:bgPr>
@@ -14315,7 +14297,7 @@
         <p:cNvPr id="1" name="">
           <a:extLst>
             <a:ext uri="{FF2B5EF4-FFF2-40B4-BE49-F238E27FC236}">
-              <ns2:creationId id="{2CB0C588-8647-6C8C-8DC7-F162DDF8BF26}"/>
+              <a16:creationId id="{2CB0C588-8647-6C8C-8DC7-F162DDF8BF26}"/>
             </a:ext>
           </a:extLst>
         </p:cNvPr>
@@ -14332,13 +14314,7 @@
       </p:grpSpPr>
       <p:sp>
         <p:nvSpPr>
-          <p:cNvPr id="5" name="Footer Placeholder 3">
-            <a:extLst>
-              <a:ext uri="{FF2B5EF4-FFF2-40B4-BE49-F238E27FC236}">
-                <ns2:creationId id="{D8055493-6465-E03D-4E0E-CA86B923D2DB}"/>
-              </a:ext>
-            </a:extLst>
-          </p:cNvPr>
+          <p:cNvPr id="5" name="Footer Placeholder 3"/>
           <p:cNvSpPr txBox="1">
             <a:spLocks/>
           </p:cNvSpPr>
@@ -14497,7 +14473,7 @@
           <p:cNvPr id="19" name="Rectangle 18">
             <a:extLst>
               <a:ext uri="{FF2B5EF4-FFF2-40B4-BE49-F238E27FC236}">
-                <ns2:creationId id="{232D04D3-E71C-CAE2-097F-314B5E11C0F3}"/>
+                <a16:creationId id="{232D04D3-E71C-CAE2-097F-314B5E11C0F3}"/>
               </a:ext>
             </a:extLst>
           </p:cNvPr>
@@ -14562,7 +14538,7 @@
           <p:cNvPr id="2" name="TextBox 1">
             <a:extLst>
               <a:ext uri="{FF2B5EF4-FFF2-40B4-BE49-F238E27FC236}">
-                <ns2:creationId id="{5B66C1A2-52BD-EA60-BE8F-C5D3C8F732D2}"/>
+                <a16:creationId id="{5B66C1A2-52BD-EA60-BE8F-C5D3C8F732D2}"/>
               </a:ext>
             </a:extLst>
           </p:cNvPr>
@@ -14868,7 +14844,7 @@
     </p:spTree>
     <p:extLst>
       <p:ext uri="{BB962C8B-B14F-4D97-AF65-F5344CB8AC3E}">
-        <p14:creationId val="3670680207"/>
+        <ns3:creationId val="3670680207"/>
       </p:ext>
     </p:extLst>
   </p:cSld>
@@ -14879,7 +14855,7 @@
 </file>
 
 <file path=ppt/slides/slide2.xml><?xml version="1.0" encoding="utf-8"?>
-<p:sld xmlns:a="http://schemas.openxmlformats.org/drawingml/2006/main" xmlns:ns2="http://schemas.microsoft.com/office/drawing/2014/main" xmlns:p="http://schemas.openxmlformats.org/presentationml/2006/main" xmlns:p14="http://schemas.microsoft.com/office/powerpoint/2010/main">
+<p:sld xmlns:a="http://schemas.openxmlformats.org/drawingml/2006/main" xmlns:a16="http://schemas.microsoft.com/office/drawing/2014/main" xmlns:ns3="http://schemas.microsoft.com/office/powerpoint/2010/main" xmlns:p="http://schemas.openxmlformats.org/presentationml/2006/main">
   <p:cSld>
     <p:bg>
       <p:bgPr>
@@ -14894,7 +14870,7 @@
         <p:cNvPr id="1" name="">
           <a:extLst>
             <a:ext uri="{FF2B5EF4-FFF2-40B4-BE49-F238E27FC236}">
-              <ns2:creationId id="{14568406-B066-AEBE-C74B-068160974652}"/>
+              <a16:creationId id="{14568406-B066-AEBE-C74B-068160974652}"/>
             </a:ext>
           </a:extLst>
         </p:cNvPr>
@@ -14911,13 +14887,7 @@
       </p:grpSpPr>
       <p:sp>
         <p:nvSpPr>
-          <p:cNvPr id="5" name="Footer Placeholder 3">
-            <a:extLst>
-              <a:ext uri="{FF2B5EF4-FFF2-40B4-BE49-F238E27FC236}">
-                <ns2:creationId id="{27CEA6F2-4AF1-97D8-38AC-41B557BE51CF}"/>
-              </a:ext>
-            </a:extLst>
-          </p:cNvPr>
+          <p:cNvPr id="5" name="Footer Placeholder 3"/>
           <p:cNvSpPr txBox="1">
             <a:spLocks/>
           </p:cNvSpPr>
@@ -15076,7 +15046,7 @@
           <p:cNvPr id="6" name="Group 5">
             <a:extLst>
               <a:ext uri="{FF2B5EF4-FFF2-40B4-BE49-F238E27FC236}">
-                <ns2:creationId id="{C81263DC-661D-BD50-5933-E8227696F8DE}"/>
+                <a16:creationId id="{C81263DC-661D-BD50-5933-E8227696F8DE}"/>
               </a:ext>
             </a:extLst>
           </p:cNvPr>
@@ -15096,7 +15066,7 @@
             <p:cNvPr id="3" name="Straight Arrow Connector 2">
               <a:extLst>
                 <a:ext uri="{FF2B5EF4-FFF2-40B4-BE49-F238E27FC236}">
-                  <ns2:creationId id="{8B149F79-E249-261E-9112-BF1D70D76419}"/>
+                  <a16:creationId id="{8B149F79-E249-261E-9112-BF1D70D76419}"/>
                 </a:ext>
               </a:extLst>
             </p:cNvPr>
@@ -15140,7 +15110,7 @@
             <p:cNvPr id="8" name="Straight Arrow Connector 7">
               <a:extLst>
                 <a:ext uri="{FF2B5EF4-FFF2-40B4-BE49-F238E27FC236}">
-                  <ns2:creationId id="{259C9B9C-0329-E856-17CB-C966D0778D39}"/>
+                  <a16:creationId id="{259C9B9C-0329-E856-17CB-C966D0778D39}"/>
                 </a:ext>
               </a:extLst>
             </p:cNvPr>
@@ -15184,7 +15154,7 @@
             <p:cNvPr id="12" name="TextBox 11">
               <a:extLst>
                 <a:ext uri="{FF2B5EF4-FFF2-40B4-BE49-F238E27FC236}">
-                  <ns2:creationId id="{7C27133D-1A03-8C4F-53C4-564B9AE5C189}"/>
+                  <a16:creationId id="{7C27133D-1A03-8C4F-53C4-564B9AE5C189}"/>
                 </a:ext>
               </a:extLst>
             </p:cNvPr>
@@ -15249,7 +15219,7 @@
             <p:cNvPr id="13" name="TextBox 12">
               <a:extLst>
                 <a:ext uri="{FF2B5EF4-FFF2-40B4-BE49-F238E27FC236}">
-                  <ns2:creationId id="{0F3C3A2E-72E6-5B26-7E8C-2A2E59D8C3F6}"/>
+                  <a16:creationId id="{0F3C3A2E-72E6-5B26-7E8C-2A2E59D8C3F6}"/>
                 </a:ext>
               </a:extLst>
             </p:cNvPr>
@@ -15311,7 +15281,7 @@
           <p:cNvPr id="23" name="Oval 22">
             <a:extLst>
               <a:ext uri="{FF2B5EF4-FFF2-40B4-BE49-F238E27FC236}">
-                <ns2:creationId id="{F069ACCF-49B1-2004-B9BA-C32EA1E82492}"/>
+                <a16:creationId id="{F069ACCF-49B1-2004-B9BA-C32EA1E82492}"/>
               </a:ext>
             </a:extLst>
           </p:cNvPr>
@@ -15395,7 +15365,7 @@
           <p:cNvPr id="27" name="Oval 26">
             <a:extLst>
               <a:ext uri="{FF2B5EF4-FFF2-40B4-BE49-F238E27FC236}">
-                <ns2:creationId id="{A2120CF2-66F6-E863-1722-E1EBC99EB320}"/>
+                <a16:creationId id="{A2120CF2-66F6-E863-1722-E1EBC99EB320}"/>
               </a:ext>
             </a:extLst>
           </p:cNvPr>
@@ -15479,7 +15449,7 @@
           <p:cNvPr id="28" name="Oval 27">
             <a:extLst>
               <a:ext uri="{FF2B5EF4-FFF2-40B4-BE49-F238E27FC236}">
-                <ns2:creationId id="{2CF23E24-ED96-772A-8248-1491441DB146}"/>
+                <a16:creationId id="{2CF23E24-ED96-772A-8248-1491441DB146}"/>
               </a:ext>
             </a:extLst>
           </p:cNvPr>
@@ -15563,7 +15533,7 @@
           <p:cNvPr id="29" name="Oval 28">
             <a:extLst>
               <a:ext uri="{FF2B5EF4-FFF2-40B4-BE49-F238E27FC236}">
-                <ns2:creationId id="{25A0A0B3-E20A-4CC2-79D9-E97020D601A7}"/>
+                <a16:creationId id="{25A0A0B3-E20A-4CC2-79D9-E97020D601A7}"/>
               </a:ext>
             </a:extLst>
           </p:cNvPr>
@@ -15647,7 +15617,7 @@
           <p:cNvPr id="30" name="Oval 29">
             <a:extLst>
               <a:ext uri="{FF2B5EF4-FFF2-40B4-BE49-F238E27FC236}">
-                <ns2:creationId id="{7969DEBF-EEB6-634C-020A-385E24FBF8E1}"/>
+                <a16:creationId id="{7969DEBF-EEB6-634C-020A-385E24FBF8E1}"/>
               </a:ext>
             </a:extLst>
           </p:cNvPr>
@@ -15731,7 +15701,7 @@
           <p:cNvPr id="4" name="Straight Connector 3">
             <a:extLst>
               <a:ext uri="{FF2B5EF4-FFF2-40B4-BE49-F238E27FC236}">
-                <ns2:creationId id="{2C66513A-9085-17C4-C9C2-3742BE2C33D7}"/>
+                <a16:creationId id="{2C66513A-9085-17C4-C9C2-3742BE2C33D7}"/>
               </a:ext>
             </a:extLst>
           </p:cNvPr>
@@ -15774,7 +15744,7 @@
           <p:cNvPr id="18" name="Oval 17">
             <a:extLst>
               <a:ext uri="{FF2B5EF4-FFF2-40B4-BE49-F238E27FC236}">
-                <ns2:creationId id="{9E30E225-012D-EE67-96E9-8843E769C6E1}"/>
+                <a16:creationId id="{9E30E225-012D-EE67-96E9-8843E769C6E1}"/>
               </a:ext>
             </a:extLst>
           </p:cNvPr>
@@ -15857,7 +15827,7 @@
           <p:cNvPr id="11" name="Group 10">
             <a:extLst>
               <a:ext uri="{FF2B5EF4-FFF2-40B4-BE49-F238E27FC236}">
-                <ns2:creationId id="{CE7A3B85-FDA3-45E2-9BB3-D32BED764091}"/>
+                <a16:creationId id="{CE7A3B85-FDA3-45E2-9BB3-D32BED764091}"/>
               </a:ext>
             </a:extLst>
           </p:cNvPr>
@@ -15877,7 +15847,7 @@
             <p:cNvPr id="24" name="Straight Arrow Connector 23">
               <a:extLst>
                 <a:ext uri="{FF2B5EF4-FFF2-40B4-BE49-F238E27FC236}">
-                  <ns2:creationId id="{5AAF8464-4AF0-1ED4-EC84-883D9DCBAE2E}"/>
+                  <a16:creationId id="{5AAF8464-4AF0-1ED4-EC84-883D9DCBAE2E}"/>
                 </a:ext>
               </a:extLst>
             </p:cNvPr>
@@ -15922,7 +15892,7 @@
             <p:cNvPr id="10" name="TextBox 9">
               <a:extLst>
                 <a:ext uri="{FF2B5EF4-FFF2-40B4-BE49-F238E27FC236}">
-                  <ns2:creationId id="{D4526506-8D04-242E-625D-A7D78BFFEE82}"/>
+                  <a16:creationId id="{D4526506-8D04-242E-625D-A7D78BFFEE82}"/>
                 </a:ext>
               </a:extLst>
             </p:cNvPr>
@@ -16005,7 +15975,7 @@
           <p:cNvPr id="31" name="TextBox 30">
             <a:extLst>
               <a:ext uri="{FF2B5EF4-FFF2-40B4-BE49-F238E27FC236}">
-                <ns2:creationId id="{0715B65B-EE48-6433-EFA6-8AFF4BF52B13}"/>
+                <a16:creationId id="{0715B65B-EE48-6433-EFA6-8AFF4BF52B13}"/>
               </a:ext>
             </a:extLst>
           </p:cNvPr>
@@ -16107,7 +16077,7 @@
           <p:cNvPr id="36" name="TextBox 35">
             <a:extLst>
               <a:ext uri="{FF2B5EF4-FFF2-40B4-BE49-F238E27FC236}">
-                <ns2:creationId id="{2639C71E-8510-A47A-CB6E-BD88DBD2D9D2}"/>
+                <a16:creationId id="{2639C71E-8510-A47A-CB6E-BD88DBD2D9D2}"/>
               </a:ext>
             </a:extLst>
           </p:cNvPr>
@@ -16189,7 +16159,7 @@
           <p:cNvPr id="22" name="Straight Connector 21">
             <a:extLst>
               <a:ext uri="{FF2B5EF4-FFF2-40B4-BE49-F238E27FC236}">
-                <ns2:creationId id="{48D6CF27-A191-E604-D02B-B71D144C595B}"/>
+                <a16:creationId id="{48D6CF27-A191-E604-D02B-B71D144C595B}"/>
               </a:ext>
             </a:extLst>
           </p:cNvPr>
@@ -16232,7 +16202,7 @@
           <p:cNvPr id="2" name="Title 1">
             <a:extLst>
               <a:ext uri="{FF2B5EF4-FFF2-40B4-BE49-F238E27FC236}">
-                <ns2:creationId id="{62407ED0-1A7F-69F0-224E-34E3BAB4AEB7}"/>
+                <a16:creationId id="{62407ED0-1A7F-69F0-224E-34E3BAB4AEB7}"/>
               </a:ext>
             </a:extLst>
           </p:cNvPr>
@@ -16316,7 +16286,7 @@
           <p:cNvPr id="7" name="Rectangle 6">
             <a:extLst>
               <a:ext uri="{FF2B5EF4-FFF2-40B4-BE49-F238E27FC236}">
-                <ns2:creationId id="{E63833BB-E257-5DD8-D2DC-4EDC10C1D9B0}"/>
+                <a16:creationId id="{E63833BB-E257-5DD8-D2DC-4EDC10C1D9B0}"/>
               </a:ext>
             </a:extLst>
           </p:cNvPr>
@@ -16380,7 +16350,7 @@
           <p:cNvPr id="15" name="Straight Arrow Connector 14">
             <a:extLst>
               <a:ext uri="{FF2B5EF4-FFF2-40B4-BE49-F238E27FC236}">
-                <ns2:creationId id="{F4A7F80E-6EB4-D3A1-C496-DA676D8B14B8}"/>
+                <a16:creationId id="{F4A7F80E-6EB4-D3A1-C496-DA676D8B14B8}"/>
               </a:ext>
             </a:extLst>
           </p:cNvPr>
@@ -16426,7 +16396,7 @@
           <p:cNvPr id="32" name="Straight Arrow Connector 31">
             <a:extLst>
               <a:ext uri="{FF2B5EF4-FFF2-40B4-BE49-F238E27FC236}">
-                <ns2:creationId id="{E4BBFD59-613F-87DB-D8CE-C4CD0658E65A}"/>
+                <a16:creationId id="{E4BBFD59-613F-87DB-D8CE-C4CD0658E65A}"/>
               </a:ext>
             </a:extLst>
           </p:cNvPr>
@@ -16472,7 +16442,7 @@
           <p:cNvPr id="35" name="Straight Arrow Connector 34">
             <a:extLst>
               <a:ext uri="{FF2B5EF4-FFF2-40B4-BE49-F238E27FC236}">
-                <ns2:creationId id="{6170C482-A85C-519C-1C68-E52F3D321552}"/>
+                <a16:creationId id="{6170C482-A85C-519C-1C68-E52F3D321552}"/>
               </a:ext>
             </a:extLst>
           </p:cNvPr>
@@ -16518,7 +16488,7 @@
           <p:cNvPr id="39" name="Straight Arrow Connector 38">
             <a:extLst>
               <a:ext uri="{FF2B5EF4-FFF2-40B4-BE49-F238E27FC236}">
-                <ns2:creationId id="{4230761A-8EDF-2FA3-7DBE-AF384628B09E}"/>
+                <a16:creationId id="{4230761A-8EDF-2FA3-7DBE-AF384628B09E}"/>
               </a:ext>
             </a:extLst>
           </p:cNvPr>
@@ -16564,7 +16534,7 @@
           <p:cNvPr id="47" name="Straight Arrow Connector 46">
             <a:extLst>
               <a:ext uri="{FF2B5EF4-FFF2-40B4-BE49-F238E27FC236}">
-                <ns2:creationId id="{D3EF506B-E81E-4405-B45C-DFB8F9DA0D65}"/>
+                <a16:creationId id="{D3EF506B-E81E-4405-B45C-DFB8F9DA0D65}"/>
               </a:ext>
             </a:extLst>
           </p:cNvPr>
@@ -16610,7 +16580,7 @@
           <p:cNvPr id="9" name="TextBox 8">
             <a:extLst>
               <a:ext uri="{FF2B5EF4-FFF2-40B4-BE49-F238E27FC236}">
-                <ns2:creationId id="{9B5DCDDF-276B-4F6E-7066-014AE9A59CCC}"/>
+                <a16:creationId id="{9B5DCDDF-276B-4F6E-7066-014AE9A59CCC}"/>
               </a:ext>
             </a:extLst>
           </p:cNvPr>
@@ -16692,7 +16662,7 @@
           <p:cNvPr id="14" name="Rectangle 13">
             <a:extLst>
               <a:ext uri="{FF2B5EF4-FFF2-40B4-BE49-F238E27FC236}">
-                <ns2:creationId id="{99560D5F-868F-8968-4ED0-12355714D7FF}"/>
+                <a16:creationId id="{99560D5F-868F-8968-4ED0-12355714D7FF}"/>
               </a:ext>
             </a:extLst>
           </p:cNvPr>
@@ -16759,7 +16729,7 @@
     </p:spTree>
     <p:extLst>
       <p:ext uri="{BB962C8B-B14F-4D97-AF65-F5344CB8AC3E}">
-        <p14:creationId val="3801198229"/>
+        <ns3:creationId val="3801198229"/>
       </p:ext>
     </p:extLst>
   </p:cSld>
@@ -16770,7 +16740,7 @@
 </file>
 
 <file path=ppt/slides/slide3.xml><?xml version="1.0" encoding="utf-8"?>
-<p:sld xmlns:a="http://schemas.openxmlformats.org/drawingml/2006/main" xmlns:ns2="http://schemas.microsoft.com/office/drawing/2014/main" xmlns:p="http://schemas.openxmlformats.org/presentationml/2006/main" xmlns:p14="http://schemas.microsoft.com/office/powerpoint/2010/main">
+<p:sld xmlns:a="http://schemas.openxmlformats.org/drawingml/2006/main" xmlns:a16="http://schemas.microsoft.com/office/drawing/2014/main" xmlns:ns3="http://schemas.microsoft.com/office/powerpoint/2010/main" xmlns:p="http://schemas.openxmlformats.org/presentationml/2006/main">
   <p:cSld>
     <p:bg>
       <p:bgPr>
@@ -16796,13 +16766,7 @@
       </p:grpSpPr>
       <p:sp>
         <p:nvSpPr>
-          <p:cNvPr id="5" name="Footer Placeholder 3">
-            <a:extLst>
-              <a:ext uri="{FF2B5EF4-FFF2-40B4-BE49-F238E27FC236}">
-                <ns2:creationId id="{668F77D6-DFDA-5A46-8DF1-47F6A167C2B1}"/>
-              </a:ext>
-            </a:extLst>
-          </p:cNvPr>
+          <p:cNvPr id="5" name="Footer Placeholder 3"/>
           <p:cNvSpPr txBox="1">
             <a:spLocks/>
           </p:cNvSpPr>
@@ -16961,7 +16925,7 @@
           <p:cNvPr id="6" name="Group 5">
             <a:extLst>
               <a:ext uri="{FF2B5EF4-FFF2-40B4-BE49-F238E27FC236}">
-                <ns2:creationId id="{CB214E5A-63A5-5C6B-3D5B-75FF74FA3E5A}"/>
+                <a16:creationId id="{CB214E5A-63A5-5C6B-3D5B-75FF74FA3E5A}"/>
               </a:ext>
             </a:extLst>
           </p:cNvPr>
@@ -16981,7 +16945,7 @@
             <p:cNvPr id="3" name="Straight Arrow Connector 2">
               <a:extLst>
                 <a:ext uri="{FF2B5EF4-FFF2-40B4-BE49-F238E27FC236}">
-                  <ns2:creationId id="{2EF0199F-22F4-BA42-9B75-8A8183BCDA9B}"/>
+                  <a16:creationId id="{2EF0199F-22F4-BA42-9B75-8A8183BCDA9B}"/>
                 </a:ext>
               </a:extLst>
             </p:cNvPr>
@@ -17025,7 +16989,7 @@
             <p:cNvPr id="8" name="Straight Arrow Connector 7">
               <a:extLst>
                 <a:ext uri="{FF2B5EF4-FFF2-40B4-BE49-F238E27FC236}">
-                  <ns2:creationId id="{49AB5343-55D0-6041-8627-E08A73F83930}"/>
+                  <a16:creationId id="{49AB5343-55D0-6041-8627-E08A73F83930}"/>
                 </a:ext>
               </a:extLst>
             </p:cNvPr>
@@ -17069,7 +17033,7 @@
             <p:cNvPr id="12" name="TextBox 11">
               <a:extLst>
                 <a:ext uri="{FF2B5EF4-FFF2-40B4-BE49-F238E27FC236}">
-                  <ns2:creationId id="{BF8D86A2-D083-024A-BC90-6BD938C23243}"/>
+                  <a16:creationId id="{BF8D86A2-D083-024A-BC90-6BD938C23243}"/>
                 </a:ext>
               </a:extLst>
             </p:cNvPr>
@@ -17134,7 +17098,7 @@
             <p:cNvPr id="13" name="TextBox 12">
               <a:extLst>
                 <a:ext uri="{FF2B5EF4-FFF2-40B4-BE49-F238E27FC236}">
-                  <ns2:creationId id="{2C3F4604-6C2F-0E4E-9DD3-4F5C89FF51AB}"/>
+                  <a16:creationId id="{2C3F4604-6C2F-0E4E-9DD3-4F5C89FF51AB}"/>
                 </a:ext>
               </a:extLst>
             </p:cNvPr>
@@ -17244,7 +17208,7 @@
           <p:cNvPr id="23" name="Oval 22">
             <a:extLst>
               <a:ext uri="{FF2B5EF4-FFF2-40B4-BE49-F238E27FC236}">
-                <ns2:creationId id="{0112617B-A1D5-1E41-BF92-E67D4E046E39}"/>
+                <a16:creationId id="{0112617B-A1D5-1E41-BF92-E67D4E046E39}"/>
               </a:ext>
             </a:extLst>
           </p:cNvPr>
@@ -17328,7 +17292,7 @@
           <p:cNvPr id="27" name="Oval 26">
             <a:extLst>
               <a:ext uri="{FF2B5EF4-FFF2-40B4-BE49-F238E27FC236}">
-                <ns2:creationId id="{6EF0F7DA-5E70-8348-A200-F59A10FF7C55}"/>
+                <a16:creationId id="{6EF0F7DA-5E70-8348-A200-F59A10FF7C55}"/>
               </a:ext>
             </a:extLst>
           </p:cNvPr>
@@ -17412,7 +17376,7 @@
           <p:cNvPr id="28" name="Oval 27">
             <a:extLst>
               <a:ext uri="{FF2B5EF4-FFF2-40B4-BE49-F238E27FC236}">
-                <ns2:creationId id="{552F58D0-F613-674A-B294-C894E5FB1683}"/>
+                <a16:creationId id="{552F58D0-F613-674A-B294-C894E5FB1683}"/>
               </a:ext>
             </a:extLst>
           </p:cNvPr>
@@ -17496,7 +17460,7 @@
           <p:cNvPr id="29" name="Oval 28">
             <a:extLst>
               <a:ext uri="{FF2B5EF4-FFF2-40B4-BE49-F238E27FC236}">
-                <ns2:creationId id="{9CA7A721-D3BD-744E-9306-85BBED5F74BC}"/>
+                <a16:creationId id="{9CA7A721-D3BD-744E-9306-85BBED5F74BC}"/>
               </a:ext>
             </a:extLst>
           </p:cNvPr>
@@ -17580,7 +17544,7 @@
           <p:cNvPr id="30" name="Oval 29">
             <a:extLst>
               <a:ext uri="{FF2B5EF4-FFF2-40B4-BE49-F238E27FC236}">
-                <ns2:creationId id="{F97F1A02-C0C7-3C45-9790-847C152D159A}"/>
+                <a16:creationId id="{F97F1A02-C0C7-3C45-9790-847C152D159A}"/>
               </a:ext>
             </a:extLst>
           </p:cNvPr>
@@ -17664,7 +17628,7 @@
           <p:cNvPr id="18" name="Oval 17">
             <a:extLst>
               <a:ext uri="{FF2B5EF4-FFF2-40B4-BE49-F238E27FC236}">
-                <ns2:creationId id="{BE4CDC90-4B2E-BE41-BB9D-A84675F3A2FE}"/>
+                <a16:creationId id="{BE4CDC90-4B2E-BE41-BB9D-A84675F3A2FE}"/>
               </a:ext>
             </a:extLst>
           </p:cNvPr>
@@ -17747,7 +17711,7 @@
           <p:cNvPr id="31" name="TextBox 30">
             <a:extLst>
               <a:ext uri="{FF2B5EF4-FFF2-40B4-BE49-F238E27FC236}">
-                <ns2:creationId id="{713B9ACE-B673-2D48-BEF2-2A133C31B527}"/>
+                <a16:creationId id="{713B9ACE-B673-2D48-BEF2-2A133C31B527}"/>
               </a:ext>
             </a:extLst>
           </p:cNvPr>
@@ -17849,7 +17813,7 @@
           <p:cNvPr id="36" name="TextBox 35">
             <a:extLst>
               <a:ext uri="{FF2B5EF4-FFF2-40B4-BE49-F238E27FC236}">
-                <ns2:creationId id="{3A81A480-EF64-094E-825A-8592DAA4C672}"/>
+                <a16:creationId id="{3A81A480-EF64-094E-825A-8592DAA4C672}"/>
               </a:ext>
             </a:extLst>
           </p:cNvPr>
@@ -17931,7 +17895,7 @@
           <p:cNvPr id="22" name="Straight Connector 21">
             <a:extLst>
               <a:ext uri="{FF2B5EF4-FFF2-40B4-BE49-F238E27FC236}">
-                <ns2:creationId id="{0C67DA45-6876-7942-9996-48CA0A1696FE}"/>
+                <a16:creationId id="{0C67DA45-6876-7942-9996-48CA0A1696FE}"/>
               </a:ext>
             </a:extLst>
           </p:cNvPr>
@@ -17974,7 +17938,7 @@
           <p:cNvPr id="15" name="Straight Arrow Connector 14">
             <a:extLst>
               <a:ext uri="{FF2B5EF4-FFF2-40B4-BE49-F238E27FC236}">
-                <ns2:creationId id="{05289ED1-4679-6543-A669-B23443FD0CD8}"/>
+                <a16:creationId id="{05289ED1-4679-6543-A669-B23443FD0CD8}"/>
               </a:ext>
             </a:extLst>
           </p:cNvPr>
@@ -18020,7 +17984,7 @@
           <p:cNvPr id="14" name="Rectangle 13">
             <a:extLst>
               <a:ext uri="{FF2B5EF4-FFF2-40B4-BE49-F238E27FC236}">
-                <ns2:creationId id="{24DFEA8B-B2CC-4557-5832-83CBF458C62D}"/>
+                <a16:creationId id="{24DFEA8B-B2CC-4557-5832-83CBF458C62D}"/>
               </a:ext>
             </a:extLst>
           </p:cNvPr>
@@ -18089,7 +18053,7 @@
           <p:cNvPr id="17" name="TextBox 16">
             <a:extLst>
               <a:ext uri="{FF2B5EF4-FFF2-40B4-BE49-F238E27FC236}">
-                <ns2:creationId id="{F6A93B37-78E4-125D-E0BF-C1EC32C24D2E}"/>
+                <a16:creationId id="{F6A93B37-78E4-125D-E0BF-C1EC32C24D2E}"/>
               </a:ext>
             </a:extLst>
           </p:cNvPr>
@@ -18152,7 +18116,7 @@
           <p:cNvPr id="19" name="TextBox 18">
             <a:extLst>
               <a:ext uri="{FF2B5EF4-FFF2-40B4-BE49-F238E27FC236}">
-                <ns2:creationId id="{D1F40738-506F-EAAF-7EBE-CFC9B4FE4D03}"/>
+                <a16:creationId id="{D1F40738-506F-EAAF-7EBE-CFC9B4FE4D03}"/>
               </a:ext>
             </a:extLst>
           </p:cNvPr>
@@ -18215,7 +18179,7 @@
     </p:spTree>
     <p:extLst>
       <p:ext uri="{BB962C8B-B14F-4D97-AF65-F5344CB8AC3E}">
-        <p14:creationId val="4241975687"/>
+        <ns3:creationId val="4241975687"/>
       </p:ext>
     </p:extLst>
   </p:cSld>
@@ -18226,7 +18190,7 @@
 </file>
 
 <file path=ppt/slides/slide4.xml><?xml version="1.0" encoding="utf-8"?>
-<p:sld xmlns:a="http://schemas.openxmlformats.org/drawingml/2006/main" xmlns:ns2="http://schemas.microsoft.com/office/drawing/2014/main" xmlns:p="http://schemas.openxmlformats.org/presentationml/2006/main" xmlns:p14="http://schemas.microsoft.com/office/powerpoint/2010/main">
+<p:sld xmlns:a="http://schemas.openxmlformats.org/drawingml/2006/main" xmlns:a16="http://schemas.microsoft.com/office/drawing/2014/main" xmlns:ns3="http://schemas.microsoft.com/office/powerpoint/2010/main" xmlns:p="http://schemas.openxmlformats.org/presentationml/2006/main">
   <p:cSld>
     <p:bg>
       <p:bgPr>
@@ -18241,7 +18205,7 @@
         <p:cNvPr id="1" name="">
           <a:extLst>
             <a:ext uri="{FF2B5EF4-FFF2-40B4-BE49-F238E27FC236}">
-              <ns2:creationId id="{618D555D-7286-B241-E144-DDEC77AD45E3}"/>
+              <a16:creationId id="{618D555D-7286-B241-E144-DDEC77AD45E3}"/>
             </a:ext>
           </a:extLst>
         </p:cNvPr>
@@ -18258,13 +18222,7 @@
       </p:grpSpPr>
       <p:sp>
         <p:nvSpPr>
-          <p:cNvPr id="5" name="Footer Placeholder 3">
-            <a:extLst>
-              <a:ext uri="{FF2B5EF4-FFF2-40B4-BE49-F238E27FC236}">
-                <ns2:creationId id="{614DBC08-8858-F579-1B95-86C501AB042B}"/>
-              </a:ext>
-            </a:extLst>
-          </p:cNvPr>
+          <p:cNvPr id="5" name="Footer Placeholder 3"/>
           <p:cNvSpPr txBox="1">
             <a:spLocks/>
           </p:cNvSpPr>
@@ -18423,7 +18381,7 @@
           <p:cNvPr id="6" name="Group 5">
             <a:extLst>
               <a:ext uri="{FF2B5EF4-FFF2-40B4-BE49-F238E27FC236}">
-                <ns2:creationId id="{17811428-EDBA-0366-BE63-E3E25023C8EC}"/>
+                <a16:creationId id="{17811428-EDBA-0366-BE63-E3E25023C8EC}"/>
               </a:ext>
             </a:extLst>
           </p:cNvPr>
@@ -18443,7 +18401,7 @@
             <p:cNvPr id="3" name="Straight Arrow Connector 2">
               <a:extLst>
                 <a:ext uri="{FF2B5EF4-FFF2-40B4-BE49-F238E27FC236}">
-                  <ns2:creationId id="{D482C6FD-3801-AF2C-0D9C-BDC9F781A9F9}"/>
+                  <a16:creationId id="{D482C6FD-3801-AF2C-0D9C-BDC9F781A9F9}"/>
                 </a:ext>
               </a:extLst>
             </p:cNvPr>
@@ -18487,7 +18445,7 @@
             <p:cNvPr id="8" name="Straight Arrow Connector 7">
               <a:extLst>
                 <a:ext uri="{FF2B5EF4-FFF2-40B4-BE49-F238E27FC236}">
-                  <ns2:creationId id="{F8DD0551-F57F-FC8B-CDFA-54E4DF3D076B}"/>
+                  <a16:creationId id="{F8DD0551-F57F-FC8B-CDFA-54E4DF3D076B}"/>
                 </a:ext>
               </a:extLst>
             </p:cNvPr>
@@ -18531,7 +18489,7 @@
             <p:cNvPr id="12" name="TextBox 11">
               <a:extLst>
                 <a:ext uri="{FF2B5EF4-FFF2-40B4-BE49-F238E27FC236}">
-                  <ns2:creationId id="{2419E9DF-2DD3-3506-BE3B-E485BF80EDAC}"/>
+                  <a16:creationId id="{2419E9DF-2DD3-3506-BE3B-E485BF80EDAC}"/>
                 </a:ext>
               </a:extLst>
             </p:cNvPr>
@@ -18596,7 +18554,7 @@
             <p:cNvPr id="13" name="TextBox 12">
               <a:extLst>
                 <a:ext uri="{FF2B5EF4-FFF2-40B4-BE49-F238E27FC236}">
-                  <ns2:creationId id="{93B24559-A789-4B90-E180-1E0D72CE317E}"/>
+                  <a16:creationId id="{93B24559-A789-4B90-E180-1E0D72CE317E}"/>
                 </a:ext>
               </a:extLst>
             </p:cNvPr>
@@ -18658,7 +18616,7 @@
           <p:cNvPr id="23" name="Oval 22">
             <a:extLst>
               <a:ext uri="{FF2B5EF4-FFF2-40B4-BE49-F238E27FC236}">
-                <ns2:creationId id="{61A13369-24B9-E21B-05B9-329B5FF74DB7}"/>
+                <a16:creationId id="{61A13369-24B9-E21B-05B9-329B5FF74DB7}"/>
               </a:ext>
             </a:extLst>
           </p:cNvPr>
@@ -18742,7 +18700,7 @@
           <p:cNvPr id="27" name="Oval 26">
             <a:extLst>
               <a:ext uri="{FF2B5EF4-FFF2-40B4-BE49-F238E27FC236}">
-                <ns2:creationId id="{F2B3E963-4F4B-8173-AE7C-E7942A9E266B}"/>
+                <a16:creationId id="{F2B3E963-4F4B-8173-AE7C-E7942A9E266B}"/>
               </a:ext>
             </a:extLst>
           </p:cNvPr>
@@ -18826,7 +18784,7 @@
           <p:cNvPr id="28" name="Oval 27">
             <a:extLst>
               <a:ext uri="{FF2B5EF4-FFF2-40B4-BE49-F238E27FC236}">
-                <ns2:creationId id="{9ADB633C-4072-1C73-DADA-398777D0A7CD}"/>
+                <a16:creationId id="{9ADB633C-4072-1C73-DADA-398777D0A7CD}"/>
               </a:ext>
             </a:extLst>
           </p:cNvPr>
@@ -18910,7 +18868,7 @@
           <p:cNvPr id="29" name="Oval 28">
             <a:extLst>
               <a:ext uri="{FF2B5EF4-FFF2-40B4-BE49-F238E27FC236}">
-                <ns2:creationId id="{F82B7B38-EA39-2CF9-201C-54B73DBBD4EA}"/>
+                <a16:creationId id="{F82B7B38-EA39-2CF9-201C-54B73DBBD4EA}"/>
               </a:ext>
             </a:extLst>
           </p:cNvPr>
@@ -18994,7 +18952,7 @@
           <p:cNvPr id="30" name="Oval 29">
             <a:extLst>
               <a:ext uri="{FF2B5EF4-FFF2-40B4-BE49-F238E27FC236}">
-                <ns2:creationId id="{686BDBE9-0138-6C28-BFAF-00EA8DCD973D}"/>
+                <a16:creationId id="{686BDBE9-0138-6C28-BFAF-00EA8DCD973D}"/>
               </a:ext>
             </a:extLst>
           </p:cNvPr>
@@ -19078,7 +19036,7 @@
           <p:cNvPr id="4" name="Straight Connector 3">
             <a:extLst>
               <a:ext uri="{FF2B5EF4-FFF2-40B4-BE49-F238E27FC236}">
-                <ns2:creationId id="{D0AC705D-BF37-4542-CD33-8265C0D398AC}"/>
+                <a16:creationId id="{D0AC705D-BF37-4542-CD33-8265C0D398AC}"/>
               </a:ext>
             </a:extLst>
           </p:cNvPr>
@@ -19121,7 +19079,7 @@
           <p:cNvPr id="18" name="Oval 17">
             <a:extLst>
               <a:ext uri="{FF2B5EF4-FFF2-40B4-BE49-F238E27FC236}">
-                <ns2:creationId id="{5CEE4D57-2D48-3E46-8211-494134A5C094}"/>
+                <a16:creationId id="{5CEE4D57-2D48-3E46-8211-494134A5C094}"/>
               </a:ext>
             </a:extLst>
           </p:cNvPr>
@@ -19204,7 +19162,7 @@
           <p:cNvPr id="11" name="Group 10">
             <a:extLst>
               <a:ext uri="{FF2B5EF4-FFF2-40B4-BE49-F238E27FC236}">
-                <ns2:creationId id="{D24EBF2A-B7A3-E7EB-6313-BB50CF2D3A83}"/>
+                <a16:creationId id="{D24EBF2A-B7A3-E7EB-6313-BB50CF2D3A83}"/>
               </a:ext>
             </a:extLst>
           </p:cNvPr>
@@ -19224,7 +19182,7 @@
             <p:cNvPr id="24" name="Straight Arrow Connector 23">
               <a:extLst>
                 <a:ext uri="{FF2B5EF4-FFF2-40B4-BE49-F238E27FC236}">
-                  <ns2:creationId id="{9C627068-AD0C-E2DC-60AF-7257BB046983}"/>
+                  <a16:creationId id="{9C627068-AD0C-E2DC-60AF-7257BB046983}"/>
                 </a:ext>
               </a:extLst>
             </p:cNvPr>
@@ -19269,7 +19227,7 @@
             <p:cNvPr id="10" name="TextBox 9">
               <a:extLst>
                 <a:ext uri="{FF2B5EF4-FFF2-40B4-BE49-F238E27FC236}">
-                  <ns2:creationId id="{D692B828-D19F-3AA3-05F9-AF2DE3D5C9FC}"/>
+                  <a16:creationId id="{D692B828-D19F-3AA3-05F9-AF2DE3D5C9FC}"/>
                 </a:ext>
               </a:extLst>
             </p:cNvPr>
@@ -19352,7 +19310,7 @@
           <p:cNvPr id="31" name="TextBox 30">
             <a:extLst>
               <a:ext uri="{FF2B5EF4-FFF2-40B4-BE49-F238E27FC236}">
-                <ns2:creationId id="{12D2397C-9CE3-3A8A-1558-56A5A0738C36}"/>
+                <a16:creationId id="{12D2397C-9CE3-3A8A-1558-56A5A0738C36}"/>
               </a:ext>
             </a:extLst>
           </p:cNvPr>
@@ -19454,7 +19412,7 @@
           <p:cNvPr id="36" name="TextBox 35">
             <a:extLst>
               <a:ext uri="{FF2B5EF4-FFF2-40B4-BE49-F238E27FC236}">
-                <ns2:creationId id="{2FFE4CF6-AAAC-06EA-8AB8-998E05647728}"/>
+                <a16:creationId id="{2FFE4CF6-AAAC-06EA-8AB8-998E05647728}"/>
               </a:ext>
             </a:extLst>
           </p:cNvPr>
@@ -19536,7 +19494,7 @@
           <p:cNvPr id="22" name="Straight Connector 21">
             <a:extLst>
               <a:ext uri="{FF2B5EF4-FFF2-40B4-BE49-F238E27FC236}">
-                <ns2:creationId id="{2F9013F0-6C27-F3C3-FDE3-FF0AA12CA620}"/>
+                <a16:creationId id="{2F9013F0-6C27-F3C3-FDE3-FF0AA12CA620}"/>
               </a:ext>
             </a:extLst>
           </p:cNvPr>
@@ -19579,7 +19537,7 @@
           <p:cNvPr id="15" name="Straight Arrow Connector 14">
             <a:extLst>
               <a:ext uri="{FF2B5EF4-FFF2-40B4-BE49-F238E27FC236}">
-                <ns2:creationId id="{59CD0CED-2A06-8AB7-8A69-21FAC5EC4A4F}"/>
+                <a16:creationId id="{59CD0CED-2A06-8AB7-8A69-21FAC5EC4A4F}"/>
               </a:ext>
             </a:extLst>
           </p:cNvPr>
@@ -19625,7 +19583,7 @@
           <p:cNvPr id="32" name="Straight Arrow Connector 31">
             <a:extLst>
               <a:ext uri="{FF2B5EF4-FFF2-40B4-BE49-F238E27FC236}">
-                <ns2:creationId id="{BCC5A9F1-9339-0CF6-A18E-4B7BE46AB529}"/>
+                <a16:creationId id="{BCC5A9F1-9339-0CF6-A18E-4B7BE46AB529}"/>
               </a:ext>
             </a:extLst>
           </p:cNvPr>
@@ -19671,7 +19629,7 @@
           <p:cNvPr id="35" name="Straight Arrow Connector 34">
             <a:extLst>
               <a:ext uri="{FF2B5EF4-FFF2-40B4-BE49-F238E27FC236}">
-                <ns2:creationId id="{8E4A4C4F-C09E-5B89-67FD-259D584337FE}"/>
+                <a16:creationId id="{8E4A4C4F-C09E-5B89-67FD-259D584337FE}"/>
               </a:ext>
             </a:extLst>
           </p:cNvPr>
@@ -19717,7 +19675,7 @@
           <p:cNvPr id="39" name="Straight Arrow Connector 38">
             <a:extLst>
               <a:ext uri="{FF2B5EF4-FFF2-40B4-BE49-F238E27FC236}">
-                <ns2:creationId id="{D4742DE8-0901-2B65-C6B7-3A1BE131F28D}"/>
+                <a16:creationId id="{D4742DE8-0901-2B65-C6B7-3A1BE131F28D}"/>
               </a:ext>
             </a:extLst>
           </p:cNvPr>
@@ -19763,7 +19721,7 @@
           <p:cNvPr id="47" name="Straight Arrow Connector 46">
             <a:extLst>
               <a:ext uri="{FF2B5EF4-FFF2-40B4-BE49-F238E27FC236}">
-                <ns2:creationId id="{1D9F791F-D5A7-688F-041A-11963370907B}"/>
+                <a16:creationId id="{1D9F791F-D5A7-688F-041A-11963370907B}"/>
               </a:ext>
             </a:extLst>
           </p:cNvPr>
@@ -19809,7 +19767,7 @@
           <p:cNvPr id="9" name="TextBox 8">
             <a:extLst>
               <a:ext uri="{FF2B5EF4-FFF2-40B4-BE49-F238E27FC236}">
-                <ns2:creationId id="{349C01A4-7FD7-1FD3-430A-5950B62E2AB0}"/>
+                <a16:creationId id="{349C01A4-7FD7-1FD3-430A-5950B62E2AB0}"/>
               </a:ext>
             </a:extLst>
           </p:cNvPr>
@@ -19891,7 +19849,7 @@
           <p:cNvPr id="14" name="Rectangle 13">
             <a:extLst>
               <a:ext uri="{FF2B5EF4-FFF2-40B4-BE49-F238E27FC236}">
-                <ns2:creationId id="{55CC6FCD-E4CC-D5E1-7E8F-917869655222}"/>
+                <a16:creationId id="{55CC6FCD-E4CC-D5E1-7E8F-917869655222}"/>
               </a:ext>
             </a:extLst>
           </p:cNvPr>
@@ -19960,7 +19918,7 @@
           <p:cNvPr id="16" name="TextBox 15">
             <a:extLst>
               <a:ext uri="{FF2B5EF4-FFF2-40B4-BE49-F238E27FC236}">
-                <ns2:creationId id="{165EF7AF-4C2A-3413-7653-A4678D7A12B0}"/>
+                <a16:creationId id="{165EF7AF-4C2A-3413-7653-A4678D7A12B0}"/>
               </a:ext>
             </a:extLst>
           </p:cNvPr>
@@ -20025,7 +19983,7 @@
           <p:cNvPr id="17" name="TextBox 16">
             <a:extLst>
               <a:ext uri="{FF2B5EF4-FFF2-40B4-BE49-F238E27FC236}">
-                <ns2:creationId id="{8221C174-AABC-987E-E052-795F476EAF22}"/>
+                <a16:creationId id="{8221C174-AABC-987E-E052-795F476EAF22}"/>
               </a:ext>
             </a:extLst>
           </p:cNvPr>
@@ -20160,7 +20118,7 @@
     </p:spTree>
     <p:extLst>
       <p:ext uri="{BB962C8B-B14F-4D97-AF65-F5344CB8AC3E}">
-        <p14:creationId val="1156335298"/>
+        <ns3:creationId val="1156335298"/>
       </p:ext>
     </p:extLst>
   </p:cSld>
@@ -20171,7 +20129,7 @@
 </file>
 
 <file path=ppt/slides/slide5.xml><?xml version="1.0" encoding="utf-8"?>
-<p:sld xmlns:a="http://schemas.openxmlformats.org/drawingml/2006/main" xmlns:ns2="http://schemas.microsoft.com/office/drawing/2014/main" xmlns:p="http://schemas.openxmlformats.org/presentationml/2006/main" xmlns:p14="http://schemas.microsoft.com/office/powerpoint/2010/main">
+<p:sld xmlns:a="http://schemas.openxmlformats.org/drawingml/2006/main" xmlns:a16="http://schemas.microsoft.com/office/drawing/2014/main" xmlns:ns3="http://schemas.microsoft.com/office/powerpoint/2010/main" xmlns:p="http://schemas.openxmlformats.org/presentationml/2006/main">
   <p:cSld>
     <p:bg>
       <p:bgPr>
@@ -20197,13 +20155,7 @@
       </p:grpSpPr>
       <p:sp>
         <p:nvSpPr>
-          <p:cNvPr id="5" name="Footer Placeholder 3">
-            <a:extLst>
-              <a:ext uri="{FF2B5EF4-FFF2-40B4-BE49-F238E27FC236}">
-                <ns2:creationId id="{668F77D6-DFDA-5A46-8DF1-47F6A167C2B1}"/>
-              </a:ext>
-            </a:extLst>
-          </p:cNvPr>
+          <p:cNvPr id="5" name="Footer Placeholder 3"/>
           <p:cNvSpPr txBox="1">
             <a:spLocks/>
           </p:cNvSpPr>
@@ -20362,7 +20314,7 @@
           <p:cNvPr id="3" name="Straight Arrow Connector 2">
             <a:extLst>
               <a:ext uri="{FF2B5EF4-FFF2-40B4-BE49-F238E27FC236}">
-                <ns2:creationId id="{2EF0199F-22F4-BA42-9B75-8A8183BCDA9B}"/>
+                <a16:creationId id="{2EF0199F-22F4-BA42-9B75-8A8183BCDA9B}"/>
               </a:ext>
             </a:extLst>
           </p:cNvPr>
@@ -20406,7 +20358,7 @@
           <p:cNvPr id="8" name="Straight Arrow Connector 7">
             <a:extLst>
               <a:ext uri="{FF2B5EF4-FFF2-40B4-BE49-F238E27FC236}">
-                <ns2:creationId id="{49AB5343-55D0-6041-8627-E08A73F83930}"/>
+                <a16:creationId id="{49AB5343-55D0-6041-8627-E08A73F83930}"/>
               </a:ext>
             </a:extLst>
           </p:cNvPr>
@@ -20450,7 +20402,7 @@
           <p:cNvPr id="12" name="TextBox 11">
             <a:extLst>
               <a:ext uri="{FF2B5EF4-FFF2-40B4-BE49-F238E27FC236}">
-                <ns2:creationId id="{BF8D86A2-D083-024A-BC90-6BD938C23243}"/>
+                <a16:creationId id="{BF8D86A2-D083-024A-BC90-6BD938C23243}"/>
               </a:ext>
             </a:extLst>
           </p:cNvPr>
@@ -20515,7 +20467,7 @@
           <p:cNvPr id="13" name="TextBox 12">
             <a:extLst>
               <a:ext uri="{FF2B5EF4-FFF2-40B4-BE49-F238E27FC236}">
-                <ns2:creationId id="{2C3F4604-6C2F-0E4E-9DD3-4F5C89FF51AB}"/>
+                <a16:creationId id="{2C3F4604-6C2F-0E4E-9DD3-4F5C89FF51AB}"/>
               </a:ext>
             </a:extLst>
           </p:cNvPr>
@@ -20576,7 +20528,7 @@
           <p:cNvPr id="23" name="Oval 22">
             <a:extLst>
               <a:ext uri="{FF2B5EF4-FFF2-40B4-BE49-F238E27FC236}">
-                <ns2:creationId id="{0112617B-A1D5-1E41-BF92-E67D4E046E39}"/>
+                <a16:creationId id="{0112617B-A1D5-1E41-BF92-E67D4E046E39}"/>
               </a:ext>
             </a:extLst>
           </p:cNvPr>
@@ -20660,7 +20612,7 @@
           <p:cNvPr id="27" name="Oval 26">
             <a:extLst>
               <a:ext uri="{FF2B5EF4-FFF2-40B4-BE49-F238E27FC236}">
-                <ns2:creationId id="{6EF0F7DA-5E70-8348-A200-F59A10FF7C55}"/>
+                <a16:creationId id="{6EF0F7DA-5E70-8348-A200-F59A10FF7C55}"/>
               </a:ext>
             </a:extLst>
           </p:cNvPr>
@@ -20744,7 +20696,7 @@
           <p:cNvPr id="28" name="Oval 27">
             <a:extLst>
               <a:ext uri="{FF2B5EF4-FFF2-40B4-BE49-F238E27FC236}">
-                <ns2:creationId id="{552F58D0-F613-674A-B294-C894E5FB1683}"/>
+                <a16:creationId id="{552F58D0-F613-674A-B294-C894E5FB1683}"/>
               </a:ext>
             </a:extLst>
           </p:cNvPr>
@@ -20828,7 +20780,7 @@
           <p:cNvPr id="29" name="Oval 28">
             <a:extLst>
               <a:ext uri="{FF2B5EF4-FFF2-40B4-BE49-F238E27FC236}">
-                <ns2:creationId id="{9CA7A721-D3BD-744E-9306-85BBED5F74BC}"/>
+                <a16:creationId id="{9CA7A721-D3BD-744E-9306-85BBED5F74BC}"/>
               </a:ext>
             </a:extLst>
           </p:cNvPr>
@@ -20912,7 +20864,7 @@
           <p:cNvPr id="30" name="Oval 29">
             <a:extLst>
               <a:ext uri="{FF2B5EF4-FFF2-40B4-BE49-F238E27FC236}">
-                <ns2:creationId id="{F97F1A02-C0C7-3C45-9790-847C152D159A}"/>
+                <a16:creationId id="{F97F1A02-C0C7-3C45-9790-847C152D159A}"/>
               </a:ext>
             </a:extLst>
           </p:cNvPr>
@@ -20996,7 +20948,7 @@
           <p:cNvPr id="4" name="Straight Connector 3">
             <a:extLst>
               <a:ext uri="{FF2B5EF4-FFF2-40B4-BE49-F238E27FC236}">
-                <ns2:creationId id="{9890CC23-4ADC-D744-AF2D-1C8A936F07FC}"/>
+                <a16:creationId id="{9890CC23-4ADC-D744-AF2D-1C8A936F07FC}"/>
               </a:ext>
             </a:extLst>
           </p:cNvPr>
@@ -21039,7 +20991,7 @@
           <p:cNvPr id="18" name="Oval 17">
             <a:extLst>
               <a:ext uri="{FF2B5EF4-FFF2-40B4-BE49-F238E27FC236}">
-                <ns2:creationId id="{BE4CDC90-4B2E-BE41-BB9D-A84675F3A2FE}"/>
+                <a16:creationId id="{BE4CDC90-4B2E-BE41-BB9D-A84675F3A2FE}"/>
               </a:ext>
             </a:extLst>
           </p:cNvPr>
@@ -21122,7 +21074,7 @@
           <p:cNvPr id="11" name="Group 10">
             <a:extLst>
               <a:ext uri="{FF2B5EF4-FFF2-40B4-BE49-F238E27FC236}">
-                <ns2:creationId id="{33483591-0E05-544C-B822-43CF81B12E63}"/>
+                <a16:creationId id="{33483591-0E05-544C-B822-43CF81B12E63}"/>
               </a:ext>
             </a:extLst>
           </p:cNvPr>
@@ -21142,7 +21094,7 @@
             <p:cNvPr id="24" name="Straight Arrow Connector 23">
               <a:extLst>
                 <a:ext uri="{FF2B5EF4-FFF2-40B4-BE49-F238E27FC236}">
-                  <ns2:creationId id="{7BCF22C9-C9AE-324D-B157-A9536FCAF3B6}"/>
+                  <a16:creationId id="{7BCF22C9-C9AE-324D-B157-A9536FCAF3B6}"/>
                 </a:ext>
               </a:extLst>
             </p:cNvPr>
@@ -21187,7 +21139,7 @@
             <p:cNvPr id="10" name="TextBox 9">
               <a:extLst>
                 <a:ext uri="{FF2B5EF4-FFF2-40B4-BE49-F238E27FC236}">
-                  <ns2:creationId id="{01A59953-657F-C641-8F36-E48E8EDB0DF1}"/>
+                  <a16:creationId id="{01A59953-657F-C641-8F36-E48E8EDB0DF1}"/>
                 </a:ext>
               </a:extLst>
             </p:cNvPr>
@@ -21270,7 +21222,7 @@
           <p:cNvPr id="31" name="TextBox 30">
             <a:extLst>
               <a:ext uri="{FF2B5EF4-FFF2-40B4-BE49-F238E27FC236}">
-                <ns2:creationId id="{713B9ACE-B673-2D48-BEF2-2A133C31B527}"/>
+                <a16:creationId id="{713B9ACE-B673-2D48-BEF2-2A133C31B527}"/>
               </a:ext>
             </a:extLst>
           </p:cNvPr>
@@ -21372,7 +21324,7 @@
           <p:cNvPr id="36" name="TextBox 35">
             <a:extLst>
               <a:ext uri="{FF2B5EF4-FFF2-40B4-BE49-F238E27FC236}">
-                <ns2:creationId id="{3A81A480-EF64-094E-825A-8592DAA4C672}"/>
+                <a16:creationId id="{3A81A480-EF64-094E-825A-8592DAA4C672}"/>
               </a:ext>
             </a:extLst>
           </p:cNvPr>
@@ -21454,7 +21406,7 @@
           <p:cNvPr id="7" name="Rectangle 6">
             <a:extLst>
               <a:ext uri="{FF2B5EF4-FFF2-40B4-BE49-F238E27FC236}">
-                <ns2:creationId id="{BED67AD4-F230-35A0-28FB-DE984573A446}"/>
+                <a16:creationId id="{BED67AD4-F230-35A0-28FB-DE984573A446}"/>
               </a:ext>
             </a:extLst>
           </p:cNvPr>
@@ -21518,7 +21470,7 @@
           <p:cNvPr id="15" name="Straight Arrow Connector 14">
             <a:extLst>
               <a:ext uri="{FF2B5EF4-FFF2-40B4-BE49-F238E27FC236}">
-                <ns2:creationId id="{05289ED1-4679-6543-A669-B23443FD0CD8}"/>
+                <a16:creationId id="{05289ED1-4679-6543-A669-B23443FD0CD8}"/>
               </a:ext>
             </a:extLst>
           </p:cNvPr>
@@ -21564,7 +21516,7 @@
           <p:cNvPr id="32" name="Straight Arrow Connector 31">
             <a:extLst>
               <a:ext uri="{FF2B5EF4-FFF2-40B4-BE49-F238E27FC236}">
-                <ns2:creationId id="{A9F8BF55-7F79-854D-84AD-A730BF43B39C}"/>
+                <a16:creationId id="{A9F8BF55-7F79-854D-84AD-A730BF43B39C}"/>
               </a:ext>
             </a:extLst>
           </p:cNvPr>
@@ -21610,7 +21562,7 @@
           <p:cNvPr id="35" name="Straight Arrow Connector 34">
             <a:extLst>
               <a:ext uri="{FF2B5EF4-FFF2-40B4-BE49-F238E27FC236}">
-                <ns2:creationId id="{0415B495-590C-0049-92E6-8AE7464CC78A}"/>
+                <a16:creationId id="{0415B495-590C-0049-92E6-8AE7464CC78A}"/>
               </a:ext>
             </a:extLst>
           </p:cNvPr>
@@ -21656,7 +21608,7 @@
           <p:cNvPr id="39" name="Straight Arrow Connector 38">
             <a:extLst>
               <a:ext uri="{FF2B5EF4-FFF2-40B4-BE49-F238E27FC236}">
-                <ns2:creationId id="{E4879E96-726B-4F42-BD7C-09F8D0B14E9A}"/>
+                <a16:creationId id="{E4879E96-726B-4F42-BD7C-09F8D0B14E9A}"/>
               </a:ext>
             </a:extLst>
           </p:cNvPr>
@@ -21702,7 +21654,7 @@
           <p:cNvPr id="47" name="Straight Arrow Connector 46">
             <a:extLst>
               <a:ext uri="{FF2B5EF4-FFF2-40B4-BE49-F238E27FC236}">
-                <ns2:creationId id="{0F119609-4333-414A-B8E4-E2447D7E1C10}"/>
+                <a16:creationId id="{0F119609-4333-414A-B8E4-E2447D7E1C10}"/>
               </a:ext>
             </a:extLst>
           </p:cNvPr>
@@ -21748,7 +21700,7 @@
           <p:cNvPr id="9" name="TextBox 8">
             <a:extLst>
               <a:ext uri="{FF2B5EF4-FFF2-40B4-BE49-F238E27FC236}">
-                <ns2:creationId id="{F869BF73-0970-4AD4-4DCD-712A77055671}"/>
+                <a16:creationId id="{F869BF73-0970-4AD4-4DCD-712A77055671}"/>
               </a:ext>
             </a:extLst>
           </p:cNvPr>
@@ -21830,7 +21782,7 @@
           <p:cNvPr id="16" name="Oval 15">
             <a:extLst>
               <a:ext uri="{FF2B5EF4-FFF2-40B4-BE49-F238E27FC236}">
-                <ns2:creationId id="{47B844F6-2777-F09D-48E3-752AD4A1C08E}"/>
+                <a16:creationId id="{47B844F6-2777-F09D-48E3-752AD4A1C08E}"/>
               </a:ext>
             </a:extLst>
           </p:cNvPr>
@@ -21913,7 +21865,7 @@
           <p:cNvPr id="17" name="Straight Connector 16">
             <a:extLst>
               <a:ext uri="{FF2B5EF4-FFF2-40B4-BE49-F238E27FC236}">
-                <ns2:creationId id="{7AC80066-19A2-40E6-CB32-8D867099AEC0}"/>
+                <a16:creationId id="{7AC80066-19A2-40E6-CB32-8D867099AEC0}"/>
               </a:ext>
             </a:extLst>
           </p:cNvPr>
@@ -21958,7 +21910,7 @@
           <p:cNvPr id="33" name="Oval 32">
             <a:extLst>
               <a:ext uri="{FF2B5EF4-FFF2-40B4-BE49-F238E27FC236}">
-                <ns2:creationId id="{E44B2491-CAC8-31F5-74F1-2F5E82758D29}"/>
+                <a16:creationId id="{E44B2491-CAC8-31F5-74F1-2F5E82758D29}"/>
               </a:ext>
             </a:extLst>
           </p:cNvPr>
@@ -22041,7 +21993,7 @@
           <p:cNvPr id="34" name="Straight Connector 33">
             <a:extLst>
               <a:ext uri="{FF2B5EF4-FFF2-40B4-BE49-F238E27FC236}">
-                <ns2:creationId id="{39925079-57E3-C749-66BE-49320C7E84EA}"/>
+                <a16:creationId id="{39925079-57E3-C749-66BE-49320C7E84EA}"/>
               </a:ext>
             </a:extLst>
           </p:cNvPr>
@@ -22084,7 +22036,7 @@
     </p:spTree>
     <p:extLst>
       <p:ext uri="{BB962C8B-B14F-4D97-AF65-F5344CB8AC3E}">
-        <p14:creationId val="155428920"/>
+        <ns3:creationId val="155428920"/>
       </p:ext>
     </p:extLst>
   </p:cSld>
@@ -22095,7 +22047,7 @@
 </file>
 
 <file path=ppt/slides/slide6.xml><?xml version="1.0" encoding="utf-8"?>
-<p:sld xmlns:a="http://schemas.openxmlformats.org/drawingml/2006/main" xmlns:ns2="http://schemas.microsoft.com/office/drawing/2014/main" xmlns:p="http://schemas.openxmlformats.org/presentationml/2006/main" xmlns:p14="http://schemas.microsoft.com/office/powerpoint/2010/main">
+<p:sld xmlns:a="http://schemas.openxmlformats.org/drawingml/2006/main" xmlns:a16="http://schemas.microsoft.com/office/drawing/2014/main" xmlns:ns3="http://schemas.microsoft.com/office/powerpoint/2010/main" xmlns:p="http://schemas.openxmlformats.org/presentationml/2006/main">
   <p:cSld>
     <p:bg>
       <p:bgPr>
@@ -22121,13 +22073,7 @@
       </p:grpSpPr>
       <p:sp>
         <p:nvSpPr>
-          <p:cNvPr id="5" name="Footer Placeholder 3">
-            <a:extLst>
-              <a:ext uri="{FF2B5EF4-FFF2-40B4-BE49-F238E27FC236}">
-                <ns2:creationId id="{668F77D6-DFDA-5A46-8DF1-47F6A167C2B1}"/>
-              </a:ext>
-            </a:extLst>
-          </p:cNvPr>
+          <p:cNvPr id="5" name="Footer Placeholder 3"/>
           <p:cNvSpPr txBox="1">
             <a:spLocks/>
           </p:cNvSpPr>
@@ -22286,7 +22232,7 @@
           <p:cNvPr id="26" name="TextBox 25">
             <a:extLst>
               <a:ext uri="{FF2B5EF4-FFF2-40B4-BE49-F238E27FC236}">
-                <ns2:creationId id="{FA5E13D2-A15E-F54D-9507-CAD768919361}"/>
+                <a16:creationId id="{FA5E13D2-A15E-F54D-9507-CAD768919361}"/>
               </a:ext>
             </a:extLst>
           </p:cNvPr>
@@ -22495,7 +22441,7 @@
           <p:cNvPr id="23" name="Oval 22">
             <a:extLst>
               <a:ext uri="{FF2B5EF4-FFF2-40B4-BE49-F238E27FC236}">
-                <ns2:creationId id="{0112617B-A1D5-1E41-BF92-E67D4E046E39}"/>
+                <a16:creationId id="{0112617B-A1D5-1E41-BF92-E67D4E046E39}"/>
               </a:ext>
             </a:extLst>
           </p:cNvPr>
@@ -22579,7 +22525,7 @@
           <p:cNvPr id="27" name="Oval 26">
             <a:extLst>
               <a:ext uri="{FF2B5EF4-FFF2-40B4-BE49-F238E27FC236}">
-                <ns2:creationId id="{6EF0F7DA-5E70-8348-A200-F59A10FF7C55}"/>
+                <a16:creationId id="{6EF0F7DA-5E70-8348-A200-F59A10FF7C55}"/>
               </a:ext>
             </a:extLst>
           </p:cNvPr>
@@ -22663,7 +22609,7 @@
           <p:cNvPr id="28" name="Oval 27">
             <a:extLst>
               <a:ext uri="{FF2B5EF4-FFF2-40B4-BE49-F238E27FC236}">
-                <ns2:creationId id="{552F58D0-F613-674A-B294-C894E5FB1683}"/>
+                <a16:creationId id="{552F58D0-F613-674A-B294-C894E5FB1683}"/>
               </a:ext>
             </a:extLst>
           </p:cNvPr>
@@ -22747,7 +22693,7 @@
           <p:cNvPr id="29" name="Oval 28">
             <a:extLst>
               <a:ext uri="{FF2B5EF4-FFF2-40B4-BE49-F238E27FC236}">
-                <ns2:creationId id="{9CA7A721-D3BD-744E-9306-85BBED5F74BC}"/>
+                <a16:creationId id="{9CA7A721-D3BD-744E-9306-85BBED5F74BC}"/>
               </a:ext>
             </a:extLst>
           </p:cNvPr>
@@ -22831,7 +22777,7 @@
           <p:cNvPr id="30" name="Oval 29">
             <a:extLst>
               <a:ext uri="{FF2B5EF4-FFF2-40B4-BE49-F238E27FC236}">
-                <ns2:creationId id="{F97F1A02-C0C7-3C45-9790-847C152D159A}"/>
+                <a16:creationId id="{F97F1A02-C0C7-3C45-9790-847C152D159A}"/>
               </a:ext>
             </a:extLst>
           </p:cNvPr>
@@ -22915,7 +22861,7 @@
           <p:cNvPr id="15" name="Straight Arrow Connector 14">
             <a:extLst>
               <a:ext uri="{FF2B5EF4-FFF2-40B4-BE49-F238E27FC236}">
-                <ns2:creationId id="{05289ED1-4679-6543-A669-B23443FD0CD8}"/>
+                <a16:creationId id="{05289ED1-4679-6543-A669-B23443FD0CD8}"/>
               </a:ext>
             </a:extLst>
           </p:cNvPr>
@@ -22960,7 +22906,7 @@
           <p:cNvPr id="32" name="Straight Arrow Connector 31">
             <a:extLst>
               <a:ext uri="{FF2B5EF4-FFF2-40B4-BE49-F238E27FC236}">
-                <ns2:creationId id="{A9F8BF55-7F79-854D-84AD-A730BF43B39C}"/>
+                <a16:creationId id="{A9F8BF55-7F79-854D-84AD-A730BF43B39C}"/>
               </a:ext>
             </a:extLst>
           </p:cNvPr>
@@ -23005,7 +22951,7 @@
           <p:cNvPr id="35" name="Straight Arrow Connector 34">
             <a:extLst>
               <a:ext uri="{FF2B5EF4-FFF2-40B4-BE49-F238E27FC236}">
-                <ns2:creationId id="{0415B495-590C-0049-92E6-8AE7464CC78A}"/>
+                <a16:creationId id="{0415B495-590C-0049-92E6-8AE7464CC78A}"/>
               </a:ext>
             </a:extLst>
           </p:cNvPr>
@@ -23050,7 +22996,7 @@
           <p:cNvPr id="39" name="Straight Arrow Connector 38">
             <a:extLst>
               <a:ext uri="{FF2B5EF4-FFF2-40B4-BE49-F238E27FC236}">
-                <ns2:creationId id="{E4879E96-726B-4F42-BD7C-09F8D0B14E9A}"/>
+                <a16:creationId id="{E4879E96-726B-4F42-BD7C-09F8D0B14E9A}"/>
               </a:ext>
             </a:extLst>
           </p:cNvPr>
@@ -23095,7 +23041,7 @@
           <p:cNvPr id="47" name="Straight Arrow Connector 46">
             <a:extLst>
               <a:ext uri="{FF2B5EF4-FFF2-40B4-BE49-F238E27FC236}">
-                <ns2:creationId id="{0F119609-4333-414A-B8E4-E2447D7E1C10}"/>
+                <a16:creationId id="{0F119609-4333-414A-B8E4-E2447D7E1C10}"/>
               </a:ext>
             </a:extLst>
           </p:cNvPr>
@@ -23140,7 +23086,7 @@
           <p:cNvPr id="4" name="Straight Connector 3">
             <a:extLst>
               <a:ext uri="{FF2B5EF4-FFF2-40B4-BE49-F238E27FC236}">
-                <ns2:creationId id="{9890CC23-4ADC-D744-AF2D-1C8A936F07FC}"/>
+                <a16:creationId id="{9890CC23-4ADC-D744-AF2D-1C8A936F07FC}"/>
               </a:ext>
             </a:extLst>
           </p:cNvPr>
@@ -23183,7 +23129,7 @@
           <p:cNvPr id="18" name="Oval 17">
             <a:extLst>
               <a:ext uri="{FF2B5EF4-FFF2-40B4-BE49-F238E27FC236}">
-                <ns2:creationId id="{BE4CDC90-4B2E-BE41-BB9D-A84675F3A2FE}"/>
+                <a16:creationId id="{BE4CDC90-4B2E-BE41-BB9D-A84675F3A2FE}"/>
               </a:ext>
             </a:extLst>
           </p:cNvPr>
@@ -23264,7 +23210,7 @@
           <p:cNvPr id="24" name="Straight Arrow Connector 23">
             <a:extLst>
               <a:ext uri="{FF2B5EF4-FFF2-40B4-BE49-F238E27FC236}">
-                <ns2:creationId id="{7BCF22C9-C9AE-324D-B157-A9536FCAF3B6}"/>
+                <a16:creationId id="{7BCF22C9-C9AE-324D-B157-A9536FCAF3B6}"/>
               </a:ext>
             </a:extLst>
           </p:cNvPr>
@@ -23309,7 +23255,7 @@
           <p:cNvPr id="10" name="TextBox 9">
             <a:extLst>
               <a:ext uri="{FF2B5EF4-FFF2-40B4-BE49-F238E27FC236}">
-                <ns2:creationId id="{01A59953-657F-C641-8F36-E48E8EDB0DF1}"/>
+                <a16:creationId id="{01A59953-657F-C641-8F36-E48E8EDB0DF1}"/>
               </a:ext>
             </a:extLst>
           </p:cNvPr>
@@ -23391,7 +23337,7 @@
           <p:cNvPr id="31" name="TextBox 30">
             <a:extLst>
               <a:ext uri="{FF2B5EF4-FFF2-40B4-BE49-F238E27FC236}">
-                <ns2:creationId id="{713B9ACE-B673-2D48-BEF2-2A133C31B527}"/>
+                <a16:creationId id="{713B9ACE-B673-2D48-BEF2-2A133C31B527}"/>
               </a:ext>
             </a:extLst>
           </p:cNvPr>
@@ -23473,7 +23419,7 @@
           <p:cNvPr id="36" name="TextBox 35">
             <a:extLst>
               <a:ext uri="{FF2B5EF4-FFF2-40B4-BE49-F238E27FC236}">
-                <ns2:creationId id="{3A81A480-EF64-094E-825A-8592DAA4C672}"/>
+                <a16:creationId id="{3A81A480-EF64-094E-825A-8592DAA4C672}"/>
               </a:ext>
             </a:extLst>
           </p:cNvPr>
@@ -23552,7 +23498,7 @@
           <p:cNvPr id="22" name="Straight Connector 21">
             <a:extLst>
               <a:ext uri="{FF2B5EF4-FFF2-40B4-BE49-F238E27FC236}">
-                <ns2:creationId id="{0C67DA45-6876-7942-9996-48CA0A1696FE}"/>
+                <a16:creationId id="{0C67DA45-6876-7942-9996-48CA0A1696FE}"/>
               </a:ext>
             </a:extLst>
           </p:cNvPr>
@@ -23595,7 +23541,7 @@
           <p:cNvPr id="7" name="TextBox 6">
             <a:extLst>
               <a:ext uri="{FF2B5EF4-FFF2-40B4-BE49-F238E27FC236}">
-                <ns2:creationId id="{FE7A6F30-9D38-0B1B-2076-531827EE9F50}"/>
+                <a16:creationId id="{FE7A6F30-9D38-0B1B-2076-531827EE9F50}"/>
               </a:ext>
             </a:extLst>
           </p:cNvPr>
@@ -23660,7 +23606,7 @@
           <p:cNvPr id="2" name="Group 1">
             <a:extLst>
               <a:ext uri="{FF2B5EF4-FFF2-40B4-BE49-F238E27FC236}">
-                <ns2:creationId id="{B98AD1F2-987D-71EB-A470-E4A41A905EDF}"/>
+                <a16:creationId id="{B98AD1F2-987D-71EB-A470-E4A41A905EDF}"/>
               </a:ext>
             </a:extLst>
           </p:cNvPr>
@@ -23680,7 +23626,7 @@
             <p:cNvPr id="6" name="Straight Arrow Connector 5">
               <a:extLst>
                 <a:ext uri="{FF2B5EF4-FFF2-40B4-BE49-F238E27FC236}">
-                  <ns2:creationId id="{836C1A95-A13A-0EE6-733B-6B2D96A15332}"/>
+                  <a16:creationId id="{836C1A95-A13A-0EE6-733B-6B2D96A15332}"/>
                 </a:ext>
               </a:extLst>
             </p:cNvPr>
@@ -23724,7 +23670,7 @@
             <p:cNvPr id="9" name="Straight Arrow Connector 8">
               <a:extLst>
                 <a:ext uri="{FF2B5EF4-FFF2-40B4-BE49-F238E27FC236}">
-                  <ns2:creationId id="{8AA9E325-051B-BE4A-55F2-7CFF0AFD3797}"/>
+                  <a16:creationId id="{8AA9E325-051B-BE4A-55F2-7CFF0AFD3797}"/>
                 </a:ext>
               </a:extLst>
             </p:cNvPr>
@@ -23768,7 +23714,7 @@
             <p:cNvPr id="11" name="TextBox 10">
               <a:extLst>
                 <a:ext uri="{FF2B5EF4-FFF2-40B4-BE49-F238E27FC236}">
-                  <ns2:creationId id="{DF6E9CDB-4ADF-E626-B2A4-DEA60E4A02F0}"/>
+                  <a16:creationId id="{DF6E9CDB-4ADF-E626-B2A4-DEA60E4A02F0}"/>
                 </a:ext>
               </a:extLst>
             </p:cNvPr>
@@ -23833,7 +23779,7 @@
             <p:cNvPr id="14" name="TextBox 13">
               <a:extLst>
                 <a:ext uri="{FF2B5EF4-FFF2-40B4-BE49-F238E27FC236}">
-                  <ns2:creationId id="{01E78D1F-323F-0A4F-4B30-4CE146D0EB63}"/>
+                  <a16:creationId id="{01E78D1F-323F-0A4F-4B30-4CE146D0EB63}"/>
                 </a:ext>
               </a:extLst>
             </p:cNvPr>
@@ -23893,7 +23839,7 @@
     </p:spTree>
     <p:extLst>
       <p:ext uri="{BB962C8B-B14F-4D97-AF65-F5344CB8AC3E}">
-        <p14:creationId val="4081239535"/>
+        <ns3:creationId val="4081239535"/>
       </p:ext>
     </p:extLst>
   </p:cSld>
@@ -23904,7 +23850,7 @@
 </file>
 
 <file path=ppt/slides/slide7.xml><?xml version="1.0" encoding="utf-8"?>
-<p:sld xmlns:a="http://schemas.openxmlformats.org/drawingml/2006/main" xmlns:ns2="http://schemas.microsoft.com/office/drawing/2014/main" xmlns:p="http://schemas.openxmlformats.org/presentationml/2006/main" xmlns:p14="http://schemas.microsoft.com/office/powerpoint/2010/main">
+<p:sld xmlns:a="http://schemas.openxmlformats.org/drawingml/2006/main" xmlns:a16="http://schemas.microsoft.com/office/drawing/2014/main" xmlns:ns3="http://schemas.microsoft.com/office/powerpoint/2010/main" xmlns:p="http://schemas.openxmlformats.org/presentationml/2006/main">
   <p:cSld>
     <p:bg>
       <p:bgPr>
@@ -23930,13 +23876,7 @@
       </p:grpSpPr>
       <p:sp>
         <p:nvSpPr>
-          <p:cNvPr id="5" name="Footer Placeholder 3">
-            <a:extLst>
-              <a:ext uri="{FF2B5EF4-FFF2-40B4-BE49-F238E27FC236}">
-                <ns2:creationId id="{668F77D6-DFDA-5A46-8DF1-47F6A167C2B1}"/>
-              </a:ext>
-            </a:extLst>
-          </p:cNvPr>
+          <p:cNvPr id="5" name="Footer Placeholder 3"/>
           <p:cNvSpPr txBox="1">
             <a:spLocks/>
           </p:cNvSpPr>
@@ -24095,7 +24035,7 @@
           <p:cNvPr id="26" name="TextBox 25">
             <a:extLst>
               <a:ext uri="{FF2B5EF4-FFF2-40B4-BE49-F238E27FC236}">
-                <ns2:creationId id="{FA5E13D2-A15E-F54D-9507-CAD768919361}"/>
+                <a16:creationId id="{FA5E13D2-A15E-F54D-9507-CAD768919361}"/>
               </a:ext>
             </a:extLst>
           </p:cNvPr>
@@ -24232,7 +24172,7 @@
           <p:cNvPr id="23" name="Oval 22">
             <a:extLst>
               <a:ext uri="{FF2B5EF4-FFF2-40B4-BE49-F238E27FC236}">
-                <ns2:creationId id="{0112617B-A1D5-1E41-BF92-E67D4E046E39}"/>
+                <a16:creationId id="{0112617B-A1D5-1E41-BF92-E67D4E046E39}"/>
               </a:ext>
             </a:extLst>
           </p:cNvPr>
@@ -24316,7 +24256,7 @@
           <p:cNvPr id="27" name="Oval 26">
             <a:extLst>
               <a:ext uri="{FF2B5EF4-FFF2-40B4-BE49-F238E27FC236}">
-                <ns2:creationId id="{6EF0F7DA-5E70-8348-A200-F59A10FF7C55}"/>
+                <a16:creationId id="{6EF0F7DA-5E70-8348-A200-F59A10FF7C55}"/>
               </a:ext>
             </a:extLst>
           </p:cNvPr>
@@ -24400,7 +24340,7 @@
           <p:cNvPr id="28" name="Oval 27">
             <a:extLst>
               <a:ext uri="{FF2B5EF4-FFF2-40B4-BE49-F238E27FC236}">
-                <ns2:creationId id="{552F58D0-F613-674A-B294-C894E5FB1683}"/>
+                <a16:creationId id="{552F58D0-F613-674A-B294-C894E5FB1683}"/>
               </a:ext>
             </a:extLst>
           </p:cNvPr>
@@ -24484,7 +24424,7 @@
           <p:cNvPr id="29" name="Oval 28">
             <a:extLst>
               <a:ext uri="{FF2B5EF4-FFF2-40B4-BE49-F238E27FC236}">
-                <ns2:creationId id="{9CA7A721-D3BD-744E-9306-85BBED5F74BC}"/>
+                <a16:creationId id="{9CA7A721-D3BD-744E-9306-85BBED5F74BC}"/>
               </a:ext>
             </a:extLst>
           </p:cNvPr>
@@ -24568,7 +24508,7 @@
           <p:cNvPr id="30" name="Oval 29">
             <a:extLst>
               <a:ext uri="{FF2B5EF4-FFF2-40B4-BE49-F238E27FC236}">
-                <ns2:creationId id="{F97F1A02-C0C7-3C45-9790-847C152D159A}"/>
+                <a16:creationId id="{F97F1A02-C0C7-3C45-9790-847C152D159A}"/>
               </a:ext>
             </a:extLst>
           </p:cNvPr>
@@ -24652,7 +24592,7 @@
           <p:cNvPr id="15" name="Straight Arrow Connector 14">
             <a:extLst>
               <a:ext uri="{FF2B5EF4-FFF2-40B4-BE49-F238E27FC236}">
-                <ns2:creationId id="{05289ED1-4679-6543-A669-B23443FD0CD8}"/>
+                <a16:creationId id="{05289ED1-4679-6543-A669-B23443FD0CD8}"/>
               </a:ext>
             </a:extLst>
           </p:cNvPr>
@@ -24697,7 +24637,7 @@
           <p:cNvPr id="32" name="Straight Arrow Connector 31">
             <a:extLst>
               <a:ext uri="{FF2B5EF4-FFF2-40B4-BE49-F238E27FC236}">
-                <ns2:creationId id="{A9F8BF55-7F79-854D-84AD-A730BF43B39C}"/>
+                <a16:creationId id="{A9F8BF55-7F79-854D-84AD-A730BF43B39C}"/>
               </a:ext>
             </a:extLst>
           </p:cNvPr>
@@ -24742,7 +24682,7 @@
           <p:cNvPr id="35" name="Straight Arrow Connector 34">
             <a:extLst>
               <a:ext uri="{FF2B5EF4-FFF2-40B4-BE49-F238E27FC236}">
-                <ns2:creationId id="{0415B495-590C-0049-92E6-8AE7464CC78A}"/>
+                <a16:creationId id="{0415B495-590C-0049-92E6-8AE7464CC78A}"/>
               </a:ext>
             </a:extLst>
           </p:cNvPr>
@@ -24787,7 +24727,7 @@
           <p:cNvPr id="39" name="Straight Arrow Connector 38">
             <a:extLst>
               <a:ext uri="{FF2B5EF4-FFF2-40B4-BE49-F238E27FC236}">
-                <ns2:creationId id="{E4879E96-726B-4F42-BD7C-09F8D0B14E9A}"/>
+                <a16:creationId id="{E4879E96-726B-4F42-BD7C-09F8D0B14E9A}"/>
               </a:ext>
             </a:extLst>
           </p:cNvPr>
@@ -24832,7 +24772,7 @@
           <p:cNvPr id="47" name="Straight Arrow Connector 46">
             <a:extLst>
               <a:ext uri="{FF2B5EF4-FFF2-40B4-BE49-F238E27FC236}">
-                <ns2:creationId id="{0F119609-4333-414A-B8E4-E2447D7E1C10}"/>
+                <a16:creationId id="{0F119609-4333-414A-B8E4-E2447D7E1C10}"/>
               </a:ext>
             </a:extLst>
           </p:cNvPr>
@@ -24877,7 +24817,7 @@
           <p:cNvPr id="4" name="Straight Connector 3">
             <a:extLst>
               <a:ext uri="{FF2B5EF4-FFF2-40B4-BE49-F238E27FC236}">
-                <ns2:creationId id="{9890CC23-4ADC-D744-AF2D-1C8A936F07FC}"/>
+                <a16:creationId id="{9890CC23-4ADC-D744-AF2D-1C8A936F07FC}"/>
               </a:ext>
             </a:extLst>
           </p:cNvPr>
@@ -24920,7 +24860,7 @@
           <p:cNvPr id="18" name="Oval 17">
             <a:extLst>
               <a:ext uri="{FF2B5EF4-FFF2-40B4-BE49-F238E27FC236}">
-                <ns2:creationId id="{BE4CDC90-4B2E-BE41-BB9D-A84675F3A2FE}"/>
+                <a16:creationId id="{BE4CDC90-4B2E-BE41-BB9D-A84675F3A2FE}"/>
               </a:ext>
             </a:extLst>
           </p:cNvPr>
@@ -25003,7 +24943,7 @@
           <p:cNvPr id="24" name="Straight Arrow Connector 23">
             <a:extLst>
               <a:ext uri="{FF2B5EF4-FFF2-40B4-BE49-F238E27FC236}">
-                <ns2:creationId id="{7BCF22C9-C9AE-324D-B157-A9536FCAF3B6}"/>
+                <a16:creationId id="{7BCF22C9-C9AE-324D-B157-A9536FCAF3B6}"/>
               </a:ext>
             </a:extLst>
           </p:cNvPr>
@@ -25048,7 +24988,7 @@
           <p:cNvPr id="10" name="TextBox 9">
             <a:extLst>
               <a:ext uri="{FF2B5EF4-FFF2-40B4-BE49-F238E27FC236}">
-                <ns2:creationId id="{01A59953-657F-C641-8F36-E48E8EDB0DF1}"/>
+                <a16:creationId id="{01A59953-657F-C641-8F36-E48E8EDB0DF1}"/>
               </a:ext>
             </a:extLst>
           </p:cNvPr>
@@ -25133,7 +25073,7 @@
           <p:cNvPr id="31" name="TextBox 30">
             <a:extLst>
               <a:ext uri="{FF2B5EF4-FFF2-40B4-BE49-F238E27FC236}">
-                <ns2:creationId id="{713B9ACE-B673-2D48-BEF2-2A133C31B527}"/>
+                <a16:creationId id="{713B9ACE-B673-2D48-BEF2-2A133C31B527}"/>
               </a:ext>
             </a:extLst>
           </p:cNvPr>
@@ -25218,7 +25158,7 @@
           <p:cNvPr id="36" name="TextBox 35">
             <a:extLst>
               <a:ext uri="{FF2B5EF4-FFF2-40B4-BE49-F238E27FC236}">
-                <ns2:creationId id="{3A81A480-EF64-094E-825A-8592DAA4C672}"/>
+                <a16:creationId id="{3A81A480-EF64-094E-825A-8592DAA4C672}"/>
               </a:ext>
             </a:extLst>
           </p:cNvPr>
@@ -25300,7 +25240,7 @@
           <p:cNvPr id="22" name="Straight Connector 21">
             <a:extLst>
               <a:ext uri="{FF2B5EF4-FFF2-40B4-BE49-F238E27FC236}">
-                <ns2:creationId id="{0C67DA45-6876-7942-9996-48CA0A1696FE}"/>
+                <a16:creationId id="{0C67DA45-6876-7942-9996-48CA0A1696FE}"/>
               </a:ext>
             </a:extLst>
           </p:cNvPr>
@@ -25343,7 +25283,7 @@
           <p:cNvPr id="2" name="TextBox 1">
             <a:extLst>
               <a:ext uri="{FF2B5EF4-FFF2-40B4-BE49-F238E27FC236}">
-                <ns2:creationId id="{25B497FC-A4FB-6E22-82A5-ECE9FFBF1D45}"/>
+                <a16:creationId id="{25B497FC-A4FB-6E22-82A5-ECE9FFBF1D45}"/>
               </a:ext>
             </a:extLst>
           </p:cNvPr>
@@ -25408,7 +25348,7 @@
           <p:cNvPr id="6" name="Straight Arrow Connector 5">
             <a:extLst>
               <a:ext uri="{FF2B5EF4-FFF2-40B4-BE49-F238E27FC236}">
-                <ns2:creationId id="{3B9C4884-FD04-1DA8-E9C2-C28549C7A16E}"/>
+                <a16:creationId id="{3B9C4884-FD04-1DA8-E9C2-C28549C7A16E}"/>
               </a:ext>
             </a:extLst>
           </p:cNvPr>
@@ -25452,7 +25392,7 @@
           <p:cNvPr id="7" name="Straight Arrow Connector 6">
             <a:extLst>
               <a:ext uri="{FF2B5EF4-FFF2-40B4-BE49-F238E27FC236}">
-                <ns2:creationId id="{A6FFF53F-C9D7-1557-FC42-A159BAC6A3AE}"/>
+                <a16:creationId id="{A6FFF53F-C9D7-1557-FC42-A159BAC6A3AE}"/>
               </a:ext>
             </a:extLst>
           </p:cNvPr>
@@ -25496,7 +25436,7 @@
           <p:cNvPr id="9" name="TextBox 8">
             <a:extLst>
               <a:ext uri="{FF2B5EF4-FFF2-40B4-BE49-F238E27FC236}">
-                <ns2:creationId id="{37A94EE7-D3B6-AC25-503E-E6C0EE1F179B}"/>
+                <a16:creationId id="{37A94EE7-D3B6-AC25-503E-E6C0EE1F179B}"/>
               </a:ext>
             </a:extLst>
           </p:cNvPr>
@@ -25561,7 +25501,7 @@
           <p:cNvPr id="11" name="TextBox 10">
             <a:extLst>
               <a:ext uri="{FF2B5EF4-FFF2-40B4-BE49-F238E27FC236}">
-                <ns2:creationId id="{C80380D5-790B-3854-4D6A-3811EF0E2829}"/>
+                <a16:creationId id="{C80380D5-790B-3854-4D6A-3811EF0E2829}"/>
               </a:ext>
             </a:extLst>
           </p:cNvPr>
@@ -25620,7 +25560,7 @@
     </p:spTree>
     <p:extLst>
       <p:ext uri="{BB962C8B-B14F-4D97-AF65-F5344CB8AC3E}">
-        <p14:creationId val="2347082703"/>
+        <ns3:creationId val="2347082703"/>
       </p:ext>
     </p:extLst>
   </p:cSld>
@@ -25631,7 +25571,7 @@
 </file>
 
 <file path=ppt/slides/slide8.xml><?xml version="1.0" encoding="utf-8"?>
-<p:sld xmlns:a="http://schemas.openxmlformats.org/drawingml/2006/main" xmlns:ns2="http://schemas.microsoft.com/office/drawing/2014/main" xmlns:p="http://schemas.openxmlformats.org/presentationml/2006/main" xmlns:p14="http://schemas.microsoft.com/office/powerpoint/2010/main">
+<p:sld xmlns:a="http://schemas.openxmlformats.org/drawingml/2006/main" xmlns:a16="http://schemas.microsoft.com/office/drawing/2014/main" xmlns:ns3="http://schemas.microsoft.com/office/powerpoint/2010/main" xmlns:p="http://schemas.openxmlformats.org/presentationml/2006/main">
   <p:cSld>
     <p:bg>
       <p:bgPr>
@@ -25657,13 +25597,7 @@
       </p:grpSpPr>
       <p:sp>
         <p:nvSpPr>
-          <p:cNvPr id="11" name="Footer Placeholder 3">
-            <a:extLst>
-              <a:ext uri="{FF2B5EF4-FFF2-40B4-BE49-F238E27FC236}">
-                <ns2:creationId id="{7C94C084-4476-0C4E-B896-CB3AC89A47F6}"/>
-              </a:ext>
-            </a:extLst>
-          </p:cNvPr>
+          <p:cNvPr id="11" name="Footer Placeholder 3"/>
           <p:cNvSpPr txBox="1">
             <a:spLocks/>
           </p:cNvSpPr>
@@ -25822,7 +25756,7 @@
           <p:cNvPr id="6" name="Freeform 5">
             <a:extLst>
               <a:ext uri="{FF2B5EF4-FFF2-40B4-BE49-F238E27FC236}">
-                <ns2:creationId id="{A25DAE9F-BED8-3A57-CD97-EDBD9F0EDD69}"/>
+                <a16:creationId id="{A25DAE9F-BED8-3A57-CD97-EDBD9F0EDD69}"/>
               </a:ext>
             </a:extLst>
           </p:cNvPr>
@@ -26418,7 +26352,7 @@
           <p:cNvPr id="7" name="Freeform 6">
             <a:extLst>
               <a:ext uri="{FF2B5EF4-FFF2-40B4-BE49-F238E27FC236}">
-                <ns2:creationId id="{3F833B4A-7F30-F940-BD46-AAD4F1EC84C2}"/>
+                <a16:creationId id="{3F833B4A-7F30-F940-BD46-AAD4F1EC84C2}"/>
               </a:ext>
             </a:extLst>
           </p:cNvPr>
@@ -27280,7 +27214,7 @@
           <p:cNvPr id="9" name="Oval 8">
             <a:extLst>
               <a:ext uri="{FF2B5EF4-FFF2-40B4-BE49-F238E27FC236}">
-                <ns2:creationId id="{C1204F89-67E6-2520-9CB7-C11AD96E6395}"/>
+                <a16:creationId id="{C1204F89-67E6-2520-9CB7-C11AD96E6395}"/>
               </a:ext>
             </a:extLst>
           </p:cNvPr>
@@ -27332,7 +27266,7 @@
           <p:cNvPr id="10" name="Oval 9">
             <a:extLst>
               <a:ext uri="{FF2B5EF4-FFF2-40B4-BE49-F238E27FC236}">
-                <ns2:creationId id="{C20E3F99-5E93-DCB1-5438-4A8D42DA25E5}"/>
+                <a16:creationId id="{C20E3F99-5E93-DCB1-5438-4A8D42DA25E5}"/>
               </a:ext>
             </a:extLst>
           </p:cNvPr>
@@ -27384,7 +27318,7 @@
           <p:cNvPr id="12" name="Straight Connector 11">
             <a:extLst>
               <a:ext uri="{FF2B5EF4-FFF2-40B4-BE49-F238E27FC236}">
-                <ns2:creationId id="{981DDF22-4015-B62D-15E4-53D55BFB533D}"/>
+                <a16:creationId id="{981DDF22-4015-B62D-15E4-53D55BFB533D}"/>
               </a:ext>
             </a:extLst>
           </p:cNvPr>
@@ -27430,7 +27364,7 @@
           <p:cNvPr id="13" name="Oval 12">
             <a:extLst>
               <a:ext uri="{FF2B5EF4-FFF2-40B4-BE49-F238E27FC236}">
-                <ns2:creationId id="{54ADE077-5C44-29DF-0132-D3CEA80605F9}"/>
+                <a16:creationId id="{54ADE077-5C44-29DF-0132-D3CEA80605F9}"/>
               </a:ext>
             </a:extLst>
           </p:cNvPr>
@@ -27485,7 +27419,7 @@
           <p:cNvPr id="14" name="Oval 13">
             <a:extLst>
               <a:ext uri="{FF2B5EF4-FFF2-40B4-BE49-F238E27FC236}">
-                <ns2:creationId id="{00672CFA-7F0E-A719-10B0-29AE35096E30}"/>
+                <a16:creationId id="{00672CFA-7F0E-A719-10B0-29AE35096E30}"/>
               </a:ext>
             </a:extLst>
           </p:cNvPr>
@@ -27537,7 +27471,7 @@
           <p:cNvPr id="15" name="TextBox 14">
             <a:extLst>
               <a:ext uri="{FF2B5EF4-FFF2-40B4-BE49-F238E27FC236}">
-                <ns2:creationId id="{D484D63C-CCDB-0923-AC0F-BC6DCC85B056}"/>
+                <a16:creationId id="{D484D63C-CCDB-0923-AC0F-BC6DCC85B056}"/>
               </a:ext>
             </a:extLst>
           </p:cNvPr>
@@ -27597,7 +27531,7 @@
           <p:cNvPr id="16" name="TextBox 15">
             <a:extLst>
               <a:ext uri="{FF2B5EF4-FFF2-40B4-BE49-F238E27FC236}">
-                <ns2:creationId id="{2FB06A3B-C8A7-7640-2EE9-203EA6BD717B}"/>
+                <a16:creationId id="{2FB06A3B-C8A7-7640-2EE9-203EA6BD717B}"/>
               </a:ext>
             </a:extLst>
           </p:cNvPr>
@@ -27644,7 +27578,7 @@
           <p:cNvPr id="19" name="TextBox 18">
             <a:extLst>
               <a:ext uri="{FF2B5EF4-FFF2-40B4-BE49-F238E27FC236}">
-                <ns2:creationId id="{499A2693-D878-2253-1439-ED993C1F2AD5}"/>
+                <a16:creationId id="{499A2693-D878-2253-1439-ED993C1F2AD5}"/>
               </a:ext>
             </a:extLst>
           </p:cNvPr>
@@ -27691,7 +27625,7 @@
           <p:cNvPr id="20" name="TextBox 19">
             <a:extLst>
               <a:ext uri="{FF2B5EF4-FFF2-40B4-BE49-F238E27FC236}">
-                <ns2:creationId id="{328F02D2-95BB-4767-7DBC-B06A0A6115E7}"/>
+                <a16:creationId id="{328F02D2-95BB-4767-7DBC-B06A0A6115E7}"/>
               </a:ext>
             </a:extLst>
           </p:cNvPr>
@@ -27738,7 +27672,7 @@
           <p:cNvPr id="21" name="TextBox 20">
             <a:extLst>
               <a:ext uri="{FF2B5EF4-FFF2-40B4-BE49-F238E27FC236}">
-                <ns2:creationId id="{5C915F9D-42F7-1C6D-E114-D633D6E4C109}"/>
+                <a16:creationId id="{5C915F9D-42F7-1C6D-E114-D633D6E4C109}"/>
               </a:ext>
             </a:extLst>
           </p:cNvPr>
@@ -27785,7 +27719,7 @@
           <p:cNvPr id="22" name="TextBox 21">
             <a:extLst>
               <a:ext uri="{FF2B5EF4-FFF2-40B4-BE49-F238E27FC236}">
-                <ns2:creationId id="{82FA558D-A9BC-01CE-74CD-F383AA8AFB6C}"/>
+                <a16:creationId id="{82FA558D-A9BC-01CE-74CD-F383AA8AFB6C}"/>
               </a:ext>
             </a:extLst>
           </p:cNvPr>
@@ -27832,7 +27766,7 @@
           <p:cNvPr id="25" name="Rectangle 24">
             <a:extLst>
               <a:ext uri="{FF2B5EF4-FFF2-40B4-BE49-F238E27FC236}">
-                <ns2:creationId id="{B4DF9014-6E71-4887-15FC-288C0BE2E472}"/>
+                <a16:creationId id="{B4DF9014-6E71-4887-15FC-288C0BE2E472}"/>
               </a:ext>
             </a:extLst>
           </p:cNvPr>
@@ -27883,7 +27817,7 @@
           <p:cNvPr id="2" name="Group 1">
             <a:extLst>
               <a:ext uri="{FF2B5EF4-FFF2-40B4-BE49-F238E27FC236}">
-                <ns2:creationId id="{8513F8A2-0C1C-FA83-EB1D-12942054ECC6}"/>
+                <a16:creationId id="{8513F8A2-0C1C-FA83-EB1D-12942054ECC6}"/>
               </a:ext>
             </a:extLst>
           </p:cNvPr>
@@ -27903,7 +27837,7 @@
             <p:cNvPr id="3" name="Straight Arrow Connector 2">
               <a:extLst>
                 <a:ext uri="{FF2B5EF4-FFF2-40B4-BE49-F238E27FC236}">
-                  <ns2:creationId id="{F0E8E829-2926-9AC8-8FBE-CD87D209F5BD}"/>
+                  <a16:creationId id="{F0E8E829-2926-9AC8-8FBE-CD87D209F5BD}"/>
                 </a:ext>
               </a:extLst>
             </p:cNvPr>
@@ -27947,7 +27881,7 @@
             <p:cNvPr id="4" name="Straight Arrow Connector 3">
               <a:extLst>
                 <a:ext uri="{FF2B5EF4-FFF2-40B4-BE49-F238E27FC236}">
-                  <ns2:creationId id="{D50F6F6C-E0DD-959D-833A-36F07808AC1D}"/>
+                  <a16:creationId id="{D50F6F6C-E0DD-959D-833A-36F07808AC1D}"/>
                 </a:ext>
               </a:extLst>
             </p:cNvPr>
@@ -27991,7 +27925,7 @@
             <p:cNvPr id="5" name="TextBox 4">
               <a:extLst>
                 <a:ext uri="{FF2B5EF4-FFF2-40B4-BE49-F238E27FC236}">
-                  <ns2:creationId id="{EDB020C7-9F2F-9DAE-DC6F-0F4AB0106806}"/>
+                  <a16:creationId id="{EDB020C7-9F2F-9DAE-DC6F-0F4AB0106806}"/>
                 </a:ext>
               </a:extLst>
             </p:cNvPr>
@@ -28056,7 +27990,7 @@
             <p:cNvPr id="8" name="TextBox 7">
               <a:extLst>
                 <a:ext uri="{FF2B5EF4-FFF2-40B4-BE49-F238E27FC236}">
-                  <ns2:creationId id="{9833DACC-1D55-AD72-1025-41BEFCBBEFC1}"/>
+                  <a16:creationId id="{9833DACC-1D55-AD72-1025-41BEFCBBEFC1}"/>
                 </a:ext>
               </a:extLst>
             </p:cNvPr>
@@ -28116,7 +28050,7 @@
     </p:spTree>
     <p:extLst>
       <p:ext uri="{BB962C8B-B14F-4D97-AF65-F5344CB8AC3E}">
-        <p14:creationId val="2649229030"/>
+        <ns3:creationId val="2649229030"/>
       </p:ext>
     </p:extLst>
   </p:cSld>
@@ -28127,7 +28061,7 @@
 </file>
 
 <file path=ppt/slides/slide9.xml><?xml version="1.0" encoding="utf-8"?>
-<p:sld xmlns:a="http://schemas.openxmlformats.org/drawingml/2006/main" xmlns:ns2="http://schemas.microsoft.com/office/drawing/2014/main" xmlns:p="http://schemas.openxmlformats.org/presentationml/2006/main" xmlns:p14="http://schemas.microsoft.com/office/powerpoint/2010/main">
+<p:sld xmlns:a="http://schemas.openxmlformats.org/drawingml/2006/main" xmlns:a16="http://schemas.microsoft.com/office/drawing/2014/main" xmlns:ns3="http://schemas.microsoft.com/office/powerpoint/2010/main" xmlns:p="http://schemas.openxmlformats.org/presentationml/2006/main">
   <p:cSld>
     <p:bg>
       <p:bgPr>
@@ -28156,7 +28090,7 @@
           <p:cNvPr id="4" name="Freeform 3">
             <a:extLst>
               <a:ext uri="{FF2B5EF4-FFF2-40B4-BE49-F238E27FC236}">
-                <ns2:creationId id="{557E8D0E-7530-B118-1DC6-82906B4F6D15}"/>
+                <a16:creationId id="{557E8D0E-7530-B118-1DC6-82906B4F6D15}"/>
               </a:ext>
             </a:extLst>
           </p:cNvPr>
@@ -29117,13 +29051,7 @@
       </p:sp>
       <p:sp>
         <p:nvSpPr>
-          <p:cNvPr id="5" name="Footer Placeholder 3">
-            <a:extLst>
-              <a:ext uri="{FF2B5EF4-FFF2-40B4-BE49-F238E27FC236}">
-                <ns2:creationId id="{668F77D6-DFDA-5A46-8DF1-47F6A167C2B1}"/>
-              </a:ext>
-            </a:extLst>
-          </p:cNvPr>
+          <p:cNvPr id="5" name="Footer Placeholder 3"/>
           <p:cNvSpPr txBox="1">
             <a:spLocks/>
           </p:cNvSpPr>
@@ -29282,7 +29210,7 @@
           <p:cNvPr id="16" name="Freeform 15">
             <a:extLst>
               <a:ext uri="{FF2B5EF4-FFF2-40B4-BE49-F238E27FC236}">
-                <ns2:creationId id="{226B2D26-F692-894E-9B09-F57FBB5CB2A3}"/>
+                <a16:creationId id="{226B2D26-F692-894E-9B09-F57FBB5CB2A3}"/>
               </a:ext>
             </a:extLst>
           </p:cNvPr>
@@ -30165,7 +30093,7 @@
           <p:cNvPr id="19" name="Oval 18">
             <a:extLst>
               <a:ext uri="{FF2B5EF4-FFF2-40B4-BE49-F238E27FC236}">
-                <ns2:creationId id="{0592434B-85D0-0A41-95DD-A29D1D3E92A7}"/>
+                <a16:creationId id="{0592434B-85D0-0A41-95DD-A29D1D3E92A7}"/>
               </a:ext>
             </a:extLst>
           </p:cNvPr>
@@ -30246,7 +30174,7 @@
           <p:cNvPr id="22" name="TextBox 21">
             <a:extLst>
               <a:ext uri="{FF2B5EF4-FFF2-40B4-BE49-F238E27FC236}">
-                <ns2:creationId id="{32F7BF73-EB2C-9D42-97FB-D39FDCC924EB}"/>
+                <a16:creationId id="{32F7BF73-EB2C-9D42-97FB-D39FDCC924EB}"/>
               </a:ext>
             </a:extLst>
           </p:cNvPr>
@@ -30325,7 +30253,7 @@
           <p:cNvPr id="32" name="Group 31">
             <a:extLst>
               <a:ext uri="{FF2B5EF4-FFF2-40B4-BE49-F238E27FC236}">
-                <ns2:creationId id="{A120AE69-6043-195E-40C7-43C019B9D3A9}"/>
+                <a16:creationId id="{A120AE69-6043-195E-40C7-43C019B9D3A9}"/>
               </a:ext>
             </a:extLst>
           </p:cNvPr>
@@ -30345,7 +30273,7 @@
             <p:cNvPr id="24" name="Straight Connector 23">
               <a:extLst>
                 <a:ext uri="{FF2B5EF4-FFF2-40B4-BE49-F238E27FC236}">
-                  <ns2:creationId id="{3A19E039-1667-254C-809A-972BBA46D65C}"/>
+                  <a16:creationId id="{3A19E039-1667-254C-809A-972BBA46D65C}"/>
                 </a:ext>
               </a:extLst>
             </p:cNvPr>
@@ -30391,7 +30319,7 @@
             <p:cNvPr id="2" name="Oval 1">
               <a:extLst>
                 <a:ext uri="{FF2B5EF4-FFF2-40B4-BE49-F238E27FC236}">
-                  <ns2:creationId id="{38418338-F1E6-81D9-6A8C-D7EB7AA9DDA2}"/>
+                  <a16:creationId id="{38418338-F1E6-81D9-6A8C-D7EB7AA9DDA2}"/>
                 </a:ext>
               </a:extLst>
             </p:cNvPr>
@@ -30476,7 +30404,7 @@
           <p:cNvPr id="29" name="TextBox 28">
             <a:extLst>
               <a:ext uri="{FF2B5EF4-FFF2-40B4-BE49-F238E27FC236}">
-                <ns2:creationId id="{2C329E1C-5E54-9E3C-A6FA-AE50E16EEB85}"/>
+                <a16:creationId id="{2C329E1C-5E54-9E3C-A6FA-AE50E16EEB85}"/>
               </a:ext>
             </a:extLst>
           </p:cNvPr>
@@ -30555,7 +30483,7 @@
           <p:cNvPr id="40" name="Group 39">
             <a:extLst>
               <a:ext uri="{FF2B5EF4-FFF2-40B4-BE49-F238E27FC236}">
-                <ns2:creationId id="{C105AAA1-FA00-79D8-70E9-DB832351B5E2}"/>
+                <a16:creationId id="{C105AAA1-FA00-79D8-70E9-DB832351B5E2}"/>
               </a:ext>
             </a:extLst>
           </p:cNvPr>
@@ -30575,7 +30503,7 @@
             <p:cNvPr id="41" name="Straight Connector 40">
               <a:extLst>
                 <a:ext uri="{FF2B5EF4-FFF2-40B4-BE49-F238E27FC236}">
-                  <ns2:creationId id="{48D05E5C-4059-6EC7-1299-E52A65F46E3D}"/>
+                  <a16:creationId id="{48D05E5C-4059-6EC7-1299-E52A65F46E3D}"/>
                 </a:ext>
               </a:extLst>
             </p:cNvPr>
@@ -30621,7 +30549,7 @@
             <p:cNvPr id="42" name="Oval 41">
               <a:extLst>
                 <a:ext uri="{FF2B5EF4-FFF2-40B4-BE49-F238E27FC236}">
-                  <ns2:creationId id="{8174E055-9EC2-40B6-B317-43A23011EC49}"/>
+                  <a16:creationId id="{8174E055-9EC2-40B6-B317-43A23011EC49}"/>
                 </a:ext>
               </a:extLst>
             </p:cNvPr>
@@ -30706,7 +30634,7 @@
           <p:cNvPr id="28" name="TextBox 27">
             <a:extLst>
               <a:ext uri="{FF2B5EF4-FFF2-40B4-BE49-F238E27FC236}">
-                <ns2:creationId id="{B86BBAD0-86F6-0D58-180C-6EA1BDCC33FE}"/>
+                <a16:creationId id="{B86BBAD0-86F6-0D58-180C-6EA1BDCC33FE}"/>
               </a:ext>
             </a:extLst>
           </p:cNvPr>
@@ -30835,7 +30763,7 @@
           <p:cNvPr id="6" name="Oval 5">
             <a:extLst>
               <a:ext uri="{FF2B5EF4-FFF2-40B4-BE49-F238E27FC236}">
-                <ns2:creationId id="{AC0CFD16-199C-C379-61A7-C2D95EDE2034}"/>
+                <a16:creationId id="{AC0CFD16-199C-C379-61A7-C2D95EDE2034}"/>
               </a:ext>
             </a:extLst>
           </p:cNvPr>
@@ -30887,7 +30815,7 @@
           <p:cNvPr id="7" name="TextBox 6">
             <a:extLst>
               <a:ext uri="{FF2B5EF4-FFF2-40B4-BE49-F238E27FC236}">
-                <ns2:creationId id="{74832E6C-887E-D39B-AAC8-6B87F8F0377B}"/>
+                <a16:creationId id="{74832E6C-887E-D39B-AAC8-6B87F8F0377B}"/>
               </a:ext>
             </a:extLst>
           </p:cNvPr>
@@ -30934,7 +30862,7 @@
           <p:cNvPr id="9" name="TextBox 8">
             <a:extLst>
               <a:ext uri="{FF2B5EF4-FFF2-40B4-BE49-F238E27FC236}">
-                <ns2:creationId id="{3FBBB3C0-9EF9-2269-F804-566738A12135}"/>
+                <a16:creationId id="{3FBBB3C0-9EF9-2269-F804-566738A12135}"/>
               </a:ext>
             </a:extLst>
           </p:cNvPr>
@@ -30981,7 +30909,7 @@
           <p:cNvPr id="10" name="TextBox 9">
             <a:extLst>
               <a:ext uri="{FF2B5EF4-FFF2-40B4-BE49-F238E27FC236}">
-                <ns2:creationId id="{5AD88C91-2B9D-6C66-4521-C91A0EBE16F1}"/>
+                <a16:creationId id="{5AD88C91-2B9D-6C66-4521-C91A0EBE16F1}"/>
               </a:ext>
             </a:extLst>
           </p:cNvPr>
@@ -31028,7 +30956,7 @@
           <p:cNvPr id="11" name="Rectangle 10">
             <a:extLst>
               <a:ext uri="{FF2B5EF4-FFF2-40B4-BE49-F238E27FC236}">
-                <ns2:creationId id="{408E88E8-1AC1-3859-ED6E-998C354C18AF}"/>
+                <a16:creationId id="{408E88E8-1AC1-3859-ED6E-998C354C18AF}"/>
               </a:ext>
             </a:extLst>
           </p:cNvPr>
@@ -31079,7 +31007,7 @@
           <p:cNvPr id="14" name="Group 13">
             <a:extLst>
               <a:ext uri="{FF2B5EF4-FFF2-40B4-BE49-F238E27FC236}">
-                <ns2:creationId id="{7A05C4D2-699B-5F84-92AE-09238BDBF4E8}"/>
+                <a16:creationId id="{7A05C4D2-699B-5F84-92AE-09238BDBF4E8}"/>
               </a:ext>
             </a:extLst>
           </p:cNvPr>
@@ -31099,7 +31027,7 @@
             <p:cNvPr id="15" name="Straight Arrow Connector 14">
               <a:extLst>
                 <a:ext uri="{FF2B5EF4-FFF2-40B4-BE49-F238E27FC236}">
-                  <ns2:creationId id="{6F7FA685-0220-0300-5C81-7977AB43778D}"/>
+                  <a16:creationId id="{6F7FA685-0220-0300-5C81-7977AB43778D}"/>
                 </a:ext>
               </a:extLst>
             </p:cNvPr>
@@ -31143,7 +31071,7 @@
             <p:cNvPr id="17" name="Straight Arrow Connector 16">
               <a:extLst>
                 <a:ext uri="{FF2B5EF4-FFF2-40B4-BE49-F238E27FC236}">
-                  <ns2:creationId id="{8DAAADDE-3685-65B3-881A-0143943C0267}"/>
+                  <a16:creationId id="{8DAAADDE-3685-65B3-881A-0143943C0267}"/>
                 </a:ext>
               </a:extLst>
             </p:cNvPr>
@@ -31187,7 +31115,7 @@
             <p:cNvPr id="18" name="TextBox 17">
               <a:extLst>
                 <a:ext uri="{FF2B5EF4-FFF2-40B4-BE49-F238E27FC236}">
-                  <ns2:creationId id="{BAA0C0F5-147D-A6B2-DBB6-6DCB0FFF6BAE}"/>
+                  <a16:creationId id="{BAA0C0F5-147D-A6B2-DBB6-6DCB0FFF6BAE}"/>
                 </a:ext>
               </a:extLst>
             </p:cNvPr>
@@ -31252,7 +31180,7 @@
             <p:cNvPr id="20" name="TextBox 19">
               <a:extLst>
                 <a:ext uri="{FF2B5EF4-FFF2-40B4-BE49-F238E27FC236}">
-                  <ns2:creationId id="{84C36D57-9425-3680-6F8D-295F2518BF54}"/>
+                  <a16:creationId id="{84C36D57-9425-3680-6F8D-295F2518BF54}"/>
                 </a:ext>
               </a:extLst>
             </p:cNvPr>
@@ -31312,7 +31240,7 @@
     </p:spTree>
     <p:extLst>
       <p:ext uri="{BB962C8B-B14F-4D97-AF65-F5344CB8AC3E}">
-        <p14:creationId val="1541260098"/>
+        <ns3:creationId val="1541260098"/>
       </p:ext>
     </p:extLst>
   </p:cSld>
